--- a/vi/files/slides/Session_6_VN.pptx
+++ b/vi/files/slides/Session_6_VN.pptx
@@ -13261,7 +13261,7 @@
                 <a:latin typeface="Segoe UI"/>
                 <a:cs typeface="Segoe UI"/>
               </a:rPr>
-              <a:t>6.2 [Cấp độ 2] So sánh các nhóm trong bộ dữ liệu  |  20 phút</a:t>
+              <a:t>6.2 So sánh các nhóm trong bộ dữ liệu  |  20 phút</a:t>
             </a:r>
           </a:p>
         </p:txBody>
@@ -20657,7 +20657,7 @@
                 <a:latin typeface="Segoe UI"/>
                 <a:cs typeface="Segoe UI"/>
               </a:rPr>
-              <a:t>6.4 [Cấp độ 2] Mô hình hóa bộ dữ liệu khóa học  |  25 phút</a:t>
+              <a:t>6.4 Mô hình hóa bộ dữ liệu khóa học  |  25 phút</a:t>
             </a:r>
           </a:p>
         </p:txBody>

--- a/vi/files/slides/Session_6_VN.pptx
+++ b/vi/files/slides/Session_6_VN.pptx
@@ -4866,7 +4866,7 @@
           <a:p>
             <a:r>
               <a:rPr lang="en-US" sz="1400" b="0" dirty="0"/>
-              <a:t>Kế hoạch dữ liệu thiếu: mức thiếu dự kiến và vì sao (tư duy MCAR / MAR / MNAR), phòng ngừa (Buổi 5), cách xử lý chính và một phân tích độ nhạy, như FLUID-ICU đã làm.</a:t>
+              <a:t>Kế hoạch dữ liệu thiếu: mức thiếu dự kiến và vì sao (tư duy MCAR / MAR / MNAR), phòng ngừa (Buổi 5), và cách báo cáo dữ liệu thiếu (bao nhiêu, ở ai). Đa phép gán và phân tích độ nhạy thuộc Cấp độ 2.</a:t>
             </a:r>
           </a:p>
         </p:txBody>
@@ -7179,7 +7179,7 @@
           <a:p>
             <a:r>
               <a:rPr lang="en-US" sz="1400" b="0" dirty="0"/>
-              <a:t>Kế hoạch: tất cả những điều này đưa vào SAP và vào Phần 3 đề cương hôm nay: mức thiếu dự kiến, phòng ngừa (5.1), cách xử lý chính, một phân tích độ nhạy.</a:t>
+              <a:t>Kế hoạch: tất cả những điều này đưa vào SAP và vào Phần 3 đề cương hôm nay: mức thiếu dự kiến, phòng ngừa (5.1), và cách báo cáo dữ liệu thiếu.</a:t>
             </a:r>
           </a:p>
           <a:p>
@@ -24639,7 +24639,7 @@
                 <a:latin typeface="Segoe UI"/>
                 <a:cs typeface="Segoe UI"/>
               </a:rPr>
-              <a:t>Phân tích độ nhạy dữ liệu thiếu có thay đổi câu trả lời không?</a:t>
+              <a:t>Xem kết quả đa phép gán trong gói kết quả: có gần kết quả chính? (chi tiết ở Cấp độ 2)</a:t>
             </a:r>
           </a:p>
           <a:p>
@@ -26073,7 +26073,7 @@
                 <a:latin typeface="Segoe UI"/>
                 <a:cs typeface="Segoe UI"/>
               </a:rPr>
-              <a:t>Kế hoạch dữ liệu thiếu: dự kiến, phòng ngừa, cách xử lý chính, một phân tích độ nhạy (7 phút)</a:t>
+              <a:t>Kế hoạch dữ liệu thiếu: dự kiến, phòng ngừa, cách báo cáo dữ liệu thiếu (7 phút)</a:t>
             </a:r>
           </a:p>
         </p:txBody>
@@ -35332,7 +35332,7 @@
                 <a:latin typeface="Segoe UI"/>
                 <a:cs typeface="Segoe UI"/>
               </a:rPr>
-              <a:t>Độ nhạy</a:t>
+              <a:t>Độ nhạy (Cấp độ 2)</a:t>
             </a:r>
           </a:p>
         </p:txBody>
@@ -35402,7 +35402,7 @@
                 <a:latin typeface="Segoe UI"/>
                 <a:cs typeface="Segoe UI"/>
               </a:rPr>
-              <a:t>Kịch bản tốt nhất / xấu nhất</a:t>
+              <a:t>Script mẫu: 05_missing.R</a:t>
             </a:r>
           </a:p>
           <a:p>
@@ -35423,7 +35423,7 @@
                 <a:latin typeface="Segoe UI"/>
                 <a:cs typeface="Segoe UI"/>
               </a:rPr>
-              <a:t>Cùng kết luận?</a:t>
+              <a:t>Thực hành ở Cấp độ 2</a:t>
             </a:r>
           </a:p>
         </p:txBody>

--- a/vi/files/slides/Session_6_VN.pptx
+++ b/vi/files/slides/Session_6_VN.pptx
@@ -750,7 +750,7 @@
           <a:p>
             <a:r>
               <a:rPr lang="en-US" sz="1400" b="0" dirty="0"/>
-              <a:t>Chào mừng trở lại. Hôm qua (Buổi 5) chúng ta đã thu thập, làm sạch và mô tả dữ liệu. Hôm nay chúng ta PHÂN TÍCH: một mẫu trả lời câu hỏi về quần thể như thế nào, và đọc các con số máy tính đưa ra ra sao.</a:t>
+              <a:t>Chào mừng trở lại. Thứ Bảy tuần trước (Buổi 5) chúng ta đã thu thập, làm sạch và mô tả dữ liệu. Hôm nay chúng ta PHÂN TÍCH: một mẫu trả lời câu hỏi về quần thể như thế nào, và đọc các con số máy tính đưa ra ra sao.</a:t>
             </a:r>
           </a:p>
           <a:p>
@@ -762,7 +762,7 @@
           <a:p>
             <a:r>
               <a:rPr lang="en-US" sz="1400" b="0" dirty="0"/>
-              <a:t>Bộ dữ liệu khóa học FLUID-ICU quay lại hai lần: ở 6.2 (so sánh các nhóm) và 6.4 (mô hình, sống còn và dữ liệu thiếu). Mỗi nhóm diễn giải gói kết quả của mình; các diễn giải đó trở thành phần Kết quả của bản thảo ở Cuối tuần 4.</a:t>
+              <a:t>Bộ dữ liệu khóa học FLUID-ICU quay lại hai lần: ở 6.2 (so sánh các nhóm) và 6.4 (mô hình, sống còn và dữ liệu thiếu). Mỗi nhóm diễn giải gói kết quả của mình; các diễn giải đó trở thành phần Kết quả của bản thảo ở Tuần 7-8.</a:t>
             </a:r>
           </a:p>
           <a:p>
@@ -3615,7 +3615,7 @@
           <a:p>
             <a:r>
               <a:rPr lang="en-US" sz="1400" b="0" dirty="0"/>
-              <a:t>Thông điệp chính: đây là phần 6.3 (mô hình) áp dụng cho FLUID-ICU, và là thành quả của cả cuối tuần: anh chị sẽ THẤY nhiễu do chỉ định làm một tỉ số chênh nhỏ lại.</a:t>
+              <a:t>Thông điệp chính: đây là phần 6.3 (mô hình) áp dụng cho FLUID-ICU, và là thành quả của cả Tuần 5-6: anh chị sẽ THẤY nhiễu do chỉ định làm một tỉ số chênh nhỏ lại.</a:t>
             </a:r>
           </a:p>
         </p:txBody>
@@ -5199,7 +5199,7 @@
           <a:p>
             <a:r>
               <a:rPr lang="en-US" sz="1400" b="0" dirty="0"/>
-              <a:t>Cuối tuần tới: viết bài (Phương pháp và Kết quả ở Buổi 7, phần còn lại và công bố ở Buổi 8).</a:t>
+              <a:t>Hai thứ Bảy tới: viết bài (Phương pháp và Kết quả ở Buổi 7, phần còn lại và công bố ở Buổi 8).</a:t>
             </a:r>
           </a:p>
         </p:txBody>
@@ -10760,7 +10760,7 @@
                 <a:latin typeface="Segoe UI"/>
                 <a:cs typeface="Segoe UI"/>
               </a:rPr>
-              <a:t>Cuối tuần 3 · Chủ Nhật</a:t>
+              <a:t>Tuần 6 · Thứ Bảy</a:t>
             </a:r>
           </a:p>
           <a:p>
@@ -28213,7 +28213,7 @@
                 <a:latin typeface="Segoe UI"/>
                 <a:cs typeface="Segoe UI"/>
               </a:rPr>
-              <a:t>Cuối tuần tới</a:t>
+              <a:t>Tuần 7-8</a:t>
             </a:r>
           </a:p>
           <a:p>

--- a/vi/files/slides/Session_6_VN.pptx
+++ b/vi/files/slides/Session_6_VN.pptx
@@ -4725,19 +4725,19 @@
           <a:p>
             <a:r>
               <a:rPr lang="en-US" sz="1400" b="0" dirty="0"/>
-              <a:t>Q1: OR thô 2.49 (1.70 đến 3.70) -&gt; hiệu chỉnh 1.62 (1.02 đến 2.59); HR Cox hiệu chỉnh 1.46 (1.00 đến 2.13); OR hiệu chỉnh với đa phép gán 1.70 (1.09 đến 2.64).</a:t>
+              <a:t>Q1: OR thô 2.49 (1.70 đến 3.70), hiệu chỉnh 1.62 (1.02 đến 2.59); HR Cox hiệu chỉnh 1.46 (1.00 đến 2.13); OR hiệu chỉnh với đa phép gán 1.70 (1.09 đến 2.64).</a:t>
             </a:r>
           </a:p>
           <a:p>
             <a:r>
               <a:rPr lang="en-US" sz="1400" b="0" dirty="0"/>
-              <a:t>Q2: OR AKI mỗi 10 ml/kg thô 1.37 (1.27 đến 1.47) -&gt; hiệu chỉnh 1.27 (1.16 đến 1.40).</a:t>
+              <a:t>Q2: OR AKI mỗi 10 ml/kg thô 1.37 (1.27 đến 1.47), hiệu chỉnh 1.27 (1.16 đến 1.40).</a:t>
             </a:r>
           </a:p>
           <a:p>
             <a:r>
               <a:rPr lang="en-US" sz="1400" b="0" dirty="0"/>
-              <a:t>Q3: số ngày không thở máy mỗi 10 ml/kg thô -1.48 (-1.84 đến -1.13) -&gt; hiệu chỉnh -0.61 (-1.00 đến -0.21) ngày.</a:t>
+              <a:t>Q3: số ngày không thở máy mỗi 10 ml/kg thô -1.48 (-1.84 đến -1.13), hiệu chỉnh -0.61 (-1.00 đến -0.21) ngày.</a:t>
             </a:r>
           </a:p>
           <a:p>
@@ -4749,7 +4749,7 @@
           <a:p>
             <a:r>
               <a:rPr lang="en-US" sz="1400" b="0" dirty="0"/>
-              <a:t>Q5: tỉ số trung bình nhân thời gian nằm ICU thô 1.50 (1.34 đến 1.68) -&gt; hiệu chỉnh 1.24 (1.10 đến 1.39).</a:t>
+              <a:t>Q5: tỉ số trung bình nhân thời gian nằm ICU thô 1.50 (1.34 đến 1.68), hiệu chỉnh 1.24 (1.10 đến 1.39).</a:t>
             </a:r>
           </a:p>
           <a:p>
@@ -6471,7 +6471,7 @@
           <a:p>
             <a:r>
               <a:rPr lang="en-US" sz="1400" b="0" dirty="0"/>
-              <a:t>Quy tắc: định trước một vài tương tác sẽ kiểm định, có lý do lâm sàng (lại là so sánh nhiều lần!), và không kết luận khác biệt giữa phân nhóm chỉ vì một phân nhóm có p &lt; 0.05 còn nhóm kia thì không; hãy kiểm định chính số hạng tương tác.</a:t>
+              <a:t>Quy tắc: định trước một vài tương tác sẽ kiểm định, có lý do lâm sàng (lại là so sánh nhiều lần), và không kết luận khác biệt giữa phân nhóm chỉ vì một phân nhóm có p &lt; 0.05 còn nhóm kia thì không; hãy kiểm định chính số hạng tương tác.</a:t>
             </a:r>
           </a:p>
           <a:p>
@@ -7272,7 +7272,7 @@
           <a:p>
             <a:r>
               <a:rPr lang="en-US" sz="1400" b="0" dirty="0"/>
-              <a:t>Slide bản quyền - để trên màn hình khi học viên ra về.</a:t>
+              <a:t>Slide bản quyền. Để trên màn hình khi học viên ra về.</a:t>
             </a:r>
           </a:p>
         </p:txBody>
@@ -11205,7 +11205,7 @@
                 <a:latin typeface="Segoe UI"/>
                 <a:cs typeface="Segoe UI"/>
               </a:rPr>
-              <a:t>Hai trung bình: 70 so với 40 ml/kg, SD 35, power 80%, alpha 5% -&gt; 22 mỗi nhóm</a:t>
+              <a:t>Hai trung bình: 70 so với 40 ml/kg, SD 35, power 80%, alpha 5% → 22 mỗi nhóm</a:t>
             </a:r>
           </a:p>
           <a:p>
@@ -11236,7 +11236,7 @@
                 <a:latin typeface="Segoe UI"/>
                 <a:cs typeface="Segoe UI"/>
               </a:rPr>
-              <a:t>Hai tỉ lệ: tử vong 40% so với 30% -&gt; khoảng 356 mỗi nhóm</a:t>
+              <a:t>Hai tỉ lệ: tử vong 40% so với 30% → khoảng 356 mỗi nhóm</a:t>
             </a:r>
           </a:p>
           <a:p>
@@ -23702,7 +23702,7 @@
                 <a:latin typeface="Segoe UI"/>
                 <a:cs typeface="Segoe UI"/>
               </a:rPr>
-              <a:t>Lactat thiếu chủ yếu ở bệnh nhân nhẹ hơn: không phải MCAR; MAR là hợp lý.</a:t>
+              <a:t>Lactat thiếu chủ yếu ở bệnh nhân nhẹ hơn: không phải MCAR, nhưng MAR là hợp lý.</a:t>
             </a:r>
           </a:p>
         </p:txBody>
@@ -23977,7 +23977,7 @@
                 <a:latin typeface="Segoe UI"/>
                 <a:cs typeface="Segoe UI"/>
               </a:rPr>
-              <a:t>Khoảng 95/100 khoảng như vậy chứa giá trị thật; ta không biết là khoảng nào.</a:t>
+              <a:t>Khoảng 95/100 khoảng như vậy chứa giá trị thật. Ta không biết là khoảng nào.</a:t>
             </a:r>
           </a:p>
         </p:txBody>
@@ -28548,7 +28548,7 @@
                 <a:latin typeface="Segoe UI"/>
                 <a:cs typeface="Segoe UI"/>
               </a:rPr>
-              <a:t>Trang bổ sung — Buổi 6</a:t>
+              <a:t>Trang bổ sung: Buổi 6</a:t>
             </a:r>
           </a:p>
         </p:txBody>
@@ -30892,7 +30892,7 @@
                 <a:latin typeface="Segoe UI"/>
                 <a:cs typeface="Segoe UI"/>
               </a:rPr>
-              <a:t>Bổ sung: Biểu đồ rừng: ví dụ xuyên suốt trong một hình</a:t>
+              <a:t>Bổ sung: ví dụ xuyên suốt trong một biểu đồ rừng</a:t>
             </a:r>
           </a:p>
         </p:txBody>
@@ -34511,7 +34511,7 @@
                 <a:latin typeface="Segoe UI"/>
                 <a:cs typeface="Segoe UI"/>
               </a:rPr>
-              <a:t>Báo cáo độ lớn tác động kèm 95% CI; giá trị p chỉ là vai phụ.</a:t>
+              <a:t>Báo cáo độ lớn tác động kèm 95% CI. Giá trị p chỉ là vai phụ.</a:t>
             </a:r>
           </a:p>
         </p:txBody>

--- a/vi/files/slides/Session_6_VN.pptx
+++ b/vi/files/slides/Session_6_VN.pptx
@@ -3510,7 +3510,7 @@
           <a:p>
             <a:r>
               <a:rPr lang="en-US" sz="1400" b="0" dirty="0"/>
-              <a:t>Kiểm định log-rank so sánh toàn bộ hai đường cong và cho giá trị p (ở đây p = 0.040). Nó không cho biết độ lớn tác động; điều đó đến từ mô hình Cox (trang sau).</a:t>
+              <a:t>Kiểm định log-rank so sánh toàn bộ hai đường cong và cho giá trị p (ở đây p = 0.040). Nó không cho biết độ lớn tác động; điều đó đến từ mô hình Cox (mục 6.4).</a:t>
             </a:r>
           </a:p>
           <a:p>
@@ -5916,7 +5916,7 @@
           <a:p>
             <a:r>
               <a:rPr lang="en-US" sz="1400" b="0" dirty="0"/>
-              <a:t>Hỏi: nếu nghiên cứu 400 bệnh nhân thay vì 40, khoảng tin cậy sẽ thế nào? Dự kiến: hẹp hơn. Đó là trang tiếp theo.</a:t>
+              <a:t>Hỏi: nếu nghiên cứu 400 bệnh nhân thay vì 40, khoảng tin cậy sẽ thế nào? Dự kiến: hẹp hơn. Đó là trang 'Vũ điệu của các khoảng tin cậy' và trang cỡ mẫu trong mục 6.1.</a:t>
             </a:r>
           </a:p>
         </p:txBody>
@@ -6360,7 +6360,7 @@
           <a:p>
             <a:r>
               <a:rPr lang="en-US" sz="1400" b="0" dirty="0"/>
-              <a:t>Bên phải, nhân quả: truyền nhiều dịch ngày 1 đi kèm nằm ICU lâu hơn (r = 0.85). Nhưng trong từng nhóm mức độ nặng hoàn toàn không có liên quan; mức độ nặng chi phối cả hai. Đây lại là yếu tố gây nhiễu (Buổi 4), và là lý do ta hiệu chỉnh trong mô hình (các trang sau).</a:t>
+              <a:t>Bên phải, nhân quả: truyền nhiều dịch ngày 1 đi kèm nằm ICU lâu hơn (r = 0.85). Nhưng trong từng nhóm mức độ nặng hoàn toàn không có liên quan; mức độ nặng chi phối cả hai. Đây lại là yếu tố gây nhiễu (Buổi 4), và là lý do ta hiệu chỉnh trong mô hình (mục 6.3 và 6.4).</a:t>
             </a:r>
           </a:p>
           <a:p>
@@ -6453,7 +6453,7 @@
           <a:p>
             <a:r>
               <a:rPr lang="en-US" sz="1400" b="0" dirty="0"/>
-              <a:t>BỔ SUNG: Ý chính: hiệu chỉnh (các trang trước) giả định phơi nhiễm có cùng tác động ở mọi người. Tương tác (còn gọi là thay đổi tác động, Buổi 4) nghĩa là tác động khác nhau ở các nhóm khác nhau.</a:t>
+              <a:t>BỔ SUNG: Ý chính: hiệu chỉnh (mục 6.3 và 6.4) giả định phơi nhiễm có cùng tác động ở mọi người. Tương tác (còn gọi là thay đổi tác động, Buổi 4) nghĩa là tác động khác nhau ở các nhóm khác nhau.</a:t>
             </a:r>
           </a:p>
           <a:p>
@@ -10689,8 +10689,8 @@
                 <a:solidFill>
                   <a:srgbClr val="0D7377"/>
                 </a:solidFill>
-                <a:latin typeface="Segoe UI"/>
-                <a:cs typeface="Segoe UI"/>
+                <a:latin typeface="Arial"/>
+                <a:cs typeface="Arial"/>
               </a:rPr>
               <a:t>Buổi 6 · Phân tích: từ mẫu đến câu trả lời</a:t>
             </a:r>
@@ -10757,8 +10757,8 @@
                 <a:solidFill>
                   <a:srgbClr val="0070C0"/>
                 </a:solidFill>
-                <a:latin typeface="Segoe UI"/>
-                <a:cs typeface="Segoe UI"/>
+                <a:latin typeface="Arial"/>
+                <a:cs typeface="Arial"/>
               </a:rPr>
               <a:t>Tuần 6 · Thứ Bảy</a:t>
             </a:r>
@@ -10782,8 +10782,8 @@
                 <a:solidFill>
                   <a:srgbClr val="000000"/>
                 </a:solidFill>
-                <a:latin typeface="Segoe UI"/>
-                <a:cs typeface="Segoe UI"/>
+                <a:latin typeface="Arial"/>
+                <a:cs typeface="Arial"/>
               </a:rPr>
               <a:t>Câu hỏi ôn tập Buổi 5 (10 phút)</a:t>
             </a:r>
@@ -10801,8 +10801,8 @@
                 <a:solidFill>
                   <a:srgbClr val="000000"/>
                 </a:solidFill>
-                <a:latin typeface="Segoe UI"/>
-                <a:cs typeface="Segoe UI"/>
+                <a:latin typeface="Arial"/>
+                <a:cs typeface="Arial"/>
               </a:rPr>
               <a:t>6.1 Từ mẫu đến quần thể: CI, giá trị p, power, cỡ mẫu, chọn kiểm định</a:t>
             </a:r>
@@ -10820,8 +10820,8 @@
                 <a:solidFill>
                   <a:srgbClr val="000000"/>
                 </a:solidFill>
-                <a:latin typeface="Segoe UI"/>
-                <a:cs typeface="Segoe UI"/>
+                <a:latin typeface="Arial"/>
+                <a:cs typeface="Arial"/>
               </a:rPr>
               <a:t>6.2 So sánh các nhóm trong bộ dữ liệu khóa học (trình diễn R)</a:t>
             </a:r>
@@ -10839,8 +10839,8 @@
                 <a:solidFill>
                   <a:srgbClr val="000000"/>
                 </a:solidFill>
-                <a:latin typeface="Segoe UI"/>
-                <a:cs typeface="Segoe UI"/>
+                <a:latin typeface="Arial"/>
+                <a:cs typeface="Arial"/>
               </a:rPr>
               <a:t>6.3 Mối liên quan và mô hình: hồi quy, Kaplan-Meier và Cox</a:t>
             </a:r>
@@ -10858,8 +10858,8 @@
                 <a:solidFill>
                   <a:srgbClr val="000000"/>
                 </a:solidFill>
-                <a:latin typeface="Segoe UI"/>
-                <a:cs typeface="Segoe UI"/>
+                <a:latin typeface="Arial"/>
+                <a:cs typeface="Arial"/>
               </a:rPr>
               <a:t>6.4 Mô hình hóa bộ dữ liệu: OR hiệu chỉnh, HR Cox, dữ liệu thiếu, SAP</a:t>
             </a:r>
@@ -10877,8 +10877,8 @@
                 <a:solidFill>
                   <a:srgbClr val="000000"/>
                 </a:solidFill>
-                <a:latin typeface="Segoe UI"/>
-                <a:cs typeface="Segoe UI"/>
+                <a:latin typeface="Arial"/>
+                <a:cs typeface="Arial"/>
               </a:rPr>
               <a:t>Xây dựng đề cương 6: cỡ mẫu, kế hoạch phân tích, dữ liệu thiếu</a:t>
             </a:r>
@@ -10915,7 +10915,7 @@
                     <a:lumMod val="50000"/>
                   </a:schemeClr>
                 </a:solidFill>
-                <a:latin typeface="Verdana"/>
+                <a:latin typeface="Arial"/>
               </a:rPr>
               <a:t>Neudata | #ClearDataClearImpact</a:t>
             </a:r>
@@ -11045,8 +11045,8 @@
                 <a:solidFill>
                   <a:srgbClr val="0D7377"/>
                 </a:solidFill>
-                <a:latin typeface="Segoe UI"/>
-                <a:cs typeface="Segoe UI"/>
+                <a:latin typeface="Arial"/>
+                <a:cs typeface="Arial"/>
               </a:rPr>
               <a:t>Trình diễn trực tiếp: công cụ tính cỡ mẫu trực tuyến</a:t>
             </a:r>
@@ -11116,8 +11116,8 @@
                 <a:solidFill>
                   <a:srgbClr val="FFFFFF"/>
                 </a:solidFill>
-                <a:latin typeface="Segoe UI"/>
-                <a:cs typeface="Segoe UI"/>
+                <a:latin typeface="Arial"/>
+                <a:cs typeface="Arial"/>
               </a:rPr>
               <a:t>TRÌNH DIỄN TRỰC TIẾP   |   8 phút</a:t>
             </a:r>
@@ -11154,25 +11154,19 @@
               <a:spcBef>
                 <a:spcPts val="450"/>
               </a:spcBef>
-              <a:buNone/>
-            </a:pPr>
-            <a:r>
-              <a:rPr lang="en-US" sz="1650" b="1" dirty="0">
-                <a:solidFill>
-                  <a:srgbClr val="B5651D"/>
-                </a:solidFill>
-                <a:latin typeface="Segoe UI"/>
-                <a:cs typeface="Segoe UI"/>
-              </a:rPr>
-              <a:t>1.  </a:t>
-            </a:r>
+              <a:buClr>
+                <a:srgbClr val="B5651D"/>
+              </a:buClr>
+              <a:buFont typeface="Arial"/>
+              <a:buChar char="•"/>
+            </a:pPr>
             <a:r>
               <a:rPr lang="en-US" sz="1650" dirty="0">
                 <a:solidFill>
                   <a:srgbClr val="000000"/>
                 </a:solidFill>
-                <a:latin typeface="Segoe UI"/>
-                <a:cs typeface="Segoe UI"/>
+                <a:latin typeface="Arial"/>
+                <a:cs typeface="Arial"/>
               </a:rPr>
               <a:t>Mở một công cụ tính trực tuyến miễn phí (ví dụ OpenEpi) trên trình duyệt</a:t>
             </a:r>
@@ -11185,25 +11179,19 @@
               <a:spcBef>
                 <a:spcPts val="450"/>
               </a:spcBef>
-              <a:buNone/>
-            </a:pPr>
-            <a:r>
-              <a:rPr lang="en-US" sz="1650" b="1" dirty="0">
-                <a:solidFill>
-                  <a:srgbClr val="B5651D"/>
-                </a:solidFill>
-                <a:latin typeface="Segoe UI"/>
-                <a:cs typeface="Segoe UI"/>
-              </a:rPr>
-              <a:t>2.  </a:t>
-            </a:r>
+              <a:buClr>
+                <a:srgbClr val="B5651D"/>
+              </a:buClr>
+              <a:buFont typeface="Arial"/>
+              <a:buChar char="•"/>
+            </a:pPr>
             <a:r>
               <a:rPr lang="en-US" sz="1650" dirty="0">
                 <a:solidFill>
                   <a:srgbClr val="000000"/>
                 </a:solidFill>
-                <a:latin typeface="Segoe UI"/>
-                <a:cs typeface="Segoe UI"/>
+                <a:latin typeface="Arial"/>
+                <a:cs typeface="Arial"/>
               </a:rPr>
               <a:t>Hai trung bình: 70 so với 40 ml/kg, SD 35, power 80%, alpha 5% → 22 mỗi nhóm</a:t>
             </a:r>
@@ -11216,25 +11204,19 @@
               <a:spcBef>
                 <a:spcPts val="450"/>
               </a:spcBef>
-              <a:buNone/>
-            </a:pPr>
-            <a:r>
-              <a:rPr lang="en-US" sz="1650" b="1" dirty="0">
-                <a:solidFill>
-                  <a:srgbClr val="B5651D"/>
-                </a:solidFill>
-                <a:latin typeface="Segoe UI"/>
-                <a:cs typeface="Segoe UI"/>
-              </a:rPr>
-              <a:t>3.  </a:t>
-            </a:r>
+              <a:buClr>
+                <a:srgbClr val="B5651D"/>
+              </a:buClr>
+              <a:buFont typeface="Arial"/>
+              <a:buChar char="•"/>
+            </a:pPr>
             <a:r>
               <a:rPr lang="en-US" sz="1650" dirty="0">
                 <a:solidFill>
                   <a:srgbClr val="000000"/>
                 </a:solidFill>
-                <a:latin typeface="Segoe UI"/>
-                <a:cs typeface="Segoe UI"/>
+                <a:latin typeface="Arial"/>
+                <a:cs typeface="Arial"/>
               </a:rPr>
               <a:t>Hai tỉ lệ: tử vong 40% so với 30% → khoảng 356 mỗi nhóm</a:t>
             </a:r>
@@ -11247,25 +11229,19 @@
               <a:spcBef>
                 <a:spcPts val="450"/>
               </a:spcBef>
-              <a:buNone/>
-            </a:pPr>
-            <a:r>
-              <a:rPr lang="en-US" sz="1650" b="1" dirty="0">
-                <a:solidFill>
-                  <a:srgbClr val="B5651D"/>
-                </a:solidFill>
-                <a:latin typeface="Segoe UI"/>
-                <a:cs typeface="Segoe UI"/>
-              </a:rPr>
-              <a:t>4.  </a:t>
-            </a:r>
+              <a:buClr>
+                <a:srgbClr val="B5651D"/>
+              </a:buClr>
+              <a:buFont typeface="Arial"/>
+              <a:buChar char="•"/>
+            </a:pPr>
             <a:r>
               <a:rPr lang="en-US" sz="1650" dirty="0">
                 <a:solidFill>
                   <a:srgbClr val="000000"/>
                 </a:solidFill>
-                <a:latin typeface="Segoe UI"/>
-                <a:cs typeface="Segoe UI"/>
+                <a:latin typeface="Arial"/>
+                <a:cs typeface="Arial"/>
               </a:rPr>
               <a:t>Thay đổi từng đầu vào một và xem con số thay đổi</a:t>
             </a:r>
@@ -11278,25 +11254,19 @@
               <a:spcBef>
                 <a:spcPts val="450"/>
               </a:spcBef>
-              <a:buNone/>
-            </a:pPr>
-            <a:r>
-              <a:rPr lang="en-US" sz="1650" b="1" dirty="0">
-                <a:solidFill>
-                  <a:srgbClr val="B5651D"/>
-                </a:solidFill>
-                <a:latin typeface="Segoe UI"/>
-                <a:cs typeface="Segoe UI"/>
-              </a:rPr>
-              <a:t>5.  </a:t>
-            </a:r>
+              <a:buClr>
+                <a:srgbClr val="B5651D"/>
+              </a:buClr>
+              <a:buFont typeface="Arial"/>
+              <a:buChar char="•"/>
+            </a:pPr>
             <a:r>
               <a:rPr lang="en-US" sz="1650" dirty="0">
                 <a:solidFill>
                   <a:srgbClr val="000000"/>
                 </a:solidFill>
-                <a:latin typeface="Segoe UI"/>
-                <a:cs typeface="Segoe UI"/>
+                <a:latin typeface="Arial"/>
+                <a:cs typeface="Arial"/>
               </a:rPr>
               <a:t>Dự phòng không cần mạng: bảng tính cỡ mẫu của Neudata</a:t>
             </a:r>
@@ -11340,8 +11310,8 @@
                 <a:solidFill>
                   <a:srgbClr val="B5651D"/>
                 </a:solidFill>
-                <a:latin typeface="Segoe UI"/>
-                <a:cs typeface="Segoe UI"/>
+                <a:latin typeface="Arial"/>
+                <a:cs typeface="Arial"/>
               </a:rPr>
               <a:t>Điều gì làm n thay đổi?</a:t>
             </a:r>
@@ -11362,8 +11332,8 @@
                 <a:solidFill>
                   <a:srgbClr val="000000"/>
                 </a:solidFill>
-                <a:latin typeface="Segoe UI"/>
-                <a:cs typeface="Segoe UI"/>
+                <a:latin typeface="Arial"/>
+                <a:cs typeface="Arial"/>
               </a:rPr>
               <a:t>Tác động nhỏ hơn: n TĂNG</a:t>
             </a:r>
@@ -11384,8 +11354,8 @@
                 <a:solidFill>
                   <a:srgbClr val="000000"/>
                 </a:solidFill>
-                <a:latin typeface="Segoe UI"/>
-                <a:cs typeface="Segoe UI"/>
+                <a:latin typeface="Arial"/>
+                <a:cs typeface="Arial"/>
               </a:rPr>
               <a:t>Nhiễu (SD) nhiều hơn: n TĂNG</a:t>
             </a:r>
@@ -11406,8 +11376,8 @@
                 <a:solidFill>
                   <a:srgbClr val="000000"/>
                 </a:solidFill>
-                <a:latin typeface="Segoe UI"/>
-                <a:cs typeface="Segoe UI"/>
+                <a:latin typeface="Arial"/>
+                <a:cs typeface="Arial"/>
               </a:rPr>
               <a:t>Power cao hơn: n TĂNG</a:t>
             </a:r>
@@ -11428,8 +11398,8 @@
                 <a:solidFill>
                   <a:srgbClr val="000000"/>
                 </a:solidFill>
-                <a:latin typeface="Segoe UI"/>
-                <a:cs typeface="Segoe UI"/>
+                <a:latin typeface="Arial"/>
+                <a:cs typeface="Arial"/>
               </a:rPr>
               <a:t>Cộng thêm 10-20% bỏ cuộc</a:t>
             </a:r>
@@ -11475,8 +11445,8 @@
                 <a:solidFill>
                   <a:srgbClr val="B5651D"/>
                 </a:solidFill>
-                <a:latin typeface="Segoe UI"/>
-                <a:cs typeface="Segoe UI"/>
+                <a:latin typeface="Arial"/>
+                <a:cs typeface="Arial"/>
               </a:rPr>
               <a:t>SẢN PHẨM   </a:t>
             </a:r>
@@ -11485,8 +11455,8 @@
                 <a:solidFill>
                   <a:srgbClr val="000000"/>
                 </a:solidFill>
-                <a:latin typeface="Segoe UI"/>
-                <a:cs typeface="Segoe UI"/>
+                <a:latin typeface="Arial"/>
+                <a:cs typeface="Arial"/>
               </a:rPr>
               <a:t>Các nhóm biết 4 con số cần cho câu phát biểu cỡ mẫu của mình</a:t>
             </a:r>
@@ -11523,7 +11493,7 @@
                     <a:lumMod val="50000"/>
                   </a:schemeClr>
                 </a:solidFill>
-                <a:latin typeface="Verdana"/>
+                <a:latin typeface="Arial"/>
               </a:rPr>
               <a:t>Neudata | #ClearDataClearImpact</a:t>
             </a:r>
@@ -11653,8 +11623,8 @@
                 <a:solidFill>
                   <a:srgbClr val="0D7377"/>
                 </a:solidFill>
-                <a:latin typeface="Segoe UI"/>
-                <a:cs typeface="Segoe UI"/>
+                <a:latin typeface="Arial"/>
+                <a:cs typeface="Arial"/>
               </a:rPr>
               <a:t>Chọn kiểm định: một sơ đồ quyết định</a:t>
             </a:r>
@@ -11750,8 +11720,8 @@
                 <a:solidFill>
                   <a:srgbClr val="FFFFFF"/>
                 </a:solidFill>
-                <a:latin typeface="Segoe UI"/>
-                <a:cs typeface="Segoe UI"/>
+                <a:latin typeface="Arial"/>
+                <a:cs typeface="Arial"/>
               </a:rPr>
               <a:t>THÔNG ĐIỆP CHÍNH   </a:t>
             </a:r>
@@ -11760,8 +11730,8 @@
                 <a:solidFill>
                   <a:srgbClr val="FFFFFF"/>
                 </a:solidFill>
-                <a:latin typeface="Segoe UI"/>
-                <a:cs typeface="Segoe UI"/>
+                <a:latin typeface="Arial"/>
+                <a:cs typeface="Arial"/>
               </a:rPr>
               <a:t>Loại kết cục + hình dạng + ghép cặp hay không = kiểm định phù hợp.</a:t>
             </a:r>
@@ -11798,7 +11768,7 @@
                     <a:lumMod val="50000"/>
                   </a:schemeClr>
                 </a:solidFill>
-                <a:latin typeface="Verdana"/>
+                <a:latin typeface="Arial"/>
               </a:rPr>
               <a:t>Neudata | #ClearDataClearImpact</a:t>
             </a:r>
@@ -11928,8 +11898,8 @@
                 <a:solidFill>
                   <a:srgbClr val="0D7377"/>
                 </a:solidFill>
-                <a:latin typeface="Segoe UI"/>
-                <a:cs typeface="Segoe UI"/>
+                <a:latin typeface="Arial"/>
+                <a:cs typeface="Arial"/>
               </a:rPr>
               <a:t>Ghép cặp hay không ghép cặp? Cùng hay khác bệnh nhân</a:t>
             </a:r>
@@ -12025,8 +11995,8 @@
                 <a:solidFill>
                   <a:srgbClr val="FFFFFF"/>
                 </a:solidFill>
-                <a:latin typeface="Segoe UI"/>
-                <a:cs typeface="Segoe UI"/>
+                <a:latin typeface="Arial"/>
+                <a:cs typeface="Arial"/>
               </a:rPr>
               <a:t>THÔNG ĐIỆP CHÍNH   </a:t>
             </a:r>
@@ -12035,8 +12005,8 @@
                 <a:solidFill>
                   <a:srgbClr val="FFFFFF"/>
                 </a:solidFill>
-                <a:latin typeface="Segoe UI"/>
-                <a:cs typeface="Segoe UI"/>
+                <a:latin typeface="Arial"/>
+                <a:cs typeface="Arial"/>
               </a:rPr>
               <a:t>Cùng bệnh nhân đo hai lần = kiểm định ghép cặp; khác bệnh nhân = không ghép cặp.</a:t>
             </a:r>
@@ -12073,7 +12043,7 @@
                     <a:lumMod val="50000"/>
                   </a:schemeClr>
                 </a:solidFill>
-                <a:latin typeface="Verdana"/>
+                <a:latin typeface="Arial"/>
               </a:rPr>
               <a:t>Neudata | #ClearDataClearImpact</a:t>
             </a:r>
@@ -12203,8 +12173,8 @@
                 <a:solidFill>
                   <a:srgbClr val="0D7377"/>
                 </a:solidFill>
-                <a:latin typeface="Segoe UI"/>
-                <a:cs typeface="Segoe UI"/>
+                <a:latin typeface="Arial"/>
+                <a:cs typeface="Arial"/>
               </a:rPr>
               <a:t>So sánh nhiều lần: bài toán kẹo dẻo</a:t>
             </a:r>
@@ -12270,8 +12240,8 @@
                 <a:solidFill>
                   <a:srgbClr val="0D7377"/>
                 </a:solidFill>
-                <a:latin typeface="Segoe UI"/>
-                <a:cs typeface="Segoe UI"/>
+                <a:latin typeface="Arial"/>
+                <a:cs typeface="Arial"/>
               </a:rPr>
               <a:t>Cần làm gì</a:t>
             </a:r>
@@ -12289,8 +12259,8 @@
                 <a:solidFill>
                   <a:srgbClr val="000000"/>
                 </a:solidFill>
-                <a:latin typeface="Segoe UI"/>
-                <a:cs typeface="Segoe UI"/>
+                <a:latin typeface="Arial"/>
+                <a:cs typeface="Arial"/>
               </a:rPr>
               <a:t>Định trước MỘT kết cục chính</a:t>
             </a:r>
@@ -12308,8 +12278,8 @@
                 <a:solidFill>
                   <a:srgbClr val="000000"/>
                 </a:solidFill>
-                <a:latin typeface="Segoe UI"/>
-                <a:cs typeface="Segoe UI"/>
+                <a:latin typeface="Arial"/>
+                <a:cs typeface="Arial"/>
               </a:rPr>
               <a:t>Gọi phần còn lại là thăm dò</a:t>
             </a:r>
@@ -12327,8 +12297,8 @@
                 <a:solidFill>
                   <a:srgbClr val="000000"/>
                 </a:solidFill>
-                <a:latin typeface="Segoe UI"/>
-                <a:cs typeface="Segoe UI"/>
+                <a:latin typeface="Arial"/>
+                <a:cs typeface="Arial"/>
               </a:rPr>
               <a:t>Hiệu chỉnh, VD Bonferroni: 0.05 / số kiểm định</a:t>
             </a:r>
@@ -12346,8 +12316,8 @@
                 <a:solidFill>
                   <a:srgbClr val="000000"/>
                 </a:solidFill>
-                <a:latin typeface="Segoe UI"/>
-                <a:cs typeface="Segoe UI"/>
+                <a:latin typeface="Arial"/>
+                <a:cs typeface="Arial"/>
               </a:rPr>
               <a:t>Báo cáo mọi kiểm định đã làm</a:t>
             </a:r>
@@ -12415,8 +12385,8 @@
                 <a:solidFill>
                   <a:srgbClr val="FFFFFF"/>
                 </a:solidFill>
-                <a:latin typeface="Segoe UI"/>
-                <a:cs typeface="Segoe UI"/>
+                <a:latin typeface="Arial"/>
+                <a:cs typeface="Arial"/>
               </a:rPr>
               <a:t>THÔNG ĐIỆP CHÍNH   </a:t>
             </a:r>
@@ -12425,8 +12395,8 @@
                 <a:solidFill>
                   <a:srgbClr val="FFFFFF"/>
                 </a:solidFill>
-                <a:latin typeface="Segoe UI"/>
-                <a:cs typeface="Segoe UI"/>
+                <a:latin typeface="Arial"/>
+                <a:cs typeface="Arial"/>
               </a:rPr>
               <a:t>Kiểm định 20 thứ thì sẽ có một thứ 'có ý nghĩa' chỉ do ngẫu nhiên.</a:t>
             </a:r>
@@ -12463,7 +12433,7 @@
                     <a:lumMod val="50000"/>
                   </a:schemeClr>
                 </a:solidFill>
-                <a:latin typeface="Verdana"/>
+                <a:latin typeface="Arial"/>
               </a:rPr>
               <a:t>Neudata | #ClearDataClearImpact</a:t>
             </a:r>
@@ -12593,8 +12563,8 @@
                 <a:solidFill>
                   <a:srgbClr val="0D7377"/>
                 </a:solidFill>
-                <a:latin typeface="Segoe UI"/>
-                <a:cs typeface="Segoe UI"/>
+                <a:latin typeface="Arial"/>
+                <a:cs typeface="Arial"/>
               </a:rPr>
               <a:t>Kiểm tra nhanh: kiểm định nào?</a:t>
             </a:r>
@@ -12664,8 +12634,8 @@
                 <a:solidFill>
                   <a:srgbClr val="FFFFFF"/>
                 </a:solidFill>
-                <a:latin typeface="Segoe UI"/>
-                <a:cs typeface="Segoe UI"/>
+                <a:latin typeface="Arial"/>
+                <a:cs typeface="Arial"/>
               </a:rPr>
               <a:t>CÂU HỎI NHANH   |   3 phút</a:t>
             </a:r>
@@ -12702,25 +12672,19 @@
               <a:spcBef>
                 <a:spcPts val="450"/>
               </a:spcBef>
-              <a:buNone/>
-            </a:pPr>
-            <a:r>
-              <a:rPr lang="en-US" sz="1650" b="1" dirty="0">
-                <a:solidFill>
-                  <a:srgbClr val="6C3483"/>
-                </a:solidFill>
-                <a:latin typeface="Segoe UI"/>
-                <a:cs typeface="Segoe UI"/>
-              </a:rPr>
-              <a:t>1.  </a:t>
-            </a:r>
+              <a:buClr>
+                <a:srgbClr val="6C3483"/>
+              </a:buClr>
+              <a:buFont typeface="Arial"/>
+              <a:buChar char="•"/>
+            </a:pPr>
             <a:r>
               <a:rPr lang="en-US" sz="1650" dirty="0">
                 <a:solidFill>
                   <a:srgbClr val="000000"/>
                 </a:solidFill>
-                <a:latin typeface="Segoe UI"/>
-                <a:cs typeface="Segoe UI"/>
+                <a:latin typeface="Arial"/>
+                <a:cs typeface="Arial"/>
               </a:rPr>
               <a:t>Thời gian nằm ICU (lệch) ở nhóm cân bằng dịch dương và âm</a:t>
             </a:r>
@@ -12733,25 +12697,19 @@
               <a:spcBef>
                 <a:spcPts val="450"/>
               </a:spcBef>
-              <a:buNone/>
-            </a:pPr>
-            <a:r>
-              <a:rPr lang="en-US" sz="1650" b="1" dirty="0">
-                <a:solidFill>
-                  <a:srgbClr val="6C3483"/>
-                </a:solidFill>
-                <a:latin typeface="Segoe UI"/>
-                <a:cs typeface="Segoe UI"/>
-              </a:rPr>
-              <a:t>2.  </a:t>
-            </a:r>
+              <a:buClr>
+                <a:srgbClr val="6C3483"/>
+              </a:buClr>
+              <a:buFont typeface="Arial"/>
+              <a:buChar char="•"/>
+            </a:pPr>
             <a:r>
               <a:rPr lang="en-US" sz="1650" dirty="0">
                 <a:solidFill>
                   <a:srgbClr val="000000"/>
                 </a:solidFill>
-                <a:latin typeface="Segoe UI"/>
-                <a:cs typeface="Segoe UI"/>
+                <a:latin typeface="Arial"/>
+                <a:cs typeface="Arial"/>
               </a:rPr>
               <a:t>Tử vong 28 ngày (có/không) ở 300 so với 300 bệnh nhân</a:t>
             </a:r>
@@ -12764,25 +12722,19 @@
               <a:spcBef>
                 <a:spcPts val="450"/>
               </a:spcBef>
-              <a:buNone/>
-            </a:pPr>
-            <a:r>
-              <a:rPr lang="en-US" sz="1650" b="1" dirty="0">
-                <a:solidFill>
-                  <a:srgbClr val="6C3483"/>
-                </a:solidFill>
-                <a:latin typeface="Segoe UI"/>
-                <a:cs typeface="Segoe UI"/>
-              </a:rPr>
-              <a:t>3.  </a:t>
-            </a:r>
+              <a:buClr>
+                <a:srgbClr val="6C3483"/>
+              </a:buClr>
+              <a:buFont typeface="Arial"/>
+              <a:buChar char="•"/>
+            </a:pPr>
             <a:r>
               <a:rPr lang="en-US" sz="1650" dirty="0">
                 <a:solidFill>
                   <a:srgbClr val="000000"/>
                 </a:solidFill>
-                <a:latin typeface="Segoe UI"/>
-                <a:cs typeface="Segoe UI"/>
+                <a:latin typeface="Arial"/>
+                <a:cs typeface="Arial"/>
               </a:rPr>
               <a:t>Lactat lúc vào và sau 6 giờ trên cùng 40 bệnh nhân</a:t>
             </a:r>
@@ -12795,25 +12747,19 @@
               <a:spcBef>
                 <a:spcPts val="450"/>
               </a:spcBef>
-              <a:buNone/>
-            </a:pPr>
-            <a:r>
-              <a:rPr lang="en-US" sz="1650" b="1" dirty="0">
-                <a:solidFill>
-                  <a:srgbClr val="6C3483"/>
-                </a:solidFill>
-                <a:latin typeface="Segoe UI"/>
-                <a:cs typeface="Segoe UI"/>
-              </a:rPr>
-              <a:t>4.  </a:t>
-            </a:r>
+              <a:buClr>
+                <a:srgbClr val="6C3483"/>
+              </a:buClr>
+              <a:buFont typeface="Arial"/>
+              <a:buChar char="•"/>
+            </a:pPr>
             <a:r>
               <a:rPr lang="en-US" sz="1650" dirty="0">
                 <a:solidFill>
                   <a:srgbClr val="000000"/>
                 </a:solidFill>
-                <a:latin typeface="Segoe UI"/>
-                <a:cs typeface="Segoe UI"/>
+                <a:latin typeface="Arial"/>
+                <a:cs typeface="Arial"/>
               </a:rPr>
               <a:t>Lọc máu (có/không): 2/24 so với 5/24 bệnh nhân</a:t>
             </a:r>
@@ -12857,8 +12803,8 @@
                 <a:solidFill>
                   <a:srgbClr val="6C3483"/>
                 </a:solidFill>
-                <a:latin typeface="Segoe UI"/>
-                <a:cs typeface="Segoe UI"/>
+                <a:latin typeface="Arial"/>
+                <a:cs typeface="Arial"/>
               </a:rPr>
               <a:t>Đáp án</a:t>
             </a:r>
@@ -12879,8 +12825,8 @@
                 <a:solidFill>
                   <a:srgbClr val="000000"/>
                 </a:solidFill>
-                <a:latin typeface="Segoe UI"/>
-                <a:cs typeface="Segoe UI"/>
+                <a:latin typeface="Arial"/>
+                <a:cs typeface="Arial"/>
               </a:rPr>
               <a:t>Mann-Whitney U</a:t>
             </a:r>
@@ -12901,8 +12847,8 @@
                 <a:solidFill>
                   <a:srgbClr val="000000"/>
                 </a:solidFill>
-                <a:latin typeface="Segoe UI"/>
-                <a:cs typeface="Segoe UI"/>
+                <a:latin typeface="Arial"/>
+                <a:cs typeface="Arial"/>
               </a:rPr>
               <a:t>Khi bình phương</a:t>
             </a:r>
@@ -12923,8 +12869,8 @@
                 <a:solidFill>
                   <a:srgbClr val="000000"/>
                 </a:solidFill>
-                <a:latin typeface="Segoe UI"/>
-                <a:cs typeface="Segoe UI"/>
+                <a:latin typeface="Arial"/>
+                <a:cs typeface="Arial"/>
               </a:rPr>
               <a:t>t ghép cặp</a:t>
             </a:r>
@@ -12945,8 +12891,8 @@
                 <a:solidFill>
                   <a:srgbClr val="000000"/>
                 </a:solidFill>
-                <a:latin typeface="Segoe UI"/>
-                <a:cs typeface="Segoe UI"/>
+                <a:latin typeface="Arial"/>
+                <a:cs typeface="Arial"/>
               </a:rPr>
               <a:t>Fisher chính xác</a:t>
             </a:r>
@@ -12992,8 +12938,8 @@
                 <a:solidFill>
                   <a:srgbClr val="6C3483"/>
                 </a:solidFill>
-                <a:latin typeface="Segoe UI"/>
-                <a:cs typeface="Segoe UI"/>
+                <a:latin typeface="Arial"/>
+                <a:cs typeface="Arial"/>
               </a:rPr>
               <a:t>SẢN PHẨM   </a:t>
             </a:r>
@@ -13002,8 +12948,8 @@
                 <a:solidFill>
                   <a:srgbClr val="000000"/>
                 </a:solidFill>
-                <a:latin typeface="Segoe UI"/>
-                <a:cs typeface="Segoe UI"/>
+                <a:latin typeface="Arial"/>
+                <a:cs typeface="Arial"/>
               </a:rPr>
               <a:t>Mọi người dùng được sơ đồ chọn kiểm định</a:t>
             </a:r>
@@ -13040,7 +12986,7 @@
                     <a:lumMod val="50000"/>
                   </a:schemeClr>
                 </a:solidFill>
-                <a:latin typeface="Verdana"/>
+                <a:latin typeface="Arial"/>
               </a:rPr>
               <a:t>Neudata | #ClearDataClearImpact</a:t>
             </a:r>
@@ -13170,8 +13116,8 @@
                 <a:solidFill>
                   <a:srgbClr val="0D7377"/>
                 </a:solidFill>
-                <a:latin typeface="Segoe UI"/>
-                <a:cs typeface="Segoe UI"/>
+                <a:latin typeface="Arial"/>
+                <a:cs typeface="Arial"/>
               </a:rPr>
               <a:t>6.2 So sánh các nhóm trong bộ dữ liệu khóa học</a:t>
             </a:r>
@@ -13240,8 +13186,8 @@
                 <a:solidFill>
                   <a:srgbClr val="0D7377"/>
                 </a:solidFill>
-                <a:latin typeface="Segoe UI"/>
-                <a:cs typeface="Segoe UI"/>
+                <a:latin typeface="Arial"/>
+                <a:cs typeface="Arial"/>
               </a:rPr>
               <a:t>Chọn kiểm định theo kết cục, rồi đọc kết quả như một tác động kèm CI.</a:t>
             </a:r>
@@ -13258,8 +13204,8 @@
                 <a:solidFill>
                   <a:srgbClr val="595959"/>
                 </a:solidFill>
-                <a:latin typeface="Segoe UI"/>
-                <a:cs typeface="Segoe UI"/>
+                <a:latin typeface="Arial"/>
+                <a:cs typeface="Arial"/>
               </a:rPr>
               <a:t>6.2 So sánh các nhóm trong bộ dữ liệu  |  20 phút</a:t>
             </a:r>
@@ -13296,7 +13242,7 @@
                     <a:lumMod val="50000"/>
                   </a:schemeClr>
                 </a:solidFill>
-                <a:latin typeface="Verdana"/>
+                <a:latin typeface="Arial"/>
               </a:rPr>
               <a:t>Neudata | #ClearDataClearImpact</a:t>
             </a:r>
@@ -13426,8 +13372,8 @@
                 <a:solidFill>
                   <a:srgbClr val="0D7377"/>
                 </a:solidFill>
-                <a:latin typeface="Segoe UI"/>
-                <a:cs typeface="Segoe UI"/>
+                <a:latin typeface="Arial"/>
+                <a:cs typeface="Arial"/>
               </a:rPr>
               <a:t>Trình diễn: so sánh hai nhóm bằng R</a:t>
             </a:r>
@@ -13497,8 +13443,8 @@
                 <a:solidFill>
                   <a:srgbClr val="FFFFFF"/>
                 </a:solidFill>
-                <a:latin typeface="Segoe UI"/>
-                <a:cs typeface="Segoe UI"/>
+                <a:latin typeface="Arial"/>
+                <a:cs typeface="Arial"/>
               </a:rPr>
               <a:t>TRÌNH DIỄN TRỰC TIẾP   |   6 phút</a:t>
             </a:r>
@@ -13535,25 +13481,19 @@
               <a:spcBef>
                 <a:spcPts val="450"/>
               </a:spcBef>
-              <a:buNone/>
-            </a:pPr>
-            <a:r>
-              <a:rPr lang="en-US" sz="1650" b="1" dirty="0">
-                <a:solidFill>
-                  <a:srgbClr val="B5651D"/>
-                </a:solidFill>
-                <a:latin typeface="Segoe UI"/>
-                <a:cs typeface="Segoe UI"/>
-              </a:rPr>
-              <a:t>1.  </a:t>
-            </a:r>
+              <a:buClr>
+                <a:srgbClr val="B5651D"/>
+              </a:buClr>
+              <a:buFont typeface="Arial"/>
+              <a:buChar char="•"/>
+            </a:pPr>
             <a:r>
               <a:rPr lang="en-US" sz="1650" dirty="0">
                 <a:solidFill>
                   <a:srgbClr val="000000"/>
                 </a:solidFill>
-                <a:latin typeface="Segoe UI"/>
-                <a:cs typeface="Segoe UI"/>
+                <a:latin typeface="Arial"/>
+                <a:cs typeface="Arial"/>
               </a:rPr>
               <a:t>Mở 03_compare.R</a:t>
             </a:r>
@@ -13566,25 +13506,19 @@
               <a:spcBef>
                 <a:spcPts val="450"/>
               </a:spcBef>
-              <a:buNone/>
-            </a:pPr>
-            <a:r>
-              <a:rPr lang="en-US" sz="1650" b="1" dirty="0">
-                <a:solidFill>
-                  <a:srgbClr val="B5651D"/>
-                </a:solidFill>
-                <a:latin typeface="Segoe UI"/>
-                <a:cs typeface="Segoe UI"/>
-              </a:rPr>
-              <a:t>2.  </a:t>
-            </a:r>
+              <a:buClr>
+                <a:srgbClr val="B5651D"/>
+              </a:buClr>
+              <a:buFont typeface="Arial"/>
+              <a:buChar char="•"/>
+            </a:pPr>
             <a:r>
               <a:rPr lang="en-US" sz="1650" dirty="0">
                 <a:solidFill>
                   <a:srgbClr val="000000"/>
                 </a:solidFill>
-                <a:latin typeface="Segoe UI"/>
-                <a:cs typeface="Segoe UI"/>
+                <a:latin typeface="Arial"/>
+                <a:cs typeface="Arial"/>
               </a:rPr>
               <a:t>Tuổi (đối xứng): kiểm định t</a:t>
             </a:r>
@@ -13597,25 +13531,19 @@
               <a:spcBef>
                 <a:spcPts val="450"/>
               </a:spcBef>
-              <a:buNone/>
-            </a:pPr>
-            <a:r>
-              <a:rPr lang="en-US" sz="1650" b="1" dirty="0">
-                <a:solidFill>
-                  <a:srgbClr val="B5651D"/>
-                </a:solidFill>
-                <a:latin typeface="Segoe UI"/>
-                <a:cs typeface="Segoe UI"/>
-              </a:rPr>
-              <a:t>3.  </a:t>
-            </a:r>
+              <a:buClr>
+                <a:srgbClr val="B5651D"/>
+              </a:buClr>
+              <a:buFont typeface="Arial"/>
+              <a:buChar char="•"/>
+            </a:pPr>
             <a:r>
               <a:rPr lang="en-US" sz="1650" dirty="0">
                 <a:solidFill>
                   <a:srgbClr val="000000"/>
                 </a:solidFill>
-                <a:latin typeface="Segoe UI"/>
-                <a:cs typeface="Segoe UI"/>
+                <a:latin typeface="Arial"/>
+                <a:cs typeface="Arial"/>
               </a:rPr>
               <a:t>SOFA và lactat (lệch): Mann-Whitney</a:t>
             </a:r>
@@ -13628,25 +13556,19 @@
               <a:spcBef>
                 <a:spcPts val="450"/>
               </a:spcBef>
-              <a:buNone/>
-            </a:pPr>
-            <a:r>
-              <a:rPr lang="en-US" sz="1650" b="1" dirty="0">
-                <a:solidFill>
-                  <a:srgbClr val="B5651D"/>
-                </a:solidFill>
-                <a:latin typeface="Segoe UI"/>
-                <a:cs typeface="Segoe UI"/>
-              </a:rPr>
-              <a:t>4.  </a:t>
-            </a:r>
+              <a:buClr>
+                <a:srgbClr val="B5651D"/>
+              </a:buClr>
+              <a:buFont typeface="Arial"/>
+              <a:buChar char="•"/>
+            </a:pPr>
             <a:r>
               <a:rPr lang="en-US" sz="1650" dirty="0">
                 <a:solidFill>
                   <a:srgbClr val="000000"/>
                 </a:solidFill>
-                <a:latin typeface="Segoe UI"/>
-                <a:cs typeface="Segoe UI"/>
+                <a:latin typeface="Arial"/>
+                <a:cs typeface="Arial"/>
               </a:rPr>
               <a:t>Tử vong 28 ngày (có/không): bảng 2x2 và khi bình phương</a:t>
             </a:r>
@@ -13659,25 +13581,19 @@
               <a:spcBef>
                 <a:spcPts val="450"/>
               </a:spcBef>
-              <a:buNone/>
-            </a:pPr>
-            <a:r>
-              <a:rPr lang="en-US" sz="1650" b="1" dirty="0">
-                <a:solidFill>
-                  <a:srgbClr val="B5651D"/>
-                </a:solidFill>
-                <a:latin typeface="Segoe UI"/>
-                <a:cs typeface="Segoe UI"/>
-              </a:rPr>
-              <a:t>5.  </a:t>
-            </a:r>
+              <a:buClr>
+                <a:srgbClr val="B5651D"/>
+              </a:buClr>
+              <a:buFont typeface="Arial"/>
+              <a:buChar char="•"/>
+            </a:pPr>
             <a:r>
               <a:rPr lang="en-US" sz="1650" dirty="0">
                 <a:solidFill>
                   <a:srgbClr val="000000"/>
                 </a:solidFill>
-                <a:latin typeface="Segoe UI"/>
-                <a:cs typeface="Segoe UI"/>
+                <a:latin typeface="Arial"/>
+                <a:cs typeface="Arial"/>
               </a:rPr>
               <a:t>Lỗi thường gặp: kiểm định t trên thời gian nằm ICU lệch</a:t>
             </a:r>
@@ -13721,8 +13637,8 @@
                 <a:solidFill>
                   <a:srgbClr val="B5651D"/>
                 </a:solidFill>
-                <a:latin typeface="Segoe UI"/>
-                <a:cs typeface="Segoe UI"/>
+                <a:latin typeface="Arial"/>
+                <a:cs typeface="Arial"/>
               </a:rPr>
               <a:t>Sơ đồ quyết định</a:t>
             </a:r>
@@ -13743,8 +13659,8 @@
                 <a:solidFill>
                   <a:srgbClr val="000000"/>
                 </a:solidFill>
-                <a:latin typeface="Segoe UI"/>
-                <a:cs typeface="Segoe UI"/>
+                <a:latin typeface="Arial"/>
+                <a:cs typeface="Arial"/>
               </a:rPr>
               <a:t>Số đo hay phân loại?</a:t>
             </a:r>
@@ -13765,8 +13681,8 @@
                 <a:solidFill>
                   <a:srgbClr val="000000"/>
                 </a:solidFill>
-                <a:latin typeface="Segoe UI"/>
-                <a:cs typeface="Segoe UI"/>
+                <a:latin typeface="Arial"/>
+                <a:cs typeface="Arial"/>
               </a:rPr>
               <a:t>Đối xứng hay lệch?</a:t>
             </a:r>
@@ -13787,8 +13703,8 @@
                 <a:solidFill>
                   <a:srgbClr val="000000"/>
                 </a:solidFill>
-                <a:latin typeface="Segoe UI"/>
-                <a:cs typeface="Segoe UI"/>
+                <a:latin typeface="Arial"/>
+                <a:cs typeface="Arial"/>
               </a:rPr>
               <a:t>Ghép cặp hay không?</a:t>
             </a:r>
@@ -13809,8 +13725,8 @@
                 <a:solidFill>
                   <a:srgbClr val="000000"/>
                 </a:solidFill>
-                <a:latin typeface="Segoe UI"/>
-                <a:cs typeface="Segoe UI"/>
+                <a:latin typeface="Arial"/>
+                <a:cs typeface="Arial"/>
               </a:rPr>
               <a:t>Tác động + 95% CI</a:t>
             </a:r>
@@ -13856,8 +13772,8 @@
                 <a:solidFill>
                   <a:srgbClr val="B5651D"/>
                 </a:solidFill>
-                <a:latin typeface="Segoe UI"/>
-                <a:cs typeface="Segoe UI"/>
+                <a:latin typeface="Arial"/>
+                <a:cs typeface="Arial"/>
               </a:rPr>
               <a:t>SẢN PHẨM   </a:t>
             </a:r>
@@ -13866,8 +13782,8 @@
                 <a:solidFill>
                   <a:srgbClr val="000000"/>
                 </a:solidFill>
-                <a:latin typeface="Segoe UI"/>
-                <a:cs typeface="Segoe UI"/>
+                <a:latin typeface="Arial"/>
+                <a:cs typeface="Arial"/>
               </a:rPr>
               <a:t>Mọi người thấy kiểm định được chọn theo loại kết cục</a:t>
             </a:r>
@@ -13904,7 +13820,7 @@
                     <a:lumMod val="50000"/>
                   </a:schemeClr>
                 </a:solidFill>
-                <a:latin typeface="Verdana"/>
+                <a:latin typeface="Arial"/>
               </a:rPr>
               <a:t>Neudata | #ClearDataClearImpact</a:t>
             </a:r>
@@ -14034,8 +13950,8 @@
                 <a:solidFill>
                   <a:srgbClr val="0D7377"/>
                 </a:solidFill>
-                <a:latin typeface="Segoe UI"/>
-                <a:cs typeface="Segoe UI"/>
+                <a:latin typeface="Arial"/>
+                <a:cs typeface="Arial"/>
               </a:rPr>
               <a:t>FLUID-ICU: bốn kết cục, bốn phép so sánh</a:t>
             </a:r>
@@ -14131,8 +14047,8 @@
                 <a:solidFill>
                   <a:srgbClr val="FFFFFF"/>
                 </a:solidFill>
-                <a:latin typeface="Segoe UI"/>
-                <a:cs typeface="Segoe UI"/>
+                <a:latin typeface="Arial"/>
+                <a:cs typeface="Arial"/>
               </a:rPr>
               <a:t>THÔNG ĐIỆP CHÍNH   </a:t>
             </a:r>
@@ -14141,8 +14057,8 @@
                 <a:solidFill>
                   <a:srgbClr val="FFFFFF"/>
                 </a:solidFill>
-                <a:latin typeface="Segoe UI"/>
-                <a:cs typeface="Segoe UI"/>
+                <a:latin typeface="Arial"/>
+                <a:cs typeface="Arial"/>
               </a:rPr>
               <a:t>Mọi kết cục đều xấu hơn ở nhóm cân bằng dương, trước khi hiệu chỉnh.</a:t>
             </a:r>
@@ -14179,7 +14095,7 @@
                     <a:lumMod val="50000"/>
                   </a:schemeClr>
                 </a:solidFill>
-                <a:latin typeface="Verdana"/>
+                <a:latin typeface="Arial"/>
               </a:rPr>
               <a:t>Neudata | #ClearDataClearImpact</a:t>
             </a:r>
@@ -14309,8 +14225,8 @@
                 <a:solidFill>
                   <a:srgbClr val="0D7377"/>
                 </a:solidFill>
-                <a:latin typeface="Segoe UI"/>
-                <a:cs typeface="Segoe UI"/>
+                <a:latin typeface="Arial"/>
+                <a:cs typeface="Arial"/>
               </a:rPr>
               <a:t>Ví dụ minh họa: đọc phép so sánh tử vong</a:t>
             </a:r>
@@ -14376,8 +14292,8 @@
                 <a:solidFill>
                   <a:srgbClr val="595959"/>
                 </a:solidFill>
-                <a:latin typeface="Segoe UI"/>
-                <a:cs typeface="Segoe UI"/>
+                <a:latin typeface="Arial"/>
+                <a:cs typeface="Arial"/>
               </a:rPr>
               <a:t>Q1, chưa hiệu chỉnh: cân bằng dịch dương so với âm đến ngày 3.</a:t>
             </a:r>
@@ -14421,8 +14337,8 @@
                 <a:solidFill>
                   <a:srgbClr val="FFFFFF"/>
                 </a:solidFill>
-                <a:latin typeface="Segoe UI"/>
-                <a:cs typeface="Segoe UI"/>
+                <a:latin typeface="Arial"/>
+                <a:cs typeface="Arial"/>
               </a:rPr>
               <a:t>Nguy cơ</a:t>
             </a:r>
@@ -14470,8 +14386,8 @@
                 <a:solidFill>
                   <a:srgbClr val="000000"/>
                 </a:solidFill>
-                <a:latin typeface="Segoe UI"/>
-                <a:cs typeface="Segoe UI"/>
+                <a:latin typeface="Arial"/>
+                <a:cs typeface="Arial"/>
               </a:rPr>
               <a:t>134/373 = 35.9%</a:t>
             </a:r>
@@ -14491,8 +14407,8 @@
                 <a:solidFill>
                   <a:srgbClr val="000000"/>
                 </a:solidFill>
-                <a:latin typeface="Segoe UI"/>
-                <a:cs typeface="Segoe UI"/>
+                <a:latin typeface="Arial"/>
+                <a:cs typeface="Arial"/>
               </a:rPr>
               <a:t>45/245 = 18.4%</a:t>
             </a:r>
@@ -14536,8 +14452,8 @@
                 <a:solidFill>
                   <a:srgbClr val="FFFFFF"/>
                 </a:solidFill>
-                <a:latin typeface="Segoe UI"/>
-                <a:cs typeface="Segoe UI"/>
+                <a:latin typeface="Arial"/>
+                <a:cs typeface="Arial"/>
               </a:rPr>
               <a:t>Hiệu số</a:t>
             </a:r>
@@ -14585,8 +14501,8 @@
                 <a:solidFill>
                   <a:srgbClr val="000000"/>
                 </a:solidFill>
-                <a:latin typeface="Segoe UI"/>
-                <a:cs typeface="Segoe UI"/>
+                <a:latin typeface="Arial"/>
+                <a:cs typeface="Arial"/>
               </a:rPr>
               <a:t>17.6 điểm phần trăm</a:t>
             </a:r>
@@ -14606,8 +14522,8 @@
                 <a:solidFill>
                   <a:srgbClr val="000000"/>
                 </a:solidFill>
-                <a:latin typeface="Segoe UI"/>
-                <a:cs typeface="Segoe UI"/>
+                <a:latin typeface="Arial"/>
+                <a:cs typeface="Arial"/>
               </a:rPr>
               <a:t>95% CI 10.7 đến 24.4</a:t>
             </a:r>
@@ -14651,8 +14567,8 @@
                 <a:solidFill>
                   <a:srgbClr val="FFFFFF"/>
                 </a:solidFill>
-                <a:latin typeface="Segoe UI"/>
-                <a:cs typeface="Segoe UI"/>
+                <a:latin typeface="Arial"/>
+                <a:cs typeface="Arial"/>
               </a:rPr>
               <a:t>Tỉ số</a:t>
             </a:r>
@@ -14700,8 +14616,8 @@
                 <a:solidFill>
                   <a:srgbClr val="000000"/>
                 </a:solidFill>
-                <a:latin typeface="Segoe UI"/>
-                <a:cs typeface="Segoe UI"/>
+                <a:latin typeface="Arial"/>
+                <a:cs typeface="Arial"/>
               </a:rPr>
               <a:t>RR 1.96:</a:t>
             </a:r>
@@ -14721,8 +14637,8 @@
                 <a:solidFill>
                   <a:srgbClr val="000000"/>
                 </a:solidFill>
-                <a:latin typeface="Segoe UI"/>
-                <a:cs typeface="Segoe UI"/>
+                <a:latin typeface="Arial"/>
+                <a:cs typeface="Arial"/>
               </a:rPr>
               <a:t>nguy cơ khoảng gấp đôi</a:t>
             </a:r>
@@ -14766,8 +14682,8 @@
                 <a:solidFill>
                   <a:srgbClr val="FFFFFF"/>
                 </a:solidFill>
-                <a:latin typeface="Segoe UI"/>
-                <a:cs typeface="Segoe UI"/>
+                <a:latin typeface="Arial"/>
+                <a:cs typeface="Arial"/>
               </a:rPr>
               <a:t>Kiểm định</a:t>
             </a:r>
@@ -14815,8 +14731,8 @@
                 <a:solidFill>
                   <a:srgbClr val="000000"/>
                 </a:solidFill>
-                <a:latin typeface="Segoe UI"/>
-                <a:cs typeface="Segoe UI"/>
+                <a:latin typeface="Arial"/>
+                <a:cs typeface="Arial"/>
               </a:rPr>
               <a:t>Khi bình phương</a:t>
             </a:r>
@@ -14836,8 +14752,8 @@
                 <a:solidFill>
                   <a:srgbClr val="000000"/>
                 </a:solidFill>
-                <a:latin typeface="Segoe UI"/>
-                <a:cs typeface="Segoe UI"/>
+                <a:latin typeface="Arial"/>
+                <a:cs typeface="Arial"/>
               </a:rPr>
               <a:t>p &lt; 0.001</a:t>
             </a:r>
@@ -14881,8 +14797,8 @@
                 <a:solidFill>
                   <a:srgbClr val="FFFFFF"/>
                 </a:solidFill>
-                <a:latin typeface="Segoe UI"/>
-                <a:cs typeface="Segoe UI"/>
+                <a:latin typeface="Arial"/>
+                <a:cs typeface="Arial"/>
               </a:rPr>
               <a:t>Nhưng...</a:t>
             </a:r>
@@ -14930,8 +14846,8 @@
                 <a:solidFill>
                   <a:srgbClr val="000000"/>
                 </a:solidFill>
-                <a:latin typeface="Segoe UI"/>
-                <a:cs typeface="Segoe UI"/>
+                <a:latin typeface="Arial"/>
+                <a:cs typeface="Arial"/>
               </a:rPr>
               <a:t>Chưa hiệu chỉnh:</a:t>
             </a:r>
@@ -14951,8 +14867,8 @@
                 <a:solidFill>
                   <a:srgbClr val="000000"/>
                 </a:solidFill>
-                <a:latin typeface="Segoe UI"/>
-                <a:cs typeface="Segoe UI"/>
+                <a:latin typeface="Arial"/>
+                <a:cs typeface="Arial"/>
               </a:rPr>
               <a:t>bệnh nhân nặng hơn</a:t>
             </a:r>
@@ -14996,8 +14912,8 @@
                 <a:solidFill>
                   <a:srgbClr val="FFFFFF"/>
                 </a:solidFill>
-                <a:latin typeface="Segoe UI"/>
-                <a:cs typeface="Segoe UI"/>
+                <a:latin typeface="Arial"/>
+                <a:cs typeface="Arial"/>
               </a:rPr>
               <a:t>THÔNG ĐIỆP CHÍNH   </a:t>
             </a:r>
@@ -15006,8 +14922,8 @@
                 <a:solidFill>
                   <a:srgbClr val="FFFFFF"/>
                 </a:solidFill>
-                <a:latin typeface="Segoe UI"/>
-                <a:cs typeface="Segoe UI"/>
+                <a:latin typeface="Arial"/>
+                <a:cs typeface="Arial"/>
               </a:rPr>
               <a:t>Báo cáo tác động và CI; rồi hỏi điều gì khác có thể giải thích nó.</a:t>
             </a:r>
@@ -15044,7 +14960,7 @@
                     <a:lumMod val="50000"/>
                   </a:schemeClr>
                 </a:solidFill>
-                <a:latin typeface="Verdana"/>
+                <a:latin typeface="Arial"/>
               </a:rPr>
               <a:t>Neudata | #ClearDataClearImpact</a:t>
             </a:r>
@@ -15174,8 +15090,8 @@
                 <a:solidFill>
                   <a:srgbClr val="0D7377"/>
                 </a:solidFill>
-                <a:latin typeface="Segoe UI"/>
-                <a:cs typeface="Segoe UI"/>
+                <a:latin typeface="Arial"/>
+                <a:cs typeface="Arial"/>
               </a:rPr>
               <a:t>Diễn giải phép so sánh của nhóm</a:t>
             </a:r>
@@ -15245,8 +15161,8 @@
                 <a:solidFill>
                   <a:srgbClr val="FFFFFF"/>
                 </a:solidFill>
-                <a:latin typeface="Segoe UI"/>
-                <a:cs typeface="Segoe UI"/>
+                <a:latin typeface="Arial"/>
+                <a:cs typeface="Arial"/>
               </a:rPr>
               <a:t>LÀM VIỆC NHÓM   |   7 phút</a:t>
             </a:r>
@@ -15283,25 +15199,19 @@
               <a:spcBef>
                 <a:spcPts val="450"/>
               </a:spcBef>
-              <a:buNone/>
-            </a:pPr>
-            <a:r>
-              <a:rPr lang="en-US" sz="1650" b="1" dirty="0">
-                <a:solidFill>
-                  <a:srgbClr val="0D7377"/>
-                </a:solidFill>
-                <a:latin typeface="Segoe UI"/>
-                <a:cs typeface="Segoe UI"/>
-              </a:rPr>
-              <a:t>1.  </a:t>
-            </a:r>
+              <a:buClr>
+                <a:srgbClr val="0D7377"/>
+              </a:buClr>
+              <a:buFont typeface="Arial"/>
+              <a:buChar char="•"/>
+            </a:pPr>
             <a:r>
               <a:rPr lang="en-US" sz="1650" dirty="0">
                 <a:solidFill>
                   <a:srgbClr val="000000"/>
                 </a:solidFill>
-                <a:latin typeface="Segoe UI"/>
-                <a:cs typeface="Segoe UI"/>
+                <a:latin typeface="Arial"/>
+                <a:cs typeface="Arial"/>
               </a:rPr>
               <a:t>Tìm kết cục của nhóm trong gói kết quả (bảng so sánh)</a:t>
             </a:r>
@@ -15314,25 +15224,19 @@
               <a:spcBef>
                 <a:spcPts val="450"/>
               </a:spcBef>
-              <a:buNone/>
-            </a:pPr>
-            <a:r>
-              <a:rPr lang="en-US" sz="1650" b="1" dirty="0">
-                <a:solidFill>
-                  <a:srgbClr val="0D7377"/>
-                </a:solidFill>
-                <a:latin typeface="Segoe UI"/>
-                <a:cs typeface="Segoe UI"/>
-              </a:rPr>
-              <a:t>2.  </a:t>
-            </a:r>
+              <a:buClr>
+                <a:srgbClr val="0D7377"/>
+              </a:buClr>
+              <a:buFont typeface="Arial"/>
+              <a:buChar char="•"/>
+            </a:pPr>
             <a:r>
               <a:rPr lang="en-US" sz="1650" dirty="0">
                 <a:solidFill>
                   <a:srgbClr val="000000"/>
                 </a:solidFill>
-                <a:latin typeface="Segoe UI"/>
-                <a:cs typeface="Segoe UI"/>
+                <a:latin typeface="Arial"/>
+                <a:cs typeface="Arial"/>
               </a:rPr>
               <a:t>Kiểm định nào được dùng, và vì sao?</a:t>
             </a:r>
@@ -15345,25 +15249,19 @@
               <a:spcBef>
                 <a:spcPts val="450"/>
               </a:spcBef>
-              <a:buNone/>
-            </a:pPr>
-            <a:r>
-              <a:rPr lang="en-US" sz="1650" b="1" dirty="0">
-                <a:solidFill>
-                  <a:srgbClr val="0D7377"/>
-                </a:solidFill>
-                <a:latin typeface="Segoe UI"/>
-                <a:cs typeface="Segoe UI"/>
-              </a:rPr>
-              <a:t>3.  </a:t>
-            </a:r>
+              <a:buClr>
+                <a:srgbClr val="0D7377"/>
+              </a:buClr>
+              <a:buFont typeface="Arial"/>
+              <a:buChar char="•"/>
+            </a:pPr>
             <a:r>
               <a:rPr lang="en-US" sz="1650" dirty="0">
                 <a:solidFill>
                   <a:srgbClr val="000000"/>
                 </a:solidFill>
-                <a:latin typeface="Segoe UI"/>
-                <a:cs typeface="Segoe UI"/>
+                <a:latin typeface="Arial"/>
+                <a:cs typeface="Arial"/>
               </a:rPr>
               <a:t>Viết kết quả như một tác động kèm 95% CI (hoặc trung vị kèm IQR)</a:t>
             </a:r>
@@ -15376,25 +15274,19 @@
               <a:spcBef>
                 <a:spcPts val="450"/>
               </a:spcBef>
-              <a:buNone/>
-            </a:pPr>
-            <a:r>
-              <a:rPr lang="en-US" sz="1650" b="1" dirty="0">
-                <a:solidFill>
-                  <a:srgbClr val="0D7377"/>
-                </a:solidFill>
-                <a:latin typeface="Segoe UI"/>
-                <a:cs typeface="Segoe UI"/>
-              </a:rPr>
-              <a:t>4.  </a:t>
-            </a:r>
+              <a:buClr>
+                <a:srgbClr val="0D7377"/>
+              </a:buClr>
+              <a:buFont typeface="Arial"/>
+              <a:buChar char="•"/>
+            </a:pPr>
             <a:r>
               <a:rPr lang="en-US" sz="1650" dirty="0">
                 <a:solidFill>
                   <a:srgbClr val="000000"/>
                 </a:solidFill>
-                <a:latin typeface="Segoe UI"/>
-                <a:cs typeface="Segoe UI"/>
+                <a:latin typeface="Arial"/>
+                <a:cs typeface="Arial"/>
               </a:rPr>
               <a:t>Viết một câu cho phần Kết quả: không chỉ ghi 'có ý nghĩa', không dùng từ nhân quả</a:t>
             </a:r>
@@ -15407,25 +15299,19 @@
               <a:spcBef>
                 <a:spcPts val="450"/>
               </a:spcBef>
-              <a:buNone/>
-            </a:pPr>
-            <a:r>
-              <a:rPr lang="en-US" sz="1650" b="1" dirty="0">
-                <a:solidFill>
-                  <a:srgbClr val="0D7377"/>
-                </a:solidFill>
-                <a:latin typeface="Segoe UI"/>
-                <a:cs typeface="Segoe UI"/>
-              </a:rPr>
-              <a:t>5.  </a:t>
-            </a:r>
+              <a:buClr>
+                <a:srgbClr val="0D7377"/>
+              </a:buClr>
+              <a:buFont typeface="Arial"/>
+              <a:buChar char="•"/>
+            </a:pPr>
             <a:r>
               <a:rPr lang="en-US" sz="1650" dirty="0">
                 <a:solidFill>
                   <a:srgbClr val="000000"/>
                 </a:solidFill>
-                <a:latin typeface="Segoe UI"/>
-                <a:cs typeface="Segoe UI"/>
+                <a:latin typeface="Arial"/>
+                <a:cs typeface="Arial"/>
               </a:rPr>
               <a:t>Ghi một lý do khiến phép so sánh có thể bị sai lệch</a:t>
             </a:r>
@@ -15469,8 +15355,8 @@
                 <a:solidFill>
                   <a:srgbClr val="0D7377"/>
                 </a:solidFill>
-                <a:latin typeface="Segoe UI"/>
-                <a:cs typeface="Segoe UI"/>
+                <a:latin typeface="Arial"/>
+                <a:cs typeface="Arial"/>
               </a:rPr>
               <a:t>Tránh</a:t>
             </a:r>
@@ -15491,8 +15377,8 @@
                 <a:solidFill>
                   <a:srgbClr val="000000"/>
                 </a:solidFill>
-                <a:latin typeface="Segoe UI"/>
-                <a:cs typeface="Segoe UI"/>
+                <a:latin typeface="Arial"/>
+                <a:cs typeface="Arial"/>
               </a:rPr>
               <a:t>Chỉ có giá trị p</a:t>
             </a:r>
@@ -15513,8 +15399,8 @@
                 <a:solidFill>
                   <a:srgbClr val="000000"/>
                 </a:solidFill>
-                <a:latin typeface="Segoe UI"/>
-                <a:cs typeface="Segoe UI"/>
+                <a:latin typeface="Arial"/>
+                <a:cs typeface="Arial"/>
               </a:rPr>
               <a:t>'chứng minh', 'gây ra'</a:t>
             </a:r>
@@ -15535,8 +15421,8 @@
                 <a:solidFill>
                   <a:srgbClr val="000000"/>
                 </a:solidFill>
-                <a:latin typeface="Segoe UI"/>
-                <a:cs typeface="Segoe UI"/>
+                <a:latin typeface="Arial"/>
+                <a:cs typeface="Arial"/>
               </a:rPr>
               <a:t>'xu hướng' khi p &gt; 0.05</a:t>
             </a:r>
@@ -15557,8 +15443,8 @@
                 <a:solidFill>
                   <a:srgbClr val="000000"/>
                 </a:solidFill>
-                <a:latin typeface="Segoe UI"/>
-                <a:cs typeface="Segoe UI"/>
+                <a:latin typeface="Arial"/>
+                <a:cs typeface="Arial"/>
               </a:rPr>
               <a:t>Quên ghi n</a:t>
             </a:r>
@@ -15604,8 +15490,8 @@
                 <a:solidFill>
                   <a:srgbClr val="0D7377"/>
                 </a:solidFill>
-                <a:latin typeface="Segoe UI"/>
-                <a:cs typeface="Segoe UI"/>
+                <a:latin typeface="Arial"/>
+                <a:cs typeface="Arial"/>
               </a:rPr>
               <a:t>SẢN PHẨM   </a:t>
             </a:r>
@@ -15614,8 +15500,8 @@
                 <a:solidFill>
                   <a:srgbClr val="000000"/>
                 </a:solidFill>
-                <a:latin typeface="Segoe UI"/>
-                <a:cs typeface="Segoe UI"/>
+                <a:latin typeface="Arial"/>
+                <a:cs typeface="Arial"/>
               </a:rPr>
               <a:t>Một câu Kết quả cho kết cục của nhóm (bài 4)</a:t>
             </a:r>
@@ -15652,7 +15538,7 @@
                     <a:lumMod val="50000"/>
                   </a:schemeClr>
                 </a:solidFill>
-                <a:latin typeface="Verdana"/>
+                <a:latin typeface="Arial"/>
               </a:rPr>
               <a:t>Neudata | #ClearDataClearImpact</a:t>
             </a:r>
@@ -15782,8 +15668,8 @@
                 <a:solidFill>
                   <a:srgbClr val="0D7377"/>
                 </a:solidFill>
-                <a:latin typeface="Segoe UI"/>
-                <a:cs typeface="Segoe UI"/>
+                <a:latin typeface="Arial"/>
+                <a:cs typeface="Arial"/>
               </a:rPr>
               <a:t>Ôn tập: Buổi 5 trong ba câu hỏi</a:t>
             </a:r>
@@ -15853,8 +15739,8 @@
                 <a:solidFill>
                   <a:srgbClr val="FFFFFF"/>
                 </a:solidFill>
-                <a:latin typeface="Segoe UI"/>
-                <a:cs typeface="Segoe UI"/>
+                <a:latin typeface="Arial"/>
+                <a:cs typeface="Arial"/>
               </a:rPr>
               <a:t>CÂU HỎI NHANH   |   10 phút</a:t>
             </a:r>
@@ -15891,25 +15777,19 @@
               <a:spcBef>
                 <a:spcPts val="450"/>
               </a:spcBef>
-              <a:buNone/>
-            </a:pPr>
-            <a:r>
-              <a:rPr lang="en-US" sz="1650" b="1" dirty="0">
-                <a:solidFill>
-                  <a:srgbClr val="6C3483"/>
-                </a:solidFill>
-                <a:latin typeface="Segoe UI"/>
-                <a:cs typeface="Segoe UI"/>
-              </a:rPr>
-              <a:t>1.  </a:t>
-            </a:r>
+              <a:buClr>
+                <a:srgbClr val="6C3483"/>
+              </a:buClr>
+              <a:buFont typeface="Arial"/>
+              <a:buChar char="•"/>
+            </a:pPr>
             <a:r>
               <a:rPr lang="en-US" sz="1650" dirty="0">
                 <a:solidFill>
                   <a:srgbClr val="000000"/>
                 </a:solidFill>
-                <a:latin typeface="Segoe UI"/>
-                <a:cs typeface="Segoe UI"/>
+                <a:latin typeface="Arial"/>
+                <a:cs typeface="Arial"/>
               </a:rPr>
               <a:t>C1. Thời gian nằm ICU của 300 bệnh nhân lệch phải. Đưa cách tóm tắt nào vào Bảng 1?</a:t>
             </a:r>
@@ -15922,25 +15802,19 @@
               <a:spcBef>
                 <a:spcPts val="450"/>
               </a:spcBef>
-              <a:buNone/>
-            </a:pPr>
-            <a:r>
-              <a:rPr lang="en-US" sz="1650" b="1" dirty="0">
-                <a:solidFill>
-                  <a:srgbClr val="6C3483"/>
-                </a:solidFill>
-                <a:latin typeface="Segoe UI"/>
-                <a:cs typeface="Segoe UI"/>
-              </a:rPr>
-              <a:t>2.  </a:t>
-            </a:r>
+              <a:buClr>
+                <a:srgbClr val="6C3483"/>
+              </a:buClr>
+              <a:buFont typeface="Arial"/>
+              <a:buChar char="•"/>
+            </a:pPr>
             <a:r>
               <a:rPr lang="en-US" sz="1650" dirty="0">
                 <a:solidFill>
                   <a:srgbClr val="000000"/>
                 </a:solidFill>
-                <a:latin typeface="Segoe UI"/>
-                <a:cs typeface="Segoe UI"/>
+                <a:latin typeface="Arial"/>
+                <a:cs typeface="Arial"/>
               </a:rPr>
               <a:t>C2. Một mục CRF ghi 'Lactat: ____'. Nêu hai điều còn thiếu.</a:t>
             </a:r>
@@ -15953,25 +15827,19 @@
               <a:spcBef>
                 <a:spcPts val="450"/>
               </a:spcBef>
-              <a:buNone/>
-            </a:pPr>
-            <a:r>
-              <a:rPr lang="en-US" sz="1650" b="1" dirty="0">
-                <a:solidFill>
-                  <a:srgbClr val="6C3483"/>
-                </a:solidFill>
-                <a:latin typeface="Segoe UI"/>
-                <a:cs typeface="Segoe UI"/>
-              </a:rPr>
-              <a:t>3.  </a:t>
-            </a:r>
+              <a:buClr>
+                <a:srgbClr val="6C3483"/>
+              </a:buClr>
+              <a:buFont typeface="Arial"/>
+              <a:buChar char="•"/>
+            </a:pPr>
             <a:r>
               <a:rPr lang="en-US" sz="1650" dirty="0">
                 <a:solidFill>
                   <a:srgbClr val="000000"/>
                 </a:solidFill>
-                <a:latin typeface="Segoe UI"/>
-                <a:cs typeface="Segoe UI"/>
+                <a:latin typeface="Arial"/>
+                <a:cs typeface="Arial"/>
               </a:rPr>
               <a:t>C3. Trong dữ liệu thô FLUID-ICU, có một tuổi là 210. Phép kiểm tra nào bắt được, và ghi gì vào nhật ký làm sạch?</a:t>
             </a:r>
@@ -15984,25 +15852,19 @@
               <a:spcBef>
                 <a:spcPts val="450"/>
               </a:spcBef>
-              <a:buNone/>
-            </a:pPr>
-            <a:r>
-              <a:rPr lang="en-US" sz="1650" b="1" dirty="0">
-                <a:solidFill>
-                  <a:srgbClr val="6C3483"/>
-                </a:solidFill>
-                <a:latin typeface="Segoe UI"/>
-                <a:cs typeface="Segoe UI"/>
-              </a:rPr>
-              <a:t>4.  </a:t>
-            </a:r>
+              <a:buClr>
+                <a:srgbClr val="6C3483"/>
+              </a:buClr>
+              <a:buFont typeface="Arial"/>
+              <a:buChar char="•"/>
+            </a:pPr>
             <a:r>
               <a:rPr lang="en-US" sz="1650" dirty="0">
                 <a:solidFill>
                   <a:srgbClr val="000000"/>
                 </a:solidFill>
-                <a:latin typeface="Segoe UI"/>
-                <a:cs typeface="Segoe UI"/>
+                <a:latin typeface="Arial"/>
+                <a:cs typeface="Arial"/>
               </a:rPr>
               <a:t>Trả lời một mình (2 phút), rồi so sánh với người bên cạnh (2 phút)</a:t>
             </a:r>
@@ -16046,8 +15908,8 @@
                 <a:solidFill>
                   <a:srgbClr val="6C3483"/>
                 </a:solidFill>
-                <a:latin typeface="Segoe UI"/>
-                <a:cs typeface="Segoe UI"/>
+                <a:latin typeface="Arial"/>
+                <a:cs typeface="Arial"/>
               </a:rPr>
               <a:t>Đáp án (công bố sau)</a:t>
             </a:r>
@@ -16068,8 +15930,8 @@
                 <a:solidFill>
                   <a:srgbClr val="000000"/>
                 </a:solidFill>
-                <a:latin typeface="Segoe UI"/>
-                <a:cs typeface="Segoe UI"/>
+                <a:latin typeface="Arial"/>
+                <a:cs typeface="Arial"/>
               </a:rPr>
               <a:t>C1: trung vị (IQR)</a:t>
             </a:r>
@@ -16090,8 +15952,8 @@
                 <a:solidFill>
                   <a:srgbClr val="000000"/>
                 </a:solidFill>
-                <a:latin typeface="Segoe UI"/>
-                <a:cs typeface="Segoe UI"/>
+                <a:latin typeface="Arial"/>
+                <a:cs typeface="Arial"/>
               </a:rPr>
               <a:t>C2: đơn vị (mmol/L), thời điểm, lựa chọn 'không làm'</a:t>
             </a:r>
@@ -16112,8 +15974,8 @@
                 <a:solidFill>
                   <a:srgbClr val="000000"/>
                 </a:solidFill>
-                <a:latin typeface="Segoe UI"/>
-                <a:cs typeface="Segoe UI"/>
+                <a:latin typeface="Arial"/>
+                <a:cs typeface="Arial"/>
               </a:rPr>
               <a:t>C3: kiểm tra khoảng giá trị; giá trị, cách sửa, lý do, ai và khi nào</a:t>
             </a:r>
@@ -16159,8 +16021,8 @@
                 <a:solidFill>
                   <a:srgbClr val="6C3483"/>
                 </a:solidFill>
-                <a:latin typeface="Segoe UI"/>
-                <a:cs typeface="Segoe UI"/>
+                <a:latin typeface="Arial"/>
+                <a:cs typeface="Arial"/>
               </a:rPr>
               <a:t>SẢN PHẨM   </a:t>
             </a:r>
@@ -16169,8 +16031,8 @@
                 <a:solidFill>
                   <a:srgbClr val="000000"/>
                 </a:solidFill>
-                <a:latin typeface="Segoe UI"/>
-                <a:cs typeface="Segoe UI"/>
+                <a:latin typeface="Arial"/>
+                <a:cs typeface="Arial"/>
               </a:rPr>
               <a:t>Mọi người nắm lại loại dữ liệu, mục CRF và làm sạch dữ liệu</a:t>
             </a:r>
@@ -16207,7 +16069,7 @@
                     <a:lumMod val="50000"/>
                   </a:schemeClr>
                 </a:solidFill>
-                <a:latin typeface="Verdana"/>
+                <a:latin typeface="Arial"/>
               </a:rPr>
               <a:t>Neudata | #ClearDataClearImpact</a:t>
             </a:r>
@@ -16337,8 +16199,8 @@
                 <a:solidFill>
                   <a:srgbClr val="0D7377"/>
                 </a:solidFill>
-                <a:latin typeface="Segoe UI"/>
-                <a:cs typeface="Segoe UI"/>
+                <a:latin typeface="Arial"/>
+                <a:cs typeface="Arial"/>
               </a:rPr>
               <a:t>Giải lao</a:t>
             </a:r>
@@ -16408,8 +16270,8 @@
                 <a:solidFill>
                   <a:srgbClr val="FFFFFF"/>
                 </a:solidFill>
-                <a:latin typeface="Segoe UI"/>
-                <a:cs typeface="Segoe UI"/>
+                <a:latin typeface="Arial"/>
+                <a:cs typeface="Arial"/>
               </a:rPr>
               <a:t>GIẢI LAO   |   15 phút</a:t>
             </a:r>
@@ -16446,25 +16308,19 @@
               <a:spcBef>
                 <a:spcPts val="450"/>
               </a:spcBef>
-              <a:buNone/>
-            </a:pPr>
-            <a:r>
-              <a:rPr lang="en-US" sz="1650" b="1" dirty="0">
-                <a:solidFill>
-                  <a:srgbClr val="8A99A3"/>
-                </a:solidFill>
-                <a:latin typeface="Segoe UI"/>
-                <a:cs typeface="Segoe UI"/>
-              </a:rPr>
-              <a:t>1.  </a:t>
-            </a:r>
+              <a:buClr>
+                <a:srgbClr val="8A99A3"/>
+              </a:buClr>
+              <a:buFont typeface="Arial"/>
+              <a:buChar char="•"/>
+            </a:pPr>
             <a:r>
               <a:rPr lang="en-US" sz="1650" dirty="0">
                 <a:solidFill>
                   <a:srgbClr val="000000"/>
                 </a:solidFill>
-                <a:latin typeface="Segoe UI"/>
-                <a:cs typeface="Segoe UI"/>
+                <a:latin typeface="Arial"/>
+                <a:cs typeface="Arial"/>
               </a:rPr>
               <a:t>Vận động, cà phê, hít thở không khí</a:t>
             </a:r>
@@ -16477,25 +16333,19 @@
               <a:spcBef>
                 <a:spcPts val="450"/>
               </a:spcBef>
-              <a:buNone/>
-            </a:pPr>
-            <a:r>
-              <a:rPr lang="en-US" sz="1650" b="1" dirty="0">
-                <a:solidFill>
-                  <a:srgbClr val="8A99A3"/>
-                </a:solidFill>
-                <a:latin typeface="Segoe UI"/>
-                <a:cs typeface="Segoe UI"/>
-              </a:rPr>
-              <a:t>2.  </a:t>
-            </a:r>
+              <a:buClr>
+                <a:srgbClr val="8A99A3"/>
+              </a:buClr>
+              <a:buFont typeface="Arial"/>
+              <a:buChar char="•"/>
+            </a:pPr>
             <a:r>
               <a:rPr lang="en-US" sz="1650" dirty="0">
                 <a:solidFill>
                   <a:srgbClr val="000000"/>
                 </a:solidFill>
-                <a:latin typeface="Segoe UI"/>
-                <a:cs typeface="Segoe UI"/>
+                <a:latin typeface="Arial"/>
+                <a:cs typeface="Arial"/>
               </a:rPr>
               <a:t>Các nhóm: ghi một câu hỏi về kết quả so sánh của nhóm</a:t>
             </a:r>
@@ -16508,25 +16358,19 @@
               <a:spcBef>
                 <a:spcPts val="450"/>
               </a:spcBef>
-              <a:buNone/>
-            </a:pPr>
-            <a:r>
-              <a:rPr lang="en-US" sz="1650" b="1" dirty="0">
-                <a:solidFill>
-                  <a:srgbClr val="8A99A3"/>
-                </a:solidFill>
-                <a:latin typeface="Segoe UI"/>
-                <a:cs typeface="Segoe UI"/>
-              </a:rPr>
-              <a:t>3.  </a:t>
-            </a:r>
+              <a:buClr>
+                <a:srgbClr val="8A99A3"/>
+              </a:buClr>
+              <a:buFont typeface="Arial"/>
+              <a:buChar char="•"/>
+            </a:pPr>
             <a:r>
               <a:rPr lang="en-US" sz="1650" dirty="0">
                 <a:solidFill>
                   <a:srgbClr val="000000"/>
                 </a:solidFill>
-                <a:latin typeface="Segoe UI"/>
-                <a:cs typeface="Segoe UI"/>
+                <a:latin typeface="Arial"/>
+                <a:cs typeface="Arial"/>
               </a:rPr>
               <a:t>Chúng ta bắt đầu lại với 6.3: mối liên quan và mô hình</a:t>
             </a:r>
@@ -16570,8 +16414,8 @@
                 <a:solidFill>
                   <a:srgbClr val="8A99A3"/>
                 </a:solidFill>
-                <a:latin typeface="Segoe UI"/>
-                <a:cs typeface="Segoe UI"/>
+                <a:latin typeface="Arial"/>
+                <a:cs typeface="Arial"/>
               </a:rPr>
               <a:t>Sau giải lao</a:t>
             </a:r>
@@ -16592,8 +16436,8 @@
                 <a:solidFill>
                   <a:srgbClr val="000000"/>
                 </a:solidFill>
-                <a:latin typeface="Segoe UI"/>
-                <a:cs typeface="Segoe UI"/>
+                <a:latin typeface="Arial"/>
+                <a:cs typeface="Arial"/>
               </a:rPr>
               <a:t>Tương quan</a:t>
             </a:r>
@@ -16614,8 +16458,8 @@
                 <a:solidFill>
                   <a:srgbClr val="000000"/>
                 </a:solidFill>
-                <a:latin typeface="Segoe UI"/>
-                <a:cs typeface="Segoe UI"/>
+                <a:latin typeface="Arial"/>
+                <a:cs typeface="Arial"/>
               </a:rPr>
               <a:t>Hồi quy tuyến tính và logistic</a:t>
             </a:r>
@@ -16636,8 +16480,8 @@
                 <a:solidFill>
                   <a:srgbClr val="000000"/>
                 </a:solidFill>
-                <a:latin typeface="Segoe UI"/>
-                <a:cs typeface="Segoe UI"/>
+                <a:latin typeface="Arial"/>
+                <a:cs typeface="Arial"/>
               </a:rPr>
               <a:t>Hiệu chỉnh</a:t>
             </a:r>
@@ -16658,8 +16502,8 @@
                 <a:solidFill>
                   <a:srgbClr val="000000"/>
                 </a:solidFill>
-                <a:latin typeface="Segoe UI"/>
-                <a:cs typeface="Segoe UI"/>
+                <a:latin typeface="Arial"/>
+                <a:cs typeface="Arial"/>
               </a:rPr>
               <a:t>Kaplan-Meier và Cox</a:t>
             </a:r>
@@ -16680,8 +16524,8 @@
                 <a:solidFill>
                   <a:srgbClr val="000000"/>
                 </a:solidFill>
-                <a:latin typeface="Segoe UI"/>
-                <a:cs typeface="Segoe UI"/>
+                <a:latin typeface="Arial"/>
+                <a:cs typeface="Arial"/>
               </a:rPr>
               <a:t>Mô hình trên bộ dữ liệu</a:t>
             </a:r>
@@ -16718,7 +16562,7 @@
                     <a:lumMod val="50000"/>
                   </a:schemeClr>
                 </a:solidFill>
-                <a:latin typeface="Verdana"/>
+                <a:latin typeface="Arial"/>
               </a:rPr>
               <a:t>Neudata | #ClearDataClearImpact</a:t>
             </a:r>
@@ -16848,8 +16692,8 @@
                 <a:solidFill>
                   <a:srgbClr val="0D7377"/>
                 </a:solidFill>
-                <a:latin typeface="Segoe UI"/>
-                <a:cs typeface="Segoe UI"/>
+                <a:latin typeface="Arial"/>
+                <a:cs typeface="Arial"/>
               </a:rPr>
               <a:t>6.3 Mối liên quan và mô hình (khái niệm)</a:t>
             </a:r>
@@ -16918,8 +16762,8 @@
                 <a:solidFill>
                   <a:srgbClr val="0D7377"/>
                 </a:solidFill>
-                <a:latin typeface="Segoe UI"/>
-                <a:cs typeface="Segoe UI"/>
+                <a:latin typeface="Arial"/>
+                <a:cs typeface="Arial"/>
               </a:rPr>
               <a:t>Không cần chạy mô hình mới đọc được mô hình.</a:t>
             </a:r>
@@ -16936,8 +16780,8 @@
                 <a:solidFill>
                   <a:srgbClr val="595959"/>
                 </a:solidFill>
-                <a:latin typeface="Segoe UI"/>
-                <a:cs typeface="Segoe UI"/>
+                <a:latin typeface="Arial"/>
+                <a:cs typeface="Arial"/>
               </a:rPr>
               <a:t>6.3 Mối liên quan và mô hình  |  35 phút</a:t>
             </a:r>
@@ -16974,7 +16818,7 @@
                     <a:lumMod val="50000"/>
                   </a:schemeClr>
                 </a:solidFill>
-                <a:latin typeface="Verdana"/>
+                <a:latin typeface="Arial"/>
               </a:rPr>
               <a:t>Neudata | #ClearDataClearImpact</a:t>
             </a:r>
@@ -17104,8 +16948,8 @@
                 <a:solidFill>
                   <a:srgbClr val="0D7377"/>
                 </a:solidFill>
-                <a:latin typeface="Segoe UI"/>
-                <a:cs typeface="Segoe UI"/>
+                <a:latin typeface="Arial"/>
+                <a:cs typeface="Arial"/>
               </a:rPr>
               <a:t>Tương quan: hai con số cùng thay đổi chặt chẽ đến đâu</a:t>
             </a:r>
@@ -17201,8 +17045,8 @@
                 <a:solidFill>
                   <a:srgbClr val="FFFFFF"/>
                 </a:solidFill>
-                <a:latin typeface="Segoe UI"/>
-                <a:cs typeface="Segoe UI"/>
+                <a:latin typeface="Arial"/>
+                <a:cs typeface="Arial"/>
               </a:rPr>
               <a:t>THÔNG ĐIỆP CHÍNH   </a:t>
             </a:r>
@@ -17211,8 +17055,8 @@
                 <a:solidFill>
                   <a:srgbClr val="FFFFFF"/>
                 </a:solidFill>
-                <a:latin typeface="Segoe UI"/>
-                <a:cs typeface="Segoe UI"/>
+                <a:latin typeface="Arial"/>
+                <a:cs typeface="Arial"/>
               </a:rPr>
               <a:t>r đo liên quan theo đường thẳng, từ -1 đến +1. Luôn nhìn biểu đồ.</a:t>
             </a:r>
@@ -17249,7 +17093,7 @@
                     <a:lumMod val="50000"/>
                   </a:schemeClr>
                 </a:solidFill>
-                <a:latin typeface="Verdana"/>
+                <a:latin typeface="Arial"/>
               </a:rPr>
               <a:t>Neudata | #ClearDataClearImpact</a:t>
             </a:r>
@@ -17379,8 +17223,8 @@
                 <a:solidFill>
                   <a:srgbClr val="0D7377"/>
                 </a:solidFill>
-                <a:latin typeface="Segoe UI"/>
-                <a:cs typeface="Segoe UI"/>
+                <a:latin typeface="Arial"/>
+                <a:cs typeface="Arial"/>
               </a:rPr>
               <a:t>Hồi quy tuyến tính: đường thẳng phù hợp nhất</a:t>
             </a:r>
@@ -17476,8 +17320,8 @@
                 <a:solidFill>
                   <a:srgbClr val="FFFFFF"/>
                 </a:solidFill>
-                <a:latin typeface="Segoe UI"/>
-                <a:cs typeface="Segoe UI"/>
+                <a:latin typeface="Arial"/>
+                <a:cs typeface="Arial"/>
               </a:rPr>
               <a:t>THÔNG ĐIỆP CHÍNH   </a:t>
             </a:r>
@@ -17486,8 +17330,8 @@
                 <a:solidFill>
                   <a:srgbClr val="FFFFFF"/>
                 </a:solidFill>
-                <a:latin typeface="Segoe UI"/>
-                <a:cs typeface="Segoe UI"/>
+                <a:latin typeface="Arial"/>
+                <a:cs typeface="Arial"/>
               </a:rPr>
               <a:t>Hệ số góc = thay đổi của kết cục theo mỗi đơn vị phơi nhiễm; R² = mức giải thích.</a:t>
             </a:r>
@@ -17524,7 +17368,7 @@
                     <a:lumMod val="50000"/>
                   </a:schemeClr>
                 </a:solidFill>
-                <a:latin typeface="Verdana"/>
+                <a:latin typeface="Arial"/>
               </a:rPr>
               <a:t>Neudata | #ClearDataClearImpact</a:t>
             </a:r>
@@ -17654,8 +17498,8 @@
                 <a:solidFill>
                   <a:srgbClr val="0D7377"/>
                 </a:solidFill>
-                <a:latin typeface="Segoe UI"/>
-                <a:cs typeface="Segoe UI"/>
+                <a:latin typeface="Arial"/>
+                <a:cs typeface="Arial"/>
               </a:rPr>
               <a:t>Hồi quy logistic: đường cong chữ S cho kết cục có/không</a:t>
             </a:r>
@@ -17751,8 +17595,8 @@
                 <a:solidFill>
                   <a:srgbClr val="FFFFFF"/>
                 </a:solidFill>
-                <a:latin typeface="Segoe UI"/>
-                <a:cs typeface="Segoe UI"/>
+                <a:latin typeface="Arial"/>
+                <a:cs typeface="Arial"/>
               </a:rPr>
               <a:t>THÔNG ĐIỆP CHÍNH   </a:t>
             </a:r>
@@ -17761,8 +17605,8 @@
                 <a:solidFill>
                   <a:srgbClr val="FFFFFF"/>
                 </a:solidFill>
-                <a:latin typeface="Segoe UI"/>
-                <a:cs typeface="Segoe UI"/>
+                <a:latin typeface="Arial"/>
+                <a:cs typeface="Arial"/>
               </a:rPr>
               <a:t>Hồi quy logistic biến kết cục có/không thành tỉ số chênh theo mỗi đơn vị phơi nhiễm.</a:t>
             </a:r>
@@ -17799,7 +17643,7 @@
                     <a:lumMod val="50000"/>
                   </a:schemeClr>
                 </a:solidFill>
-                <a:latin typeface="Verdana"/>
+                <a:latin typeface="Arial"/>
               </a:rPr>
               <a:t>Neudata | #ClearDataClearImpact</a:t>
             </a:r>
@@ -17929,8 +17773,8 @@
                 <a:solidFill>
                   <a:srgbClr val="0D7377"/>
                 </a:solidFill>
-                <a:latin typeface="Segoe UI"/>
-                <a:cs typeface="Segoe UI"/>
+                <a:latin typeface="Arial"/>
+                <a:cs typeface="Arial"/>
               </a:rPr>
               <a:t>Mô hình nào? Tùy vào kết cục</a:t>
             </a:r>
@@ -18026,8 +17870,8 @@
                 <a:solidFill>
                   <a:srgbClr val="FFFFFF"/>
                 </a:solidFill>
-                <a:latin typeface="Segoe UI"/>
-                <a:cs typeface="Segoe UI"/>
+                <a:latin typeface="Arial"/>
+                <a:cs typeface="Arial"/>
               </a:rPr>
               <a:t>THÔNG ĐIỆP CHÍNH   </a:t>
             </a:r>
@@ -18036,8 +17880,8 @@
                 <a:solidFill>
                   <a:srgbClr val="FFFFFF"/>
                 </a:solidFill>
-                <a:latin typeface="Segoe UI"/>
-                <a:cs typeface="Segoe UI"/>
+                <a:latin typeface="Arial"/>
+                <a:cs typeface="Arial"/>
               </a:rPr>
               <a:t>Loại kết cục cho biết mô hình và con số cần đọc.</a:t>
             </a:r>
@@ -18074,7 +17918,7 @@
                     <a:lumMod val="50000"/>
                   </a:schemeClr>
                 </a:solidFill>
-                <a:latin typeface="Verdana"/>
+                <a:latin typeface="Arial"/>
               </a:rPr>
               <a:t>Neudata | #ClearDataClearImpact</a:t>
             </a:r>
@@ -18204,8 +18048,8 @@
                 <a:solidFill>
                   <a:srgbClr val="0D7377"/>
                 </a:solidFill>
-                <a:latin typeface="Segoe UI"/>
-                <a:cs typeface="Segoe UI"/>
+                <a:latin typeface="Arial"/>
+                <a:cs typeface="Arial"/>
               </a:rPr>
               <a:t>'Hiệu chỉnh' nghĩa là gì: so sánh những người giống nhau</a:t>
             </a:r>
@@ -18295,8 +18139,8 @@
                 <a:solidFill>
                   <a:srgbClr val="595959"/>
                 </a:solidFill>
-                <a:latin typeface="Segoe UI"/>
-                <a:cs typeface="Segoe UI"/>
+                <a:latin typeface="Arial"/>
+                <a:cs typeface="Arial"/>
               </a:rPr>
               <a:t>Số liệu mô phỏng</a:t>
             </a:r>
@@ -18340,8 +18184,8 @@
                 <a:solidFill>
                   <a:srgbClr val="FFFFFF"/>
                 </a:solidFill>
-                <a:latin typeface="Segoe UI"/>
-                <a:cs typeface="Segoe UI"/>
+                <a:latin typeface="Arial"/>
+                <a:cs typeface="Arial"/>
               </a:rPr>
               <a:t>THÔNG ĐIỆP CHÍNH   </a:t>
             </a:r>
@@ -18350,8 +18194,8 @@
                 <a:solidFill>
                   <a:srgbClr val="FFFFFF"/>
                 </a:solidFill>
-                <a:latin typeface="Segoe UI"/>
-                <a:cs typeface="Segoe UI"/>
+                <a:latin typeface="Arial"/>
+                <a:cs typeface="Arial"/>
               </a:rPr>
               <a:t>Hiệu chỉnh = so sánh những bệnh nhân giống nhau về các yếu tố gây nhiễu.</a:t>
             </a:r>
@@ -18388,7 +18232,7 @@
                     <a:lumMod val="50000"/>
                   </a:schemeClr>
                 </a:solidFill>
-                <a:latin typeface="Verdana"/>
+                <a:latin typeface="Arial"/>
               </a:rPr>
               <a:t>Neudata | #ClearDataClearImpact</a:t>
             </a:r>
@@ -18518,8 +18362,8 @@
                 <a:solidFill>
                   <a:srgbClr val="0D7377"/>
                 </a:solidFill>
-                <a:latin typeface="Segoe UI"/>
-                <a:cs typeface="Segoe UI"/>
+                <a:latin typeface="Arial"/>
+                <a:cs typeface="Arial"/>
               </a:rPr>
               <a:t>Đọc bảng hồi quy, từng dòng một</a:t>
             </a:r>
@@ -18615,8 +18459,8 @@
                 <a:solidFill>
                   <a:srgbClr val="FFFFFF"/>
                 </a:solidFill>
-                <a:latin typeface="Segoe UI"/>
-                <a:cs typeface="Segoe UI"/>
+                <a:latin typeface="Arial"/>
+                <a:cs typeface="Arial"/>
               </a:rPr>
               <a:t>THÔNG ĐIỆP CHÍNH   </a:t>
             </a:r>
@@ -18625,8 +18469,8 @@
                 <a:solidFill>
                   <a:srgbClr val="FFFFFF"/>
                 </a:solidFill>
-                <a:latin typeface="Segoe UI"/>
-                <a:cs typeface="Segoe UI"/>
+                <a:latin typeface="Arial"/>
+                <a:cs typeface="Arial"/>
               </a:rPr>
               <a:t>Mỗi dòng: so sánh gì, tác động, 95% CI, CI có chứa giá trị không tác động?</a:t>
             </a:r>
@@ -18663,7 +18507,7 @@
                     <a:lumMod val="50000"/>
                   </a:schemeClr>
                 </a:solidFill>
-                <a:latin typeface="Verdana"/>
+                <a:latin typeface="Arial"/>
               </a:rPr>
               <a:t>Neudata | #ClearDataClearImpact</a:t>
             </a:r>
@@ -18793,8 +18637,8 @@
                 <a:solidFill>
                   <a:srgbClr val="0D7377"/>
                 </a:solidFill>
-                <a:latin typeface="Segoe UI"/>
-                <a:cs typeface="Segoe UI"/>
+                <a:latin typeface="Arial"/>
+                <a:cs typeface="Arial"/>
               </a:rPr>
               <a:t>Kiểm tra nhanh: đọc một bảng hồi quy</a:t>
             </a:r>
@@ -18864,8 +18708,8 @@
                 <a:solidFill>
                   <a:srgbClr val="FFFFFF"/>
                 </a:solidFill>
-                <a:latin typeface="Segoe UI"/>
-                <a:cs typeface="Segoe UI"/>
+                <a:latin typeface="Arial"/>
+                <a:cs typeface="Arial"/>
               </a:rPr>
               <a:t>LÀM VIỆC NHÓM   |   5 phút</a:t>
             </a:r>
@@ -18902,25 +18746,19 @@
               <a:spcBef>
                 <a:spcPts val="450"/>
               </a:spcBef>
-              <a:buNone/>
-            </a:pPr>
-            <a:r>
-              <a:rPr lang="en-US" sz="1650" b="1" dirty="0">
-                <a:solidFill>
-                  <a:srgbClr val="0D7377"/>
-                </a:solidFill>
-                <a:latin typeface="Segoe UI"/>
-                <a:cs typeface="Segoe UI"/>
-              </a:rPr>
-              <a:t>1.  </a:t>
-            </a:r>
+              <a:buClr>
+                <a:srgbClr val="0D7377"/>
+              </a:buClr>
+              <a:buFont typeface="Arial"/>
+              <a:buChar char="•"/>
+            </a:pPr>
             <a:r>
               <a:rPr lang="en-US" sz="1650" dirty="0">
                 <a:solidFill>
                   <a:srgbClr val="000000"/>
                 </a:solidFill>
-                <a:latin typeface="Segoe UI"/>
-                <a:cs typeface="Segoe UI"/>
+                <a:latin typeface="Arial"/>
+                <a:cs typeface="Arial"/>
               </a:rPr>
               <a:t>Phiếu bài tập 'Buổi 6, bài 5': bảng giả định về sảng mắc phải trong bệnh viện</a:t>
             </a:r>
@@ -18933,25 +18771,19 @@
               <a:spcBef>
                 <a:spcPts val="450"/>
               </a:spcBef>
-              <a:buNone/>
-            </a:pPr>
-            <a:r>
-              <a:rPr lang="en-US" sz="1650" b="1" dirty="0">
-                <a:solidFill>
-                  <a:srgbClr val="0D7377"/>
-                </a:solidFill>
-                <a:latin typeface="Segoe UI"/>
-                <a:cs typeface="Segoe UI"/>
-              </a:rPr>
-              <a:t>2.  </a:t>
-            </a:r>
+              <a:buClr>
+                <a:srgbClr val="0D7377"/>
+              </a:buClr>
+              <a:buFont typeface="Arial"/>
+              <a:buChar char="•"/>
+            </a:pPr>
             <a:r>
               <a:rPr lang="en-US" sz="1650" dirty="0">
                 <a:solidFill>
                   <a:srgbClr val="000000"/>
                 </a:solidFill>
-                <a:latin typeface="Segoe UI"/>
-                <a:cs typeface="Segoe UI"/>
+                <a:latin typeface="Arial"/>
+                <a:cs typeface="Arial"/>
               </a:rPr>
               <a:t>Mỗi dòng: so sánh gì, tác động, 95% CI, có chứa 1 không?</a:t>
             </a:r>
@@ -18964,25 +18796,19 @@
               <a:spcBef>
                 <a:spcPts val="450"/>
               </a:spcBef>
-              <a:buNone/>
-            </a:pPr>
-            <a:r>
-              <a:rPr lang="en-US" sz="1650" b="1" dirty="0">
-                <a:solidFill>
-                  <a:srgbClr val="0D7377"/>
-                </a:solidFill>
-                <a:latin typeface="Segoe UI"/>
-                <a:cs typeface="Segoe UI"/>
-              </a:rPr>
-              <a:t>3.  </a:t>
-            </a:r>
+              <a:buClr>
+                <a:srgbClr val="0D7377"/>
+              </a:buClr>
+              <a:buFont typeface="Arial"/>
+              <a:buChar char="•"/>
+            </a:pPr>
             <a:r>
               <a:rPr lang="en-US" sz="1650" dirty="0">
                 <a:solidFill>
                   <a:srgbClr val="000000"/>
                 </a:solidFill>
-                <a:latin typeface="Segoe UI"/>
-                <a:cs typeface="Segoe UI"/>
+                <a:latin typeface="Arial"/>
+                <a:cs typeface="Arial"/>
               </a:rPr>
               <a:t>Viết MỘT câu bằng ngôn ngữ dễ hiểu cho phơi nhiễm chính</a:t>
             </a:r>
@@ -18995,25 +18821,19 @@
               <a:spcBef>
                 <a:spcPts val="450"/>
               </a:spcBef>
-              <a:buNone/>
-            </a:pPr>
-            <a:r>
-              <a:rPr lang="en-US" sz="1650" b="1" dirty="0">
-                <a:solidFill>
-                  <a:srgbClr val="0D7377"/>
-                </a:solidFill>
-                <a:latin typeface="Segoe UI"/>
-                <a:cs typeface="Segoe UI"/>
-              </a:rPr>
-              <a:t>4.  </a:t>
-            </a:r>
+              <a:buClr>
+                <a:srgbClr val="0D7377"/>
+              </a:buClr>
+              <a:buFont typeface="Arial"/>
+              <a:buChar char="•"/>
+            </a:pPr>
             <a:r>
               <a:rPr lang="en-US" sz="1650" dirty="0">
                 <a:solidFill>
                   <a:srgbClr val="000000"/>
                 </a:solidFill>
-                <a:latin typeface="Segoe UI"/>
-                <a:cs typeface="Segoe UI"/>
+                <a:latin typeface="Arial"/>
+                <a:cs typeface="Arial"/>
               </a:rPr>
               <a:t>Về nhà: bài 6 (đọc đường cong Kaplan-Meier)</a:t>
             </a:r>
@@ -19057,8 +18877,8 @@
                 <a:solidFill>
                   <a:srgbClr val="0D7377"/>
                 </a:solidFill>
-                <a:latin typeface="Segoe UI"/>
-                <a:cs typeface="Segoe UI"/>
+                <a:latin typeface="Arial"/>
+                <a:cs typeface="Arial"/>
               </a:rPr>
               <a:t>Đọc theo 4 bước</a:t>
             </a:r>
@@ -19079,8 +18899,8 @@
                 <a:solidFill>
                   <a:srgbClr val="000000"/>
                 </a:solidFill>
-                <a:latin typeface="Segoe UI"/>
-                <a:cs typeface="Segoe UI"/>
+                <a:latin typeface="Arial"/>
+                <a:cs typeface="Arial"/>
               </a:rPr>
               <a:t>So sánh cái gì?</a:t>
             </a:r>
@@ -19101,8 +18921,8 @@
                 <a:solidFill>
                   <a:srgbClr val="000000"/>
                 </a:solidFill>
-                <a:latin typeface="Segoe UI"/>
-                <a:cs typeface="Segoe UI"/>
+                <a:latin typeface="Arial"/>
+                <a:cs typeface="Arial"/>
               </a:rPr>
               <a:t>Tác động lớn đến đâu?</a:t>
             </a:r>
@@ -19123,8 +18943,8 @@
                 <a:solidFill>
                   <a:srgbClr val="000000"/>
                 </a:solidFill>
-                <a:latin typeface="Segoe UI"/>
-                <a:cs typeface="Segoe UI"/>
+                <a:latin typeface="Arial"/>
+                <a:cs typeface="Arial"/>
               </a:rPr>
               <a:t>CI rộng đến đâu?</a:t>
             </a:r>
@@ -19145,8 +18965,8 @@
                 <a:solidFill>
                   <a:srgbClr val="000000"/>
                 </a:solidFill>
-                <a:latin typeface="Segoe UI"/>
-                <a:cs typeface="Segoe UI"/>
+                <a:latin typeface="Arial"/>
+                <a:cs typeface="Arial"/>
               </a:rPr>
               <a:t>Có cắt qua 1 (hoặc 0)?</a:t>
             </a:r>
@@ -19192,8 +19012,8 @@
                 <a:solidFill>
                   <a:srgbClr val="0D7377"/>
                 </a:solidFill>
-                <a:latin typeface="Segoe UI"/>
-                <a:cs typeface="Segoe UI"/>
+                <a:latin typeface="Arial"/>
+                <a:cs typeface="Arial"/>
               </a:rPr>
               <a:t>SẢN PHẨM   </a:t>
             </a:r>
@@ -19202,8 +19022,8 @@
                 <a:solidFill>
                   <a:srgbClr val="000000"/>
                 </a:solidFill>
-                <a:latin typeface="Segoe UI"/>
-                <a:cs typeface="Segoe UI"/>
+                <a:latin typeface="Arial"/>
+                <a:cs typeface="Arial"/>
               </a:rPr>
               <a:t>Mỗi cặp có một câu diễn giải đúng, dễ hiểu</a:t>
             </a:r>
@@ -19240,7 +19060,7 @@
                     <a:lumMod val="50000"/>
                   </a:schemeClr>
                 </a:solidFill>
-                <a:latin typeface="Verdana"/>
+                <a:latin typeface="Arial"/>
               </a:rPr>
               <a:t>Neudata | #ClearDataClearImpact</a:t>
             </a:r>
@@ -19370,8 +19190,8 @@
                 <a:solidFill>
                   <a:srgbClr val="0D7377"/>
                 </a:solidFill>
-                <a:latin typeface="Segoe UI"/>
-                <a:cs typeface="Segoe UI"/>
+                <a:latin typeface="Arial"/>
+                <a:cs typeface="Arial"/>
               </a:rPr>
               <a:t>Quá khớp: quá nhiều biến cho quá ít biến cố</a:t>
             </a:r>
@@ -19437,8 +19257,8 @@
                 <a:solidFill>
                   <a:srgbClr val="0D7377"/>
                 </a:solidFill>
-                <a:latin typeface="Segoe UI"/>
-                <a:cs typeface="Segoe UI"/>
+                <a:latin typeface="Arial"/>
+                <a:cs typeface="Arial"/>
               </a:rPr>
               <a:t>Vì sao chọn từng bước gây hiểu nhầm</a:t>
             </a:r>
@@ -19456,8 +19276,8 @@
                 <a:solidFill>
                   <a:srgbClr val="000000"/>
                 </a:solidFill>
-                <a:latin typeface="Segoe UI"/>
-                <a:cs typeface="Segoe UI"/>
+                <a:latin typeface="Arial"/>
+                <a:cs typeface="Arial"/>
               </a:rPr>
               <a:t>Chọn biến theo giá trị p</a:t>
             </a:r>
@@ -19475,8 +19295,8 @@
                 <a:solidFill>
                   <a:srgbClr val="000000"/>
                 </a:solidFill>
-                <a:latin typeface="Segoe UI"/>
-                <a:cs typeface="Segoe UI"/>
+                <a:latin typeface="Arial"/>
+                <a:cs typeface="Arial"/>
               </a:rPr>
               <a:t>Tìm ra 'yếu tố dự báo' ngẫu nhiên</a:t>
             </a:r>
@@ -19494,8 +19314,8 @@
                 <a:solidFill>
                   <a:srgbClr val="000000"/>
                 </a:solidFill>
-                <a:latin typeface="Segoe UI"/>
-                <a:cs typeface="Segoe UI"/>
+                <a:latin typeface="Arial"/>
+                <a:cs typeface="Arial"/>
               </a:rPr>
               <a:t>Tác động quá lớn, CI quá hẹp</a:t>
             </a:r>
@@ -19513,8 +19333,8 @@
                 <a:solidFill>
                   <a:srgbClr val="000000"/>
                 </a:solidFill>
-                <a:latin typeface="Segoe UI"/>
-                <a:cs typeface="Segoe UI"/>
+                <a:latin typeface="Arial"/>
+                <a:cs typeface="Arial"/>
               </a:rPr>
               <a:t>Tốt hơn: chọn yếu tố gây nhiễu từ trước</a:t>
             </a:r>
@@ -19582,8 +19402,8 @@
                 <a:solidFill>
                   <a:srgbClr val="FFFFFF"/>
                 </a:solidFill>
-                <a:latin typeface="Segoe UI"/>
-                <a:cs typeface="Segoe UI"/>
+                <a:latin typeface="Arial"/>
+                <a:cs typeface="Arial"/>
               </a:rPr>
               <a:t>THÔNG ĐIỆP CHÍNH   </a:t>
             </a:r>
@@ -19592,8 +19412,8 @@
                 <a:solidFill>
                   <a:srgbClr val="FFFFFF"/>
                 </a:solidFill>
-                <a:latin typeface="Segoe UI"/>
-                <a:cs typeface="Segoe UI"/>
+                <a:latin typeface="Arial"/>
+                <a:cs typeface="Arial"/>
               </a:rPr>
               <a:t>Dự kiến khoảng 10 biến cố mỗi biến và chọn biến theo kiến thức, không theo p.</a:t>
             </a:r>
@@ -19630,7 +19450,7 @@
                     <a:lumMod val="50000"/>
                   </a:schemeClr>
                 </a:solidFill>
-                <a:latin typeface="Verdana"/>
+                <a:latin typeface="Arial"/>
               </a:rPr>
               <a:t>Neudata | #ClearDataClearImpact</a:t>
             </a:r>
@@ -19760,8 +19580,8 @@
                 <a:solidFill>
                   <a:srgbClr val="0D7377"/>
                 </a:solidFill>
-                <a:latin typeface="Segoe UI"/>
-                <a:cs typeface="Segoe UI"/>
+                <a:latin typeface="Arial"/>
+                <a:cs typeface="Arial"/>
               </a:rPr>
               <a:t>6.1 Từ mẫu đến quần thể, không sợ hãi</a:t>
             </a:r>
@@ -19830,8 +19650,8 @@
                 <a:solidFill>
                   <a:srgbClr val="0D7377"/>
                 </a:solidFill>
-                <a:latin typeface="Segoe UI"/>
-                <a:cs typeface="Segoe UI"/>
+                <a:latin typeface="Arial"/>
+                <a:cs typeface="Arial"/>
               </a:rPr>
               <a:t>Nghiên cứu một ít bệnh nhân để hiểu về rất nhiều bệnh nhân.</a:t>
             </a:r>
@@ -19848,8 +19668,8 @@
                 <a:solidFill>
                   <a:srgbClr val="595959"/>
                 </a:solidFill>
-                <a:latin typeface="Segoe UI"/>
-                <a:cs typeface="Segoe UI"/>
+                <a:latin typeface="Arial"/>
+                <a:cs typeface="Arial"/>
               </a:rPr>
               <a:t>6.1 Từ mẫu đến quần thể  |  40 phút</a:t>
             </a:r>
@@ -19886,7 +19706,7 @@
                     <a:lumMod val="50000"/>
                   </a:schemeClr>
                 </a:solidFill>
-                <a:latin typeface="Verdana"/>
+                <a:latin typeface="Arial"/>
               </a:rPr>
               <a:t>Neudata | #ClearDataClearImpact</a:t>
             </a:r>
@@ -20016,8 +19836,8 @@
                 <a:solidFill>
                   <a:srgbClr val="0D7377"/>
                 </a:solidFill>
-                <a:latin typeface="Segoe UI"/>
-                <a:cs typeface="Segoe UI"/>
+                <a:latin typeface="Arial"/>
+                <a:cs typeface="Arial"/>
               </a:rPr>
               <a:t>Phân tích sống còn bắt đầu từ kiểm duyệt</a:t>
             </a:r>
@@ -20113,8 +19933,8 @@
                 <a:solidFill>
                   <a:srgbClr val="FFFFFF"/>
                 </a:solidFill>
-                <a:latin typeface="Segoe UI"/>
-                <a:cs typeface="Segoe UI"/>
+                <a:latin typeface="Arial"/>
+                <a:cs typeface="Arial"/>
               </a:rPr>
               <a:t>THÔNG ĐIỆP CHÍNH   </a:t>
             </a:r>
@@ -20123,8 +19943,8 @@
                 <a:solidFill>
                   <a:srgbClr val="FFFFFF"/>
                 </a:solidFill>
-                <a:latin typeface="Segoe UI"/>
-                <a:cs typeface="Segoe UI"/>
+                <a:latin typeface="Arial"/>
+                <a:cs typeface="Arial"/>
               </a:rPr>
               <a:t>Bệnh nhân bị kiểm duyệt vẫn được tính: họ cho biết đã sống đến ngày đó.</a:t>
             </a:r>
@@ -20161,7 +19981,7 @@
                     <a:lumMod val="50000"/>
                   </a:schemeClr>
                 </a:solidFill>
-                <a:latin typeface="Verdana"/>
+                <a:latin typeface="Arial"/>
               </a:rPr>
               <a:t>Neudata | #ClearDataClearImpact</a:t>
             </a:r>
@@ -20291,8 +20111,8 @@
                 <a:solidFill>
                   <a:srgbClr val="0D7377"/>
                 </a:solidFill>
-                <a:latin typeface="Segoe UI"/>
-                <a:cs typeface="Segoe UI"/>
+                <a:latin typeface="Arial"/>
+                <a:cs typeface="Arial"/>
               </a:rPr>
               <a:t>Cách đọc đường cong Kaplan-Meier</a:t>
             </a:r>
@@ -20388,8 +20208,8 @@
                 <a:solidFill>
                   <a:srgbClr val="FFFFFF"/>
                 </a:solidFill>
-                <a:latin typeface="Segoe UI"/>
-                <a:cs typeface="Segoe UI"/>
+                <a:latin typeface="Arial"/>
+                <a:cs typeface="Arial"/>
               </a:rPr>
               <a:t>THÔNG ĐIỆP CHÍNH   </a:t>
             </a:r>
@@ -20398,8 +20218,8 @@
                 <a:solidFill>
                   <a:srgbClr val="FFFFFF"/>
                 </a:solidFill>
-                <a:latin typeface="Segoe UI"/>
-                <a:cs typeface="Segoe UI"/>
+                <a:latin typeface="Arial"/>
+                <a:cs typeface="Arial"/>
               </a:rPr>
               <a:t>Đọc các bậc, các vạch, khoảng cách, và luôn xem số còn theo dõi.</a:t>
             </a:r>
@@ -20436,7 +20256,7 @@
                     <a:lumMod val="50000"/>
                   </a:schemeClr>
                 </a:solidFill>
-                <a:latin typeface="Verdana"/>
+                <a:latin typeface="Arial"/>
               </a:rPr>
               <a:t>Neudata | #ClearDataClearImpact</a:t>
             </a:r>
@@ -20566,8 +20386,8 @@
                 <a:solidFill>
                   <a:srgbClr val="0D7377"/>
                 </a:solidFill>
-                <a:latin typeface="Segoe UI"/>
-                <a:cs typeface="Segoe UI"/>
+                <a:latin typeface="Arial"/>
+                <a:cs typeface="Arial"/>
               </a:rPr>
               <a:t>6.4 Mô hình hóa bộ dữ liệu khóa học</a:t>
             </a:r>
@@ -20636,8 +20456,8 @@
                 <a:solidFill>
                   <a:srgbClr val="0D7377"/>
                 </a:solidFill>
-                <a:latin typeface="Segoe UI"/>
-                <a:cs typeface="Segoe UI"/>
+                <a:latin typeface="Arial"/>
+                <a:cs typeface="Arial"/>
               </a:rPr>
               <a:t>Hiệu chỉnh theo kế hoạch, đọc CI, và trung thực về các ô trống.</a:t>
             </a:r>
@@ -20654,8 +20474,8 @@
                 <a:solidFill>
                   <a:srgbClr val="595959"/>
                 </a:solidFill>
-                <a:latin typeface="Segoe UI"/>
-                <a:cs typeface="Segoe UI"/>
+                <a:latin typeface="Arial"/>
+                <a:cs typeface="Arial"/>
               </a:rPr>
               <a:t>6.4 Mô hình hóa bộ dữ liệu khóa học  |  25 phút</a:t>
             </a:r>
@@ -20692,7 +20512,7 @@
                     <a:lumMod val="50000"/>
                   </a:schemeClr>
                 </a:solidFill>
-                <a:latin typeface="Verdana"/>
+                <a:latin typeface="Arial"/>
               </a:rPr>
               <a:t>Neudata | #ClearDataClearImpact</a:t>
             </a:r>
@@ -20822,8 +20642,8 @@
                 <a:solidFill>
                   <a:srgbClr val="0D7377"/>
                 </a:solidFill>
-                <a:latin typeface="Segoe UI"/>
-                <a:cs typeface="Segoe UI"/>
+                <a:latin typeface="Arial"/>
+                <a:cs typeface="Arial"/>
               </a:rPr>
               <a:t>SAP có trước</a:t>
             </a:r>
@@ -20889,8 +20709,8 @@
                 <a:solidFill>
                   <a:srgbClr val="595959"/>
                 </a:solidFill>
-                <a:latin typeface="Segoe UI"/>
-                <a:cs typeface="Segoe UI"/>
+                <a:latin typeface="Arial"/>
+                <a:cs typeface="Arial"/>
               </a:rPr>
               <a:t>SAP_FLUID-ICU.md: được viết và ký trước khi khóa cơ sở dữ liệu.</a:t>
             </a:r>
@@ -20934,8 +20754,8 @@
                 <a:solidFill>
                   <a:srgbClr val="FFFFFF"/>
                 </a:solidFill>
-                <a:latin typeface="Segoe UI"/>
-                <a:cs typeface="Segoe UI"/>
+                <a:latin typeface="Arial"/>
+                <a:cs typeface="Arial"/>
               </a:rPr>
               <a:t>Chính</a:t>
             </a:r>
@@ -20983,8 +20803,8 @@
                 <a:solidFill>
                   <a:srgbClr val="000000"/>
                 </a:solidFill>
-                <a:latin typeface="Segoe UI"/>
-                <a:cs typeface="Segoe UI"/>
+                <a:latin typeface="Arial"/>
+                <a:cs typeface="Arial"/>
               </a:rPr>
               <a:t>Tử vong 28 ngày</a:t>
             </a:r>
@@ -21004,8 +20824,8 @@
                 <a:solidFill>
                   <a:srgbClr val="000000"/>
                 </a:solidFill>
-                <a:latin typeface="Segoe UI"/>
-                <a:cs typeface="Segoe UI"/>
+                <a:latin typeface="Arial"/>
+                <a:cs typeface="Arial"/>
               </a:rPr>
               <a:t>hồi quy logistic, OR</a:t>
             </a:r>
@@ -21049,8 +20869,8 @@
                 <a:solidFill>
                   <a:srgbClr val="FFFFFF"/>
                 </a:solidFill>
-                <a:latin typeface="Segoe UI"/>
-                <a:cs typeface="Segoe UI"/>
+                <a:latin typeface="Arial"/>
+                <a:cs typeface="Arial"/>
               </a:rPr>
               <a:t>Gây nhiễu</a:t>
             </a:r>
@@ -21098,8 +20918,8 @@
                 <a:solidFill>
                   <a:srgbClr val="000000"/>
                 </a:solidFill>
-                <a:latin typeface="Segoe UI"/>
-                <a:cs typeface="Segoe UI"/>
+                <a:latin typeface="Arial"/>
+                <a:cs typeface="Arial"/>
               </a:rPr>
               <a:t>Tuổi, SOFA, lactat,</a:t>
             </a:r>
@@ -21119,8 +20939,8 @@
                 <a:solidFill>
                   <a:srgbClr val="000000"/>
                 </a:solidFill>
-                <a:latin typeface="Segoe UI"/>
-                <a:cs typeface="Segoe UI"/>
+                <a:latin typeface="Arial"/>
+                <a:cs typeface="Arial"/>
               </a:rPr>
               <a:t>vận mạch, thở máy, CKD</a:t>
             </a:r>
@@ -21164,8 +20984,8 @@
                 <a:solidFill>
                   <a:srgbClr val="FFFFFF"/>
                 </a:solidFill>
-                <a:latin typeface="Segoe UI"/>
-                <a:cs typeface="Segoe UI"/>
+                <a:latin typeface="Arial"/>
+                <a:cs typeface="Arial"/>
               </a:rPr>
               <a:t>Hỗ trợ</a:t>
             </a:r>
@@ -21213,8 +21033,8 @@
                 <a:solidFill>
                   <a:srgbClr val="000000"/>
                 </a:solidFill>
-                <a:latin typeface="Segoe UI"/>
-                <a:cs typeface="Segoe UI"/>
+                <a:latin typeface="Arial"/>
+                <a:cs typeface="Arial"/>
               </a:rPr>
               <a:t>Kaplan-Meier, log-rank</a:t>
             </a:r>
@@ -21234,8 +21054,8 @@
                 <a:solidFill>
                   <a:srgbClr val="000000"/>
                 </a:solidFill>
-                <a:latin typeface="Segoe UI"/>
-                <a:cs typeface="Segoe UI"/>
+                <a:latin typeface="Arial"/>
+                <a:cs typeface="Arial"/>
               </a:rPr>
               <a:t>tỉ số nguy cơ Cox</a:t>
             </a:r>
@@ -21279,8 +21099,8 @@
                 <a:solidFill>
                   <a:srgbClr val="FFFFFF"/>
                 </a:solidFill>
-                <a:latin typeface="Segoe UI"/>
-                <a:cs typeface="Segoe UI"/>
+                <a:latin typeface="Arial"/>
+                <a:cs typeface="Arial"/>
               </a:rPr>
               <a:t>Phân nhóm</a:t>
             </a:r>
@@ -21328,8 +21148,8 @@
                 <a:solidFill>
                   <a:srgbClr val="000000"/>
                 </a:solidFill>
-                <a:latin typeface="Segoe UI"/>
-                <a:cs typeface="Segoe UI"/>
+                <a:latin typeface="Arial"/>
+                <a:cs typeface="Arial"/>
               </a:rPr>
               <a:t>MỘT, định trước:</a:t>
             </a:r>
@@ -21349,8 +21169,8 @@
                 <a:solidFill>
                   <a:srgbClr val="000000"/>
                 </a:solidFill>
-                <a:latin typeface="Segoe UI"/>
-                <a:cs typeface="Segoe UI"/>
+                <a:latin typeface="Arial"/>
+                <a:cs typeface="Arial"/>
               </a:rPr>
               <a:t>suy tim</a:t>
             </a:r>
@@ -21394,8 +21214,8 @@
                 <a:solidFill>
                   <a:srgbClr val="FFFFFF"/>
                 </a:solidFill>
-                <a:latin typeface="Segoe UI"/>
-                <a:cs typeface="Segoe UI"/>
+                <a:latin typeface="Arial"/>
+                <a:cs typeface="Arial"/>
               </a:rPr>
               <a:t>Dữ liệu thiếu</a:t>
             </a:r>
@@ -21443,8 +21263,8 @@
                 <a:solidFill>
                   <a:srgbClr val="000000"/>
                 </a:solidFill>
-                <a:latin typeface="Segoe UI"/>
-                <a:cs typeface="Segoe UI"/>
+                <a:latin typeface="Arial"/>
+                <a:cs typeface="Arial"/>
               </a:rPr>
               <a:t>Ca đầy đủ +</a:t>
             </a:r>
@@ -21464,8 +21284,8 @@
                 <a:solidFill>
                   <a:srgbClr val="000000"/>
                 </a:solidFill>
-                <a:latin typeface="Segoe UI"/>
-                <a:cs typeface="Segoe UI"/>
+                <a:latin typeface="Arial"/>
+                <a:cs typeface="Arial"/>
               </a:rPr>
               <a:t>đa phép gán</a:t>
             </a:r>
@@ -21509,8 +21329,8 @@
                 <a:solidFill>
                   <a:srgbClr val="FFFFFF"/>
                 </a:solidFill>
-                <a:latin typeface="Segoe UI"/>
-                <a:cs typeface="Segoe UI"/>
+                <a:latin typeface="Arial"/>
+                <a:cs typeface="Arial"/>
               </a:rPr>
               <a:t>THÔNG ĐIỆP CHÍNH   </a:t>
             </a:r>
@@ -21519,8 +21339,8 @@
                 <a:solidFill>
                   <a:srgbClr val="FFFFFF"/>
                 </a:solidFill>
-                <a:latin typeface="Segoe UI"/>
-                <a:cs typeface="Segoe UI"/>
+                <a:latin typeface="Arial"/>
+                <a:cs typeface="Arial"/>
               </a:rPr>
               <a:t>Mọi thứ ở các trang sau đã được quyết định trước khi ai thấy kết quả.</a:t>
             </a:r>
@@ -21557,7 +21377,7 @@
                     <a:lumMod val="50000"/>
                   </a:schemeClr>
                 </a:solidFill>
-                <a:latin typeface="Verdana"/>
+                <a:latin typeface="Arial"/>
               </a:rPr>
               <a:t>Neudata | #ClearDataClearImpact</a:t>
             </a:r>
@@ -21687,8 +21507,8 @@
                 <a:solidFill>
                   <a:srgbClr val="0D7377"/>
                 </a:solidFill>
-                <a:latin typeface="Segoe UI"/>
-                <a:cs typeface="Segoe UI"/>
+                <a:latin typeface="Arial"/>
+                <a:cs typeface="Arial"/>
               </a:rPr>
               <a:t>Nhiễu do chỉ định, nhìn thấy được</a:t>
             </a:r>
@@ -21784,8 +21604,8 @@
                 <a:solidFill>
                   <a:srgbClr val="FFFFFF"/>
                 </a:solidFill>
-                <a:latin typeface="Segoe UI"/>
-                <a:cs typeface="Segoe UI"/>
+                <a:latin typeface="Arial"/>
+                <a:cs typeface="Arial"/>
               </a:rPr>
               <a:t>THÔNG ĐIỆP CHÍNH   </a:t>
             </a:r>
@@ -21794,8 +21614,8 @@
                 <a:solidFill>
                   <a:srgbClr val="FFFFFF"/>
                 </a:solidFill>
-                <a:latin typeface="Segoe UI"/>
-                <a:cs typeface="Segoe UI"/>
+                <a:latin typeface="Arial"/>
+                <a:cs typeface="Arial"/>
               </a:rPr>
               <a:t>OR thô 2.49 giảm còn 1.62 sau khi hiệu chỉnh mức độ nặng: vẫn trên 1.</a:t>
             </a:r>
@@ -21832,7 +21652,7 @@
                     <a:lumMod val="50000"/>
                   </a:schemeClr>
                 </a:solidFill>
-                <a:latin typeface="Verdana"/>
+                <a:latin typeface="Arial"/>
               </a:rPr>
               <a:t>Neudata | #ClearDataClearImpact</a:t>
             </a:r>
@@ -21962,8 +21782,8 @@
                 <a:solidFill>
                   <a:srgbClr val="0D7377"/>
                 </a:solidFill>
-                <a:latin typeface="Segoe UI"/>
-                <a:cs typeface="Segoe UI"/>
+                <a:latin typeface="Arial"/>
+                <a:cs typeface="Arial"/>
               </a:rPr>
               <a:t>Mô hình hiệu chỉnh, dạng biểu đồ rừng</a:t>
             </a:r>
@@ -22059,8 +21879,8 @@
                 <a:solidFill>
                   <a:srgbClr val="FFFFFF"/>
                 </a:solidFill>
-                <a:latin typeface="Segoe UI"/>
-                <a:cs typeface="Segoe UI"/>
+                <a:latin typeface="Arial"/>
+                <a:cs typeface="Arial"/>
               </a:rPr>
               <a:t>THÔNG ĐIỆP CHÍNH   </a:t>
             </a:r>
@@ -22069,8 +21889,8 @@
                 <a:solidFill>
                   <a:srgbClr val="FFFFFF"/>
                 </a:solidFill>
-                <a:latin typeface="Segoe UI"/>
-                <a:cs typeface="Segoe UI"/>
+                <a:latin typeface="Arial"/>
+                <a:cs typeface="Arial"/>
               </a:rPr>
               <a:t>Đọc từng dòng: so sánh gì, OR, 95% CI, có cắt qua 1 không?</a:t>
             </a:r>
@@ -22107,7 +21927,7 @@
                     <a:lumMod val="50000"/>
                   </a:schemeClr>
                 </a:solidFill>
-                <a:latin typeface="Verdana"/>
+                <a:latin typeface="Arial"/>
               </a:rPr>
               <a:t>Neudata | #ClearDataClearImpact</a:t>
             </a:r>
@@ -22237,8 +22057,8 @@
                 <a:solidFill>
                   <a:srgbClr val="0D7377"/>
                 </a:solidFill>
-                <a:latin typeface="Segoe UI"/>
-                <a:cs typeface="Segoe UI"/>
+                <a:latin typeface="Arial"/>
+                <a:cs typeface="Arial"/>
               </a:rPr>
               <a:t>Kaplan-Meier: sống còn đến ngày 28 theo cân bằng dịch</a:t>
             </a:r>
@@ -22334,8 +22154,8 @@
                 <a:solidFill>
                   <a:srgbClr val="FFFFFF"/>
                 </a:solidFill>
-                <a:latin typeface="Segoe UI"/>
-                <a:cs typeface="Segoe UI"/>
+                <a:latin typeface="Arial"/>
+                <a:cs typeface="Arial"/>
               </a:rPr>
               <a:t>THÔNG ĐIỆP CHÍNH   </a:t>
             </a:r>
@@ -22344,8 +22164,8 @@
                 <a:solidFill>
                   <a:srgbClr val="FFFFFF"/>
                 </a:solidFill>
-                <a:latin typeface="Segoe UI"/>
-                <a:cs typeface="Segoe UI"/>
+                <a:latin typeface="Arial"/>
+                <a:cs typeface="Arial"/>
               </a:rPr>
               <a:t>Sống còn ngày 28: 81.6% so với 64.1%, log-rank p &lt; 0.001: chưa hiệu chỉnh.</a:t>
             </a:r>
@@ -22382,7 +22202,7 @@
                     <a:lumMod val="50000"/>
                   </a:schemeClr>
                 </a:solidFill>
-                <a:latin typeface="Verdana"/>
+                <a:latin typeface="Arial"/>
               </a:rPr>
               <a:t>Neudata | #ClearDataClearImpact</a:t>
             </a:r>
@@ -22512,8 +22332,8 @@
                 <a:solidFill>
                   <a:srgbClr val="0D7377"/>
                 </a:solidFill>
-                <a:latin typeface="Segoe UI"/>
-                <a:cs typeface="Segoe UI"/>
+                <a:latin typeface="Arial"/>
+                <a:cs typeface="Arial"/>
               </a:rPr>
               <a:t>Mô hình Cox: cùng câu chuyện bằng tỉ số nguy cơ</a:t>
             </a:r>
@@ -22579,8 +22399,8 @@
                 <a:solidFill>
                   <a:srgbClr val="595959"/>
                 </a:solidFill>
-                <a:latin typeface="Segoe UI"/>
-                <a:cs typeface="Segoe UI"/>
+                <a:latin typeface="Arial"/>
+                <a:cs typeface="Arial"/>
               </a:rPr>
               <a:t>Phân tích hỗ trợ của Q1 (04_models.R).</a:t>
             </a:r>
@@ -22622,8 +22442,8 @@
                 <a:solidFill>
                   <a:srgbClr val="FFFFFF"/>
                 </a:solidFill>
-                <a:latin typeface="Segoe UI"/>
-                <a:cs typeface="Segoe UI"/>
+                <a:latin typeface="Arial"/>
+                <a:cs typeface="Arial"/>
               </a:rPr>
               <a:t>HR thô</a:t>
             </a:r>
@@ -22671,8 +22491,8 @@
                 <a:solidFill>
                   <a:srgbClr val="000000"/>
                 </a:solidFill>
-                <a:latin typeface="Segoe UI"/>
-                <a:cs typeface="Segoe UI"/>
+                <a:latin typeface="Arial"/>
+                <a:cs typeface="Arial"/>
               </a:rPr>
               <a:t>2.17</a:t>
             </a:r>
@@ -22692,8 +22512,8 @@
                 <a:solidFill>
                   <a:srgbClr val="000000"/>
                 </a:solidFill>
-                <a:latin typeface="Segoe UI"/>
-                <a:cs typeface="Segoe UI"/>
+                <a:latin typeface="Arial"/>
+                <a:cs typeface="Arial"/>
               </a:rPr>
               <a:t>95% CI 1.55 đến 3.05</a:t>
             </a:r>
@@ -22735,8 +22555,8 @@
                 <a:solidFill>
                   <a:srgbClr val="FFFFFF"/>
                 </a:solidFill>
-                <a:latin typeface="Segoe UI"/>
-                <a:cs typeface="Segoe UI"/>
+                <a:latin typeface="Arial"/>
+                <a:cs typeface="Arial"/>
               </a:rPr>
               <a:t>HR hiệu chỉnh</a:t>
             </a:r>
@@ -22784,8 +22604,8 @@
                 <a:solidFill>
                   <a:srgbClr val="000000"/>
                 </a:solidFill>
-                <a:latin typeface="Segoe UI"/>
-                <a:cs typeface="Segoe UI"/>
+                <a:latin typeface="Arial"/>
+                <a:cs typeface="Arial"/>
               </a:rPr>
               <a:t>1.46</a:t>
             </a:r>
@@ -22805,8 +22625,8 @@
                 <a:solidFill>
                   <a:srgbClr val="000000"/>
                 </a:solidFill>
-                <a:latin typeface="Segoe UI"/>
-                <a:cs typeface="Segoe UI"/>
+                <a:latin typeface="Arial"/>
+                <a:cs typeface="Arial"/>
               </a:rPr>
               <a:t>95% CI 1.00 đến 2.13</a:t>
             </a:r>
@@ -22826,8 +22646,8 @@
                 <a:solidFill>
                   <a:srgbClr val="000000"/>
                 </a:solidFill>
-                <a:latin typeface="Segoe UI"/>
-                <a:cs typeface="Segoe UI"/>
+                <a:latin typeface="Arial"/>
+                <a:cs typeface="Arial"/>
               </a:rPr>
               <a:t>p = 0.053</a:t>
             </a:r>
@@ -22869,8 +22689,8 @@
                 <a:solidFill>
                   <a:srgbClr val="FFFFFF"/>
                 </a:solidFill>
-                <a:latin typeface="Segoe UI"/>
-                <a:cs typeface="Segoe UI"/>
+                <a:latin typeface="Arial"/>
+                <a:cs typeface="Arial"/>
               </a:rPr>
               <a:t>Giả định</a:t>
             </a:r>
@@ -22918,8 +22738,8 @@
                 <a:solidFill>
                   <a:srgbClr val="000000"/>
                 </a:solidFill>
-                <a:latin typeface="Segoe UI"/>
-                <a:cs typeface="Segoe UI"/>
+                <a:latin typeface="Arial"/>
+                <a:cs typeface="Arial"/>
               </a:rPr>
               <a:t>Nguy cơ tỉ lệ:</a:t>
             </a:r>
@@ -22939,8 +22759,8 @@
                 <a:solidFill>
                   <a:srgbClr val="000000"/>
                 </a:solidFill>
-                <a:latin typeface="Segoe UI"/>
-                <a:cs typeface="Segoe UI"/>
+                <a:latin typeface="Arial"/>
+                <a:cs typeface="Arial"/>
               </a:rPr>
               <a:t>kiểm định chung p = 0.10</a:t>
             </a:r>
@@ -22960,8 +22780,8 @@
                 <a:solidFill>
                   <a:srgbClr val="000000"/>
                 </a:solidFill>
-                <a:latin typeface="Segoe UI"/>
-                <a:cs typeface="Segoe UI"/>
+                <a:latin typeface="Arial"/>
+                <a:cs typeface="Arial"/>
               </a:rPr>
               <a:t>chấp nhận được</a:t>
             </a:r>
@@ -23003,8 +22823,8 @@
                 <a:solidFill>
                   <a:srgbClr val="FFFFFF"/>
                 </a:solidFill>
-                <a:latin typeface="Segoe UI"/>
-                <a:cs typeface="Segoe UI"/>
+                <a:latin typeface="Arial"/>
+                <a:cs typeface="Arial"/>
               </a:rPr>
               <a:t>So sánh</a:t>
             </a:r>
@@ -23052,8 +22872,8 @@
                 <a:solidFill>
                   <a:srgbClr val="000000"/>
                 </a:solidFill>
-                <a:latin typeface="Segoe UI"/>
-                <a:cs typeface="Segoe UI"/>
+                <a:latin typeface="Arial"/>
+                <a:cs typeface="Arial"/>
               </a:rPr>
               <a:t>OR hiệu chỉnh 1.62, p = 0.044</a:t>
             </a:r>
@@ -23073,8 +22893,8 @@
                 <a:solidFill>
                   <a:srgbClr val="000000"/>
                 </a:solidFill>
-                <a:latin typeface="Segoe UI"/>
-                <a:cs typeface="Segoe UI"/>
+                <a:latin typeface="Arial"/>
+                <a:cs typeface="Arial"/>
               </a:rPr>
               <a:t>HR hiệu chỉnh 1.46, p = 0.053</a:t>
             </a:r>
@@ -23094,8 +22914,8 @@
                 <a:solidFill>
                   <a:srgbClr val="000000"/>
                 </a:solidFill>
-                <a:latin typeface="Segoe UI"/>
-                <a:cs typeface="Segoe UI"/>
+                <a:latin typeface="Arial"/>
+                <a:cs typeface="Arial"/>
               </a:rPr>
               <a:t>Cùng hướng và độ lớn</a:t>
             </a:r>
@@ -23139,8 +22959,8 @@
                 <a:solidFill>
                   <a:srgbClr val="FFFFFF"/>
                 </a:solidFill>
-                <a:latin typeface="Segoe UI"/>
-                <a:cs typeface="Segoe UI"/>
+                <a:latin typeface="Arial"/>
+                <a:cs typeface="Arial"/>
               </a:rPr>
               <a:t>THÔNG ĐIỆP CHÍNH   </a:t>
             </a:r>
@@ -23149,8 +22969,8 @@
                 <a:solidFill>
                   <a:srgbClr val="FFFFFF"/>
                 </a:solidFill>
-                <a:latin typeface="Segoe UI"/>
-                <a:cs typeface="Segoe UI"/>
+                <a:latin typeface="Arial"/>
+                <a:cs typeface="Arial"/>
               </a:rPr>
               <a:t>p = 0.044 và p = 0.053 kể cùng một câu chuyện: hãy đọc ước lượng và CI.</a:t>
             </a:r>
@@ -23187,7 +23007,7 @@
                     <a:lumMod val="50000"/>
                   </a:schemeClr>
                 </a:solidFill>
-                <a:latin typeface="Verdana"/>
+                <a:latin typeface="Arial"/>
               </a:rPr>
               <a:t>Neudata | #ClearDataClearImpact</a:t>
             </a:r>
@@ -23317,8 +23137,8 @@
                 <a:solidFill>
                   <a:srgbClr val="0D7377"/>
                 </a:solidFill>
-                <a:latin typeface="Segoe UI"/>
-                <a:cs typeface="Segoe UI"/>
+                <a:latin typeface="Arial"/>
+                <a:cs typeface="Arial"/>
               </a:rPr>
               <a:t>Vì sao bị thiếu? MCAR, MAR và MNAR</a:t>
             </a:r>
@@ -23414,8 +23234,8 @@
                 <a:solidFill>
                   <a:srgbClr val="FFFFFF"/>
                 </a:solidFill>
-                <a:latin typeface="Segoe UI"/>
-                <a:cs typeface="Segoe UI"/>
+                <a:latin typeface="Arial"/>
+                <a:cs typeface="Arial"/>
               </a:rPr>
               <a:t>THÔNG ĐIỆP CHÍNH   </a:t>
             </a:r>
@@ -23424,8 +23244,8 @@
                 <a:solidFill>
                   <a:srgbClr val="FFFFFF"/>
                 </a:solidFill>
-                <a:latin typeface="Segoe UI"/>
-                <a:cs typeface="Segoe UI"/>
+                <a:latin typeface="Arial"/>
+                <a:cs typeface="Arial"/>
               </a:rPr>
               <a:t>Lý do dữ liệu bị thiếu quyết định các ô trống nguy hiểm đến đâu.</a:t>
             </a:r>
@@ -23462,7 +23282,7 @@
                     <a:lumMod val="50000"/>
                   </a:schemeClr>
                 </a:solidFill>
-                <a:latin typeface="Verdana"/>
+                <a:latin typeface="Arial"/>
               </a:rPr>
               <a:t>Neudata | #ClearDataClearImpact</a:t>
             </a:r>
@@ -23592,8 +23412,8 @@
                 <a:solidFill>
                   <a:srgbClr val="0D7377"/>
                 </a:solidFill>
-                <a:latin typeface="Segoe UI"/>
-                <a:cs typeface="Segoe UI"/>
+                <a:latin typeface="Arial"/>
+                <a:cs typeface="Arial"/>
               </a:rPr>
               <a:t>Ai bị thiếu lactat? Không phải 15% ngẫu nhiên</a:t>
             </a:r>
@@ -23689,8 +23509,8 @@
                 <a:solidFill>
                   <a:srgbClr val="FFFFFF"/>
                 </a:solidFill>
-                <a:latin typeface="Segoe UI"/>
-                <a:cs typeface="Segoe UI"/>
+                <a:latin typeface="Arial"/>
+                <a:cs typeface="Arial"/>
               </a:rPr>
               <a:t>THÔNG ĐIỆP CHÍNH   </a:t>
             </a:r>
@@ -23699,8 +23519,8 @@
                 <a:solidFill>
                   <a:srgbClr val="FFFFFF"/>
                 </a:solidFill>
-                <a:latin typeface="Segoe UI"/>
-                <a:cs typeface="Segoe UI"/>
+                <a:latin typeface="Arial"/>
+                <a:cs typeface="Arial"/>
               </a:rPr>
               <a:t>Lactat thiếu chủ yếu ở bệnh nhân nhẹ hơn: không phải MCAR, nhưng MAR là hợp lý.</a:t>
             </a:r>
@@ -23737,7 +23557,7 @@
                     <a:lumMod val="50000"/>
                   </a:schemeClr>
                 </a:solidFill>
-                <a:latin typeface="Verdana"/>
+                <a:latin typeface="Arial"/>
               </a:rPr>
               <a:t>Neudata | #ClearDataClearImpact</a:t>
             </a:r>
@@ -23867,8 +23687,8 @@
                 <a:solidFill>
                   <a:srgbClr val="0D7377"/>
                 </a:solidFill>
-                <a:latin typeface="Segoe UI"/>
-                <a:cs typeface="Segoe UI"/>
+                <a:latin typeface="Arial"/>
+                <a:cs typeface="Arial"/>
               </a:rPr>
               <a:t>Vũ điệu của các khoảng tin cậy</a:t>
             </a:r>
@@ -23964,8 +23784,8 @@
                 <a:solidFill>
                   <a:srgbClr val="FFFFFF"/>
                 </a:solidFill>
-                <a:latin typeface="Segoe UI"/>
-                <a:cs typeface="Segoe UI"/>
+                <a:latin typeface="Arial"/>
+                <a:cs typeface="Arial"/>
               </a:rPr>
               <a:t>THÔNG ĐIỆP CHÍNH   </a:t>
             </a:r>
@@ -23974,8 +23794,8 @@
                 <a:solidFill>
                   <a:srgbClr val="FFFFFF"/>
                 </a:solidFill>
-                <a:latin typeface="Segoe UI"/>
-                <a:cs typeface="Segoe UI"/>
+                <a:latin typeface="Arial"/>
+                <a:cs typeface="Arial"/>
               </a:rPr>
               <a:t>Khoảng 95/100 khoảng như vậy chứa giá trị thật. Ta không biết là khoảng nào.</a:t>
             </a:r>
@@ -24012,7 +23832,7 @@
                     <a:lumMod val="50000"/>
                   </a:schemeClr>
                 </a:solidFill>
-                <a:latin typeface="Verdana"/>
+                <a:latin typeface="Arial"/>
               </a:rPr>
               <a:t>Neudata | #ClearDataClearImpact</a:t>
             </a:r>
@@ -24142,8 +23962,8 @@
                 <a:solidFill>
                   <a:srgbClr val="0D7377"/>
                 </a:solidFill>
-                <a:latin typeface="Segoe UI"/>
-                <a:cs typeface="Segoe UI"/>
+                <a:latin typeface="Arial"/>
+                <a:cs typeface="Arial"/>
               </a:rPr>
               <a:t>Ca đầy đủ so với đa phép gán (Q4)</a:t>
             </a:r>
@@ -24239,8 +24059,8 @@
                 <a:solidFill>
                   <a:srgbClr val="FFFFFF"/>
                 </a:solidFill>
-                <a:latin typeface="Segoe UI"/>
-                <a:cs typeface="Segoe UI"/>
+                <a:latin typeface="Arial"/>
+                <a:cs typeface="Arial"/>
               </a:rPr>
               <a:t>THÔNG ĐIỆP CHÍNH   </a:t>
             </a:r>
@@ -24249,8 +24069,8 @@
                 <a:solidFill>
                   <a:srgbClr val="FFFFFF"/>
                 </a:solidFill>
-                <a:latin typeface="Segoe UI"/>
-                <a:cs typeface="Segoe UI"/>
+                <a:latin typeface="Arial"/>
+                <a:cs typeface="Arial"/>
               </a:rPr>
               <a:t>Đa phép gán giữ cả 620 bệnh nhân; câu trả lời chỉ thay đổi ít.</a:t>
             </a:r>
@@ -24287,7 +24107,7 @@
                     <a:lumMod val="50000"/>
                   </a:schemeClr>
                 </a:solidFill>
-                <a:latin typeface="Verdana"/>
+                <a:latin typeface="Arial"/>
               </a:rPr>
               <a:t>Neudata | #ClearDataClearImpact</a:t>
             </a:r>
@@ -24417,8 +24237,8 @@
                 <a:solidFill>
                   <a:srgbClr val="0D7377"/>
                 </a:solidFill>
-                <a:latin typeface="Segoe UI"/>
-                <a:cs typeface="Segoe UI"/>
+                <a:latin typeface="Arial"/>
+                <a:cs typeface="Arial"/>
               </a:rPr>
               <a:t>Diễn giải mô hình của nhóm (phiếu bài tập)</a:t>
             </a:r>
@@ -24488,8 +24308,8 @@
                 <a:solidFill>
                   <a:srgbClr val="FFFFFF"/>
                 </a:solidFill>
-                <a:latin typeface="Segoe UI"/>
-                <a:cs typeface="Segoe UI"/>
+                <a:latin typeface="Arial"/>
+                <a:cs typeface="Arial"/>
               </a:rPr>
               <a:t>LÀM VIỆC NHÓM   |   7 phút</a:t>
             </a:r>
@@ -24526,25 +24346,19 @@
               <a:spcBef>
                 <a:spcPts val="450"/>
               </a:spcBef>
-              <a:buNone/>
-            </a:pPr>
-            <a:r>
-              <a:rPr lang="en-US" sz="1650" b="1" dirty="0">
-                <a:solidFill>
-                  <a:srgbClr val="0D7377"/>
-                </a:solidFill>
-                <a:latin typeface="Segoe UI"/>
-                <a:cs typeface="Segoe UI"/>
-              </a:rPr>
-              <a:t>1.  </a:t>
-            </a:r>
+              <a:buClr>
+                <a:srgbClr val="0D7377"/>
+              </a:buClr>
+              <a:buFont typeface="Arial"/>
+              <a:buChar char="•"/>
+            </a:pPr>
             <a:r>
               <a:rPr lang="en-US" sz="1650" dirty="0">
                 <a:solidFill>
                   <a:srgbClr val="000000"/>
                 </a:solidFill>
-                <a:latin typeface="Segoe UI"/>
-                <a:cs typeface="Segoe UI"/>
+                <a:latin typeface="Arial"/>
+                <a:cs typeface="Arial"/>
               </a:rPr>
               <a:t>Tìm ước lượng thô và hiệu chỉnh trong gói kết quả</a:t>
             </a:r>
@@ -24557,25 +24371,19 @@
               <a:spcBef>
                 <a:spcPts val="450"/>
               </a:spcBef>
-              <a:buNone/>
-            </a:pPr>
-            <a:r>
-              <a:rPr lang="en-US" sz="1650" b="1" dirty="0">
-                <a:solidFill>
-                  <a:srgbClr val="0D7377"/>
-                </a:solidFill>
-                <a:latin typeface="Segoe UI"/>
-                <a:cs typeface="Segoe UI"/>
-              </a:rPr>
-              <a:t>2.  </a:t>
-            </a:r>
+              <a:buClr>
+                <a:srgbClr val="0D7377"/>
+              </a:buClr>
+              <a:buFont typeface="Arial"/>
+              <a:buChar char="•"/>
+            </a:pPr>
             <a:r>
               <a:rPr lang="en-US" sz="1650" dirty="0">
                 <a:solidFill>
                   <a:srgbClr val="000000"/>
                 </a:solidFill>
-                <a:latin typeface="Segoe UI"/>
-                <a:cs typeface="Segoe UI"/>
+                <a:latin typeface="Arial"/>
+                <a:cs typeface="Arial"/>
               </a:rPr>
               <a:t>Hiệu chỉnh làm ước lượng thay đổi bao nhiêu? Vì sao?</a:t>
             </a:r>
@@ -24588,25 +24396,19 @@
               <a:spcBef>
                 <a:spcPts val="450"/>
               </a:spcBef>
-              <a:buNone/>
-            </a:pPr>
-            <a:r>
-              <a:rPr lang="en-US" sz="1650" b="1" dirty="0">
-                <a:solidFill>
-                  <a:srgbClr val="0D7377"/>
-                </a:solidFill>
-                <a:latin typeface="Segoe UI"/>
-                <a:cs typeface="Segoe UI"/>
-              </a:rPr>
-              <a:t>3.  </a:t>
-            </a:r>
+              <a:buClr>
+                <a:srgbClr val="0D7377"/>
+              </a:buClr>
+              <a:buFont typeface="Arial"/>
+              <a:buChar char="•"/>
+            </a:pPr>
             <a:r>
               <a:rPr lang="en-US" sz="1650" dirty="0">
                 <a:solidFill>
                   <a:srgbClr val="000000"/>
                 </a:solidFill>
-                <a:latin typeface="Segoe UI"/>
-                <a:cs typeface="Segoe UI"/>
+                <a:latin typeface="Arial"/>
+                <a:cs typeface="Arial"/>
               </a:rPr>
               <a:t>95% CI hiệu chỉnh có chứa 1 (hoặc 0) không?</a:t>
             </a:r>
@@ -24619,25 +24421,19 @@
               <a:spcBef>
                 <a:spcPts val="450"/>
               </a:spcBef>
-              <a:buNone/>
-            </a:pPr>
-            <a:r>
-              <a:rPr lang="en-US" sz="1650" b="1" dirty="0">
-                <a:solidFill>
-                  <a:srgbClr val="0D7377"/>
-                </a:solidFill>
-                <a:latin typeface="Segoe UI"/>
-                <a:cs typeface="Segoe UI"/>
-              </a:rPr>
-              <a:t>4.  </a:t>
-            </a:r>
+              <a:buClr>
+                <a:srgbClr val="0D7377"/>
+              </a:buClr>
+              <a:buFont typeface="Arial"/>
+              <a:buChar char="•"/>
+            </a:pPr>
             <a:r>
               <a:rPr lang="en-US" sz="1650" dirty="0">
                 <a:solidFill>
                   <a:srgbClr val="000000"/>
                 </a:solidFill>
-                <a:latin typeface="Segoe UI"/>
-                <a:cs typeface="Segoe UI"/>
+                <a:latin typeface="Arial"/>
+                <a:cs typeface="Arial"/>
               </a:rPr>
               <a:t>Xem kết quả đa phép gán trong gói kết quả: có gần kết quả chính? (chi tiết ở Cấp độ 2)</a:t>
             </a:r>
@@ -24650,25 +24446,19 @@
               <a:spcBef>
                 <a:spcPts val="450"/>
               </a:spcBef>
-              <a:buNone/>
-            </a:pPr>
-            <a:r>
-              <a:rPr lang="en-US" sz="1650" b="1" dirty="0">
-                <a:solidFill>
-                  <a:srgbClr val="0D7377"/>
-                </a:solidFill>
-                <a:latin typeface="Segoe UI"/>
-                <a:cs typeface="Segoe UI"/>
-              </a:rPr>
-              <a:t>5.  </a:t>
-            </a:r>
+              <a:buClr>
+                <a:srgbClr val="0D7377"/>
+              </a:buClr>
+              <a:buFont typeface="Arial"/>
+              <a:buChar char="•"/>
+            </a:pPr>
             <a:r>
               <a:rPr lang="en-US" sz="1650" dirty="0">
                 <a:solidFill>
                   <a:srgbClr val="000000"/>
                 </a:solidFill>
-                <a:latin typeface="Segoe UI"/>
-                <a:cs typeface="Segoe UI"/>
+                <a:latin typeface="Arial"/>
+                <a:cs typeface="Arial"/>
               </a:rPr>
               <a:t>Viết hai câu Kết quả: thô, rồi hiệu chỉnh, kèm CI</a:t>
             </a:r>
@@ -24712,8 +24502,8 @@
                 <a:solidFill>
                   <a:srgbClr val="0D7377"/>
                 </a:solidFill>
-                <a:latin typeface="Segoe UI"/>
-                <a:cs typeface="Segoe UI"/>
+                <a:latin typeface="Arial"/>
+                <a:cs typeface="Arial"/>
               </a:rPr>
               <a:t>Từ nên dùng</a:t>
             </a:r>
@@ -24734,8 +24524,8 @@
                 <a:solidFill>
                   <a:srgbClr val="000000"/>
                 </a:solidFill>
-                <a:latin typeface="Segoe UI"/>
-                <a:cs typeface="Segoe UI"/>
+                <a:latin typeface="Arial"/>
+                <a:cs typeface="Arial"/>
               </a:rPr>
               <a:t>'có liên quan với'</a:t>
             </a:r>
@@ -24756,8 +24546,8 @@
                 <a:solidFill>
                   <a:srgbClr val="000000"/>
                 </a:solidFill>
-                <a:latin typeface="Segoe UI"/>
-                <a:cs typeface="Segoe UI"/>
+                <a:latin typeface="Arial"/>
+                <a:cs typeface="Arial"/>
               </a:rPr>
               <a:t>'sau khi hiệu chỉnh'</a:t>
             </a:r>
@@ -24778,8 +24568,8 @@
                 <a:solidFill>
                   <a:srgbClr val="000000"/>
                 </a:solidFill>
-                <a:latin typeface="Segoe UI"/>
-                <a:cs typeface="Segoe UI"/>
+                <a:latin typeface="Arial"/>
+                <a:cs typeface="Arial"/>
               </a:rPr>
               <a:t>'95% CI'</a:t>
             </a:r>
@@ -24800,8 +24590,8 @@
                 <a:solidFill>
                   <a:srgbClr val="000000"/>
                 </a:solidFill>
-                <a:latin typeface="Segoe UI"/>
-                <a:cs typeface="Segoe UI"/>
+                <a:latin typeface="Arial"/>
+                <a:cs typeface="Arial"/>
               </a:rPr>
               <a:t>không dùng 'gây ra'</a:t>
             </a:r>
@@ -24847,8 +24637,8 @@
                 <a:solidFill>
                   <a:srgbClr val="0D7377"/>
                 </a:solidFill>
-                <a:latin typeface="Segoe UI"/>
-                <a:cs typeface="Segoe UI"/>
+                <a:latin typeface="Arial"/>
+                <a:cs typeface="Arial"/>
               </a:rPr>
               <a:t>SẢN PHẨM   </a:t>
             </a:r>
@@ -24857,8 +24647,8 @@
                 <a:solidFill>
                   <a:srgbClr val="000000"/>
                 </a:solidFill>
-                <a:latin typeface="Segoe UI"/>
-                <a:cs typeface="Segoe UI"/>
+                <a:latin typeface="Arial"/>
+                <a:cs typeface="Arial"/>
               </a:rPr>
               <a:t>Hai câu Kết quả cho mô hình của nhóm (bài 8)</a:t>
             </a:r>
@@ -24895,7 +24685,7 @@
                     <a:lumMod val="50000"/>
                   </a:schemeClr>
                 </a:solidFill>
-                <a:latin typeface="Verdana"/>
+                <a:latin typeface="Arial"/>
               </a:rPr>
               <a:t>Neudata | #ClearDataClearImpact</a:t>
             </a:r>
@@ -25025,8 +24815,8 @@
                 <a:solidFill>
                   <a:srgbClr val="0D7377"/>
                 </a:solidFill>
-                <a:latin typeface="Segoe UI"/>
-                <a:cs typeface="Segoe UI"/>
+                <a:latin typeface="Arial"/>
+                <a:cs typeface="Arial"/>
               </a:rPr>
               <a:t>Xây dựng đề cương 6: một phần tốt gồm những gì</a:t>
             </a:r>
@@ -25092,8 +24882,8 @@
                 <a:solidFill>
                   <a:srgbClr val="595959"/>
                 </a:solidFill>
-                <a:latin typeface="Segoe UI"/>
-                <a:cs typeface="Segoe UI"/>
+                <a:latin typeface="Arial"/>
+                <a:cs typeface="Arial"/>
               </a:rPr>
               <a:t>Ví dụ từ ví dụ xuyên suốt (thử nghiệm hạn chế dịch).</a:t>
             </a:r>
@@ -25135,8 +24925,8 @@
                 <a:solidFill>
                   <a:srgbClr val="FFFFFF"/>
                 </a:solidFill>
-                <a:latin typeface="Segoe UI"/>
-                <a:cs typeface="Segoe UI"/>
+                <a:latin typeface="Arial"/>
+                <a:cs typeface="Arial"/>
               </a:rPr>
               <a:t>Cỡ mẫu</a:t>
             </a:r>
@@ -25184,8 +24974,8 @@
                 <a:solidFill>
                   <a:srgbClr val="000000"/>
                 </a:solidFill>
-                <a:latin typeface="Segoe UI"/>
-                <a:cs typeface="Segoe UI"/>
+                <a:latin typeface="Arial"/>
+                <a:cs typeface="Arial"/>
               </a:rPr>
               <a:t>Tử vong 40% so với 30%</a:t>
             </a:r>
@@ -25205,8 +24995,8 @@
                 <a:solidFill>
                   <a:srgbClr val="000000"/>
                 </a:solidFill>
-                <a:latin typeface="Segoe UI"/>
-                <a:cs typeface="Segoe UI"/>
+                <a:latin typeface="Arial"/>
+                <a:cs typeface="Arial"/>
               </a:rPr>
               <a:t>power 80%, alpha 5%</a:t>
             </a:r>
@@ -25226,8 +25016,8 @@
                 <a:solidFill>
                   <a:srgbClr val="000000"/>
                 </a:solidFill>
-                <a:latin typeface="Segoe UI"/>
-                <a:cs typeface="Segoe UI"/>
+                <a:latin typeface="Arial"/>
+                <a:cs typeface="Arial"/>
               </a:rPr>
               <a:t>356 mỗi nhóm + 10%</a:t>
             </a:r>
@@ -25269,8 +25059,8 @@
                 <a:solidFill>
                   <a:srgbClr val="FFFFFF"/>
                 </a:solidFill>
-                <a:latin typeface="Segoe UI"/>
-                <a:cs typeface="Segoe UI"/>
+                <a:latin typeface="Arial"/>
+                <a:cs typeface="Arial"/>
               </a:rPr>
               <a:t>Kế hoạch phân tích</a:t>
             </a:r>
@@ -25318,8 +25108,8 @@
                 <a:solidFill>
                   <a:srgbClr val="000000"/>
                 </a:solidFill>
-                <a:latin typeface="Segoe UI"/>
-                <a:cs typeface="Segoe UI"/>
+                <a:latin typeface="Arial"/>
+                <a:cs typeface="Arial"/>
               </a:rPr>
               <a:t>Mô tả: n (%), trung vị (IQR)</a:t>
             </a:r>
@@ -25339,8 +25129,8 @@
                 <a:solidFill>
                   <a:srgbClr val="000000"/>
                 </a:solidFill>
-                <a:latin typeface="Segoe UI"/>
-                <a:cs typeface="Segoe UI"/>
+                <a:latin typeface="Arial"/>
+                <a:cs typeface="Arial"/>
               </a:rPr>
               <a:t>So sánh: khi bình phương</a:t>
             </a:r>
@@ -25360,8 +25150,8 @@
                 <a:solidFill>
                   <a:srgbClr val="000000"/>
                 </a:solidFill>
-                <a:latin typeface="Segoe UI"/>
-                <a:cs typeface="Segoe UI"/>
+                <a:latin typeface="Arial"/>
+                <a:cs typeface="Arial"/>
               </a:rPr>
               <a:t>Báo cáo: RR + 95% CI</a:t>
             </a:r>
@@ -25403,8 +25193,8 @@
                 <a:solidFill>
                   <a:srgbClr val="FFFFFF"/>
                 </a:solidFill>
-                <a:latin typeface="Segoe UI"/>
-                <a:cs typeface="Segoe UI"/>
+                <a:latin typeface="Arial"/>
+                <a:cs typeface="Arial"/>
               </a:rPr>
               <a:t>Yếu tố gây nhiễu</a:t>
             </a:r>
@@ -25452,8 +25242,8 @@
                 <a:solidFill>
                   <a:srgbClr val="000000"/>
                 </a:solidFill>
-                <a:latin typeface="Segoe UI"/>
-                <a:cs typeface="Segoe UI"/>
+                <a:latin typeface="Arial"/>
+                <a:cs typeface="Arial"/>
               </a:rPr>
               <a:t>Chọn từ trước</a:t>
             </a:r>
@@ -25473,8 +25263,8 @@
                 <a:solidFill>
                   <a:srgbClr val="000000"/>
                 </a:solidFill>
-                <a:latin typeface="Segoe UI"/>
-                <a:cs typeface="Segoe UI"/>
+                <a:latin typeface="Arial"/>
+                <a:cs typeface="Arial"/>
               </a:rPr>
               <a:t>khoảng 10 biến cố</a:t>
             </a:r>
@@ -25494,8 +25284,8 @@
                 <a:solidFill>
                   <a:srgbClr val="000000"/>
                 </a:solidFill>
-                <a:latin typeface="Segoe UI"/>
-                <a:cs typeface="Segoe UI"/>
+                <a:latin typeface="Arial"/>
+                <a:cs typeface="Arial"/>
               </a:rPr>
               <a:t>mỗi biến</a:t>
             </a:r>
@@ -25537,8 +25327,8 @@
                 <a:solidFill>
                   <a:srgbClr val="FFFFFF"/>
                 </a:solidFill>
-                <a:latin typeface="Segoe UI"/>
-                <a:cs typeface="Segoe UI"/>
+                <a:latin typeface="Arial"/>
+                <a:cs typeface="Arial"/>
               </a:rPr>
               <a:t>Dữ liệu thiếu</a:t>
             </a:r>
@@ -25586,8 +25376,8 @@
                 <a:solidFill>
                   <a:srgbClr val="000000"/>
                 </a:solidFill>
-                <a:latin typeface="Segoe UI"/>
-                <a:cs typeface="Segoe UI"/>
+                <a:latin typeface="Arial"/>
+                <a:cs typeface="Arial"/>
               </a:rPr>
               <a:t>Dự kiến thiếu + vì sao</a:t>
             </a:r>
@@ -25607,8 +25397,8 @@
                 <a:solidFill>
                   <a:srgbClr val="000000"/>
                 </a:solidFill>
-                <a:latin typeface="Segoe UI"/>
-                <a:cs typeface="Segoe UI"/>
+                <a:latin typeface="Arial"/>
+                <a:cs typeface="Arial"/>
               </a:rPr>
               <a:t>Phòng ngừa</a:t>
             </a:r>
@@ -25628,8 +25418,8 @@
                 <a:solidFill>
                   <a:srgbClr val="000000"/>
                 </a:solidFill>
-                <a:latin typeface="Segoe UI"/>
-                <a:cs typeface="Segoe UI"/>
+                <a:latin typeface="Arial"/>
+                <a:cs typeface="Arial"/>
               </a:rPr>
               <a:t>CC + kiểm tra MI</a:t>
             </a:r>
@@ -25673,8 +25463,8 @@
                 <a:solidFill>
                   <a:srgbClr val="FFFFFF"/>
                 </a:solidFill>
-                <a:latin typeface="Segoe UI"/>
-                <a:cs typeface="Segoe UI"/>
+                <a:latin typeface="Arial"/>
+                <a:cs typeface="Arial"/>
               </a:rPr>
               <a:t>THÔNG ĐIỆP CHÍNH   </a:t>
             </a:r>
@@ -25683,8 +25473,8 @@
                 <a:solidFill>
                   <a:srgbClr val="FFFFFF"/>
                 </a:solidFill>
-                <a:latin typeface="Segoe UI"/>
-                <a:cs typeface="Segoe UI"/>
+                <a:latin typeface="Arial"/>
+                <a:cs typeface="Arial"/>
               </a:rPr>
               <a:t>Hôm nay: bao nhiêu bệnh nhân, phân tích gì, và nếu dữ liệu bị thiếu thì sao.</a:t>
             </a:r>
@@ -25721,7 +25511,7 @@
                     <a:lumMod val="50000"/>
                   </a:schemeClr>
                 </a:solidFill>
-                <a:latin typeface="Verdana"/>
+                <a:latin typeface="Arial"/>
               </a:rPr>
               <a:t>Neudata | #ClearDataClearImpact</a:t>
             </a:r>
@@ -25851,8 +25641,8 @@
                 <a:solidFill>
                   <a:srgbClr val="0D7377"/>
                 </a:solidFill>
-                <a:latin typeface="Segoe UI"/>
-                <a:cs typeface="Segoe UI"/>
+                <a:latin typeface="Arial"/>
+                <a:cs typeface="Arial"/>
               </a:rPr>
               <a:t>Xây dựng đề cương 6: cỡ mẫu và kế hoạch phân tích</a:t>
             </a:r>
@@ -25922,8 +25712,8 @@
                 <a:solidFill>
                   <a:srgbClr val="FFFFFF"/>
                 </a:solidFill>
-                <a:latin typeface="Segoe UI"/>
-                <a:cs typeface="Segoe UI"/>
+                <a:latin typeface="Arial"/>
+                <a:cs typeface="Arial"/>
               </a:rPr>
               <a:t>XÂY DỰNG ĐỀ CƯƠNG   |   30 phút</a:t>
             </a:r>
@@ -25960,25 +25750,19 @@
               <a:spcBef>
                 <a:spcPts val="450"/>
               </a:spcBef>
-              <a:buNone/>
-            </a:pPr>
-            <a:r>
-              <a:rPr lang="en-US" sz="1650" b="1" dirty="0">
-                <a:solidFill>
-                  <a:srgbClr val="055F56"/>
-                </a:solidFill>
-                <a:latin typeface="Segoe UI"/>
-                <a:cs typeface="Segoe UI"/>
-              </a:rPr>
-              <a:t>1.  </a:t>
-            </a:r>
+              <a:buClr>
+                <a:srgbClr val="055F56"/>
+              </a:buClr>
+              <a:buFont typeface="Arial"/>
+              <a:buChar char="•"/>
+            </a:pPr>
             <a:r>
               <a:rPr lang="en-US" sz="1650" dirty="0">
                 <a:solidFill>
                   <a:srgbClr val="000000"/>
                 </a:solidFill>
-                <a:latin typeface="Segoe UI"/>
-                <a:cs typeface="Segoe UI"/>
+                <a:latin typeface="Arial"/>
+                <a:cs typeface="Arial"/>
               </a:rPr>
               <a:t>Câu phát biểu cỡ mẫu: 4 đầu vào và nguồn của chúng (8 phút)</a:t>
             </a:r>
@@ -25991,25 +25775,19 @@
               <a:spcBef>
                 <a:spcPts val="450"/>
               </a:spcBef>
-              <a:buNone/>
-            </a:pPr>
-            <a:r>
-              <a:rPr lang="en-US" sz="1650" b="1" dirty="0">
-                <a:solidFill>
-                  <a:srgbClr val="055F56"/>
-                </a:solidFill>
-                <a:latin typeface="Segoe UI"/>
-                <a:cs typeface="Segoe UI"/>
-              </a:rPr>
-              <a:t>2.  </a:t>
-            </a:r>
+              <a:buClr>
+                <a:srgbClr val="055F56"/>
+              </a:buClr>
+              <a:buFont typeface="Arial"/>
+              <a:buChar char="•"/>
+            </a:pPr>
             <a:r>
               <a:rPr lang="en-US" sz="1650" dirty="0">
                 <a:solidFill>
                   <a:srgbClr val="000000"/>
                 </a:solidFill>
-                <a:latin typeface="Segoe UI"/>
-                <a:cs typeface="Segoe UI"/>
+                <a:latin typeface="Arial"/>
+                <a:cs typeface="Arial"/>
               </a:rPr>
               <a:t>Kế hoạch phân tích: tóm tắt, kiểm định hoặc mô hình, số đo tác động + 95% CI (10 phút)</a:t>
             </a:r>
@@ -26022,25 +25800,19 @@
               <a:spcBef>
                 <a:spcPts val="450"/>
               </a:spcBef>
-              <a:buNone/>
-            </a:pPr>
-            <a:r>
-              <a:rPr lang="en-US" sz="1650" b="1" dirty="0">
-                <a:solidFill>
-                  <a:srgbClr val="055F56"/>
-                </a:solidFill>
-                <a:latin typeface="Segoe UI"/>
-                <a:cs typeface="Segoe UI"/>
-              </a:rPr>
-              <a:t>3.  </a:t>
-            </a:r>
+              <a:buClr>
+                <a:srgbClr val="055F56"/>
+              </a:buClr>
+              <a:buFont typeface="Arial"/>
+              <a:buChar char="•"/>
+            </a:pPr>
             <a:r>
               <a:rPr lang="en-US" sz="1650" dirty="0">
                 <a:solidFill>
                   <a:srgbClr val="000000"/>
                 </a:solidFill>
-                <a:latin typeface="Segoe UI"/>
-                <a:cs typeface="Segoe UI"/>
+                <a:latin typeface="Arial"/>
+                <a:cs typeface="Arial"/>
               </a:rPr>
               <a:t>Yếu tố gây nhiễu cần hiệu chỉnh, khoảng 10 biến cố mỗi biến (5 phút)</a:t>
             </a:r>
@@ -26053,25 +25825,19 @@
               <a:spcBef>
                 <a:spcPts val="450"/>
               </a:spcBef>
-              <a:buNone/>
-            </a:pPr>
-            <a:r>
-              <a:rPr lang="en-US" sz="1650" b="1" dirty="0">
-                <a:solidFill>
-                  <a:srgbClr val="055F56"/>
-                </a:solidFill>
-                <a:latin typeface="Segoe UI"/>
-                <a:cs typeface="Segoe UI"/>
-              </a:rPr>
-              <a:t>4.  </a:t>
-            </a:r>
+              <a:buClr>
+                <a:srgbClr val="055F56"/>
+              </a:buClr>
+              <a:buFont typeface="Arial"/>
+              <a:buChar char="•"/>
+            </a:pPr>
             <a:r>
               <a:rPr lang="en-US" sz="1650" dirty="0">
                 <a:solidFill>
                   <a:srgbClr val="000000"/>
                 </a:solidFill>
-                <a:latin typeface="Segoe UI"/>
-                <a:cs typeface="Segoe UI"/>
+                <a:latin typeface="Arial"/>
+                <a:cs typeface="Arial"/>
               </a:rPr>
               <a:t>Kế hoạch dữ liệu thiếu: dự kiến, phòng ngừa, cách báo cáo dữ liệu thiếu (7 phút)</a:t>
             </a:r>
@@ -26115,8 +25881,8 @@
                 <a:solidFill>
                   <a:srgbClr val="055F56"/>
                 </a:solidFill>
-                <a:latin typeface="Segoe UI"/>
-                <a:cs typeface="Segoe UI"/>
+                <a:latin typeface="Arial"/>
+                <a:cs typeface="Arial"/>
               </a:rPr>
               <a:t>Dùng các công cụ này</a:t>
             </a:r>
@@ -26137,8 +25903,8 @@
                 <a:solidFill>
                   <a:srgbClr val="000000"/>
                 </a:solidFill>
-                <a:latin typeface="Segoe UI"/>
-                <a:cs typeface="Segoe UI"/>
+                <a:latin typeface="Arial"/>
+                <a:cs typeface="Arial"/>
               </a:rPr>
               <a:t>Bảng tính cỡ mẫu</a:t>
             </a:r>
@@ -26159,8 +25925,8 @@
                 <a:solidFill>
                   <a:srgbClr val="000000"/>
                 </a:solidFill>
-                <a:latin typeface="Segoe UI"/>
-                <a:cs typeface="Segoe UI"/>
+                <a:latin typeface="Arial"/>
+                <a:cs typeface="Arial"/>
               </a:rPr>
               <a:t>Sơ đồ chọn kiểm định</a:t>
             </a:r>
@@ -26181,8 +25947,8 @@
                 <a:solidFill>
                   <a:srgbClr val="000000"/>
                 </a:solidFill>
-                <a:latin typeface="Segoe UI"/>
-                <a:cs typeface="Segoe UI"/>
+                <a:latin typeface="Arial"/>
+                <a:cs typeface="Arial"/>
               </a:rPr>
               <a:t>SAP của FLUID-ICU làm mẫu</a:t>
             </a:r>
@@ -26203,8 +25969,8 @@
                 <a:solidFill>
                   <a:srgbClr val="000000"/>
                 </a:solidFill>
-                <a:latin typeface="Segoe UI"/>
-                <a:cs typeface="Segoe UI"/>
+                <a:latin typeface="Arial"/>
+                <a:cs typeface="Arial"/>
               </a:rPr>
               <a:t>Phiếu bài tập: bài 9</a:t>
             </a:r>
@@ -26250,8 +26016,8 @@
                 <a:solidFill>
                   <a:srgbClr val="055F56"/>
                 </a:solidFill>
-                <a:latin typeface="Segoe UI"/>
-                <a:cs typeface="Segoe UI"/>
+                <a:latin typeface="Arial"/>
+                <a:cs typeface="Arial"/>
               </a:rPr>
               <a:t>SẢN PHẨM   </a:t>
             </a:r>
@@ -26260,8 +26026,8 @@
                 <a:solidFill>
                   <a:srgbClr val="000000"/>
                 </a:solidFill>
-                <a:latin typeface="Segoe UI"/>
-                <a:cs typeface="Segoe UI"/>
+                <a:latin typeface="Arial"/>
+                <a:cs typeface="Arial"/>
               </a:rPr>
               <a:t>Phần 3 đề cương hoàn chỉnh trong mẫu của nhóm</a:t>
             </a:r>
@@ -26298,7 +26064,7 @@
                     <a:lumMod val="50000"/>
                   </a:schemeClr>
                 </a:solidFill>
-                <a:latin typeface="Verdana"/>
+                <a:latin typeface="Arial"/>
               </a:rPr>
               <a:t>Neudata | #ClearDataClearImpact</a:t>
             </a:r>
@@ -26428,8 +26194,8 @@
                 <a:solidFill>
                   <a:srgbClr val="0D7377"/>
                 </a:solidFill>
-                <a:latin typeface="Segoe UI"/>
-                <a:cs typeface="Segoe UI"/>
+                <a:latin typeface="Arial"/>
+                <a:cs typeface="Arial"/>
               </a:rPr>
               <a:t>Từ khóa của ngày</a:t>
             </a:r>
@@ -26495,8 +26261,8 @@
                 <a:solidFill>
                   <a:srgbClr val="595959"/>
                 </a:solidFill>
-                <a:latin typeface="Segoe UI"/>
-                <a:cs typeface="Segoe UI"/>
+                <a:latin typeface="Arial"/>
+                <a:cs typeface="Arial"/>
               </a:rPr>
               <a:t>Mười hai thuật ngữ anh chị giờ có thể giải thích cho đồng nghiệp.</a:t>
             </a:r>
@@ -26538,8 +26304,8 @@
                 <a:solidFill>
                   <a:srgbClr val="FFFFFF"/>
                 </a:solidFill>
-                <a:latin typeface="Segoe UI"/>
-                <a:cs typeface="Segoe UI"/>
+                <a:latin typeface="Arial"/>
+                <a:cs typeface="Arial"/>
               </a:rPr>
               <a:t>Không chắc chắn</a:t>
             </a:r>
@@ -26587,8 +26353,8 @@
                 <a:solidFill>
                   <a:srgbClr val="000000"/>
                 </a:solidFill>
-                <a:latin typeface="Segoe UI"/>
-                <a:cs typeface="Segoe UI"/>
+                <a:latin typeface="Arial"/>
+                <a:cs typeface="Arial"/>
               </a:rPr>
               <a:t>95% CI</a:t>
             </a:r>
@@ -26608,8 +26374,8 @@
                 <a:solidFill>
                   <a:srgbClr val="000000"/>
                 </a:solidFill>
-                <a:latin typeface="Segoe UI"/>
-                <a:cs typeface="Segoe UI"/>
+                <a:latin typeface="Arial"/>
+                <a:cs typeface="Arial"/>
               </a:rPr>
               <a:t>Giá trị p</a:t>
             </a:r>
@@ -26629,8 +26395,8 @@
                 <a:solidFill>
                   <a:srgbClr val="000000"/>
                 </a:solidFill>
-                <a:latin typeface="Segoe UI"/>
-                <a:cs typeface="Segoe UI"/>
+                <a:latin typeface="Arial"/>
+                <a:cs typeface="Arial"/>
               </a:rPr>
               <a:t>Power</a:t>
             </a:r>
@@ -26672,8 +26438,8 @@
                 <a:solidFill>
                   <a:srgbClr val="FFFFFF"/>
                 </a:solidFill>
-                <a:latin typeface="Segoe UI"/>
-                <a:cs typeface="Segoe UI"/>
+                <a:latin typeface="Arial"/>
+                <a:cs typeface="Arial"/>
               </a:rPr>
               <a:t>So sánh</a:t>
             </a:r>
@@ -26721,8 +26487,8 @@
                 <a:solidFill>
                   <a:srgbClr val="000000"/>
                 </a:solidFill>
-                <a:latin typeface="Segoe UI"/>
-                <a:cs typeface="Segoe UI"/>
+                <a:latin typeface="Arial"/>
+                <a:cs typeface="Arial"/>
               </a:rPr>
               <a:t>t / Mann-Whitney</a:t>
             </a:r>
@@ -26742,8 +26508,8 @@
                 <a:solidFill>
                   <a:srgbClr val="000000"/>
                 </a:solidFill>
-                <a:latin typeface="Segoe UI"/>
-                <a:cs typeface="Segoe UI"/>
+                <a:latin typeface="Arial"/>
+                <a:cs typeface="Arial"/>
               </a:rPr>
               <a:t>Khi bình phương</a:t>
             </a:r>
@@ -26763,8 +26529,8 @@
                 <a:solidFill>
                   <a:srgbClr val="000000"/>
                 </a:solidFill>
-                <a:latin typeface="Segoe UI"/>
-                <a:cs typeface="Segoe UI"/>
+                <a:latin typeface="Arial"/>
+                <a:cs typeface="Arial"/>
               </a:rPr>
               <a:t>Ghép cặp</a:t>
             </a:r>
@@ -26806,8 +26572,8 @@
                 <a:solidFill>
                   <a:srgbClr val="FFFFFF"/>
                 </a:solidFill>
-                <a:latin typeface="Segoe UI"/>
-                <a:cs typeface="Segoe UI"/>
+                <a:latin typeface="Arial"/>
+                <a:cs typeface="Arial"/>
               </a:rPr>
               <a:t>Mô hình</a:t>
             </a:r>
@@ -26855,8 +26621,8 @@
                 <a:solidFill>
                   <a:srgbClr val="000000"/>
                 </a:solidFill>
-                <a:latin typeface="Segoe UI"/>
-                <a:cs typeface="Segoe UI"/>
+                <a:latin typeface="Arial"/>
+                <a:cs typeface="Arial"/>
               </a:rPr>
               <a:t>OR hiệu chỉnh</a:t>
             </a:r>
@@ -26876,8 +26642,8 @@
                 <a:solidFill>
                   <a:srgbClr val="000000"/>
                 </a:solidFill>
-                <a:latin typeface="Segoe UI"/>
-                <a:cs typeface="Segoe UI"/>
+                <a:latin typeface="Arial"/>
+                <a:cs typeface="Arial"/>
               </a:rPr>
               <a:t>Tỉ số nguy cơ (HR)</a:t>
             </a:r>
@@ -26897,8 +26663,8 @@
                 <a:solidFill>
                   <a:srgbClr val="000000"/>
                 </a:solidFill>
-                <a:latin typeface="Segoe UI"/>
-                <a:cs typeface="Segoe UI"/>
+                <a:latin typeface="Arial"/>
+                <a:cs typeface="Arial"/>
               </a:rPr>
               <a:t>Kiểm duyệt</a:t>
             </a:r>
@@ -26940,8 +26706,8 @@
                 <a:solidFill>
                   <a:srgbClr val="FFFFFF"/>
                 </a:solidFill>
-                <a:latin typeface="Segoe UI"/>
-                <a:cs typeface="Segoe UI"/>
+                <a:latin typeface="Arial"/>
+                <a:cs typeface="Arial"/>
               </a:rPr>
               <a:t>Trung thực</a:t>
             </a:r>
@@ -26989,8 +26755,8 @@
                 <a:solidFill>
                   <a:srgbClr val="000000"/>
                 </a:solidFill>
-                <a:latin typeface="Segoe UI"/>
-                <a:cs typeface="Segoe UI"/>
+                <a:latin typeface="Arial"/>
+                <a:cs typeface="Arial"/>
               </a:rPr>
               <a:t>SAP</a:t>
             </a:r>
@@ -27010,8 +26776,8 @@
                 <a:solidFill>
                   <a:srgbClr val="000000"/>
                 </a:solidFill>
-                <a:latin typeface="Segoe UI"/>
-                <a:cs typeface="Segoe UI"/>
+                <a:latin typeface="Arial"/>
+                <a:cs typeface="Arial"/>
               </a:rPr>
               <a:t>MCAR / MAR / MNAR</a:t>
             </a:r>
@@ -27031,8 +26797,8 @@
                 <a:solidFill>
                   <a:srgbClr val="000000"/>
                 </a:solidFill>
-                <a:latin typeface="Segoe UI"/>
-                <a:cs typeface="Segoe UI"/>
+                <a:latin typeface="Arial"/>
+                <a:cs typeface="Arial"/>
               </a:rPr>
               <a:t>Đa phép gán</a:t>
             </a:r>
@@ -27076,8 +26842,8 @@
                 <a:solidFill>
                   <a:srgbClr val="FFFFFF"/>
                 </a:solidFill>
-                <a:latin typeface="Segoe UI"/>
-                <a:cs typeface="Segoe UI"/>
+                <a:latin typeface="Arial"/>
+                <a:cs typeface="Arial"/>
               </a:rPr>
               <a:t>THÔNG ĐIỆP CHÍNH   </a:t>
             </a:r>
@@ -27086,8 +26852,8 @@
                 <a:solidFill>
                   <a:srgbClr val="FFFFFF"/>
                 </a:solidFill>
-                <a:latin typeface="Segoe UI"/>
-                <a:cs typeface="Segoe UI"/>
+                <a:latin typeface="Arial"/>
+                <a:cs typeface="Arial"/>
               </a:rPr>
               <a:t>Nếu từ nào chưa rõ, hãy hỏi ngay hoặc tra trong bảng thuật ngữ.</a:t>
             </a:r>
@@ -27124,7 +26890,7 @@
                     <a:lumMod val="50000"/>
                   </a:schemeClr>
                 </a:solidFill>
-                <a:latin typeface="Verdana"/>
+                <a:latin typeface="Arial"/>
               </a:rPr>
               <a:t>Neudata | #ClearDataClearImpact</a:t>
             </a:r>
@@ -27254,8 +27020,8 @@
                 <a:solidFill>
                   <a:srgbClr val="0D7377"/>
                 </a:solidFill>
-                <a:latin typeface="Segoe UI"/>
-                <a:cs typeface="Segoe UI"/>
+                <a:latin typeface="Arial"/>
+                <a:cs typeface="Arial"/>
               </a:rPr>
               <a:t>Tóm tắt Buổi 6</a:t>
             </a:r>
@@ -27321,8 +27087,8 @@
                 <a:solidFill>
                   <a:srgbClr val="595959"/>
                 </a:solidFill>
-                <a:latin typeface="Segoe UI"/>
-                <a:cs typeface="Segoe UI"/>
+                <a:latin typeface="Arial"/>
+                <a:cs typeface="Arial"/>
               </a:rPr>
               <a:t>Ba thông điệp mang về.</a:t>
             </a:r>
@@ -27364,10 +27130,10 @@
                 <a:solidFill>
                   <a:srgbClr val="FFFFFF"/>
                 </a:solidFill>
-                <a:latin typeface="Segoe UI"/>
-                <a:cs typeface="Segoe UI"/>
-              </a:rPr>
-              <a:t>1. Đọc CI</a:t>
+                <a:latin typeface="Arial"/>
+                <a:cs typeface="Arial"/>
+              </a:rPr>
+              <a:t>Đọc CI</a:t>
             </a:r>
           </a:p>
         </p:txBody>
@@ -27413,8 +27179,8 @@
                 <a:solidFill>
                   <a:srgbClr val="000000"/>
                 </a:solidFill>
-                <a:latin typeface="Segoe UI"/>
-                <a:cs typeface="Segoe UI"/>
+                <a:latin typeface="Arial"/>
+                <a:cs typeface="Arial"/>
               </a:rPr>
               <a:t>Tác động + 95% CI</a:t>
             </a:r>
@@ -27434,8 +27200,8 @@
                 <a:solidFill>
                   <a:srgbClr val="000000"/>
                 </a:solidFill>
-                <a:latin typeface="Segoe UI"/>
-                <a:cs typeface="Segoe UI"/>
+                <a:latin typeface="Arial"/>
+                <a:cs typeface="Arial"/>
               </a:rPr>
               <a:t>Giá trị không tác động?</a:t>
             </a:r>
@@ -27455,8 +27221,8 @@
                 <a:solidFill>
                   <a:srgbClr val="000000"/>
                 </a:solidFill>
-                <a:latin typeface="Segoe UI"/>
-                <a:cs typeface="Segoe UI"/>
+                <a:latin typeface="Arial"/>
+                <a:cs typeface="Arial"/>
               </a:rPr>
               <a:t>p chỉ là vai phụ</a:t>
             </a:r>
@@ -27498,10 +27264,10 @@
                 <a:solidFill>
                   <a:srgbClr val="FFFFFF"/>
                 </a:solidFill>
-                <a:latin typeface="Segoe UI"/>
-                <a:cs typeface="Segoe UI"/>
-              </a:rPr>
-              <a:t>2. Hiệu chỉnh trung thực</a:t>
+                <a:latin typeface="Arial"/>
+                <a:cs typeface="Arial"/>
+              </a:rPr>
+              <a:t>Hiệu chỉnh trung thực</a:t>
             </a:r>
           </a:p>
         </p:txBody>
@@ -27547,8 +27313,8 @@
                 <a:solidFill>
                   <a:srgbClr val="000000"/>
                 </a:solidFill>
-                <a:latin typeface="Segoe UI"/>
-                <a:cs typeface="Segoe UI"/>
+                <a:latin typeface="Arial"/>
+                <a:cs typeface="Arial"/>
               </a:rPr>
               <a:t>Thô so với hiệu chỉnh</a:t>
             </a:r>
@@ -27568,8 +27334,8 @@
                 <a:solidFill>
                   <a:srgbClr val="000000"/>
                 </a:solidFill>
-                <a:latin typeface="Segoe UI"/>
-                <a:cs typeface="Segoe UI"/>
+                <a:latin typeface="Arial"/>
+                <a:cs typeface="Arial"/>
               </a:rPr>
               <a:t>Gây nhiễu chọn</a:t>
             </a:r>
@@ -27589,8 +27355,8 @@
                 <a:solidFill>
                   <a:srgbClr val="000000"/>
                 </a:solidFill>
-                <a:latin typeface="Segoe UI"/>
-                <a:cs typeface="Segoe UI"/>
+                <a:latin typeface="Arial"/>
+                <a:cs typeface="Arial"/>
               </a:rPr>
               <a:t>từ trước</a:t>
             </a:r>
@@ -27632,10 +27398,10 @@
                 <a:solidFill>
                   <a:srgbClr val="FFFFFF"/>
                 </a:solidFill>
-                <a:latin typeface="Segoe UI"/>
-                <a:cs typeface="Segoe UI"/>
-              </a:rPr>
-              <a:t>3. Lập kế hoạch trước</a:t>
+                <a:latin typeface="Arial"/>
+                <a:cs typeface="Arial"/>
+              </a:rPr>
+              <a:t>Lập kế hoạch trước</a:t>
             </a:r>
           </a:p>
         </p:txBody>
@@ -27681,8 +27447,8 @@
                 <a:solidFill>
                   <a:srgbClr val="000000"/>
                 </a:solidFill>
-                <a:latin typeface="Segoe UI"/>
-                <a:cs typeface="Segoe UI"/>
+                <a:latin typeface="Arial"/>
+                <a:cs typeface="Arial"/>
               </a:rPr>
               <a:t>SAP trước dữ liệu</a:t>
             </a:r>
@@ -27702,8 +27468,8 @@
                 <a:solidFill>
                   <a:srgbClr val="000000"/>
                 </a:solidFill>
-                <a:latin typeface="Segoe UI"/>
-                <a:cs typeface="Segoe UI"/>
+                <a:latin typeface="Arial"/>
+                <a:cs typeface="Arial"/>
               </a:rPr>
               <a:t>Dữ liệu thiếu: báo cáo,</a:t>
             </a:r>
@@ -27723,8 +27489,8 @@
                 <a:solidFill>
                   <a:srgbClr val="000000"/>
                 </a:solidFill>
-                <a:latin typeface="Segoe UI"/>
-                <a:cs typeface="Segoe UI"/>
+                <a:latin typeface="Arial"/>
+                <a:cs typeface="Arial"/>
               </a:rPr>
               <a:t>xử lý, kiểm tra</a:t>
             </a:r>
@@ -27768,8 +27534,8 @@
                 <a:solidFill>
                   <a:srgbClr val="FFFFFF"/>
                 </a:solidFill>
-                <a:latin typeface="Segoe UI"/>
-                <a:cs typeface="Segoe UI"/>
+                <a:latin typeface="Arial"/>
+                <a:cs typeface="Arial"/>
               </a:rPr>
               <a:t>THÔNG ĐIỆP CHÍNH   </a:t>
             </a:r>
@@ -27778,8 +27544,8 @@
                 <a:solidFill>
                   <a:srgbClr val="FFFFFF"/>
                 </a:solidFill>
-                <a:latin typeface="Segoe UI"/>
-                <a:cs typeface="Segoe UI"/>
+                <a:latin typeface="Arial"/>
+                <a:cs typeface="Arial"/>
               </a:rPr>
               <a:t>Phân tích tốt được lên kế hoạch trước, hiệu chỉnh trung thực và đọc qua CI.</a:t>
             </a:r>
@@ -27816,7 +27582,7 @@
                     <a:lumMod val="50000"/>
                   </a:schemeClr>
                 </a:solidFill>
-                <a:latin typeface="Verdana"/>
+                <a:latin typeface="Arial"/>
               </a:rPr>
               <a:t>Neudata | #ClearDataClearImpact</a:t>
             </a:r>
@@ -27946,8 +27712,8 @@
                 <a:solidFill>
                   <a:srgbClr val="0D7377"/>
                 </a:solidFill>
-                <a:latin typeface="Segoe UI"/>
-                <a:cs typeface="Segoe UI"/>
+                <a:latin typeface="Arial"/>
+                <a:cs typeface="Arial"/>
               </a:rPr>
               <a:t>Tổng kết và bài tập về nhà</a:t>
             </a:r>
@@ -28017,8 +27783,8 @@
                 <a:solidFill>
                   <a:srgbClr val="FFFFFF"/>
                 </a:solidFill>
-                <a:latin typeface="Segoe UI"/>
-                <a:cs typeface="Segoe UI"/>
+                <a:latin typeface="Arial"/>
+                <a:cs typeface="Arial"/>
               </a:rPr>
               <a:t>THẢO LUẬN   |   5 phút</a:t>
             </a:r>
@@ -28055,25 +27821,19 @@
               <a:spcBef>
                 <a:spcPts val="450"/>
               </a:spcBef>
-              <a:buNone/>
-            </a:pPr>
-            <a:r>
-              <a:rPr lang="en-US" sz="1650" b="1" dirty="0">
-                <a:solidFill>
-                  <a:srgbClr val="1F5C7A"/>
-                </a:solidFill>
-                <a:latin typeface="Segoe UI"/>
-                <a:cs typeface="Segoe UI"/>
-              </a:rPr>
-              <a:t>1.  </a:t>
-            </a:r>
+              <a:buClr>
+                <a:srgbClr val="1F5C7A"/>
+              </a:buClr>
+              <a:buFont typeface="Arial"/>
+              <a:buChar char="•"/>
+            </a:pPr>
             <a:r>
               <a:rPr lang="en-US" sz="1650" dirty="0">
                 <a:solidFill>
                   <a:srgbClr val="000000"/>
                 </a:solidFill>
-                <a:latin typeface="Segoe UI"/>
-                <a:cs typeface="Segoe UI"/>
+                <a:latin typeface="Arial"/>
+                <a:cs typeface="Arial"/>
               </a:rPr>
               <a:t>Từ khóa và tóm tắt (hai trang trước)</a:t>
             </a:r>
@@ -28086,25 +27846,19 @@
               <a:spcBef>
                 <a:spcPts val="450"/>
               </a:spcBef>
-              <a:buNone/>
-            </a:pPr>
-            <a:r>
-              <a:rPr lang="en-US" sz="1650" b="1" dirty="0">
-                <a:solidFill>
-                  <a:srgbClr val="1F5C7A"/>
-                </a:solidFill>
-                <a:latin typeface="Segoe UI"/>
-                <a:cs typeface="Segoe UI"/>
-              </a:rPr>
-              <a:t>2.  </a:t>
-            </a:r>
+              <a:buClr>
+                <a:srgbClr val="1F5C7A"/>
+              </a:buClr>
+              <a:buFont typeface="Arial"/>
+              <a:buChar char="•"/>
+            </a:pPr>
             <a:r>
               <a:rPr lang="en-US" sz="1650" dirty="0">
                 <a:solidFill>
                   <a:srgbClr val="000000"/>
                 </a:solidFill>
-                <a:latin typeface="Segoe UI"/>
-                <a:cs typeface="Segoe UI"/>
+                <a:latin typeface="Arial"/>
+                <a:cs typeface="Arial"/>
               </a:rPr>
               <a:t>Câu hỏi cuối buổi: viết một câu giải thích '95% CI 1.48 đến 3.06' cho biết điều gì</a:t>
             </a:r>
@@ -28117,25 +27871,19 @@
               <a:spcBef>
                 <a:spcPts val="450"/>
               </a:spcBef>
-              <a:buNone/>
-            </a:pPr>
-            <a:r>
-              <a:rPr lang="en-US" sz="1650" b="1" dirty="0">
-                <a:solidFill>
-                  <a:srgbClr val="1F5C7A"/>
-                </a:solidFill>
-                <a:latin typeface="Segoe UI"/>
-                <a:cs typeface="Segoe UI"/>
-              </a:rPr>
-              <a:t>3.  </a:t>
-            </a:r>
+              <a:buClr>
+                <a:srgbClr val="1F5C7A"/>
+              </a:buClr>
+              <a:buFont typeface="Arial"/>
+              <a:buChar char="•"/>
+            </a:pPr>
             <a:r>
               <a:rPr lang="en-US" sz="1650" dirty="0">
                 <a:solidFill>
                   <a:srgbClr val="000000"/>
                 </a:solidFill>
-                <a:latin typeface="Segoe UI"/>
-                <a:cs typeface="Segoe UI"/>
+                <a:latin typeface="Arial"/>
+                <a:cs typeface="Arial"/>
               </a:rPr>
               <a:t>Về nhà: hoàn thành Phần 3 đề cương; chuẩn bị bài trình bày 6 phút</a:t>
             </a:r>
@@ -28148,25 +27896,19 @@
               <a:spcBef>
                 <a:spcPts val="450"/>
               </a:spcBef>
-              <a:buNone/>
-            </a:pPr>
-            <a:r>
-              <a:rPr lang="en-US" sz="1650" b="1" dirty="0">
-                <a:solidFill>
-                  <a:srgbClr val="1F5C7A"/>
-                </a:solidFill>
-                <a:latin typeface="Segoe UI"/>
-                <a:cs typeface="Segoe UI"/>
-              </a:rPr>
-              <a:t>4.  </a:t>
-            </a:r>
+              <a:buClr>
+                <a:srgbClr val="1F5C7A"/>
+              </a:buClr>
+              <a:buFont typeface="Arial"/>
+              <a:buChar char="•"/>
+            </a:pPr>
             <a:r>
               <a:rPr lang="en-US" sz="1650" dirty="0">
                 <a:solidFill>
                   <a:srgbClr val="000000"/>
                 </a:solidFill>
-                <a:latin typeface="Segoe UI"/>
-                <a:cs typeface="Segoe UI"/>
+                <a:latin typeface="Arial"/>
+                <a:cs typeface="Arial"/>
               </a:rPr>
               <a:t>Đọc lại gói kết quả: đó sẽ là phần Phương pháp và Kết quả ở Buổi 7</a:t>
             </a:r>
@@ -28210,8 +27952,8 @@
                 <a:solidFill>
                   <a:srgbClr val="1F5C7A"/>
                 </a:solidFill>
-                <a:latin typeface="Segoe UI"/>
-                <a:cs typeface="Segoe UI"/>
+                <a:latin typeface="Arial"/>
+                <a:cs typeface="Arial"/>
               </a:rPr>
               <a:t>Tuần 7-8</a:t>
             </a:r>
@@ -28232,8 +27974,8 @@
                 <a:solidFill>
                   <a:srgbClr val="000000"/>
                 </a:solidFill>
-                <a:latin typeface="Segoe UI"/>
-                <a:cs typeface="Segoe UI"/>
+                <a:latin typeface="Arial"/>
+                <a:cs typeface="Arial"/>
               </a:rPr>
               <a:t>Đề cương, đạo đức, đăng ký</a:t>
             </a:r>
@@ -28254,8 +27996,8 @@
                 <a:solidFill>
                   <a:srgbClr val="000000"/>
                 </a:solidFill>
-                <a:latin typeface="Segoe UI"/>
-                <a:cs typeface="Segoe UI"/>
+                <a:latin typeface="Arial"/>
+                <a:cs typeface="Arial"/>
               </a:rPr>
               <a:t>Liêm chính nghiên cứu</a:t>
             </a:r>
@@ -28276,8 +28018,8 @@
                 <a:solidFill>
                   <a:srgbClr val="000000"/>
                 </a:solidFill>
-                <a:latin typeface="Segoe UI"/>
-                <a:cs typeface="Segoe UI"/>
+                <a:latin typeface="Arial"/>
+                <a:cs typeface="Arial"/>
               </a:rPr>
               <a:t>Viết Phương pháp và Kết quả</a:t>
             </a:r>
@@ -28298,8 +28040,8 @@
                 <a:solidFill>
                   <a:srgbClr val="000000"/>
                 </a:solidFill>
-                <a:latin typeface="Segoe UI"/>
-                <a:cs typeface="Segoe UI"/>
+                <a:latin typeface="Arial"/>
+                <a:cs typeface="Arial"/>
               </a:rPr>
               <a:t>Công bố bài báo</a:t>
             </a:r>
@@ -28320,8 +28062,8 @@
                 <a:solidFill>
                   <a:srgbClr val="000000"/>
                 </a:solidFill>
-                <a:latin typeface="Segoe UI"/>
-                <a:cs typeface="Segoe UI"/>
+                <a:latin typeface="Arial"/>
+                <a:cs typeface="Arial"/>
               </a:rPr>
               <a:t>Trình bày</a:t>
             </a:r>
@@ -28367,8 +28109,8 @@
                 <a:solidFill>
                   <a:srgbClr val="1F5C7A"/>
                 </a:solidFill>
-                <a:latin typeface="Segoe UI"/>
-                <a:cs typeface="Segoe UI"/>
+                <a:latin typeface="Arial"/>
+                <a:cs typeface="Arial"/>
               </a:rPr>
               <a:t>SẢN PHẨM   </a:t>
             </a:r>
@@ -28377,8 +28119,8 @@
                 <a:solidFill>
                   <a:srgbClr val="000000"/>
                 </a:solidFill>
-                <a:latin typeface="Segoe UI"/>
-                <a:cs typeface="Segoe UI"/>
+                <a:latin typeface="Arial"/>
+                <a:cs typeface="Arial"/>
               </a:rPr>
               <a:t>Câu trả lời trên giấy nhớ; Phần 3 hoàn chỉnh</a:t>
             </a:r>
@@ -28415,7 +28157,7 @@
                     <a:lumMod val="50000"/>
                   </a:schemeClr>
                 </a:solidFill>
-                <a:latin typeface="Verdana"/>
+                <a:latin typeface="Arial"/>
               </a:rPr>
               <a:t>Neudata | #ClearDataClearImpact</a:t>
             </a:r>
@@ -28545,8 +28287,8 @@
                 <a:solidFill>
                   <a:srgbClr val="0D7377"/>
                 </a:solidFill>
-                <a:latin typeface="Segoe UI"/>
-                <a:cs typeface="Segoe UI"/>
+                <a:latin typeface="Arial"/>
+                <a:cs typeface="Arial"/>
               </a:rPr>
               <a:t>Trang bổ sung: Buổi 6</a:t>
             </a:r>
@@ -28615,8 +28357,8 @@
                 <a:solidFill>
                   <a:srgbClr val="0D7377"/>
                 </a:solidFill>
-                <a:latin typeface="Segoe UI"/>
-                <a:cs typeface="Segoe UI"/>
+                <a:latin typeface="Arial"/>
+                <a:cs typeface="Arial"/>
               </a:rPr>
               <a:t>Trang bổ sung: dùng nếu còn thời gian, hoặc để tự học.</a:t>
             </a:r>
@@ -28633,8 +28375,8 @@
                 <a:solidFill>
                   <a:srgbClr val="595959"/>
                 </a:solidFill>
-                <a:latin typeface="Segoe UI"/>
-                <a:cs typeface="Segoe UI"/>
+                <a:latin typeface="Arial"/>
+                <a:cs typeface="Arial"/>
               </a:rPr>
               <a:t>Tương tác, giá trị không tác động, dự báo và học máy, chi tiết về dữ liệu thiếu</a:t>
             </a:r>
@@ -28671,7 +28413,7 @@
                     <a:lumMod val="50000"/>
                   </a:schemeClr>
                 </a:solidFill>
-                <a:latin typeface="Verdana"/>
+                <a:latin typeface="Arial"/>
               </a:rPr>
               <a:t>Neudata | #ClearDataClearImpact</a:t>
             </a:r>
@@ -28801,8 +28543,8 @@
                 <a:solidFill>
                   <a:srgbClr val="0D7377"/>
                 </a:solidFill>
-                <a:latin typeface="Segoe UI"/>
-                <a:cs typeface="Segoe UI"/>
+                <a:latin typeface="Arial"/>
+                <a:cs typeface="Arial"/>
               </a:rPr>
               <a:t>Bổ sung: tương tác định trước với suy tim (Q1)</a:t>
             </a:r>
@@ -28898,8 +28640,8 @@
                 <a:solidFill>
                   <a:srgbClr val="FFFFFF"/>
                 </a:solidFill>
-                <a:latin typeface="Segoe UI"/>
-                <a:cs typeface="Segoe UI"/>
+                <a:latin typeface="Arial"/>
+                <a:cs typeface="Arial"/>
               </a:rPr>
               <a:t>THÔNG ĐIỆP CHÍNH   </a:t>
             </a:r>
@@ -28908,8 +28650,8 @@
                 <a:solidFill>
                   <a:srgbClr val="FFFFFF"/>
                 </a:solidFill>
-                <a:latin typeface="Segoe UI"/>
-                <a:cs typeface="Segoe UI"/>
+                <a:latin typeface="Arial"/>
+                <a:cs typeface="Arial"/>
               </a:rPr>
               <a:t>Liên quan mạnh hơn ở suy tim (p tương tác 0.031): cần được xác nhận.</a:t>
             </a:r>
@@ -28946,7 +28688,7 @@
                     <a:lumMod val="50000"/>
                   </a:schemeClr>
                 </a:solidFill>
-                <a:latin typeface="Verdana"/>
+                <a:latin typeface="Arial"/>
               </a:rPr>
               <a:t>Neudata | #ClearDataClearImpact</a:t>
             </a:r>
@@ -29076,8 +28818,8 @@
                 <a:solidFill>
                   <a:srgbClr val="0D7377"/>
                 </a:solidFill>
-                <a:latin typeface="Segoe UI"/>
-                <a:cs typeface="Segoe UI"/>
+                <a:latin typeface="Arial"/>
+                <a:cs typeface="Arial"/>
               </a:rPr>
               <a:t>Bổ sung: AKI tăng theo cân bằng dịch (Q2)</a:t>
             </a:r>
@@ -29173,8 +28915,8 @@
                 <a:solidFill>
                   <a:srgbClr val="FFFFFF"/>
                 </a:solidFill>
-                <a:latin typeface="Segoe UI"/>
-                <a:cs typeface="Segoe UI"/>
+                <a:latin typeface="Arial"/>
+                <a:cs typeface="Arial"/>
               </a:rPr>
               <a:t>THÔNG ĐIỆP CHÍNH   </a:t>
             </a:r>
@@ -29183,8 +28925,8 @@
                 <a:solidFill>
                   <a:srgbClr val="FFFFFF"/>
                 </a:solidFill>
-                <a:latin typeface="Segoe UI"/>
-                <a:cs typeface="Segoe UI"/>
+                <a:latin typeface="Arial"/>
+                <a:cs typeface="Arial"/>
               </a:rPr>
               <a:t>Một gradient liều-đáp ứng: AKI 29%, 54%, 63%, 75% qua các nhóm cân bằng.</a:t>
             </a:r>
@@ -29221,7 +28963,7 @@
                     <a:lumMod val="50000"/>
                   </a:schemeClr>
                 </a:solidFill>
-                <a:latin typeface="Verdana"/>
+                <a:latin typeface="Arial"/>
               </a:rPr>
               <a:t>Neudata | #ClearDataClearImpact</a:t>
             </a:r>
@@ -29351,8 +29093,8 @@
                 <a:solidFill>
                   <a:srgbClr val="0D7377"/>
                 </a:solidFill>
-                <a:latin typeface="Segoe UI"/>
-                <a:cs typeface="Segoe UI"/>
+                <a:latin typeface="Arial"/>
+                <a:cs typeface="Arial"/>
               </a:rPr>
               <a:t>Giá trị p trong một hình</a:t>
             </a:r>
@@ -29448,8 +29190,8 @@
                 <a:solidFill>
                   <a:srgbClr val="FFFFFF"/>
                 </a:solidFill>
-                <a:latin typeface="Segoe UI"/>
-                <a:cs typeface="Segoe UI"/>
+                <a:latin typeface="Arial"/>
+                <a:cs typeface="Arial"/>
               </a:rPr>
               <a:t>THÔNG ĐIỆP CHÍNH   </a:t>
             </a:r>
@@ -29458,8 +29200,8 @@
                 <a:solidFill>
                   <a:srgbClr val="FFFFFF"/>
                 </a:solidFill>
-                <a:latin typeface="Segoe UI"/>
-                <a:cs typeface="Segoe UI"/>
+                <a:latin typeface="Arial"/>
+                <a:cs typeface="Arial"/>
               </a:rPr>
               <a:t>p = kết quả của ta đáng ngạc nhiên đến đâu nếu thực sự không có khác biệt.</a:t>
             </a:r>
@@ -29496,7 +29238,7 @@
                     <a:lumMod val="50000"/>
                   </a:schemeClr>
                 </a:solidFill>
-                <a:latin typeface="Verdana"/>
+                <a:latin typeface="Arial"/>
               </a:rPr>
               <a:t>Neudata | #ClearDataClearImpact</a:t>
             </a:r>
@@ -29626,8 +29368,8 @@
                 <a:solidFill>
                   <a:srgbClr val="0D7377"/>
                 </a:solidFill>
-                <a:latin typeface="Segoe UI"/>
-                <a:cs typeface="Segoe UI"/>
+                <a:latin typeface="Arial"/>
+                <a:cs typeface="Arial"/>
               </a:rPr>
               <a:t>Bổ sung: số ngày không thở máy, một kết cục khó (Q3)</a:t>
             </a:r>
@@ -29723,8 +29465,8 @@
                 <a:solidFill>
                   <a:srgbClr val="FFFFFF"/>
                 </a:solidFill>
-                <a:latin typeface="Segoe UI"/>
-                <a:cs typeface="Segoe UI"/>
+                <a:latin typeface="Arial"/>
+                <a:cs typeface="Arial"/>
               </a:rPr>
               <a:t>THÔNG ĐIỆP CHÍNH   </a:t>
             </a:r>
@@ -29733,8 +29475,8 @@
                 <a:solidFill>
                   <a:srgbClr val="FFFFFF"/>
                 </a:solidFill>
-                <a:latin typeface="Segoe UI"/>
-                <a:cs typeface="Segoe UI"/>
+                <a:latin typeface="Arial"/>
+                <a:cs typeface="Arial"/>
               </a:rPr>
               <a:t>Dồn ở 0 và 28: báo cáo trung vị và dùng kiểm định phi tham số.</a:t>
             </a:r>
@@ -29771,7 +29513,7 @@
                     <a:lumMod val="50000"/>
                   </a:schemeClr>
                 </a:solidFill>
-                <a:latin typeface="Verdana"/>
+                <a:latin typeface="Arial"/>
               </a:rPr>
               <a:t>Neudata | #ClearDataClearImpact</a:t>
             </a:r>
@@ -29901,8 +29643,8 @@
                 <a:solidFill>
                   <a:srgbClr val="0D7377"/>
                 </a:solidFill>
-                <a:latin typeface="Segoe UI"/>
-                <a:cs typeface="Segoe UI"/>
+                <a:latin typeface="Arial"/>
+                <a:cs typeface="Arial"/>
               </a:rPr>
               <a:t>Bổ sung: Mẫu và quần thể</a:t>
             </a:r>
@@ -29998,8 +29740,8 @@
                 <a:solidFill>
                   <a:srgbClr val="FFFFFF"/>
                 </a:solidFill>
-                <a:latin typeface="Segoe UI"/>
-                <a:cs typeface="Segoe UI"/>
+                <a:latin typeface="Arial"/>
+                <a:cs typeface="Arial"/>
               </a:rPr>
               <a:t>THÔNG ĐIỆP CHÍNH   </a:t>
             </a:r>
@@ -30008,8 +29750,8 @@
                 <a:solidFill>
                   <a:srgbClr val="FFFFFF"/>
                 </a:solidFill>
-                <a:latin typeface="Segoe UI"/>
-                <a:cs typeface="Segoe UI"/>
+                <a:latin typeface="Arial"/>
+                <a:cs typeface="Arial"/>
               </a:rPr>
               <a:t>Mẫu cho ta một ước lượng; CI cho biết ước lượng đó chính xác đến đâu.</a:t>
             </a:r>
@@ -30046,7 +29788,7 @@
                     <a:lumMod val="50000"/>
                   </a:schemeClr>
                 </a:solidFill>
-                <a:latin typeface="Verdana"/>
+                <a:latin typeface="Arial"/>
               </a:rPr>
               <a:t>Neudata | #ClearDataClearImpact</a:t>
             </a:r>
@@ -30176,8 +29918,8 @@
                 <a:solidFill>
                   <a:srgbClr val="0D7377"/>
                 </a:solidFill>
-                <a:latin typeface="Segoe UI"/>
-                <a:cs typeface="Segoe UI"/>
+                <a:latin typeface="Arial"/>
+                <a:cs typeface="Arial"/>
               </a:rPr>
               <a:t>Bổ sung: Đọc khoảng tin cậy 95% trong một bài báo thật</a:t>
             </a:r>
@@ -30243,8 +29985,8 @@
                 <a:solidFill>
                   <a:srgbClr val="595959"/>
                 </a:solidFill>
-                <a:latin typeface="Segoe UI"/>
-                <a:cs typeface="Segoe UI"/>
+                <a:latin typeface="Arial"/>
+                <a:cs typeface="Arial"/>
               </a:rPr>
               <a:t>Bài báo 1, kết cục chính: cân bằng dịch tích lũy ngày 5.</a:t>
             </a:r>
@@ -30286,8 +30028,8 @@
                 <a:solidFill>
                   <a:srgbClr val="FFFFFF"/>
                 </a:solidFill>
-                <a:latin typeface="Segoe UI"/>
-                <a:cs typeface="Segoe UI"/>
+                <a:latin typeface="Arial"/>
+                <a:cs typeface="Arial"/>
               </a:rPr>
               <a:t>Kết quả</a:t>
             </a:r>
@@ -30335,8 +30077,8 @@
                 <a:solidFill>
                   <a:srgbClr val="000000"/>
                 </a:solidFill>
-                <a:latin typeface="Segoe UI"/>
-                <a:cs typeface="Segoe UI"/>
+                <a:latin typeface="Arial"/>
+                <a:cs typeface="Arial"/>
               </a:rPr>
               <a:t>Trung vị 6.9 so với 35.0 ml/kg</a:t>
             </a:r>
@@ -30356,8 +30098,8 @@
                 <a:solidFill>
                   <a:srgbClr val="000000"/>
                 </a:solidFill>
-                <a:latin typeface="Segoe UI"/>
-                <a:cs typeface="Segoe UI"/>
+                <a:latin typeface="Arial"/>
+                <a:cs typeface="Arial"/>
               </a:rPr>
               <a:t>Chênh lệch trung bình 13.2 ml/kg</a:t>
             </a:r>
@@ -30377,8 +30119,8 @@
                 <a:solidFill>
                   <a:srgbClr val="000000"/>
                 </a:solidFill>
-                <a:latin typeface="Segoe UI"/>
-                <a:cs typeface="Segoe UI"/>
+                <a:latin typeface="Arial"/>
+                <a:cs typeface="Arial"/>
               </a:rPr>
               <a:t>95% CI -15.2 đến 41.6</a:t>
             </a:r>
@@ -30398,8 +30140,8 @@
                 <a:solidFill>
                   <a:srgbClr val="000000"/>
                 </a:solidFill>
-                <a:latin typeface="Segoe UI"/>
-                <a:cs typeface="Segoe UI"/>
+                <a:latin typeface="Arial"/>
+                <a:cs typeface="Arial"/>
               </a:rPr>
               <a:t>p = 0.42</a:t>
             </a:r>
@@ -30441,8 +30183,8 @@
                 <a:solidFill>
                   <a:srgbClr val="FFFFFF"/>
                 </a:solidFill>
-                <a:latin typeface="Segoe UI"/>
-                <a:cs typeface="Segoe UI"/>
+                <a:latin typeface="Arial"/>
+                <a:cs typeface="Arial"/>
               </a:rPr>
               <a:t>Số 0 ở đâu?</a:t>
             </a:r>
@@ -30490,8 +30232,8 @@
                 <a:solidFill>
                   <a:srgbClr val="000000"/>
                 </a:solidFill>
-                <a:latin typeface="Segoe UI"/>
-                <a:cs typeface="Segoe UI"/>
+                <a:latin typeface="Arial"/>
+                <a:cs typeface="Arial"/>
               </a:rPr>
               <a:t>0 = không khác biệt</a:t>
             </a:r>
@@ -30511,8 +30253,8 @@
                 <a:solidFill>
                   <a:srgbClr val="000000"/>
                 </a:solidFill>
-                <a:latin typeface="Segoe UI"/>
-                <a:cs typeface="Segoe UI"/>
+                <a:latin typeface="Arial"/>
+                <a:cs typeface="Arial"/>
               </a:rPr>
               <a:t>CI chứa số 0</a:t>
             </a:r>
@@ -30532,8 +30274,8 @@
                 <a:solidFill>
                   <a:srgbClr val="000000"/>
                 </a:solidFill>
-                <a:latin typeface="Segoe UI"/>
-                <a:cs typeface="Segoe UI"/>
+                <a:latin typeface="Arial"/>
+                <a:cs typeface="Arial"/>
               </a:rPr>
               <a:t>Nên 'không khác biệt' phù hợp với dữ liệu</a:t>
             </a:r>
@@ -30575,8 +30317,8 @@
                 <a:solidFill>
                   <a:srgbClr val="FFFFFF"/>
                 </a:solidFill>
-                <a:latin typeface="Segoe UI"/>
-                <a:cs typeface="Segoe UI"/>
+                <a:latin typeface="Arial"/>
+                <a:cs typeface="Arial"/>
               </a:rPr>
               <a:t>Rộng đến đâu?</a:t>
             </a:r>
@@ -30624,8 +30366,8 @@
                 <a:solidFill>
                   <a:srgbClr val="000000"/>
                 </a:solidFill>
-                <a:latin typeface="Segoe UI"/>
-                <a:cs typeface="Segoe UI"/>
+                <a:latin typeface="Arial"/>
+                <a:cs typeface="Arial"/>
               </a:rPr>
               <a:t>Từ 15 ml/kg theo một hướng</a:t>
             </a:r>
@@ -30645,8 +30387,8 @@
                 <a:solidFill>
                   <a:srgbClr val="000000"/>
                 </a:solidFill>
-                <a:latin typeface="Segoe UI"/>
-                <a:cs typeface="Segoe UI"/>
+                <a:latin typeface="Arial"/>
+                <a:cs typeface="Arial"/>
               </a:rPr>
               <a:t>đến 42 ml/kg theo hướng kia</a:t>
             </a:r>
@@ -30666,8 +30408,8 @@
                 <a:solidFill>
                   <a:srgbClr val="000000"/>
                 </a:solidFill>
-                <a:latin typeface="Segoe UI"/>
-                <a:cs typeface="Segoe UI"/>
+                <a:latin typeface="Arial"/>
+                <a:cs typeface="Arial"/>
               </a:rPr>
               <a:t>Rất kém chính xác: chỉ 48 bệnh nhân</a:t>
             </a:r>
@@ -30711,8 +30453,8 @@
                 <a:solidFill>
                   <a:srgbClr val="FFFFFF"/>
                 </a:solidFill>
-                <a:latin typeface="Segoe UI"/>
-                <a:cs typeface="Segoe UI"/>
+                <a:latin typeface="Arial"/>
+                <a:cs typeface="Arial"/>
               </a:rPr>
               <a:t>THÔNG ĐIỆP CHÍNH   </a:t>
             </a:r>
@@ -30721,8 +30463,8 @@
                 <a:solidFill>
                   <a:srgbClr val="FFFFFF"/>
                 </a:solidFill>
-                <a:latin typeface="Segoe UI"/>
-                <a:cs typeface="Segoe UI"/>
+                <a:latin typeface="Arial"/>
+                <a:cs typeface="Arial"/>
               </a:rPr>
               <a:t>'Không có ý nghĩa' với CI rộng nghĩa là 'chưa biết', không phải 'không tác động'.</a:t>
             </a:r>
@@ -30759,7 +30501,7 @@
                     <a:lumMod val="50000"/>
                   </a:schemeClr>
                 </a:solidFill>
-                <a:latin typeface="Verdana"/>
+                <a:latin typeface="Arial"/>
               </a:rPr>
               <a:t>Neudata | #ClearDataClearImpact</a:t>
             </a:r>
@@ -30889,8 +30631,8 @@
                 <a:solidFill>
                   <a:srgbClr val="0D7377"/>
                 </a:solidFill>
-                <a:latin typeface="Segoe UI"/>
-                <a:cs typeface="Segoe UI"/>
+                <a:latin typeface="Arial"/>
+                <a:cs typeface="Arial"/>
               </a:rPr>
               <a:t>Bổ sung: ví dụ xuyên suốt trong một biểu đồ rừng</a:t>
             </a:r>
@@ -30980,8 +30722,8 @@
                 <a:solidFill>
                   <a:srgbClr val="595959"/>
                 </a:solidFill>
-                <a:latin typeface="Segoe UI"/>
-                <a:cs typeface="Segoe UI"/>
+                <a:latin typeface="Arial"/>
+                <a:cs typeface="Arial"/>
               </a:rPr>
               <a:t>Bài báo 2 (Hyun 2023): cân bằng dịch tích lũy dương so với âm, các đoàn hệ ghép cặp theo điểm xu hướng</a:t>
             </a:r>
@@ -31025,8 +30767,8 @@
                 <a:solidFill>
                   <a:srgbClr val="FFFFFF"/>
                 </a:solidFill>
-                <a:latin typeface="Segoe UI"/>
-                <a:cs typeface="Segoe UI"/>
+                <a:latin typeface="Arial"/>
+                <a:cs typeface="Arial"/>
               </a:rPr>
               <a:t>THÔNG ĐIỆP CHÍNH   </a:t>
             </a:r>
@@ -31035,8 +30777,8 @@
                 <a:solidFill>
                   <a:srgbClr val="FFFFFF"/>
                 </a:solidFill>
-                <a:latin typeface="Segoe UI"/>
-                <a:cs typeface="Segoe UI"/>
+                <a:latin typeface="Arial"/>
+                <a:cs typeface="Arial"/>
               </a:rPr>
               <a:t>Ngày 1: CI cắt qua 1. Ngày 2 và 3: CI nằm trên 1, nguy cơ cao hơn.</a:t>
             </a:r>
@@ -31073,7 +30815,7 @@
                     <a:lumMod val="50000"/>
                   </a:schemeClr>
                 </a:solidFill>
-                <a:latin typeface="Verdana"/>
+                <a:latin typeface="Arial"/>
               </a:rPr>
               <a:t>Neudata | #ClearDataClearImpact</a:t>
             </a:r>
@@ -31203,8 +30945,8 @@
                 <a:solidFill>
                   <a:srgbClr val="0D7377"/>
                 </a:solidFill>
-                <a:latin typeface="Segoe UI"/>
-                <a:cs typeface="Segoe UI"/>
+                <a:latin typeface="Arial"/>
+                <a:cs typeface="Arial"/>
               </a:rPr>
               <a:t>Bổ sung: Log-rank, Cox và nguy cơ tỉ lệ</a:t>
             </a:r>
@@ -31270,8 +31012,8 @@
                 <a:solidFill>
                   <a:srgbClr val="595959"/>
                 </a:solidFill>
-                <a:latin typeface="Segoe UI"/>
-                <a:cs typeface="Segoe UI"/>
+                <a:latin typeface="Arial"/>
+                <a:cs typeface="Arial"/>
               </a:rPr>
               <a:t>Ba thuật ngữ anh chị sẽ gặp trong mọi bài báo về sống còn.</a:t>
             </a:r>
@@ -31313,8 +31055,8 @@
                 <a:solidFill>
                   <a:srgbClr val="FFFFFF"/>
                 </a:solidFill>
-                <a:latin typeface="Segoe UI"/>
-                <a:cs typeface="Segoe UI"/>
+                <a:latin typeface="Arial"/>
+                <a:cs typeface="Arial"/>
               </a:rPr>
               <a:t>Kiểm định log-rank</a:t>
             </a:r>
@@ -31362,8 +31104,8 @@
                 <a:solidFill>
                   <a:srgbClr val="000000"/>
                 </a:solidFill>
-                <a:latin typeface="Segoe UI"/>
-                <a:cs typeface="Segoe UI"/>
+                <a:latin typeface="Arial"/>
+                <a:cs typeface="Arial"/>
               </a:rPr>
               <a:t>So sánh toàn bộ đường KM</a:t>
             </a:r>
@@ -31383,8 +31125,8 @@
                 <a:solidFill>
                   <a:srgbClr val="000000"/>
                 </a:solidFill>
-                <a:latin typeface="Segoe UI"/>
-                <a:cs typeface="Segoe UI"/>
+                <a:latin typeface="Arial"/>
+                <a:cs typeface="Arial"/>
               </a:rPr>
               <a:t>Cho giá trị p</a:t>
             </a:r>
@@ -31404,8 +31146,8 @@
                 <a:solidFill>
                   <a:srgbClr val="000000"/>
                 </a:solidFill>
-                <a:latin typeface="Segoe UI"/>
-                <a:cs typeface="Segoe UI"/>
+                <a:latin typeface="Arial"/>
+                <a:cs typeface="Arial"/>
               </a:rPr>
               <a:t>Không cho độ lớn, không hiệu chỉnh</a:t>
             </a:r>
@@ -31447,8 +31189,8 @@
                 <a:solidFill>
                   <a:srgbClr val="FFFFFF"/>
                 </a:solidFill>
-                <a:latin typeface="Segoe UI"/>
-                <a:cs typeface="Segoe UI"/>
+                <a:latin typeface="Arial"/>
+                <a:cs typeface="Arial"/>
               </a:rPr>
               <a:t>Hồi quy Cox</a:t>
             </a:r>
@@ -31496,8 +31238,8 @@
                 <a:solidFill>
                   <a:srgbClr val="000000"/>
                 </a:solidFill>
-                <a:latin typeface="Segoe UI"/>
-                <a:cs typeface="Segoe UI"/>
+                <a:latin typeface="Arial"/>
+                <a:cs typeface="Arial"/>
               </a:rPr>
               <a:t>Cho tỉ số nguy cơ tức thời (HR)</a:t>
             </a:r>
@@ -31517,8 +31259,8 @@
                 <a:solidFill>
                   <a:srgbClr val="000000"/>
                 </a:solidFill>
-                <a:latin typeface="Segoe UI"/>
-                <a:cs typeface="Segoe UI"/>
+                <a:latin typeface="Arial"/>
+                <a:cs typeface="Arial"/>
               </a:rPr>
               <a:t>kèm 95% CI, không tác động = 1</a:t>
             </a:r>
@@ -31538,8 +31280,8 @@
                 <a:solidFill>
                   <a:srgbClr val="000000"/>
                 </a:solidFill>
-                <a:latin typeface="Segoe UI"/>
-                <a:cs typeface="Segoe UI"/>
+                <a:latin typeface="Arial"/>
+                <a:cs typeface="Arial"/>
               </a:rPr>
               <a:t>Hiệu chỉnh được yếu tố gây nhiễu</a:t>
             </a:r>
@@ -31581,8 +31323,8 @@
                 <a:solidFill>
                   <a:srgbClr val="FFFFFF"/>
                 </a:solidFill>
-                <a:latin typeface="Segoe UI"/>
-                <a:cs typeface="Segoe UI"/>
+                <a:latin typeface="Arial"/>
+                <a:cs typeface="Arial"/>
               </a:rPr>
               <a:t>Nguy cơ tỉ lệ</a:t>
             </a:r>
@@ -31630,8 +31372,8 @@
                 <a:solidFill>
                   <a:srgbClr val="000000"/>
                 </a:solidFill>
-                <a:latin typeface="Segoe UI"/>
-                <a:cs typeface="Segoe UI"/>
+                <a:latin typeface="Arial"/>
+                <a:cs typeface="Arial"/>
               </a:rPr>
               <a:t>Giả định HR không đổi</a:t>
             </a:r>
@@ -31651,8 +31393,8 @@
                 <a:solidFill>
                   <a:srgbClr val="000000"/>
                 </a:solidFill>
-                <a:latin typeface="Segoe UI"/>
-                <a:cs typeface="Segoe UI"/>
+                <a:latin typeface="Arial"/>
+                <a:cs typeface="Arial"/>
               </a:rPr>
               <a:t>theo thời gian</a:t>
             </a:r>
@@ -31672,8 +31414,8 @@
                 <a:solidFill>
                   <a:srgbClr val="000000"/>
                 </a:solidFill>
-                <a:latin typeface="Segoe UI"/>
-                <a:cs typeface="Segoe UI"/>
+                <a:latin typeface="Arial"/>
+                <a:cs typeface="Arial"/>
               </a:rPr>
               <a:t>Đường cong cắt nhau: thận trọng</a:t>
             </a:r>
@@ -31717,8 +31459,8 @@
                 <a:solidFill>
                   <a:srgbClr val="FFFFFF"/>
                 </a:solidFill>
-                <a:latin typeface="Segoe UI"/>
-                <a:cs typeface="Segoe UI"/>
+                <a:latin typeface="Arial"/>
+                <a:cs typeface="Arial"/>
               </a:rPr>
               <a:t>THÔNG ĐIỆP CHÍNH   </a:t>
             </a:r>
@@ -31727,8 +31469,8 @@
                 <a:solidFill>
                   <a:srgbClr val="FFFFFF"/>
                 </a:solidFill>
-                <a:latin typeface="Segoe UI"/>
-                <a:cs typeface="Segoe UI"/>
+                <a:latin typeface="Arial"/>
+                <a:cs typeface="Arial"/>
               </a:rPr>
               <a:t>Bài báo 2: Cox HR 2.13 (1.48-3.06): nguy cơ tử vong khoảng gấp đôi.</a:t>
             </a:r>
@@ -31765,7 +31507,7 @@
                     <a:lumMod val="50000"/>
                   </a:schemeClr>
                 </a:solidFill>
-                <a:latin typeface="Verdana"/>
+                <a:latin typeface="Arial"/>
               </a:rPr>
               <a:t>Neudata | #ClearDataClearImpact</a:t>
             </a:r>
@@ -31895,8 +31637,8 @@
                 <a:solidFill>
                   <a:srgbClr val="0D7377"/>
                 </a:solidFill>
-                <a:latin typeface="Segoe UI"/>
-                <a:cs typeface="Segoe UI"/>
+                <a:latin typeface="Arial"/>
+                <a:cs typeface="Arial"/>
               </a:rPr>
               <a:t>Bổ sung: Tương quan không phải đồng thuận, cũng không phải nhân quả</a:t>
             </a:r>
@@ -31992,8 +31734,8 @@
                 <a:solidFill>
                   <a:srgbClr val="FFFFFF"/>
                 </a:solidFill>
-                <a:latin typeface="Segoe UI"/>
-                <a:cs typeface="Segoe UI"/>
+                <a:latin typeface="Arial"/>
+                <a:cs typeface="Arial"/>
               </a:rPr>
               <a:t>THÔNG ĐIỆP CHÍNH   </a:t>
             </a:r>
@@ -32002,8 +31744,8 @@
                 <a:solidFill>
                   <a:srgbClr val="FFFFFF"/>
                 </a:solidFill>
-                <a:latin typeface="Segoe UI"/>
-                <a:cs typeface="Segoe UI"/>
+                <a:latin typeface="Arial"/>
+                <a:cs typeface="Arial"/>
               </a:rPr>
               <a:t>r cao không có nghĩa hai phương pháp đồng thuận, hay cái này gây ra cái kia.</a:t>
             </a:r>
@@ -32040,7 +31782,7 @@
                     <a:lumMod val="50000"/>
                   </a:schemeClr>
                 </a:solidFill>
-                <a:latin typeface="Verdana"/>
+                <a:latin typeface="Arial"/>
               </a:rPr>
               <a:t>Neudata | #ClearDataClearImpact</a:t>
             </a:r>
@@ -32170,8 +31912,8 @@
                 <a:solidFill>
                   <a:srgbClr val="0D7377"/>
                 </a:solidFill>
-                <a:latin typeface="Segoe UI"/>
-                <a:cs typeface="Segoe UI"/>
+                <a:latin typeface="Arial"/>
+                <a:cs typeface="Arial"/>
               </a:rPr>
               <a:t>Bổ sung: Tương tác trong mô hình: tác động có khác nhau giữa các nhóm?</a:t>
             </a:r>
@@ -32267,8 +32009,8 @@
                 <a:solidFill>
                   <a:srgbClr val="FFFFFF"/>
                 </a:solidFill>
-                <a:latin typeface="Segoe UI"/>
-                <a:cs typeface="Segoe UI"/>
+                <a:latin typeface="Arial"/>
+                <a:cs typeface="Arial"/>
               </a:rPr>
               <a:t>THÔNG ĐIỆP CHÍNH   </a:t>
             </a:r>
@@ -32277,8 +32019,8 @@
                 <a:solidFill>
                   <a:srgbClr val="FFFFFF"/>
                 </a:solidFill>
-                <a:latin typeface="Segoe UI"/>
-                <a:cs typeface="Segoe UI"/>
+                <a:latin typeface="Arial"/>
+                <a:cs typeface="Arial"/>
               </a:rPr>
               <a:t>Đường song song: hiệu chỉnh. Độ dốc khác nhau: báo cáo tác động theo từng nhóm.</a:t>
             </a:r>
@@ -32315,7 +32057,7 @@
                     <a:lumMod val="50000"/>
                   </a:schemeClr>
                 </a:solidFill>
-                <a:latin typeface="Verdana"/>
+                <a:latin typeface="Arial"/>
               </a:rPr>
               <a:t>Neudata | #ClearDataClearImpact</a:t>
             </a:r>
@@ -32445,8 +32187,8 @@
                 <a:solidFill>
                   <a:srgbClr val="0D7377"/>
                 </a:solidFill>
-                <a:latin typeface="Segoe UI"/>
-                <a:cs typeface="Segoe UI"/>
+                <a:latin typeface="Arial"/>
+                <a:cs typeface="Arial"/>
               </a:rPr>
               <a:t>Bổ sung: Đường 'không tác động': 0 cho hiệu số, 1 cho tỉ số</a:t>
             </a:r>
@@ -32542,8 +32284,8 @@
                 <a:solidFill>
                   <a:srgbClr val="FFFFFF"/>
                 </a:solidFill>
-                <a:latin typeface="Segoe UI"/>
-                <a:cs typeface="Segoe UI"/>
+                <a:latin typeface="Arial"/>
+                <a:cs typeface="Arial"/>
               </a:rPr>
               <a:t>THÔNG ĐIỆP CHÍNH   </a:t>
             </a:r>
@@ -32552,8 +32294,8 @@
                 <a:solidFill>
                   <a:srgbClr val="FFFFFF"/>
                 </a:solidFill>
-                <a:latin typeface="Segoe UI"/>
-                <a:cs typeface="Segoe UI"/>
+                <a:latin typeface="Arial"/>
+                <a:cs typeface="Arial"/>
               </a:rPr>
               <a:t>Tìm giá trị không tác động trước, rồi xem CI có cắt qua nó không.</a:t>
             </a:r>
@@ -32590,7 +32332,7 @@
                     <a:lumMod val="50000"/>
                   </a:schemeClr>
                 </a:solidFill>
-                <a:latin typeface="Verdana"/>
+                <a:latin typeface="Arial"/>
               </a:rPr>
               <a:t>Neudata | #ClearDataClearImpact</a:t>
             </a:r>
@@ -32720,8 +32462,8 @@
                 <a:solidFill>
                   <a:srgbClr val="0D7377"/>
                 </a:solidFill>
-                <a:latin typeface="Segoe UI"/>
-                <a:cs typeface="Segoe UI"/>
+                <a:latin typeface="Arial"/>
+                <a:cs typeface="Arial"/>
               </a:rPr>
               <a:t>Bổ sung: Mô hình dự báo: khả năng phân biệt và hiệu chuẩn</a:t>
             </a:r>
@@ -32817,8 +32559,8 @@
                 <a:solidFill>
                   <a:srgbClr val="FFFFFF"/>
                 </a:solidFill>
-                <a:latin typeface="Segoe UI"/>
-                <a:cs typeface="Segoe UI"/>
+                <a:latin typeface="Arial"/>
+                <a:cs typeface="Arial"/>
               </a:rPr>
               <a:t>THÔNG ĐIỆP CHÍNH   </a:t>
             </a:r>
@@ -32827,8 +32569,8 @@
                 <a:solidFill>
                   <a:srgbClr val="FFFFFF"/>
                 </a:solidFill>
-                <a:latin typeface="Segoe UI"/>
-                <a:cs typeface="Segoe UI"/>
+                <a:latin typeface="Arial"/>
+                <a:cs typeface="Arial"/>
               </a:rPr>
               <a:t>Mô hình dự báo tốt phân biệt được bệnh nhân VÀ ước đúng nguy cơ, cả ở bệnh viện mới.</a:t>
             </a:r>
@@ -32865,7 +32607,7 @@
                     <a:lumMod val="50000"/>
                   </a:schemeClr>
                 </a:solidFill>
-                <a:latin typeface="Verdana"/>
+                <a:latin typeface="Arial"/>
               </a:rPr>
               <a:t>Neudata | #ClearDataClearImpact</a:t>
             </a:r>
@@ -32995,8 +32737,8 @@
                 <a:solidFill>
                   <a:srgbClr val="0D7377"/>
                 </a:solidFill>
-                <a:latin typeface="Segoe UI"/>
-                <a:cs typeface="Segoe UI"/>
+                <a:latin typeface="Arial"/>
+                <a:cs typeface="Arial"/>
               </a:rPr>
               <a:t>Bổ sung: Dự báo và học máy: cách đánh giá một mô hình</a:t>
             </a:r>
@@ -33062,8 +32804,8 @@
                 <a:solidFill>
                   <a:srgbClr val="595959"/>
                 </a:solidFill>
-                <a:latin typeface="Segoe UI"/>
-                <a:cs typeface="Segoe UI"/>
+                <a:latin typeface="Arial"/>
+                <a:cs typeface="Arial"/>
               </a:rPr>
               <a:t>Học máy là cách linh hoạt để xây dựng mô hình dự báo; các câu hỏi vẫn như cũ.</a:t>
             </a:r>
@@ -33105,8 +32847,8 @@
                 <a:solidFill>
                   <a:srgbClr val="FFFFFF"/>
                 </a:solidFill>
-                <a:latin typeface="Segoe UI"/>
-                <a:cs typeface="Segoe UI"/>
+                <a:latin typeface="Arial"/>
+                <a:cs typeface="Arial"/>
               </a:rPr>
               <a:t>Dùng để làm gì?</a:t>
             </a:r>
@@ -33154,8 +32896,8 @@
                 <a:solidFill>
                   <a:srgbClr val="000000"/>
                 </a:solidFill>
-                <a:latin typeface="Segoe UI"/>
-                <a:cs typeface="Segoe UI"/>
+                <a:latin typeface="Arial"/>
+                <a:cs typeface="Arial"/>
               </a:rPr>
               <a:t>Dự đoán nguy cơ từng người</a:t>
             </a:r>
@@ -33175,8 +32917,8 @@
                 <a:solidFill>
                   <a:srgbClr val="000000"/>
                 </a:solidFill>
-                <a:latin typeface="Segoe UI"/>
-                <a:cs typeface="Segoe UI"/>
+                <a:latin typeface="Arial"/>
+                <a:cs typeface="Arial"/>
               </a:rPr>
               <a:t>Không để giải thích nguyên nhân</a:t>
             </a:r>
@@ -33196,8 +32938,8 @@
                 <a:solidFill>
                   <a:srgbClr val="000000"/>
                 </a:solidFill>
-                <a:latin typeface="Segoe UI"/>
-                <a:cs typeface="Segoe UI"/>
+                <a:latin typeface="Arial"/>
+                <a:cs typeface="Arial"/>
               </a:rPr>
               <a:t>Cho ai, khi nào, quyết định gì?</a:t>
             </a:r>
@@ -33239,8 +32981,8 @@
                 <a:solidFill>
                   <a:srgbClr val="FFFFFF"/>
                 </a:solidFill>
-                <a:latin typeface="Segoe UI"/>
-                <a:cs typeface="Segoe UI"/>
+                <a:latin typeface="Arial"/>
+                <a:cs typeface="Arial"/>
               </a:rPr>
               <a:t>Đủ dữ liệu?</a:t>
             </a:r>
@@ -33288,8 +33030,8 @@
                 <a:solidFill>
                   <a:srgbClr val="000000"/>
                 </a:solidFill>
-                <a:latin typeface="Segoe UI"/>
-                <a:cs typeface="Segoe UI"/>
+                <a:latin typeface="Arial"/>
+                <a:cs typeface="Arial"/>
               </a:rPr>
               <a:t>Học máy cần RẤT NHIỀU biến cố</a:t>
             </a:r>
@@ -33309,8 +33051,8 @@
                 <a:solidFill>
                   <a:srgbClr val="000000"/>
                 </a:solidFill>
-                <a:latin typeface="Segoe UI"/>
-                <a:cs typeface="Segoe UI"/>
+                <a:latin typeface="Arial"/>
+                <a:cs typeface="Arial"/>
               </a:rPr>
               <a:t>Nguy cơ quá khớp cao</a:t>
             </a:r>
@@ -33330,8 +33072,8 @@
                 <a:solidFill>
                   <a:srgbClr val="000000"/>
                 </a:solidFill>
-                <a:latin typeface="Segoe UI"/>
-                <a:cs typeface="Segoe UI"/>
+                <a:latin typeface="Arial"/>
+                <a:cs typeface="Arial"/>
               </a:rPr>
               <a:t>Đã thẩm định nội bộ?</a:t>
             </a:r>
@@ -33373,8 +33115,8 @@
                 <a:solidFill>
                   <a:srgbClr val="FFFFFF"/>
                 </a:solidFill>
-                <a:latin typeface="Segoe UI"/>
-                <a:cs typeface="Segoe UI"/>
+                <a:latin typeface="Arial"/>
+                <a:cs typeface="Arial"/>
               </a:rPr>
               <a:t>Có hiệu quả?</a:t>
             </a:r>
@@ -33422,8 +33164,8 @@
                 <a:solidFill>
                   <a:srgbClr val="000000"/>
                 </a:solidFill>
-                <a:latin typeface="Segoe UI"/>
-                <a:cs typeface="Segoe UI"/>
+                <a:latin typeface="Arial"/>
+                <a:cs typeface="Arial"/>
               </a:rPr>
               <a:t>Phân biệt (AUC)</a:t>
             </a:r>
@@ -33443,8 +33185,8 @@
                 <a:solidFill>
                   <a:srgbClr val="000000"/>
                 </a:solidFill>
-                <a:latin typeface="Segoe UI"/>
-                <a:cs typeface="Segoe UI"/>
+                <a:latin typeface="Arial"/>
+                <a:cs typeface="Arial"/>
               </a:rPr>
               <a:t>Biểu đồ hiệu chuẩn</a:t>
             </a:r>
@@ -33464,8 +33206,8 @@
                 <a:solidFill>
                   <a:srgbClr val="000000"/>
                 </a:solidFill>
-                <a:latin typeface="Segoe UI"/>
-                <a:cs typeface="Segoe UI"/>
+                <a:latin typeface="Arial"/>
+                <a:cs typeface="Arial"/>
               </a:rPr>
               <a:t>Thẩm định NGOÀI</a:t>
             </a:r>
@@ -33507,8 +33249,8 @@
                 <a:solidFill>
                   <a:srgbClr val="FFFFFF"/>
                 </a:solidFill>
-                <a:latin typeface="Segoe UI"/>
-                <a:cs typeface="Segoe UI"/>
+                <a:latin typeface="Arial"/>
+                <a:cs typeface="Arial"/>
               </a:rPr>
               <a:t>Báo cáo đủ?</a:t>
             </a:r>
@@ -33556,8 +33298,8 @@
                 <a:solidFill>
                   <a:srgbClr val="000000"/>
                 </a:solidFill>
-                <a:latin typeface="Segoe UI"/>
-                <a:cs typeface="Segoe UI"/>
+                <a:latin typeface="Arial"/>
+                <a:cs typeface="Arial"/>
               </a:rPr>
               <a:t>Bảng kiểm TRIPOD+AI</a:t>
             </a:r>
@@ -33577,8 +33319,8 @@
                 <a:solidFill>
                   <a:srgbClr val="000000"/>
                 </a:solidFill>
-                <a:latin typeface="Segoe UI"/>
-                <a:cs typeface="Segoe UI"/>
+                <a:latin typeface="Arial"/>
+                <a:cs typeface="Arial"/>
               </a:rPr>
               <a:t>Mã, dữ liệu, công bằng</a:t>
             </a:r>
@@ -33598,8 +33340,8 @@
                 <a:solidFill>
                   <a:srgbClr val="000000"/>
                 </a:solidFill>
-                <a:latin typeface="Segoe UI"/>
-                <a:cs typeface="Segoe UI"/>
+                <a:latin typeface="Arial"/>
+                <a:cs typeface="Arial"/>
               </a:rPr>
               <a:t>Tác động lên bệnh nhân?</a:t>
             </a:r>
@@ -33643,8 +33385,8 @@
                 <a:solidFill>
                   <a:srgbClr val="FFFFFF"/>
                 </a:solidFill>
-                <a:latin typeface="Segoe UI"/>
-                <a:cs typeface="Segoe UI"/>
+                <a:latin typeface="Arial"/>
+                <a:cs typeface="Arial"/>
               </a:rPr>
               <a:t>THÔNG ĐIỆP CHÍNH   </a:t>
             </a:r>
@@ -33653,8 +33395,8 @@
                 <a:solidFill>
                   <a:srgbClr val="FFFFFF"/>
                 </a:solidFill>
-                <a:latin typeface="Segoe UI"/>
-                <a:cs typeface="Segoe UI"/>
+                <a:latin typeface="Arial"/>
+                <a:cs typeface="Arial"/>
               </a:rPr>
               <a:t>Điểm AI là một mô hình dự báo: hãy hỏi về hiệu chuẩn và thẩm định ngoài.</a:t>
             </a:r>
@@ -33691,7 +33433,7 @@
                     <a:lumMod val="50000"/>
                   </a:schemeClr>
                 </a:solidFill>
-                <a:latin typeface="Verdana"/>
+                <a:latin typeface="Arial"/>
               </a:rPr>
               <a:t>Neudata | #ClearDataClearImpact</a:t>
             </a:r>
@@ -33821,8 +33563,8 @@
                 <a:solidFill>
                   <a:srgbClr val="0D7377"/>
                 </a:solidFill>
-                <a:latin typeface="Segoe UI"/>
-                <a:cs typeface="Segoe UI"/>
+                <a:latin typeface="Arial"/>
+                <a:cs typeface="Arial"/>
               </a:rPr>
               <a:t>Năm cách hiểu sai giá trị p thường gặp</a:t>
             </a:r>
@@ -33888,8 +33630,8 @@
                 <a:solidFill>
                   <a:srgbClr val="595959"/>
                 </a:solidFill>
-                <a:latin typeface="Segoe UI"/>
-                <a:cs typeface="Segoe UI"/>
+                <a:latin typeface="Arial"/>
+                <a:cs typeface="Arial"/>
               </a:rPr>
               <a:t>Mỗi câu dưới đây đều xuất hiện trong các bài báo đã đăng. Tất cả đều sai.</a:t>
             </a:r>
@@ -33931,10 +33673,10 @@
                 <a:solidFill>
                   <a:srgbClr val="FFFFFF"/>
                 </a:solidFill>
-                <a:latin typeface="Segoe UI"/>
-                <a:cs typeface="Segoe UI"/>
-              </a:rPr>
-              <a:t>1. 'Xác suất H0'</a:t>
+                <a:latin typeface="Arial"/>
+                <a:cs typeface="Arial"/>
+              </a:rPr>
+              <a:t>'Xác suất H0'</a:t>
             </a:r>
           </a:p>
         </p:txBody>
@@ -33980,8 +33722,8 @@
                 <a:solidFill>
                   <a:srgbClr val="000000"/>
                 </a:solidFill>
-                <a:latin typeface="Segoe UI"/>
-                <a:cs typeface="Segoe UI"/>
+                <a:latin typeface="Arial"/>
+                <a:cs typeface="Arial"/>
               </a:rPr>
               <a:t>p KHÔNG phải xác suất</a:t>
             </a:r>
@@ -34001,8 +33743,8 @@
                 <a:solidFill>
                   <a:srgbClr val="000000"/>
                 </a:solidFill>
-                <a:latin typeface="Segoe UI"/>
-                <a:cs typeface="Segoe UI"/>
+                <a:latin typeface="Arial"/>
+                <a:cs typeface="Arial"/>
               </a:rPr>
               <a:t>không có tác động</a:t>
             </a:r>
@@ -34044,10 +33786,10 @@
                 <a:solidFill>
                   <a:srgbClr val="FFFFFF"/>
                 </a:solidFill>
-                <a:latin typeface="Segoe UI"/>
-                <a:cs typeface="Segoe UI"/>
-              </a:rPr>
-              <a:t>2. 'Tác động lớn'</a:t>
+                <a:latin typeface="Arial"/>
+                <a:cs typeface="Arial"/>
+              </a:rPr>
+              <a:t>'Tác động lớn'</a:t>
             </a:r>
           </a:p>
         </p:txBody>
@@ -34093,8 +33835,8 @@
                 <a:solidFill>
                   <a:srgbClr val="000000"/>
                 </a:solidFill>
-                <a:latin typeface="Segoe UI"/>
-                <a:cs typeface="Segoe UI"/>
+                <a:latin typeface="Arial"/>
+                <a:cs typeface="Arial"/>
               </a:rPr>
               <a:t>p nhỏ KHÔNG có nghĩa</a:t>
             </a:r>
@@ -34114,8 +33856,8 @@
                 <a:solidFill>
                   <a:srgbClr val="000000"/>
                 </a:solidFill>
-                <a:latin typeface="Segoe UI"/>
-                <a:cs typeface="Segoe UI"/>
+                <a:latin typeface="Arial"/>
+                <a:cs typeface="Arial"/>
               </a:rPr>
               <a:t>tác động lớn hay quan trọng</a:t>
             </a:r>
@@ -34157,10 +33899,10 @@
                 <a:solidFill>
                   <a:srgbClr val="FFFFFF"/>
                 </a:solidFill>
-                <a:latin typeface="Segoe UI"/>
-                <a:cs typeface="Segoe UI"/>
-              </a:rPr>
-              <a:t>3. 'Không tác động'</a:t>
+                <a:latin typeface="Arial"/>
+                <a:cs typeface="Arial"/>
+              </a:rPr>
+              <a:t>'Không tác động'</a:t>
             </a:r>
           </a:p>
         </p:txBody>
@@ -34206,8 +33948,8 @@
                 <a:solidFill>
                   <a:srgbClr val="000000"/>
                 </a:solidFill>
-                <a:latin typeface="Segoe UI"/>
-                <a:cs typeface="Segoe UI"/>
+                <a:latin typeface="Arial"/>
+                <a:cs typeface="Arial"/>
               </a:rPr>
               <a:t>p &gt; 0.05 KHÔNG chứng minh</a:t>
             </a:r>
@@ -34227,8 +33969,8 @@
                 <a:solidFill>
                   <a:srgbClr val="000000"/>
                 </a:solidFill>
-                <a:latin typeface="Segoe UI"/>
-                <a:cs typeface="Segoe UI"/>
+                <a:latin typeface="Arial"/>
+                <a:cs typeface="Arial"/>
               </a:rPr>
               <a:t>không có tác động</a:t>
             </a:r>
@@ -34270,10 +34012,10 @@
                 <a:solidFill>
                   <a:srgbClr val="FFFFFF"/>
                 </a:solidFill>
-                <a:latin typeface="Segoe UI"/>
-                <a:cs typeface="Segoe UI"/>
-              </a:rPr>
-              <a:t>4. 'Xu hướng'</a:t>
+                <a:latin typeface="Arial"/>
+                <a:cs typeface="Arial"/>
+              </a:rPr>
+              <a:t>'Xu hướng'</a:t>
             </a:r>
           </a:p>
         </p:txBody>
@@ -34319,8 +34061,8 @@
                 <a:solidFill>
                   <a:srgbClr val="000000"/>
                 </a:solidFill>
-                <a:latin typeface="Segoe UI"/>
-                <a:cs typeface="Segoe UI"/>
+                <a:latin typeface="Arial"/>
+                <a:cs typeface="Arial"/>
               </a:rPr>
               <a:t>p = 0.08 KHÔNG phải</a:t>
             </a:r>
@@ -34340,8 +34082,8 @@
                 <a:solidFill>
                   <a:srgbClr val="000000"/>
                 </a:solidFill>
-                <a:latin typeface="Segoe UI"/>
-                <a:cs typeface="Segoe UI"/>
+                <a:latin typeface="Arial"/>
+                <a:cs typeface="Arial"/>
               </a:rPr>
               <a:t>'gần có ý nghĩa'</a:t>
             </a:r>
@@ -34383,10 +34125,10 @@
                 <a:solidFill>
                   <a:srgbClr val="FFFFFF"/>
                 </a:solidFill>
-                <a:latin typeface="Segoe UI"/>
-                <a:cs typeface="Segoe UI"/>
-              </a:rPr>
-              <a:t>5. 'Chỉ có p'</a:t>
+                <a:latin typeface="Arial"/>
+                <a:cs typeface="Arial"/>
+              </a:rPr>
+              <a:t>'Chỉ có p'</a:t>
             </a:r>
           </a:p>
         </p:txBody>
@@ -34432,8 +34174,8 @@
                 <a:solidFill>
                   <a:srgbClr val="000000"/>
                 </a:solidFill>
-                <a:latin typeface="Segoe UI"/>
-                <a:cs typeface="Segoe UI"/>
+                <a:latin typeface="Arial"/>
+                <a:cs typeface="Arial"/>
               </a:rPr>
               <a:t>Chỉ p là KHÔNG đủ:</a:t>
             </a:r>
@@ -34453,8 +34195,8 @@
                 <a:solidFill>
                   <a:srgbClr val="000000"/>
                 </a:solidFill>
-                <a:latin typeface="Segoe UI"/>
-                <a:cs typeface="Segoe UI"/>
+                <a:latin typeface="Arial"/>
+                <a:cs typeface="Arial"/>
               </a:rPr>
               <a:t>cần tác động + 95% CI</a:t>
             </a:r>
@@ -34498,8 +34240,8 @@
                 <a:solidFill>
                   <a:srgbClr val="FFFFFF"/>
                 </a:solidFill>
-                <a:latin typeface="Segoe UI"/>
-                <a:cs typeface="Segoe UI"/>
+                <a:latin typeface="Arial"/>
+                <a:cs typeface="Arial"/>
               </a:rPr>
               <a:t>THÔNG ĐIỆP CHÍNH   </a:t>
             </a:r>
@@ -34508,8 +34250,8 @@
                 <a:solidFill>
                   <a:srgbClr val="FFFFFF"/>
                 </a:solidFill>
-                <a:latin typeface="Segoe UI"/>
-                <a:cs typeface="Segoe UI"/>
+                <a:latin typeface="Arial"/>
+                <a:cs typeface="Arial"/>
               </a:rPr>
               <a:t>Báo cáo độ lớn tác động kèm 95% CI. Giá trị p chỉ là vai phụ.</a:t>
             </a:r>
@@ -34546,7 +34288,7 @@
                     <a:lumMod val="50000"/>
                   </a:schemeClr>
                 </a:solidFill>
-                <a:latin typeface="Verdana"/>
+                <a:latin typeface="Arial"/>
               </a:rPr>
               <a:t>Neudata | #ClearDataClearImpact</a:t>
             </a:r>
@@ -34676,8 +34418,8 @@
                 <a:solidFill>
                   <a:srgbClr val="0D7377"/>
                 </a:solidFill>
-                <a:latin typeface="Segoe UI"/>
-                <a:cs typeface="Segoe UI"/>
+                <a:latin typeface="Arial"/>
+                <a:cs typeface="Arial"/>
               </a:rPr>
               <a:t>Bổ sung: Phân tích ca đầy đủ và đa phép gán</a:t>
             </a:r>
@@ -34773,8 +34515,8 @@
                 <a:solidFill>
                   <a:srgbClr val="FFFFFF"/>
                 </a:solidFill>
-                <a:latin typeface="Segoe UI"/>
-                <a:cs typeface="Segoe UI"/>
+                <a:latin typeface="Arial"/>
+                <a:cs typeface="Arial"/>
               </a:rPr>
               <a:t>THÔNG ĐIỆP CHÍNH   </a:t>
             </a:r>
@@ -34783,8 +34525,8 @@
                 <a:solidFill>
                   <a:srgbClr val="FFFFFF"/>
                 </a:solidFill>
-                <a:latin typeface="Segoe UI"/>
-                <a:cs typeface="Segoe UI"/>
+                <a:latin typeface="Arial"/>
+                <a:cs typeface="Arial"/>
               </a:rPr>
               <a:t>Đa phép gán giữ mọi bệnh nhân và thừa nhận độ không chắc chắn của ô trống.</a:t>
             </a:r>
@@ -34821,7 +34563,7 @@
                     <a:lumMod val="50000"/>
                   </a:schemeClr>
                 </a:solidFill>
-                <a:latin typeface="Verdana"/>
+                <a:latin typeface="Arial"/>
               </a:rPr>
               <a:t>Neudata | #ClearDataClearImpact</a:t>
             </a:r>
@@ -34951,8 +34693,8 @@
                 <a:solidFill>
                   <a:srgbClr val="0D7377"/>
                 </a:solidFill>
-                <a:latin typeface="Segoe UI"/>
-                <a:cs typeface="Segoe UI"/>
+                <a:latin typeface="Arial"/>
+                <a:cs typeface="Arial"/>
               </a:rPr>
               <a:t>Bổ sung: Báo cáo và kiểm tra dữ liệu bị thiếu</a:t>
             </a:r>
@@ -35018,8 +34760,8 @@
                 <a:solidFill>
                   <a:srgbClr val="595959"/>
                 </a:solidFill>
-                <a:latin typeface="Segoe UI"/>
-                <a:cs typeface="Segoe UI"/>
+                <a:latin typeface="Arial"/>
+                <a:cs typeface="Arial"/>
               </a:rPr>
               <a:t>Bốn điều người phản biện sẽ tìm.</a:t>
             </a:r>
@@ -35061,8 +34803,8 @@
                 <a:solidFill>
                   <a:srgbClr val="FFFFFF"/>
                 </a:solidFill>
-                <a:latin typeface="Segoe UI"/>
-                <a:cs typeface="Segoe UI"/>
+                <a:latin typeface="Arial"/>
+                <a:cs typeface="Arial"/>
               </a:rPr>
               <a:t>Báo cáo</a:t>
             </a:r>
@@ -35110,8 +34852,8 @@
                 <a:solidFill>
                   <a:srgbClr val="000000"/>
                 </a:solidFill>
-                <a:latin typeface="Segoe UI"/>
-                <a:cs typeface="Segoe UI"/>
+                <a:latin typeface="Arial"/>
+                <a:cs typeface="Arial"/>
               </a:rPr>
               <a:t>Số thiếu theo từng biến</a:t>
             </a:r>
@@ -35131,8 +34873,8 @@
                 <a:solidFill>
                   <a:srgbClr val="000000"/>
                 </a:solidFill>
-                <a:latin typeface="Segoe UI"/>
-                <a:cs typeface="Segoe UI"/>
+                <a:latin typeface="Arial"/>
+                <a:cs typeface="Arial"/>
               </a:rPr>
               <a:t>Sơ đồ: ai và vì sao</a:t>
             </a:r>
@@ -35152,8 +34894,8 @@
                 <a:solidFill>
                   <a:srgbClr val="000000"/>
                 </a:solidFill>
-                <a:latin typeface="Segoe UI"/>
-                <a:cs typeface="Segoe UI"/>
+                <a:latin typeface="Arial"/>
+                <a:cs typeface="Arial"/>
               </a:rPr>
               <a:t>Trong Bảng 1 hoặc chú thích</a:t>
             </a:r>
@@ -35195,8 +34937,8 @@
                 <a:solidFill>
                   <a:srgbClr val="FFFFFF"/>
                 </a:solidFill>
-                <a:latin typeface="Segoe UI"/>
-                <a:cs typeface="Segoe UI"/>
+                <a:latin typeface="Arial"/>
+                <a:cs typeface="Arial"/>
               </a:rPr>
               <a:t>So sánh</a:t>
             </a:r>
@@ -35244,8 +34986,8 @@
                 <a:solidFill>
                   <a:srgbClr val="000000"/>
                 </a:solidFill>
-                <a:latin typeface="Segoe UI"/>
-                <a:cs typeface="Segoe UI"/>
+                <a:latin typeface="Arial"/>
+                <a:cs typeface="Arial"/>
               </a:rPr>
               <a:t>Bệnh nhân có và không có</a:t>
             </a:r>
@@ -35265,8 +35007,8 @@
                 <a:solidFill>
                   <a:srgbClr val="000000"/>
                 </a:solidFill>
-                <a:latin typeface="Segoe UI"/>
-                <a:cs typeface="Segoe UI"/>
+                <a:latin typeface="Arial"/>
+                <a:cs typeface="Arial"/>
               </a:rPr>
               <a:t>dữ liệu đầy đủ</a:t>
             </a:r>
@@ -35286,8 +35028,8 @@
                 <a:solidFill>
                   <a:srgbClr val="000000"/>
                 </a:solidFill>
-                <a:latin typeface="Segoe UI"/>
-                <a:cs typeface="Segoe UI"/>
+                <a:latin typeface="Arial"/>
+                <a:cs typeface="Arial"/>
               </a:rPr>
               <a:t>Họ có khác nhau không?</a:t>
             </a:r>
@@ -35329,8 +35071,8 @@
                 <a:solidFill>
                   <a:srgbClr val="FFFFFF"/>
                 </a:solidFill>
-                <a:latin typeface="Segoe UI"/>
-                <a:cs typeface="Segoe UI"/>
+                <a:latin typeface="Arial"/>
+                <a:cs typeface="Arial"/>
               </a:rPr>
               <a:t>Độ nhạy (Cấp độ 2)</a:t>
             </a:r>
@@ -35378,8 +35120,8 @@
                 <a:solidFill>
                   <a:srgbClr val="000000"/>
                 </a:solidFill>
-                <a:latin typeface="Segoe UI"/>
-                <a:cs typeface="Segoe UI"/>
+                <a:latin typeface="Arial"/>
+                <a:cs typeface="Arial"/>
               </a:rPr>
               <a:t>Ca đầy đủ so với đa phép gán</a:t>
             </a:r>
@@ -35399,8 +35141,8 @@
                 <a:solidFill>
                   <a:srgbClr val="000000"/>
                 </a:solidFill>
-                <a:latin typeface="Segoe UI"/>
-                <a:cs typeface="Segoe UI"/>
+                <a:latin typeface="Arial"/>
+                <a:cs typeface="Arial"/>
               </a:rPr>
               <a:t>Script mẫu: 05_missing.R</a:t>
             </a:r>
@@ -35420,8 +35162,8 @@
                 <a:solidFill>
                   <a:srgbClr val="000000"/>
                 </a:solidFill>
-                <a:latin typeface="Segoe UI"/>
-                <a:cs typeface="Segoe UI"/>
+                <a:latin typeface="Arial"/>
+                <a:cs typeface="Arial"/>
               </a:rPr>
               <a:t>Thực hành ở Cấp độ 2</a:t>
             </a:r>
@@ -35463,8 +35205,8 @@
                 <a:solidFill>
                   <a:srgbClr val="FFFFFF"/>
                 </a:solidFill>
-                <a:latin typeface="Segoe UI"/>
-                <a:cs typeface="Segoe UI"/>
+                <a:latin typeface="Arial"/>
+                <a:cs typeface="Arial"/>
               </a:rPr>
               <a:t>Kế hoạch</a:t>
             </a:r>
@@ -35512,8 +35254,8 @@
                 <a:solidFill>
                   <a:srgbClr val="000000"/>
                 </a:solidFill>
-                <a:latin typeface="Segoe UI"/>
-                <a:cs typeface="Segoe UI"/>
+                <a:latin typeface="Arial"/>
+                <a:cs typeface="Arial"/>
               </a:rPr>
               <a:t>Viết trong SAP</a:t>
             </a:r>
@@ -35533,8 +35275,8 @@
                 <a:solidFill>
                   <a:srgbClr val="000000"/>
                 </a:solidFill>
-                <a:latin typeface="Segoe UI"/>
-                <a:cs typeface="Segoe UI"/>
+                <a:latin typeface="Arial"/>
+                <a:cs typeface="Arial"/>
               </a:rPr>
               <a:t>trước khi thấy dữ liệu</a:t>
             </a:r>
@@ -35554,8 +35296,8 @@
                 <a:solidFill>
                   <a:srgbClr val="000000"/>
                 </a:solidFill>
-                <a:latin typeface="Segoe UI"/>
-                <a:cs typeface="Segoe UI"/>
+                <a:latin typeface="Arial"/>
+                <a:cs typeface="Arial"/>
               </a:rPr>
               <a:t>Phần 3 của đề cương</a:t>
             </a:r>
@@ -35599,8 +35341,8 @@
                 <a:solidFill>
                   <a:srgbClr val="FFFFFF"/>
                 </a:solidFill>
-                <a:latin typeface="Segoe UI"/>
-                <a:cs typeface="Segoe UI"/>
+                <a:latin typeface="Arial"/>
+                <a:cs typeface="Arial"/>
               </a:rPr>
               <a:t>THÔNG ĐIỆP CHÍNH   </a:t>
             </a:r>
@@ -35609,8 +35351,8 @@
                 <a:solidFill>
                   <a:srgbClr val="FFFFFF"/>
                 </a:solidFill>
-                <a:latin typeface="Segoe UI"/>
-                <a:cs typeface="Segoe UI"/>
+                <a:latin typeface="Arial"/>
+                <a:cs typeface="Arial"/>
               </a:rPr>
               <a:t>Dữ liệu thiếu cũng là một kết quả: báo cáo, xử lý, và kiểm tra lại kết luận.</a:t>
             </a:r>
@@ -35647,7 +35389,7 @@
                     <a:lumMod val="50000"/>
                   </a:schemeClr>
                 </a:solidFill>
-                <a:latin typeface="Verdana"/>
+                <a:latin typeface="Arial"/>
               </a:rPr>
               <a:t>Neudata | #ClearDataClearImpact</a:t>
             </a:r>
@@ -35801,8 +35543,8 @@
                 <a:solidFill>
                   <a:srgbClr val="4472C4"/>
                 </a:solidFill>
-                <a:latin typeface="Segoe UI"/>
-                <a:cs typeface="Segoe UI"/>
+                <a:latin typeface="Arial"/>
+                <a:cs typeface="Arial"/>
               </a:rPr>
               <a:t>Copyright © Neudata, 2026</a:t>
             </a:r>
@@ -35947,7 +35689,7 @@
                     <a:lumMod val="50000"/>
                   </a:schemeClr>
                 </a:solidFill>
-                <a:latin typeface="Verdana"/>
+                <a:latin typeface="Arial"/>
               </a:rPr>
               <a:t>Neudata | #ClearDataClearImpact</a:t>
             </a:r>
@@ -36053,8 +35795,8 @@
                 <a:solidFill>
                   <a:srgbClr val="0D7377"/>
                 </a:solidFill>
-                <a:latin typeface="Segoe UI"/>
-                <a:cs typeface="Segoe UI"/>
+                <a:latin typeface="Arial"/>
+                <a:cs typeface="Arial"/>
               </a:rPr>
               <a:t>Kiểm tra nhanh: CI và giá trị p</a:t>
             </a:r>
@@ -36124,8 +35866,8 @@
                 <a:solidFill>
                   <a:srgbClr val="FFFFFF"/>
                 </a:solidFill>
-                <a:latin typeface="Segoe UI"/>
-                <a:cs typeface="Segoe UI"/>
+                <a:latin typeface="Arial"/>
+                <a:cs typeface="Arial"/>
               </a:rPr>
               <a:t>CÂU HỎI NHANH   |   3 phút</a:t>
             </a:r>
@@ -36162,25 +35904,19 @@
               <a:spcBef>
                 <a:spcPts val="450"/>
               </a:spcBef>
-              <a:buNone/>
-            </a:pPr>
-            <a:r>
-              <a:rPr lang="en-US" sz="1650" b="1" dirty="0">
-                <a:solidFill>
-                  <a:srgbClr val="6C3483"/>
-                </a:solidFill>
-                <a:latin typeface="Segoe UI"/>
-                <a:cs typeface="Segoe UI"/>
-              </a:rPr>
-              <a:t>1.  </a:t>
-            </a:r>
+              <a:buClr>
+                <a:srgbClr val="6C3483"/>
+              </a:buClr>
+              <a:buFont typeface="Arial"/>
+              <a:buChar char="•"/>
+            </a:pPr>
             <a:r>
               <a:rPr lang="en-US" sz="1650" dirty="0">
                 <a:solidFill>
                   <a:srgbClr val="000000"/>
                 </a:solidFill>
-                <a:latin typeface="Segoe UI"/>
-                <a:cs typeface="Segoe UI"/>
+                <a:latin typeface="Arial"/>
+                <a:cs typeface="Arial"/>
               </a:rPr>
               <a:t>'HR 2.13 (95% CI 1.48-3.06)': dữ liệu phù hợp với HR thật từ khoảng 1.5 đến 3.1. Đúng hay sai?</a:t>
             </a:r>
@@ -36193,25 +35929,19 @@
               <a:spcBef>
                 <a:spcPts val="450"/>
               </a:spcBef>
-              <a:buNone/>
-            </a:pPr>
-            <a:r>
-              <a:rPr lang="en-US" sz="1650" b="1" dirty="0">
-                <a:solidFill>
-                  <a:srgbClr val="6C3483"/>
-                </a:solidFill>
-                <a:latin typeface="Segoe UI"/>
-                <a:cs typeface="Segoe UI"/>
-              </a:rPr>
-              <a:t>2.  </a:t>
-            </a:r>
+              <a:buClr>
+                <a:srgbClr val="6C3483"/>
+              </a:buClr>
+              <a:buFont typeface="Arial"/>
+              <a:buChar char="•"/>
+            </a:pPr>
             <a:r>
               <a:rPr lang="en-US" sz="1650" dirty="0">
                 <a:solidFill>
                   <a:srgbClr val="000000"/>
                 </a:solidFill>
-                <a:latin typeface="Segoe UI"/>
-                <a:cs typeface="Segoe UI"/>
+                <a:latin typeface="Arial"/>
+                <a:cs typeface="Arial"/>
               </a:rPr>
               <a:t>'p = 0.42, vậy hai chiến lược tương đương.' Đúng hay sai?</a:t>
             </a:r>
@@ -36224,25 +35954,19 @@
               <a:spcBef>
                 <a:spcPts val="450"/>
               </a:spcBef>
-              <a:buNone/>
-            </a:pPr>
-            <a:r>
-              <a:rPr lang="en-US" sz="1650" b="1" dirty="0">
-                <a:solidFill>
-                  <a:srgbClr val="6C3483"/>
-                </a:solidFill>
-                <a:latin typeface="Segoe UI"/>
-                <a:cs typeface="Segoe UI"/>
-              </a:rPr>
-              <a:t>3.  </a:t>
-            </a:r>
+              <a:buClr>
+                <a:srgbClr val="6C3483"/>
+              </a:buClr>
+              <a:buFont typeface="Arial"/>
+              <a:buChar char="•"/>
+            </a:pPr>
             <a:r>
               <a:rPr lang="en-US" sz="1650" dirty="0">
                 <a:solidFill>
                   <a:srgbClr val="000000"/>
                 </a:solidFill>
-                <a:latin typeface="Segoe UI"/>
-                <a:cs typeface="Segoe UI"/>
+                <a:latin typeface="Arial"/>
+                <a:cs typeface="Arial"/>
               </a:rPr>
               <a:t>'p = 0.03 nghĩa là có 3% khả năng không có tác động.' Đúng hay sai?</a:t>
             </a:r>
@@ -36255,25 +35979,19 @@
               <a:spcBef>
                 <a:spcPts val="450"/>
               </a:spcBef>
-              <a:buNone/>
-            </a:pPr>
-            <a:r>
-              <a:rPr lang="en-US" sz="1650" b="1" dirty="0">
-                <a:solidFill>
-                  <a:srgbClr val="6C3483"/>
-                </a:solidFill>
-                <a:latin typeface="Segoe UI"/>
-                <a:cs typeface="Segoe UI"/>
-              </a:rPr>
-              <a:t>4.  </a:t>
-            </a:r>
+              <a:buClr>
+                <a:srgbClr val="6C3483"/>
+              </a:buClr>
+              <a:buFont typeface="Arial"/>
+              <a:buChar char="•"/>
+            </a:pPr>
             <a:r>
               <a:rPr lang="en-US" sz="1650" dirty="0">
                 <a:solidFill>
                   <a:srgbClr val="000000"/>
                 </a:solidFill>
-                <a:latin typeface="Segoe UI"/>
-                <a:cs typeface="Segoe UI"/>
+                <a:latin typeface="Arial"/>
+                <a:cs typeface="Arial"/>
               </a:rPr>
               <a:t>'Nghiên cứu lớn hơn thường cho CI hẹp hơn.' Đúng hay sai?</a:t>
             </a:r>
@@ -36317,8 +36035,8 @@
                 <a:solidFill>
                   <a:srgbClr val="6C3483"/>
                 </a:solidFill>
-                <a:latin typeface="Segoe UI"/>
-                <a:cs typeface="Segoe UI"/>
+                <a:latin typeface="Arial"/>
+                <a:cs typeface="Arial"/>
               </a:rPr>
               <a:t>Đáp án</a:t>
             </a:r>
@@ -36339,8 +36057,8 @@
                 <a:solidFill>
                   <a:srgbClr val="000000"/>
                 </a:solidFill>
-                <a:latin typeface="Segoe UI"/>
-                <a:cs typeface="Segoe UI"/>
+                <a:latin typeface="Arial"/>
+                <a:cs typeface="Arial"/>
               </a:rPr>
               <a:t>Đúng</a:t>
             </a:r>
@@ -36361,8 +36079,8 @@
                 <a:solidFill>
                   <a:srgbClr val="000000"/>
                 </a:solidFill>
-                <a:latin typeface="Segoe UI"/>
-                <a:cs typeface="Segoe UI"/>
+                <a:latin typeface="Arial"/>
+                <a:cs typeface="Arial"/>
               </a:rPr>
               <a:t>Sai: ta chưa biết</a:t>
             </a:r>
@@ -36383,8 +36101,8 @@
                 <a:solidFill>
                   <a:srgbClr val="000000"/>
                 </a:solidFill>
-                <a:latin typeface="Segoe UI"/>
-                <a:cs typeface="Segoe UI"/>
+                <a:latin typeface="Arial"/>
+                <a:cs typeface="Arial"/>
               </a:rPr>
               <a:t>Sai: p giả định không có tác động</a:t>
             </a:r>
@@ -36405,8 +36123,8 @@
                 <a:solidFill>
                   <a:srgbClr val="000000"/>
                 </a:solidFill>
-                <a:latin typeface="Segoe UI"/>
-                <a:cs typeface="Segoe UI"/>
+                <a:latin typeface="Arial"/>
+                <a:cs typeface="Arial"/>
               </a:rPr>
               <a:t>Đúng</a:t>
             </a:r>
@@ -36452,8 +36170,8 @@
                 <a:solidFill>
                   <a:srgbClr val="6C3483"/>
                 </a:solidFill>
-                <a:latin typeface="Segoe UI"/>
-                <a:cs typeface="Segoe UI"/>
+                <a:latin typeface="Arial"/>
+                <a:cs typeface="Arial"/>
               </a:rPr>
               <a:t>SẢN PHẨM   </a:t>
             </a:r>
@@ -36462,8 +36180,8 @@
                 <a:solidFill>
                   <a:srgbClr val="000000"/>
                 </a:solidFill>
-                <a:latin typeface="Segoe UI"/>
-                <a:cs typeface="Segoe UI"/>
+                <a:latin typeface="Arial"/>
+                <a:cs typeface="Arial"/>
               </a:rPr>
               <a:t>Mọi người đọc được CI và tránh các lỗi kinh điển về giá trị p</a:t>
             </a:r>
@@ -36500,7 +36218,7 @@
                     <a:lumMod val="50000"/>
                   </a:schemeClr>
                 </a:solidFill>
-                <a:latin typeface="Verdana"/>
+                <a:latin typeface="Arial"/>
               </a:rPr>
               <a:t>Neudata | #ClearDataClearImpact</a:t>
             </a:r>
@@ -36630,8 +36348,8 @@
                 <a:solidFill>
                   <a:srgbClr val="0D7377"/>
                 </a:solidFill>
-                <a:latin typeface="Segoe UI"/>
-                <a:cs typeface="Segoe UI"/>
+                <a:latin typeface="Arial"/>
+                <a:cs typeface="Arial"/>
               </a:rPr>
               <a:t>Sai lầm loại I và loại II: chuông báo cháy</a:t>
             </a:r>
@@ -36727,8 +36445,8 @@
                 <a:solidFill>
                   <a:srgbClr val="FFFFFF"/>
                 </a:solidFill>
-                <a:latin typeface="Segoe UI"/>
-                <a:cs typeface="Segoe UI"/>
+                <a:latin typeface="Arial"/>
+                <a:cs typeface="Arial"/>
               </a:rPr>
               <a:t>THÔNG ĐIỆP CHÍNH   </a:t>
             </a:r>
@@ -36737,8 +36455,8 @@
                 <a:solidFill>
                   <a:srgbClr val="FFFFFF"/>
                 </a:solidFill>
-                <a:latin typeface="Segoe UI"/>
-                <a:cs typeface="Segoe UI"/>
+                <a:latin typeface="Arial"/>
+                <a:cs typeface="Arial"/>
               </a:rPr>
               <a:t>Alpha = nguy cơ báo động giả; power = khả năng phát hiện tác động thật.</a:t>
             </a:r>
@@ -36775,7 +36493,7 @@
                     <a:lumMod val="50000"/>
                   </a:schemeClr>
                 </a:solidFill>
-                <a:latin typeface="Verdana"/>
+                <a:latin typeface="Arial"/>
               </a:rPr>
               <a:t>Neudata | #ClearDataClearImpact</a:t>
             </a:r>
@@ -36905,8 +36623,8 @@
                 <a:solidFill>
                   <a:srgbClr val="0D7377"/>
                 </a:solidFill>
-                <a:latin typeface="Segoe UI"/>
-                <a:cs typeface="Segoe UI"/>
+                <a:latin typeface="Arial"/>
+                <a:cs typeface="Arial"/>
               </a:rPr>
               <a:t>Cỡ mẫu: tác động lớn hơn, ít nhiễu hơn = ít bệnh nhân hơn</a:t>
             </a:r>
@@ -37002,8 +36720,8 @@
                 <a:solidFill>
                   <a:srgbClr val="FFFFFF"/>
                 </a:solidFill>
-                <a:latin typeface="Segoe UI"/>
-                <a:cs typeface="Segoe UI"/>
+                <a:latin typeface="Arial"/>
+                <a:cs typeface="Arial"/>
               </a:rPr>
               <a:t>THÔNG ĐIỆP CHÍNH   </a:t>
             </a:r>
@@ -37012,8 +36730,8 @@
                 <a:solidFill>
                   <a:srgbClr val="FFFFFF"/>
                 </a:solidFill>
-                <a:latin typeface="Segoe UI"/>
-                <a:cs typeface="Segoe UI"/>
+                <a:latin typeface="Arial"/>
+                <a:cs typeface="Arial"/>
               </a:rPr>
               <a:t>Cỡ mẫu phụ thuộc vào tác động muốn phát hiện và mức độ nhiễu.</a:t>
             </a:r>
@@ -37050,7 +36768,7 @@
                     <a:lumMod val="50000"/>
                   </a:schemeClr>
                 </a:solidFill>
-                <a:latin typeface="Verdana"/>
+                <a:latin typeface="Arial"/>
               </a:rPr>
               <a:t>Neudata | #ClearDataClearImpact</a:t>
             </a:r>
@@ -37167,7 +36885,7 @@
     </a:clrScheme>
     <a:fontScheme name="Office">
       <a:majorFont>
-        <a:latin typeface="Calibri"/>
+        <a:latin typeface="Arial"/>
         <a:ea typeface=""/>
         <a:cs typeface=""/>
         <a:font script="Jpan" typeface="ＭＳ Ｐゴシック"/>
@@ -37202,7 +36920,7 @@
         <a:font script="Geor" typeface="Sylfaen"/>
       </a:majorFont>
       <a:minorFont>
-        <a:latin typeface="Calibri"/>
+        <a:latin typeface="Arial"/>
         <a:ea typeface=""/>
         <a:cs typeface=""/>
         <a:font script="Jpan" typeface="ＭＳ Ｐゴシック"/>
@@ -37487,7 +37205,7 @@
     </a:clrScheme>
     <a:fontScheme name="Office">
       <a:majorFont>
-        <a:latin typeface="Calibri Light" panose="020F0302020204030204"/>
+        <a:latin typeface="Arial" panose="020F0302020204030204"/>
         <a:ea typeface=""/>
         <a:cs typeface=""/>
         <a:font script="Jpan" typeface="游ゴシック Light"/>
@@ -37522,7 +37240,7 @@
         <a:font script="Geor" typeface="Sylfaen"/>
       </a:majorFont>
       <a:minorFont>
-        <a:latin typeface="Calibri" panose="020F0502020204030204"/>
+        <a:latin typeface="Arial" panose="020F0502020204030204"/>
         <a:ea typeface=""/>
         <a:cs typeface=""/>
         <a:font script="Jpan" typeface="游ゴシック"/>
@@ -37748,7 +37466,7 @@
     </a:clrScheme>
     <a:fontScheme name="Office">
       <a:majorFont>
-        <a:latin typeface="Calibri Light" panose="020F0302020204030204"/>
+        <a:latin typeface="Arial" panose="020F0302020204030204"/>
         <a:ea typeface=""/>
         <a:cs typeface=""/>
         <a:font script="Jpan" typeface="游ゴシック Light"/>
@@ -37783,7 +37501,7 @@
         <a:font script="Geor" typeface="Sylfaen"/>
       </a:majorFont>
       <a:minorFont>
-        <a:latin typeface="Calibri" panose="020F0502020204030204"/>
+        <a:latin typeface="Arial" panose="020F0502020204030204"/>
         <a:ea typeface=""/>
         <a:cs typeface=""/>
         <a:font script="Jpan" typeface="游ゴシック"/>

--- a/vi/files/slides/Session_6_VN.pptx
+++ b/vi/files/slides/Session_6_VN.pptx
@@ -751,7 +751,7 @@
           <a:p>
             <a:r>
               <a:rPr lang="en-US" sz="1400" b="0" dirty="0"/>
-              <a:t>Chào mừng anh chị trở lại. Chúng ta học trực tuyến từ 19:30 đến 22:30, có 15 phút giải lao. Thứ Bảy tuần trước (Buổi 5) chúng ta đã thu thập, làm sạch và mô tả dữ liệu. Hôm nay chúng ta phân tích: một mẫu trả lời câu hỏi về quần thể như thế nào, và đọc các con số máy tính đưa ra ra sao.</a:t>
+              <a:t>Chào mừng anh chị trở lại. Lớp học trực tuyến từ 19:30 đến 22:30, có 15 phút giải lao. Thứ Bảy tuần trước (Buổi 5) cả lớp đã thu thập, làm sạch và mô tả dữ liệu. Hôm nay là phân tích: một mẫu trả lời câu hỏi về quần thể như thế nào, và đọc các con số máy tính đưa ra ra sao.</a:t>
             </a:r>
           </a:p>
           <a:p>
@@ -991,7 +991,7 @@
           <a:p>
             <a:r>
               <a:rPr lang="en-US" sz="1400" b="0" dirty="0"/>
-              <a:t>Bước 3: hai tỷ lệ (câu hỏi thật của ta: tử vong 28 ngày). Thường quy 40%, hạn chế dịch 30%, lực thống kê 80%, alpha 5% hai phía. Kết quả dự kiến: khoảng 356 mỗi nhóm khi không hiệu chỉnh liên tục (khoảng 376 khi có hiệu chỉnh). Các phương pháp khác nhau cho con số hơi khác nhau. Điều đó bình thường.</a:t>
+              <a:t>Bước 3: hai tỷ lệ (câu hỏi thật của mình: tử vong 28 ngày). Thường quy 40%, hạn chế dịch 30%, lực thống kê 80%, alpha 5% hai phía. Kết quả dự kiến: khoảng 356 mỗi nhóm khi không hiệu chỉnh liên tục (khoảng 376 khi có hiệu chỉnh). Các phương pháp khác nhau cho con số hơi khác nhau. Điều đó bình thường.</a:t>
             </a:r>
           </a:p>
           <a:p>
@@ -1237,7 +1237,7 @@
           <a:p>
             <a:r>
               <a:rPr lang="en-US" sz="1400" b="0" dirty="0"/>
-              <a:t>Bên phải: cùng các con số, nhưng hai giá trị của mỗi người bệnh được nối lại. Mọi đường đều đi xuống. Mỗi người bệnh tự làm chứng cho chính mình, nên nhiễu giữa các người bệnh biến mất. Kiểm định ghép cặp (t ghép cặp, hoặc Wilcoxon cho cặp nếu dữ liệu lệch) dùng đúng điều này và có lực thống kê cao hơn nhiều.</a:t>
+              <a:t>Bên phải: cùng các con số, nhưng hai giá trị của mỗi người bệnh được nối lại. Mọi đường đều đi xuống. Mỗi người bệnh là đối chứng của chính mình, nên nhiễu giữa các người bệnh biến mất. Kiểm định ghép cặp (t ghép cặp, hoặc Wilcoxon cho cặp nếu dữ liệu lệch) dùng đúng điều này và có lực thống kê cao hơn nhiều.</a:t>
             </a:r>
           </a:p>
           <a:p>
@@ -1489,7 +1489,7 @@
           <a:p>
             <a:r>
               <a:rPr lang="en-US" sz="1400" b="0" dirty="0"/>
-              <a:t>Chuyển ý: giờ chúng ta chạy đúng các kiểm định này trên bộ dữ liệu khóa học (6.2).</a:t>
+              <a:t>Chuyển ý: giờ chạy đúng các kiểm định này trên bộ dữ liệu khóa học (6.2).</a:t>
             </a:r>
           </a:p>
         </p:txBody>
@@ -2032,7 +2032,7 @@
           <a:p>
             <a:r>
               <a:rPr lang="en-US" sz="1400" b="0" dirty="0"/>
-              <a:t>Trước khi bắt đầu 6.1, đọc ba bốn câu trả lời cuối Buổi 5 (gửi qua khung chat hoặc biểu mẫu tuần trước) và sửa các hiểu lầm chung.</a:t>
+              <a:t>Trước khi bắt đầu 6.1, đọc ba bốn câu trả lời cuối Buổi 5 (gửi qua khung chat tuần trước) và sửa các hiểu lầm chung.</a:t>
             </a:r>
           </a:p>
           <a:p>
@@ -2242,7 +2242,7 @@
           <a:p>
             <a:r>
               <a:rPr lang="en-US" sz="1400" b="0" dirty="0"/>
-              <a:t>Slide chỉ có hình, có chủ ý. Trước giờ giải lao, nói: ta bắt đầu lại lúc 20:55 với phần 6.3 (tương quan, hồi quy tuyến tính và logistic, hiệu chỉnh, Kaplan-Meier và Cox, các mô hình FLUID-ICU). Ai có câu hỏi về các phép so sánh có thể gửi vào khung chat.</a:t>
+              <a:t>Slide chỉ có hình, có chủ ý. Trước giờ giải lao, nói: lớp bắt đầu lại lúc 20:55 với phần 6.3 (tương quan, hồi quy tuyến tính và logistic, hiệu chỉnh, Kaplan-Meier và Cox, các mô hình FLUID-ICU). Ai có câu hỏi về các phép so sánh có thể gửi vào khung chat.</a:t>
             </a:r>
           </a:p>
           <a:p>
@@ -2347,7 +2347,7 @@
           <a:p>
             <a:r>
               <a:rPr lang="en-US" sz="1400" b="0" dirty="0"/>
-              <a:t>Thông điệp chính: mọi mô hình trả lời cùng một câu hỏi bằng những ngôn ngữ khác nhau: kết cục liên quan với phơi nhiễm thế nào, và ta chắc chắn đến đâu? Cần bốn điều để đọc bất kỳ mô hình nào: kết cục là gì, mô hình nào đi kèm, con số có nghĩa gì (hệ số, OR hay HR) và giá trị 'không tác động' nằm ở đâu.</a:t>
+              <a:t>Thông điệp chính: mọi mô hình trả lời cùng một câu hỏi bằng những ngôn ngữ khác nhau: kết cục liên quan với phơi nhiễm thế nào, và chắc chắn đến đâu? Cần bốn điều để đọc bất kỳ mô hình nào: kết cục là gì, mô hình nào đi kèm, con số có nghĩa gì (hệ số, OR hay HR) và giá trị 'không tác động' nằm ở đâu.</a:t>
             </a:r>
           </a:p>
           <a:p>
@@ -3301,7 +3301,7 @@
           <a:p>
             <a:r>
               <a:rPr lang="en-US" sz="1400" b="0" dirty="0"/>
-              <a:t>Thông điệp chính: thống kê tồn tại vì chúng ta không thể nghiên cứu mọi người bệnh sốc nhiễm khuẩn trên thế giới. Ta nghiên cứu một mẫu và dùng thống kê để nói câu trả lời của mình có thể cách sự thật bao xa.</a:t>
+              <a:t>Thông điệp chính: cần thống kê vì không thể nghiên cứu mọi người bệnh sốc nhiễm khuẩn trên thế giới. Chỉ nghiên cứu được một mẫu, rồi dùng thống kê để nói câu trả lời có thể cách sự thật bao xa.</a:t>
             </a:r>
           </a:p>
           <a:p>
@@ -3313,7 +3313,7 @@
           <a:p>
             <a:r>
               <a:rPr lang="en-US" sz="1400" b="0" dirty="0"/>
-              <a:t>Chuyển ý: ta nghiên cứu một mẫu 40, 400 hay 620 người bệnh. Ước lượng cách sự thật bao xa? Vũ điệu của các khoảng tin cậy cho thấy điều đó (hình mẫu và quần thể là trang bổ sung).</a:t>
+              <a:t>Chuyển ý: với một mẫu 40, 400 hay 620 người bệnh, ước lượng cách sự thật bao xa? Hình KTC qua 20 lần lặp lại nghiên cứu cho thấy điều đó (hình mẫu và quần thể là trang bổ sung).</a:t>
             </a:r>
           </a:p>
         </p:txBody>
@@ -3394,13 +3394,13 @@
           <a:p>
             <a:r>
               <a:rPr lang="en-US" sz="1400" b="0" dirty="0"/>
-              <a:t>Ý chính: một mô hình có quá nhiều biến so với số biến cố sẽ học nhiễu trong dữ liệu của ta, không phải sự thật. Nó khớp hoàn hảo với người bệnh của ta và thất bại với những người bệnh tiếp theo.</a:t>
+              <a:t>Ý chính: một mô hình có quá nhiều biến so với số biến cố sẽ học nhiễu trong dữ liệu của mình, không phải sự thật. Nó khớp hoàn hảo với người bệnh của mình và thất bại với những người bệnh tiếp theo.</a:t>
             </a:r>
           </a:p>
           <a:p>
             <a:r>
               <a:rPr lang="en-US" sz="1400" b="0" dirty="0"/>
-              <a:t>Hình: đường đỏ đi qua cả 10 điểm đặc (dữ liệu của ta) nhưng bỏ lỡ các điểm rỗng (người bệnh mới). Đường thẳng xanh đơn giản dự đoán tốt hơn cho người bệnh mới.</a:t>
+              <a:t>Hình: đường đỏ đi qua cả 10 điểm đặc (dữ liệu của mình) nhưng bỏ lỡ các điểm rỗng (người bệnh mới). Đường thẳng xanh đơn giản dự đoán tốt hơn cho người bệnh mới.</a:t>
             </a:r>
           </a:p>
           <a:p>
@@ -3418,7 +3418,7 @@
           <a:p>
             <a:r>
               <a:rPr lang="en-US" sz="1400" b="0" dirty="0"/>
-              <a:t>Tốt hơn: chọn yếu tố gây nhiễu từ trước dựa trên kiến thức lâm sàng và y văn (sơ đồ nhân quả giúp ích), ghi vào SAP (6.4), và giữ trong giới hạn số biến cố mỗi biến.</a:t>
+              <a:t>Tốt hơn: chọn yếu tố gây nhiễu từ trước dựa trên kiến thức lâm sàng và tài liệu đã công bố (sơ đồ nhân quả giúp ích), ghi vào SAP (6.4), và giữ trong giới hạn số biến cố mỗi biến.</a:t>
             </a:r>
           </a:p>
           <a:p>
@@ -3511,19 +3511,19 @@
           <a:p>
             <a:r>
               <a:rPr lang="en-US" sz="1400" b="0" dirty="0"/>
-              <a:t>Ý chính: kết cục thời gian đến sự kiện cần phương pháp riêng vì không phải ai cũng có biến cố trong lúc ta theo dõi.</a:t>
+              <a:t>Ý chính: kết cục thời gian đến sự kiện cần phương pháp riêng vì không phải ai cũng có biến cố trong thời gian theo dõi.</a:t>
             </a:r>
           </a:p>
           <a:p>
             <a:r>
               <a:rPr lang="en-US" sz="1400" b="0" dirty="0"/>
-              <a:t>Mỗi đường là một người bệnh được theo dõi từ khi vào ICU. Dấu X đỏ là biến cố (tử vong). Vòng tròn là người bệnh bị kiểm duyệt (censoring): ta ngừng theo dõi trước khi có biến cố, vì mất theo dõi (chuyển viện, không liên lạc được) hoặc vì nghiên cứu kết thúc ở ngày 28.</a:t>
+              <a:t>Mỗi đường là một người bệnh được theo dõi từ khi vào ICU. Dấu X đỏ là biến cố (tử vong). Vòng tròn là người bệnh bị kiểm duyệt (censoring): việc theo dõi dừng trước khi có biến cố, vì mất theo dõi (chuyển viện, không liên lạc được) hoặc vì nghiên cứu kết thúc ở ngày 28.</a:t>
             </a:r>
           </a:p>
           <a:p>
             <a:r>
               <a:rPr lang="en-US" sz="1400" b="0" dirty="0"/>
-              <a:t>Kiểm duyệt không có nghĩa là bị loại. Người bệnh 3 cho ta biết họ còn sống trong 12 ngày, và phương pháp sống còn sử dụng thông tin đó. Loại họ ra, hay tính họ là sống đủ 28 ngày, đều làm sai lệch kết quả.</a:t>
+              <a:t>Kiểm duyệt không có nghĩa là bị loại. Người bệnh 3 cho biết họ còn sống trong 12 ngày, và phương pháp sống còn sử dụng thông tin đó. Loại họ ra, hay tính họ là sống đủ 28 ngày, đều làm sai lệch kết quả.</a:t>
             </a:r>
           </a:p>
           <a:p>
@@ -4102,7 +4102,7 @@
           <a:p>
             <a:r>
               <a:rPr lang="en-US" sz="1400" b="0" dirty="0"/>
-              <a:t>Các dòng còn lại là yếu tố gây nhiễu: các chỉ dấu mức độ nặng (SOFA mỗi điểm, lactat mỗi mmol/L, vận mạch, thở máy), tuổi mỗi năm, CKD (bệnh thận mạn). Chúng có trong mô hình để hiệu chỉnh. Chúng không phải câu hỏi. Đừng diễn giải quá mức (lỗi 'ngụy biện Bảng 2').</a:t>
+              <a:t>Các dòng còn lại là yếu tố gây nhiễu: các chỉ dấu mức độ nặng (SOFA mỗi điểm, lactat mỗi mmol/L, vận mạch, thở máy), tuổi mỗi năm, CKD (bệnh thận mạn). Chúng có trong mô hình để hiệu chỉnh. Chúng không phải câu hỏi. Đừng diễn giải quá mức (lỗi 'ngụy biện Bảng 2', Table 2 fallacy).</a:t>
             </a:r>
           </a:p>
           <a:p>
@@ -4423,19 +4423,19 @@
           <a:p>
             <a:r>
               <a:rPr lang="en-US" sz="1400" b="0" dirty="0"/>
-              <a:t>MAR, thiếu ngẫu nhiên (có điều kiện theo những gì đã ghi): lactat không được đo ở người bệnh vào ban đêm. Việc thiếu phụ thuộc vào một điều ta có trong dữ liệu (giờ nhập viện). Các phương pháp như quy gán đa bội có thể dùng biến đã ghi nhận đó để sửa sai lệch.</a:t>
+              <a:t>MAR, thiếu ngẫu nhiên (có điều kiện theo những gì đã ghi): lactat không được đo ở người bệnh vào ban đêm. Việc thiếu phụ thuộc vào một điều có trong dữ liệu (giờ nhập viện). Các phương pháp như quy gán đa bội có thể dùng biến đã ghi nhận đó để sửa sai lệch.</a:t>
             </a:r>
           </a:p>
           <a:p>
             <a:r>
               <a:rPr lang="en-US" sz="1400" b="0" dirty="0"/>
-              <a:t>MNAR, thiếu không ngẫu nhiên: các giá trị lactat bị thiếu là những giá trị cao nhất (người bệnh nặng nhất, giá trị vượt ngưỡng máy, các số màu đỏ ta không bao giờ thấy). Việc thiếu phụ thuộc chính giá trị bị thiếu. Không phương pháp thống kê nào sửa được hoàn toàn. Ta chỉ có thể kiểm tra xem nó ảnh hưởng đến đâu (phân tích độ nhạy).</a:t>
+              <a:t>MNAR, thiếu không ngẫu nhiên: các giá trị lactat bị thiếu là những giá trị cao nhất (người bệnh nặng nhất, giá trị vượt ngưỡng máy, các số màu đỏ không bao giờ thấy được). Việc thiếu phụ thuộc chính giá trị bị thiếu. Không phương pháp thống kê nào sửa được hoàn toàn. Chỉ có thể kiểm tra xem nó ảnh hưởng đến đâu (phân tích độ nhạy).</a:t>
             </a:r>
           </a:p>
           <a:p>
             <a:r>
               <a:rPr lang="en-US" sz="1400" b="0" dirty="0"/>
-              <a:t>Ta không bao giờ chứng minh được cơ chế nào đúng chỉ từ dữ liệu. Hiểu biết lâm sàng về vì sao giá trị bị thiếu là thiết yếu. Hãy ghi lại lý do khi thu thập dữ liệu.</a:t>
+              <a:t>Không bao giờ chứng minh được cơ chế nào đúng chỉ từ dữ liệu. Hiểu biết lâm sàng về vì sao giá trị bị thiếu là thiết yếu. Hãy ghi lại lý do khi thu thập dữ liệu.</a:t>
             </a:r>
           </a:p>
           <a:p>
@@ -4540,7 +4540,7 @@
           <a:p>
             <a:r>
               <a:rPr lang="en-US" sz="1400" b="0" dirty="0"/>
-              <a:t>Chúng tôi mô phỏng cùng một nghiên cứu 20 lần, mỗi lần 25 người bệnh, từ một quần thể có cân bằng dịch trung bình thật là 30 ml/kg (đường đứt nét). Mỗi nghiên cứu cho một ước lượng khác nhau (chấm) và một khoảng tin cậy 95% (KTC 95%) khác nhau (đoạn thẳng đứng). Các khoảng 'nhảy múa'.</a:t>
+              <a:t>Chúng tôi mô phỏng cùng một nghiên cứu 20 lần, mỗi lần 25 người bệnh, từ một quần thể có cân bằng dịch trung bình thật là 30 ml/kg (đường đứt nét). Mỗi nghiên cứu cho một ước lượng khác nhau (chấm) và một khoảng tin cậy 95% (KTC 95%) khác nhau (đoạn thẳng đứng). Các khoảng thay đổi qua mỗi lần.</a:t>
             </a:r>
           </a:p>
           <a:p>
@@ -4558,7 +4558,7 @@
           <a:p>
             <a:r>
               <a:rPr lang="en-US" sz="1400" b="0" dirty="0"/>
-              <a:t>Cách đọc thực tế: KTC 95% là khoảng các giá trị của tác động thật phù hợp với dữ liệu của ta. Khoảng hẹp = chính xác. Khoảng rộng = kém chính xác.</a:t>
+              <a:t>Cách đọc thực tế: KTC 95% là khoảng các giá trị của tác động thật phù hợp với dữ liệu của mình. Khoảng hẹp = chính xác. Khoảng rộng = kém chính xác.</a:t>
             </a:r>
           </a:p>
           <a:p>
@@ -4774,7 +4774,7 @@
           <a:p>
             <a:r>
               <a:rPr lang="en-US" sz="1400" b="0" dirty="0"/>
-              <a:t>Diễn giải: kết luận không phụ thuộc vào cách xử lý lactat bị thiếu: một kết quả vững. Nếu hai cách cho kết quả rất khác nhau, ta phải nói rõ.</a:t>
+              <a:t>Diễn giải: kết luận không phụ thuộc vào cách xử lý lactat bị thiếu: một kết quả vững. Nếu hai cách cho kết quả rất khác nhau, phải nói rõ.</a:t>
             </a:r>
           </a:p>
           <a:p>
@@ -4909,7 +4909,7 @@
           <a:p>
             <a:r>
               <a:rPr lang="en-US" sz="1400" b="0" dirty="0"/>
-              <a:t>Mẫu hình cần chỉ ra: ở mọi câu hỏi, ước lượng đã hiệu chỉnh gần 'không tác động' hơn ước lượng thô: dấu vân tay của nhiễu do chỉ định.</a:t>
+              <a:t>Mẫu hình cần chỉ ra: ở mọi câu hỏi, ước lượng đã hiệu chỉnh gần 'không tác động' hơn ước lượng thô: dấu hiệu điển hình của nhiễu do chỉ định.</a:t>
             </a:r>
           </a:p>
           <a:p>
@@ -5446,7 +5446,7 @@
           <a:p>
             <a:r>
               <a:rPr lang="en-US" sz="1400" b="0" dirty="0"/>
-              <a:t>Câu hỏi cuối buổi trong khung chat (hoặc biểu mẫu một câu hỏi). Mục đích: kiểm tra kỹ năng quan trọng nhất hôm nay, đọc một KTC. Câu trả lời tốt: 'Tỷ số nguy cơ tức thời thật có thể hợp lý nằm trong khoảng 1.48 đến 3.06. Mọi giá trị đều lớn hơn 1, nên dữ liệu gợi ý tử vong cao hơn.' Giảng viên đọc các câu trả lời trước Buổi 7 và mở đầu Buổi 7 bằng hai ba câu trong số đó.</a:t>
+              <a:t>Câu hỏi cuối buổi trong khung chat. Mục đích: kiểm tra kỹ năng quan trọng nhất hôm nay, đọc một KTC. Câu trả lời tốt: 'Tỷ số nguy cơ tức thời thật có thể hợp lý nằm trong khoảng 1.48 đến 3.06. Mọi giá trị đều lớn hơn 1, nên dữ liệu gợi ý tử vong cao hơn.' Giảng viên đọc các câu trả lời trước Buổi 7 và mở đầu Buổi 7 bằng hai ba câu trong số đó.</a:t>
             </a:r>
           </a:p>
           <a:p>
@@ -5731,19 +5731,19 @@
           <a:p>
             <a:r>
               <a:rPr lang="en-US" sz="1400" b="0" dirty="0"/>
-              <a:t>Bây giờ đặt kết quả của ta lên hình. Giá trị p là vùng màu cam: tỷ lệ các kết quả ít nhất cực đoan như kết quả của ta (theo cả hai hướng) mà chỉ riêng ngẫu nhiên tạo ra nếu không có khác biệt thật.</a:t>
+              <a:t>Bây giờ đặt kết quả của mình lên hình. Giá trị p là vùng màu cam: tỷ lệ các kết quả ít nhất cực đoan như kết quả của mình (theo cả hai hướng) mà chỉ riêng ngẫu nhiên tạo ra nếu không có khác biệt thật.</a:t>
             </a:r>
           </a:p>
           <a:p>
             <a:r>
               <a:rPr lang="en-US" sz="1400" b="0" dirty="0"/>
-              <a:t>p = 0.04 nghĩa là: nếu thực sự không có khác biệt, các kết quả cực đoan như thế này hoặc hơn sẽ xảy ra khoảng 4 lần trong 100 nghiên cứu. Khá đáng ngạc nhiên, nên ta nghi ngờ giả định 'không khác biệt'.</a:t>
+              <a:t>p = 0.04 nghĩa là: nếu thực sự không có khác biệt, các kết quả cực đoan như thế này hoặc hơn sẽ xảy ra khoảng 4 lần trong 100 nghiên cứu. Khá đáng ngạc nhiên, nên có lý do nghi ngờ giả định 'không khác biệt'.</a:t>
             </a:r>
           </a:p>
           <a:p>
             <a:r>
               <a:rPr lang="en-US" sz="1400" b="0" dirty="0"/>
-              <a:t>p = 0.42 (Bài báo 1: Boulet 2024, RCT thử nghiệm pilot so sánh hạn chế dịch với truyền dịch thường quy trong sốc nhiễm khuẩn, trong thư mục khóa học Course/Papers) nghĩa là: kết quả như vậy rất thường gặp ngay cả khi không có khác biệt thật. Không đáng ngạc nhiên, nên không có bằng chứng chống lại 'không khác biệt'. Nhưng cũng không chứng minh 'không khác biệt'.</a:t>
+              <a:t>p = 0.42 (Bài báo 1: Boulet 2024, RCT thí điểm (pilot) so sánh hạn chế dịch với truyền dịch thường quy trong sốc nhiễm khuẩn, trong thư mục khóa học Course/Papers) nghĩa là: kết quả như vậy rất thường gặp ngay cả khi không có khác biệt thật. Không đáng ngạc nhiên, nên không có bằng chứng chống lại 'không khác biệt'. Nhưng cũng không chứng minh 'không khác biệt'.</a:t>
             </a:r>
           </a:p>
           <a:p>
@@ -5953,7 +5953,7 @@
           <a:p>
             <a:r>
               <a:rPr lang="en-US" sz="1400" b="0" dirty="0"/>
-              <a:t>Số ngày không thở máy đến ngày 28 bằng 0 với người bệnh tử vong hoặc thở máy suốt, và bằng 28 với người không bao giờ thở máy: hai đống dồn, không giống hình chuông.</a:t>
+              <a:t>Số ngày không thở máy đến ngày 28 bằng 0 với người bệnh tử vong hoặc thở máy suốt, và bằng 28 với người không bao giờ thở máy: dồn thành hai cụm, không giống hình chuông.</a:t>
             </a:r>
           </a:p>
           <a:p>
@@ -6052,7 +6052,7 @@
           <a:p>
             <a:r>
               <a:rPr lang="en-US" sz="1400" b="0" dirty="0"/>
-              <a:t>Bổ sung: Ý chính: quần thể là tất cả những người ta muốn tìm hiểu (mọi người lớn bị sốc nhiễm khuẩn). Ta không bao giờ thấy hết. Mẫu là những người bệnh ta thực sự nghiên cứu.</a:t>
+              <a:t>Bổ sung: Ý chính: quần thể là tất cả những người cần tìm hiểu (mọi người lớn bị sốc nhiễm khuẩn). Không bao giờ thấy hết được. Mẫu là những người bệnh thực sự được nghiên cứu.</a:t>
             </a:r>
           </a:p>
           <a:p>
@@ -6082,7 +6082,7 @@
           <a:p>
             <a:r>
               <a:rPr lang="en-US" sz="1400" b="0" dirty="0"/>
-              <a:t>Hỏi: nếu nghiên cứu 400 người bệnh thay vì 40, khoảng tin cậy sẽ thế nào? Dự kiến: hẹp hơn. Đó là trang 'Vũ điệu của các khoảng tin cậy' và trang cỡ mẫu trong mục 6.1.</a:t>
+              <a:t>Hỏi: nếu nghiên cứu 400 người bệnh thay vì 40, khoảng tin cậy sẽ thế nào? Dự kiến: hẹp hơn. Đó là trang 'Khoảng tin cậy qua 20 lần lặp lại nghiên cứu' và trang cỡ mẫu trong mục 6.1.</a:t>
             </a:r>
           </a:p>
         </p:txBody>
@@ -6175,7 +6175,7 @@
           <a:p>
             <a:r>
               <a:rPr lang="en-US" sz="1400" b="0" dirty="0"/>
-              <a:t>Khoảng tin cậy chứa số 0, nên dữ liệu phù hợp với không có khác biệt. Nhưng nó cũng chứa mức chênh lệch lớn tới 40 ml/kg. Kết luận: nghiên cứu không thể cho biết chiến lược này có hiệu quả hay không. Đây là nghiên cứu thử nghiệm (pilot) với 48 người bệnh.</a:t>
+              <a:t>Khoảng tin cậy chứa số 0, nên dữ liệu phù hợp với không có khác biệt. Nhưng nó cũng chứa mức chênh lệch lớn tới 40 ml/kg. Kết luận: nghiên cứu không thể cho biết chiến lược này có hiệu quả hay không. Đây là nghiên cứu thí điểm (pilot) với 48 người bệnh.</a:t>
             </a:r>
           </a:p>
           <a:p>
@@ -6526,7 +6526,7 @@
           <a:p>
             <a:r>
               <a:rPr lang="en-US" sz="1400" b="0" dirty="0"/>
-              <a:t>Bên phải, nhân quả: truyền nhiều dịch ngày 1 đi kèm nằm ICU lâu hơn (r = 0.85). Nhưng trong từng nhóm mức độ nặng hoàn toàn không có liên quan. Mức độ nặng chi phối cả hai. Đây lại là nhiễu (Buổi 4), và là lý do ta hiệu chỉnh trong mô hình (mục 6.3 và 6.4).</a:t>
+              <a:t>Bên phải, nhân quả: truyền nhiều dịch ngày 1 đi kèm nằm ICU lâu hơn (r = 0.85). Nhưng trong từng nhóm mức độ nặng hoàn toàn không có liên quan. Mức độ nặng chi phối cả hai. Đây lại là nhiễu (Buổi 4), và là lý do cần hiệu chỉnh trong mô hình (mục 6.3 và 6.4).</a:t>
             </a:r>
           </a:p>
           <a:p>
@@ -6877,7 +6877,7 @@
           <a:p>
             <a:r>
               <a:rPr lang="en-US" sz="1400" b="0" dirty="0"/>
-              <a:t>Hỏi: một nhà cung cấp nói hệ thống cảnh báo nhiễm khuẩn huyết của họ có AUC 0.92 'trên dữ liệu phát triển'. Anh chị hỏi gì? Dự kiến: hiệu chuẩn, và thẩm định ngoài ở cơ sở giống của ta.</a:t>
+              <a:t>Hỏi: một nhà cung cấp nói hệ thống cảnh báo nhiễm khuẩn huyết của họ có AUC 0.92 'trên dữ liệu phát triển'. Anh chị hỏi gì? Dự kiến: hiệu chuẩn, và thẩm định ngoài ở cơ sở giống của mình.</a:t>
             </a:r>
           </a:p>
           <a:p>
@@ -6970,7 +6970,7 @@
           <a:p>
             <a:r>
               <a:rPr lang="en-US" sz="1400" b="0" dirty="0"/>
-              <a:t>Hai phía (mặc định): H1 nói 'chiến lược hạn chế dịch làm thay đổi tử vong', tăng hoặc giảm. Kết quả nằm xa ở bất kỳ đuôi nào cũng được tính là bằng chứng. Điều này bảo vệ người bệnh: một điều trị mới có thể gây hại cũng như có lợi, và ta muốn phát hiện cả hai. Phép tính cỡ mẫu của Bài báo 1 dùng alpha 5% hai phía. SAP của FLUID-ICU (kế hoạch phân tích thống kê, Course/Data/SAP_FLUID-ICU.md) dùng kiểm định hai phía cho mọi phân tích.</a:t>
+              <a:t>Hai phía (mặc định): H1 nói 'chiến lược hạn chế dịch làm thay đổi tử vong', tăng hoặc giảm. Kết quả nằm xa ở bất kỳ đuôi nào cũng được tính là bằng chứng. Điều này bảo vệ người bệnh: một điều trị mới có thể gây hại cũng như có lợi, và cần phát hiện cả hai. Phép tính cỡ mẫu của Bài báo 1 dùng alpha 5% hai phía. SAP của FLUID-ICU (kế hoạch phân tích thống kê, Course/Data/SAP_FLUID-ICU.md) dùng kiểm định hai phía cho mọi phân tích.</a:t>
             </a:r>
           </a:p>
           <a:p>
@@ -7081,7 +7081,7 @@
           <a:p>
             <a:r>
               <a:rPr lang="en-US" sz="1400" b="0" dirty="0"/>
-              <a:t>Bổ sung: Ý chính: học máy (machine learning, ML) và công cụ ai là các mô hình dự báo được xây dựng bằng thuật toán linh hoạt (rừng ngẫu nhiên, mạng nơ-ron). Đánh giá chúng bằng bốn câu hỏi.</a:t>
+              <a:t>Bổ sung: Ý chính: học máy (machine learning, ML) và công cụ AI là các mô hình dự báo được xây dựng bằng thuật toán linh hoạt (rừng ngẫu nhiên, mạng nơ-ron). Đánh giá chúng bằng bốn câu hỏi.</a:t>
             </a:r>
           </a:p>
           <a:p>
@@ -7105,7 +7105,7 @@
           <a:p>
             <a:r>
               <a:rPr lang="en-US" sz="1400" b="0" dirty="0"/>
-              <a:t>Báo cáo đầy đủ? TRIPOD+ai là hướng dẫn báo cáo cho mô hình dự báo, kể cả AI (trên EQUATOR, Buổi 7-8). Tìm cách xử lý dữ liệu thiếu, tính công bằng giữa các nhóm, và mô hình đã được thử nghiệm về tác động lên kết cục người bệnh hay chỉ về độ chính xác.</a:t>
+              <a:t>Báo cáo đầy đủ? TRIPOD+AI là hướng dẫn báo cáo cho mô hình dự báo, kể cả AI (trên EQUATOR, Buổi 7-8). Tìm cách xử lý dữ liệu thiếu, tính công bằng giữa các nhóm, và mô hình đã được thử nghiệm về tác động lên kết cục người bệnh hay chỉ về độ chính xác.</a:t>
             </a:r>
           </a:p>
           <a:p>
@@ -7222,7 +7222,7 @@
           <a:p>
             <a:r>
               <a:rPr lang="en-US" sz="1400" b="0" dirty="0"/>
-              <a:t>Phương pháp hoạt động tốt khi dữ liệu là MAR và mô hình quy gán có các biến giải thích việc thiếu. Đây không phải 'bịa dữ liệu': đây là sự trung thực về những gì ta không biết.</a:t>
+              <a:t>Phương pháp hoạt động tốt khi dữ liệu là MAR và mô hình quy gán có các biến giải thích việc thiếu. Đây không phải 'bịa dữ liệu': đây là trung thực về những gì chưa biết.</a:t>
             </a:r>
           </a:p>
           <a:p>
@@ -7327,7 +7327,7 @@
           <a:p>
             <a:r>
               <a:rPr lang="en-US" sz="1400" b="0" dirty="0"/>
-              <a:t>Báo cáo: số giá trị thiếu ở từng biến (cột 'n' trong Bảng 1 hoặc chú thích) và, với kết cục, một sơ đồ dòng chảy cho biết ai bị mất và vì sao (CONSORT, STROBE, Buổi 7-8).</a:t>
+              <a:t>Báo cáo: số giá trị thiếu ở từng biến (cột 'n' trong Bảng 1 hoặc chú thích) và, với kết cục, một sơ đồ luồng cho biết ai bị mất và vì sao (CONSORT, STROBE, Buổi 7-8).</a:t>
             </a:r>
           </a:p>
           <a:p>
@@ -7537,7 +7537,7 @@
           <a:p>
             <a:r>
               <a:rPr lang="en-US" sz="1400" b="0" dirty="0"/>
-              <a:t>3. 'p = 0.42, vậy hai chiến lược tương đương.' Sai: Bài báo 1 là ví dụ hoàn hảo. KTC rộng cho thấy ta đơn giản là chưa biết.</a:t>
+              <a:t>3. 'p = 0.42, vậy hai chiến lược tương đương.' Sai: Bài báo 1 là ví dụ hoàn hảo. KTC rộng cho thấy đơn giản là chưa biết.</a:t>
             </a:r>
           </a:p>
           <a:p>
@@ -7753,7 +7753,7 @@
           <a:p>
             <a:r>
               <a:rPr lang="en-US" sz="1400" b="0" dirty="0"/>
-              <a:t>Sai lầm loại I (báo động giả): chuông reo nhưng không có cháy. Ta kết luận điều trị có hiệu quả trong khi thực tế không. Ta chấp nhận nguy cơ 5% cho điều này: đó là alpha = 0.05.</a:t>
+              <a:t>Sai lầm loại I (báo động giả): chuông reo nhưng không có cháy. Kết luận điều trị có hiệu quả trong khi thực tế không. Thường chấp nhận nguy cơ 5% cho điều này: đó là alpha = 0.05.</a:t>
             </a:r>
           </a:p>
           <a:p>
@@ -7777,7 +7777,7 @@
           <a:p>
             <a:r>
               <a:rPr lang="en-US" sz="1400" b="0" dirty="0"/>
-              <a:t>Liên hệ lâm sàng: một thử nghiệm nhỏ 'âm tính' có thể chỉ là một đám cháy bị bỏ sót. Bài báo 1 là nghiên cứu pilot được thiết kế để phát hiện một khác biệt lớn. Một khác biệt thật nhỏ hơn rất dễ bị bỏ sót.</a:t>
+              <a:t>Liên hệ lâm sàng: một thử nghiệm nhỏ 'âm tính' có thể chỉ là một đám cháy bị bỏ sót. Bài báo 1 là nghiên cứu thí điểm được thiết kế để phát hiện một khác biệt lớn. Một khác biệt thật nhỏ hơn rất dễ bị bỏ sót.</a:t>
             </a:r>
           </a:p>
           <a:p>
@@ -11750,12 +11750,12 @@
           </a:ln>
         </p:spPr>
         <p:txBody>
-          <a:bodyPr wrap="square" lIns="137160" tIns="91440" rIns="137160" bIns="91440" rtlCol="0" anchor="t">
+          <a:bodyPr wrap="square" lIns="137160" tIns="91440" rIns="137160" bIns="91440" rtlCol="0" anchor="ctr">
             <a:normAutofit/>
           </a:bodyPr>
           <a:lstStyle/>
           <a:p>
-            <a:pPr marL="0" indent="0" algn="l">
+            <a:pPr marL="0" indent="0" algn="ctr">
               <a:buNone/>
             </a:pPr>
             <a:r>
@@ -11770,15 +11770,14 @@
             </a:r>
           </a:p>
           <a:p>
-            <a:pPr marL="274320" indent="-274320" algn="l">
+            <a:pPr marL="0" indent="0" algn="ctr">
               <a:lnSpc>
                 <a:spcPct val="104000"/>
               </a:lnSpc>
               <a:spcBef>
                 <a:spcPts val="300"/>
               </a:spcBef>
-              <a:buFont typeface="Arial"/>
-              <a:buChar char="•"/>
+              <a:buNone/>
             </a:pPr>
             <a:r>
               <a:rPr lang="en-US" sz="1500" dirty="0">
@@ -11792,15 +11791,14 @@
             </a:r>
           </a:p>
           <a:p>
-            <a:pPr marL="274320" indent="-274320" algn="l">
+            <a:pPr marL="0" indent="0" algn="ctr">
               <a:lnSpc>
                 <a:spcPct val="104000"/>
               </a:lnSpc>
               <a:spcBef>
                 <a:spcPts val="300"/>
               </a:spcBef>
-              <a:buFont typeface="Arial"/>
-              <a:buChar char="•"/>
+              <a:buNone/>
             </a:pPr>
             <a:r>
               <a:rPr lang="en-US" sz="1500" dirty="0">
@@ -11814,15 +11812,14 @@
             </a:r>
           </a:p>
           <a:p>
-            <a:pPr marL="274320" indent="-274320" algn="l">
+            <a:pPr marL="0" indent="0" algn="ctr">
               <a:lnSpc>
                 <a:spcPct val="104000"/>
               </a:lnSpc>
               <a:spcBef>
                 <a:spcPts val="300"/>
               </a:spcBef>
-              <a:buFont typeface="Arial"/>
-              <a:buChar char="•"/>
+              <a:buNone/>
             </a:pPr>
             <a:r>
               <a:rPr lang="en-US" sz="1500" dirty="0">
@@ -11836,15 +11833,14 @@
             </a:r>
           </a:p>
           <a:p>
-            <a:pPr marL="274320" indent="-274320" algn="l">
+            <a:pPr marL="0" indent="0" algn="ctr">
               <a:lnSpc>
                 <a:spcPct val="104000"/>
               </a:lnSpc>
               <a:spcBef>
                 <a:spcPts val="300"/>
               </a:spcBef>
-              <a:buFont typeface="Arial"/>
-              <a:buChar char="•"/>
+              <a:buNone/>
             </a:pPr>
             <a:r>
               <a:rPr lang="en-US" sz="1500" dirty="0">
@@ -13105,7 +13101,7 @@
                 <a:latin typeface="Arial"/>
                 <a:cs typeface="Arial"/>
               </a:rPr>
-              <a:t>So sánh bội: bài toán kẹo dẻo</a:t>
+              <a:t>So sánh bội (multiple comparisons): ví dụ kẹo dẻo</a:t>
             </a:r>
           </a:p>
         </p:txBody>
@@ -13719,12 +13715,12 @@
           </a:ln>
         </p:spPr>
         <p:txBody>
-          <a:bodyPr wrap="square" lIns="137160" tIns="91440" rIns="137160" bIns="91440" rtlCol="0" anchor="t">
+          <a:bodyPr wrap="square" lIns="137160" tIns="91440" rIns="137160" bIns="91440" rtlCol="0" anchor="ctr">
             <a:normAutofit/>
           </a:bodyPr>
           <a:lstStyle/>
           <a:p>
-            <a:pPr marL="0" indent="0" algn="l">
+            <a:pPr marL="0" indent="0" algn="ctr">
               <a:buNone/>
             </a:pPr>
             <a:r>
@@ -13739,15 +13735,14 @@
             </a:r>
           </a:p>
           <a:p>
-            <a:pPr marL="274320" indent="-274320" algn="l">
+            <a:pPr marL="0" indent="0" algn="ctr">
               <a:lnSpc>
                 <a:spcPct val="104000"/>
               </a:lnSpc>
               <a:spcBef>
                 <a:spcPts val="300"/>
               </a:spcBef>
-              <a:buFont typeface="Arial"/>
-              <a:buChar char="•"/>
+              <a:buNone/>
             </a:pPr>
             <a:r>
               <a:rPr lang="en-US" sz="1500" dirty="0">
@@ -13761,15 +13756,14 @@
             </a:r>
           </a:p>
           <a:p>
-            <a:pPr marL="274320" indent="-274320" algn="l">
+            <a:pPr marL="0" indent="0" algn="ctr">
               <a:lnSpc>
                 <a:spcPct val="104000"/>
               </a:lnSpc>
               <a:spcBef>
                 <a:spcPts val="300"/>
               </a:spcBef>
-              <a:buFont typeface="Arial"/>
-              <a:buChar char="•"/>
+              <a:buNone/>
             </a:pPr>
             <a:r>
               <a:rPr lang="en-US" sz="1500" dirty="0">
@@ -13783,15 +13777,14 @@
             </a:r>
           </a:p>
           <a:p>
-            <a:pPr marL="274320" indent="-274320" algn="l">
+            <a:pPr marL="0" indent="0" algn="ctr">
               <a:lnSpc>
                 <a:spcPct val="104000"/>
               </a:lnSpc>
               <a:spcBef>
                 <a:spcPts val="300"/>
               </a:spcBef>
-              <a:buFont typeface="Arial"/>
-              <a:buChar char="•"/>
+              <a:buNone/>
             </a:pPr>
             <a:r>
               <a:rPr lang="en-US" sz="1500" dirty="0">
@@ -13805,15 +13798,14 @@
             </a:r>
           </a:p>
           <a:p>
-            <a:pPr marL="274320" indent="-274320" algn="l">
+            <a:pPr marL="0" indent="0" algn="ctr">
               <a:lnSpc>
                 <a:spcPct val="104000"/>
               </a:lnSpc>
               <a:spcBef>
                 <a:spcPts val="300"/>
               </a:spcBef>
-              <a:buFont typeface="Arial"/>
-              <a:buChar char="•"/>
+              <a:buNone/>
             </a:pPr>
             <a:r>
               <a:rPr lang="en-US" sz="1500" dirty="0">
@@ -14553,12 +14545,12 @@
           </a:ln>
         </p:spPr>
         <p:txBody>
-          <a:bodyPr wrap="square" lIns="137160" tIns="91440" rIns="137160" bIns="91440" rtlCol="0" anchor="t">
+          <a:bodyPr wrap="square" lIns="137160" tIns="91440" rIns="137160" bIns="91440" rtlCol="0" anchor="ctr">
             <a:normAutofit/>
           </a:bodyPr>
           <a:lstStyle/>
           <a:p>
-            <a:pPr marL="0" indent="0" algn="l">
+            <a:pPr marL="0" indent="0" algn="ctr">
               <a:buNone/>
             </a:pPr>
             <a:r>
@@ -14573,15 +14565,14 @@
             </a:r>
           </a:p>
           <a:p>
-            <a:pPr marL="274320" indent="-274320" algn="l">
+            <a:pPr marL="0" indent="0" algn="ctr">
               <a:lnSpc>
                 <a:spcPct val="104000"/>
               </a:lnSpc>
               <a:spcBef>
                 <a:spcPts val="300"/>
               </a:spcBef>
-              <a:buFont typeface="Arial"/>
-              <a:buChar char="•"/>
+              <a:buNone/>
             </a:pPr>
             <a:r>
               <a:rPr lang="en-US" sz="1500" dirty="0">
@@ -14595,15 +14586,14 @@
             </a:r>
           </a:p>
           <a:p>
-            <a:pPr marL="274320" indent="-274320" algn="l">
+            <a:pPr marL="0" indent="0" algn="ctr">
               <a:lnSpc>
                 <a:spcPct val="104000"/>
               </a:lnSpc>
               <a:spcBef>
                 <a:spcPts val="300"/>
               </a:spcBef>
-              <a:buFont typeface="Arial"/>
-              <a:buChar char="•"/>
+              <a:buNone/>
             </a:pPr>
             <a:r>
               <a:rPr lang="en-US" sz="1500" dirty="0">
@@ -14617,15 +14607,14 @@
             </a:r>
           </a:p>
           <a:p>
-            <a:pPr marL="274320" indent="-274320" algn="l">
+            <a:pPr marL="0" indent="0" algn="ctr">
               <a:lnSpc>
                 <a:spcPct val="104000"/>
               </a:lnSpc>
               <a:spcBef>
                 <a:spcPts val="300"/>
               </a:spcBef>
-              <a:buFont typeface="Arial"/>
-              <a:buChar char="•"/>
+              <a:buNone/>
             </a:pPr>
             <a:r>
               <a:rPr lang="en-US" sz="1500" dirty="0">
@@ -14639,15 +14628,14 @@
             </a:r>
           </a:p>
           <a:p>
-            <a:pPr marL="274320" indent="-274320" algn="l">
+            <a:pPr marL="0" indent="0" algn="ctr">
               <a:lnSpc>
                 <a:spcPct val="104000"/>
               </a:lnSpc>
               <a:spcBef>
                 <a:spcPts val="300"/>
               </a:spcBef>
-              <a:buFont typeface="Arial"/>
-              <a:buChar char="•"/>
+              <a:buNone/>
             </a:pPr>
             <a:r>
               <a:rPr lang="en-US" sz="1500" dirty="0">
@@ -15893,12 +15881,12 @@
           </a:ln>
         </p:spPr>
         <p:txBody>
-          <a:bodyPr wrap="square" lIns="110000" tIns="91440" rIns="110000" bIns="91440" rtlCol="0" anchor="t">
+          <a:bodyPr wrap="square" lIns="110000" tIns="91440" rIns="110000" bIns="91440" rtlCol="0" anchor="ctr">
             <a:normAutofit/>
           </a:bodyPr>
           <a:lstStyle/>
           <a:p>
-            <a:pPr marL="0" indent="0" algn="l">
+            <a:pPr marL="0" indent="0" algn="ctr">
               <a:lnSpc>
                 <a:spcPct val="104000"/>
               </a:lnSpc>
@@ -15919,7 +15907,7 @@
             </a:r>
           </a:p>
           <a:p>
-            <a:pPr marL="0" indent="0" algn="l">
+            <a:pPr marL="0" indent="0" algn="ctr">
               <a:lnSpc>
                 <a:spcPct val="104000"/>
               </a:lnSpc>
@@ -16008,12 +15996,12 @@
           </a:ln>
         </p:spPr>
         <p:txBody>
-          <a:bodyPr wrap="square" lIns="110000" tIns="91440" rIns="110000" bIns="91440" rtlCol="0" anchor="t">
+          <a:bodyPr wrap="square" lIns="110000" tIns="91440" rIns="110000" bIns="91440" rtlCol="0" anchor="ctr">
             <a:normAutofit/>
           </a:bodyPr>
           <a:lstStyle/>
           <a:p>
-            <a:pPr marL="0" indent="0" algn="l">
+            <a:pPr marL="0" indent="0" algn="ctr">
               <a:lnSpc>
                 <a:spcPct val="104000"/>
               </a:lnSpc>
@@ -16034,7 +16022,7 @@
             </a:r>
           </a:p>
           <a:p>
-            <a:pPr marL="0" indent="0" algn="l">
+            <a:pPr marL="0" indent="0" algn="ctr">
               <a:lnSpc>
                 <a:spcPct val="104000"/>
               </a:lnSpc>
@@ -16123,12 +16111,12 @@
           </a:ln>
         </p:spPr>
         <p:txBody>
-          <a:bodyPr wrap="square" lIns="110000" tIns="91440" rIns="110000" bIns="91440" rtlCol="0" anchor="t">
+          <a:bodyPr wrap="square" lIns="110000" tIns="91440" rIns="110000" bIns="91440" rtlCol="0" anchor="ctr">
             <a:normAutofit/>
           </a:bodyPr>
           <a:lstStyle/>
           <a:p>
-            <a:pPr marL="0" indent="0" algn="l">
+            <a:pPr marL="0" indent="0" algn="ctr">
               <a:lnSpc>
                 <a:spcPct val="104000"/>
               </a:lnSpc>
@@ -16149,7 +16137,7 @@
             </a:r>
           </a:p>
           <a:p>
-            <a:pPr marL="0" indent="0" algn="l">
+            <a:pPr marL="0" indent="0" algn="ctr">
               <a:lnSpc>
                 <a:spcPct val="104000"/>
               </a:lnSpc>
@@ -16238,12 +16226,12 @@
           </a:ln>
         </p:spPr>
         <p:txBody>
-          <a:bodyPr wrap="square" lIns="110000" tIns="91440" rIns="110000" bIns="91440" rtlCol="0" anchor="t">
+          <a:bodyPr wrap="square" lIns="110000" tIns="91440" rIns="110000" bIns="91440" rtlCol="0" anchor="ctr">
             <a:normAutofit/>
           </a:bodyPr>
           <a:lstStyle/>
           <a:p>
-            <a:pPr marL="0" indent="0" algn="l">
+            <a:pPr marL="0" indent="0" algn="ctr">
               <a:lnSpc>
                 <a:spcPct val="104000"/>
               </a:lnSpc>
@@ -16332,12 +16320,12 @@
           </a:ln>
         </p:spPr>
         <p:txBody>
-          <a:bodyPr wrap="square" lIns="110000" tIns="91440" rIns="110000" bIns="91440" rtlCol="0" anchor="t">
+          <a:bodyPr wrap="square" lIns="110000" tIns="91440" rIns="110000" bIns="91440" rtlCol="0" anchor="ctr">
             <a:normAutofit/>
           </a:bodyPr>
           <a:lstStyle/>
           <a:p>
-            <a:pPr marL="0" indent="0" algn="l">
+            <a:pPr marL="0" indent="0" algn="ctr">
               <a:lnSpc>
                 <a:spcPct val="104000"/>
               </a:lnSpc>
@@ -16801,12 +16789,12 @@
           </a:ln>
         </p:spPr>
         <p:txBody>
-          <a:bodyPr wrap="square" lIns="137160" tIns="91440" rIns="137160" bIns="91440" rtlCol="0" anchor="t">
+          <a:bodyPr wrap="square" lIns="137160" tIns="91440" rIns="137160" bIns="91440" rtlCol="0" anchor="ctr">
             <a:normAutofit/>
           </a:bodyPr>
           <a:lstStyle/>
           <a:p>
-            <a:pPr marL="0" indent="0" algn="l">
+            <a:pPr marL="0" indent="0" algn="ctr">
               <a:buNone/>
             </a:pPr>
             <a:r>
@@ -16821,15 +16809,14 @@
             </a:r>
           </a:p>
           <a:p>
-            <a:pPr marL="274320" indent="-274320" algn="l">
+            <a:pPr marL="0" indent="0" algn="ctr">
               <a:lnSpc>
                 <a:spcPct val="104000"/>
               </a:lnSpc>
               <a:spcBef>
                 <a:spcPts val="300"/>
               </a:spcBef>
-              <a:buFont typeface="Arial"/>
-              <a:buChar char="•"/>
+              <a:buNone/>
             </a:pPr>
             <a:r>
               <a:rPr lang="en-US" sz="1500" dirty="0">
@@ -16843,15 +16830,14 @@
             </a:r>
           </a:p>
           <a:p>
-            <a:pPr marL="274320" indent="-274320" algn="l">
+            <a:pPr marL="0" indent="0" algn="ctr">
               <a:lnSpc>
                 <a:spcPct val="104000"/>
               </a:lnSpc>
               <a:spcBef>
                 <a:spcPts val="300"/>
               </a:spcBef>
-              <a:buFont typeface="Arial"/>
-              <a:buChar char="•"/>
+              <a:buNone/>
             </a:pPr>
             <a:r>
               <a:rPr lang="en-US" sz="1500" dirty="0">
@@ -16865,15 +16851,14 @@
             </a:r>
           </a:p>
           <a:p>
-            <a:pPr marL="274320" indent="-274320" algn="l">
+            <a:pPr marL="0" indent="0" algn="ctr">
               <a:lnSpc>
                 <a:spcPct val="104000"/>
               </a:lnSpc>
               <a:spcBef>
                 <a:spcPts val="300"/>
               </a:spcBef>
-              <a:buFont typeface="Arial"/>
-              <a:buChar char="•"/>
+              <a:buNone/>
             </a:pPr>
             <a:r>
               <a:rPr lang="en-US" sz="1500" dirty="0">
@@ -17357,12 +17342,12 @@
           </a:ln>
         </p:spPr>
         <p:txBody>
-          <a:bodyPr wrap="square" lIns="137160" tIns="91440" rIns="137160" bIns="91440" rtlCol="0" anchor="t">
+          <a:bodyPr wrap="square" lIns="137160" tIns="91440" rIns="137160" bIns="91440" rtlCol="0" anchor="ctr">
             <a:normAutofit/>
           </a:bodyPr>
           <a:lstStyle/>
           <a:p>
-            <a:pPr marL="0" indent="0" algn="l">
+            <a:pPr marL="0" indent="0" algn="ctr">
               <a:buNone/>
             </a:pPr>
             <a:r>
@@ -17377,15 +17362,14 @@
             </a:r>
           </a:p>
           <a:p>
-            <a:pPr marL="274320" indent="-274320" algn="l">
+            <a:pPr marL="0" indent="0" algn="ctr">
               <a:lnSpc>
                 <a:spcPct val="104000"/>
               </a:lnSpc>
               <a:spcBef>
                 <a:spcPts val="300"/>
               </a:spcBef>
-              <a:buFont typeface="Arial"/>
-              <a:buChar char="•"/>
+              <a:buNone/>
             </a:pPr>
             <a:r>
               <a:rPr lang="en-US" sz="1500" dirty="0">
@@ -17399,15 +17383,14 @@
             </a:r>
           </a:p>
           <a:p>
-            <a:pPr marL="274320" indent="-274320" algn="l">
+            <a:pPr marL="0" indent="0" algn="ctr">
               <a:lnSpc>
                 <a:spcPct val="104000"/>
               </a:lnSpc>
               <a:spcBef>
                 <a:spcPts val="300"/>
               </a:spcBef>
-              <a:buFont typeface="Arial"/>
-              <a:buChar char="•"/>
+              <a:buNone/>
             </a:pPr>
             <a:r>
               <a:rPr lang="en-US" sz="1500" dirty="0">
@@ -17421,15 +17404,14 @@
             </a:r>
           </a:p>
           <a:p>
-            <a:pPr marL="274320" indent="-274320" algn="l">
+            <a:pPr marL="0" indent="0" algn="ctr">
               <a:lnSpc>
                 <a:spcPct val="104000"/>
               </a:lnSpc>
               <a:spcBef>
                 <a:spcPts val="300"/>
               </a:spcBef>
-              <a:buFont typeface="Arial"/>
-              <a:buChar char="•"/>
+              <a:buNone/>
             </a:pPr>
             <a:r>
               <a:rPr lang="en-US" sz="1500" dirty="0">
@@ -17443,15 +17425,14 @@
             </a:r>
           </a:p>
           <a:p>
-            <a:pPr marL="274320" indent="-274320" algn="l">
+            <a:pPr marL="0" indent="0" algn="ctr">
               <a:lnSpc>
                 <a:spcPct val="104000"/>
               </a:lnSpc>
               <a:spcBef>
                 <a:spcPts val="300"/>
               </a:spcBef>
-              <a:buFont typeface="Arial"/>
-              <a:buChar char="•"/>
+              <a:buNone/>
             </a:pPr>
             <a:r>
               <a:rPr lang="en-US" sz="1500" dirty="0">
@@ -21447,12 +21428,12 @@
           </a:ln>
         </p:spPr>
         <p:txBody>
-          <a:bodyPr wrap="square" lIns="137160" tIns="91440" rIns="137160" bIns="91440" rtlCol="0" anchor="t">
+          <a:bodyPr wrap="square" lIns="137160" tIns="91440" rIns="137160" bIns="91440" rtlCol="0" anchor="ctr">
             <a:normAutofit/>
           </a:bodyPr>
           <a:lstStyle/>
           <a:p>
-            <a:pPr marL="0" indent="0" algn="l">
+            <a:pPr marL="0" indent="0" algn="ctr">
               <a:buNone/>
             </a:pPr>
             <a:r>
@@ -21467,15 +21448,14 @@
             </a:r>
           </a:p>
           <a:p>
-            <a:pPr marL="274320" indent="-274320" algn="l">
+            <a:pPr marL="0" indent="0" algn="ctr">
               <a:lnSpc>
                 <a:spcPct val="104000"/>
               </a:lnSpc>
               <a:spcBef>
                 <a:spcPts val="300"/>
               </a:spcBef>
-              <a:buFont typeface="Arial"/>
-              <a:buChar char="•"/>
+              <a:buNone/>
             </a:pPr>
             <a:r>
               <a:rPr lang="en-US" sz="1500" dirty="0">
@@ -21489,15 +21469,14 @@
             </a:r>
           </a:p>
           <a:p>
-            <a:pPr marL="274320" indent="-274320" algn="l">
+            <a:pPr marL="0" indent="0" algn="ctr">
               <a:lnSpc>
                 <a:spcPct val="104000"/>
               </a:lnSpc>
               <a:spcBef>
                 <a:spcPts val="300"/>
               </a:spcBef>
-              <a:buFont typeface="Arial"/>
-              <a:buChar char="•"/>
+              <a:buNone/>
             </a:pPr>
             <a:r>
               <a:rPr lang="en-US" sz="1500" dirty="0">
@@ -21511,15 +21490,14 @@
             </a:r>
           </a:p>
           <a:p>
-            <a:pPr marL="274320" indent="-274320" algn="l">
+            <a:pPr marL="0" indent="0" algn="ctr">
               <a:lnSpc>
                 <a:spcPct val="104000"/>
               </a:lnSpc>
               <a:spcBef>
                 <a:spcPts val="300"/>
               </a:spcBef>
-              <a:buFont typeface="Arial"/>
-              <a:buChar char="•"/>
+              <a:buNone/>
             </a:pPr>
             <a:r>
               <a:rPr lang="en-US" sz="1500" dirty="0">
@@ -21533,15 +21511,14 @@
             </a:r>
           </a:p>
           <a:p>
-            <a:pPr marL="274320" indent="-274320" algn="l">
+            <a:pPr marL="0" indent="0" algn="ctr">
               <a:lnSpc>
                 <a:spcPct val="104000"/>
               </a:lnSpc>
               <a:spcBef>
                 <a:spcPts val="300"/>
               </a:spcBef>
-              <a:buFont typeface="Arial"/>
-              <a:buChar char="•"/>
+              <a:buNone/>
             </a:pPr>
             <a:r>
               <a:rPr lang="en-US" sz="1500" dirty="0">
@@ -21776,7 +21753,7 @@
                 <a:latin typeface="Arial"/>
                 <a:cs typeface="Arial"/>
               </a:rPr>
-              <a:t>6.1 Từ mẫu đến quần thể, không sợ hãi</a:t>
+              <a:t>6.1 Từ mẫu đến quần thể</a:t>
             </a:r>
           </a:p>
         </p:txBody>
@@ -23367,12 +23344,12 @@
           </a:ln>
         </p:spPr>
         <p:txBody>
-          <a:bodyPr wrap="square" lIns="110000" tIns="91440" rIns="110000" bIns="91440" rtlCol="0" anchor="t">
+          <a:bodyPr wrap="square" lIns="110000" tIns="91440" rIns="110000" bIns="91440" rtlCol="0" anchor="ctr">
             <a:normAutofit/>
           </a:bodyPr>
           <a:lstStyle/>
           <a:p>
-            <a:pPr marL="0" indent="0" algn="l">
+            <a:pPr marL="0" indent="0" algn="ctr">
               <a:lnSpc>
                 <a:spcPct val="104000"/>
               </a:lnSpc>
@@ -23393,7 +23370,7 @@
             </a:r>
           </a:p>
           <a:p>
-            <a:pPr marL="0" indent="0" algn="l">
+            <a:pPr marL="0" indent="0" algn="ctr">
               <a:lnSpc>
                 <a:spcPct val="104000"/>
               </a:lnSpc>
@@ -23482,12 +23459,12 @@
           </a:ln>
         </p:spPr>
         <p:txBody>
-          <a:bodyPr wrap="square" lIns="110000" tIns="91440" rIns="110000" bIns="91440" rtlCol="0" anchor="t">
+          <a:bodyPr wrap="square" lIns="110000" tIns="91440" rIns="110000" bIns="91440" rtlCol="0" anchor="ctr">
             <a:normAutofit/>
           </a:bodyPr>
           <a:lstStyle/>
           <a:p>
-            <a:pPr marL="0" indent="0" algn="l">
+            <a:pPr marL="0" indent="0" algn="ctr">
               <a:lnSpc>
                 <a:spcPct val="104000"/>
               </a:lnSpc>
@@ -23508,7 +23485,7 @@
             </a:r>
           </a:p>
           <a:p>
-            <a:pPr marL="0" indent="0" algn="l">
+            <a:pPr marL="0" indent="0" algn="ctr">
               <a:lnSpc>
                 <a:spcPct val="104000"/>
               </a:lnSpc>
@@ -23529,7 +23506,7 @@
             </a:r>
           </a:p>
           <a:p>
-            <a:pPr marL="0" indent="0" algn="l">
+            <a:pPr marL="0" indent="0" algn="ctr">
               <a:lnSpc>
                 <a:spcPct val="104000"/>
               </a:lnSpc>
@@ -23618,12 +23595,12 @@
           </a:ln>
         </p:spPr>
         <p:txBody>
-          <a:bodyPr wrap="square" lIns="110000" tIns="91440" rIns="110000" bIns="91440" rtlCol="0" anchor="t">
+          <a:bodyPr wrap="square" lIns="110000" tIns="91440" rIns="110000" bIns="91440" rtlCol="0" anchor="ctr">
             <a:normAutofit/>
           </a:bodyPr>
           <a:lstStyle/>
           <a:p>
-            <a:pPr marL="0" indent="0" algn="l">
+            <a:pPr marL="0" indent="0" algn="ctr">
               <a:lnSpc>
                 <a:spcPct val="104000"/>
               </a:lnSpc>
@@ -23644,7 +23621,7 @@
             </a:r>
           </a:p>
           <a:p>
-            <a:pPr marL="0" indent="0" algn="l">
+            <a:pPr marL="0" indent="0" algn="ctr">
               <a:lnSpc>
                 <a:spcPct val="104000"/>
               </a:lnSpc>
@@ -23733,12 +23710,12 @@
           </a:ln>
         </p:spPr>
         <p:txBody>
-          <a:bodyPr wrap="square" lIns="110000" tIns="91440" rIns="110000" bIns="91440" rtlCol="0" anchor="t">
+          <a:bodyPr wrap="square" lIns="110000" tIns="91440" rIns="110000" bIns="91440" rtlCol="0" anchor="ctr">
             <a:normAutofit/>
           </a:bodyPr>
           <a:lstStyle/>
           <a:p>
-            <a:pPr marL="0" indent="0" algn="l">
+            <a:pPr marL="0" indent="0" algn="ctr">
               <a:lnSpc>
                 <a:spcPct val="104000"/>
               </a:lnSpc>
@@ -23827,12 +23804,12 @@
           </a:ln>
         </p:spPr>
         <p:txBody>
-          <a:bodyPr wrap="square" lIns="110000" tIns="91440" rIns="110000" bIns="91440" rtlCol="0" anchor="t">
+          <a:bodyPr wrap="square" lIns="110000" tIns="91440" rIns="110000" bIns="91440" rtlCol="0" anchor="ctr">
             <a:normAutofit/>
           </a:bodyPr>
           <a:lstStyle/>
           <a:p>
-            <a:pPr marL="0" indent="0" algn="l">
+            <a:pPr marL="0" indent="0" algn="ctr">
               <a:lnSpc>
                 <a:spcPct val="104000"/>
               </a:lnSpc>
@@ -23853,7 +23830,7 @@
             </a:r>
           </a:p>
           <a:p>
-            <a:pPr marL="0" indent="0" algn="l">
+            <a:pPr marL="0" indent="0" algn="ctr">
               <a:lnSpc>
                 <a:spcPct val="104000"/>
               </a:lnSpc>
@@ -25055,12 +25032,12 @@
           </a:ln>
         </p:spPr>
         <p:txBody>
-          <a:bodyPr wrap="square" lIns="137160" tIns="91440" rIns="137160" bIns="91440" rtlCol="0" anchor="t">
+          <a:bodyPr wrap="square" lIns="137160" tIns="91440" rIns="137160" bIns="91440" rtlCol="0" anchor="ctr">
             <a:normAutofit/>
           </a:bodyPr>
           <a:lstStyle/>
           <a:p>
-            <a:pPr marL="0" indent="0" algn="l">
+            <a:pPr marL="0" indent="0" algn="ctr">
               <a:lnSpc>
                 <a:spcPct val="104000"/>
               </a:lnSpc>
@@ -25081,7 +25058,7 @@
             </a:r>
           </a:p>
           <a:p>
-            <a:pPr marL="0" indent="0" algn="l">
+            <a:pPr marL="0" indent="0" algn="ctr">
               <a:lnSpc>
                 <a:spcPct val="104000"/>
               </a:lnSpc>
@@ -25168,12 +25145,12 @@
           </a:ln>
         </p:spPr>
         <p:txBody>
-          <a:bodyPr wrap="square" lIns="137160" tIns="91440" rIns="137160" bIns="91440" rtlCol="0" anchor="t">
+          <a:bodyPr wrap="square" lIns="137160" tIns="91440" rIns="137160" bIns="91440" rtlCol="0" anchor="ctr">
             <a:normAutofit/>
           </a:bodyPr>
           <a:lstStyle/>
           <a:p>
-            <a:pPr marL="0" indent="0" algn="l">
+            <a:pPr marL="0" indent="0" algn="ctr">
               <a:lnSpc>
                 <a:spcPct val="104000"/>
               </a:lnSpc>
@@ -25194,7 +25171,7 @@
             </a:r>
           </a:p>
           <a:p>
-            <a:pPr marL="0" indent="0" algn="l">
+            <a:pPr marL="0" indent="0" algn="ctr">
               <a:lnSpc>
                 <a:spcPct val="104000"/>
               </a:lnSpc>
@@ -25215,7 +25192,7 @@
             </a:r>
           </a:p>
           <a:p>
-            <a:pPr marL="0" indent="0" algn="l">
+            <a:pPr marL="0" indent="0" algn="ctr">
               <a:lnSpc>
                 <a:spcPct val="104000"/>
               </a:lnSpc>
@@ -25302,12 +25279,12 @@
           </a:ln>
         </p:spPr>
         <p:txBody>
-          <a:bodyPr wrap="square" lIns="137160" tIns="91440" rIns="137160" bIns="91440" rtlCol="0" anchor="t">
+          <a:bodyPr wrap="square" lIns="137160" tIns="91440" rIns="137160" bIns="91440" rtlCol="0" anchor="ctr">
             <a:normAutofit/>
           </a:bodyPr>
           <a:lstStyle/>
           <a:p>
-            <a:pPr marL="0" indent="0" algn="l">
+            <a:pPr marL="0" indent="0" algn="ctr">
               <a:lnSpc>
                 <a:spcPct val="104000"/>
               </a:lnSpc>
@@ -25328,7 +25305,7 @@
             </a:r>
           </a:p>
           <a:p>
-            <a:pPr marL="0" indent="0" algn="l">
+            <a:pPr marL="0" indent="0" algn="ctr">
               <a:lnSpc>
                 <a:spcPct val="104000"/>
               </a:lnSpc>
@@ -25415,12 +25392,12 @@
           </a:ln>
         </p:spPr>
         <p:txBody>
-          <a:bodyPr wrap="square" lIns="137160" tIns="91440" rIns="137160" bIns="91440" rtlCol="0" anchor="t">
+          <a:bodyPr wrap="square" lIns="137160" tIns="91440" rIns="137160" bIns="91440" rtlCol="0" anchor="ctr">
             <a:normAutofit/>
           </a:bodyPr>
           <a:lstStyle/>
           <a:p>
-            <a:pPr marL="0" indent="0" algn="l">
+            <a:pPr marL="0" indent="0" algn="ctr">
               <a:lnSpc>
                 <a:spcPct val="104000"/>
               </a:lnSpc>
@@ -25441,7 +25418,7 @@
             </a:r>
           </a:p>
           <a:p>
-            <a:pPr marL="0" indent="0" algn="l">
+            <a:pPr marL="0" indent="0" algn="ctr">
               <a:lnSpc>
                 <a:spcPct val="104000"/>
               </a:lnSpc>
@@ -25462,7 +25439,7 @@
             </a:r>
           </a:p>
           <a:p>
-            <a:pPr marL="0" indent="0" algn="l">
+            <a:pPr marL="0" indent="0" algn="ctr">
               <a:lnSpc>
                 <a:spcPct val="104000"/>
               </a:lnSpc>
@@ -25534,7 +25511,7 @@
                 <a:latin typeface="Arial"/>
                 <a:cs typeface="Arial"/>
               </a:rPr>
-              <a:t>p = 0.044 và p = 0.053 kể cùng một câu chuyện: hãy đọc ước lượng và KTC.</a:t>
+              <a:t>p = 0.044 và p = 0.053 nói cùng một điều: hãy đọc ước lượng và KTC.</a:t>
             </a:r>
           </a:p>
         </p:txBody>
@@ -25977,7 +25954,7 @@
                 <a:latin typeface="Arial"/>
                 <a:cs typeface="Arial"/>
               </a:rPr>
-              <a:t>Vũ điệu của các khoảng tin cậy</a:t>
+              <a:t>Khoảng tin cậy qua 20 lần lặp lại nghiên cứu</a:t>
             </a:r>
           </a:p>
         </p:txBody>
@@ -26084,7 +26061,7 @@
                 <a:latin typeface="Arial"/>
                 <a:cs typeface="Arial"/>
               </a:rPr>
-              <a:t>Khoảng 95/100 khoảng như vậy chứa giá trị thật. Ta không biết là khoảng nào.</a:t>
+              <a:t>Khoảng 95/100 khoảng như vậy chứa giá trị thật. Không biết được là khoảng nào.</a:t>
             </a:r>
           </a:p>
         </p:txBody>
@@ -27051,12 +27028,12 @@
           </a:ln>
         </p:spPr>
         <p:txBody>
-          <a:bodyPr wrap="square" lIns="137160" tIns="91440" rIns="137160" bIns="91440" rtlCol="0" anchor="t">
+          <a:bodyPr wrap="square" lIns="137160" tIns="91440" rIns="137160" bIns="91440" rtlCol="0" anchor="ctr">
             <a:normAutofit/>
           </a:bodyPr>
           <a:lstStyle/>
           <a:p>
-            <a:pPr marL="0" indent="0" algn="l">
+            <a:pPr marL="0" indent="0" algn="ctr">
               <a:buNone/>
             </a:pPr>
             <a:r>
@@ -27071,15 +27048,14 @@
             </a:r>
           </a:p>
           <a:p>
-            <a:pPr marL="274320" indent="-274320" algn="l">
+            <a:pPr marL="0" indent="0" algn="ctr">
               <a:lnSpc>
                 <a:spcPct val="104000"/>
               </a:lnSpc>
               <a:spcBef>
                 <a:spcPts val="300"/>
               </a:spcBef>
-              <a:buFont typeface="Arial"/>
-              <a:buChar char="•"/>
+              <a:buNone/>
             </a:pPr>
             <a:r>
               <a:rPr lang="en-US" sz="1500" dirty="0">
@@ -27093,15 +27069,14 @@
             </a:r>
           </a:p>
           <a:p>
-            <a:pPr marL="274320" indent="-274320" algn="l">
+            <a:pPr marL="0" indent="0" algn="ctr">
               <a:lnSpc>
                 <a:spcPct val="104000"/>
               </a:lnSpc>
               <a:spcBef>
                 <a:spcPts val="300"/>
               </a:spcBef>
-              <a:buFont typeface="Arial"/>
-              <a:buChar char="•"/>
+              <a:buNone/>
             </a:pPr>
             <a:r>
               <a:rPr lang="en-US" sz="1500" dirty="0">
@@ -27115,15 +27090,14 @@
             </a:r>
           </a:p>
           <a:p>
-            <a:pPr marL="274320" indent="-274320" algn="l">
+            <a:pPr marL="0" indent="0" algn="ctr">
               <a:lnSpc>
                 <a:spcPct val="104000"/>
               </a:lnSpc>
               <a:spcBef>
                 <a:spcPts val="300"/>
               </a:spcBef>
-              <a:buFont typeface="Arial"/>
-              <a:buChar char="•"/>
+              <a:buNone/>
             </a:pPr>
             <a:r>
               <a:rPr lang="en-US" sz="1500" dirty="0">
@@ -27137,15 +27111,14 @@
             </a:r>
           </a:p>
           <a:p>
-            <a:pPr marL="274320" indent="-274320" algn="l">
+            <a:pPr marL="0" indent="0" algn="ctr">
               <a:lnSpc>
                 <a:spcPct val="104000"/>
               </a:lnSpc>
               <a:spcBef>
                 <a:spcPts val="300"/>
               </a:spcBef>
-              <a:buFont typeface="Arial"/>
-              <a:buChar char="•"/>
+              <a:buNone/>
             </a:pPr>
             <a:r>
               <a:rPr lang="en-US" sz="1500" dirty="0">
@@ -27517,12 +27490,12 @@
           </a:ln>
         </p:spPr>
         <p:txBody>
-          <a:bodyPr wrap="square" lIns="137160" tIns="91440" rIns="137160" bIns="91440" rtlCol="0" anchor="t">
+          <a:bodyPr wrap="square" lIns="137160" tIns="91440" rIns="137160" bIns="91440" rtlCol="0" anchor="ctr">
             <a:normAutofit/>
           </a:bodyPr>
           <a:lstStyle/>
           <a:p>
-            <a:pPr marL="0" indent="0" algn="l">
+            <a:pPr marL="0" indent="0" algn="ctr">
               <a:lnSpc>
                 <a:spcPct val="104000"/>
               </a:lnSpc>
@@ -27543,7 +27516,7 @@
             </a:r>
           </a:p>
           <a:p>
-            <a:pPr marL="0" indent="0" algn="l">
+            <a:pPr marL="0" indent="0" algn="ctr">
               <a:lnSpc>
                 <a:spcPct val="104000"/>
               </a:lnSpc>
@@ -27564,7 +27537,7 @@
             </a:r>
           </a:p>
           <a:p>
-            <a:pPr marL="0" indent="0" algn="l">
+            <a:pPr marL="0" indent="0" algn="ctr">
               <a:lnSpc>
                 <a:spcPct val="104000"/>
               </a:lnSpc>
@@ -27651,12 +27624,12 @@
           </a:ln>
         </p:spPr>
         <p:txBody>
-          <a:bodyPr wrap="square" lIns="137160" tIns="91440" rIns="137160" bIns="91440" rtlCol="0" anchor="t">
+          <a:bodyPr wrap="square" lIns="137160" tIns="91440" rIns="137160" bIns="91440" rtlCol="0" anchor="ctr">
             <a:normAutofit/>
           </a:bodyPr>
           <a:lstStyle/>
           <a:p>
-            <a:pPr marL="0" indent="0" algn="l">
+            <a:pPr marL="0" indent="0" algn="ctr">
               <a:lnSpc>
                 <a:spcPct val="104000"/>
               </a:lnSpc>
@@ -27677,7 +27650,7 @@
             </a:r>
           </a:p>
           <a:p>
-            <a:pPr marL="0" indent="0" algn="l">
+            <a:pPr marL="0" indent="0" algn="ctr">
               <a:lnSpc>
                 <a:spcPct val="104000"/>
               </a:lnSpc>
@@ -27698,7 +27671,7 @@
             </a:r>
           </a:p>
           <a:p>
-            <a:pPr marL="0" indent="0" algn="l">
+            <a:pPr marL="0" indent="0" algn="ctr">
               <a:lnSpc>
                 <a:spcPct val="104000"/>
               </a:lnSpc>
@@ -27785,12 +27758,12 @@
           </a:ln>
         </p:spPr>
         <p:txBody>
-          <a:bodyPr wrap="square" lIns="137160" tIns="91440" rIns="137160" bIns="91440" rtlCol="0" anchor="t">
+          <a:bodyPr wrap="square" lIns="137160" tIns="91440" rIns="137160" bIns="91440" rtlCol="0" anchor="ctr">
             <a:normAutofit/>
           </a:bodyPr>
           <a:lstStyle/>
           <a:p>
-            <a:pPr marL="0" indent="0" algn="l">
+            <a:pPr marL="0" indent="0" algn="ctr">
               <a:lnSpc>
                 <a:spcPct val="104000"/>
               </a:lnSpc>
@@ -27811,7 +27784,7 @@
             </a:r>
           </a:p>
           <a:p>
-            <a:pPr marL="0" indent="0" algn="l">
+            <a:pPr marL="0" indent="0" algn="ctr">
               <a:lnSpc>
                 <a:spcPct val="104000"/>
               </a:lnSpc>
@@ -27898,12 +27871,12 @@
           </a:ln>
         </p:spPr>
         <p:txBody>
-          <a:bodyPr wrap="square" lIns="137160" tIns="91440" rIns="137160" bIns="91440" rtlCol="0" anchor="t">
+          <a:bodyPr wrap="square" lIns="137160" tIns="91440" rIns="137160" bIns="91440" rtlCol="0" anchor="ctr">
             <a:normAutofit/>
           </a:bodyPr>
           <a:lstStyle/>
           <a:p>
-            <a:pPr marL="0" indent="0" algn="l">
+            <a:pPr marL="0" indent="0" algn="ctr">
               <a:lnSpc>
                 <a:spcPct val="104000"/>
               </a:lnSpc>
@@ -27924,7 +27897,7 @@
             </a:r>
           </a:p>
           <a:p>
-            <a:pPr marL="0" indent="0" algn="l">
+            <a:pPr marL="0" indent="0" algn="ctr">
               <a:lnSpc>
                 <a:spcPct val="104000"/>
               </a:lnSpc>
@@ -27945,7 +27918,7 @@
             </a:r>
           </a:p>
           <a:p>
-            <a:pPr marL="0" indent="0" algn="l">
+            <a:pPr marL="0" indent="0" algn="ctr">
               <a:lnSpc>
                 <a:spcPct val="104000"/>
               </a:lnSpc>
@@ -28409,12 +28382,12 @@
           </a:ln>
         </p:spPr>
         <p:txBody>
-          <a:bodyPr wrap="square" lIns="137160" tIns="91440" rIns="137160" bIns="91440" rtlCol="0" anchor="t">
+          <a:bodyPr wrap="square" lIns="137160" tIns="91440" rIns="137160" bIns="91440" rtlCol="0" anchor="ctr">
             <a:normAutofit/>
           </a:bodyPr>
           <a:lstStyle/>
           <a:p>
-            <a:pPr marL="0" indent="0" algn="l">
+            <a:pPr marL="0" indent="0" algn="ctr">
               <a:buNone/>
             </a:pPr>
             <a:r>
@@ -28429,15 +28402,14 @@
             </a:r>
           </a:p>
           <a:p>
-            <a:pPr marL="274320" indent="-274320" algn="l">
+            <a:pPr marL="0" indent="0" algn="ctr">
               <a:lnSpc>
                 <a:spcPct val="104000"/>
               </a:lnSpc>
               <a:spcBef>
                 <a:spcPts val="300"/>
               </a:spcBef>
-              <a:buFont typeface="Arial"/>
-              <a:buChar char="•"/>
+              <a:buNone/>
             </a:pPr>
             <a:r>
               <a:rPr lang="en-US" sz="1500" dirty="0">
@@ -28451,15 +28423,14 @@
             </a:r>
           </a:p>
           <a:p>
-            <a:pPr marL="274320" indent="-274320" algn="l">
+            <a:pPr marL="0" indent="0" algn="ctr">
               <a:lnSpc>
                 <a:spcPct val="104000"/>
               </a:lnSpc>
               <a:spcBef>
                 <a:spcPts val="300"/>
               </a:spcBef>
-              <a:buFont typeface="Arial"/>
-              <a:buChar char="•"/>
+              <a:buNone/>
             </a:pPr>
             <a:r>
               <a:rPr lang="en-US" sz="1500" dirty="0">
@@ -28473,15 +28444,14 @@
             </a:r>
           </a:p>
           <a:p>
-            <a:pPr marL="274320" indent="-274320" algn="l">
+            <a:pPr marL="0" indent="0" algn="ctr">
               <a:lnSpc>
                 <a:spcPct val="104000"/>
               </a:lnSpc>
               <a:spcBef>
                 <a:spcPts val="300"/>
               </a:spcBef>
-              <a:buFont typeface="Arial"/>
-              <a:buChar char="•"/>
+              <a:buNone/>
             </a:pPr>
             <a:r>
               <a:rPr lang="en-US" sz="1500" dirty="0">
@@ -28495,15 +28465,14 @@
             </a:r>
           </a:p>
           <a:p>
-            <a:pPr marL="274320" indent="-274320" algn="l">
+            <a:pPr marL="0" indent="0" algn="ctr">
               <a:lnSpc>
                 <a:spcPct val="104000"/>
               </a:lnSpc>
               <a:spcBef>
                 <a:spcPts val="300"/>
               </a:spcBef>
-              <a:buFont typeface="Arial"/>
-              <a:buChar char="•"/>
+              <a:buNone/>
             </a:pPr>
             <a:r>
               <a:rPr lang="en-US" sz="1500" dirty="0">
@@ -28875,12 +28844,12 @@
           </a:ln>
         </p:spPr>
         <p:txBody>
-          <a:bodyPr wrap="square" lIns="137160" tIns="91440" rIns="137160" bIns="91440" rtlCol="0" anchor="t">
+          <a:bodyPr wrap="square" lIns="137160" tIns="91440" rIns="137160" bIns="91440" rtlCol="0" anchor="ctr">
             <a:normAutofit/>
           </a:bodyPr>
           <a:lstStyle/>
           <a:p>
-            <a:pPr marL="0" indent="0" algn="l">
+            <a:pPr marL="0" indent="0" algn="ctr">
               <a:lnSpc>
                 <a:spcPct val="104000"/>
               </a:lnSpc>
@@ -28901,7 +28870,7 @@
             </a:r>
           </a:p>
           <a:p>
-            <a:pPr marL="0" indent="0" algn="l">
+            <a:pPr marL="0" indent="0" algn="ctr">
               <a:lnSpc>
                 <a:spcPct val="104000"/>
               </a:lnSpc>
@@ -28922,7 +28891,7 @@
             </a:r>
           </a:p>
           <a:p>
-            <a:pPr marL="0" indent="0" algn="l">
+            <a:pPr marL="0" indent="0" algn="ctr">
               <a:lnSpc>
                 <a:spcPct val="104000"/>
               </a:lnSpc>
@@ -29009,12 +28978,12 @@
           </a:ln>
         </p:spPr>
         <p:txBody>
-          <a:bodyPr wrap="square" lIns="137160" tIns="91440" rIns="137160" bIns="91440" rtlCol="0" anchor="t">
+          <a:bodyPr wrap="square" lIns="137160" tIns="91440" rIns="137160" bIns="91440" rtlCol="0" anchor="ctr">
             <a:normAutofit/>
           </a:bodyPr>
           <a:lstStyle/>
           <a:p>
-            <a:pPr marL="0" indent="0" algn="l">
+            <a:pPr marL="0" indent="0" algn="ctr">
               <a:lnSpc>
                 <a:spcPct val="104000"/>
               </a:lnSpc>
@@ -29035,7 +29004,7 @@
             </a:r>
           </a:p>
           <a:p>
-            <a:pPr marL="0" indent="0" algn="l">
+            <a:pPr marL="0" indent="0" algn="ctr">
               <a:lnSpc>
                 <a:spcPct val="104000"/>
               </a:lnSpc>
@@ -29056,7 +29025,7 @@
             </a:r>
           </a:p>
           <a:p>
-            <a:pPr marL="0" indent="0" algn="l">
+            <a:pPr marL="0" indent="0" algn="ctr">
               <a:lnSpc>
                 <a:spcPct val="104000"/>
               </a:lnSpc>
@@ -29143,12 +29112,12 @@
           </a:ln>
         </p:spPr>
         <p:txBody>
-          <a:bodyPr wrap="square" lIns="137160" tIns="91440" rIns="137160" bIns="91440" rtlCol="0" anchor="t">
+          <a:bodyPr wrap="square" lIns="137160" tIns="91440" rIns="137160" bIns="91440" rtlCol="0" anchor="ctr">
             <a:normAutofit/>
           </a:bodyPr>
           <a:lstStyle/>
           <a:p>
-            <a:pPr marL="0" indent="0" algn="l">
+            <a:pPr marL="0" indent="0" algn="ctr">
               <a:lnSpc>
                 <a:spcPct val="104000"/>
               </a:lnSpc>
@@ -29169,7 +29138,7 @@
             </a:r>
           </a:p>
           <a:p>
-            <a:pPr marL="0" indent="0" algn="l">
+            <a:pPr marL="0" indent="0" algn="ctr">
               <a:lnSpc>
                 <a:spcPct val="104000"/>
               </a:lnSpc>
@@ -29190,7 +29159,7 @@
             </a:r>
           </a:p>
           <a:p>
-            <a:pPr marL="0" indent="0" algn="l">
+            <a:pPr marL="0" indent="0" algn="ctr">
               <a:lnSpc>
                 <a:spcPct val="104000"/>
               </a:lnSpc>
@@ -29277,12 +29246,12 @@
           </a:ln>
         </p:spPr>
         <p:txBody>
-          <a:bodyPr wrap="square" lIns="137160" tIns="91440" rIns="137160" bIns="91440" rtlCol="0" anchor="t">
+          <a:bodyPr wrap="square" lIns="137160" tIns="91440" rIns="137160" bIns="91440" rtlCol="0" anchor="ctr">
             <a:normAutofit/>
           </a:bodyPr>
           <a:lstStyle/>
           <a:p>
-            <a:pPr marL="0" indent="0" algn="l">
+            <a:pPr marL="0" indent="0" algn="ctr">
               <a:lnSpc>
                 <a:spcPct val="104000"/>
               </a:lnSpc>
@@ -29303,7 +29272,7 @@
             </a:r>
           </a:p>
           <a:p>
-            <a:pPr marL="0" indent="0" algn="l">
+            <a:pPr marL="0" indent="0" algn="ctr">
               <a:lnSpc>
                 <a:spcPct val="104000"/>
               </a:lnSpc>
@@ -29324,7 +29293,7 @@
             </a:r>
           </a:p>
           <a:p>
-            <a:pPr marL="0" indent="0" algn="l">
+            <a:pPr marL="0" indent="0" algn="ctr">
               <a:lnSpc>
                 <a:spcPct val="104000"/>
               </a:lnSpc>
@@ -29701,12 +29670,12 @@
           </a:ln>
         </p:spPr>
         <p:txBody>
-          <a:bodyPr wrap="square" lIns="137160" tIns="91440" rIns="137160" bIns="91440" rtlCol="0" anchor="t">
+          <a:bodyPr wrap="square" lIns="137160" tIns="91440" rIns="137160" bIns="91440" rtlCol="0" anchor="ctr">
             <a:normAutofit/>
           </a:bodyPr>
           <a:lstStyle/>
           <a:p>
-            <a:pPr marL="0" indent="0" algn="l">
+            <a:pPr marL="0" indent="0" algn="ctr">
               <a:lnSpc>
                 <a:spcPct val="104000"/>
               </a:lnSpc>
@@ -29727,7 +29696,7 @@
             </a:r>
           </a:p>
           <a:p>
-            <a:pPr marL="0" indent="0" algn="l">
+            <a:pPr marL="0" indent="0" algn="ctr">
               <a:lnSpc>
                 <a:spcPct val="104000"/>
               </a:lnSpc>
@@ -29748,7 +29717,7 @@
             </a:r>
           </a:p>
           <a:p>
-            <a:pPr marL="0" indent="0" algn="l">
+            <a:pPr marL="0" indent="0" algn="ctr">
               <a:lnSpc>
                 <a:spcPct val="104000"/>
               </a:lnSpc>
@@ -29765,7 +29734,7 @@
                 <a:latin typeface="Arial"/>
                 <a:cs typeface="Arial"/>
               </a:rPr>
-              <a:t>p chỉ là vai phụ</a:t>
+              <a:t>p chỉ là thông tin phụ</a:t>
             </a:r>
           </a:p>
         </p:txBody>
@@ -29835,12 +29804,12 @@
           </a:ln>
         </p:spPr>
         <p:txBody>
-          <a:bodyPr wrap="square" lIns="137160" tIns="91440" rIns="137160" bIns="91440" rtlCol="0" anchor="t">
+          <a:bodyPr wrap="square" lIns="137160" tIns="91440" rIns="137160" bIns="91440" rtlCol="0" anchor="ctr">
             <a:normAutofit/>
           </a:bodyPr>
           <a:lstStyle/>
           <a:p>
-            <a:pPr marL="0" indent="0" algn="l">
+            <a:pPr marL="0" indent="0" algn="ctr">
               <a:lnSpc>
                 <a:spcPct val="104000"/>
               </a:lnSpc>
@@ -29861,7 +29830,7 @@
             </a:r>
           </a:p>
           <a:p>
-            <a:pPr marL="0" indent="0" algn="l">
+            <a:pPr marL="0" indent="0" algn="ctr">
               <a:lnSpc>
                 <a:spcPct val="104000"/>
               </a:lnSpc>
@@ -29948,12 +29917,12 @@
           </a:ln>
         </p:spPr>
         <p:txBody>
-          <a:bodyPr wrap="square" lIns="137160" tIns="91440" rIns="137160" bIns="91440" rtlCol="0" anchor="t">
+          <a:bodyPr wrap="square" lIns="137160" tIns="91440" rIns="137160" bIns="91440" rtlCol="0" anchor="ctr">
             <a:normAutofit/>
           </a:bodyPr>
           <a:lstStyle/>
           <a:p>
-            <a:pPr marL="0" indent="0" algn="l">
+            <a:pPr marL="0" indent="0" algn="ctr">
               <a:lnSpc>
                 <a:spcPct val="104000"/>
               </a:lnSpc>
@@ -29974,7 +29943,7 @@
             </a:r>
           </a:p>
           <a:p>
-            <a:pPr marL="0" indent="0" algn="l">
+            <a:pPr marL="0" indent="0" algn="ctr">
               <a:lnSpc>
                 <a:spcPct val="104000"/>
               </a:lnSpc>
@@ -29995,7 +29964,7 @@
             </a:r>
           </a:p>
           <a:p>
-            <a:pPr marL="0" indent="0" algn="l">
+            <a:pPr marL="0" indent="0" algn="ctr">
               <a:lnSpc>
                 <a:spcPct val="104000"/>
               </a:lnSpc>
@@ -30459,12 +30428,12 @@
           </a:ln>
         </p:spPr>
         <p:txBody>
-          <a:bodyPr wrap="square" lIns="137160" tIns="91440" rIns="137160" bIns="91440" rtlCol="0" anchor="t">
+          <a:bodyPr wrap="square" lIns="137160" tIns="91440" rIns="137160" bIns="91440" rtlCol="0" anchor="ctr">
             <a:normAutofit/>
           </a:bodyPr>
           <a:lstStyle/>
           <a:p>
-            <a:pPr marL="0" indent="0" algn="l">
+            <a:pPr marL="0" indent="0" algn="ctr">
               <a:buNone/>
             </a:pPr>
             <a:r>
@@ -30479,15 +30448,14 @@
             </a:r>
           </a:p>
           <a:p>
-            <a:pPr marL="274320" indent="-274320" algn="l">
+            <a:pPr marL="0" indent="0" algn="ctr">
               <a:lnSpc>
                 <a:spcPct val="104000"/>
               </a:lnSpc>
               <a:spcBef>
                 <a:spcPts val="300"/>
               </a:spcBef>
-              <a:buFont typeface="Arial"/>
-              <a:buChar char="•"/>
+              <a:buNone/>
             </a:pPr>
             <a:r>
               <a:rPr lang="en-US" sz="1500" dirty="0">
@@ -30501,15 +30469,14 @@
             </a:r>
           </a:p>
           <a:p>
-            <a:pPr marL="274320" indent="-274320" algn="l">
+            <a:pPr marL="0" indent="0" algn="ctr">
               <a:lnSpc>
                 <a:spcPct val="104000"/>
               </a:lnSpc>
               <a:spcBef>
                 <a:spcPts val="300"/>
               </a:spcBef>
-              <a:buFont typeface="Arial"/>
-              <a:buChar char="•"/>
+              <a:buNone/>
             </a:pPr>
             <a:r>
               <a:rPr lang="en-US" sz="1500" dirty="0">
@@ -30523,15 +30490,14 @@
             </a:r>
           </a:p>
           <a:p>
-            <a:pPr marL="274320" indent="-274320" algn="l">
+            <a:pPr marL="0" indent="0" algn="ctr">
               <a:lnSpc>
                 <a:spcPct val="104000"/>
               </a:lnSpc>
               <a:spcBef>
                 <a:spcPts val="300"/>
               </a:spcBef>
-              <a:buFont typeface="Arial"/>
-              <a:buChar char="•"/>
+              <a:buNone/>
             </a:pPr>
             <a:r>
               <a:rPr lang="en-US" sz="1500" dirty="0">
@@ -30545,15 +30511,14 @@
             </a:r>
           </a:p>
           <a:p>
-            <a:pPr marL="274320" indent="-274320" algn="l">
+            <a:pPr marL="0" indent="0" algn="ctr">
               <a:lnSpc>
                 <a:spcPct val="104000"/>
               </a:lnSpc>
               <a:spcBef>
                 <a:spcPts val="300"/>
               </a:spcBef>
-              <a:buFont typeface="Arial"/>
-              <a:buChar char="•"/>
+              <a:buNone/>
             </a:pPr>
             <a:r>
               <a:rPr lang="en-US" sz="1500" dirty="0">
@@ -30567,15 +30532,14 @@
             </a:r>
           </a:p>
           <a:p>
-            <a:pPr marL="274320" indent="-274320" algn="l">
+            <a:pPr marL="0" indent="0" algn="ctr">
               <a:lnSpc>
                 <a:spcPct val="104000"/>
               </a:lnSpc>
               <a:spcBef>
                 <a:spcPts val="300"/>
               </a:spcBef>
-              <a:buFont typeface="Arial"/>
-              <a:buChar char="•"/>
+              <a:buNone/>
             </a:pPr>
             <a:r>
               <a:rPr lang="en-US" sz="1500" dirty="0">
@@ -30642,7 +30606,7 @@
                 <a:latin typeface="Arial"/>
                 <a:cs typeface="Arial"/>
               </a:rPr>
-              <a:t>Câu trả lời trong khung chat (hoặc biểu mẫu một câu hỏi). Phần 3 hoàn chỉnh</a:t>
+              <a:t>Câu trả lời trong khung chat. Phần 3 hoàn chỉnh</a:t>
             </a:r>
           </a:p>
         </p:txBody>
@@ -31448,7 +31412,7 @@
                 <a:latin typeface="Arial"/>
                 <a:cs typeface="Arial"/>
               </a:rPr>
-              <a:t>p = kết quả của ta đáng ngạc nhiên đến đâu nếu thực sự không có khác biệt.</a:t>
+              <a:t>p = kết quả của bạn đáng ngạc nhiên đến đâu nếu thực sự không có khác biệt.</a:t>
             </a:r>
           </a:p>
         </p:txBody>
@@ -32273,7 +32237,7 @@
                 <a:latin typeface="Arial"/>
                 <a:cs typeface="Arial"/>
               </a:rPr>
-              <a:t>Mẫu cho ta một ước lượng. KTC cho biết ước lượng đó chính xác đến đâu.</a:t>
+              <a:t>Mẫu cho một ước lượng. KTC cho biết ước lượng đó chính xác đến đâu.</a:t>
             </a:r>
           </a:p>
         </p:txBody>
@@ -32483,7 +32447,7 @@
         <p:spPr>
           <a:xfrm>
             <a:off x="457200" y="1100000"/>
-            <a:ext cx="11277600" cy="480000"/>
+            <a:ext cx="11277600" cy="626796"/>
           </a:xfrm>
           <a:prstGeom prst="rect">
             <a:avLst/>
@@ -32508,7 +32472,7 @@
                 <a:latin typeface="Arial"/>
                 <a:cs typeface="Arial"/>
               </a:rPr>
-              <a:t>Bài báo 1 (Boulet 2024, RCT pilot, Course/Papers), kết cục chính: cân bằng dịch tích lũy ngày 5.</a:t>
+              <a:t>Bài báo 1 (Boulet 2024, RCT thí điểm, Course/Papers), kết cục chính: cân bằng dịch tích lũy ngày 5.</a:t>
             </a:r>
           </a:p>
         </p:txBody>
@@ -32521,7 +32485,7 @@
         </p:nvSpPr>
         <p:spPr>
           <a:xfrm>
-            <a:off x="457200" y="1909015"/>
+            <a:off x="457200" y="2006879"/>
             <a:ext cx="3625866" cy="640000"/>
           </a:xfrm>
           <a:prstGeom prst="rect">
@@ -32564,7 +32528,7 @@
         </p:nvSpPr>
         <p:spPr>
           <a:xfrm>
-            <a:off x="457200" y="2549015"/>
+            <a:off x="457200" y="2646879"/>
             <a:ext cx="3625866" cy="2202954"/>
           </a:xfrm>
           <a:prstGeom prst="rect">
@@ -32578,12 +32542,12 @@
           </a:ln>
         </p:spPr>
         <p:txBody>
-          <a:bodyPr wrap="square" lIns="137160" tIns="91440" rIns="137160" bIns="91440" rtlCol="0" anchor="t">
+          <a:bodyPr wrap="square" lIns="137160" tIns="91440" rIns="137160" bIns="91440" rtlCol="0" anchor="ctr">
             <a:normAutofit/>
           </a:bodyPr>
           <a:lstStyle/>
           <a:p>
-            <a:pPr marL="0" indent="0" algn="l">
+            <a:pPr marL="0" indent="0" algn="ctr">
               <a:lnSpc>
                 <a:spcPct val="104000"/>
               </a:lnSpc>
@@ -32604,7 +32568,7 @@
             </a:r>
           </a:p>
           <a:p>
-            <a:pPr marL="0" indent="0" algn="l">
+            <a:pPr marL="0" indent="0" algn="ctr">
               <a:lnSpc>
                 <a:spcPct val="104000"/>
               </a:lnSpc>
@@ -32625,7 +32589,7 @@
             </a:r>
           </a:p>
           <a:p>
-            <a:pPr marL="0" indent="0" algn="l">
+            <a:pPr marL="0" indent="0" algn="ctr">
               <a:lnSpc>
                 <a:spcPct val="104000"/>
               </a:lnSpc>
@@ -32646,7 +32610,7 @@
             </a:r>
           </a:p>
           <a:p>
-            <a:pPr marL="0" indent="0" algn="l">
+            <a:pPr marL="0" indent="0" algn="ctr">
               <a:lnSpc>
                 <a:spcPct val="104000"/>
               </a:lnSpc>
@@ -32676,7 +32640,7 @@
         </p:nvSpPr>
         <p:spPr>
           <a:xfrm>
-            <a:off x="4283066" y="1909015"/>
+            <a:off x="4283066" y="2006879"/>
             <a:ext cx="3625866" cy="640000"/>
           </a:xfrm>
           <a:prstGeom prst="rect">
@@ -32719,7 +32683,7 @@
         </p:nvSpPr>
         <p:spPr>
           <a:xfrm>
-            <a:off x="4283066" y="2549015"/>
+            <a:off x="4283066" y="2646879"/>
             <a:ext cx="3625866" cy="2202954"/>
           </a:xfrm>
           <a:prstGeom prst="rect">
@@ -32733,12 +32697,12 @@
           </a:ln>
         </p:spPr>
         <p:txBody>
-          <a:bodyPr wrap="square" lIns="137160" tIns="91440" rIns="137160" bIns="91440" rtlCol="0" anchor="t">
+          <a:bodyPr wrap="square" lIns="137160" tIns="91440" rIns="137160" bIns="91440" rtlCol="0" anchor="ctr">
             <a:normAutofit/>
           </a:bodyPr>
           <a:lstStyle/>
           <a:p>
-            <a:pPr marL="0" indent="0" algn="l">
+            <a:pPr marL="0" indent="0" algn="ctr">
               <a:lnSpc>
                 <a:spcPct val="104000"/>
               </a:lnSpc>
@@ -32759,7 +32723,7 @@
             </a:r>
           </a:p>
           <a:p>
-            <a:pPr marL="0" indent="0" algn="l">
+            <a:pPr marL="0" indent="0" algn="ctr">
               <a:lnSpc>
                 <a:spcPct val="104000"/>
               </a:lnSpc>
@@ -32780,7 +32744,7 @@
             </a:r>
           </a:p>
           <a:p>
-            <a:pPr marL="0" indent="0" algn="l">
+            <a:pPr marL="0" indent="0" algn="ctr">
               <a:lnSpc>
                 <a:spcPct val="104000"/>
               </a:lnSpc>
@@ -32810,7 +32774,7 @@
         </p:nvSpPr>
         <p:spPr>
           <a:xfrm>
-            <a:off x="8108932" y="1909015"/>
+            <a:off x="8108932" y="2006879"/>
             <a:ext cx="3625866" cy="640000"/>
           </a:xfrm>
           <a:prstGeom prst="rect">
@@ -32853,7 +32817,7 @@
         </p:nvSpPr>
         <p:spPr>
           <a:xfrm>
-            <a:off x="8108932" y="2549015"/>
+            <a:off x="8108932" y="2646879"/>
             <a:ext cx="3625866" cy="2202954"/>
           </a:xfrm>
           <a:prstGeom prst="rect">
@@ -32867,12 +32831,12 @@
           </a:ln>
         </p:spPr>
         <p:txBody>
-          <a:bodyPr wrap="square" lIns="137160" tIns="91440" rIns="137160" bIns="91440" rtlCol="0" anchor="t">
+          <a:bodyPr wrap="square" lIns="137160" tIns="91440" rIns="137160" bIns="91440" rtlCol="0" anchor="ctr">
             <a:normAutofit/>
           </a:bodyPr>
           <a:lstStyle/>
           <a:p>
-            <a:pPr marL="0" indent="0" algn="l">
+            <a:pPr marL="0" indent="0" algn="ctr">
               <a:lnSpc>
                 <a:spcPct val="104000"/>
               </a:lnSpc>
@@ -32893,7 +32857,7 @@
             </a:r>
           </a:p>
           <a:p>
-            <a:pPr marL="0" indent="0" algn="l">
+            <a:pPr marL="0" indent="0" algn="ctr">
               <a:lnSpc>
                 <a:spcPct val="104000"/>
               </a:lnSpc>
@@ -33584,12 +33548,12 @@
           </a:ln>
         </p:spPr>
         <p:txBody>
-          <a:bodyPr wrap="square" lIns="137160" tIns="91440" rIns="137160" bIns="91440" rtlCol="0" anchor="t">
+          <a:bodyPr wrap="square" lIns="137160" tIns="91440" rIns="137160" bIns="91440" rtlCol="0" anchor="ctr">
             <a:normAutofit/>
           </a:bodyPr>
           <a:lstStyle/>
           <a:p>
-            <a:pPr marL="0" indent="0" algn="l">
+            <a:pPr marL="0" indent="0" algn="ctr">
               <a:lnSpc>
                 <a:spcPct val="104000"/>
               </a:lnSpc>
@@ -33610,7 +33574,7 @@
             </a:r>
           </a:p>
           <a:p>
-            <a:pPr marL="0" indent="0" algn="l">
+            <a:pPr marL="0" indent="0" algn="ctr">
               <a:lnSpc>
                 <a:spcPct val="104000"/>
               </a:lnSpc>
@@ -33631,7 +33595,7 @@
             </a:r>
           </a:p>
           <a:p>
-            <a:pPr marL="0" indent="0" algn="l">
+            <a:pPr marL="0" indent="0" algn="ctr">
               <a:lnSpc>
                 <a:spcPct val="104000"/>
               </a:lnSpc>
@@ -33718,12 +33682,12 @@
           </a:ln>
         </p:spPr>
         <p:txBody>
-          <a:bodyPr wrap="square" lIns="137160" tIns="91440" rIns="137160" bIns="91440" rtlCol="0" anchor="t">
+          <a:bodyPr wrap="square" lIns="137160" tIns="91440" rIns="137160" bIns="91440" rtlCol="0" anchor="ctr">
             <a:normAutofit/>
           </a:bodyPr>
           <a:lstStyle/>
           <a:p>
-            <a:pPr marL="0" indent="0" algn="l">
+            <a:pPr marL="0" indent="0" algn="ctr">
               <a:lnSpc>
                 <a:spcPct val="104000"/>
               </a:lnSpc>
@@ -33744,7 +33708,7 @@
             </a:r>
           </a:p>
           <a:p>
-            <a:pPr marL="0" indent="0" algn="l">
+            <a:pPr marL="0" indent="0" algn="ctr">
               <a:lnSpc>
                 <a:spcPct val="104000"/>
               </a:lnSpc>
@@ -33765,7 +33729,7 @@
             </a:r>
           </a:p>
           <a:p>
-            <a:pPr marL="0" indent="0" algn="l">
+            <a:pPr marL="0" indent="0" algn="ctr">
               <a:lnSpc>
                 <a:spcPct val="104000"/>
               </a:lnSpc>
@@ -33852,12 +33816,12 @@
           </a:ln>
         </p:spPr>
         <p:txBody>
-          <a:bodyPr wrap="square" lIns="137160" tIns="91440" rIns="137160" bIns="91440" rtlCol="0" anchor="t">
+          <a:bodyPr wrap="square" lIns="137160" tIns="91440" rIns="137160" bIns="91440" rtlCol="0" anchor="ctr">
             <a:normAutofit/>
           </a:bodyPr>
           <a:lstStyle/>
           <a:p>
-            <a:pPr marL="0" indent="0" algn="l">
+            <a:pPr marL="0" indent="0" algn="ctr">
               <a:lnSpc>
                 <a:spcPct val="104000"/>
               </a:lnSpc>
@@ -33878,7 +33842,7 @@
             </a:r>
           </a:p>
           <a:p>
-            <a:pPr marL="0" indent="0" algn="l">
+            <a:pPr marL="0" indent="0" algn="ctr">
               <a:lnSpc>
                 <a:spcPct val="104000"/>
               </a:lnSpc>
@@ -35355,12 +35319,12 @@
           </a:ln>
         </p:spPr>
         <p:txBody>
-          <a:bodyPr wrap="square" lIns="137160" tIns="91440" rIns="137160" bIns="91440" rtlCol="0" anchor="t">
+          <a:bodyPr wrap="square" lIns="137160" tIns="91440" rIns="137160" bIns="91440" rtlCol="0" anchor="ctr">
             <a:normAutofit/>
           </a:bodyPr>
           <a:lstStyle/>
           <a:p>
-            <a:pPr marL="0" indent="0" algn="l">
+            <a:pPr marL="0" indent="0" algn="ctr">
               <a:lnSpc>
                 <a:spcPct val="104000"/>
               </a:lnSpc>
@@ -35381,7 +35345,7 @@
             </a:r>
           </a:p>
           <a:p>
-            <a:pPr marL="0" indent="0" algn="l">
+            <a:pPr marL="0" indent="0" algn="ctr">
               <a:lnSpc>
                 <a:spcPct val="104000"/>
               </a:lnSpc>
@@ -35402,7 +35366,7 @@
             </a:r>
           </a:p>
           <a:p>
-            <a:pPr marL="0" indent="0" algn="l">
+            <a:pPr marL="0" indent="0" algn="ctr">
               <a:lnSpc>
                 <a:spcPct val="104000"/>
               </a:lnSpc>
@@ -35489,12 +35453,12 @@
           </a:ln>
         </p:spPr>
         <p:txBody>
-          <a:bodyPr wrap="square" lIns="137160" tIns="91440" rIns="137160" bIns="91440" rtlCol="0" anchor="t">
+          <a:bodyPr wrap="square" lIns="137160" tIns="91440" rIns="137160" bIns="91440" rtlCol="0" anchor="ctr">
             <a:normAutofit/>
           </a:bodyPr>
           <a:lstStyle/>
           <a:p>
-            <a:pPr marL="0" indent="0" algn="l">
+            <a:pPr marL="0" indent="0" algn="ctr">
               <a:lnSpc>
                 <a:spcPct val="104000"/>
               </a:lnSpc>
@@ -35515,7 +35479,7 @@
             </a:r>
           </a:p>
           <a:p>
-            <a:pPr marL="0" indent="0" algn="l">
+            <a:pPr marL="0" indent="0" algn="ctr">
               <a:lnSpc>
                 <a:spcPct val="104000"/>
               </a:lnSpc>
@@ -35536,7 +35500,7 @@
             </a:r>
           </a:p>
           <a:p>
-            <a:pPr marL="0" indent="0" algn="l">
+            <a:pPr marL="0" indent="0" algn="ctr">
               <a:lnSpc>
                 <a:spcPct val="104000"/>
               </a:lnSpc>
@@ -35623,12 +35587,12 @@
           </a:ln>
         </p:spPr>
         <p:txBody>
-          <a:bodyPr wrap="square" lIns="137160" tIns="91440" rIns="137160" bIns="91440" rtlCol="0" anchor="t">
+          <a:bodyPr wrap="square" lIns="137160" tIns="91440" rIns="137160" bIns="91440" rtlCol="0" anchor="ctr">
             <a:normAutofit/>
           </a:bodyPr>
           <a:lstStyle/>
           <a:p>
-            <a:pPr marL="0" indent="0" algn="l">
+            <a:pPr marL="0" indent="0" algn="ctr">
               <a:lnSpc>
                 <a:spcPct val="104000"/>
               </a:lnSpc>
@@ -35649,7 +35613,7 @@
             </a:r>
           </a:p>
           <a:p>
-            <a:pPr marL="0" indent="0" algn="l">
+            <a:pPr marL="0" indent="0" algn="ctr">
               <a:lnSpc>
                 <a:spcPct val="104000"/>
               </a:lnSpc>
@@ -35670,7 +35634,7 @@
             </a:r>
           </a:p>
           <a:p>
-            <a:pPr marL="0" indent="0" algn="l">
+            <a:pPr marL="0" indent="0" algn="ctr">
               <a:lnSpc>
                 <a:spcPct val="104000"/>
               </a:lnSpc>
@@ -36047,12 +36011,12 @@
           </a:ln>
         </p:spPr>
         <p:txBody>
-          <a:bodyPr wrap="square" lIns="137160" tIns="91440" rIns="137160" bIns="91440" rtlCol="0" anchor="t">
+          <a:bodyPr wrap="square" lIns="137160" tIns="91440" rIns="137160" bIns="91440" rtlCol="0" anchor="ctr">
             <a:normAutofit/>
           </a:bodyPr>
           <a:lstStyle/>
           <a:p>
-            <a:pPr marL="0" indent="0" algn="l">
+            <a:pPr marL="0" indent="0" algn="ctr">
               <a:lnSpc>
                 <a:spcPct val="104000"/>
               </a:lnSpc>
@@ -36073,7 +36037,7 @@
             </a:r>
           </a:p>
           <a:p>
-            <a:pPr marL="0" indent="0" algn="l">
+            <a:pPr marL="0" indent="0" algn="ctr">
               <a:lnSpc>
                 <a:spcPct val="104000"/>
               </a:lnSpc>
@@ -36094,7 +36058,7 @@
             </a:r>
           </a:p>
           <a:p>
-            <a:pPr marL="0" indent="0" algn="l">
+            <a:pPr marL="0" indent="0" algn="ctr">
               <a:lnSpc>
                 <a:spcPct val="104000"/>
               </a:lnSpc>
@@ -36181,12 +36145,12 @@
           </a:ln>
         </p:spPr>
         <p:txBody>
-          <a:bodyPr wrap="square" lIns="137160" tIns="91440" rIns="137160" bIns="91440" rtlCol="0" anchor="t">
+          <a:bodyPr wrap="square" lIns="137160" tIns="91440" rIns="137160" bIns="91440" rtlCol="0" anchor="ctr">
             <a:normAutofit/>
           </a:bodyPr>
           <a:lstStyle/>
           <a:p>
-            <a:pPr marL="0" indent="0" algn="l">
+            <a:pPr marL="0" indent="0" algn="ctr">
               <a:lnSpc>
                 <a:spcPct val="104000"/>
               </a:lnSpc>
@@ -36207,7 +36171,7 @@
             </a:r>
           </a:p>
           <a:p>
-            <a:pPr marL="0" indent="0" algn="l">
+            <a:pPr marL="0" indent="0" algn="ctr">
               <a:lnSpc>
                 <a:spcPct val="104000"/>
               </a:lnSpc>
@@ -36228,7 +36192,7 @@
             </a:r>
           </a:p>
           <a:p>
-            <a:pPr marL="0" indent="0" algn="l">
+            <a:pPr marL="0" indent="0" algn="ctr">
               <a:lnSpc>
                 <a:spcPct val="104000"/>
               </a:lnSpc>
@@ -36315,12 +36279,12 @@
           </a:ln>
         </p:spPr>
         <p:txBody>
-          <a:bodyPr wrap="square" lIns="137160" tIns="91440" rIns="137160" bIns="91440" rtlCol="0" anchor="t">
+          <a:bodyPr wrap="square" lIns="137160" tIns="91440" rIns="137160" bIns="91440" rtlCol="0" anchor="ctr">
             <a:normAutofit/>
           </a:bodyPr>
           <a:lstStyle/>
           <a:p>
-            <a:pPr marL="0" indent="0" algn="l">
+            <a:pPr marL="0" indent="0" algn="ctr">
               <a:lnSpc>
                 <a:spcPct val="104000"/>
               </a:lnSpc>
@@ -36341,7 +36305,7 @@
             </a:r>
           </a:p>
           <a:p>
-            <a:pPr marL="0" indent="0" algn="l">
+            <a:pPr marL="0" indent="0" algn="ctr">
               <a:lnSpc>
                 <a:spcPct val="104000"/>
               </a:lnSpc>
@@ -36362,7 +36326,7 @@
             </a:r>
           </a:p>
           <a:p>
-            <a:pPr marL="0" indent="0" algn="l">
+            <a:pPr marL="0" indent="0" algn="ctr">
               <a:lnSpc>
                 <a:spcPct val="104000"/>
               </a:lnSpc>
@@ -36449,12 +36413,12 @@
           </a:ln>
         </p:spPr>
         <p:txBody>
-          <a:bodyPr wrap="square" lIns="137160" tIns="91440" rIns="137160" bIns="91440" rtlCol="0" anchor="t">
+          <a:bodyPr wrap="square" lIns="137160" tIns="91440" rIns="137160" bIns="91440" rtlCol="0" anchor="ctr">
             <a:normAutofit/>
           </a:bodyPr>
           <a:lstStyle/>
           <a:p>
-            <a:pPr marL="0" indent="0" algn="l">
+            <a:pPr marL="0" indent="0" algn="ctr">
               <a:lnSpc>
                 <a:spcPct val="104000"/>
               </a:lnSpc>
@@ -36475,7 +36439,7 @@
             </a:r>
           </a:p>
           <a:p>
-            <a:pPr marL="0" indent="0" algn="l">
+            <a:pPr marL="0" indent="0" algn="ctr">
               <a:lnSpc>
                 <a:spcPct val="104000"/>
               </a:lnSpc>
@@ -36496,7 +36460,7 @@
             </a:r>
           </a:p>
           <a:p>
-            <a:pPr marL="0" indent="0" algn="l">
+            <a:pPr marL="0" indent="0" algn="ctr">
               <a:lnSpc>
                 <a:spcPct val="104000"/>
               </a:lnSpc>
@@ -36568,7 +36532,7 @@
                 <a:latin typeface="Arial"/>
                 <a:cs typeface="Arial"/>
               </a:rPr>
-              <a:t>Điểm ai là một mô hình dự báo: hãy hỏi về hiệu chuẩn và thẩm định ngoài.</a:t>
+              <a:t>Điểm AI là một mô hình dự báo: hãy hỏi về hiệu chuẩn và thẩm định ngoài.</a:t>
             </a:r>
           </a:p>
         </p:txBody>
@@ -37148,12 +37112,12 @@
           </a:ln>
         </p:spPr>
         <p:txBody>
-          <a:bodyPr wrap="square" lIns="137160" tIns="91440" rIns="137160" bIns="91440" rtlCol="0" anchor="t">
+          <a:bodyPr wrap="square" lIns="137160" tIns="91440" rIns="137160" bIns="91440" rtlCol="0" anchor="ctr">
             <a:normAutofit/>
           </a:bodyPr>
           <a:lstStyle/>
           <a:p>
-            <a:pPr marL="0" indent="0" algn="l">
+            <a:pPr marL="0" indent="0" algn="ctr">
               <a:lnSpc>
                 <a:spcPct val="104000"/>
               </a:lnSpc>
@@ -37174,7 +37138,7 @@
             </a:r>
           </a:p>
           <a:p>
-            <a:pPr marL="0" indent="0" algn="l">
+            <a:pPr marL="0" indent="0" algn="ctr">
               <a:lnSpc>
                 <a:spcPct val="104000"/>
               </a:lnSpc>
@@ -37195,7 +37159,7 @@
             </a:r>
           </a:p>
           <a:p>
-            <a:pPr marL="0" indent="0" algn="l">
+            <a:pPr marL="0" indent="0" algn="ctr">
               <a:lnSpc>
                 <a:spcPct val="104000"/>
               </a:lnSpc>
@@ -37282,12 +37246,12 @@
           </a:ln>
         </p:spPr>
         <p:txBody>
-          <a:bodyPr wrap="square" lIns="137160" tIns="91440" rIns="137160" bIns="91440" rtlCol="0" anchor="t">
+          <a:bodyPr wrap="square" lIns="137160" tIns="91440" rIns="137160" bIns="91440" rtlCol="0" anchor="ctr">
             <a:normAutofit/>
           </a:bodyPr>
           <a:lstStyle/>
           <a:p>
-            <a:pPr marL="0" indent="0" algn="l">
+            <a:pPr marL="0" indent="0" algn="ctr">
               <a:lnSpc>
                 <a:spcPct val="104000"/>
               </a:lnSpc>
@@ -37308,7 +37272,7 @@
             </a:r>
           </a:p>
           <a:p>
-            <a:pPr marL="0" indent="0" algn="l">
+            <a:pPr marL="0" indent="0" algn="ctr">
               <a:lnSpc>
                 <a:spcPct val="104000"/>
               </a:lnSpc>
@@ -37395,12 +37359,12 @@
           </a:ln>
         </p:spPr>
         <p:txBody>
-          <a:bodyPr wrap="square" lIns="137160" tIns="91440" rIns="137160" bIns="91440" rtlCol="0" anchor="t">
+          <a:bodyPr wrap="square" lIns="137160" tIns="91440" rIns="137160" bIns="91440" rtlCol="0" anchor="ctr">
             <a:normAutofit/>
           </a:bodyPr>
           <a:lstStyle/>
           <a:p>
-            <a:pPr marL="0" indent="0" algn="l">
+            <a:pPr marL="0" indent="0" algn="ctr">
               <a:lnSpc>
                 <a:spcPct val="104000"/>
               </a:lnSpc>
@@ -37421,7 +37385,7 @@
             </a:r>
           </a:p>
           <a:p>
-            <a:pPr marL="0" indent="0" algn="l">
+            <a:pPr marL="0" indent="0" algn="ctr">
               <a:lnSpc>
                 <a:spcPct val="104000"/>
               </a:lnSpc>
@@ -37442,7 +37406,7 @@
             </a:r>
           </a:p>
           <a:p>
-            <a:pPr marL="0" indent="0" algn="l">
+            <a:pPr marL="0" indent="0" algn="ctr">
               <a:lnSpc>
                 <a:spcPct val="104000"/>
               </a:lnSpc>
@@ -37529,12 +37493,12 @@
           </a:ln>
         </p:spPr>
         <p:txBody>
-          <a:bodyPr wrap="square" lIns="137160" tIns="91440" rIns="137160" bIns="91440" rtlCol="0" anchor="t">
+          <a:bodyPr wrap="square" lIns="137160" tIns="91440" rIns="137160" bIns="91440" rtlCol="0" anchor="ctr">
             <a:normAutofit/>
           </a:bodyPr>
           <a:lstStyle/>
           <a:p>
-            <a:pPr marL="0" indent="0" algn="l">
+            <a:pPr marL="0" indent="0" algn="ctr">
               <a:lnSpc>
                 <a:spcPct val="104000"/>
               </a:lnSpc>
@@ -37555,7 +37519,7 @@
             </a:r>
           </a:p>
           <a:p>
-            <a:pPr marL="0" indent="0" algn="l">
+            <a:pPr marL="0" indent="0" algn="ctr">
               <a:lnSpc>
                 <a:spcPct val="104000"/>
               </a:lnSpc>
@@ -38208,12 +38172,12 @@
           </a:ln>
         </p:spPr>
         <p:txBody>
-          <a:bodyPr wrap="square" lIns="137160" tIns="91440" rIns="137160" bIns="91440" rtlCol="0" anchor="t">
+          <a:bodyPr wrap="square" lIns="137160" tIns="91440" rIns="137160" bIns="91440" rtlCol="0" anchor="ctr">
             <a:normAutofit/>
           </a:bodyPr>
           <a:lstStyle/>
           <a:p>
-            <a:pPr marL="0" indent="0" algn="l">
+            <a:pPr marL="0" indent="0" algn="ctr">
               <a:lnSpc>
                 <a:spcPct val="104000"/>
               </a:lnSpc>
@@ -38300,12 +38264,12 @@
           </a:ln>
         </p:spPr>
         <p:txBody>
-          <a:bodyPr wrap="square" lIns="137160" tIns="91440" rIns="137160" bIns="91440" rtlCol="0" anchor="t">
+          <a:bodyPr wrap="square" lIns="137160" tIns="91440" rIns="137160" bIns="91440" rtlCol="0" anchor="ctr">
             <a:normAutofit/>
           </a:bodyPr>
           <a:lstStyle/>
           <a:p>
-            <a:pPr marL="0" indent="0" algn="l">
+            <a:pPr marL="0" indent="0" algn="ctr">
               <a:lnSpc>
                 <a:spcPct val="104000"/>
               </a:lnSpc>
@@ -38392,12 +38356,12 @@
           </a:ln>
         </p:spPr>
         <p:txBody>
-          <a:bodyPr wrap="square" lIns="137160" tIns="91440" rIns="137160" bIns="91440" rtlCol="0" anchor="t">
+          <a:bodyPr wrap="square" lIns="137160" tIns="91440" rIns="137160" bIns="91440" rtlCol="0" anchor="ctr">
             <a:normAutofit/>
           </a:bodyPr>
           <a:lstStyle/>
           <a:p>
-            <a:pPr marL="0" indent="0" algn="l">
+            <a:pPr marL="0" indent="0" algn="ctr">
               <a:lnSpc>
                 <a:spcPct val="104000"/>
               </a:lnSpc>
@@ -38484,12 +38448,12 @@
           </a:ln>
         </p:spPr>
         <p:txBody>
-          <a:bodyPr wrap="square" lIns="137160" tIns="91440" rIns="137160" bIns="91440" rtlCol="0" anchor="t">
+          <a:bodyPr wrap="square" lIns="137160" tIns="91440" rIns="137160" bIns="91440" rtlCol="0" anchor="ctr">
             <a:normAutofit/>
           </a:bodyPr>
           <a:lstStyle/>
           <a:p>
-            <a:pPr marL="0" indent="0" algn="l">
+            <a:pPr marL="0" indent="0" algn="ctr">
               <a:lnSpc>
                 <a:spcPct val="104000"/>
               </a:lnSpc>
@@ -38576,12 +38540,12 @@
           </a:ln>
         </p:spPr>
         <p:txBody>
-          <a:bodyPr wrap="square" lIns="137160" tIns="91440" rIns="137160" bIns="91440" rtlCol="0" anchor="t">
+          <a:bodyPr wrap="square" lIns="137160" tIns="91440" rIns="137160" bIns="91440" rtlCol="0" anchor="ctr">
             <a:normAutofit/>
           </a:bodyPr>
           <a:lstStyle/>
           <a:p>
-            <a:pPr marL="0" indent="0" algn="l">
+            <a:pPr marL="0" indent="0" algn="ctr">
               <a:lnSpc>
                 <a:spcPct val="104000"/>
               </a:lnSpc>
@@ -38602,7 +38566,7 @@
             </a:r>
           </a:p>
           <a:p>
-            <a:pPr marL="0" indent="0" algn="l">
+            <a:pPr marL="0" indent="0" algn="ctr">
               <a:lnSpc>
                 <a:spcPct val="104000"/>
               </a:lnSpc>
@@ -38674,7 +38638,7 @@
                 <a:latin typeface="Arial"/>
                 <a:cs typeface="Arial"/>
               </a:rPr>
-              <a:t>Báo cáo độ lớn tác động kèm KTC 95%. Giá trị p chỉ là vai phụ.</a:t>
+              <a:t>Báo cáo độ lớn tác động kèm KTC 95%. Giá trị p chỉ là thông tin phụ.</a:t>
             </a:r>
           </a:p>
         </p:txBody>
@@ -39066,12 +39030,12 @@
           </a:ln>
         </p:spPr>
         <p:txBody>
-          <a:bodyPr wrap="square" lIns="137160" tIns="91440" rIns="137160" bIns="91440" rtlCol="0" anchor="t">
+          <a:bodyPr wrap="square" lIns="137160" tIns="91440" rIns="137160" bIns="91440" rtlCol="0" anchor="ctr">
             <a:normAutofit/>
           </a:bodyPr>
           <a:lstStyle/>
           <a:p>
-            <a:pPr marL="0" indent="0" algn="l">
+            <a:pPr marL="0" indent="0" algn="ctr">
               <a:buNone/>
             </a:pPr>
             <a:r>
@@ -39086,15 +39050,14 @@
             </a:r>
           </a:p>
           <a:p>
-            <a:pPr marL="274320" indent="-274320" algn="l">
+            <a:pPr marL="0" indent="0" algn="ctr">
               <a:lnSpc>
                 <a:spcPct val="104000"/>
               </a:lnSpc>
               <a:spcBef>
                 <a:spcPts val="300"/>
               </a:spcBef>
-              <a:buFont typeface="Arial"/>
-              <a:buChar char="•"/>
+              <a:buNone/>
             </a:pPr>
             <a:r>
               <a:rPr lang="en-US" sz="1500" dirty="0">
@@ -39108,15 +39071,14 @@
             </a:r>
           </a:p>
           <a:p>
-            <a:pPr marL="274320" indent="-274320" algn="l">
+            <a:pPr marL="0" indent="0" algn="ctr">
               <a:lnSpc>
                 <a:spcPct val="104000"/>
               </a:lnSpc>
               <a:spcBef>
                 <a:spcPts val="300"/>
               </a:spcBef>
-              <a:buFont typeface="Arial"/>
-              <a:buChar char="•"/>
+              <a:buNone/>
             </a:pPr>
             <a:r>
               <a:rPr lang="en-US" sz="1500" dirty="0">
@@ -39126,19 +39088,18 @@
                 <a:latin typeface="Arial"/>
                 <a:cs typeface="Arial"/>
               </a:rPr>
-              <a:t>Sai: ta chưa biết</a:t>
-            </a:r>
-          </a:p>
-          <a:p>
-            <a:pPr marL="274320" indent="-274320" algn="l">
+              <a:t>Sai: chưa biết</a:t>
+            </a:r>
+          </a:p>
+          <a:p>
+            <a:pPr marL="0" indent="0" algn="ctr">
               <a:lnSpc>
                 <a:spcPct val="104000"/>
               </a:lnSpc>
               <a:spcBef>
                 <a:spcPts val="300"/>
               </a:spcBef>
-              <a:buFont typeface="Arial"/>
-              <a:buChar char="•"/>
+              <a:buNone/>
             </a:pPr>
             <a:r>
               <a:rPr lang="en-US" sz="1500" dirty="0">
@@ -39152,15 +39113,14 @@
             </a:r>
           </a:p>
           <a:p>
-            <a:pPr marL="274320" indent="-274320" algn="l">
+            <a:pPr marL="0" indent="0" algn="ctr">
               <a:lnSpc>
                 <a:spcPct val="104000"/>
               </a:lnSpc>
               <a:spcBef>
                 <a:spcPts val="300"/>
               </a:spcBef>
-              <a:buFont typeface="Arial"/>
-              <a:buChar char="•"/>
+              <a:buNone/>
             </a:pPr>
             <a:r>
               <a:rPr lang="en-US" sz="1500" dirty="0">

--- a/vi/files/slides/Session_6_VN.pptx
+++ b/vi/files/slides/Session_6_VN.pptx
@@ -75,6 +75,7 @@
     <p:sldId id="317" r:id="rId161"/>
     <p:sldId id="318" r:id="rId162"/>
     <p:sldId id="319" r:id="rId163"/>
+    <p:sldId id="320" r:id="rId164"/>
   </p:sldIdLst>
   <p:sldSz cx="12192000" cy="6858000"/>
   <p:notesSz cx="6858000" cy="9144000"/>
@@ -752,37 +753,19 @@
           <a:p>
             <a:r>
               <a:rPr lang="en-US" sz="1400" b="0" dirty="0"/>
-              <a:t>Chào mừng anh chị trở lại. Lớp học trực tuyến từ 19:30 đến 22:30, có 15 phút giải lao. Thứ Bảy tuần trước (Buổi 5) cả lớp đã thu thập, làm sạch và mô tả dữ liệu. Hôm nay là phân tích: một mẫu trả lời câu hỏi về quần thể như thế nào, và đọc các con số máy tính đưa ra ra sao.</a:t>
+              <a:t>Buổi 6 (19:30-22:30, giải lao 20:40-20:55). Buổi nặng về kỹ thuật nhất: đi chậm, bỏ trang bổ sung, không bỏ câu kiểm tra.</a:t>
             </a:r>
           </a:p>
           <a:p>
             <a:r>
               <a:rPr lang="en-US" sz="1400" b="0" dirty="0"/>
-              <a:t>Lời hứa: vẫn không có công thức. Mỗi ý tưởng là một hình ảnh, một ví dụ minh họa từ ví dụ xuyên suốt, rồi một phút kiểm tra nhanh: bình chọn, hoặc mời hai ba người trả lời, bật micro.</a:t>
+              <a:t>FLUID-ICU xuất hiện lại ở 6.2 (so sánh) và 6.4 (mô hình, sống còn, dữ liệu thiếu): Q1 đầy đủ, Q2 đến Q5 ngắn gọn.</a:t>
             </a:r>
           </a:p>
           <a:p>
             <a:r>
               <a:rPr lang="en-US" sz="1400" b="0" dirty="0"/>
-              <a:t>Bộ dữ liệu khóa học FLUID-ICU quay lại hai lần: ở 6.2 (so sánh các nhóm) và 6.4 (mô hình, sống còn và dữ liệu bị thiếu). Cả lớp cùng đi qua năm câu hỏi FLUID-ICU: Câu hỏi 1 (Q1) đầy đủ, Q2 đến Q5 là các ví dụ ngắn hơn. Hãy theo dõi kỹ câu hỏi anh chị đã chọn cho bản thảo: các diễn giải này sẽ trở thành phần Kết quả anh chị viết ở Tuần 7-8 từ gói kết quả phân tích của câu đó.</a:t>
-            </a:r>
-          </a:p>
-          <a:p>
-            <a:r>
-              <a:rPr lang="en-US" sz="1400" b="0" dirty="0"/>
-              <a:t>Các chữ viết tắt dùng hôm nay, mỗi chữ được giải thích ngay trên trang: KTC (khoảng tin cậy, tiếng Anh CI), OR (tỷ số chênh), HR (tỷ số nguy cơ tức thời), SAP (kế hoạch phân tích thống kê).</a:t>
-            </a:r>
-          </a:p>
-          <a:p>
-            <a:r>
-              <a:rPr lang="en-US" sz="1400" b="0" dirty="0"/>
-              <a:t>Thời lượng: ôn tập 19:30, 6.1 lúc 19:40, 6.2 lúc 20:20, giải lao 20:40, 6.3 lúc 20:55, 6.4 lúc 21:30, xây dựng đề cương 21:55, tổng kết 22:25.</a:t>
-            </a:r>
-          </a:p>
-          <a:p>
-            <a:r>
-              <a:rPr lang="en-US" sz="1400" b="0" dirty="0"/>
-              <a:t>Đây là buổi nặng về kỹ thuật nhất của khóa học. Đi chậm. Bỏ trang bổ sung, không bỏ phần kiểm tra.</a:t>
+              <a:t>Cuối buổi, mỗi học viên chọn một câu hỏi để viết phần Kết quả và nhận hướng dẫn bài tập bản thảo.</a:t>
             </a:r>
           </a:p>
         </p:txBody>
@@ -863,37 +846,25 @@
           <a:p>
             <a:r>
               <a:rPr lang="en-US" sz="1400" b="0" dirty="0"/>
-              <a:t>Ý chính: anh chị cần ít người bệnh hơn khi (1) mức khác biệt muốn phát hiện lớn hơn và (2) người bệnh ít khác biệt nhau hơn (ít nhiễu, độ lệch chuẩn SD nhỏ hơn). Alpha và lực thống kê thường cố định ở 5% (hai phía) và 80-90%.</a:t>
+              <a:t>Cần ít người bệnh hơn khi khác biệt lớn hơn và người bệnh ít biến thiên hơn.</a:t>
             </a:r>
           </a:p>
           <a:p>
             <a:r>
               <a:rPr lang="en-US" sz="1400" b="0" dirty="0"/>
-              <a:t>Đọc các đường cong: với khác biệt 30 ml/kg và SD 35, cần 22 người bệnh mỗi nhóm (chấm đỏ). Giảm khác biệt còn một nửa (15 ml/kg) thì cần khoảng gấp bốn lần (86 mỗi nhóm). Với dữ liệu nhiễu hơn (SD 50), mọi điểm đều dịch lên.</a:t>
+              <a:t>Giảm khác biệt một nửa: cần khoảng gấp bốn số người bệnh.</a:t>
             </a:r>
           </a:p>
           <a:p>
             <a:r>
               <a:rPr lang="en-US" sz="1400" b="0" dirty="0"/>
-              <a:t>Ví dụ xuyên suốt: đây chính là phép tính trong phần phương pháp của Bài báo 1: họ dự kiến 70 so với 40 ml/kg, SD 35, lực thống kê 80%, alpha 5% hai phía: 22 mỗi nhóm, tổng 44, tăng thêm 10% cho tử vong thành 50 người bệnh.</a:t>
+              <a:t>Bài báo 1: 70 so với 40 ml/kg, SD 35, lực mẫu 80%: 22 người mỗi nhóm, tổng 50 khi tính cả tử vong.</a:t>
             </a:r>
           </a:p>
           <a:p>
             <a:r>
               <a:rPr lang="en-US" sz="1400" b="0" dirty="0"/>
-              <a:t>Đầu vào khó nhất là tác động dự kiến: lấy từ các nghiên cứu trước, số liệu thử nghiệm, hoặc mức khác biệt nhỏ nhất đủ để thay đổi thực hành (khác biệt tối thiểu có ý nghĩa lâm sàng). Đừng chọn nó chỉ để có cỡ mẫu nhỏ.</a:t>
-            </a:r>
-          </a:p>
-          <a:p>
-            <a:r>
-              <a:rPr lang="en-US" sz="1400" b="0" dirty="0"/>
-              <a:t>Lỗi thường gặp: 'chúng tôi lấy tất cả người bệnh năm ngoái' mà không tính toán. Người phản biện sẽ hỏi về lực thống kê.</a:t>
-            </a:r>
-          </a:p>
-          <a:p>
-            <a:r>
-              <a:rPr lang="en-US" sz="1400" b="0" dirty="0"/>
-              <a:t>Chuyển ý: hãy làm trực tiếp.</a:t>
+              <a:t>Tác động kỳ vọng lấy từ nghiên cứu trước hoặc khác biệt nhỏ nhất đủ để thay đổi thực hành.</a:t>
             </a:r>
           </a:p>
         </p:txBody>
@@ -974,49 +945,25 @@
           <a:p>
             <a:r>
               <a:rPr lang="en-US" sz="1400" b="0" dirty="0"/>
-              <a:t>Trình diễn trực tiếp trên màn hình chia sẻ, 5 phút (rút từ 8 phút để có chỗ cho trang một phía hay hai phía). Kịch bản đầy đủ với kết quả dự kiến trong Course/Demos/s6_demo.md (Phần A).</a:t>
+              <a:t>Trình diễn trực tiếp, 5 phút. Kịch bản: s6_demo_VN.md, Phần A.</a:t>
             </a:r>
           </a:p>
           <a:p>
             <a:r>
               <a:rPr lang="en-US" sz="1400" b="0" dirty="0"/>
-              <a:t>Bước 1: mở công cụ. Nói: bất kỳ công cụ miễn phí, uy tín nào cũng được. Điều quan trọng là hiểu các đầu vào.</a:t>
+              <a:t>Tái lập Bài báo 1 (70 so với 40, SD 35): 22 người mỗi nhóm. Rồi tử vong 40% so với 30%: khoảng 356 người mỗi nhóm.</a:t>
             </a:r>
           </a:p>
           <a:p>
             <a:r>
               <a:rPr lang="en-US" sz="1400" b="0" dirty="0"/>
-              <a:t>Bước 2: hai trung bình độc lập, tái lập Bài báo 1: trung bình 1 = 70, trung bình 2 = 40, SD 35 ở cả hai nhóm, alpha 5% hai phía, lực thống kê 80%, tỷ lệ 1:1. Kết quả dự kiến: 22 mỗi nhóm (tổng 44). Cộng 10% cho tử vong: 50. Khớp với bài báo.</a:t>
+              <a:t>Đổi từng thông số một và cho lớp đoán chiều thay đổi trước.</a:t>
             </a:r>
           </a:p>
           <a:p>
             <a:r>
               <a:rPr lang="en-US" sz="1400" b="0" dirty="0"/>
-              <a:t>Bước 3: hai tỷ lệ (câu hỏi thật của mình: tử vong 28 ngày). Thường quy 40%, hạn chế dịch 30%, lực thống kê 80%, alpha 5% hai phía. Kết quả dự kiến: khoảng 356 mỗi nhóm khi không hiệu chỉnh liên tục (khoảng 376 khi có hiệu chỉnh). Các phương pháp khác nhau cho con số hơi khác nhau. Điều đó bình thường.</a:t>
-            </a:r>
-          </a:p>
-          <a:p>
-            <a:r>
-              <a:rPr lang="en-US" sz="1400" b="0" dirty="0"/>
-              <a:t>Bước 4 (chỉ một hai thay đổi): lực thống kê 90% (n tăng lên khoảng 477 mỗi nhóm). Khác biệt 40% so với 35% (n tăng lên hơn 1400 mỗi nhóm). Mời cả lớp đoán hướng thay đổi bằng bình chọn trước khi bấm.</a:t>
-            </a:r>
-          </a:p>
-          <a:p>
-            <a:r>
-              <a:rPr lang="en-US" sz="1400" b="0" dirty="0"/>
-              <a:t>Bước 5: nếu mất mạng, mở Course/Resources/tools/sample_size_calculator.xlsx và trình bày các ví dụ tương tự. Các ô màu vàng là ô nhập.</a:t>
-            </a:r>
-          </a:p>
-          <a:p>
-            <a:r>
-              <a:rPr lang="en-US" sz="1400" b="0" dirty="0"/>
-              <a:t>Thông điệp chính: Bài báo 1 cần 50 người bệnh cho kết cục cân bằng dịch, nhưng một thử nghiệm về tử vong cần hàng trăm người bệnh mỗi nhóm. Kết cục anh chị chọn thay đổi mọi thứ.</a:t>
-            </a:r>
-          </a:p>
-          <a:p>
-            <a:r>
-              <a:rPr lang="en-US" sz="1400" b="0" dirty="0"/>
-              <a:t>Không để học viên tự tính. Họ quan sát và dự đoán.</a:t>
+              <a:t>Khi mất mạng: bảng tính cỡ mẫu. Học viên quan sát và dự đoán, không tự tính.</a:t>
             </a:r>
           </a:p>
         </p:txBody>
@@ -1097,55 +1044,25 @@
           <a:p>
             <a:r>
               <a:rPr lang="en-US" sz="1400" b="0" dirty="0"/>
-              <a:t>Ý chính: khi so sánh hai nhóm, hai câu hỏi quyết định kiểm định.</a:t>
+              <a:t>Hai câu hỏi chọn kiểm định: biến số hay biến phân nhóm, rồi hình dạng hay số đếm. Dữ liệu bắt cặp dùng cột cuối.</a:t>
             </a:r>
           </a:p>
           <a:p>
             <a:r>
               <a:rPr lang="en-US" sz="1400" b="0" dirty="0"/>
-              <a:t>Câu 1: kết cục là gì? Một số đo (liên tục) hay một phân loại (có/không)?</a:t>
+              <a:t>Bài báo 1 dùng Mann-Whitney vì cân bằng dịch phân bố lệch.</a:t>
             </a:r>
           </a:p>
           <a:p>
             <a:r>
               <a:rPr lang="en-US" sz="1400" b="0" dirty="0"/>
-              <a:t>Câu 2a (số đo): gần đối xứng? Dùng kiểm định t (so sánh trung bình). Lệch hoặc cỡ mẫu rất nhỏ? Dùng Mann-Whitney U (so sánh phân phối/thứ hạng, thường báo cáo kèm trung vị).</a:t>
+              <a:t>Ba nhóm trở lên: chỉ nhắc ANOVA hoặc Kruskal-Wallis.</a:t>
             </a:r>
           </a:p>
           <a:p>
             <a:r>
               <a:rPr lang="en-US" sz="1400" b="0" dirty="0"/>
-              <a:t>Câu 2b (phân loại): tần số kỳ vọng trong mỗi ô từ 5 trở lên? Dùng kiểm định khi bình phương. Tần số nhỏ? Dùng kiểm định chính xác Fisher.</a:t>
-            </a:r>
-          </a:p>
-          <a:p>
-            <a:r>
-              <a:rPr lang="en-US" sz="1400" b="0" dirty="0"/>
-              <a:t>Dữ liệu ghép cặp (cùng người bệnh đo trước và sau, hoặc các cặp được ghép): dùng phiên bản ghép cặp ở cột cuối: t ghép cặp, Wilcoxon cho cặp, McNemar.</a:t>
-            </a:r>
-          </a:p>
-          <a:p>
-            <a:r>
-              <a:rPr lang="en-US" sz="1400" b="0" dirty="0"/>
-              <a:t>Ví dụ xuyên suốt: Bài báo 1 dùng kiểm định Mann-Whitney vì cân bằng dịch bị lệch: nhất quán với việc báo cáo trung vị.</a:t>
-            </a:r>
-          </a:p>
-          <a:p>
-            <a:r>
-              <a:rPr lang="en-US" sz="1400" b="0" dirty="0"/>
-              <a:t>Ba nhóm trở lên: ANOVA hoặc Kruskal-Wallis. Chỉ nhắc qua. Hãy hỏi nhà thống kê.</a:t>
-            </a:r>
-          </a:p>
-          <a:p>
-            <a:r>
-              <a:rPr lang="en-US" sz="1400" b="0" dirty="0"/>
-              <a:t>Bảng này là một trong những công cụ mang về của khóa học (cũng có trong phiếu bài tập Buổi 6, Bài 2). Nó thay hình sơ đồ trước đây bằng bảng chỉnh sửa được. Nội dung không đổi.</a:t>
-            </a:r>
-          </a:p>
-          <a:p>
-            <a:r>
-              <a:rPr lang="en-US" sz="1400" b="0" dirty="0"/>
-              <a:t>Hỏi (mời hai ba người trả lời, bật micro): so sánh tỷ lệ tổn thương thận cấp ở 24 so với 24 người bệnh, chỉ có 3 và 7 biến cố? Dự kiến: chính xác Fisher (tần số nhỏ).</a:t>
+              <a:t>Hỏi: AKI ở 24 so với 24 người bệnh, 3 và 7 biến cố? Kỳ vọng: Fisher chính xác.</a:t>
             </a:r>
           </a:p>
         </p:txBody>
@@ -1226,43 +1143,25 @@
           <a:p>
             <a:r>
               <a:rPr lang="en-US" sz="1400" b="0" dirty="0"/>
-              <a:t>Ý chính: bảng chọn kiểm định hỏi 'ghép cặp hay không?'. Hình này cho thấy vì sao điều đó quan trọng.</a:t>
+              <a:t>Cùng 20 người bệnh: vẽ thành hai đám mây thì thay đổi bị che, nối thành cặp thì đường nào cũng đi xuống. Mỗi người bệnh là đối chứng của chính mình.</a:t>
             </a:r>
           </a:p>
           <a:p>
             <a:r>
               <a:rPr lang="en-US" sz="1400" b="0" dirty="0"/>
-              <a:t>Lactat mô phỏng ở 20 người bệnh lúc vào ICU và 6 giờ sau. Bên trái: vẽ như hai đám mây riêng, giá trị trước và sau chồng lấp nhiều. Người bệnh khác nhau rất nhiều, và sự khác biệt đó che lấp sự thay đổi.</a:t>
+              <a:t>Lỗi thường gặp: dùng kiểm định không bắt cặp cho dữ liệu trước/sau.</a:t>
             </a:r>
           </a:p>
           <a:p>
             <a:r>
               <a:rPr lang="en-US" sz="1400" b="0" dirty="0"/>
-              <a:t>Bên phải: cùng các con số, nhưng hai giá trị của mỗi người bệnh được nối lại. Mọi đường đều đi xuống. Mỗi người bệnh là đối chứng của chính mình, nên nhiễu giữa các người bệnh biến mất. Kiểm định ghép cặp (t ghép cặp, hoặc Wilcoxon cho cặp nếu dữ liệu lệch) dùng đúng điều này và có lực thống kê cao hơn nhiều.</a:t>
+              <a:t>Hỏi: điểm đau trước và sau phác đồ mới ở 30 người bệnh? Kỳ vọng: bắt cặp.</a:t>
             </a:r>
           </a:p>
           <a:p>
             <a:r>
               <a:rPr lang="en-US" sz="1400" b="0" dirty="0"/>
-              <a:t>Thiết kế ghép cặp: trước/sau trên cùng người bệnh, thử nghiệm bắt chéo, các cặp được ghép (Bài báo 2 ghép người bệnh 1:1 theo điểm xu hướng và phân tích theo cặp).</a:t>
-            </a:r>
-          </a:p>
-          <a:p>
-            <a:r>
-              <a:rPr lang="en-US" sz="1400" b="0" dirty="0"/>
-              <a:t>Lỗi thường gặp: phân tích dữ liệu trước/sau bằng kiểm định t không ghép cặp. Cách này bỏ mất thông tin ghép cặp và có thể bỏ sót một thay đổi thật.</a:t>
-            </a:r>
-          </a:p>
-          <a:p>
-            <a:r>
-              <a:rPr lang="en-US" sz="1400" b="0" dirty="0"/>
-              <a:t>Hỏi (mời hai ba người trả lời, bật micro): anh chị đo điểm đau ở 30 người bệnh trước và sau một quy trình giảm đau mới. Ghép cặp hay không? Dự kiến: ghép cặp.</a:t>
-            </a:r>
-          </a:p>
-          <a:p>
-            <a:r>
-              <a:rPr lang="en-US" sz="1400" b="0" dirty="0"/>
-              <a:t>Thời lượng: 2 phút.</a:t>
+              <a:t>Thời gian: 2 phút.</a:t>
             </a:r>
           </a:p>
         </p:txBody>
@@ -1343,43 +1242,25 @@
           <a:p>
             <a:r>
               <a:rPr lang="en-US" sz="1400" b="0" dirty="0"/>
-              <a:t>Ý chính: mỗi kiểm định mang nguy cơ báo động giả 5%. Làm nhiều kiểm định thì báo động giả gần như chắc chắn xảy ra.</a:t>
+              <a:t>Kiểm định 20 màu khi không có tác động thật, sẽ có một màu ra p = 0.03. Với 20 kiểm định, khả năng có ít nhất một báo động giả khoảng 64%.</a:t>
             </a:r>
           </a:p>
           <a:p>
             <a:r>
               <a:rPr lang="en-US" sz="1400" b="0" dirty="0"/>
-              <a:t>Hình (lấy ý tưởng từ một tranh hài nổi tiếng): nhà nghiên cứu kiểm tra xem kẹo dẻo có gây mụn trứng cá không. Kết quả chung không có gì, nên họ thử riêng 20 màu. Dù không có tác động thật nào (mô phỏng), một màu cho p = 0.03, và tiêu đề báo là 'Kẹo dẻo xanh gây mụn trứng cá!'.</a:t>
+              <a:t>Cách khắc phục: một kết cục chính định trước, các phân tích khác là thăm dò, Bonferroni nếu cần, báo cáo mọi kiểm định.</a:t>
             </a:r>
           </a:p>
           <a:p>
             <a:r>
               <a:rPr lang="en-US" sz="1400" b="0" dirty="0"/>
-              <a:t>Với 20 kiểm định độc lập và không có tác động thật, khả năng có ít nhất một p &lt; 0.05 là khoảng 64%.</a:t>
+              <a:t>Hỏi: 12 phân nhóm, một nhóm có p = 0.04. Có tin không? Kỳ vọng: không nhiều.</a:t>
             </a:r>
           </a:p>
           <a:p>
             <a:r>
               <a:rPr lang="en-US" sz="1400" b="0" dirty="0"/>
-              <a:t>Phiên bản lâm sàng: 10 kết cục phụ, 8 phân nhóm, 5 thời điểm, nhiều chỉ số xét nghiệm, đều được kiểm định và chỉ báo cáo cái 'có ý nghĩa'.</a:t>
-            </a:r>
-          </a:p>
-          <a:p>
-            <a:r>
-              <a:rPr lang="en-US" sz="1400" b="0" dirty="0"/>
-              <a:t>Cách khắc phục (khung bên): định trước một kết cục chính trong đề cương hoặc SAP (6.4). Gọi mọi thứ khác là thăm dò. Hiệu chỉnh ngưỡng khi nhiều kiểm định cùng trả lời một câu hỏi (Bonferroni: 0.05 chia cho số kiểm định, tức 0.0025 với 20 kiểm định). Và báo cáo mọi kiểm định, không chỉ những cái 'thắng'.</a:t>
-            </a:r>
-          </a:p>
-          <a:p>
-            <a:r>
-              <a:rPr lang="en-US" sz="1400" b="0" dirty="0"/>
-              <a:t>Hỏi (mời hai ba người trả lời, bật micro): một bài báo báo cáo 12 phân nhóm và nhấn mạnh phân nhóm có p = 0.04. Anh chị tin đến đâu? Dự kiến: không nhiều. Cần được xác nhận.</a:t>
-            </a:r>
-          </a:p>
-          <a:p>
-            <a:r>
-              <a:rPr lang="en-US" sz="1400" b="0" dirty="0"/>
-              <a:t>Thời lượng: 2 phút.</a:t>
+              <a:t>Thời gian: 2 phút.</a:t>
             </a:r>
           </a:p>
         </p:txBody>
@@ -1460,37 +1341,19 @@
           <a:p>
             <a:r>
               <a:rPr lang="en-US" sz="1400" b="0" dirty="0"/>
-              <a:t>Kiểm tra nhanh (3 phút). Mỗi tình huống một bình chọn với bốn tên kiểm định làm lựa chọn, dựa vào bảng quyết định (số đo hay phân loại? hình dạng hay tần số? ghép cặp?).</a:t>
+              <a:t>Kiểm tra (3 phút), mỗi tình huống một thăm dò.</a:t>
             </a:r>
           </a:p>
           <a:p>
             <a:r>
               <a:rPr lang="en-US" sz="1400" b="0" dirty="0"/>
-              <a:t>1. Mann-Whitney U: số đo, lệch, hai nhóm độc lập (đây chính là câu hỏi thời gian nằm ICU của FLUID-ICU, Q5).</a:t>
+              <a:t>1 Mann-Whitney (phân bố lệch, đây là Q5). 2 khi bình phương. 3 t-test bắt cặp. 4 Fisher chính xác.</a:t>
             </a:r>
           </a:p>
           <a:p>
             <a:r>
               <a:rPr lang="en-US" sz="1400" b="0" dirty="0"/>
-              <a:t>2. Khi bình phương: kết cục nhị phân, hai nhóm độc lập lớn.</a:t>
-            </a:r>
-          </a:p>
-          <a:p>
-            <a:r>
-              <a:rPr lang="en-US" sz="1400" b="0" dirty="0"/>
-              <a:t>3. t ghép cặp (hoặc Wilcoxon cho cặp nếu thay đổi bị lệch): cùng người bệnh đo hai lần.</a:t>
-            </a:r>
-          </a:p>
-          <a:p>
-            <a:r>
-              <a:rPr lang="en-US" sz="1400" b="0" dirty="0"/>
-              <a:t>4. Chính xác Fisher: kết cục nhị phân, tần số rất nhỏ.</a:t>
-            </a:r>
-          </a:p>
-          <a:p>
-            <a:r>
-              <a:rPr lang="en-US" sz="1400" b="0" dirty="0"/>
-              <a:t>Chuyển ý: giờ chạy đúng các kiểm định này trên bộ dữ liệu khóa học (6.2).</a:t>
+              <a:t>Tiếp theo: các kiểm định này trên FLUID-ICU.</a:t>
             </a:r>
           </a:p>
         </p:txBody>
@@ -1571,13 +1434,13 @@
           <a:p>
             <a:r>
               <a:rPr lang="en-US" sz="1400" b="0" dirty="0"/>
-              <a:t>Mở đầu phần 6.2 (20 phút, 20:20 đến 20:40: 6 phút trình diễn các kiểm định, bảng kết quả, một ví dụ minh họa với Q1, rồi 7 phút cả lớp cùng diễn giải các phép so sánh: Q1 đầy đủ, Q2 đến Q5 ngắn gọn).</a:t>
+              <a:t>Phần 6.2 (20:20-20:40).</a:t>
             </a:r>
           </a:p>
           <a:p>
             <a:r>
               <a:rPr lang="en-US" sz="1400" b="0" dirty="0"/>
-              <a:t>Thông điệp chính: bảng chọn kiểm định ở 6.1, áp dụng cho FLUID-ICU. Mọi so sánh ở đây đều chưa hiệu chỉnh: nhớ Bảng 1 (nhóm cân bằng dương nặng hơn).</a:t>
+              <a:t>Bảng chọn kiểm định áp dụng cho FLUID-ICU. Mọi so sánh đều chưa hiệu chỉnh: nhóm cân bằng dương nặng hơn (Bảng 1).</a:t>
             </a:r>
           </a:p>
         </p:txBody>
@@ -1658,25 +1521,25 @@
           <a:p>
             <a:r>
               <a:rPr lang="en-US" sz="1400" b="0" dirty="0"/>
-              <a:t>Trình diễn trực tiếp trên màn hình chia sẻ, 6 phút. Kịch bản đầy đủ: Course/Demos/s6_demo.md (Phần B), dùng Course/Data/R/03_compare.R.</a:t>
+              <a:t>Trình diễn trực tiếp, 6 phút. Kịch bản: s6_demo_VN.md, Phần B (03_compare.R).</a:t>
             </a:r>
           </a:p>
           <a:p>
             <a:r>
               <a:rPr lang="en-US" sz="1400" b="0" dirty="0"/>
-              <a:t>Với mỗi phép so sánh, mời một người nêu tên kiểm định trước khi chạy (bảng quyết định).</a:t>
+              <a:t>Mời một người gọi tên kiểm định trước mỗi lần chạy.</a:t>
             </a:r>
           </a:p>
           <a:p>
             <a:r>
               <a:rPr lang="en-US" sz="1400" b="0" dirty="0"/>
-              <a:t>Cho thấy: tuổi với kiểm định t. SOFA (điểm mức độ nặng) và lactat với Mann-Whitney (chú ý 91 người bệnh không có lactat nên n thay đổi). Tử vong 28 ngày dạng bảng 2x2: 134/373 (35.9%) so với 45/245 (18.4%), khi bình phương p &lt; 0.001. Kiểm định t 'sai' trên thời gian nằm ICU lệch ở người sống (chênh lệch trung bình 2.7 ngày) đặt cạnh chênh lệch Mann-Whitney / Hodges-Lehmann (2.5 ngày).</a:t>
+              <a:t>Cho xem tử vong dạng bảng 2x2: 134/373 (35.9%) so với 45/245 (18.4%). Kết thúc bằng t-test sai trên thời gian nằm ICU phân bố lệch.</a:t>
             </a:r>
           </a:p>
           <a:p>
             <a:r>
               <a:rPr lang="en-US" sz="1400" b="0" dirty="0"/>
-              <a:t>Nếu R lỗi: dùng trang sau (mọi kết quả trong một bảng).</a:t>
+              <a:t>Nếu R lỗi, dùng trang sau.</a:t>
             </a:r>
           </a:p>
         </p:txBody>
@@ -1757,55 +1620,25 @@
           <a:p>
             <a:r>
               <a:rPr lang="en-US" sz="1400" b="0" dirty="0"/>
-              <a:t>Ý chính: kiểm định đúng cho mỗi loại kết cục, và đọc kết quả như một tác động.</a:t>
+              <a:t>Mỗi loại kết cục một kiểm định, mỗi kết quả đọc thành một tác động.</a:t>
             </a:r>
           </a:p>
           <a:p>
             <a:r>
               <a:rPr lang="en-US" sz="1400" b="0" dirty="0"/>
-              <a:t>Tử vong 28 ngày (nhị phân, Q1): 134/373 (35.9%) so với 45/245 (18.4%). Hiệu số nguy cơ 17.6 điểm phần trăm (KTC 95% 10.7 đến 24.4), RR 1.96. Khi bình phương p &lt; 0.001.</a:t>
+              <a:t>Tử vong (Q1): chênh lệch nguy cơ 17.6 điểm (10.7 đến 24.4). AKI (Q2): 61.7% so với 29.0%. Số ngày không thở máy (Q3): trung vị 20 so với 28. Thời gian nằm ICU ở người sống sót (Q5): chênh 2.5 ngày (1.8 đến 3.2).</a:t>
             </a:r>
           </a:p>
           <a:p>
             <a:r>
               <a:rPr lang="en-US" sz="1400" b="0" dirty="0"/>
-              <a:t>AKI (nhị phân, Q2): 230/373 (61.7%) so với 71/245 (29.0%). Khi bình phương p &lt; 0.001.</a:t>
+              <a:t>Tất cả chưa hiệu chỉnh: lẫn ảnh hưởng của dịch và mức độ nặng.</a:t>
             </a:r>
           </a:p>
           <a:p>
             <a:r>
               <a:rPr lang="en-US" sz="1400" b="0" dirty="0"/>
-              <a:t>Số ngày không thở máy (biến đếm 0-28, dồn ở 0 và 28, Q3): trung vị 20 (0 đến 28) so với 28 (22 đến 28). Mann-Whitney p &lt; 0.001.</a:t>
-            </a:r>
-          </a:p>
-          <a:p>
-            <a:r>
-              <a:rPr lang="en-US" sz="1400" b="0" dirty="0"/>
-              <a:t>Thời gian nằm ICU ở người sống (lệch, Q5): trung vị 7.5 (5.2 đến 11.2) so với 4.8 (3.3 đến 7.1) ngày. Mann-Whitney p &lt; 0.001. Chênh lệch Hodges-Lehmann 2.5 ngày (KTC 95% 1.8 đến 3.2).</a:t>
-            </a:r>
-          </a:p>
-          <a:p>
-            <a:r>
-              <a:rPr lang="en-US" sz="1400" b="0" dirty="0"/>
-              <a:t>(Q4 so sánh lactat giữa người tử vong và người sống: trung vị 3.1 so với 2.3 mmol/L, có trong gói kết quả Q4.)</a:t>
-            </a:r>
-          </a:p>
-          <a:p>
-            <a:r>
-              <a:rPr lang="en-US" sz="1400" b="0" dirty="0"/>
-              <a:t>Tất cả chưa hiệu chỉnh: nhóm cân bằng dương nặng hơn ngay từ đầu (Bảng 1). Các khác biệt này trộn lẫn tác động của dịch với tác động của mức độ nặng. Đó là lý do phần 6.4 hiệu chỉnh.</a:t>
-            </a:r>
-          </a:p>
-          <a:p>
-            <a:r>
-              <a:rPr lang="en-US" sz="1400" b="0" dirty="0"/>
-              <a:t>Hỏi (mời hai ba người trả lời, bật micro): con số nào anh chị đưa vào phần tóm tắt cho tử vong: p &lt; 0.001, hay hiệu số nguy cơ kèm KTC? Dự kiến: hiệu số nguy cơ kèm KTC (và sau đó là OR đã hiệu chỉnh).</a:t>
-            </a:r>
-          </a:p>
-          <a:p>
-            <a:r>
-              <a:rPr lang="en-US" sz="1400" b="0" dirty="0"/>
-              <a:t>Trang này giờ là bảng chỉnh sửa được (trước đây là ảnh).</a:t>
+              <a:t>Hỏi: số nào đưa vào tóm tắt? Kỳ vọng: tác động kèm KTC.</a:t>
             </a:r>
           </a:p>
         </p:txBody>
@@ -1886,43 +1719,25 @@
           <a:p>
             <a:r>
               <a:rPr lang="en-US" sz="1400" b="0" dirty="0"/>
-              <a:t>Ví dụ minh họa (3 phút), bước tính toán duy nhất: bảng 2x2 ở Buổi 4 áp dụng cho bộ dữ liệu.</a:t>
+              <a:t>Ví dụ minh họa (3 phút): bảng 2x2 của Buổi 4 áp dụng cho bộ dữ liệu.</a:t>
             </a:r>
           </a:p>
           <a:p>
             <a:r>
               <a:rPr lang="en-US" sz="1400" b="0" dirty="0"/>
-              <a:t>Nguy cơ: 134 trong 373 người bệnh cân bằng dương tử vong (35.9%), 45 trong 245 người bệnh cân bằng âm (18.4%).</a:t>
+              <a:t>35.9% so với 18.4%: chênh 17.6 điểm (10.7 đến 24.4), RR 1.96, p &lt; 0.001.</a:t>
             </a:r>
           </a:p>
           <a:p>
             <a:r>
               <a:rPr lang="en-US" sz="1400" b="0" dirty="0"/>
-              <a:t>Hiệu số nguy cơ: 35.9 - 18.4 = 17.6 điểm phần trăm (làm tròn), KTC 95% 10.7 đến 24.4: cách xa 0.</a:t>
+              <a:t>Nhưng nhóm dương nặng hơn: so sánh thô không tách được dịch khỏi mức độ nặng.</a:t>
             </a:r>
           </a:p>
           <a:p>
             <a:r>
               <a:rPr lang="en-US" sz="1400" b="0" dirty="0"/>
-              <a:t>Nguy cơ tương đối: 35.9 / 18.4 = 1.96: nguy cơ khoảng gấp đôi.</a:t>
-            </a:r>
-          </a:p>
-          <a:p>
-            <a:r>
-              <a:rPr lang="en-US" sz="1400" b="0" dirty="0"/>
-              <a:t>Kiểm định: khi bình phương p &lt; 0.001 (hai phía): khác biệt như vậy sẽ rất đáng ngạc nhiên nếu không có khác biệt.</a:t>
-            </a:r>
-          </a:p>
-          <a:p>
-            <a:r>
-              <a:rPr lang="en-US" sz="1400" b="0" dirty="0"/>
-              <a:t>Nhưng: đây là thuần tập. Người bệnh cân bằng dương nặng hơn (SOFA 8 so với 6). So sánh thô không tách được dịch truyền khỏi mức độ nặng.</a:t>
-            </a:r>
-          </a:p>
-          <a:p>
-            <a:r>
-              <a:rPr lang="en-US" sz="1400" b="0" dirty="0"/>
-              <a:t>Câu mẫu: 'Tử vong 28 ngày là 35.9% ở người bệnh cân bằng dương và 18.4% ở người bệnh cân bằng âm (hiệu số nguy cơ 17.6 điểm phần trăm, KTC 95% 10.7 đến 24.4).'</a:t>
+              <a:t>Câu mẫu cho phần Kết quả: 'Tử vong 28 ngày là 35.9% ở nhóm cân bằng dương và 18.4% ở nhóm cân bằng âm (chênh lệch nguy cơ 17.6 điểm phần trăm, KTC 95% 10.7 đến 24.4).'</a:t>
             </a:r>
           </a:p>
         </p:txBody>
@@ -2003,43 +1818,19 @@
           <a:p>
             <a:r>
               <a:rPr lang="en-US" sz="1400" b="0" dirty="0"/>
-              <a:t>Mục đích: khơi lại Buổi 5 và giúp ai vắng mặt bắt kịp. Không chấm điểm.</a:t>
+              <a:t>Ôn tập (19:30-19:40). Q1 bằng thăm dò, Q2 và Q3: mời hai hoặc ba người trả lời. Rồi mở đáp án.</a:t>
             </a:r>
           </a:p>
           <a:p>
             <a:r>
               <a:rPr lang="en-US" sz="1400" b="0" dirty="0"/>
-              <a:t>Cách làm: C1 dạng bình chọn (trung bình (SD) hay trung vị (IQR)). C2 và C3: mỗi câu mời hai ba người trả lời. Rồi công bố đáp án.</a:t>
+              <a:t>Q1: trung vị (IQR). Q2: đơn vị, thời điểm, lựa chọn 'không làm'. Q3: kiểm tra khoảng giá trị. Nhật ký ghi mã người bệnh, giá trị, việc đã làm, lý do, ai làm và khi nào.</a:t>
             </a:r>
           </a:p>
           <a:p>
             <a:r>
               <a:rPr lang="en-US" sz="1400" b="0" dirty="0"/>
-              <a:t>C1: trung vị (IQR, khoảng tứ phân vị), vì trung bình bị kéo bởi vài ca nằm rất lâu.</a:t>
-            </a:r>
-          </a:p>
-          <a:p>
-            <a:r>
-              <a:rPr lang="en-US" sz="1400" b="0" dirty="0"/>
-              <a:t>C2: đơn vị (mmol/L), thời điểm (lúc vào ICU? cao nhất trong 24 giờ?), và lựa chọn 'không làm'. Thêm số chữ số thập phân.</a:t>
-            </a:r>
-          </a:p>
-          <a:p>
-            <a:r>
-              <a:rPr lang="en-US" sz="1400" b="0" dirty="0"/>
-              <a:t>C3: kiểm tra khoảng giá trị (khoảng cho phép theo từ điển dữ liệu). Trong FLUID-ICU đó là người bệnh flu-529: giá trị được đặt là thiếu và gửi câu hỏi đến cơ sở. Nhật ký làm sạch ghi mã người bệnh, giá trị gốc, cách xử lý (ở đây: đặt là thiếu), lý do (đã đối chiếu hồ sơ gốc) và ai làm khi nào.</a:t>
-            </a:r>
-          </a:p>
-          <a:p>
-            <a:r>
-              <a:rPr lang="en-US" sz="1400" b="0" dirty="0"/>
-              <a:t>Trước khi bắt đầu 6.1, đọc ba bốn câu trả lời cuối Buổi 5 (gửi qua khung chat tuần trước) và sửa các hiểu lầm chung.</a:t>
-            </a:r>
-          </a:p>
-          <a:p>
-            <a:r>
-              <a:rPr lang="en-US" sz="1400" b="0" dirty="0"/>
-              <a:t>Thời lượng: 10 phút (19:30 đến 19:40).</a:t>
+              <a:t>Trước đó, đọc ba hoặc bốn câu trả lời cuối Buổi 5 và sửa các hiểu lầm.</a:t>
             </a:r>
           </a:p>
         </p:txBody>
@@ -2120,49 +1911,25 @@
           <a:p>
             <a:r>
               <a:rPr lang="en-US" sz="1400" b="0" dirty="0"/>
-              <a:t>Bài tập cả lớp, 7 phút (20:33 đến 20:40). Bài 4 trong phiếu bài tập Buổi 6 có cùng các câu hỏi. Mỗi học viên hoàn thành sau cho câu hỏi mình đã chọn. Đáp án mẫu trong Course/Solutions/s6_solutions.md.</a:t>
+              <a:t>Cả lớp, 7 phút (20:33-20:40). Bài 4. Đáp án: s6_solutions_VN.md.</a:t>
             </a:r>
           </a:p>
           <a:p>
             <a:r>
               <a:rPr lang="en-US" sz="1400" b="0" dirty="0"/>
-              <a:t>Q1 đầy đủ (4 phút): bình chọn về kiểm định (khi bình phương: kết cục nhị phân, hai nhóm lớn). Mời hai ba người trả lời về tác động. Gõ câu chung của lớp vào tài liệu chia sẻ: 'Tử vong 28 ngày là 35.9% ở nhóm cân bằng dương và 18.4% ở nhóm cân bằng âm (hiệu số nguy cơ 17.6 điểm phần trăm, KTC 95% 10.7 đến 24.4).' Rồi hỏi về sai lệch: nhiễu do chỉ định. Nhóm cân bằng dương nặng hơn.</a:t>
-            </a:r>
-          </a:p>
-          <a:p>
-            <a:r>
-              <a:rPr lang="en-US" sz="1400" b="1" dirty="0"/>
-              <a:t>Q2 đến Q5 (3 phút), mỗi câu một dòng, giảng viên đọc:</a:t>
+              <a:t>Q1 (4 phút): thăm dò kiểm định (khi bình phương), cùng viết một câu Kết quả kèm KTC, rồi hỏi một sai lệch: nhiễu do chỉ định.</a:t>
             </a:r>
           </a:p>
           <a:p>
             <a:r>
               <a:rPr lang="en-US" sz="1400" b="0" dirty="0"/>
-              <a:t>Q2: AKI 61.7% so với 29.0% (cân bằng dương so với âm), khi bình phương p &lt; 0.001.</a:t>
+              <a:t>Q2 đến Q5 (3 phút): đọc mỗi câu một dòng trong đáp án.</a:t>
             </a:r>
           </a:p>
           <a:p>
             <a:r>
               <a:rPr lang="en-US" sz="1400" b="0" dirty="0"/>
-              <a:t>Q3: số ngày không thở máy trung vị 20 (0 đến 28) so với 28 (22 đến 28), Mann-Whitney p &lt; 0.001.</a:t>
-            </a:r>
-          </a:p>
-          <a:p>
-            <a:r>
-              <a:rPr lang="en-US" sz="1400" b="0" dirty="0"/>
-              <a:t>Q4: lactat trung vị 3.1 (2.2 đến 4.5) mmol/L ở người tử vong so với 2.3 (1.6 đến 3.4) ở người sống.</a:t>
-            </a:r>
-          </a:p>
-          <a:p>
-            <a:r>
-              <a:rPr lang="en-US" sz="1400" b="0" dirty="0"/>
-              <a:t>Q5: thời gian nằm ICU ở người sống trung vị 7.5 (5.2 đến 11.2) so với 4.8 (3.3 đến 7.1) ngày. Chênh lệch Hodges-Lehmann 2.5 ngày (KTC 95% 1.8 đến 3.2).</a:t>
-            </a:r>
-          </a:p>
-          <a:p>
-            <a:r>
-              <a:rPr lang="en-US" sz="1400" b="0" dirty="0"/>
-              <a:t>Sau đó giải lao.</a:t>
+              <a:t>Sau đó học viên làm lại cho câu hỏi mình chọn. Rồi giải lao.</a:t>
             </a:r>
           </a:p>
         </p:txBody>
@@ -2243,25 +2010,13 @@
           <a:p>
             <a:r>
               <a:rPr lang="en-US" sz="1400" b="0" dirty="0"/>
-              <a:t>Slide chỉ có hình, có chủ ý. Trước giờ giải lao, nói: lớp bắt đầu lại lúc 20:55 với phần 6.3 (tương quan, hồi quy tuyến tính và logistic, hiệu chỉnh, Kaplan-Meier và Cox, các mô hình FLUID-ICU). Ai có câu hỏi về các phép so sánh có thể gửi vào khung chat.</a:t>
+              <a:t>Giải lao (20:40-20:55). Nói: 20:55 bắt đầu lại với 6.3.</a:t>
             </a:r>
           </a:p>
           <a:p>
             <a:r>
               <a:rPr lang="en-US" sz="1400" b="0" dirty="0"/>
-              <a:t>Giải lao: 15 phút (20:40 đến 20:55). Bắt đầu lại đúng giờ.</a:t>
-            </a:r>
-          </a:p>
-          <a:p>
-            <a:r>
-              <a:rPr lang="en-US" sz="1400" b="0" dirty="0"/>
-              <a:t>Trong giờ giải lao: mở 04_models.R và 05_missing.R và kiểm tra các hình dự phòng cho phần 6.4.</a:t>
-            </a:r>
-          </a:p>
-          <a:p>
-            <a:r>
-              <a:rPr lang="en-US" sz="1400" b="0" dirty="0"/>
-              <a:t>Gom các câu hỏi gửi trong khung chat về kết quả so sánh. Trả lời những câu chung khi bắt đầu 6.3.</a:t>
+              <a:t>Mở 04_models.R và 05_missing.R. Gom các câu hỏi trong khung chat về phần so sánh và trả lời ở đầu 6.3.</a:t>
             </a:r>
           </a:p>
         </p:txBody>
@@ -2342,25 +2097,19 @@
           <a:p>
             <a:r>
               <a:rPr lang="en-US" sz="1400" b="0" dirty="0"/>
-              <a:t>Mở đầu phần 6.3 (35 phút, 20:55 đến 21:30: tương quan, hồi quy tuyến tính và logistic, chọn mô hình, hiệu chỉnh, đọc bảng hồi quy kèm 4 phút kiểm tra nhanh, quá khớp, kiểm duyệt và đọc đường cong Kaplan-Meier, tương tác, giá trị không tác động và dự báo/học máy là trang bổ sung).</a:t>
+              <a:t>Phần 6.3 (20:55-21:30).</a:t>
             </a:r>
           </a:p>
           <a:p>
             <a:r>
               <a:rPr lang="en-US" sz="1400" b="0" dirty="0"/>
-              <a:t>Thông điệp chính: mọi mô hình trả lời cùng một câu hỏi bằng những ngôn ngữ khác nhau: kết cục liên quan với phơi nhiễm thế nào, và chắc chắn đến đâu? Cần bốn điều để đọc bất kỳ mô hình nào: kết cục là gì, mô hình nào đi kèm, con số có nghĩa gì (hệ số, OR hay HR) và giá trị 'không tác động' nằm ở đâu.</a:t>
+              <a:t>Mọi mô hình trả lời một câu hỏi: kết cục liên quan với phơi nhiễm thế nào, và ta chắc đến đâu? Đọc bốn điều: kết cục, mô hình, con số, giá trị 'không tác động'.</a:t>
             </a:r>
           </a:p>
           <a:p>
             <a:r>
               <a:rPr lang="en-US" sz="1400" b="0" dirty="0"/>
-              <a:t>Nối lại Buổi 4: nhiễu do chỉ định. Mô hình là một trong những công cụ chính để xử lý các yếu tố gây nhiễu đã đo được trong nghiên cứu quan sát.</a:t>
-            </a:r>
-          </a:p>
-          <a:p>
-            <a:r>
-              <a:rPr lang="en-US" sz="1400" b="0" dirty="0"/>
-              <a:t>Chuyển ý: bắt đầu từ mối liên quan đơn giản nhất, hai con số trên biểu đồ phân tán.</a:t>
+              <a:t>Mô hình là công cụ chính để xử lý nhiễu đã đo được (Buổi 4).</a:t>
             </a:r>
           </a:p>
         </p:txBody>
@@ -2441,43 +2190,25 @@
           <a:p>
             <a:r>
               <a:rPr lang="en-US" sz="1400" b="0" dirty="0"/>
-              <a:t>Ý chính: hệ số tương quan r tóm tắt biểu đồ phân tán của hai biến số bằng một con số.</a:t>
+              <a:t>r tóm tắt biểu đồ phân tán bằng một con số, từ -1 đến +1.</a:t>
             </a:r>
           </a:p>
           <a:p>
             <a:r>
               <a:rPr lang="en-US" sz="1400" b="0" dirty="0"/>
-              <a:t>Đọc các khung: r gần +1, các điểm nằm sát một đường đi lên. R khoảng 0.5, đám mây lỏng có xu hướng. R gần 0, không có liên quan theo đường thẳng. R âm, biến này tăng thì biến kia giảm.</a:t>
+              <a:t>Ô cuối là cái bẫy: r gần 0 nhưng có đường cong rất rõ. Luôn nhìn biểu đồ.</a:t>
             </a:r>
           </a:p>
           <a:p>
             <a:r>
               <a:rPr lang="en-US" sz="1400" b="0" dirty="0"/>
-              <a:t>Khung cuối là cái bẫy: r gần 0, nhưng có một liên quan dạng cong rất mạnh (ví dụ liều tối ưu, hay tử vong hình chữ U theo huyết áp). r chỉ đo liên quan theo đường thẳng, nên luôn phải nhìn biểu đồ.</a:t>
+              <a:t>Với nhiều người bệnh, r rất nhỏ vẫn có thể 'có ý nghĩa' mà vô dụng.</a:t>
             </a:r>
           </a:p>
           <a:p>
             <a:r>
               <a:rPr lang="en-US" sz="1400" b="0" dirty="0"/>
-              <a:t>Hướng dẫn ước lượng (không phải quy tắc): 0.1 yếu, 0.3 vừa, từ 0.5 trở lên mạnh, nhưng ý nghĩa lâm sàng quan trọng hơn.</a:t>
-            </a:r>
-          </a:p>
-          <a:p>
-            <a:r>
-              <a:rPr lang="en-US" sz="1400" b="0" dirty="0"/>
-              <a:t>r cũng có giá trị p. Với rất nhiều người bệnh, một r rất nhỏ như 0.1 vẫn có thể 'có ý nghĩa' mà vô dụng.</a:t>
-            </a:r>
-          </a:p>
-          <a:p>
-            <a:r>
-              <a:rPr lang="en-US" sz="1400" b="0" dirty="0"/>
-              <a:t>Hỏi (mời hai ba người trả lời, bật micro): khung nào giống tuổi so với huyết áp tâm thu ở người lớn? Dự kiến: dương, mức vừa.</a:t>
-            </a:r>
-          </a:p>
-          <a:p>
-            <a:r>
-              <a:rPr lang="en-US" sz="1400" b="0" dirty="0"/>
-              <a:t>Thời lượng: 2 phút.</a:t>
+              <a:t>Thời gian: 2 phút.</a:t>
             </a:r>
           </a:p>
         </p:txBody>
@@ -2558,55 +2289,25 @@
           <a:p>
             <a:r>
               <a:rPr lang="en-US" sz="1400" b="0" dirty="0"/>
-              <a:t>Ý chính: hồi quy tuyến tính vẽ đường thẳng phù hợp nhất với các điểm, cho một kết cục là số đo.</a:t>
+              <a:t>Hồi quy tuyến tính: đường thẳng phù hợp nhất cho kết cục dạng số. Hệ số góc = thay đổi trên mỗi đơn vị phơi nhiễm, giá trị không tác động là 0. R² = mức đường thẳng giải thích được.</a:t>
             </a:r>
           </a:p>
           <a:p>
             <a:r>
               <a:rPr lang="en-US" sz="1400" b="0" dirty="0"/>
-              <a:t>Hệ số chặn (intercept): kết cục kỳ vọng khi phơi nhiễm bằng 0 (ở đây tỷ số P/F, tức PaO2 chia FiO2, khoảng 292 khi cân bằng dịch bằng 0). Thường không có ý nghĩa riêng.</a:t>
+              <a:t>Thêm biến cho ta các hệ số 'đã hiệu chỉnh'.</a:t>
             </a:r>
           </a:p>
           <a:p>
             <a:r>
               <a:rPr lang="en-US" sz="1400" b="0" dirty="0"/>
-              <a:t>Hệ số góc (slope): kết cục thay đổi bao nhiêu khi phơi nhiễm tăng một đơn vị: ở đây khoảng -15 cho mỗi lít cân bằng dịch tăng thêm. Đây chính là hệ số B anh chị đọc trong bảng hồi quy, kèm KTC 95%. Giá trị không tác động là 0.</a:t>
+              <a:t>Hỏi: B = -15 (-19 đến -11)? Kỳ vọng: mỗi lít thêm đi kèm tỷ lệ P/F thấp hơn khoảng 15.</a:t>
             </a:r>
           </a:p>
           <a:p>
             <a:r>
               <a:rPr lang="en-US" sz="1400" b="0" dirty="0"/>
-              <a:t>R²: tỷ lệ dao động của kết cục được đường thẳng giải thích (ở đây khoảng 0.6). Nhiều yếu tố khác giải thích phần còn lại.</a:t>
-            </a:r>
-          </a:p>
-          <a:p>
-            <a:r>
-              <a:rPr lang="en-US" sz="1400" b="0" dirty="0"/>
-              <a:t>Thêm nhiều biến vào mô hình (hồi quy đa biến) cho mỗi hệ số góc được 'hiệu chỉnh' theo các biến khác: cùng ý tưởng với hình phân tầng, nhưng do máy tính làm.</a:t>
-            </a:r>
-          </a:p>
-          <a:p>
-            <a:r>
-              <a:rPr lang="en-US" sz="1400" b="0" dirty="0"/>
-              <a:t>Dữ liệu là mô phỏng. Đây không phải nhận định về oxy hóa thật.</a:t>
-            </a:r>
-          </a:p>
-          <a:p>
-            <a:r>
-              <a:rPr lang="en-US" sz="1400" b="0" dirty="0"/>
-              <a:t>Lỗi thường gặp: ngoại suy đường thẳng ra ngoài phạm vi dữ liệu (cân bằng dịch 20 L sẽ dự đoán tỷ số P/F âm).</a:t>
-            </a:r>
-          </a:p>
-          <a:p>
-            <a:r>
-              <a:rPr lang="en-US" sz="1400" b="0" dirty="0"/>
-              <a:t>Hỏi (mời hai ba người trả lời, bật micro): trong bảng, B = -15 (KTC 95% -19 đến -11). Nghĩa là gì? Dự kiến: mỗi lít tăng thêm liên quan với tỷ số P/F thấp hơn khoảng 15 điểm, hợp lý trong khoảng 11 đến 19.</a:t>
-            </a:r>
-          </a:p>
-          <a:p>
-            <a:r>
-              <a:rPr lang="en-US" sz="1400" b="0" dirty="0"/>
-              <a:t>Thời lượng: 2 phút.</a:t>
+              <a:t>Thời gian: 2 phút.</a:t>
             </a:r>
           </a:p>
         </p:txBody>
@@ -2687,43 +2388,25 @@
           <a:p>
             <a:r>
               <a:rPr lang="en-US" sz="1400" b="0" dirty="0"/>
-              <a:t>Ý chính: khi kết cục là có/không (tử vong đến ngày 28), đường thẳng không dùng được: xác suất không thể dưới 0% hay trên 100%. Hồi quy logistic dùng một đường cong hình chữ S.</a:t>
+              <a:t>Với kết cục có/không, đường cong có hình chữ S. Mô hình cho OR trên mỗi đơn vị (ở đây 1.42 mỗi mmol/L lactat). Giá trị không tác động là 1.</a:t>
             </a:r>
           </a:p>
           <a:p>
             <a:r>
               <a:rPr lang="en-US" sz="1400" b="0" dirty="0"/>
-              <a:t>Chấm xám: từng người bệnh mô phỏng, ở trên nếu tử vong và ở dưới nếu sống. Đường xanh: xác suất tử vong ở mỗi mức lactat: khoảng 9% ở 2 mmol/L, 29% ở 6, 62% ở 10.</a:t>
+              <a:t>Lỗi thường gặp: 'OR 1.42 nghĩa là tử vong nhiều hơn 42%'. Đó là odds cao hơn 42%.</a:t>
             </a:r>
           </a:p>
           <a:p>
             <a:r>
               <a:rPr lang="en-US" sz="1400" b="0" dirty="0"/>
-              <a:t>Mô hình báo cáo tỷ số chênh (OR): ở đây mỗi 1 mmol/L tăng thêm nhân số chênh (odds) tử vong lên 1.42 lần. OR không đổi dọc theo đường cong. Còn thay đổi xác suất thì thay đổi (nhỏ ở hai đầu, lớn ở giữa).</a:t>
+              <a:t>Hỏi: nếu lactat không có tác động thì sao? Kỳ vọng: đường nằm ngang, OR 1.</a:t>
             </a:r>
           </a:p>
           <a:p>
             <a:r>
               <a:rPr lang="en-US" sz="1400" b="0" dirty="0"/>
-              <a:t>Đây chính là OR anh chị đọc trong bảng hồi quy logistic, kèm KTC 95%. Giá trị không tác động là 1. OR đã hiệu chỉnh đến từ mô hình có nhiều biến.</a:t>
-            </a:r>
-          </a:p>
-          <a:p>
-            <a:r>
-              <a:rPr lang="en-US" sz="1400" b="0" dirty="0"/>
-              <a:t>Lỗi thường gặp: 'OR 1.42 nghĩa là tử vong nhiều hơn 42%'. Đó là số chênh cao hơn 42% mỗi đơn vị. Thay đổi nguy cơ phụ thuộc vị trí trên đường cong.</a:t>
-            </a:r>
-          </a:p>
-          <a:p>
-            <a:r>
-              <a:rPr lang="en-US" sz="1400" b="0" dirty="0"/>
-              <a:t>Hỏi (mời hai ba người trả lời, bật micro): nếu lactat không có tác động, đường cong sẽ trông thế nào? Dự kiến: một đường nằm ngang, OR = 1.</a:t>
-            </a:r>
-          </a:p>
-          <a:p>
-            <a:r>
-              <a:rPr lang="en-US" sz="1400" b="0" dirty="0"/>
-              <a:t>Thời lượng: 2 phút.</a:t>
+              <a:t>Thời gian: 2 phút.</a:t>
             </a:r>
           </a:p>
         </p:txBody>
@@ -2804,49 +2487,19 @@
           <a:p>
             <a:r>
               <a:rPr lang="en-US" sz="1400" b="0" dirty="0"/>
-              <a:t>Ý chính: kết cục quyết định mô hình, cũng như nó đã quyết định kiểm định.</a:t>
+              <a:t>Kết cục quyết định mô hình: biến số, hồi quy tuyến tính (chênh lệch, không tác động = 0). Có/không, hồi quy logistic (OR, không tác động = 1). Thời gian đến sự kiện, Cox (HR, không tác động = 1).</a:t>
             </a:r>
           </a:p>
           <a:p>
             <a:r>
               <a:rPr lang="en-US" sz="1400" b="0" dirty="0"/>
-              <a:t>Một số đo (cân bằng dịch ml/kg): hồi quy tuyến tính. Báo cáo hệ số (B hoặc beta), là một hiệu số của kết cục trên mỗi đơn vị phơi nhiễm. Không tác động = 0.</a:t>
+              <a:t>Lỗi thường gặp: tìm số 0 trong bảng OR.</a:t>
             </a:r>
           </a:p>
           <a:p>
             <a:r>
               <a:rPr lang="en-US" sz="1400" b="0" dirty="0"/>
-              <a:t>Có/không (tử vong đến ngày 28): hồi quy logistic. Báo cáo tỷ số chênh (OR). Không tác động = 1.</a:t>
-            </a:r>
-          </a:p>
-          <a:p>
-            <a:r>
-              <a:rPr lang="en-US" sz="1400" b="0" dirty="0"/>
-              <a:t>Thời gian đến sự kiện (thời gian đến tử vong, người bệnh còn sống ở ngày 28 được kiểm duyệt): hồi quy Cox. Báo cáo tỷ số nguy cơ tức thời (HR). Không tác động = 1. Bài báo 2 dùng hồi quy Cox.</a:t>
-            </a:r>
-          </a:p>
-          <a:p>
-            <a:r>
-              <a:rPr lang="en-US" sz="1400" b="0" dirty="0"/>
-              <a:t>Vì sao 0 và 1? Hiệu số bằng 0 nghĩa là không khác biệt. Tỷ số bằng 1 nghĩa là hai nhóm như nhau (2 chia 2 bằng 1).</a:t>
-            </a:r>
-          </a:p>
-          <a:p>
-            <a:r>
-              <a:rPr lang="en-US" sz="1400" b="0" dirty="0"/>
-              <a:t>Lỗi thường gặp: tìm xem 'KTC có cắt qua 0 không' trong bảng OR. Với tỷ số, đó là 1.</a:t>
-            </a:r>
-          </a:p>
-          <a:p>
-            <a:r>
-              <a:rPr lang="en-US" sz="1400" b="0" dirty="0"/>
-              <a:t>Hỏi (mời hai ba người trả lời, bật micro): một nghiên cứu về thời gian nằm viện tính bằng ngày, phân tích như một số đo. Mô hình nào và giá trị không tác động là bao nhiêu? Dự kiến: tuyến tính, 0. (Nhà thống kê có thể chọn mô hình khác cho dữ liệu lệch, nhưng nguyên tắc đọc vẫn như vậy.)</a:t>
-            </a:r>
-          </a:p>
-          <a:p>
-            <a:r>
-              <a:rPr lang="en-US" sz="1400" b="0" dirty="0"/>
-              <a:t>Trang này giờ là bảng chỉnh sửa được (trước đây là ảnh).</a:t>
+              <a:t>Hỏi: thời gian nằm viện dạng số? Kỳ vọng: tuyến tính, giá trị 0.</a:t>
             </a:r>
           </a:p>
         </p:txBody>
@@ -2927,43 +2580,19 @@
           <a:p>
             <a:r>
               <a:rPr lang="en-US" sz="1400" b="0" dirty="0"/>
-              <a:t>Ý chính: hiệu chỉnh cho một yếu tố gây nhiễu nghĩa là so sánh những người bệnh giống nhau về yếu tố đó.</a:t>
+              <a:t>Thô: nhiều dịch hơn, tử vong nhiều hơn (33% so với 18%). Chia theo mức độ nặng: không có khác biệt trong từng tầng.</a:t>
             </a:r>
           </a:p>
           <a:p>
             <a:r>
               <a:rPr lang="en-US" sz="1400" b="0" dirty="0"/>
-              <a:t>Bên trái (thô): người bệnh được truyền nhiều dịch tử vong nhiều hơn (33% so với 18%). Có vẻ như dịch truyền có hại.</a:t>
+              <a:t>Mức độ nặng quyết định cả hai: nhiễu do chỉ định. Mô hình làm phép chia này cho nhiều biến nhiễu cùng lúc.</a:t>
             </a:r>
           </a:p>
           <a:p>
             <a:r>
               <a:rPr lang="en-US" sz="1400" b="0" dirty="0"/>
-              <a:t>Bên phải (phân tầng theo mức độ nặng): ở người bệnh nhẹ hơn, 10% tử vong dù nhiều hay ít dịch. Ở người bệnh nặng hơn, 40% tử vong trong cả hai trường hợp. Trong từng mức độ nặng không có khác biệt.</a:t>
-            </a:r>
-          </a:p>
-          <a:p>
-            <a:r>
-              <a:rPr lang="en-US" sz="1400" b="0" dirty="0"/>
-              <a:t>Chuyện gì đã xảy ra? Người bệnh nặng hơn vừa dễ được truyền nhiều dịch hơn (150 trên 200) vừa dễ tử vong hơn. Mức độ nặng tạo ra khác biệt thô: nhiễu do chỉ định, đúng như Buổi 4.</a:t>
-            </a:r>
-          </a:p>
-          <a:p>
-            <a:r>
-              <a:rPr lang="en-US" sz="1400" b="0" dirty="0"/>
-              <a:t>Mô hình hồi quy làm điều tương tự như cách chia tầng này, nhưng cho nhiều yếu tố gây nhiễu cùng lúc (tuổi, SOFA, lactat...). Bài báo 2 dùng ghép cặp theo điểm xu hướng cho cùng mục đích.</a:t>
-            </a:r>
-          </a:p>
-          <a:p>
-            <a:r>
-              <a:rPr lang="en-US" sz="1400" b="0" dirty="0"/>
-              <a:t>Hạn chế: chỉ hiệu chỉnh được những yếu tố gây nhiễu đã đo. Nhiễu chưa đo vẫn còn. Chỉ phân bổ ngẫu nhiên mới bảo vệ được trước nó.</a:t>
-            </a:r>
-          </a:p>
-          <a:p>
-            <a:r>
-              <a:rPr lang="en-US" sz="1400" b="0" dirty="0"/>
-              <a:t>Hỏi (mời hai ba người trả lời, bật micro): sau hiệu chỉnh, có thể nói dịch truyền không gây tử vong không? Dự kiến: không chắc chắn. Có thể còn yếu tố gây nhiễu chưa đo, và đây là số liệu mô phỏng.</a:t>
+              <a:t>Chỉ hiệu chỉnh được các biến nhiễu đã đo. Chỉ phân bổ ngẫu nhiên xử lý được phần còn lại.</a:t>
             </a:r>
           </a:p>
         </p:txBody>
@@ -3044,61 +2673,25 @@
           <a:p>
             <a:r>
               <a:rPr lang="en-US" sz="1400" b="0" dirty="0"/>
-              <a:t>Ý chính: bảng hồi quy có một dòng cho mỗi biến trong mô hình. Đọc mỗi dòng theo bốn bước.</a:t>
+              <a:t>Đọc mỗi dòng theo bốn bước: so sánh gì (nhóm tham chiếu và đơn vị), tác động, KTC, KTC có chứa 1 không?</a:t>
             </a:r>
           </a:p>
           <a:p>
             <a:r>
               <a:rPr lang="en-US" sz="1400" b="0" dirty="0"/>
-              <a:t>1. So sánh: 'cân bằng dịch dương (có so với không)'. 'Tuổi mỗi 10 năm'. 'Nữ so với nam'. Luôn kiểm tra nhóm tham chiếu và đơn vị.</a:t>
+              <a:t>OR 1.80 (1.20 đến 2.70): odds gấp 1.8 lần, đã hiệu chỉnh.</a:t>
             </a:r>
           </a:p>
           <a:p>
             <a:r>
               <a:rPr lang="en-US" sz="1400" b="0" dirty="0"/>
-              <a:t>2. Tác động: OR 1.80. Người bệnh có cân bằng dịch dương có số chênh tử vong gấp 1.8 lần, sau khi hiệu chỉnh các biến khác trong bảng.</a:t>
+              <a:t>Dòng giới tính và lactat chứa 1: phù hợp với không có mối liên quan.</a:t>
             </a:r>
           </a:p>
           <a:p>
             <a:r>
               <a:rPr lang="en-US" sz="1400" b="0" dirty="0"/>
-              <a:t>3. KTC 95%: 1.20 đến 2.70. Các giá trị hợp lý từ tăng 20% đến tăng 170% số chênh.</a:t>
-            </a:r>
-          </a:p>
-          <a:p>
-            <a:r>
-              <a:rPr lang="en-US" sz="1400" b="0" dirty="0"/>
-              <a:t>4. Giá trị không tác động: KTC có chứa 1 không? Không, nên p &lt; 0.05 (p = 0.004). Với giới nữ (0.65-1.30) và lactat (0.98-1.24), KTC chứa 1 (cột cuối): phù hợp với không có liên quan.</a:t>
-            </a:r>
-          </a:p>
-          <a:p>
-            <a:r>
-              <a:rPr lang="en-US" sz="1400" b="0" dirty="0"/>
-              <a:t>Các dòng tính theo đơn vị: OR 1.15 mỗi điểm SOFA nghĩa là mỗi điểm thêm nhân số chênh lên 1.15 lần. Thêm 5 điểm nhân số chênh lên khoảng 2 lần (1.15 mũ 5).</a:t>
-            </a:r>
-          </a:p>
-          <a:p>
-            <a:r>
-              <a:rPr lang="en-US" sz="1400" b="0" dirty="0"/>
-              <a:t>Bảng này là số liệu giả định, được xây dựng để giá trị p khớp với KTC.</a:t>
-            </a:r>
-          </a:p>
-          <a:p>
-            <a:r>
-              <a:rPr lang="en-US" sz="1400" b="0" dirty="0"/>
-              <a:t>Cách diễn đạt: 'có liên quan với', không phải 'gây ra'. Đây là phân tích quan sát.</a:t>
-            </a:r>
-          </a:p>
-          <a:p>
-            <a:r>
-              <a:rPr lang="en-US" sz="1400" b="0" dirty="0"/>
-              <a:t>Lỗi thường gặp: hiểu OR 1.8 là 'tử vong nhiều hơn 80%'. Đó là số chênh cao hơn 80%. Khi kết cục thường gặp (như tử vong ở ICU), nguy cơ tương đối (RR) nhỏ hơn OR.</a:t>
-            </a:r>
-          </a:p>
-          <a:p>
-            <a:r>
-              <a:rPr lang="en-US" sz="1400" b="0" dirty="0"/>
-              <a:t>Trang này giờ là bảng chỉnh sửa được (trước đây là ảnh). Cột 'KTC có chứa 1 không?' thay cho phần tô màu đỏ.</a:t>
+              <a:t>Số liệu giả định. Nói 'có liên quan', và 'odds' chứ không phải 'nguy cơ'.</a:t>
             </a:r>
           </a:p>
         </p:txBody>
@@ -3179,43 +2772,25 @@
           <a:p>
             <a:r>
               <a:rPr lang="en-US" sz="1400" b="0" dirty="0"/>
-              <a:t>Kiểm tra nhanh (4 phút), dùng bảng của ví dụ xuyên suốt ở trang trước (quay lại trang đó trên màn hình).</a:t>
+              <a:t>Kiểm tra (4 phút), dùng bảng ở trang trước.</a:t>
             </a:r>
           </a:p>
           <a:p>
             <a:r>
               <a:rPr lang="en-US" sz="1400" b="0" dirty="0"/>
-              <a:t>Bình chọn 1: có, 0.65 đến 1.30 chứa 1: phù hợp với không có liên quan giữa giới tính và tử vong.</a:t>
+              <a:t>Thăm dò 1: có, phù hợp với không có mối liên quan. Thăm dò 2: odds nhân 1.15 cho mỗi điểm SOFA ('tử vong nhiều hơn 15%' là câu trả lời sai kinh điển).</a:t>
             </a:r>
           </a:p>
           <a:p>
             <a:r>
               <a:rPr lang="en-US" sz="1400" b="0" dirty="0"/>
-              <a:t>Bình chọn 2: mỗi điểm SOFA thêm nhân số chênh tử vong lên 1.15 lần, sau khi hiệu chỉnh các biến khác (lựa chọn sai kinh điển: 'tử vong nhiều hơn 15% mỗi điểm': đó là số chênh, không phải nguy cơ).</a:t>
+              <a:t>Câu mẫu: 'Sau hiệu chỉnh, người bệnh có cân bằng dịch dương có odds tử vong đến ngày 28 gấp khoảng 1.8 lần (OR 1.80, KTC 95% 1.20 đến 2.70).'</a:t>
             </a:r>
           </a:p>
           <a:p>
             <a:r>
               <a:rPr lang="en-US" sz="1400" b="0" dirty="0"/>
-              <a:t>Mời hai ba người trả lời, chọn một câu tốt và chỉnh lại trên màn hình. Câu mẫu: 'Sau khi hiệu chỉnh tuổi, SOFA, giới và lactat, người bệnh có cân bằng dịch dương có số chênh tử vong đến ngày 28 cao khoảng 1.8 lần (OR 1.80, KTC 95% 1.20 đến 2.70).'</a:t>
-            </a:r>
-          </a:p>
-          <a:p>
-            <a:r>
-              <a:rPr lang="en-US" sz="1400" b="0" dirty="0"/>
-              <a:t>Điều cần lắng nghe: nhóm tham chiếu đúng ('so với không'), dùng 'số chênh' thay vì 'nguy cơ', 'có liên quan với' thay vì 'gây ra'.</a:t>
-            </a:r>
-          </a:p>
-          <a:p>
-            <a:r>
-              <a:rPr lang="en-US" sz="1400" b="0" dirty="0"/>
-              <a:t>Luyện thêm (ở nhà): Bài 5 trong phiếu bài tập Buổi 6 (một bảng giả định về sảng, một ví dụ khác) và Bài 6 (đọc đường cong Kaplan-Meier). Đáp án trong Course/Solutions/s6_solutions.md.</a:t>
-            </a:r>
-          </a:p>
-          <a:p>
-            <a:r>
-              <a:rPr lang="en-US" sz="1400" b="0" dirty="0"/>
-              <a:t>Chuyển ý: tiếp theo, vì sao quá nhiều biến có thể gây hiểu nhầm (quá khớp), rồi đến phân tích sống còn.</a:t>
+              <a:t>Bài 5 và 6 làm ở nhà.</a:t>
             </a:r>
           </a:p>
         </p:txBody>
@@ -3296,25 +2871,19 @@
           <a:p>
             <a:r>
               <a:rPr lang="en-US" sz="1400" b="0" dirty="0"/>
-              <a:t>Mở đầu phần 6.1 (40 phút, 19:40 đến 20:20: khoảng tin cậy, giá trị p, kiểm định một phía hay hai phía, năm cách hiểu sai giá trị p, kiểm tra nhanh, sai lầm và lực thống kê, cỡ mẫu với 5 phút trình diễn trực tiếp, chọn kiểm định, dữ liệu ghép cặp, so sánh bội, kiểm tra nhanh lần hai).</a:t>
+              <a:t>Phần 6.1 (19:40-20:20).</a:t>
             </a:r>
           </a:p>
           <a:p>
             <a:r>
               <a:rPr lang="en-US" sz="1400" b="0" dirty="0"/>
-              <a:t>Thông điệp chính: cần thống kê vì không thể nghiên cứu mọi người bệnh sốc nhiễm khuẩn trên thế giới. Chỉ nghiên cứu được một mẫu, rồi dùng thống kê để nói câu trả lời có thể cách sự thật bao xa.</a:t>
+              <a:t>Ta nghiên cứu một mẫu và dùng thống kê để nói câu trả lời có thể cách sự thật bao xa.</a:t>
             </a:r>
           </a:p>
           <a:p>
             <a:r>
               <a:rPr lang="en-US" sz="1400" b="0" dirty="0"/>
-              <a:t>Trấn an: hôm nay anh chị học cách đọc đúng khoảng tin cậy và giá trị p. Như vậy đã hơn nhiều tác giả có bài đăng.</a:t>
-            </a:r>
-          </a:p>
-          <a:p>
-            <a:r>
-              <a:rPr lang="en-US" sz="1400" b="0" dirty="0"/>
-              <a:t>Chuyển ý: với một mẫu 40, 400 hay 620 người bệnh, ước lượng cách sự thật bao xa? Hình KTC qua 20 lần lặp lại nghiên cứu cho thấy điều đó (hình mẫu và quần thể là trang bổ sung).</a:t>
+              <a:t>Trấn an: đọc đúng KTC và giá trị p đã là hơn nhiều tác giả có bài đăng.</a:t>
             </a:r>
           </a:p>
         </p:txBody>
@@ -3395,43 +2964,25 @@
           <a:p>
             <a:r>
               <a:rPr lang="en-US" sz="1400" b="0" dirty="0"/>
-              <a:t>Ý chính: một mô hình có quá nhiều biến so với số biến cố sẽ học nhiễu trong dữ liệu của mình, không phải sự thật. Nó khớp hoàn hảo với người bệnh của mình và thất bại với những người bệnh tiếp theo.</a:t>
+              <a:t>Quá nhiều biến so với số biến cố: mô hình học cả nhiễu và thất bại với người bệnh mới.</a:t>
             </a:r>
           </a:p>
           <a:p>
             <a:r>
               <a:rPr lang="en-US" sz="1400" b="0" dirty="0"/>
-              <a:t>Hình: đường đỏ đi qua cả 10 điểm đặc (dữ liệu của mình) nhưng bỏ lỡ các điểm rỗng (người bệnh mới). Đường thẳng xanh đơn giản dự đoán tốt hơn cho người bệnh mới.</a:t>
+              <a:t>Quy tắc nhanh: khoảng 10 biến cố cho mỗi biến. Chọn biến từng bước giữ lại các phát hiện do ngẫu nhiên.</a:t>
             </a:r>
           </a:p>
           <a:p>
             <a:r>
               <a:rPr lang="en-US" sz="1400" b="0" dirty="0"/>
-              <a:t>Quy tắc ước lượng: khoảng 10 biến cố (ca tử vong, không phải số người bệnh) cho mỗi biến trong mô hình logistic hoặc Cox. 80 ca tử vong: không quá khoảng 8 biến, các nhóm của biến phân loại được tính riêng. Một số hướng dẫn hiện đại yêu cầu nhiều hơn.</a:t>
+              <a:t>Chọn biến nhiễu từ trước và ghi vào SAP.</a:t>
             </a:r>
           </a:p>
           <a:p>
             <a:r>
               <a:rPr lang="en-US" sz="1400" b="0" dirty="0"/>
-              <a:t>Chọn biến từng bước (stepwise, khung bên): để phần mềm thêm hoặc bỏ biến theo giá trị p. Trông có vẻ khách quan nhưng nó nhân lên vấn đề so sánh bội, giữ lại các phát hiện ngẫu nhiên, ước lượng quá cao tác động của các biến còn lại, cho KTC quá hẹp, và các mẫu khác nhau chọn ra các biến khác nhau.</a:t>
-            </a:r>
-          </a:p>
-          <a:p>
-            <a:r>
-              <a:rPr lang="en-US" sz="1400" b="0" dirty="0"/>
-              <a:t>Tốt hơn: chọn yếu tố gây nhiễu từ trước dựa trên kiến thức lâm sàng và tài liệu đã công bố (sơ đồ nhân quả giúp ích), ghi vào SAP (6.4), và giữ trong giới hạn số biến cố mỗi biến.</a:t>
-            </a:r>
-          </a:p>
-          <a:p>
-            <a:r>
-              <a:rPr lang="en-US" sz="1400" b="0" dirty="0"/>
-              <a:t>Hỏi (mời hai ba người trả lời, bật micro): một nghiên cứu có 40 ca tử vong báo cáo mô hình 15 biến chọn theo từng bước. Anh chị lo ngại gì? Dự kiến: quá khớp. Kết quả sẽ không lặp lại được.</a:t>
-            </a:r>
-          </a:p>
-          <a:p>
-            <a:r>
-              <a:rPr lang="en-US" sz="1400" b="0" dirty="0"/>
-              <a:t>Thời lượng: 2 phút.</a:t>
+              <a:t>Thời gian: 2 phút.</a:t>
             </a:r>
           </a:p>
         </p:txBody>
@@ -3512,43 +3063,19 @@
           <a:p>
             <a:r>
               <a:rPr lang="en-US" sz="1400" b="0" dirty="0"/>
-              <a:t>Ý chính: kết cục thời gian đến sự kiện cần phương pháp riêng vì không phải ai cũng có biến cố trong thời gian theo dõi.</a:t>
+              <a:t>Vòng tròn là người bệnh bị kiểm duyệt: được theo dõi đến lúc đó mà chưa có biến cố. Bị kiểm duyệt không có nghĩa là bị loại: họ vẫn cho biết mình còn sống đến ngày đó.</a:t>
             </a:r>
           </a:p>
           <a:p>
             <a:r>
               <a:rPr lang="en-US" sz="1400" b="0" dirty="0"/>
-              <a:t>Mỗi đường là một người bệnh được theo dõi từ khi vào ICU. Dấu X đỏ là biến cố (tử vong). Vòng tròn là người bệnh bị kiểm duyệt (censoring): việc theo dõi dừng trước khi có biến cố, vì mất theo dõi (chuyển viện, không liên lạc được) hoặc vì nghiên cứu kết thúc ở ngày 28.</a:t>
+              <a:t>Hỏi: ra viện ngày 9, không liên lạc lại được? Kỳ vọng: kiểm duyệt ở ngày 9.</a:t>
             </a:r>
           </a:p>
           <a:p>
             <a:r>
               <a:rPr lang="en-US" sz="1400" b="0" dirty="0"/>
-              <a:t>Kiểm duyệt không có nghĩa là bị loại. Người bệnh 3 cho biết họ còn sống trong 12 ngày, và phương pháp sống còn sử dụng thông tin đó. Loại họ ra, hay tính họ là sống đủ 28 ngày, đều làm sai lệch kết quả.</a:t>
-            </a:r>
-          </a:p>
-          <a:p>
-            <a:r>
-              <a:rPr lang="en-US" sz="1400" b="0" dirty="0"/>
-              <a:t>Vì sao không chỉ so sánh tỷ lệ tử vong ở ngày 28? Có thể, nếu mọi người được theo dõi đến ngày 28. Phương pháp sống còn còn dùng thông tin tử vong xảy ra khi nào và xử lý được thời gian theo dõi không đều.</a:t>
-            </a:r>
-          </a:p>
-          <a:p>
-            <a:r>
-              <a:rPr lang="en-US" sz="1400" b="0" dirty="0"/>
-              <a:t>Giả định: việc kiểm duyệt không liên quan đến kết cục (chuyển đi để chăm sóc giảm nhẹ sẽ vi phạm giả định này). Nghe quen không? Đây cũng là logic của dữ liệu bị thiếu (6.4).</a:t>
-            </a:r>
-          </a:p>
-          <a:p>
-            <a:r>
-              <a:rPr lang="en-US" sz="1400" b="0" dirty="0"/>
-              <a:t>Hỏi (mời hai ba người trả lời, bật micro): một người bệnh xuất viện về nhà ngày 9 và không được liên lạc lại. Biến cố hay kiểm duyệt? Dự kiến: kiểm duyệt tại ngày 9.</a:t>
-            </a:r>
-          </a:p>
-          <a:p>
-            <a:r>
-              <a:rPr lang="en-US" sz="1400" b="0" dirty="0"/>
-              <a:t>Thời lượng: 2 phút.</a:t>
+              <a:t>Thời gian: 2 phút.</a:t>
             </a:r>
           </a:p>
         </p:txBody>
@@ -3629,61 +3156,25 @@
           <a:p>
             <a:r>
               <a:rPr lang="en-US" sz="1400" b="0" dirty="0"/>
-              <a:t>Ý chính: đường cong Kaplan-Meier (KM) thể hiện tỷ lệ còn sống theo thời gian ở mỗi nhóm, có xử lý đúng các người bệnh bị kiểm duyệt.</a:t>
-            </a:r>
-          </a:p>
-          <a:p>
-            <a:r>
-              <a:rPr lang="en-US" sz="1400" b="1" dirty="0"/>
-              <a:t>Đi qua bốn bước đọc ở bên phải hình:</a:t>
+              <a:t>Bốn bước đọc: mỗi bậc đi xuống là tử vong, vạch nhỏ là người bị kiểm duyệt, khoảng cách là khác biệt, và số người còn nguy cơ cho biết phần cuối đường cong chắc đến đâu.</a:t>
             </a:r>
           </a:p>
           <a:p>
             <a:r>
               <a:rPr lang="en-US" sz="1400" b="0" dirty="0"/>
-              <a:t>1. Mỗi bậc đi xuống là một hoặc nhiều ca tử vong.</a:t>
+              <a:t>Kiểm định log-rank cho giá trị p, không cho độ lớn tác động (Cox, 6.4).</a:t>
             </a:r>
           </a:p>
           <a:p>
             <a:r>
               <a:rPr lang="en-US" sz="1400" b="0" dirty="0"/>
-              <a:t>2. Mỗi vạch đứng nhỏ là một người bệnh bị kiểm duyệt.</a:t>
+              <a:t>Hỏi: hai đường cắt nhau giữa chừng? Kỳ vọng: tác động thay đổi theo thời gian.</a:t>
             </a:r>
           </a:p>
           <a:p>
             <a:r>
               <a:rPr lang="en-US" sz="1400" b="0" dirty="0"/>
-              <a:t>3. Khoảng cách theo chiều dọc giữa hai đường là khác biệt về sống còn tại thời điểm đó. Ở đây khoảng 70% so với 59% còn sống ở ngày 28 (thuần tập mô phỏng, 150 mỗi nhóm, tương tự câu hỏi của Bài báo 2).</a:t>
-            </a:r>
-          </a:p>
-          <a:p>
-            <a:r>
-              <a:rPr lang="en-US" sz="1400" b="0" dirty="0"/>
-              <a:t>4. Số còn theo dõi (number at risk) dưới hình cho biết còn bao nhiêu người bệnh đang được theo dõi. Khi con số này giảm, phần cuối bên phải của đường cong dựa trên ít người bệnh và kém chắc chắn hơn. Hình không có số còn theo dõi che giấu điều này. Người phản biện sẽ yêu cầu bổ sung.</a:t>
-            </a:r>
-          </a:p>
-          <a:p>
-            <a:r>
-              <a:rPr lang="en-US" sz="1400" b="0" dirty="0"/>
-              <a:t>Kiểm định log-rank so sánh toàn bộ hai đường cong và cho giá trị p (ở đây p = 0.040). Nó không cho biết độ lớn tác động. Điều đó đến từ mô hình Cox (mục 6.4).</a:t>
-            </a:r>
-          </a:p>
-          <a:p>
-            <a:r>
-              <a:rPr lang="en-US" sz="1400" b="0" dirty="0"/>
-              <a:t>Bài báo 2 có đúng loại hình này (ước lượng Kaplan-Meier sống còn đến ngày 28 trong các thuần tập ghép cặp).</a:t>
-            </a:r>
-          </a:p>
-          <a:p>
-            <a:r>
-              <a:rPr lang="en-US" sz="1400" b="0" dirty="0"/>
-              <a:t>Hỏi (mời hai ba người trả lời, bật micro): nếu hai đường cong cắt nhau ở giữa, điều đó gợi ý gì? Dự kiến: tác động thay đổi theo thời gian. Giả định nguy cơ tỷ lệ có thể không đúng.</a:t>
-            </a:r>
-          </a:p>
-          <a:p>
-            <a:r>
-              <a:rPr lang="en-US" sz="1400" b="0" dirty="0"/>
-              <a:t>Thời lượng: 3 phút.</a:t>
+              <a:t>Thời gian: 3 phút.</a:t>
             </a:r>
           </a:p>
         </p:txBody>
@@ -3764,13 +3255,7 @@
           <a:p>
             <a:r>
               <a:rPr lang="en-US" sz="1400" b="0" dirty="0"/>
-              <a:t>Mở đầu phần 6.4 (25 phút, 21:30 đến 21:55: SAP, OR thô và đã hiệu chỉnh, mô hình hiệu chỉnh, Kaplan-Meier và Cox, lactat bị thiếu, trường hợp đầy đủ so với quy gán đa bội, rồi 7 phút cả lớp cùng diễn giải các mô hình: Q1 đầy đủ, Q2 đến Q5 ngắn gọn).</a:t>
-            </a:r>
-          </a:p>
-          <a:p>
-            <a:r>
-              <a:rPr lang="en-US" sz="1400" b="0" dirty="0"/>
-              <a:t>Thông điệp chính: đây là phần 6.3 (mô hình) áp dụng cho FLUID-ICU, và là thành quả của cả Tuần 5-6: anh chị sẽ thấy nhiễu do chỉ định làm một tỷ số chênh nhỏ lại.</a:t>
+              <a:t>Phần 6.4 (21:30-21:55): các mô hình áp dụng cho FLUID-ICU. Anh chị sẽ thấy nhiễu do chỉ định làm OR nhỏ lại.</a:t>
             </a:r>
           </a:p>
         </p:txBody>
@@ -3851,43 +3336,19 @@
           <a:p>
             <a:r>
               <a:rPr lang="en-US" sz="1400" b="0" dirty="0"/>
-              <a:t>Ý chính: kế hoạch phân tích thống kê có thật cho FLUID-ICU. Mở Course/Data/SAP_FLUID-ICU.md trên màn hình chia sẻ.</a:t>
+              <a:t>Chiếu SAP lên màn hình (SAP_FLUID-ICU_VN.md). Phân tích chính: hồi quy logistic cho tử vong 28 ngày. Biến nhiễu chọn từ trước. Kaplan-Meier và Cox để hỗ trợ. Một phân nhóm. Trường hợp đầy đủ cộng quy gán đa bội.</a:t>
             </a:r>
           </a:p>
           <a:p>
             <a:r>
               <a:rPr lang="en-US" sz="1400" b="0" dirty="0"/>
-              <a:t>Phân tích chính: tử vong 28 ngày bằng hồi quy logistic đa biến. Số đo tác động: tỷ số chênh kèm KTC 95%. Cũng báo cáo OR thô và hiệu số nguy cơ. Mọi kiểm định là hai phía.</a:t>
+              <a:t>AKI và lọc máu không được hiệu chỉnh: chúng xảy ra sau khi truyền dịch.</a:t>
             </a:r>
           </a:p>
           <a:p>
             <a:r>
               <a:rPr lang="en-US" sz="1400" b="0" dirty="0"/>
-              <a:t>Yếu tố gây nhiễu chọn từ trước dựa trên kiến thức lâm sàng (một sơ đồ nhân quả đơn giản): tuổi. Mức độ nặng (SOFA, lactat, vận mạch, thở máy). Bệnh thận mạn. Các biến đo sau ngày 3 (tổn thương thận cấp, lọc máu) không được hiệu chỉnh: chúng là kết cục hoặc biến trung gian.</a:t>
-            </a:r>
-          </a:p>
-          <a:p>
-            <a:r>
-              <a:rPr lang="en-US" sz="1400" b="0" dirty="0"/>
-              <a:t>Phân tích hỗ trợ: đường cong Kaplan-Meier kèm số còn theo dõi, kiểm định log-rank, mô hình Cox với cùng các yếu tố gây nhiễu. Kiểm tra giả định nguy cơ tỷ lệ.</a:t>
-            </a:r>
-          </a:p>
-          <a:p>
-            <a:r>
-              <a:rPr lang="en-US" sz="1400" b="0" dirty="0"/>
-              <a:t>Một yếu tố thay đổi tác động định trước: suy tim (trang bổ sung cho thấy kết quả).</a:t>
-            </a:r>
-          </a:p>
-          <a:p>
-            <a:r>
-              <a:rPr lang="en-US" sz="1400" b="0" dirty="0"/>
-              <a:t>Dữ liệu thiếu: được đánh giá và xử lý bằng phân tích các trường hợp đầy đủ cùng quy gán đa bội (m = 20) làm phân tích độ nhạy.</a:t>
-            </a:r>
-          </a:p>
-          <a:p>
-            <a:r>
-              <a:rPr lang="en-US" sz="1400" b="0" dirty="0"/>
-              <a:t>Hỏi (mời hai ba người trả lời, bật micro): vì sao viết trước bảo vệ tác giả? Dự kiến: không ai có thể cáo buộc họ chọn cách phân tích cho giá trị p 'đẹp nhất' (hay đổi sang kiểm định một phía).</a:t>
+              <a:t>Hỏi: vì sao viết trước? Kỳ vọng: không ai có thể nói anh chị chọn phân tích cho giá trị p đẹp nhất.</a:t>
             </a:r>
           </a:p>
         </p:txBody>
@@ -3968,49 +3429,25 @@
           <a:p>
             <a:r>
               <a:rPr lang="en-US" sz="1400" b="0" dirty="0"/>
-              <a:t>Ý chính: bức hình quan trọng nhất của bộ dữ liệu khóa học (Q1). Dành 4 phút.</a:t>
+              <a:t>Hình quan trọng nhất của bộ dữ liệu (4 phút).</a:t>
             </a:r>
           </a:p>
           <a:p>
             <a:r>
               <a:rPr lang="en-US" sz="1400" b="0" dirty="0"/>
-              <a:t>Tỷ số chênh (OR) thô, cả 618 người bệnh: 2.49 (KTC 95% 1.70 đến 3.70): cân bằng dương có vẻ liên quan mạnh với tử vong.</a:t>
+              <a:t>OR thô 2.49 (1.70 đến 3.70). OR thô trên cùng 527 trường hợp đầy đủ 2.22. Đã hiệu chỉnh 1.62 (1.02 đến 2.59), p = 0.044.</a:t>
             </a:r>
           </a:p>
           <a:p>
             <a:r>
               <a:rPr lang="en-US" sz="1400" b="0" dirty="0"/>
-              <a:t>OR thô ở 527 trường hợp đầy đủ: 2.22 (1.48 đến 3.39): cùng người bệnh với mô hình hiệu chỉnh, nên so sánh công bằng.</a:t>
+              <a:t>OR nhỏ lại vì người nặng hơn được truyền nhiều dịch hơn và tử vong nhiều hơn. Phần còn lại vừa phải, kém chính xác, và vẫn chỉ là mối liên quan.</a:t>
             </a:r>
           </a:p>
           <a:p>
             <a:r>
               <a:rPr lang="en-US" sz="1400" b="0" dirty="0"/>
-              <a:t>OR đã hiệu chỉnh (tuổi, SOFA, lactat, vận mạch, thở máy, CKD), n = 527: 1.62 (KTC 95% 1.02 đến 2.59), p = 0.044.</a:t>
-            </a:r>
-          </a:p>
-          <a:p>
-            <a:r>
-              <a:rPr lang="en-US" sz="1400" b="0" dirty="0"/>
-              <a:t>Vì sao giảm: người bệnh nặng hơn được truyền nhiều dịch hơn và tử vong nhiều hơn. Một phần liên quan thô là do mức độ nặng, không phải dịch. Đây là nhiễu do chỉ định, đúng như hình phân tầng ở phần 6.3, do mô hình thực hiện.</a:t>
-            </a:r>
-          </a:p>
-          <a:p>
-            <a:r>
-              <a:rPr lang="en-US" sz="1400" b="0" dirty="0"/>
-              <a:t>Điều còn lại: một liên quan đã hiệu chỉnh nhỏ hơn và kém chính xác hơn. Giới hạn dưới của KTC gần 1. Nó phù hợp với một tác hại vừa phải, hoặc gần như không có tác động.</a:t>
-            </a:r>
-          </a:p>
-          <a:p>
-            <a:r>
-              <a:rPr lang="en-US" sz="1400" b="0" dirty="0"/>
-              <a:t>Đây vẫn là liên quan: nhiễu chưa đo (mức độ nặng chưa được ghi) có thể vẫn còn.</a:t>
-            </a:r>
-          </a:p>
-          <a:p>
-            <a:r>
-              <a:rPr lang="en-US" sz="1400" b="0" dirty="0"/>
-              <a:t>Hỏi (mời hai ba người trả lời, bật micro): nếu hiệu chỉnh thêm AKI thì có đúng không? Dự kiến: không. AKI xảy ra sau khi truyền dịch và có thể nằm trên con đường tác động (biến trung gian), như SAP đã ghi.</a:t>
+              <a:t>Hỏi: có nên hiệu chỉnh thêm AKI? Kỳ vọng: không, AKI xảy ra sau khi truyền dịch.</a:t>
             </a:r>
           </a:p>
         </p:txBody>
@@ -4091,31 +3528,19 @@
           <a:p>
             <a:r>
               <a:rPr lang="en-US" sz="1400" b="0" dirty="0"/>
-              <a:t>Ý chính: mô hình logistic đa biến của Q1 vẽ thành biểu đồ rừng (forest plot, mọi OR được hiệu chỉnh lẫn nhau, n = 527).</a:t>
+              <a:t>Mô hình của Q1 dạng biểu đồ rừng (n = 527). Cân bằng dương: OR 1.62 (1.02 đến 2.59).</a:t>
             </a:r>
           </a:p>
           <a:p>
             <a:r>
               <a:rPr lang="en-US" sz="1400" b="0" dirty="0"/>
-              <a:t>Cân bằng dịch dương: OR 1.62 (1.02 đến 2.59).</a:t>
+              <a:t>Các dòng khác là biến nhiễu: có mặt để hiệu chỉnh, không phải để diễn giải.</a:t>
             </a:r>
           </a:p>
           <a:p>
             <a:r>
               <a:rPr lang="en-US" sz="1400" b="0" dirty="0"/>
-              <a:t>Các dòng còn lại là yếu tố gây nhiễu: các chỉ dấu mức độ nặng (SOFA mỗi điểm, lactat mỗi mmol/L, vận mạch, thở máy), tuổi mỗi năm, CKD (bệnh thận mạn). Chúng có trong mô hình để hiệu chỉnh. Chúng không phải câu hỏi. Đừng diễn giải quá mức (lỗi 'ngụy biện Bảng 2', Table 2 fallacy).</a:t>
-            </a:r>
-          </a:p>
-          <a:p>
-            <a:r>
-              <a:rPr lang="en-US" sz="1400" b="0" dirty="0"/>
-              <a:t>Chú ý đơn vị: mỗi năm, mỗi điểm, mỗi mmol/L: OR nhỏ cho mỗi đơn vị có thể là tác động lớn qua nhiều đơn vị.</a:t>
-            </a:r>
-          </a:p>
-          <a:p>
-            <a:r>
-              <a:rPr lang="en-US" sz="1400" b="0" dirty="0"/>
-              <a:t>Hỏi (mời hai ba người trả lời, bật micro): dòng nào đưa vào phần tóm tắt? Dự kiến: chỉ dòng phơi nhiễm (cân bằng dương), kèm KTC.</a:t>
+              <a:t>Hỏi: dòng nào đưa vào tóm tắt? Kỳ vọng: chỉ dòng phơi nhiễm, kèm KTC.</a:t>
             </a:r>
           </a:p>
         </p:txBody>
@@ -4196,37 +3621,19 @@
           <a:p>
             <a:r>
               <a:rPr lang="en-US" sz="1400" b="0" dirty="0"/>
-              <a:t>Ý chính: đọc một hình Kaplan-Meier thật (Q1) theo bốn bước ở phần 6.3.</a:t>
+              <a:t>Đọc đường cong thật theo bốn bước. Phần lớn tử vong trong tuần đầu.</a:t>
             </a:r>
           </a:p>
           <a:p>
             <a:r>
               <a:rPr lang="en-US" sz="1400" b="0" dirty="0"/>
-              <a:t>Các bậc đi xuống là ca tử vong. Phần lớn tử vong xảy ra trong tuần đầu.</a:t>
+              <a:t>Sống còn ngày 28: 81.6% so với 64.1%, log-rank p &lt; 0.001, nhưng chưa hiệu chỉnh.</a:t>
             </a:r>
           </a:p>
           <a:p>
             <a:r>
               <a:rPr lang="en-US" sz="1400" b="0" dirty="0"/>
-              <a:t>Khoảng cách: sống còn ngày 28 là 81.6% (cân bằng âm) so với 64.1% (cân bằng dương).</a:t>
-            </a:r>
-          </a:p>
-          <a:p>
-            <a:r>
-              <a:rPr lang="en-US" sz="1400" b="0" dirty="0"/>
-              <a:t>Số còn theo dõi dưới hình: 245 và 373 ở ngày 0, giảm dần khi người bệnh tử vong.</a:t>
-            </a:r>
-          </a:p>
-          <a:p>
-            <a:r>
-              <a:rPr lang="en-US" sz="1400" b="0" dirty="0"/>
-              <a:t>Kiểm định log-rank: p &lt; 0.001 (khi bình phương 21.4): hai đường cong khác nhau. Nhưng log-rank chưa hiệu chỉnh: cùng nhiễu như OR thô.</a:t>
-            </a:r>
-          </a:p>
-          <a:p>
-            <a:r>
-              <a:rPr lang="en-US" sz="1400" b="0" dirty="0"/>
-              <a:t>Hỏi (mời hai ba người trả lời, bật micro): khác biệt lớn hơn ở giai đoạn sớm hay muộn? Dự kiến: mở ra trong những ngày đầu rồi hai đường chạy gần song song, điều này hỗ trợ giả định nguy cơ tỷ lệ của mô hình Cox (trang sau).</a:t>
+              <a:t>Hỏi: khoảng cách lớn hơn lúc đầu hay lúc sau? Kỳ vọng: mở ra sớm, rồi hai đường gần như song song.</a:t>
             </a:r>
           </a:p>
         </p:txBody>
@@ -4307,31 +3714,19 @@
           <a:p>
             <a:r>
               <a:rPr lang="en-US" sz="1400" b="0" dirty="0"/>
-              <a:t>Ý chính: mô hình Cox cho tỷ số nguy cơ tức thời, hiệu chỉnh theo cùng các yếu tố gây nhiễu.</a:t>
+              <a:t>HR Cox đã hiệu chỉnh 1.46 (1.00 đến 2.13), p = 0.053. Giả định nguy cơ tỷ lệ chấp nhận được (p = 0.10).</a:t>
             </a:r>
           </a:p>
           <a:p>
             <a:r>
               <a:rPr lang="en-US" sz="1400" b="0" dirty="0"/>
-              <a:t>HR thô 2.17 (KTC 95% 1.55 đến 3.05) giảm còn HR đã hiệu chỉnh 1.46 (KTC 95% 1.00 đến 2.13), p = 0.053: cùng nhiễu như với OR.</a:t>
+              <a:t>Bài học: OR p = 0.044 và HR p = 0.053 kể cùng một câu chuyện. Đừng để 0.05 quyết định anh chị tin gì.</a:t>
             </a:r>
           </a:p>
           <a:p>
             <a:r>
               <a:rPr lang="en-US" sz="1400" b="0" dirty="0"/>
-              <a:t>Đã kiểm tra nguy cơ tỷ lệ: kiểm định chung p = 0.10. Không có bằng chứng mạnh chống lại giả định.</a:t>
-            </a:r>
-          </a:p>
-          <a:p>
-            <a:r>
-              <a:rPr lang="en-US" sz="1400" b="0" dirty="0"/>
-              <a:t>Bài học lớn: mô hình logistic cho p = 0.044 và mô hình Cox cho p = 0.053. Một cái 'có ý nghĩa', cái kia thì không, nhưng chúng nói cùng một điều: một liên quan vừa phải, kém chính xác, giới hạn dưới gần 1. Đừng bao giờ để ngưỡng 0.05 quyết định anh chị tin một phát hiện hay không (năm cách hiểu sai giá trị p, 6.1). Và đừng bao giờ 'cứu' p = 0.053 bằng cách đổi sang kiểm định một phía (6.1).</a:t>
-            </a:r>
-          </a:p>
-          <a:p>
-            <a:r>
-              <a:rPr lang="en-US" sz="1400" b="0" dirty="0"/>
-              <a:t>Hỏi (mời hai ba người trả lời, bật micro): anh chị viết điều này thế nào trong phần Kết quả? Dự kiến: báo cáo cả hai ước lượng kèm KTC, và mô tả liên quan là vừa phải và kém chính xác.</a:t>
+              <a:t>Hỏi: viết điều này trong phần Kết quả thế nào? Kỳ vọng: cả hai ước lượng kèm KTC.</a:t>
             </a:r>
           </a:p>
         </p:txBody>
@@ -4412,37 +3807,19 @@
           <a:p>
             <a:r>
               <a:rPr lang="en-US" sz="1400" b="0" dirty="0"/>
-              <a:t>Mục đích: một nơi để học viên thấy ba tỷ số cạnh nhau (theo góp ý của người phản biện).</a:t>
+              <a:t>RR: nguy cơ, từ bảng 2x2 (thử nghiệm, thuần tập). OR: odds, từ nghiên cứu bệnh-chứng và hồi quy logistic, gần RR chỉ khi kết cục hiếm. HR: tốc độ xảy ra biến cố theo thời gian, từ Cox.</a:t>
             </a:r>
           </a:p>
           <a:p>
             <a:r>
               <a:rPr lang="en-US" sz="1400" b="0" dirty="0"/>
-              <a:t>RR: tỷ lệ người bệnh có biến cố ở mỗi nhóm, dùng trong thử nghiệm và thuần tập có thời gian theo dõi cố định (Buổi 4, bảng 2x2).</a:t>
+              <a:t>Hỏi: Bài báo 2 so sánh tử vong theo thời gian. Tỷ số nào? Kỳ vọng: HR.</a:t>
             </a:r>
           </a:p>
           <a:p>
             <a:r>
               <a:rPr lang="en-US" sz="1400" b="0" dirty="0"/>
-              <a:t>OR: dùng odds thay cho nguy cơ. Đây là đại lượng nghiên cứu bệnh-chứng ước lượng được và hồi quy logistic báo cáo. Khi kết cục hiếm (dưới khoảng 10%), OR gần bằng RR. Khi kết cục thường gặp, OR trông lớn hơn RR (Buổi 4).</a:t>
-            </a:r>
-          </a:p>
-          <a:p>
-            <a:r>
-              <a:rPr lang="en-US" sz="1400" b="0" dirty="0"/>
-              <a:t>HR: so sánh tốc độ xảy ra biến cố theo thời gian và dùng thời gian theo dõi của mọi người, kể cả người bị kiểm duyệt. Hồi quy Cox báo cáo HR (Bài báo 2 và câu hỏi Q1 của FLUID-ICU).</a:t>
-            </a:r>
-          </a:p>
-          <a:p>
-            <a:r>
-              <a:rPr lang="en-US" sz="1400" b="0" dirty="0"/>
-              <a:t>Hỏi (gọi hai hoặc ba người, bật micro): ở Bài báo 2, tử vong đến ngày 28 được so sánh theo thời gian. Tỷ số nào? Đáp án: HR.</a:t>
-            </a:r>
-          </a:p>
-          <a:p>
-            <a:r>
-              <a:rPr lang="en-US" sz="1400" b="0" dirty="0"/>
-              <a:t>Thời gian: 2 phút, lấy từ phần thảo luận ở slide Cox ngay trước, nên thời lượng phần học không đổi.</a:t>
+              <a:t>Thời gian: 2 phút.</a:t>
             </a:r>
           </a:p>
         </p:txBody>
@@ -4523,43 +3900,25 @@
           <a:p>
             <a:r>
               <a:rPr lang="en-US" sz="1400" b="0" dirty="0"/>
-              <a:t>Ý chính: đây là hình quan trọng nhất tối nay. Hãy dành thời gian.</a:t>
+              <a:t>Hình quan trọng nhất tối nay. Cùng một nghiên cứu lặp 20 lần, mỗi lần 25 người bệnh: 19 khoảng chứa giá trị thật, một khoảng trượt. Đó là ý nghĩa của '95%'.</a:t>
             </a:r>
           </a:p>
           <a:p>
             <a:r>
               <a:rPr lang="en-US" sz="1400" b="0" dirty="0"/>
-              <a:t>Chúng tôi mô phỏng cùng một nghiên cứu 20 lần, mỗi lần 25 người bệnh, từ một quần thể có cân bằng dịch trung bình thật là 30 ml/kg (đường đứt nét). Mỗi nghiên cứu cho một ước lượng khác nhau (chấm) và một khoảng tin cậy 95% (KTC 95%) khác nhau (đoạn thẳng đứng). Các khoảng thay đổi qua mỗi lần.</a:t>
+              <a:t>Ngoài đời, ta chỉ thấy một khoảng và không bao giờ thấy đường nét đứt.</a:t>
             </a:r>
           </a:p>
           <a:p>
             <a:r>
               <a:rPr lang="en-US" sz="1400" b="0" dirty="0"/>
-              <a:t>19 trong 20 khoảng chứa giá trị thật. Một khoảng (màu đỏ) bỏ lỡ nó. Đó là ý nghĩa của '95%': phương pháp bắt được sự thật trong khoảng 95% số nghiên cứu.</a:t>
+              <a:t>Cách nói an toàn: 'một khoảng các giá trị hợp lý'.</a:t>
             </a:r>
           </a:p>
           <a:p>
             <a:r>
               <a:rPr lang="en-US" sz="1400" b="0" dirty="0"/>
-              <a:t>Trong thực tế anh chị chỉ làm một nghiên cứu, thấy một khoảng, và không nhìn thấy đường đứt nét. Anh chị không biết khoảng của mình là một trong 19 khoảng may mắn hay khoảng không may.</a:t>
-            </a:r>
-          </a:p>
-          <a:p>
-            <a:r>
-              <a:rPr lang="en-US" sz="1400" b="0" dirty="0"/>
-              <a:t>Cách đọc thực tế: KTC 95% là khoảng các giá trị của tác động thật phù hợp với dữ liệu của mình. Khoảng hẹp = chính xác. Khoảng rộng = kém chính xác.</a:t>
-            </a:r>
-          </a:p>
-          <a:p>
-            <a:r>
-              <a:rPr lang="en-US" sz="1400" b="0" dirty="0"/>
-              <a:t>Hiểu sai thường gặp: 'có 95% xác suất giá trị thật nằm trong chính khoảng này'. Nói chặt chẽ, con số 95% nói về phương pháp qua nhiều lần lặp lại. Ở cấp độ này, cách nói an toàn là 'một khoảng các giá trị hợp lý'.</a:t>
-            </a:r>
-          </a:p>
-          <a:p>
-            <a:r>
-              <a:rPr lang="en-US" sz="1400" b="0" dirty="0"/>
-              <a:t>Hỏi (mời hai ba người trả lời, bật micro): điều gì làm các khoảng ngắn lại? Dự kiến: nhiều người bệnh hơn, người bệnh ít khác biệt nhau hơn.</a:t>
+              <a:t>Hỏi: điều gì làm khoảng ngắn lại? Kỳ vọng: nhiều người bệnh hơn, ít biến thiên hơn.</a:t>
             </a:r>
           </a:p>
         </p:txBody>
@@ -4640,49 +3999,19 @@
           <a:p>
             <a:r>
               <a:rPr lang="en-US" sz="1400" b="0" dirty="0"/>
-              <a:t>Ý chính: ba cơ chế, minh họa trên cùng 8 người bệnh có một số giá trị lactat bị thiếu. (Trang này giữ dạng ảnh: các bảng dữ liệu nhỏ, với giá trị bị ẩn màu đỏ, chính là điểm cần thấy.)</a:t>
+              <a:t>Ba cơ chế trên cùng 8 người bệnh. MCAR: không liên quan đến người bệnh. MAR: phụ thuộc vào điều đã ghi nhận, quy gán có thể giúp. MNAR: phụ thuộc vào chính giá trị bị thiếu, không phương pháp nào sửa được hoàn toàn.</a:t>
             </a:r>
           </a:p>
           <a:p>
             <a:r>
               <a:rPr lang="en-US" sz="1400" b="0" dirty="0"/>
-              <a:t>MCAR, thiếu hoàn toàn ngẫu nhiên: rơi ống mẫu, máy xét nghiệm hỏng. Việc thiếu không liên quan gì đến người bệnh. Những người bệnh còn lại là một tập con ngẫu nhiên. Phân tích các trường hợp đầy đủ không bị sai lệch, chỉ kém chính xác hơn. Hiếm gặp trong thực tế.</a:t>
+              <a:t>Dữ liệu không chứng minh được cơ chế nào: hãy ghi lại vì sao giá trị bị thiếu.</a:t>
             </a:r>
           </a:p>
           <a:p>
             <a:r>
               <a:rPr lang="en-US" sz="1400" b="0" dirty="0"/>
-              <a:t>MAR, thiếu ngẫu nhiên (có điều kiện theo những gì đã ghi): lactat không được đo ở người bệnh vào ban đêm. Việc thiếu phụ thuộc vào một điều có trong dữ liệu (giờ nhập viện). Các phương pháp như quy gán đa bội có thể dùng biến đã ghi nhận đó để sửa sai lệch.</a:t>
-            </a:r>
-          </a:p>
-          <a:p>
-            <a:r>
-              <a:rPr lang="en-US" sz="1400" b="0" dirty="0"/>
-              <a:t>MNAR, thiếu không ngẫu nhiên: các giá trị lactat bị thiếu là những giá trị cao nhất (người bệnh nặng nhất, giá trị vượt ngưỡng máy, các số màu đỏ không bao giờ thấy được). Việc thiếu phụ thuộc chính giá trị bị thiếu. Không phương pháp thống kê nào sửa được hoàn toàn. Chỉ có thể kiểm tra xem nó ảnh hưởng đến đâu (phân tích độ nhạy).</a:t>
-            </a:r>
-          </a:p>
-          <a:p>
-            <a:r>
-              <a:rPr lang="en-US" sz="1400" b="0" dirty="0"/>
-              <a:t>Không bao giờ chứng minh được cơ chế nào đúng chỉ từ dữ liệu. Hiểu biết lâm sàng về vì sao giá trị bị thiếu là thiết yếu. Hãy ghi lại lý do khi thu thập dữ liệu.</a:t>
-            </a:r>
-          </a:p>
-          <a:p>
-            <a:r>
-              <a:rPr lang="en-US" sz="1400" b="0" dirty="0"/>
-              <a:t>Nhớ lại trang dữ liệu bị thiếu đầu tiên ở phần 5.1: người bệnh nặng nhất bị thiếu là MNAR, trường hợp xấu nhất.</a:t>
-            </a:r>
-          </a:p>
-          <a:p>
-            <a:r>
-              <a:rPr lang="en-US" sz="1400" b="0" dirty="0"/>
-              <a:t>Hỏi (mời hai ba người trả lời, bật micro): kết cục ngày 28 bị thiếu ở người bệnh chuyển sang bệnh viện khác. Cơ chế nào có khả năng nhất? Dự kiến: có thể là MNAR (người bệnh nặng hơn hoặc đang hồi phục được chuyển đi). Ít nhất là MAR nếu có ghi lý do chuyển.</a:t>
-            </a:r>
-          </a:p>
-          <a:p>
-            <a:r>
-              <a:rPr lang="en-US" sz="1400" b="0" dirty="0"/>
-              <a:t>Thời lượng: 2 phút. Sau đó là lactat bị thiếu của chính FLUID-ICU.</a:t>
+              <a:t>Thời gian: 2 phút.</a:t>
             </a:r>
           </a:p>
         </p:txBody>
@@ -4763,31 +4092,19 @@
           <a:p>
             <a:r>
               <a:rPr lang="en-US" sz="1400" b="0" dirty="0"/>
-              <a:t>Ý chính: trước khi xử lý dữ liệu thiếu, hãy hỏi vì sao nó bị thiếu (trang trước: MCAR, MAR, MNAR).</a:t>
+              <a:t>Lactat thiếu ở 93 trên 620 (15.0%), chủ yếu ở người bệnh nhẹ hơn (trung vị SOFA 5 so với 8, tử vong 19.4% so với 30.6%).</a:t>
             </a:r>
           </a:p>
           <a:p>
             <a:r>
               <a:rPr lang="en-US" sz="1400" b="0" dirty="0"/>
-              <a:t>Lactat bị thiếu ở 93 trong 620 người bệnh (15.0%). Hình cho thấy tỷ lệ thiếu theo điểm SOFA: cao hơn nhiều ở người bệnh nhẹ nhất.</a:t>
+              <a:t>Vậy không phải MCAR: phân tích trường hợp đầy đủ loại bỏ người nhẹ hơn. MAR là hợp lý, phù hợp với quy gán đa bội.</a:t>
             </a:r>
           </a:p>
           <a:p>
             <a:r>
               <a:rPr lang="en-US" sz="1400" b="0" dirty="0"/>
-              <a:t>Người bệnh không có lactat có SOFA trung vị 5 (4 đến 6) so với 8 (6 đến 10) ở người có lactat, và tử vong thấp hơn: 18/93 (19.4%) so với 161/527 (30.6%).</a:t>
-            </a:r>
-          </a:p>
-          <a:p>
-            <a:r>
-              <a:rPr lang="en-US" sz="1400" b="0" dirty="0"/>
-              <a:t>Vậy dữ liệu không thiếu hoàn toàn ngẫu nhiên (MCAR): phân tích các trường hợp đầy đủ bỏ chủ yếu các người bệnh nhẹ hơn. Việc thiếu phụ thuộc những gì đã ghi nhận (mức độ nặng, ICU): thiếu ngẫu nhiên (MAR) là hợp lý, đúng tình huống quy gán đa bội hoạt động tốt.</a:t>
-            </a:r>
-          </a:p>
-          <a:p>
-            <a:r>
-              <a:rPr lang="en-US" sz="1400" b="0" dirty="0"/>
-              <a:t>Hỏi (mời hai ba người trả lời, bật micro): về lâm sàng, vì sao lactat không được đo ở người nhẹ hơn? Dự kiến: bác sĩ thấy không cần, hoặc một ICU không có máy xét nghiệm tại chỗ.</a:t>
+              <a:t>Hỏi: vì sao người nhẹ hơn lại không được đo lactat?</a:t>
             </a:r>
           </a:p>
         </p:txBody>
@@ -4868,37 +4185,31 @@
           <a:p>
             <a:r>
               <a:rPr lang="en-US" sz="1400" b="0" dirty="0"/>
-              <a:t>Ý chính: phân tích độ nhạy đã lên kế hoạch trong SAP.</a:t>
+              <a:t>Phân tích độ nhạy định trước trong SAP.</a:t>
             </a:r>
           </a:p>
           <a:p>
             <a:r>
               <a:rPr lang="en-US" sz="1400" b="0" dirty="0"/>
-              <a:t>Q4 (lactat và tử vong 28 ngày), OR mỗi 1 mmol/L hiệu chỉnh tuổi, giới, đái tháo đường, CKD và suy tim: trường hợp đầy đủ 1.39 (1.24 đến 1.57), n = 527. Quy gán đa bội 1.45 (1.29 đến 1.64), n = 620. Thêm SOFA: 1.21 (1.05 đến 1.39) so với 1.23 (1.07 đến 1.42).</a:t>
+              <a:t>Q4: OR mỗi mmol/L 1.39 (trường hợp đầy đủ, n = 527) so với 1.45 (quy gán, n = 620).</a:t>
             </a:r>
           </a:p>
           <a:p>
             <a:r>
               <a:rPr lang="en-US" sz="1400" b="0" dirty="0"/>
-              <a:t>Mô hình chính Q1 với quy gán đa bội (m = 20, n = 620): OR đã hiệu chỉnh 1.70 (KTC 95% 1.09 đến 2.64), p = 0.020, so với 1.62 (1.02 đến 2.59) ở trường hợp đầy đủ.</a:t>
+              <a:t>Q1: OR đã hiệu chỉnh 1.70 (1.09 đến 2.64) khi quy gán so với 1.62 ở trường hợp đầy đủ.</a:t>
             </a:r>
           </a:p>
           <a:p>
             <a:r>
               <a:rPr lang="en-US" sz="1400" b="0" dirty="0"/>
-              <a:t>Diễn giải: kết luận không phụ thuộc vào cách xử lý lactat bị thiếu: một kết quả vững. Nếu hai cách cho kết quả rất khác nhau, phải nói rõ.</a:t>
+              <a:t>Kết luận không phụ thuộc vào cách xử lý lactat bị thiếu.</a:t>
             </a:r>
           </a:p>
           <a:p>
             <a:r>
               <a:rPr lang="en-US" sz="1400" b="0" dirty="0"/>
-              <a:t>Chú ý thêm: lactat trung vị là 2.6 mmol/L ở trường hợp đầy đủ và 2.4 sau khi quy gán: các giá trị quy gán thấp hơn, như dự kiến, vì người bệnh bị thiếu nhẹ hơn.</a:t>
-            </a:r>
-          </a:p>
-          <a:p>
-            <a:r>
-              <a:rPr lang="en-US" sz="1400" b="0" dirty="0"/>
-              <a:t>Hỏi (mời hai ba người trả lời, bật micro): anh chị viết gì trong phần Phương pháp? Dự kiến: 'Lactat bị thiếu (15.0%) được xử lý bằng quy gán đa bội (20 bộ dữ liệu) như phân tích độ nhạy. Kết quả tương tự phân tích các trường hợp đầy đủ.'</a:t>
+              <a:t>Hỏi: báo cáo điều này thế nào? Kỳ vọng: cả hai ước lượng, và nói rằng chúng tương tự nhau.</a:t>
             </a:r>
           </a:p>
         </p:txBody>
@@ -4979,55 +4290,25 @@
           <a:p>
             <a:r>
               <a:rPr lang="en-US" sz="1400" b="0" dirty="0"/>
-              <a:t>Bài tập cả lớp, 7 phút (21:48 đến 21:55). Bài 8 trong phiếu bài tập Buổi 6 có cùng các câu hỏi. Mỗi học viên hoàn thành sau cho câu hỏi mình đã chọn. Đáp án mẫu trong Course/Solutions/s6_solutions.md.</a:t>
+              <a:t>Cả lớp, 7 phút (21:48-21:55). Bài 8. Đáp án: s6_solutions_VN.md.</a:t>
             </a:r>
           </a:p>
           <a:p>
             <a:r>
               <a:rPr lang="en-US" sz="1400" b="0" dirty="0"/>
-              <a:t>Q1 đầy đủ (4 phút): OR thô 2.49 (1.70 đến 3.70), đã hiệu chỉnh 1.62 (1.02 đến 2.59): giảm vì mức độ nặng là yếu tố gây nhiễu (nhiễu do chỉ định). Bình chọn: không, KTC đã hiệu chỉnh không chứa 1, nhưng giới hạn dưới gần 1. Gõ câu chung của lớp: 'Cân bằng dịch dương có liên quan với tử vong 28 ngày cao hơn (OR thô 2.49, KTC 95% 1.70 đến 3.70). Sau khi hiệu chỉnh tuổi, SOFA, lactat, dùng vận mạch, thở máy và bệnh thận mạn, mối liên quan nhỏ hơn (OR đã hiệu chỉnh 1.62, KTC 95% 1.02 đến 2.59).' Nhắc HR đã hiệu chỉnh từ mô hình Cox 1.46 (1.00 đến 2.13) và OR đã hiệu chỉnh với quy gán đa bội 1.70 (1.09 đến 2.64).</a:t>
-            </a:r>
-          </a:p>
-          <a:p>
-            <a:r>
-              <a:rPr lang="en-US" sz="1400" b="1" dirty="0"/>
-              <a:t>Q2 đến Q5 (3 phút), mỗi câu một dòng, giảng viên đọc:</a:t>
+              <a:t>Q1 (4 phút): thô 2.49, hiệu chỉnh 1.62. Hỏi vì sao nhỏ lại. Gõ hai câu Kết quả, thô rồi hiệu chỉnh, kèm KTC.</a:t>
             </a:r>
           </a:p>
           <a:p>
             <a:r>
               <a:rPr lang="en-US" sz="1400" b="0" dirty="0"/>
-              <a:t>Q2: OR của AKI mỗi 10 ml/kg thô 1.37 (1.27 đến 1.47), đã hiệu chỉnh 1.27 (1.16 đến 1.40).</a:t>
+              <a:t>Q2 đến Q5 (3 phút): đọc mỗi câu một dòng trong đáp án.</a:t>
             </a:r>
           </a:p>
           <a:p>
             <a:r>
               <a:rPr lang="en-US" sz="1400" b="0" dirty="0"/>
-              <a:t>Q3: số ngày không thở máy mỗi 10 ml/kg thô -1.48 (-1.84 đến -1.13), đã hiệu chỉnh -0.61 (-1.00 đến -0.21) ngày.</a:t>
-            </a:r>
-          </a:p>
-          <a:p>
-            <a:r>
-              <a:rPr lang="en-US" sz="1400" b="0" dirty="0"/>
-              <a:t>Q4: OR lactat mỗi 1 mmol/L đã hiệu chỉnh, trường hợp đầy đủ 1.39 (1.24 đến 1.57) so với quy gán đa bội 1.45 (1.29 đến 1.64).</a:t>
-            </a:r>
-          </a:p>
-          <a:p>
-            <a:r>
-              <a:rPr lang="en-US" sz="1400" b="0" dirty="0"/>
-              <a:t>Q5: tỷ số trung bình nhân thời gian nằm ICU thô 1.50 (1.34 đến 1.68), đã hiệu chỉnh 1.24 (1.10 đến 1.39).</a:t>
-            </a:r>
-          </a:p>
-          <a:p>
-            <a:r>
-              <a:rPr lang="en-US" sz="1400" b="0" dirty="0"/>
-              <a:t>Mẫu hình cần chỉ ra: ở mọi câu hỏi, ước lượng đã hiệu chỉnh gần 'không tác động' hơn ước lượng thô: dấu hiệu điển hình của nhiễu do chỉ định.</a:t>
-            </a:r>
-          </a:p>
-          <a:p>
-            <a:r>
-              <a:rPr lang="en-US" sz="1400" b="0" dirty="0"/>
-              <a:t>Các câu này trở thành phần cốt lõi của mục Kết quả mà mỗi học viên viết ở Buổi 7 cho câu hỏi mình chọn.</a:t>
+              <a:t>Quy luật: mọi ước lượng đã hiệu chỉnh đều gần mức không tác động hơn. Các câu này là phần cốt lõi của phần Kết quả mỗi học viên sẽ viết.</a:t>
             </a:r>
           </a:p>
         </p:txBody>
@@ -5108,37 +4389,25 @@
           <a:p>
             <a:r>
               <a:rPr lang="en-US" sz="1400" b="0" dirty="0"/>
-              <a:t>Chiếu 1 phút trước khi giảng viên bắt đầu làm mẫu.</a:t>
+              <a:t>Chiếu 1 phút trước khi làm mẫu.</a:t>
             </a:r>
           </a:p>
           <a:p>
             <a:r>
               <a:rPr lang="en-US" sz="1400" b="0" dirty="0"/>
-              <a:t>Cỡ mẫu: một câu với bốn đầu vào (giá trị dự kiến mỗi nhóm, alpha, lực thống kê) và phần dự phòng bỏ cuộc: 'Giả định tử vong 28 ngày là 40% với chăm sóc thường quy và 30% với chiến lược hạn chế dịch, 356 người bệnh mỗi nhóm cho lực thống kê 80% với alpha hai phía 5%. Dự phòng 10% mất theo dõi, chúng tôi sẽ tuyển 396 người bệnh mỗi nhóm.' (356 / 0.9 = 395.6, làm tròn lên.)</a:t>
+              <a:t>Cỡ mẫu trong một câu với bốn thông số và phần bù mất mẫu (356 người mỗi nhóm, 396 khi tính 10% mất mẫu).</a:t>
             </a:r>
           </a:p>
           <a:p>
             <a:r>
               <a:rPr lang="en-US" sz="1400" b="0" dirty="0"/>
-              <a:t>Kế hoạch phân tích dễ hiểu: cách tóm tắt cho từng loại biến, kiểm định hoặc mô hình cho kết cục chính, số đo tác động kèm KTC 95%, và 'mọi kiểm định là hai phía'.</a:t>
+              <a:t>Kế hoạch phân tích bằng lời đơn giản, biến nhiễu chọn trước, kế hoạch xử lý dữ liệu thiếu.</a:t>
             </a:r>
           </a:p>
           <a:p>
             <a:r>
               <a:rPr lang="en-US" sz="1400" b="0" dirty="0"/>
-              <a:t>Yếu tố gây nhiễu: với thiết kế quan sát, nêu tên (từ phần sai lệch ở Phần 2) trong giới hạn số biến cố mỗi biến. Không chọn biến từng bước.</a:t>
-            </a:r>
-          </a:p>
-          <a:p>
-            <a:r>
-              <a:rPr lang="en-US" sz="1400" b="0" dirty="0"/>
-              <a:t>Kế hoạch dữ liệu thiếu: mức thiếu dự kiến và vì sao (tư duy MCAR / MAR / MNAR), phòng ngừa (Buổi 5), và cách báo cáo dữ liệu thiếu (bao nhiêu, ở ai). Cấp độ 2 chỉ giới thiệu qua quy gán đa bội. Quy gán và phân tích độ nhạy được học sâu ở Cấp độ 3 (Học phần H).</a:t>
-            </a:r>
-          </a:p>
-          <a:p>
-            <a:r>
-              <a:rPr lang="en-US" sz="1400" b="0" dirty="0"/>
-              <a:t>Mỗi học viên viết phần này cho câu hỏi nghiên cứu của chính mình (đề cương của mình).</a:t>
+              <a:t>Mỗi học viên viết phần này cho đề cương của mình.</a:t>
             </a:r>
           </a:p>
         </p:txBody>
@@ -5219,43 +4488,19 @@
           <a:p>
             <a:r>
               <a:rPr lang="en-US" sz="1400" b="0" dirty="0"/>
-              <a:t>Xây dựng đề cương 6: 30 phút (21:55 đến 22:25). Mẫu: Course/Templates/Research_Proposal_Template.docx. Phiếu bài tập: Bài 9 trong phiếu bài tập Buổi 6, có cùng các tiêu đề.</a:t>
+              <a:t>Xây dựng đề cương 6, 30 phút (21:55-22:25). Mẫu: Research_Proposal_Template_VN.docx. Phiếu: Bài 9.</a:t>
             </a:r>
           </a:p>
           <a:p>
             <a:r>
               <a:rPr lang="en-US" sz="1400" b="0" dirty="0"/>
-              <a:t>Làm mẫu trực tiếp (18 phút) trên ví dụ xuyên suốt, gõ vào một bản sao của mẫu đề cương trên màn hình chia sẻ: câu phát biểu cỡ mẫu với bốn đầu vào và nguồn của chúng (6 phút, dùng Course/Resources/tools/sample_size_calculator.xlsx), kế hoạch phân tích dễ hiểu (5 phút), yếu tố gây nhiễu trong giới hạn khoảng 10 biến cố mỗi biến (3 phút), kế hoạch dữ liệu thiếu (4 phút). Mời từng người gợi ý trong lúc làm.</a:t>
+              <a:t>Làm mẫu trực tiếp (18 phút): cỡ mẫu, kế hoạch phân tích, biến nhiễu, kế hoạch dữ liệu thiếu. Sau đó 10 phút học viên tự viết các thông số cỡ mẫu, 2 phút hỏi đáp.</a:t>
             </a:r>
           </a:p>
           <a:p>
             <a:r>
               <a:rPr lang="en-US" sz="1400" b="0" dirty="0"/>
-              <a:t>Thời gian làm riêng (10 phút): mỗi người viết bốn đầu vào cỡ mẫu cho nghiên cứu của mình và nguồn của từng đầu vào (có thể tắt camera). Chưa cần con số cuối cùng. Sau đó 2 phút hỏi đáp qua khung chat.</a:t>
-            </a:r>
-          </a:p>
-          <a:p>
-            <a:r>
-              <a:rPr lang="en-US" sz="1400" b="0" dirty="0"/>
-              <a:t>SAP của FLUID-ICU là mẫu tốt: học viên vừa thấy nó được viết trước khi phân tích.</a:t>
-            </a:r>
-          </a:p>
-          <a:p>
-            <a:r>
-              <a:rPr lang="en-US" sz="1400" b="0" dirty="0"/>
-              <a:t>Vấn đề thường gặp cần nhắc khi làm mẫu: kế hoạch phân tích chỉ ghi 'sẽ dùng SPSS'. Chọn biến từng bước. Không nói gì về dữ liệu thiếu. Cỡ mẫu = 'tất cả người bệnh có được'. Dùng kiểm định một phía mà không có lý do.</a:t>
-            </a:r>
-          </a:p>
-          <a:p>
-            <a:r>
-              <a:rPr lang="en-US" sz="1400" b="0" dirty="0"/>
-              <a:t>Về nhà: hoàn thành Phần 3 (kế hoạch phân tích, yếu tố gây nhiễu, kế hoạch dữ liệu thiếu) trong mẫu của mình. Đề nghị kiểm tra giúp các đầu vào cỡ mẫu qua email.</a:t>
-            </a:r>
-          </a:p>
-          <a:p>
-            <a:r>
-              <a:rPr lang="en-US" sz="1400" b="0" dirty="0"/>
-              <a:t>Đúng 22:25, dừng để tổng kết.</a:t>
+              <a:t>Chú ý: 'sẽ dùng SPSS' thay cho kế hoạch, chọn biến từng bước, không nhắc đến dữ liệu thiếu.</a:t>
             </a:r>
           </a:p>
         </p:txBody>
@@ -5336,37 +4581,13 @@
           <a:p>
             <a:r>
               <a:rPr lang="en-US" sz="1400" b="0" dirty="0"/>
-              <a:t>Từ khóa của buổi học (2 phút). Chỉ vào từng từ và mời một người định nghĩa trong một câu, bật micro.</a:t>
+              <a:t>Từ khóa (2 phút). Chỉ vào một từ và mời một người định nghĩa trong một dòng.</a:t>
             </a:r>
           </a:p>
           <a:p>
             <a:r>
               <a:rPr lang="en-US" sz="1400" b="0" dirty="0"/>
-              <a:t>KTC 95% (khoảng tin cậy): khoảng các giá trị hợp lý. Giá trị p: dữ liệu đáng ngạc nhiên đến đâu nếu không có tác động. Mặc định là hai phía. Lực thống kê: khả năng phát hiện tác động thật.</a:t>
-            </a:r>
-          </a:p>
-          <a:p>
-            <a:r>
-              <a:rPr lang="en-US" sz="1400" b="0" dirty="0"/>
-              <a:t>Kiểm định t / Mann-Whitney: so sánh một số đo giữa hai nhóm (đối xứng / lệch). Khi bình phương: so sánh tỷ lệ. Ghép cặp: cùng người bệnh đo hai lần.</a:t>
-            </a:r>
-          </a:p>
-          <a:p>
-            <a:r>
-              <a:rPr lang="en-US" sz="1400" b="0" dirty="0"/>
-              <a:t>OR đã hiệu chỉnh (tỷ số chênh): tỷ số chênh sau khi tính đến yếu tố gây nhiễu. Tỷ số nguy cơ tức thời: tỷ số tốc độ tử vong theo thời gian (Cox). Kiểm duyệt: theo dõi kết thúc mà chưa có biến cố.</a:t>
-            </a:r>
-          </a:p>
-          <a:p>
-            <a:r>
-              <a:rPr lang="en-US" sz="1400" b="0" dirty="0"/>
-              <a:t>SAP (kế hoạch phân tích thống kê): kế hoạch viết trước khi thấy dữ liệu. MCAR / MAR / MNAR: vì sao dữ liệu bị thiếu. Quy gán đa bội: điền ô trống nhiều lần và gộp lại, một cách trung thực.</a:t>
-            </a:r>
-          </a:p>
-          <a:p>
-            <a:r>
-              <a:rPr lang="en-US" sz="1400" b="0" dirty="0"/>
-              <a:t>Mọi thuật ngữ có trong bảng thuật ngữ Anh-Việt.</a:t>
+              <a:t>Mọi thuật ngữ đều có trong bảng thuật ngữ Anh-Việt.</a:t>
             </a:r>
           </a:p>
         </p:txBody>
@@ -5447,31 +4668,13 @@
           <a:p>
             <a:r>
               <a:rPr lang="en-US" sz="1400" b="0" dirty="0"/>
-              <a:t>Tóm tắt buổi học (2 phút). Mời ba người tình nguyện (nút giơ tay) cho một ví dụ hôm nay cho mỗi thẻ.</a:t>
+              <a:t>Tóm tắt (1 phút). Mời người tình nguyện nêu một ví dụ cho mỗi thẻ.</a:t>
             </a:r>
           </a:p>
           <a:p>
             <a:r>
               <a:rPr lang="en-US" sz="1400" b="0" dirty="0"/>
-              <a:t>Đọc KTC: độ lớn, chiều hướng, độ chính xác. Giá trị không tác động 0 hay 1. Tránh năm cách hiểu sai giá trị p.</a:t>
-            </a:r>
-          </a:p>
-          <a:p>
-            <a:r>
-              <a:rPr lang="en-US" sz="1400" b="0" dirty="0"/>
-              <a:t>Hiệu chỉnh trung thực: FLUID-ICU cho thấy nhiễu do chỉ định: OR thô giảm sau khi hiệu chỉnh mức độ nặng. Yếu tố gây nhiễu được chọn theo kiến thức, không theo cách chọn biến từng bước.</a:t>
-            </a:r>
-          </a:p>
-          <a:p>
-            <a:r>
-              <a:rPr lang="en-US" sz="1400" b="0" dirty="0"/>
-              <a:t>Lập kế hoạch trước: SAP của FLUID-ICU được viết trước khi phân tích, với kiểm định hai phía. Lactat bị thiếu được báo cáo, xử lý bằng quy gán đa bội và đối chiếu với phân tích các trường hợp đầy đủ.</a:t>
-            </a:r>
-          </a:p>
-          <a:p>
-            <a:r>
-              <a:rPr lang="en-US" sz="1400" b="0" dirty="0"/>
-              <a:t>Hai thứ Bảy tới: viết bài (Phương pháp và Kết quả ở Buổi 7, phần còn lại và công bố ở Buổi 8).</a:t>
+              <a:t>Thứ Bảy tuần sau: đạo đức, liêm chính và phần Kết quả, viết trực tiếp trên Q1.</a:t>
             </a:r>
           </a:p>
         </p:txBody>
@@ -5552,25 +4755,19 @@
           <a:p>
             <a:r>
               <a:rPr lang="en-US" sz="1400" b="0" dirty="0"/>
-              <a:t>Tổng kết: 5 phút (22:25 đến 22:30), gồm cả trang từ khóa và tóm tắt.</a:t>
+              <a:t>Sản phẩm 2 (2 phút). Nói rõ: chúng tôi đưa kết quả, anh chị viết một phần Kết quả sẵn sàng để nộp. Các phần khác không bắt buộc, và giảng viên vẫn nhận xét.</a:t>
             </a:r>
           </a:p>
           <a:p>
             <a:r>
               <a:rPr lang="en-US" sz="1400" b="0" dirty="0"/>
-              <a:t>Câu hỏi cuối buổi trong khung chat. Mục đích: kiểm tra kỹ năng quan trọng nhất hôm nay, đọc một KTC. Câu trả lời tốt: 'Tỷ số nguy cơ tức thời thật có thể hợp lý nằm trong khoảng 1.48 đến 3.06. Mọi giá trị đều lớn hơn 1, nên dữ liệu gợi ý tử vong cao hơn.' Giảng viên đọc các câu trả lời trước Buổi 7 và mở đầu Buổi 7 bằng hai ba câu trong số đó.</a:t>
+              <a:t>Mời mọi người ghi câu hỏi mình chọn (Q1 đến Q5) vào khung chat. Q1 dễ bắt đầu nhất vì được làm mẫu trực tiếp vào thứ Bảy tuần sau.</a:t>
             </a:r>
           </a:p>
           <a:p>
             <a:r>
               <a:rPr lang="en-US" sz="1400" b="0" dirty="0"/>
-              <a:t>Về nhà: hoàn thành Phần 3 đề cương của mình. Bắt đầu các slide đề cương (6 slide, Course/Assignment/presentation_guide.md): mọi người đều nộp slide, và khoảng năm người tình nguyện trình bày ở Buổi 8 (mỗi người 6 phút). Đọc lại gói kết quả của câu hỏi mình đã chọn (Q1 đến Q5) và ghi chép từ các ví dụ hôm nay, sẽ trở thành phần Phương pháp và Kết quả viết ở Buổi 7. Bài tập tùy chọn trong phiếu bài tập Buổi 6 (Bài 2, 3, 5, 6 và 7).</a:t>
-            </a:r>
-          </a:p>
-          <a:p>
-            <a:r>
-              <a:rPr lang="en-US" sz="1400" b="0" dirty="0"/>
-              <a:t>Cảm ơn cả lớp: đây là buổi nặng về kỹ thuật nhất của khóa học. Ghi nhận rằng họ đã theo đến cùng.</a:t>
+              <a:t>Sau buổi học, gửi email hướng dẫn bài tập bản thảo (Manuscript_Brief_VN.pdf) và mẫu bản thảo.</a:t>
             </a:r>
           </a:p>
         </p:txBody>
@@ -5651,7 +4848,25 @@
           <a:p>
             <a:r>
               <a:rPr lang="en-US" sz="1400" b="0" dirty="0"/>
-              <a:t>Bổ sung: các trang sau đây là tùy chọn. Dùng nếu lớp đi nhanh hơn dự kiến, hoặc giới thiệu cho học viên tự học (có trong bộ tài liệu phát).</a:t>
+              <a:t>Tổng kết (22:25-22:30).</a:t>
+            </a:r>
+          </a:p>
+          <a:p>
+            <a:r>
+              <a:rPr lang="en-US" sz="1400" b="0" dirty="0"/>
+              <a:t>Câu hỏi cuối buổi: 'KTC 95% 1.48 đến 3.06' cho biết gì? Câu trả lời tốt: HR thật có thể nằm trong khoảng 1.48 đến 3.06, đều trên 1. Mở đầu Buổi 7 bằng hai hoặc ba câu trả lời.</a:t>
+            </a:r>
+          </a:p>
+          <a:p>
+            <a:r>
+              <a:rPr lang="en-US" sz="1400" b="0" dirty="0"/>
+              <a:t>Về nhà: Phần 3 đề cương, bắt đầu 6 slide, chọn câu hỏi và đọc gói kết quả.</a:t>
+            </a:r>
+          </a:p>
+          <a:p>
+            <a:r>
+              <a:rPr lang="en-US" sz="1400" b="0" dirty="0"/>
+              <a:t>Sau buổi học: gửi email hướng dẫn bài tập bản thảo cho mọi người.</a:t>
             </a:r>
           </a:p>
         </p:txBody>
@@ -5732,43 +4947,19 @@
           <a:p>
             <a:r>
               <a:rPr lang="en-US" sz="1400" b="0" dirty="0"/>
-              <a:t>Ý chính: bắt đầu bằng việc tưởng tượng không có khác biệt thật giữa các nhóm (giả thuyết không, H0). Ngay cả khi đó, chỉ riêng ngẫu nhiên cũng tạo ra các kết quả dao động quanh 'không khác biệt': đó là đường cong hình chuông.</a:t>
+              <a:t>Hãy hình dung không có khác biệt thật (H0): riêng sự ngẫu nhiên đã làm kết quả dao động quanh số 0. Giá trị p là vùng màu cam: các kết quả ít nhất cũng cực đoan như kết quả của ta.</a:t>
             </a:r>
           </a:p>
           <a:p>
             <a:r>
               <a:rPr lang="en-US" sz="1400" b="0" dirty="0"/>
-              <a:t>Bây giờ đặt kết quả của mình lên hình. Giá trị p là vùng màu cam: tỷ lệ các kết quả ít nhất cực đoan như kết quả của mình (theo cả hai hướng) mà chỉ riêng ngẫu nhiên tạo ra nếu không có khác biệt thật.</a:t>
+              <a:t>p = 0.04: đáng ngạc nhiên nếu không có khác biệt. p = 0.42 (Bài báo 1): không đáng ngạc nhiên, nhưng không chứng minh là không có khác biệt.</a:t>
             </a:r>
           </a:p>
           <a:p>
             <a:r>
               <a:rPr lang="en-US" sz="1400" b="0" dirty="0"/>
-              <a:t>p = 0.04 nghĩa là: nếu thực sự không có khác biệt, các kết quả cực đoan như thế này hoặc hơn sẽ xảy ra khoảng 4 lần trong 100 nghiên cứu. Khá đáng ngạc nhiên, nên có lý do nghi ngờ giả định 'không khác biệt'.</a:t>
-            </a:r>
-          </a:p>
-          <a:p>
-            <a:r>
-              <a:rPr lang="en-US" sz="1400" b="0" dirty="0"/>
-              <a:t>p = 0.42 (Bài báo 1: Boulet 2024, RCT thí điểm (pilot) so sánh hạn chế dịch với truyền dịch thường quy trong sốc nhiễm khuẩn, trong thư mục khóa học Course/Papers) nghĩa là: kết quả như vậy rất thường gặp ngay cả khi không có khác biệt thật. Không đáng ngạc nhiên, nên không có bằng chứng chống lại 'không khác biệt'. Nhưng cũng không chứng minh 'không khác biệt'.</a:t>
-            </a:r>
-          </a:p>
-          <a:p>
-            <a:r>
-              <a:rPr lang="en-US" sz="1400" b="0" dirty="0"/>
-              <a:t>Ngưỡng 0.05 là một quy ước, không phải quy luật tự nhiên. p = 0.049 và p = 0.051 thực tế là cùng một mức bằng chứng.</a:t>
-            </a:r>
-          </a:p>
-          <a:p>
-            <a:r>
-              <a:rPr lang="en-US" sz="1400" b="0" dirty="0"/>
-              <a:t>Chú ý cụm từ 'theo cả hai hướng': vùng màu cam nằm ở cả hai đuôi. Đó là giá trị p hai phía, cách làm mặc định. Trang sau giải thích vì sao.</a:t>
-            </a:r>
-          </a:p>
-          <a:p>
-            <a:r>
-              <a:rPr lang="en-US" sz="1400" b="0" dirty="0"/>
-              <a:t>Hỏi (mời hai ba người trả lời, bật micro): p nhỏ có cho biết tác động lớn không? Dự kiến: không. Đó là cách hiểu sai số 2, sau đây hai trang.</a:t>
+              <a:t>0.05 chỉ là quy ước: 0.049 và 0.051 là cùng một mức bằng chứng.</a:t>
             </a:r>
           </a:p>
         </p:txBody>
@@ -5849,31 +5040,7 @@
           <a:p>
             <a:r>
               <a:rPr lang="en-US" sz="1400" b="0" dirty="0"/>
-              <a:t>Bổ sung: yếu tố thay đổi tác động duy nhất được định trước trong SAP của FLUID-ICU.</a:t>
-            </a:r>
-          </a:p>
-          <a:p>
-            <a:r>
-              <a:rPr lang="en-US" sz="1400" b="0" dirty="0"/>
-              <a:t>OR đã hiệu chỉnh cho tử vong, cân bằng dương so với âm: suy tim (n = 90) 4.39 (KTC 95% 1.65 đến 12.38). Không suy tim (n = 437) 1.29 (0.77 đến 2.19). p tương tác = 0.031 (Wald, kiểm định tỷ số khả dĩ p = 0.028).</a:t>
-            </a:r>
-          </a:p>
-          <a:p>
-            <a:r>
-              <a:rPr lang="en-US" sz="1400" b="0" dirty="0"/>
-              <a:t>Hợp lý về lâm sàng: người bệnh suy tim dung nạp dịch kém hơn.</a:t>
-            </a:r>
-          </a:p>
-          <a:p>
-            <a:r>
-              <a:rPr lang="en-US" sz="1400" b="0" dirty="0"/>
-              <a:t>Nhưng: phân nhóm nhỏ (90 người bệnh), KTC rất rộng, và SAP ghi rằng p tương tác &lt; 0.05 là 'bằng chứng cần xác nhận, chưa phải kết luận chắc chắn'. Báo cáo như phân tích thăm dò.</a:t>
-            </a:r>
-          </a:p>
-          <a:p>
-            <a:r>
-              <a:rPr lang="en-US" sz="1400" b="0" dirty="0"/>
-              <a:t>Nối với trang bổ sung về tương tác và với so sánh bội (một kiểm định định trước, không phải 20 phân nhóm hậu kiểm).</a:t>
+              <a:t>Trang bổ sung: không bắt buộc, dùng khi lớp đi nhanh hoặc để tự học.</a:t>
             </a:r>
           </a:p>
         </p:txBody>
@@ -5954,31 +5121,13 @@
           <a:p>
             <a:r>
               <a:rPr lang="en-US" sz="1400" b="0" dirty="0"/>
-              <a:t>Bổ sung: Câu hỏi 2 (Q2), tổn thương thận cấp (AKI).</a:t>
+              <a:t>Bổ sung. Yếu tố thay đổi tác động duy nhất được định trước: suy tim (n = 90) OR 4.39 (1.65 đến 12.38) so với 1.29 khi không suy tim, p tương tác 0.031.</a:t>
             </a:r>
           </a:p>
           <a:p>
             <a:r>
               <a:rPr lang="en-US" sz="1400" b="0" dirty="0"/>
-              <a:t>AKI (KDIGO giai đoạn 1 trở lên) theo cân bằng tích lũy: từ 0 ml/kg trở xuống 29%. Trên 0 đến 20: 54%. Trên 20 đến 40: 63%, trên 40: 75%. Gradient (liều-đáp ứng) là một trong các tiêu chí Bradford Hill (Buổi 4).</a:t>
-            </a:r>
-          </a:p>
-          <a:p>
-            <a:r>
-              <a:rPr lang="en-US" sz="1400" b="0" dirty="0"/>
-              <a:t>OR mỗi 10 ml/kg: thô 1.37 (1.27 đến 1.47), đã hiệu chỉnh 1.27 (1.16 đến 1.40), p &lt; 0.001 (n = 527).</a:t>
-            </a:r>
-          </a:p>
-          <a:p>
-            <a:r>
-              <a:rPr lang="en-US" sz="1400" b="0" dirty="0"/>
-              <a:t>Thận trọng: có thể có nhân quả ngược: người bệnh đang bị AKI tiểu ít hơn, nên cân bằng dịch dương hơn. Thời điểm AKI so với cân bằng dịch là quan trọng. Bàn trong phần hạn chế.</a:t>
-            </a:r>
-          </a:p>
-          <a:p>
-            <a:r>
-              <a:rPr lang="en-US" sz="1400" b="0" dirty="0"/>
-              <a:t>Hữu ích cho ai đã chọn Q2 cho bản thảo.</a:t>
+              <a:t>Hợp lý, nhưng nhóm nhỏ và kém chính xác: báo cáo như kết quả thăm dò.</a:t>
             </a:r>
           </a:p>
         </p:txBody>
@@ -6059,31 +5208,13 @@
           <a:p>
             <a:r>
               <a:rPr lang="en-US" sz="1400" b="0" dirty="0"/>
-              <a:t>Bổ sung: Câu hỏi 3 (Q3).</a:t>
+              <a:t>Bổ sung, Q2. AKI tăng dần theo nhóm cân bằng dịch: 29%, 54%, 63%, 75%. OR đã hiệu chỉnh 1.27 (1.16 đến 1.40) mỗi 10 ml/kg.</a:t>
             </a:r>
           </a:p>
           <a:p>
             <a:r>
               <a:rPr lang="en-US" sz="1400" b="0" dirty="0"/>
-              <a:t>Số ngày không thở máy đến ngày 28 bằng 0 với người bệnh tử vong hoặc thở máy suốt, và bằng 28 với người không bao giờ thở máy: dồn thành hai cụm, không giống hình chuông.</a:t>
-            </a:r>
-          </a:p>
-          <a:p>
-            <a:r>
-              <a:rPr lang="en-US" sz="1400" b="0" dirty="0"/>
-              <a:t>Trung vị 20 (0 đến 28) ngày ở nhóm cân bằng dương so với 28 (22 đến 28) ở nhóm âm. Mann-Whitney p &lt; 0.001.</a:t>
-            </a:r>
-          </a:p>
-          <a:p>
-            <a:r>
-              <a:rPr lang="en-US" sz="1400" b="0" dirty="0"/>
-              <a:t>Hồi quy tuyến tính mỗi 10 ml/kg: thô -1.48 (-1.84 đến -1.13) ngày, đã hiệu chỉnh -0.61 (-1.00 đến -0.21) ngày, p = 0.003 (n = 527).</a:t>
-            </a:r>
-          </a:p>
-          <a:p>
-            <a:r>
-              <a:rPr lang="en-US" sz="1400" b="0" dirty="0"/>
-              <a:t>Ý chính: luôn xem phân phối trước khi chọn cách tóm tắt và mô hình. Hữu ích cho ai đã chọn Q3 cho bản thảo.</a:t>
+              <a:t>Thận trọng: AKI cũng có thể gây cân bằng dương (quan hệ nhân quả ngược).</a:t>
             </a:r>
           </a:p>
         </p:txBody>
@@ -6164,37 +5295,13 @@
           <a:p>
             <a:r>
               <a:rPr lang="en-US" sz="1400" b="0" dirty="0"/>
-              <a:t>Bổ sung: Ý chính: quần thể là tất cả những người cần tìm hiểu (mọi người lớn bị sốc nhiễm khuẩn). Không bao giờ thấy hết được. Mẫu là những người bệnh thực sự được nghiên cứu.</a:t>
+              <a:t>Bổ sung, Q3. Số ngày không thở máy dồn ở 0 (tử vong) và 28: báo cáo trung vị, dùng kiểm định phi tham số.</a:t>
             </a:r>
           </a:p>
           <a:p>
             <a:r>
               <a:rPr lang="en-US" sz="1400" b="0" dirty="0"/>
-              <a:t>Trong mẫu 40 người bệnh, 12 người tử vong: 30%. Đó là ước lượng của tỷ lệ tử vong thật.</a:t>
-            </a:r>
-          </a:p>
-          <a:p>
-            <a:r>
-              <a:rPr lang="en-US" sz="1400" b="0" dirty="0"/>
-              <a:t>Một mẫu 40 người bệnh khác sẽ cho con số hơi khác, có thể 25% hoặc 35%. Sự dao động từ mẫu này sang mẫu khác gọi là sai số chọn mẫu. Đó không phải lỗi. Đó là ngẫu nhiên.</a:t>
-            </a:r>
-          </a:p>
-          <a:p>
-            <a:r>
-              <a:rPr lang="en-US" sz="1400" b="0" dirty="0"/>
-              <a:t>Khoảng tin cậy 95% (17% đến 47%) thể hiện sự không chắc chắn đó: tỷ lệ tử vong thật có thể hợp lý nằm ở bất kỳ đâu trong khoảng này. Với chỉ 40 người bệnh, khoảng này rộng.</a:t>
-            </a:r>
-          </a:p>
-          <a:p>
-            <a:r>
-              <a:rPr lang="en-US" sz="1400" b="0" dirty="0"/>
-              <a:t>Hai điều kiện để mẫu phản ánh được quần thể: mẫu phải đại diện (sai lệch chọn lựa, Buổi 4) và đủ lớn (độ chính xác).</a:t>
-            </a:r>
-          </a:p>
-          <a:p>
-            <a:r>
-              <a:rPr lang="en-US" sz="1400" b="0" dirty="0"/>
-              <a:t>Hỏi: nếu nghiên cứu 400 người bệnh thay vì 40, khoảng tin cậy sẽ thế nào? Dự kiến: hẹp hơn. Đó là trang 'Khoảng tin cậy qua 20 lần lặp lại nghiên cứu' và trang cỡ mẫu trong mục 6.1.</a:t>
+              <a:t>Đã hiệu chỉnh -0.61 ngày (-1.00 đến -0.21) mỗi 10 ml/kg.</a:t>
             </a:r>
           </a:p>
         </p:txBody>
@@ -6275,37 +5382,13 @@
           <a:p>
             <a:r>
               <a:rPr lang="en-US" sz="1400" b="0" dirty="0"/>
-              <a:t>Bổ sung: Ý chính: đọc mọi KTC theo ba bước: giá trị ước lượng, vị trí của giá trị 'không tác động', và độ rộng của khoảng.</a:t>
+              <a:t>Bổ sung. Mẫu là những người bệnh ta nghiên cứu, quần thể là tất cả những người ta muốn hiểu. 12 trên 40 tử vong: 30% (KTC 95% 17% đến 47%).</a:t>
             </a:r>
           </a:p>
           <a:p>
             <a:r>
               <a:rPr lang="en-US" sz="1400" b="0" dirty="0"/>
-              <a:t>Bài báo 1 (Boulet 2024, RCT): trung vị cân bằng dịch tích lũy ngày 5 là 6.9 ml/kg (hạn chế dịch) so với 35.0 ml/kg (thường quy). Bài báo cũng báo cáo chênh lệch giữa các giá trị trung bình: 13.2 ml/kg với KTC 95% -15.2 đến 41.6, p = 0.42.</a:t>
-            </a:r>
-          </a:p>
-          <a:p>
-            <a:r>
-              <a:rPr lang="en-US" sz="1400" b="0" dirty="0"/>
-              <a:t>Khoảng tin cậy chứa số 0, nên dữ liệu phù hợp với không có khác biệt. Nhưng nó cũng chứa mức chênh lệch lớn tới 40 ml/kg. Kết luận: nghiên cứu không thể cho biết chiến lược này có hiệu quả hay không. Đây là nghiên cứu thí điểm (pilot) với 48 người bệnh.</a:t>
-            </a:r>
-          </a:p>
-          <a:p>
-            <a:r>
-              <a:rPr lang="en-US" sz="1400" b="0" dirty="0"/>
-              <a:t>Nếu có người hỏi vì sao 13.2 không bằng 35.0 trừ 6.9 (28.1): 13.2 là hiệu của hai giá trị trung bình, được tác giả báo cáo kèm KTC 95%. Còn trung vị mô tả dữ liệu lệch. Trung bình và trung vị khác nhau khi dữ liệu bị lệch, đúng bài học của phần 5.3.</a:t>
-            </a:r>
-          </a:p>
-          <a:p>
-            <a:r>
-              <a:rPr lang="en-US" sz="1400" b="0" dirty="0"/>
-              <a:t>Lỗi thường gặp: đọc p = 0.42 thành 'chiến lược hạn chế dịch không hiệu quả'. Không có bằng chứng không phải là bằng chứng của việc không có.</a:t>
-            </a:r>
-          </a:p>
-          <a:p>
-            <a:r>
-              <a:rPr lang="en-US" sz="1400" b="0" dirty="0"/>
-              <a:t>Hỏi: KTC sẽ trông thế nào nếu thử nghiệm có 500 người bệnh? Dự kiến: hẹp hơn nhiều, có thể không còn chứa số 0.</a:t>
+              <a:t>Hỏi: 400 người bệnh thay vì 40? Kỳ vọng: khoảng hẹp hơn.</a:t>
             </a:r>
           </a:p>
         </p:txBody>
@@ -6386,49 +5469,19 @@
           <a:p>
             <a:r>
               <a:rPr lang="en-US" sz="1400" b="0" dirty="0"/>
-              <a:t>Bổ sung: Ý chính: biểu đồ rừng (forest plot) thể hiện nhiều ước lượng cùng KTC của chúng so với đường không tác động. Mỗi ô vuông là một HR, mỗi đoạn ngang là KTC 95% của nó.</a:t>
-            </a:r>
-          </a:p>
-          <a:p>
-            <a:r>
-              <a:rPr lang="en-US" sz="1400" b="1" dirty="0"/>
-              <a:t>Bài báo 2 (Hyun 2023, Ann Intensive Care), tử vong 28 ngày, cân bằng dịch tích lũy dương so với âm:</a:t>
+              <a:t>Bổ sung. Đọc mọi KTC theo ba bước: ước lượng, giá trị không tác động ở đâu, rộng đến đâu.</a:t>
             </a:r>
           </a:p>
           <a:p>
             <a:r>
               <a:rPr lang="en-US" sz="1400" b="0" dirty="0"/>
-              <a:t>Ngày 1 (483 cặp): HR 1.17 (0.85-1.60), p = 0.354. Cắt qua 1: không có liên quan rõ ràng.</a:t>
+              <a:t>Bài báo 1: 13.2 ml/kg (-15.2 đến 41.6), p = 0.42. Chứa 0 và cũng chứa một khác biệt lớn: chưa biết.</a:t>
             </a:r>
           </a:p>
           <a:p>
             <a:r>
               <a:rPr lang="en-US" sz="1400" b="0" dirty="0"/>
-              <a:t>Ngày 2 (373 cặp): HR 2.13 (1.48-3.06), p &lt; 0.001. Hoàn toàn trên 1: nguy cơ tức thời khoảng gấp đôi.</a:t>
-            </a:r>
-          </a:p>
-          <a:p>
-            <a:r>
-              <a:rPr lang="en-US" sz="1400" b="0" dirty="0"/>
-              <a:t>Ngày 3 (392 cặp): HR 1.56 (1.10-2.22), p = 0.012. Trên 1, nhưng giới hạn dưới gần 1.</a:t>
-            </a:r>
-          </a:p>
-          <a:p>
-            <a:r>
-              <a:rPr lang="en-US" sz="1400" b="0" dirty="0"/>
-              <a:t>Diễn giải: cân bằng dịch dương kéo dài sau ngày đầu tiên có liên quan với tử vong cao hơn. Có liên quan, không phải gây ra: đây là nghiên cứu thuần tập, và ngay cả sau ghép cặp, người bệnh nặng hơn vẫn có thể được truyền nhiều dịch hơn (nhiễu tồn dư).</a:t>
-            </a:r>
-          </a:p>
-          <a:p>
-            <a:r>
-              <a:rPr lang="en-US" sz="1400" b="0" dirty="0"/>
-              <a:t>So sánh với Bài báo 1: một RCT không cho thấy khác biệt rõ ràng về cân bằng dịch. Hai thiết kế trả lời các câu hỏi khác nhau với thế mạnh khác nhau. Đó là trọng tâm của phần thẩm định vào Buổi 7-8.</a:t>
-            </a:r>
-          </a:p>
-          <a:p>
-            <a:r>
-              <a:rPr lang="en-US" sz="1400" b="0" dirty="0"/>
-              <a:t>Hỏi: vì sao KTC ngày 1 và ngày 2 có độ rộng khác nhau? Dự kiến: số người bệnh và số biến cố khác nhau, độ dao động khác nhau.</a:t>
+              <a:t>Nếu có người hỏi vì sao 13.2 không bằng 35.0 trừ 6.9: đó là chênh lệch trung bình, còn trung vị mô tả dữ liệu lệch.</a:t>
             </a:r>
           </a:p>
         </p:txBody>
@@ -6509,43 +5562,13 @@
           <a:p>
             <a:r>
               <a:rPr lang="en-US" sz="1400" b="0" dirty="0"/>
-              <a:t>Bổ sung: Ý chính: ba công cụ đi cùng đường cong KM.</a:t>
+              <a:t>Bổ sung. Biểu đồ rừng của Bài báo 2: ngày 1 HR 1.17 (0.85-1.60) cắt qua 1. Ngày 2 HR 2.13 (1.48-3.06) và ngày 3 HR 1.56 (1.10-2.22) nằm trên 1.</a:t>
             </a:r>
           </a:p>
           <a:p>
             <a:r>
               <a:rPr lang="en-US" sz="1400" b="0" dirty="0"/>
-              <a:t>Kiểm định log-rank: trả lời 'hai đường cong có khác nhau không?' bằng một giá trị p. Nó không hiệu chỉnh được yếu tố gây nhiễu và không cho biết khác biệt lớn đến đâu.</a:t>
-            </a:r>
-          </a:p>
-          <a:p>
-            <a:r>
-              <a:rPr lang="en-US" sz="1400" b="0" dirty="0"/>
-              <a:t>Hồi quy Cox (mô hình nguy cơ tỷ lệ): cho tỷ số nguy cơ tức thời (hazard ratio), tức tỷ số tốc độ tử vong tức thời giữa hai nhóm, kèm KTC 95%. Giá trị không tác động là 1. Giống hồi quy logistic, nó có thể đưa vào nhiều biến, nên HR có thể được hiệu chỉnh. Bài báo 2 dùng mô hình Cox (có tính đến cụm) trên các cặp đã ghép: HR ngày 2 là 2.13 (KTC 95% 1.48 đến 3.06).</a:t>
-            </a:r>
-          </a:p>
-          <a:p>
-            <a:r>
-              <a:rPr lang="en-US" sz="1400" b="0" dirty="0"/>
-              <a:t>Nguy cơ tỷ lệ: mô hình Cox giả định HR không đổi suốt thời gian theo dõi. Nếu các đường KM cắt nhau hoặc hội tụ mạnh, một HR duy nhất gây hiểu nhầm. Bài báo tốt nói rõ cách kiểm tra giả định này.</a:t>
-            </a:r>
-          </a:p>
-          <a:p>
-            <a:r>
-              <a:rPr lang="en-US" sz="1400" b="0" dirty="0"/>
-              <a:t>HR và RR: HR bằng 2 nghĩa là tốc độ tử vong tại mọi thời điểm cao gấp đôi. Không hoàn toàn là 'số ca tử vong đến ngày 28 gấp đôi', dù thường gần như vậy khi biến cố không phổ biến.</a:t>
-            </a:r>
-          </a:p>
-          <a:p>
-            <a:r>
-              <a:rPr lang="en-US" sz="1400" b="0" dirty="0"/>
-              <a:t>Hỏi: một bài báo có đường KM cắt nhau ở ngày 10 và báo cáo một HR bằng 1.0. Điều gì có thể bị che giấu? Dự kiến: có hại sớm và có lợi muộn (hoặc ngược lại) triệt tiêu nhau.</a:t>
-            </a:r>
-          </a:p>
-          <a:p>
-            <a:r>
-              <a:rPr lang="en-US" sz="1400" b="0" dirty="0"/>
-              <a:t>Thời lượng: 2 phút.</a:t>
+              <a:t>Có liên quan, không phải gây ra: vẫn còn nhiễu tồn dư.</a:t>
             </a:r>
           </a:p>
         </p:txBody>
@@ -6626,31 +5649,13 @@
           <a:p>
             <a:r>
               <a:rPr lang="en-US" sz="1400" b="0" dirty="0"/>
-              <a:t>Bổ sung: Ý chính: hai cách dùng sai kinh điển của tương quan.</a:t>
+              <a:t>Bổ sung. Log-rank: có giá trị p, không có độ lớn, không hiệu chỉnh. Cox: HR đã hiệu chỉnh kèm KTC. Nguy cơ tỷ lệ: giả định HR không đổi, cần kiểm tra khi hai đường cắt nhau.</a:t>
             </a:r>
           </a:p>
           <a:p>
             <a:r>
               <a:rPr lang="en-US" sz="1400" b="0" dirty="0"/>
-              <a:t>Bên trái, đồng thuận: máy đo lactat tại giường so với xét nghiệm trung tâm (mô phỏng). r = 0.98, nên nhiều tác giả viết 'đồng thuận tuyệt vời'. Nhưng mọi điểm nằm dưới đường đồng thuận hoàn hảo: máy đọc thấp hơn khoảng 0.9 mmol/L. Tương quan đo việc các giá trị có cùng tăng hay không, không phải chúng có bằng nhau không. Để so sánh hai phương pháp đo, dùng biểu đồ Bland-Altman (hiệu số theo trung bình, kèm giới hạn đồng thuận).</a:t>
-            </a:r>
-          </a:p>
-          <a:p>
-            <a:r>
-              <a:rPr lang="en-US" sz="1400" b="0" dirty="0"/>
-              <a:t>Bên phải, nhân quả: truyền nhiều dịch ngày 1 đi kèm nằm ICU lâu hơn (r = 0.85). Nhưng trong từng nhóm mức độ nặng hoàn toàn không có liên quan. Mức độ nặng chi phối cả hai. Đây lại là nhiễu (Buổi 4), và là lý do cần hiệu chỉnh trong mô hình (mục 6.3 và 6.4).</a:t>
-            </a:r>
-          </a:p>
-          <a:p>
-            <a:r>
-              <a:rPr lang="en-US" sz="1400" b="0" dirty="0"/>
-              <a:t>Hỏi: một máy đo hemoglobin tại chỗ mới có r = 0.95 với xét nghiệm trung tâm. Có thể thay thế xét nghiệm trung tâm không? Dự kiến: chưa. Trước hết phải kiểm tra đồng thuận (độ chệch và giới hạn).</a:t>
-            </a:r>
-          </a:p>
-          <a:p>
-            <a:r>
-              <a:rPr lang="en-US" sz="1400" b="0" dirty="0"/>
-              <a:t>Thời lượng: 2 phút.</a:t>
+              <a:t>Thời gian: 2 phút.</a:t>
             </a:r>
           </a:p>
         </p:txBody>
@@ -6731,43 +5736,13 @@
           <a:p>
             <a:r>
               <a:rPr lang="en-US" sz="1400" b="0" dirty="0"/>
-              <a:t>Bổ sung: Ý chính: hiệu chỉnh (mục 6.3 và 6.4) giả định phơi nhiễm có cùng tác động ở mọi người. Tương tác (còn gọi là thay đổi tác động, Buổi 4) nghĩa là tác động khác nhau ở các nhóm khác nhau.</a:t>
+              <a:t>Bổ sung. Bên trái: r = 0.98 nhưng máy đọc thấp hơn 0.9: tương quan không phải là tương đồng (dùng Bland-Altman). Bên phải: dịch và thời gian nằm ICU tương quan chỉ qua mức độ nặng.</a:t>
             </a:r>
           </a:p>
           <a:p>
             <a:r>
               <a:rPr lang="en-US" sz="1400" b="0" dirty="0"/>
-              <a:t>Bên trái, không tương tác: tử vong tăng theo cân bằng dịch với cùng tốc độ ở người bệnh có và không có ARDS (hội chứng suy hô hấp cấp tiến triển). Người bệnh ARDS chỉ đơn giản bắt đầu ở mức cao hơn. Một ước lượng đã hiệu chỉnh là đủ.</a:t>
-            </a:r>
-          </a:p>
-          <a:p>
-            <a:r>
-              <a:rPr lang="en-US" sz="1400" b="0" dirty="0"/>
-              <a:t>Bên phải, có tương tác: cân bằng dịch gần như không ảnh hưởng khi không có ARDS nhưng ảnh hưởng nhiều khi có ARDS. Một tác động 'trung bình' sẽ không mô tả đúng ai. Mô hình có một số hạng tương tác (dịch x ARDS). Nếu quan trọng, báo cáo tác động theo từng nhóm.</a:t>
-            </a:r>
-          </a:p>
-          <a:p>
-            <a:r>
-              <a:rPr lang="en-US" sz="1400" b="0" dirty="0"/>
-              <a:t>Quy tắc: định trước một vài tương tác sẽ kiểm định, có lý do lâm sàng (lại là so sánh bội), và không kết luận khác biệt giữa phân nhóm chỉ vì một phân nhóm có p &lt; 0.05 còn nhóm kia thì không. Hãy kiểm định chính số hạng tương tác.</a:t>
-            </a:r>
-          </a:p>
-          <a:p>
-            <a:r>
-              <a:rPr lang="en-US" sz="1400" b="0" dirty="0"/>
-              <a:t>Đường minh họa.</a:t>
-            </a:r>
-          </a:p>
-          <a:p>
-            <a:r>
-              <a:rPr lang="en-US" sz="1400" b="0" dirty="0"/>
-              <a:t>Hỏi: nhiễu hay tương tác? 'Thuốc có hiệu quả ở nữ nhưng không ở nam.' Dự kiến: tương tác (thay đổi tác động).</a:t>
-            </a:r>
-          </a:p>
-          <a:p>
-            <a:r>
-              <a:rPr lang="en-US" sz="1400" b="0" dirty="0"/>
-              <a:t>Thời lượng: 2 phút.</a:t>
+              <a:t>Thời gian: 2 phút.</a:t>
             </a:r>
           </a:p>
         </p:txBody>
@@ -6848,37 +5823,19 @@
           <a:p>
             <a:r>
               <a:rPr lang="en-US" sz="1400" b="0" dirty="0"/>
-              <a:t>Bổ sung: Ý chính: đặt hai bài báo của ví dụ xuyên suốt cạnh nhau.</a:t>
+              <a:t>Bổ sung. Hai đường song song: một tác động đã hiệu chỉnh là đủ. Độ dốc khác nhau: có tương tác, báo cáo tác động ở từng nhóm.</a:t>
             </a:r>
           </a:p>
           <a:p>
             <a:r>
               <a:rPr lang="en-US" sz="1400" b="0" dirty="0"/>
-              <a:t>Bên trái, Bài báo 1 (chênh lệch trung bình, giá trị không tác động = 0): 13.2 ml/kg (KTC 95% -15.2 đến 41.6). Khoảng cắt qua 0: không có khác biệt có ý nghĩa thống kê, và rất kém chính xác.</a:t>
+              <a:t>Định trước một vài tương tác cần kiểm định, và kiểm định chính tương tác đó.</a:t>
             </a:r>
           </a:p>
           <a:p>
             <a:r>
               <a:rPr lang="en-US" sz="1400" b="0" dirty="0"/>
-              <a:t>Bên phải, Bài báo 2, thuần tập ngày 2 (tỷ số, giá trị không tác động = 1): HR 2.13 (KTC 95% 1.48 đến 3.06), p &lt; 0.001. Toàn bộ khoảng nằm trên 1: cân bằng dịch dương đến ngày 2 có liên quan với tử vong 28 ngày cao hơn.</a:t>
-            </a:r>
-          </a:p>
-          <a:p>
-            <a:r>
-              <a:rPr lang="en-US" sz="1400" b="0" dirty="0"/>
-              <a:t>Chú ý thang tỷ số được vẽ theo thang log: HR 0.5 (giảm một nửa) và HR 2 (gấp đôi) cách đều 1. Vì vậy biểu đồ rừng của các tỷ số trông đối xứng quanh 1.</a:t>
-            </a:r>
-          </a:p>
-          <a:p>
-            <a:r>
-              <a:rPr lang="en-US" sz="1400" b="0" dirty="0"/>
-              <a:t>Quy tắc: KTC 95% không chứa giá trị không tác động tương đương p &lt; 0.05 (với kiểm định hai phía), và ngược lại. KTC cho biết mọi điều giá trị p cho biết, cộng thêm độ lớn và độ chính xác.</a:t>
-            </a:r>
-          </a:p>
-          <a:p>
-            <a:r>
-              <a:rPr lang="en-US" sz="1400" b="0" dirty="0"/>
-              <a:t>Hỏi: nếu KTC của một HR là 0.95 đến 1.40, có ý nghĩa hay không? Dự kiến: không có ý nghĩa, nó chứa 1.</a:t>
+              <a:t>Thời gian: 2 phút.</a:t>
             </a:r>
           </a:p>
         </p:txBody>
@@ -6959,43 +5916,31 @@
           <a:p>
             <a:r>
               <a:rPr lang="en-US" sz="1400" b="0" dirty="0"/>
-              <a:t>Ý chính: mọi kiểm định đều bắt đầu từ hai giả thuyết. H0, giả thuyết không: không có khác biệt giữa các nhóm. H1, giả thuyết đối: có khác biệt. Câu hỏi là H1 cho phép khác biệt theo cả hai hướng hay chỉ một hướng.</a:t>
+              <a:t>Mặc định là hai phía: lợi ích và tác hại đều được tính. Bài báo 1 và SAP của FLUID-ICU dùng kiểm định hai phía.</a:t>
             </a:r>
           </a:p>
           <a:p>
             <a:r>
               <a:rPr lang="en-US" sz="1400" b="0" dirty="0"/>
-              <a:t>Hai phía (mặc định): H1 nói 'chiến lược hạn chế dịch làm thay đổi tử vong', tăng hoặc giảm. Kết quả nằm xa ở bất kỳ đuôi nào cũng được tính là bằng chứng. Điều này bảo vệ người bệnh: một điều trị mới có thể gây hại cũng như có lợi, và cần phát hiện cả hai. Phép tính cỡ mẫu của Bài báo 1 dùng alpha 5% hai phía. SAP của FLUID-ICU (kế hoạch phân tích thống kê, Course/Data/SAP_FLUID-ICU.md) dùng kiểm định hai phía cho mọi phân tích.</a:t>
+              <a:t>Một phía làm giá trị p giảm một nửa: chỉ chấp nhận khi có lý do ghi trước khi có dữ liệu. Đổi sau khi xem kết quả là p-hacking.</a:t>
             </a:r>
           </a:p>
           <a:p>
             <a:r>
               <a:rPr lang="en-US" sz="1400" b="0" dirty="0"/>
-              <a:t>Một phía: H1 nói 'chiến lược hạn chế dịch làm giảm tử vong'. Một kết quả theo hướng ngược lại, dù cực đoan đến đâu, cũng bị xem là 'không khác biệt'. Vì chỉ tính một đuôi, cùng dữ liệu cho giá trị p chỉ bằng khoảng một nửa (p hai phía 0.08 thành p một phía 0.04). Đó là sự cám dỗ, và là lý do người phản biện nghi ngờ kiểm định một phía.</a:t>
+              <a:t>Không kém hơn là một thiết kế khác, có ngưỡng riêng.</a:t>
             </a:r>
           </a:p>
           <a:p>
             <a:r>
               <a:rPr lang="en-US" sz="1400" b="0" dirty="0"/>
-              <a:t>Khi nào kiểm định một phía chấp nhận được? Chỉ khi có lý do vững được ghi trong đề cương trước khi xem dữ liệu, thường là khi khác biệt theo hướng ngược lại là không thể xảy ra hoặc sẽ dẫn đến đúng cùng một quyết định. Điều này hiếm gặp trong nghiên cứu lâm sàng. Đổi sang một phía sau khi thấy kết quả là một dạng 'p-hacking' (xoay xở để có p đẹp).</a:t>
+              <a:t>Thăm dò: 'p một phía = 0.03' không giải thích lý do. Có thuyết phục không? Kỳ vọng: không.</a:t>
             </a:r>
           </a:p>
           <a:p>
             <a:r>
               <a:rPr lang="en-US" sz="1400" b="0" dirty="0"/>
-              <a:t>Không giống thử nghiệm không kém hơn: thử nghiệm không kém hơn (Buổi 3, hình về ngưỡng) hỏi điều trị mới có kém điều trị cũ quá một ngưỡng định trước hay không. Trông có vẻ một chiều, nhưng đó là một thiết kế khác, với giả thuyết, ngưỡng, cỡ mẫu và cách phân tích riêng. Không được biến một thử nghiệm vượt trội thành thử nghiệm không kém hơn bằng cách đổi sang kiểm định một phía.</a:t>
-            </a:r>
-          </a:p>
-          <a:p>
-            <a:r>
-              <a:rPr lang="en-US" sz="1400" b="0" dirty="0"/>
-              <a:t>Hỏi (bình chọn): một thử nghiệm báo cáo 'p một phía = 0.03' mà không giải thích vì sao. Anh chị có tin không? Dự kiến: không. Cần hỏi vì sao một phía, và có lên kế hoạch trước không. p hai phía sẽ khoảng 0.06.</a:t>
-            </a:r>
-          </a:p>
-          <a:p>
-            <a:r>
-              <a:rPr lang="en-US" sz="1400" b="0" dirty="0"/>
-              <a:t>Thời lượng: 3 phút.</a:t>
+              <a:t>Thời gian: 3 phút.</a:t>
             </a:r>
           </a:p>
         </p:txBody>
@@ -7076,43 +6021,13 @@
           <a:p>
             <a:r>
               <a:rPr lang="en-US" sz="1400" b="0" dirty="0"/>
-              <a:t>Bổ sung: Ý chính: đến giờ, các mô hình dùng để giải thích (dịch truyền có liên quan với tử vong sau khi hiệu chỉnh yếu tố gây nhiễu không?). Mô hình dự báo dùng để dự đoán nguy cơ của từng người (SOFA, APACHE, cảnh báo sớm nhiễm khuẩn huyết, điểm học máy). Chúng được đánh giá theo cách khác.</a:t>
+              <a:t>Bổ sung. Tìm giá trị không tác động trước: 0 với chênh lệch (Bài báo 1 cắt qua 0), 1 với tỷ số (Bài báo 2 ngày 2 nằm trên 1).</a:t>
             </a:r>
           </a:p>
           <a:p>
             <a:r>
               <a:rPr lang="en-US" sz="1400" b="0" dirty="0"/>
-              <a:t>Khả năng phân biệt (bên trái): mô hình có cho nguy cơ cao hơn ở người bệnh tử vong so với người bệnh sống không? Đo bằng chỉ số c (= diện tích dưới đường cong ROC, AUC): 0.5 như tung đồng xu, 1.0 là hoàn hảo. Ở đây khoảng 0.89 (mô phỏng).</a:t>
-            </a:r>
-          </a:p>
-          <a:p>
-            <a:r>
-              <a:rPr lang="en-US" sz="1400" b="0" dirty="0"/>
-              <a:t>Hiệu chuẩn (ở giữa): khi mô hình dự đoán 30%, có khoảng 30% tử vong không? Các điểm nằm trên đường chéo = hiệu chuẩn tốt.</a:t>
-            </a:r>
-          </a:p>
-          <a:p>
-            <a:r>
-              <a:rPr lang="en-US" sz="1400" b="0" dirty="0"/>
-              <a:t>Thẩm định ngoài (bên phải): cùng mô hình ở một bệnh viện mới dự đoán nguy cơ quá cao (điểm nằm dưới đường chéo). Đặc điểm người bệnh, điều trị và cách đo khác nhau. Mô hình phải được thử trên những người bệnh không dùng để xây dựng nó, tốt nhất ở nơi khác, trước khi ai đó sử dụng.</a:t>
-            </a:r>
-          </a:p>
-          <a:p>
-            <a:r>
-              <a:rPr lang="en-US" sz="1400" b="0" dirty="0"/>
-              <a:t>AUC cao thôi chưa đủ: mô hình có thể xếp hạng người bệnh tốt mà vẫn cho nguy cơ tuyệt đối sai.</a:t>
-            </a:r>
-          </a:p>
-          <a:p>
-            <a:r>
-              <a:rPr lang="en-US" sz="1400" b="0" dirty="0"/>
-              <a:t>Hỏi: một nhà cung cấp nói hệ thống cảnh báo nhiễm khuẩn huyết của họ có AUC 0.92 'trên dữ liệu phát triển'. Anh chị hỏi gì? Dự kiến: hiệu chuẩn, và thẩm định ngoài ở cơ sở giống của mình.</a:t>
-            </a:r>
-          </a:p>
-          <a:p>
-            <a:r>
-              <a:rPr lang="en-US" sz="1400" b="0" dirty="0"/>
-              <a:t>Thời lượng: 2 phút.</a:t>
+              <a:t>KTC không chứa giá trị không tác động nghĩa là p &lt; 0.05, và KTC còn cho biết độ lớn và độ chính xác.</a:t>
             </a:r>
           </a:p>
         </p:txBody>
@@ -7193,49 +6108,19 @@
           <a:p>
             <a:r>
               <a:rPr lang="en-US" sz="1400" b="0" dirty="0"/>
-              <a:t>Bổ sung: Ý chính: học máy (machine learning, ML) và công cụ AI là các mô hình dự báo được xây dựng bằng thuật toán linh hoạt (rừng ngẫu nhiên, mạng nơ-ron). Đánh giá chúng bằng bốn câu hỏi.</a:t>
+              <a:t>Bổ sung. Mô hình dự báo được đánh giá bằng khả năng phân biệt (AUC), hiệu chuẩn và thẩm định bên ngoài. Chỉ AUC cao là chưa đủ.</a:t>
             </a:r>
           </a:p>
           <a:p>
             <a:r>
               <a:rPr lang="en-US" sz="1400" b="0" dirty="0"/>
-              <a:t>Dùng để làm gì? Dự báo trả lời 'ai có nguy cơ cao?', không phải 'cái gì gây tử vong?'. Một biến dự báo tốt (ví dụ vào ICU ban đêm) không nhất thiết là nguyên nhân. Hãy hỏi kết quả dự báo sẽ thay đổi quyết định nào.</a:t>
+              <a:t>Hỏi: nhà cung cấp nêu AUC 0.92 trên dữ liệu của chính họ. Anh chị hỏi gì?</a:t>
             </a:r>
           </a:p>
           <a:p>
             <a:r>
               <a:rPr lang="en-US" sz="1400" b="0" dirty="0"/>
-              <a:t>Đủ dữ liệu? Các phương pháp linh hoạt rất dễ quá khớp. Chúng cần nhiều biến cố hơn hẳn mô hình hồi quy. Kiểm tra cách thẩm định nội bộ (kiểm định chéo, bootstrap, một mẫu để riêng).</a:t>
-            </a:r>
-          </a:p>
-          <a:p>
-            <a:r>
-              <a:rPr lang="en-US" sz="1400" b="0" dirty="0"/>
-              <a:t>Có hiệu quả? Khả năng phân biệt (AUC, diện tích dưới đường cong ROC) và hiệu chuẩn, và trên hết là thẩm định ngoài ở thời gian hoặc nơi khác.</a:t>
-            </a:r>
-          </a:p>
-          <a:p>
-            <a:r>
-              <a:rPr lang="en-US" sz="1400" b="0" dirty="0"/>
-              <a:t>Báo cáo đầy đủ? TRIPOD+AI là hướng dẫn báo cáo cho mô hình dự báo, kể cả AI (trên EQUATOR, Buổi 7-8). Tìm cách xử lý dữ liệu thiếu, tính công bằng giữa các nhóm, và mô hình đã được thử nghiệm về tác động lên kết cục người bệnh hay chỉ về độ chính xác.</a:t>
-            </a:r>
-          </a:p>
-          <a:p>
-            <a:r>
-              <a:rPr lang="en-US" sz="1400" b="0" dirty="0"/>
-              <a:t>Các học phần nâng cao tự chọn có phần xây dựng và thẩm định mô hình dự báo.</a:t>
-            </a:r>
-          </a:p>
-          <a:p>
-            <a:r>
-              <a:rPr lang="en-US" sz="1400" b="0" dirty="0"/>
-              <a:t>Hỏi: một điểm cảnh báo sớm có độ chính xác tuyệt vời nhưng chưa có nghiên cứu tác động đã sẵn sàng dùng thường quy chưa? Dự kiến: chưa. Chính xác không đồng nghĩa với có lợi.</a:t>
-            </a:r>
-          </a:p>
-          <a:p>
-            <a:r>
-              <a:rPr lang="en-US" sz="1400" b="0" dirty="0"/>
-              <a:t>Thời lượng: 2 phút.</a:t>
+              <a:t>Thời gian: 2 phút.</a:t>
             </a:r>
           </a:p>
         </p:txBody>
@@ -7316,43 +6201,19 @@
           <a:p>
             <a:r>
               <a:rPr lang="en-US" sz="1400" b="0" dirty="0"/>
-              <a:t>Bổ sung: Ý chính: hai cách phổ biến để xử lý ô trống, trình bày bằng hình. Không có công thức.</a:t>
+              <a:t>Bổ sung. Học máy là dự báo. Bốn câu hỏi: dùng để làm gì, đủ dữ liệu chưa, có hiệu quả không (AUC, hiệu chuẩn, thẩm định bên ngoài), có báo cáo đúng không (TRIPOD+AI)?</a:t>
             </a:r>
           </a:p>
           <a:p>
             <a:r>
               <a:rPr lang="en-US" sz="1400" b="0" dirty="0"/>
-              <a:t>Phân tích các trường hợp đầy đủ (complete-case, phía trên): chỉ dùng những người bệnh không thiếu giá trị nào ở các biến được phân tích. Đơn giản và là mặc định của hầu hết phần mềm, nhưng mất người bệnh (ở đây 3 trong 5 dòng) và câu trả lời bị sai lệch trừ khi dữ liệu là MCAR. Với nhiều biến, mỗi biến thiếu một chút cộng lại thành mất rất nhiều.</a:t>
+              <a:t>Chính xác không đồng nghĩa với có lợi.</a:t>
             </a:r>
           </a:p>
           <a:p>
             <a:r>
               <a:rPr lang="en-US" sz="1400" b="0" dirty="0"/>
-              <a:t>Quy gán đa bội (multiple imputation, phía dưới), ý tưởng gồm ba bước: 1. Điền mỗi ô trống nhiều lần (ở đây 5) bằng giá trị hợp lý dự đoán từ các biến đã ghi nhận khác, mỗi lần có một chút dao động ngẫu nhiên. 2. Phân tích từng bộ dữ liệu đã điền theo cách thông thường. 3. Gộp kết quả thành một ước lượng mà KTC bao gồm thêm độ không chắc chắn do không biết các giá trị bị thiếu.</a:t>
-            </a:r>
-          </a:p>
-          <a:p>
-            <a:r>
-              <a:rPr lang="en-US" sz="1400" b="0" dirty="0"/>
-              <a:t>Phương pháp hoạt động tốt khi dữ liệu là MAR và mô hình quy gán có các biến giải thích việc thiếu. Đây không phải 'bịa dữ liệu': đây là trung thực về những gì chưa biết.</a:t>
-            </a:r>
-          </a:p>
-          <a:p>
-            <a:r>
-              <a:rPr lang="en-US" sz="1400" b="0" dirty="0"/>
-              <a:t>Số liệu minh họa. Ở phần 6.4 anh chị đã thấy nó được chạy trên bộ dữ liệu khóa học. Việc của anh chị là nhận ra nó và hỏi xem nó có phù hợp không.</a:t>
-            </a:r>
-          </a:p>
-          <a:p>
-            <a:r>
-              <a:rPr lang="en-US" sz="1400" b="0" dirty="0"/>
-              <a:t>Hỏi: một bài báo loại 30% người bệnh vì thiếu dữ liệu và chỉ phân tích các trường hợp đầy đủ. Anh chị hỏi gì? Dự kiến: ai bị loại, họ có khác biệt không, và có phân tích độ nhạy với quy gán đa bội không?</a:t>
-            </a:r>
-          </a:p>
-          <a:p>
-            <a:r>
-              <a:rPr lang="en-US" sz="1400" b="0" dirty="0"/>
-              <a:t>Thời lượng: 2 phút.</a:t>
+              <a:t>Thời gian: 2 phút.</a:t>
             </a:r>
           </a:p>
         </p:txBody>
@@ -7433,43 +6294,13 @@
           <a:p>
             <a:r>
               <a:rPr lang="en-US" sz="1400" b="0" dirty="0"/>
-              <a:t>Bổ sung: Ý chính: một bài báo tốt (và đề cương của anh chị) nói gì về dữ liệu bị thiếu.</a:t>
+              <a:t>Bổ sung. Trường hợp đầy đủ: đơn giản, mất người bệnh, sai lệch trừ khi MCAR. Quy gán đa bội: điền mỗi ô trống nhiều lần, phân tích từng bộ, rồi gộp lại. Cách này trung thực về những gì ta không biết.</a:t>
             </a:r>
           </a:p>
           <a:p>
             <a:r>
               <a:rPr lang="en-US" sz="1400" b="0" dirty="0"/>
-              <a:t>Báo cáo: số giá trị thiếu ở từng biến (cột 'n' trong Bảng 1 hoặc chú thích) và, với kết cục, một sơ đồ luồng cho biết ai bị mất và vì sao (CONSORT, STROBE, Buổi 7-8).</a:t>
-            </a:r>
-          </a:p>
-          <a:p>
-            <a:r>
-              <a:rPr lang="en-US" sz="1400" b="0" dirty="0"/>
-              <a:t>So sánh: người bệnh có dữ liệu đầy đủ với những người có ô trống về các đặc điểm ban đầu. Khác biệt lớn gợi ý việc thiếu không ngẫu nhiên.</a:t>
-            </a:r>
-          </a:p>
-          <a:p>
-            <a:r>
-              <a:rPr lang="en-US" sz="1400" b="0" dirty="0"/>
-              <a:t>Phân tích độ nhạy: lặp lại phân tích chính theo một cách khác: trường hợp đầy đủ so với quy gán đa bội. Với kết cục nhị phân bị thiếu, kịch bản tốt nhất (mọi ca thiếu đều sống) và xấu nhất (mọi ca thiếu đều tử vong). Nếu kết luận giữ nguyên ở mọi phiên bản, nó vững. Nếu đảo chiều, hãy nói rõ.</a:t>
-            </a:r>
-          </a:p>
-          <a:p>
-            <a:r>
-              <a:rPr lang="en-US" sz="1400" b="0" dirty="0"/>
-              <a:t>Kế hoạch: tất cả những điều này đưa vào SAP và vào Phần 3 đề cương: mức thiếu dự kiến, phòng ngừa (5.1), và cách báo cáo dữ liệu thiếu.</a:t>
-            </a:r>
-          </a:p>
-          <a:p>
-            <a:r>
-              <a:rPr lang="en-US" sz="1400" b="0" dirty="0"/>
-              <a:t>Hỏi: Bài báo 1 phân tích 48 trong 50 người bệnh được phân bổ ngẫu nhiên. Hai người bệnh nhóm chứng rút lui. Có vấn đề không? Dự kiến: mất ít (4%), được báo cáo minh bạch. Một phân tích độ nhạy vẫn là thực hành tốt.</a:t>
-            </a:r>
-          </a:p>
-          <a:p>
-            <a:r>
-              <a:rPr lang="en-US" sz="1400" b="0" dirty="0"/>
-              <a:t>Thời lượng: 2 phút.</a:t>
+              <a:t>Thời gian: 2 phút.</a:t>
             </a:r>
           </a:p>
         </p:txBody>
@@ -7550,7 +6381,94 @@
           <a:p>
             <a:r>
               <a:rPr lang="en-US" sz="1400" b="0" dirty="0"/>
-              <a:t>Slide bản quyền. Để trên màn hình khi học viên rời phòng họp.</a:t>
+              <a:t>Bổ sung. Người phản biện tìm: số giá trị thiếu của từng biến, so sánh người có và không có dữ liệu đầy đủ, một phân tích độ nhạy, và kế hoạch viết từ trước.</a:t>
+            </a:r>
+          </a:p>
+          <a:p>
+            <a:r>
+              <a:rPr lang="en-US" sz="1400" b="0" dirty="0"/>
+              <a:t>Thời gian: 2 phút.</a:t>
+            </a:r>
+          </a:p>
+        </p:txBody>
+      </p:sp>
+      <p:sp>
+        <p:nvSpPr>
+          <p:cNvPr id="4" name="Slide Number Placeholder 3"/>
+          <p:cNvSpPr>
+            <a:spLocks noGrp="1"/>
+          </p:cNvSpPr>
+          <p:nvPr>
+            <p:ph type="sldNum" sz="quarter" idx="10"/>
+          </p:nvPr>
+        </p:nvSpPr>
+        <p:spPr/>
+        <p:txBody>
+          <a:bodyPr/>
+          <a:lstStyle/>
+          <a:p>
+            <a:fld id="{F7021451-1387-4CA6-816F-3879F97B5CBC}" type="slidenum">
+              <a:rPr lang="en-US"/>
+              <a:t>1</a:t>
+            </a:fld>
+          </a:p>
+        </p:txBody>
+      </p:sp>
+    </p:spTree>
+  </p:cSld>
+  <p:clrMapOvr>
+    <a:masterClrMapping/>
+  </p:clrMapOvr>
+</p:notes>
+</file>
+
+<file path=ppt/notesSlides/notesSlide65.xml><?xml version="1.0" encoding="utf-8"?>
+<p:notes xmlns:a="http://schemas.openxmlformats.org/drawingml/2006/main" xmlns:r="http://schemas.openxmlformats.org/officeDocument/2006/relationships" xmlns:p="http://schemas.openxmlformats.org/presentationml/2006/main">
+  <p:cSld>
+    <p:spTree>
+      <p:nvGrpSpPr>
+        <p:cNvPr id="1" name=""/>
+        <p:cNvGrpSpPr/>
+        <p:nvPr/>
+      </p:nvGrpSpPr>
+      <p:grpSpPr>
+        <a:xfrm>
+          <a:off x="0" y="0"/>
+          <a:ext cx="0" cy="0"/>
+          <a:chOff x="0" y="0"/>
+          <a:chExt cx="0" cy="0"/>
+        </a:xfrm>
+      </p:grpSpPr>
+      <p:sp>
+        <p:nvSpPr>
+          <p:cNvPr id="2" name="Slide Image Placeholder 1"/>
+          <p:cNvSpPr>
+            <a:spLocks noGrp="1" noRot="1" noChangeAspect="1"/>
+          </p:cNvSpPr>
+          <p:nvPr>
+            <p:ph type="sldImg"/>
+          </p:nvPr>
+        </p:nvSpPr>
+        <p:spPr/>
+      </p:sp>
+      <p:sp>
+        <p:nvSpPr>
+          <p:cNvPr id="3" name="Notes Placeholder 2"/>
+          <p:cNvSpPr>
+            <a:spLocks noGrp="1"/>
+          </p:cNvSpPr>
+          <p:nvPr>
+            <p:ph type="body" idx="1"/>
+          </p:nvPr>
+        </p:nvSpPr>
+        <p:spPr/>
+        <p:txBody>
+          <a:bodyPr/>
+          <a:lstStyle/>
+          <a:p>
+            <a:r>
+              <a:rPr lang="en-US" sz="1400" b="0" dirty="0"/>
+              <a:t>Để trên màn hình khi học viên rời phòng họp.</a:t>
             </a:r>
           </a:p>
         </p:txBody>
@@ -7631,43 +6549,19 @@
           <a:p>
             <a:r>
               <a:rPr lang="en-US" sz="1400" b="0" dirty="0"/>
-              <a:t>Ý chính: năm cách hiểu sai, mỗi thẻ một cách. Mở một bình chọn nhanh 'đúng hay sai' cho từng câu trước khi giải thích.</a:t>
+              <a:t>Cho thăm dò đúng/sai nhanh với từng thẻ trước khi giải thích.</a:t>
             </a:r>
           </a:p>
           <a:p>
             <a:r>
               <a:rPr lang="en-US" sz="1400" b="0" dirty="0"/>
-              <a:t>1. 'p = 0.03 nghĩa là có 3% khả năng giả thuyết không đúng.' Sai: p được tính khi giả định giả thuyết không là đúng. Nó không thể đồng thời là xác suất của giả thuyết không.</a:t>
+              <a:t>1: p giả định H0, không phải xác suất của H0. 2: p rất nhỏ vẫn có thể đi với tác động không đáng kể. 3: Bài báo 1, p = 0.42 với KTC rộng nghĩa là 'chưa biết'. 4: không dùng 'xu hướng'. 5: nêu tác động và KTC, như Bài báo 2 (HR 2.13, 1.48-3.06).</a:t>
             </a:r>
           </a:p>
           <a:p>
             <a:r>
               <a:rPr lang="en-US" sz="1400" b="0" dirty="0"/>
-              <a:t>2. 'p &lt; 0.001, vậy tác động lớn.' Sai: với hàng nghìn người bệnh, một khác biệt nhỏ không có ý nghĩa lâm sàng vẫn có p rất nhỏ. Hãy xem độ lớn tác động và hỏi liệu nó có quan trọng với người bệnh không.</a:t>
-            </a:r>
-          </a:p>
-          <a:p>
-            <a:r>
-              <a:rPr lang="en-US" sz="1400" b="0" dirty="0"/>
-              <a:t>3. 'p = 0.42, vậy hai chiến lược tương đương.' Sai: Bài báo 1 là ví dụ hoàn hảo. KTC rộng cho thấy đơn giản là chưa biết.</a:t>
-            </a:r>
-          </a:p>
-          <a:p>
-            <a:r>
-              <a:rPr lang="en-US" sz="1400" b="0" dirty="0"/>
-              <a:t>4. 'p = 0.08 cho thấy xu hướng có lợi.' Sai: giá trị p không 'hướng về' đâu cả. Bảng kiểm thẩm định của khóa học hỏi đúng điều này: không gọi p = 0.42 là 'xu hướng'.</a:t>
-            </a:r>
-          </a:p>
-          <a:p>
-            <a:r>
-              <a:rPr lang="en-US" sz="1400" b="0" dirty="0"/>
-              <a:t>5. 'Kết quả: p = 0.02.' Chưa đủ: người đọc cần biết độ lớn tác động và mức độ không chắc chắn. Bài báo 2 (Hyun 2023, thuần tập ghép cặp theo điểm xu hướng về cân bằng dịch và tử vong, Course/Papers) làm đúng: tỷ số nguy cơ tức thời (HR) 2.13 (KTC 95% 1.48-3.06), p &lt; 0.001.</a:t>
-            </a:r>
-          </a:p>
-          <a:p>
-            <a:r>
-              <a:rPr lang="en-US" sz="1400" b="0" dirty="0"/>
-              <a:t>Năm câu này có trong Bài 1 (đúng hay sai) của phiếu bài tập Buổi 6 (tệp PDF gửi trước buổi học).</a:t>
+              <a:t>Cũng có trong Bài 1.</a:t>
             </a:r>
           </a:p>
         </p:txBody>
@@ -7748,37 +6642,19 @@
           <a:p>
             <a:r>
               <a:rPr lang="en-US" sz="1400" b="0" dirty="0"/>
-              <a:t>Kiểm tra nhanh (3 phút). Mỗi câu một bình chọn đúng/sai, rồi công bố.</a:t>
+              <a:t>Kiểm tra (3 phút), mỗi câu một thăm dò đúng/sai.</a:t>
             </a:r>
           </a:p>
           <a:p>
             <a:r>
               <a:rPr lang="en-US" sz="1400" b="0" dirty="0"/>
-              <a:t>1. Đúng: cách đọc thực tế của KTC 95% (Bài báo 2, ngày 2).</a:t>
+              <a:t>1 đúng. 2 sai: không có bằng chứng không phải là bằng chứng không có. 3 sai: p giả định không có tác động. 4 đúng.</a:t>
             </a:r>
           </a:p>
           <a:p>
             <a:r>
               <a:rPr lang="en-US" sz="1400" b="0" dirty="0"/>
-              <a:t>2. Sai: không có bằng chứng không phải là bằng chứng của việc không có. KTC của Bài báo 1 rất rộng (-15.2 đến 41.6).</a:t>
-            </a:r>
-          </a:p>
-          <a:p>
-            <a:r>
-              <a:rPr lang="en-US" sz="1400" b="0" dirty="0"/>
-              <a:t>3. Sai: p được tính khi giả định không có tác động. Nó không phải xác suất không có tác động.</a:t>
-            </a:r>
-          </a:p>
-          <a:p>
-            <a:r>
-              <a:rPr lang="en-US" sz="1400" b="0" dirty="0"/>
-              <a:t>4. Đúng: nhiều người bệnh hơn, chính xác hơn.</a:t>
-            </a:r>
-          </a:p>
-          <a:p>
-            <a:r>
-              <a:rPr lang="en-US" sz="1400" b="0" dirty="0"/>
-              <a:t>Nếu lớp chia rẽ ở câu 2 hoặc 3, quay lại hình giá trị p một phút. Đây là hiểu lầm quan trọng nhất cần sửa hôm nay.</a:t>
+              <a:t>Nếu lớp chia đôi ở câu 2 hoặc 3, quay lại hình giá trị p.</a:t>
             </a:r>
           </a:p>
         </p:txBody>
@@ -7859,49 +6735,19 @@
           <a:p>
             <a:r>
               <a:rPr lang="en-US" sz="1400" b="0" dirty="0"/>
-              <a:t>Ý chính: một kiểm định thống kê giống như chuông báo cháy. Có hai cách để sai.</a:t>
+              <a:t>Kiểm định giống chuông báo cháy. Sai lầm loại I: báo động giả (alpha, 5%). Sai lầm loại II: bỏ sót đám cháy (beta). Lực mẫu: chuông reo khi có cháy (mục tiêu 80-90%).</a:t>
             </a:r>
           </a:p>
           <a:p>
             <a:r>
               <a:rPr lang="en-US" sz="1400" b="0" dirty="0"/>
-              <a:t>Sai lầm loại I (báo động giả): chuông reo nhưng không có cháy. Kết luận điều trị có hiệu quả trong khi thực tế không. Thường chấp nhận nguy cơ 5% cho điều này: đó là alpha = 0.05.</a:t>
+              <a:t>Một thử nghiệm nhỏ 'âm tính' có thể là bỏ sót đám cháy: Bài báo 1 là nghiên cứu thí điểm.</a:t>
             </a:r>
           </a:p>
           <a:p>
             <a:r>
               <a:rPr lang="en-US" sz="1400" b="0" dirty="0"/>
-              <a:t>Sai lầm loại II (bỏ sót đám cháy): có cháy nhưng chuông im lặng. Điều trị có hiệu quả nhưng nghiên cứu không chứng minh được. Nguy cơ này gọi là beta.</a:t>
-            </a:r>
-          </a:p>
-          <a:p>
-            <a:r>
-              <a:rPr lang="en-US" sz="1400" b="0" dirty="0"/>
-              <a:t>Lực thống kê (power) = 1 - beta = khả năng chuông reo khi thực sự có cháy. Thường đặt mục tiêu 80% hoặc 90%.</a:t>
-            </a:r>
-          </a:p>
-          <a:p>
-            <a:r>
-              <a:rPr lang="en-US" sz="1400" b="0" dirty="0"/>
-              <a:t>Đánh đổi: làm chuông kém nhạy hơn (alpha nhỏ hơn) thì ít báo động giả hơn nhưng bỏ sót nhiều đám cháy hơn, trừ khi mua một chiếc chuông tốt hơn: nhiều người bệnh hơn.</a:t>
-            </a:r>
-          </a:p>
-          <a:p>
-            <a:r>
-              <a:rPr lang="en-US" sz="1400" b="0" dirty="0"/>
-              <a:t>Liên hệ lâm sàng: một thử nghiệm nhỏ 'âm tính' có thể chỉ là một đám cháy bị bỏ sót. Bài báo 1 là nghiên cứu thí điểm được thiết kế để phát hiện một khác biệt lớn. Một khác biệt thật nhỏ hơn rất dễ bị bỏ sót.</a:t>
-            </a:r>
-          </a:p>
-          <a:p>
-            <a:r>
-              <a:rPr lang="en-US" sz="1400" b="0" dirty="0"/>
-              <a:t>Hỏi (mời hai ba người trả lời, bật micro): sai lầm nào tệ hơn khi thử một thuốc mới, đắt và nhiều rủi ro? Còn với một can thiệp rẻ và an toàn? Không có một đáp án duy nhất. Đọc hai ba câu trả lời.</a:t>
-            </a:r>
-          </a:p>
-          <a:p>
-            <a:r>
-              <a:rPr lang="en-US" sz="1400" b="0" dirty="0"/>
-              <a:t>Trang này giờ là bảng chỉnh sửa được (trước đây là ảnh).</a:t>
+              <a:t>Hỏi: sai lầm nào tệ hơn với một thuốc đắt và nhiều rủi ro? Với một can thiệp rẻ và an toàn?</a:t>
             </a:r>
           </a:p>
         </p:txBody>
@@ -31008,7 +29854,7 @@
                 <a:latin typeface="Arial"/>
                 <a:cs typeface="Arial"/>
               </a:rPr>
-              <a:t>Tổng kết và bài tập về nhà</a:t>
+              <a:t>Sản phẩm thứ hai: phần Kết quả</a:t>
             </a:r>
           </a:p>
         </p:txBody>
@@ -31043,186 +29889,99 @@
       </p:sp>
       <p:sp>
         <p:nvSpPr>
-          <p:cNvPr id="50" name="Banner"/>
+          <p:cNvPr id="19" name="Intro"/>
+          <p:cNvSpPr txBox="1"/>
+          <p:nvPr/>
+        </p:nvSpPr>
+        <p:spPr>
+          <a:xfrm>
+            <a:off x="457200" y="1100000"/>
+            <a:ext cx="11277600" cy="626796"/>
+          </a:xfrm>
+          <a:prstGeom prst="rect">
+            <a:avLst/>
+          </a:prstGeom>
+          <a:noFill/>
+          <a:ln>
+            <a:noFill/>
+          </a:ln>
+        </p:spPr>
+        <p:txBody>
+          <a:bodyPr wrap="square" lIns="91440" tIns="45720" rIns="91440" bIns="45720" rtlCol="0" anchor="t"/>
+          <a:lstStyle/>
+          <a:p>
+            <a:pPr marL="0" indent="0" algn="l">
+              <a:buNone/>
+            </a:pPr>
+            <a:r>
+              <a:rPr lang="en-US" sz="1700" i="1" dirty="0">
+                <a:solidFill>
+                  <a:srgbClr val="595959"/>
+                </a:solidFill>
+                <a:latin typeface="Arial"/>
+                <a:cs typeface="Arial"/>
+              </a:rPr>
+              <a:t>Chọn một câu hỏi FLUID-ICU (Q1 đến Q5) ngay tối nay. Hướng dẫn bài tập bản thảo sẽ được gửi qua email.</a:t>
+            </a:r>
+          </a:p>
+        </p:txBody>
+      </p:sp>
+      <p:sp>
+        <p:nvSpPr>
+          <p:cNvPr id="70" name="CardHead"/>
           <p:cNvSpPr/>
           <p:nvPr/>
         </p:nvSpPr>
         <p:spPr>
           <a:xfrm>
-            <a:off x="457200" y="1120000"/>
-            <a:ext cx="11277600" cy="470000"/>
+            <a:off x="457200" y="2116416"/>
+            <a:ext cx="3625866" cy="640000"/>
           </a:xfrm>
           <a:prstGeom prst="rect">
             <a:avLst/>
           </a:prstGeom>
           <a:solidFill>
-            <a:srgbClr val="1F5C7A"/>
+            <a:srgbClr val="0D7377"/>
           </a:solidFill>
           <a:ln>
             <a:noFill/>
           </a:ln>
         </p:spPr>
         <p:txBody>
-          <a:bodyPr wrap="square" lIns="182880" tIns="45720" rIns="182880" bIns="45720" rtlCol="0" anchor="ctr">
+          <a:bodyPr wrap="square" lIns="91440" tIns="45720" rIns="91440" bIns="45720" rtlCol="0" anchor="ctr">
             <a:normAutofit/>
           </a:bodyPr>
           <a:lstStyle/>
           <a:p>
-            <a:pPr marL="0" indent="0" algn="l">
-              <a:buNone/>
-            </a:pPr>
-            <a:r>
-              <a:rPr lang="en-US" sz="1500" b="1" dirty="0">
+            <a:pPr marL="0" indent="0" algn="ctr">
+              <a:buNone/>
+            </a:pPr>
+            <a:r>
+              <a:rPr lang="en-US" sz="1900" b="1" dirty="0">
                 <a:solidFill>
                   <a:srgbClr val="FFFFFF"/>
                 </a:solidFill>
                 <a:latin typeface="Arial"/>
                 <a:cs typeface="Arial"/>
               </a:rPr>
-              <a:t>THẢO LUẬN   |   5 phút</a:t>
-            </a:r>
-          </a:p>
-        </p:txBody>
-      </p:sp>
-      <p:sp>
-        <p:nvSpPr>
-          <p:cNvPr id="51" name="Steps"/>
-          <p:cNvSpPr txBox="1"/>
-          <p:nvPr/>
-        </p:nvSpPr>
-        <p:spPr>
-          <a:xfrm>
-            <a:off x="457200" y="1720000"/>
-            <a:ext cx="6766560" cy="3510000"/>
+              <a:t>Bắt buộc</a:t>
+            </a:r>
+          </a:p>
+        </p:txBody>
+      </p:sp>
+      <p:sp>
+        <p:nvSpPr>
+          <p:cNvPr id="71" name="CardBody"/>
+          <p:cNvSpPr/>
+          <p:nvPr/>
+        </p:nvSpPr>
+        <p:spPr>
+          <a:xfrm>
+            <a:off x="457200" y="2756416"/>
+            <a:ext cx="3625866" cy="1874342"/>
           </a:xfrm>
           <a:prstGeom prst="rect">
             <a:avLst/>
-          </a:prstGeom>
-          <a:noFill/>
-          <a:ln>
-            <a:noFill/>
-          </a:ln>
-        </p:spPr>
-        <p:txBody>
-          <a:bodyPr wrap="square" lIns="91440" tIns="45720" rIns="91440" bIns="45720" rtlCol="0" anchor="t"/>
-          <a:lstStyle/>
-          <a:p>
-            <a:pPr marL="380000" indent="-380000" algn="l">
-              <a:lnSpc>
-                <a:spcPct val="104000"/>
-              </a:lnSpc>
-              <a:spcBef>
-                <a:spcPts val="450"/>
-              </a:spcBef>
-              <a:buClr>
-                <a:srgbClr val="1F5C7A"/>
-              </a:buClr>
-              <a:buFont typeface="Arial"/>
-              <a:buChar char="•"/>
-            </a:pPr>
-            <a:r>
-              <a:rPr lang="en-US" sz="1650" dirty="0">
-                <a:solidFill>
-                  <a:srgbClr val="000000"/>
-                </a:solidFill>
-                <a:latin typeface="Arial"/>
-                <a:cs typeface="Arial"/>
-              </a:rPr>
-              <a:t>Từ khóa và tóm tắt (hai trang trước)</a:t>
-            </a:r>
-          </a:p>
-          <a:p>
-            <a:pPr marL="380000" indent="-380000" algn="l">
-              <a:lnSpc>
-                <a:spcPct val="104000"/>
-              </a:lnSpc>
-              <a:spcBef>
-                <a:spcPts val="450"/>
-              </a:spcBef>
-              <a:buClr>
-                <a:srgbClr val="1F5C7A"/>
-              </a:buClr>
-              <a:buFont typeface="Arial"/>
-              <a:buChar char="•"/>
-            </a:pPr>
-            <a:r>
-              <a:rPr lang="en-US" sz="1650" dirty="0">
-                <a:solidFill>
-                  <a:srgbClr val="000000"/>
-                </a:solidFill>
-                <a:latin typeface="Arial"/>
-                <a:cs typeface="Arial"/>
-              </a:rPr>
-              <a:t>Câu hỏi cuối buổi trong khung chat: trong một câu, 'KTC 95% 1.48 đến 3.06' cho biết điều gì?</a:t>
-            </a:r>
-          </a:p>
-          <a:p>
-            <a:pPr marL="380000" indent="-380000" algn="l">
-              <a:lnSpc>
-                <a:spcPct val="104000"/>
-              </a:lnSpc>
-              <a:spcBef>
-                <a:spcPts val="450"/>
-              </a:spcBef>
-              <a:buClr>
-                <a:srgbClr val="1F5C7A"/>
-              </a:buClr>
-              <a:buFont typeface="Arial"/>
-              <a:buChar char="•"/>
-            </a:pPr>
-            <a:r>
-              <a:rPr lang="en-US" sz="1650" dirty="0">
-                <a:solidFill>
-                  <a:srgbClr val="000000"/>
-                </a:solidFill>
-                <a:latin typeface="Arial"/>
-                <a:cs typeface="Arial"/>
-              </a:rPr>
-              <a:t>Về nhà: hoàn thành Phần 3 đề cương của chính anh chị. Bắt đầu các slide đề cương (mọi người đều nộp)</a:t>
-            </a:r>
-          </a:p>
-          <a:p>
-            <a:pPr marL="380000" indent="-380000" algn="l">
-              <a:lnSpc>
-                <a:spcPct val="104000"/>
-              </a:lnSpc>
-              <a:spcBef>
-                <a:spcPts val="450"/>
-              </a:spcBef>
-              <a:buClr>
-                <a:srgbClr val="1F5C7A"/>
-              </a:buClr>
-              <a:buFont typeface="Arial"/>
-              <a:buChar char="•"/>
-            </a:pPr>
-            <a:r>
-              <a:rPr lang="en-US" sz="1650" dirty="0">
-                <a:solidFill>
-                  <a:srgbClr val="000000"/>
-                </a:solidFill>
-                <a:latin typeface="Arial"/>
-                <a:cs typeface="Arial"/>
-              </a:rPr>
-              <a:t>Đọc lại gói kết quả của câu hỏi anh chị đã chọn: đó sẽ là phần Phương pháp và Kết quả ở Buổi 7</a:t>
-            </a:r>
-          </a:p>
-        </p:txBody>
-      </p:sp>
-      <p:sp>
-        <p:nvSpPr>
-          <p:cNvPr id="52" name="Side"/>
-          <p:cNvSpPr/>
-          <p:nvPr/>
-        </p:nvSpPr>
-        <p:spPr>
-          <a:xfrm>
-            <a:off x="7423760" y="1720000"/>
-            <a:ext cx="4311040" cy="2006105"/>
-          </a:xfrm>
-          <a:prstGeom prst="roundRect">
-            <a:avLst>
-              <a:gd name="adj" fmla="val 5000"/>
-            </a:avLst>
           </a:prstGeom>
           <a:solidFill>
             <a:srgbClr val="EAF2F5"/>
@@ -31238,17 +29997,23 @@
           <a:lstStyle/>
           <a:p>
             <a:pPr marL="0" indent="0" algn="ctr">
-              <a:buNone/>
-            </a:pPr>
-            <a:r>
-              <a:rPr lang="en-US" sz="1600" b="1" dirty="0">
-                <a:solidFill>
-                  <a:srgbClr val="1F5C7A"/>
-                </a:solidFill>
-                <a:latin typeface="Arial"/>
-                <a:cs typeface="Arial"/>
-              </a:rPr>
-              <a:t>Tuần 7-8</a:t>
+              <a:lnSpc>
+                <a:spcPct val="104000"/>
+              </a:lnSpc>
+              <a:spcBef>
+                <a:spcPts val="400"/>
+              </a:spcBef>
+              <a:buNone/>
+            </a:pPr>
+            <a:r>
+              <a:rPr lang="en-US" sz="1750" dirty="0">
+                <a:solidFill>
+                  <a:srgbClr val="000000"/>
+                </a:solidFill>
+                <a:latin typeface="Arial"/>
+                <a:cs typeface="Arial"/>
+              </a:rPr>
+              <a:t>Phần Kết quả cho câu hỏi của anh chị</a:t>
             </a:r>
           </a:p>
           <a:p>
@@ -31257,19 +30022,19 @@
                 <a:spcPct val="104000"/>
               </a:lnSpc>
               <a:spcBef>
-                <a:spcPts val="300"/>
+                <a:spcPts val="400"/>
               </a:spcBef>
               <a:buNone/>
             </a:pPr>
             <a:r>
-              <a:rPr lang="en-US" sz="1500" dirty="0">
+              <a:rPr lang="en-US" sz="1750" dirty="0">
                 <a:solidFill>
                   <a:srgbClr val="000000"/>
                 </a:solidFill>
                 <a:latin typeface="Arial"/>
                 <a:cs typeface="Arial"/>
               </a:rPr>
-              <a:t>Đề cương, đạo đức, đăng ký</a:t>
+              <a:t>Tên bài dự kiến</a:t>
             </a:r>
           </a:p>
           <a:p>
@@ -31278,40 +30043,111 @@
                 <a:spcPct val="104000"/>
               </a:lnSpc>
               <a:spcBef>
-                <a:spcPts val="300"/>
+                <a:spcPts val="400"/>
               </a:spcBef>
               <a:buNone/>
             </a:pPr>
             <a:r>
-              <a:rPr lang="en-US" sz="1500" dirty="0">
+              <a:rPr lang="en-US" sz="1750" dirty="0">
                 <a:solidFill>
                   <a:srgbClr val="000000"/>
                 </a:solidFill>
                 <a:latin typeface="Arial"/>
                 <a:cs typeface="Arial"/>
               </a:rPr>
-              <a:t>Liêm chính nghiên cứu</a:t>
-            </a:r>
-          </a:p>
+              <a:t>Bảng 1 và một bảng hoặc hình chính</a:t>
+            </a:r>
+          </a:p>
+        </p:txBody>
+      </p:sp>
+      <p:sp>
+        <p:nvSpPr>
+          <p:cNvPr id="72" name="CardHead"/>
+          <p:cNvSpPr/>
+          <p:nvPr/>
+        </p:nvSpPr>
+        <p:spPr>
+          <a:xfrm>
+            <a:off x="4283066" y="2116416"/>
+            <a:ext cx="3625866" cy="640000"/>
+          </a:xfrm>
+          <a:prstGeom prst="rect">
+            <a:avLst/>
+          </a:prstGeom>
+          <a:solidFill>
+            <a:srgbClr val="0B376C"/>
+          </a:solidFill>
+          <a:ln>
+            <a:noFill/>
+          </a:ln>
+        </p:spPr>
+        <p:txBody>
+          <a:bodyPr wrap="square" lIns="91440" tIns="45720" rIns="91440" bIns="45720" rtlCol="0" anchor="ctr">
+            <a:normAutofit/>
+          </a:bodyPr>
+          <a:lstStyle/>
+          <a:p>
+            <a:pPr marL="0" indent="0" algn="ctr">
+              <a:buNone/>
+            </a:pPr>
+            <a:r>
+              <a:rPr lang="en-US" sz="1900" b="1" dirty="0">
+                <a:solidFill>
+                  <a:srgbClr val="FFFFFF"/>
+                </a:solidFill>
+                <a:latin typeface="Arial"/>
+                <a:cs typeface="Arial"/>
+              </a:rPr>
+              <a:t>Không bắt buộc</a:t>
+            </a:r>
+          </a:p>
+        </p:txBody>
+      </p:sp>
+      <p:sp>
+        <p:nvSpPr>
+          <p:cNvPr id="73" name="CardBody"/>
+          <p:cNvSpPr/>
+          <p:nvPr/>
+        </p:nvSpPr>
+        <p:spPr>
+          <a:xfrm>
+            <a:off x="4283066" y="2756416"/>
+            <a:ext cx="3625866" cy="1874342"/>
+          </a:xfrm>
+          <a:prstGeom prst="rect">
+            <a:avLst/>
+          </a:prstGeom>
+          <a:solidFill>
+            <a:srgbClr val="EAF2F5"/>
+          </a:solidFill>
+          <a:ln>
+            <a:noFill/>
+          </a:ln>
+        </p:spPr>
+        <p:txBody>
+          <a:bodyPr wrap="square" lIns="137160" tIns="91440" rIns="137160" bIns="91440" rtlCol="0" anchor="ctr">
+            <a:normAutofit/>
+          </a:bodyPr>
+          <a:lstStyle/>
           <a:p>
             <a:pPr marL="0" indent="0" algn="ctr">
               <a:lnSpc>
                 <a:spcPct val="104000"/>
               </a:lnSpc>
               <a:spcBef>
-                <a:spcPts val="300"/>
+                <a:spcPts val="400"/>
               </a:spcBef>
               <a:buNone/>
             </a:pPr>
             <a:r>
-              <a:rPr lang="en-US" sz="1500" dirty="0">
+              <a:rPr lang="en-US" sz="1750" dirty="0">
                 <a:solidFill>
                   <a:srgbClr val="000000"/>
                 </a:solidFill>
                 <a:latin typeface="Arial"/>
                 <a:cs typeface="Arial"/>
               </a:rPr>
-              <a:t>Viết Phương pháp và Kết quả</a:t>
+              <a:t>Phương pháp, Đặt vấn đề</a:t>
             </a:r>
           </a:p>
           <a:p>
@@ -31320,19 +30156,19 @@
                 <a:spcPct val="104000"/>
               </a:lnSpc>
               <a:spcBef>
-                <a:spcPts val="300"/>
+                <a:spcPts val="400"/>
               </a:spcBef>
               <a:buNone/>
             </a:pPr>
             <a:r>
-              <a:rPr lang="en-US" sz="1500" dirty="0">
+              <a:rPr lang="en-US" sz="1750" dirty="0">
                 <a:solidFill>
                   <a:srgbClr val="000000"/>
                 </a:solidFill>
                 <a:latin typeface="Arial"/>
                 <a:cs typeface="Arial"/>
               </a:rPr>
-              <a:t>Công bố bài báo</a:t>
+              <a:t>Bàn luận, Tóm tắt</a:t>
             </a:r>
           </a:p>
           <a:p>
@@ -31341,33 +30177,167 @@
                 <a:spcPct val="104000"/>
               </a:lnSpc>
               <a:spcBef>
-                <a:spcPts val="300"/>
+                <a:spcPts val="400"/>
               </a:spcBef>
               <a:buNone/>
             </a:pPr>
             <a:r>
-              <a:rPr lang="en-US" sz="1500" dirty="0">
+              <a:rPr lang="en-US" sz="1750" dirty="0">
                 <a:solidFill>
                   <a:srgbClr val="000000"/>
                 </a:solidFill>
                 <a:latin typeface="Arial"/>
                 <a:cs typeface="Arial"/>
               </a:rPr>
-              <a:t>Trình bày của người tình nguyện</a:t>
-            </a:r>
-          </a:p>
-        </p:txBody>
-      </p:sp>
-      <p:sp>
-        <p:nvSpPr>
-          <p:cNvPr id="53" name="Deliverable"/>
+              <a:t>Giảng viên cũng nhận xét các phần này</a:t>
+            </a:r>
+          </a:p>
+        </p:txBody>
+      </p:sp>
+      <p:sp>
+        <p:nvSpPr>
+          <p:cNvPr id="74" name="CardHead"/>
           <p:cNvSpPr/>
           <p:nvPr/>
         </p:nvSpPr>
         <p:spPr>
           <a:xfrm>
-            <a:off x="457200" y="5350000"/>
-            <a:ext cx="11277600" cy="600000"/>
+            <a:off x="8108932" y="2116416"/>
+            <a:ext cx="3625866" cy="640000"/>
+          </a:xfrm>
+          <a:prstGeom prst="rect">
+            <a:avLst/>
+          </a:prstGeom>
+          <a:solidFill>
+            <a:srgbClr val="5FA39B"/>
+          </a:solidFill>
+          <a:ln>
+            <a:noFill/>
+          </a:ln>
+        </p:spPr>
+        <p:txBody>
+          <a:bodyPr wrap="square" lIns="91440" tIns="45720" rIns="91440" bIns="45720" rtlCol="0" anchor="ctr">
+            <a:normAutofit/>
+          </a:bodyPr>
+          <a:lstStyle/>
+          <a:p>
+            <a:pPr marL="0" indent="0" algn="ctr">
+              <a:buNone/>
+            </a:pPr>
+            <a:r>
+              <a:rPr lang="en-US" sz="1900" b="1" dirty="0">
+                <a:solidFill>
+                  <a:srgbClr val="FFFFFF"/>
+                </a:solidFill>
+                <a:latin typeface="Arial"/>
+                <a:cs typeface="Arial"/>
+              </a:rPr>
+              <a:t>Khi nào</a:t>
+            </a:r>
+          </a:p>
+        </p:txBody>
+      </p:sp>
+      <p:sp>
+        <p:nvSpPr>
+          <p:cNvPr id="75" name="CardBody"/>
+          <p:cNvSpPr/>
+          <p:nvPr/>
+        </p:nvSpPr>
+        <p:spPr>
+          <a:xfrm>
+            <a:off x="8108932" y="2756416"/>
+            <a:ext cx="3625866" cy="1874342"/>
+          </a:xfrm>
+          <a:prstGeom prst="rect">
+            <a:avLst/>
+          </a:prstGeom>
+          <a:solidFill>
+            <a:srgbClr val="EAF2F5"/>
+          </a:solidFill>
+          <a:ln>
+            <a:noFill/>
+          </a:ln>
+        </p:spPr>
+        <p:txBody>
+          <a:bodyPr wrap="square" lIns="137160" tIns="91440" rIns="137160" bIns="91440" rtlCol="0" anchor="ctr">
+            <a:normAutofit/>
+          </a:bodyPr>
+          <a:lstStyle/>
+          <a:p>
+            <a:pPr marL="0" indent="0" algn="ctr">
+              <a:lnSpc>
+                <a:spcPct val="104000"/>
+              </a:lnSpc>
+              <a:spcBef>
+                <a:spcPts val="400"/>
+              </a:spcBef>
+              <a:buNone/>
+            </a:pPr>
+            <a:r>
+              <a:rPr lang="en-US" sz="1750" dirty="0">
+                <a:solidFill>
+                  <a:srgbClr val="000000"/>
+                </a:solidFill>
+                <a:latin typeface="Arial"/>
+                <a:cs typeface="Arial"/>
+              </a:rPr>
+              <a:t>Buổi 7: viết trực tiếp phần Kết quả của Q1</a:t>
+            </a:r>
+          </a:p>
+          <a:p>
+            <a:pPr marL="0" indent="0" algn="ctr">
+              <a:lnSpc>
+                <a:spcPct val="104000"/>
+              </a:lnSpc>
+              <a:spcBef>
+                <a:spcPts val="400"/>
+              </a:spcBef>
+              <a:buNone/>
+            </a:pPr>
+            <a:r>
+              <a:rPr lang="en-US" sz="1750" dirty="0">
+                <a:solidFill>
+                  <a:srgbClr val="000000"/>
+                </a:solidFill>
+                <a:latin typeface="Arial"/>
+                <a:cs typeface="Arial"/>
+              </a:rPr>
+              <a:t>Buổi 8: hoàn thiện bản nháp</a:t>
+            </a:r>
+          </a:p>
+          <a:p>
+            <a:pPr marL="0" indent="0" algn="ctr">
+              <a:lnSpc>
+                <a:spcPct val="104000"/>
+              </a:lnSpc>
+              <a:spcBef>
+                <a:spcPts val="400"/>
+              </a:spcBef>
+              <a:buNone/>
+            </a:pPr>
+            <a:r>
+              <a:rPr lang="en-US" sz="1750" dirty="0">
+                <a:solidFill>
+                  <a:srgbClr val="000000"/>
+                </a:solidFill>
+                <a:latin typeface="Arial"/>
+                <a:cs typeface="Arial"/>
+              </a:rPr>
+              <a:t>Hạn nộp 23:59 ngày học Buổi 8</a:t>
+            </a:r>
+          </a:p>
+        </p:txBody>
+      </p:sp>
+      <p:sp>
+        <p:nvSpPr>
+          <p:cNvPr id="60" name="Takeaway"/>
+          <p:cNvSpPr/>
+          <p:nvPr/>
+        </p:nvSpPr>
+        <p:spPr>
+          <a:xfrm>
+            <a:off x="457200" y="5390000"/>
+            <a:ext cx="11277600" cy="560000"/>
           </a:xfrm>
           <a:prstGeom prst="roundRect">
             <a:avLst>
@@ -31375,12 +30345,10 @@
             </a:avLst>
           </a:prstGeom>
           <a:solidFill>
-            <a:srgbClr val="FFFFFF"/>
+            <a:srgbClr val="0D7377"/>
           </a:solidFill>
-          <a:ln w="15875">
-            <a:solidFill>
-              <a:srgbClr val="1F5C7A"/>
-            </a:solidFill>
+          <a:ln>
+            <a:noFill/>
           </a:ln>
         </p:spPr>
         <p:txBody>
@@ -31395,22 +30363,22 @@
             <a:r>
               <a:rPr lang="en-US" sz="1300" b="1" dirty="0">
                 <a:solidFill>
-                  <a:srgbClr val="1F5C7A"/>
-                </a:solidFill>
-                <a:latin typeface="Arial"/>
-                <a:cs typeface="Arial"/>
-              </a:rPr>
-              <a:t>SẢN PHẨM   </a:t>
-            </a:r>
-            <a:r>
-              <a:rPr lang="en-US" sz="1500" dirty="0">
-                <a:solidFill>
-                  <a:srgbClr val="000000"/>
-                </a:solidFill>
-                <a:latin typeface="Arial"/>
-                <a:cs typeface="Arial"/>
-              </a:rPr>
-              <a:t>Câu trả lời trong khung chat. Phần 3 hoàn chỉnh</a:t>
+                  <a:srgbClr val="FFFFFF"/>
+                </a:solidFill>
+                <a:latin typeface="Arial"/>
+                <a:cs typeface="Arial"/>
+              </a:rPr>
+              <a:t>THÔNG ĐIỆP CHÍNH   </a:t>
+            </a:r>
+            <a:r>
+              <a:rPr lang="en-US" sz="1550" dirty="0">
+                <a:solidFill>
+                  <a:srgbClr val="FFFFFF"/>
+                </a:solidFill>
+                <a:latin typeface="Arial"/>
+                <a:cs typeface="Arial"/>
+              </a:rPr>
+              <a:t>Báo câu hỏi của anh chị cho trưởng khóa học ngay tối nay, trong khung chat hoặc qua email.</a:t>
             </a:r>
           </a:p>
         </p:txBody>
@@ -31578,7 +30546,7 @@
                 <a:latin typeface="Arial"/>
                 <a:cs typeface="Arial"/>
               </a:rPr>
-              <a:t>Trang bổ sung: Buổi 6</a:t>
+              <a:t>Tổng kết và bài tập về nhà</a:t>
             </a:r>
           </a:p>
         </p:txBody>
@@ -31613,14 +30581,57 @@
       </p:sp>
       <p:sp>
         <p:nvSpPr>
-          <p:cNvPr id="20" name="Statement"/>
+          <p:cNvPr id="50" name="Banner"/>
+          <p:cNvSpPr/>
+          <p:nvPr/>
+        </p:nvSpPr>
+        <p:spPr>
+          <a:xfrm>
+            <a:off x="457200" y="1120000"/>
+            <a:ext cx="11277600" cy="470000"/>
+          </a:xfrm>
+          <a:prstGeom prst="rect">
+            <a:avLst/>
+          </a:prstGeom>
+          <a:solidFill>
+            <a:srgbClr val="1F5C7A"/>
+          </a:solidFill>
+          <a:ln>
+            <a:noFill/>
+          </a:ln>
+        </p:spPr>
+        <p:txBody>
+          <a:bodyPr wrap="square" lIns="182880" tIns="45720" rIns="182880" bIns="45720" rtlCol="0" anchor="ctr">
+            <a:normAutofit/>
+          </a:bodyPr>
+          <a:lstStyle/>
+          <a:p>
+            <a:pPr marL="0" indent="0" algn="l">
+              <a:buNone/>
+            </a:pPr>
+            <a:r>
+              <a:rPr lang="en-US" sz="1500" b="1" dirty="0">
+                <a:solidFill>
+                  <a:srgbClr val="FFFFFF"/>
+                </a:solidFill>
+                <a:latin typeface="Arial"/>
+                <a:cs typeface="Arial"/>
+              </a:rPr>
+              <a:t>THẢO LUẬN   |   5 phút</a:t>
+            </a:r>
+          </a:p>
+        </p:txBody>
+      </p:sp>
+      <p:sp>
+        <p:nvSpPr>
+          <p:cNvPr id="51" name="Steps"/>
           <p:cNvSpPr txBox="1"/>
           <p:nvPr/>
         </p:nvSpPr>
         <p:spPr>
           <a:xfrm>
-            <a:off x="1057200" y="1280000"/>
-            <a:ext cx="10077600" cy="4470000"/>
+            <a:off x="457200" y="1720000"/>
+            <a:ext cx="6766560" cy="3510000"/>
           </a:xfrm>
           <a:prstGeom prst="rect">
             <a:avLst/>
@@ -31631,42 +30642,313 @@
           </a:ln>
         </p:spPr>
         <p:txBody>
-          <a:bodyPr wrap="square" lIns="91440" tIns="45720" rIns="91440" bIns="45720" rtlCol="0" anchor="ctr"/>
-          <a:lstStyle/>
+          <a:bodyPr wrap="square" lIns="91440" tIns="45720" rIns="91440" bIns="45720" rtlCol="0" anchor="t"/>
+          <a:lstStyle/>
+          <a:p>
+            <a:pPr marL="380000" indent="-380000" algn="l">
+              <a:lnSpc>
+                <a:spcPct val="104000"/>
+              </a:lnSpc>
+              <a:spcBef>
+                <a:spcPts val="450"/>
+              </a:spcBef>
+              <a:buClr>
+                <a:srgbClr val="1F5C7A"/>
+              </a:buClr>
+              <a:buFont typeface="Arial"/>
+              <a:buChar char="•"/>
+            </a:pPr>
+            <a:r>
+              <a:rPr lang="en-US" sz="1650" dirty="0">
+                <a:solidFill>
+                  <a:srgbClr val="000000"/>
+                </a:solidFill>
+                <a:latin typeface="Arial"/>
+                <a:cs typeface="Arial"/>
+              </a:rPr>
+              <a:t>Từ khóa, tóm tắt và phần Kết quả của anh chị (các trang trước)</a:t>
+            </a:r>
+          </a:p>
+          <a:p>
+            <a:pPr marL="380000" indent="-380000" algn="l">
+              <a:lnSpc>
+                <a:spcPct val="104000"/>
+              </a:lnSpc>
+              <a:spcBef>
+                <a:spcPts val="450"/>
+              </a:spcBef>
+              <a:buClr>
+                <a:srgbClr val="1F5C7A"/>
+              </a:buClr>
+              <a:buFont typeface="Arial"/>
+              <a:buChar char="•"/>
+            </a:pPr>
+            <a:r>
+              <a:rPr lang="en-US" sz="1650" dirty="0">
+                <a:solidFill>
+                  <a:srgbClr val="000000"/>
+                </a:solidFill>
+                <a:latin typeface="Arial"/>
+                <a:cs typeface="Arial"/>
+              </a:rPr>
+              <a:t>Câu hỏi cuối buổi trong khung chat: trong một câu, 'KTC 95% 1.48 đến 3.06' cho biết điều gì?</a:t>
+            </a:r>
+          </a:p>
+          <a:p>
+            <a:pPr marL="380000" indent="-380000" algn="l">
+              <a:lnSpc>
+                <a:spcPct val="104000"/>
+              </a:lnSpc>
+              <a:spcBef>
+                <a:spcPts val="450"/>
+              </a:spcBef>
+              <a:buClr>
+                <a:srgbClr val="1F5C7A"/>
+              </a:buClr>
+              <a:buFont typeface="Arial"/>
+              <a:buChar char="•"/>
+            </a:pPr>
+            <a:r>
+              <a:rPr lang="en-US" sz="1650" dirty="0">
+                <a:solidFill>
+                  <a:srgbClr val="000000"/>
+                </a:solidFill>
+                <a:latin typeface="Arial"/>
+                <a:cs typeface="Arial"/>
+              </a:rPr>
+              <a:t>Về nhà: hoàn thành Phần 3 đề cương của chính anh chị. Bắt đầu các slide đề cương (mọi người đều nộp)</a:t>
+            </a:r>
+          </a:p>
+          <a:p>
+            <a:pPr marL="380000" indent="-380000" algn="l">
+              <a:lnSpc>
+                <a:spcPct val="104000"/>
+              </a:lnSpc>
+              <a:spcBef>
+                <a:spcPts val="450"/>
+              </a:spcBef>
+              <a:buClr>
+                <a:srgbClr val="1F5C7A"/>
+              </a:buClr>
+              <a:buFont typeface="Arial"/>
+              <a:buChar char="•"/>
+            </a:pPr>
+            <a:r>
+              <a:rPr lang="en-US" sz="1650" dirty="0">
+                <a:solidFill>
+                  <a:srgbClr val="000000"/>
+                </a:solidFill>
+                <a:latin typeface="Arial"/>
+                <a:cs typeface="Arial"/>
+              </a:rPr>
+              <a:t>Chọn câu hỏi FLUID-ICU ngay tối nay và đọc gói kết quả của câu đó</a:t>
+            </a:r>
+          </a:p>
+        </p:txBody>
+      </p:sp>
+      <p:sp>
+        <p:nvSpPr>
+          <p:cNvPr id="52" name="Side"/>
+          <p:cNvSpPr/>
+          <p:nvPr/>
+        </p:nvSpPr>
+        <p:spPr>
+          <a:xfrm>
+            <a:off x="7423760" y="1720000"/>
+            <a:ext cx="4311040" cy="2006105"/>
+          </a:xfrm>
+          <a:prstGeom prst="roundRect">
+            <a:avLst>
+              <a:gd name="adj" fmla="val 5000"/>
+            </a:avLst>
+          </a:prstGeom>
+          <a:solidFill>
+            <a:srgbClr val="EAF2F5"/>
+          </a:solidFill>
+          <a:ln>
+            <a:noFill/>
+          </a:ln>
+        </p:spPr>
+        <p:txBody>
+          <a:bodyPr wrap="square" lIns="137160" tIns="91440" rIns="137160" bIns="91440" rtlCol="0" anchor="ctr">
+            <a:normAutofit/>
+          </a:bodyPr>
+          <a:lstStyle/>
+          <a:p>
+            <a:pPr marL="0" indent="0" algn="ctr">
+              <a:buNone/>
+            </a:pPr>
+            <a:r>
+              <a:rPr lang="en-US" sz="1600" b="1" dirty="0">
+                <a:solidFill>
+                  <a:srgbClr val="1F5C7A"/>
+                </a:solidFill>
+                <a:latin typeface="Arial"/>
+                <a:cs typeface="Arial"/>
+              </a:rPr>
+              <a:t>Tuần 7-8</a:t>
+            </a:r>
+          </a:p>
           <a:p>
             <a:pPr marL="0" indent="0" algn="ctr">
               <a:lnSpc>
-                <a:spcPct val="110000"/>
+                <a:spcPct val="104000"/>
               </a:lnSpc>
-              <a:buNone/>
-            </a:pPr>
-            <a:r>
-              <a:rPr lang="en-US" sz="3200" b="1" dirty="0">
-                <a:solidFill>
-                  <a:srgbClr val="0D7377"/>
-                </a:solidFill>
-                <a:latin typeface="Arial"/>
-                <a:cs typeface="Arial"/>
-              </a:rPr>
-              <a:t>Trang bổ sung: dùng nếu còn thời gian, hoặc để tự học.</a:t>
+              <a:spcBef>
+                <a:spcPts val="300"/>
+              </a:spcBef>
+              <a:buNone/>
+            </a:pPr>
+            <a:r>
+              <a:rPr lang="en-US" sz="1500" dirty="0">
+                <a:solidFill>
+                  <a:srgbClr val="000000"/>
+                </a:solidFill>
+                <a:latin typeface="Arial"/>
+                <a:cs typeface="Arial"/>
+              </a:rPr>
+              <a:t>Đề cương, đạo đức, đăng ký</a:t>
             </a:r>
           </a:p>
           <a:p>
             <a:pPr marL="0" indent="0" algn="ctr">
+              <a:lnSpc>
+                <a:spcPct val="104000"/>
+              </a:lnSpc>
               <a:spcBef>
-                <a:spcPts val="1200"/>
+                <a:spcPts val="300"/>
               </a:spcBef>
               <a:buNone/>
             </a:pPr>
             <a:r>
-              <a:rPr lang="en-US" sz="1900" i="1" dirty="0">
-                <a:solidFill>
-                  <a:srgbClr val="595959"/>
-                </a:solidFill>
-                <a:latin typeface="Arial"/>
-                <a:cs typeface="Arial"/>
-              </a:rPr>
-              <a:t>Tương tác, giá trị không tác động, dự báo và học máy, chi tiết về dữ liệu bị thiếu</a:t>
+              <a:rPr lang="en-US" sz="1500" dirty="0">
+                <a:solidFill>
+                  <a:srgbClr val="000000"/>
+                </a:solidFill>
+                <a:latin typeface="Arial"/>
+                <a:cs typeface="Arial"/>
+              </a:rPr>
+              <a:t>Liêm chính nghiên cứu</a:t>
+            </a:r>
+          </a:p>
+          <a:p>
+            <a:pPr marL="0" indent="0" algn="ctr">
+              <a:lnSpc>
+                <a:spcPct val="104000"/>
+              </a:lnSpc>
+              <a:spcBef>
+                <a:spcPts val="300"/>
+              </a:spcBef>
+              <a:buNone/>
+            </a:pPr>
+            <a:r>
+              <a:rPr lang="en-US" sz="1500" dirty="0">
+                <a:solidFill>
+                  <a:srgbClr val="000000"/>
+                </a:solidFill>
+                <a:latin typeface="Arial"/>
+                <a:cs typeface="Arial"/>
+              </a:rPr>
+              <a:t>Viết phần Kết quả</a:t>
+            </a:r>
+          </a:p>
+          <a:p>
+            <a:pPr marL="0" indent="0" algn="ctr">
+              <a:lnSpc>
+                <a:spcPct val="104000"/>
+              </a:lnSpc>
+              <a:spcBef>
+                <a:spcPts val="300"/>
+              </a:spcBef>
+              <a:buNone/>
+            </a:pPr>
+            <a:r>
+              <a:rPr lang="en-US" sz="1500" dirty="0">
+                <a:solidFill>
+                  <a:srgbClr val="000000"/>
+                </a:solidFill>
+                <a:latin typeface="Arial"/>
+                <a:cs typeface="Arial"/>
+              </a:rPr>
+              <a:t>Công bố bài báo</a:t>
+            </a:r>
+          </a:p>
+          <a:p>
+            <a:pPr marL="0" indent="0" algn="ctr">
+              <a:lnSpc>
+                <a:spcPct val="104000"/>
+              </a:lnSpc>
+              <a:spcBef>
+                <a:spcPts val="300"/>
+              </a:spcBef>
+              <a:buNone/>
+            </a:pPr>
+            <a:r>
+              <a:rPr lang="en-US" sz="1500" dirty="0">
+                <a:solidFill>
+                  <a:srgbClr val="000000"/>
+                </a:solidFill>
+                <a:latin typeface="Arial"/>
+                <a:cs typeface="Arial"/>
+              </a:rPr>
+              <a:t>Trình bày của người tình nguyện</a:t>
+            </a:r>
+          </a:p>
+        </p:txBody>
+      </p:sp>
+      <p:sp>
+        <p:nvSpPr>
+          <p:cNvPr id="53" name="Deliverable"/>
+          <p:cNvSpPr/>
+          <p:nvPr/>
+        </p:nvSpPr>
+        <p:spPr>
+          <a:xfrm>
+            <a:off x="457200" y="5350000"/>
+            <a:ext cx="11277600" cy="600000"/>
+          </a:xfrm>
+          <a:prstGeom prst="roundRect">
+            <a:avLst>
+              <a:gd name="adj" fmla="val 12000"/>
+            </a:avLst>
+          </a:prstGeom>
+          <a:solidFill>
+            <a:srgbClr val="FFFFFF"/>
+          </a:solidFill>
+          <a:ln w="15875">
+            <a:solidFill>
+              <a:srgbClr val="1F5C7A"/>
+            </a:solidFill>
+          </a:ln>
+        </p:spPr>
+        <p:txBody>
+          <a:bodyPr wrap="square" lIns="182880" tIns="45720" rIns="182880" bIns="45720" rtlCol="0" anchor="ctr">
+            <a:normAutofit/>
+          </a:bodyPr>
+          <a:lstStyle/>
+          <a:p>
+            <a:pPr marL="0" indent="0" algn="ctr">
+              <a:buNone/>
+            </a:pPr>
+            <a:r>
+              <a:rPr lang="en-US" sz="1300" b="1" dirty="0">
+                <a:solidFill>
+                  <a:srgbClr val="1F5C7A"/>
+                </a:solidFill>
+                <a:latin typeface="Arial"/>
+                <a:cs typeface="Arial"/>
+              </a:rPr>
+              <a:t>SẢN PHẨM   </a:t>
+            </a:r>
+            <a:r>
+              <a:rPr lang="en-US" sz="1500" dirty="0">
+                <a:solidFill>
+                  <a:srgbClr val="000000"/>
+                </a:solidFill>
+                <a:latin typeface="Arial"/>
+                <a:cs typeface="Arial"/>
+              </a:rPr>
+              <a:t>Câu trả lời trong khung chat. Phần 3 hoàn chỉnh</a:t>
             </a:r>
           </a:p>
         </p:txBody>
@@ -32109,7 +31391,7 @@
                 <a:latin typeface="Arial"/>
                 <a:cs typeface="Arial"/>
               </a:rPr>
-              <a:t>Bổ sung: tương tác định trước với suy tim (Q1)</a:t>
+              <a:t>Trang bổ sung: Buổi 6</a:t>
             </a:r>
           </a:p>
         </p:txBody>
@@ -32142,81 +31424,62 @@
           </a:p>
         </p:txBody>
       </p:sp>
-      <p:pic>
-        <p:nvPicPr>
-          <p:cNvPr id="25" name="Figure"/>
-          <p:cNvPicPr>
-            <a:picLocks noChangeAspect="1"/>
-          </p:cNvPicPr>
-          <p:nvPr/>
-        </p:nvPicPr>
-        <p:blipFill>
-          <a:blip r:embed="rId4"/>
-          <a:stretch>
-            <a:fillRect/>
-          </a:stretch>
-        </p:blipFill>
-        <p:spPr>
-          <a:xfrm>
-            <a:off x="908500" y="1150000"/>
-            <a:ext cx="10375000" cy="4150000"/>
+      <p:sp>
+        <p:nvSpPr>
+          <p:cNvPr id="20" name="Statement"/>
+          <p:cNvSpPr txBox="1"/>
+          <p:nvPr/>
+        </p:nvSpPr>
+        <p:spPr>
+          <a:xfrm>
+            <a:off x="1057200" y="1280000"/>
+            <a:ext cx="10077600" cy="4470000"/>
           </a:xfrm>
           <a:prstGeom prst="rect">
             <a:avLst/>
           </a:prstGeom>
-        </p:spPr>
-      </p:pic>
-      <p:sp>
-        <p:nvSpPr>
-          <p:cNvPr id="60" name="Takeaway"/>
-          <p:cNvSpPr/>
-          <p:nvPr/>
-        </p:nvSpPr>
-        <p:spPr>
-          <a:xfrm>
-            <a:off x="457200" y="5390000"/>
-            <a:ext cx="11277600" cy="560000"/>
-          </a:xfrm>
-          <a:prstGeom prst="roundRect">
-            <a:avLst>
-              <a:gd name="adj" fmla="val 12000"/>
-            </a:avLst>
-          </a:prstGeom>
-          <a:solidFill>
-            <a:srgbClr val="0D7377"/>
-          </a:solidFill>
+          <a:noFill/>
           <a:ln>
             <a:noFill/>
           </a:ln>
         </p:spPr>
         <p:txBody>
-          <a:bodyPr wrap="square" lIns="182880" tIns="45720" rIns="182880" bIns="45720" rtlCol="0" anchor="ctr">
-            <a:normAutofit/>
-          </a:bodyPr>
+          <a:bodyPr wrap="square" lIns="91440" tIns="45720" rIns="91440" bIns="45720" rtlCol="0" anchor="ctr"/>
           <a:lstStyle/>
           <a:p>
             <a:pPr marL="0" indent="0" algn="ctr">
-              <a:buNone/>
-            </a:pPr>
-            <a:r>
-              <a:rPr lang="en-US" sz="1300" b="1" dirty="0">
-                <a:solidFill>
-                  <a:srgbClr val="FFFFFF"/>
-                </a:solidFill>
-                <a:latin typeface="Arial"/>
-                <a:cs typeface="Arial"/>
-              </a:rPr>
-              <a:t>THÔNG ĐIỆP CHÍNH   </a:t>
-            </a:r>
-            <a:r>
-              <a:rPr lang="en-US" sz="1550" dirty="0">
-                <a:solidFill>
-                  <a:srgbClr val="FFFFFF"/>
-                </a:solidFill>
-                <a:latin typeface="Arial"/>
-                <a:cs typeface="Arial"/>
-              </a:rPr>
-              <a:t>Liên quan mạnh hơn ở suy tim (p tương tác 0.031): cần được xác nhận.</a:t>
+              <a:lnSpc>
+                <a:spcPct val="110000"/>
+              </a:lnSpc>
+              <a:buNone/>
+            </a:pPr>
+            <a:r>
+              <a:rPr lang="en-US" sz="3200" b="1" dirty="0">
+                <a:solidFill>
+                  <a:srgbClr val="0D7377"/>
+                </a:solidFill>
+                <a:latin typeface="Arial"/>
+                <a:cs typeface="Arial"/>
+              </a:rPr>
+              <a:t>Trang bổ sung: dùng nếu còn thời gian, hoặc để tự học.</a:t>
+            </a:r>
+          </a:p>
+          <a:p>
+            <a:pPr marL="0" indent="0" algn="ctr">
+              <a:spcBef>
+                <a:spcPts val="1200"/>
+              </a:spcBef>
+              <a:buNone/>
+            </a:pPr>
+            <a:r>
+              <a:rPr lang="en-US" sz="1900" i="1" dirty="0">
+                <a:solidFill>
+                  <a:srgbClr val="595959"/>
+                </a:solidFill>
+                <a:latin typeface="Arial"/>
+                <a:cs typeface="Arial"/>
+              </a:rPr>
+              <a:t>Tương tác, giá trị không tác động, dự báo và học máy, chi tiết về dữ liệu bị thiếu</a:t>
             </a:r>
           </a:p>
         </p:txBody>
@@ -32384,7 +31647,7 @@
                 <a:latin typeface="Arial"/>
                 <a:cs typeface="Arial"/>
               </a:rPr>
-              <a:t>Bổ sung: AKI tăng theo cân bằng dịch (Q2)</a:t>
+              <a:t>Bổ sung: tương tác định trước với suy tim (Q1)</a:t>
             </a:r>
           </a:p>
         </p:txBody>
@@ -32433,8 +31696,8 @@
         </p:blipFill>
         <p:spPr>
           <a:xfrm>
-            <a:off x="1530999" y="1150000"/>
-            <a:ext cx="9130001" cy="4150000"/>
+            <a:off x="908500" y="1150000"/>
+            <a:ext cx="10375000" cy="4150000"/>
           </a:xfrm>
           <a:prstGeom prst="rect">
             <a:avLst/>
@@ -32491,7 +31754,7 @@
                 <a:latin typeface="Arial"/>
                 <a:cs typeface="Arial"/>
               </a:rPr>
-              <a:t>Một gradient liều-đáp ứng: AKI 29%, 54%, 63%, 75% qua các nhóm cân bằng.</a:t>
+              <a:t>Liên quan mạnh hơn ở suy tim (p tương tác 0.031): cần được xác nhận.</a:t>
             </a:r>
           </a:p>
         </p:txBody>
@@ -32659,7 +31922,7 @@
                 <a:latin typeface="Arial"/>
                 <a:cs typeface="Arial"/>
               </a:rPr>
-              <a:t>Bổ sung: số ngày không thở máy, một kết cục khó (Q3)</a:t>
+              <a:t>Bổ sung: AKI tăng theo cân bằng dịch (Q2)</a:t>
             </a:r>
           </a:p>
         </p:txBody>
@@ -32766,7 +32029,7 @@
                 <a:latin typeface="Arial"/>
                 <a:cs typeface="Arial"/>
               </a:rPr>
-              <a:t>Dồn ở 0 và 28: báo cáo trung vị và dùng kiểm định phi tham số.</a:t>
+              <a:t>Một gradient liều-đáp ứng: AKI 29%, 54%, 63%, 75% qua các nhóm cân bằng.</a:t>
             </a:r>
           </a:p>
         </p:txBody>
@@ -32934,7 +32197,7 @@
                 <a:latin typeface="Arial"/>
                 <a:cs typeface="Arial"/>
               </a:rPr>
-              <a:t>Bổ sung: Mẫu và quần thể</a:t>
+              <a:t>Bổ sung: số ngày không thở máy, một kết cục khó (Q3)</a:t>
             </a:r>
           </a:p>
         </p:txBody>
@@ -32983,8 +32246,8 @@
         </p:blipFill>
         <p:spPr>
           <a:xfrm>
-            <a:off x="908500" y="1150000"/>
-            <a:ext cx="10375000" cy="4150000"/>
+            <a:off x="1530999" y="1150000"/>
+            <a:ext cx="9130001" cy="4150000"/>
           </a:xfrm>
           <a:prstGeom prst="rect">
             <a:avLst/>
@@ -33041,7 +32304,7 @@
                 <a:latin typeface="Arial"/>
                 <a:cs typeface="Arial"/>
               </a:rPr>
-              <a:t>Mẫu cho một ước lượng. KTC cho biết ước lượng đó chính xác đến đâu.</a:t>
+              <a:t>Dồn ở 0 và 28: báo cáo trung vị và dùng kiểm định phi tham số.</a:t>
             </a:r>
           </a:p>
         </p:txBody>
@@ -33209,7 +32472,7 @@
                 <a:latin typeface="Arial"/>
                 <a:cs typeface="Arial"/>
               </a:rPr>
-              <a:t>Bổ sung: Đọc KTC 95% trong một bài báo thật</a:t>
+              <a:t>Bổ sung: Mẫu và quần thể</a:t>
             </a:r>
           </a:p>
         </p:txBody>
@@ -33242,58 +32505,45 @@
           </a:p>
         </p:txBody>
       </p:sp>
-      <p:sp>
-        <p:nvSpPr>
-          <p:cNvPr id="19" name="Intro"/>
-          <p:cNvSpPr txBox="1"/>
-          <p:nvPr/>
-        </p:nvSpPr>
-        <p:spPr>
-          <a:xfrm>
-            <a:off x="457200" y="1100000"/>
-            <a:ext cx="11277600" cy="626796"/>
+      <p:pic>
+        <p:nvPicPr>
+          <p:cNvPr id="25" name="Figure"/>
+          <p:cNvPicPr>
+            <a:picLocks noChangeAspect="1"/>
+          </p:cNvPicPr>
+          <p:nvPr/>
+        </p:nvPicPr>
+        <p:blipFill>
+          <a:blip r:embed="rId4"/>
+          <a:stretch>
+            <a:fillRect/>
+          </a:stretch>
+        </p:blipFill>
+        <p:spPr>
+          <a:xfrm>
+            <a:off x="908500" y="1150000"/>
+            <a:ext cx="10375000" cy="4150000"/>
           </a:xfrm>
           <a:prstGeom prst="rect">
             <a:avLst/>
           </a:prstGeom>
-          <a:noFill/>
-          <a:ln>
-            <a:noFill/>
-          </a:ln>
-        </p:spPr>
-        <p:txBody>
-          <a:bodyPr wrap="square" lIns="91440" tIns="45720" rIns="91440" bIns="45720" rtlCol="0" anchor="t"/>
-          <a:lstStyle/>
-          <a:p>
-            <a:pPr marL="0" indent="0" algn="l">
-              <a:buNone/>
-            </a:pPr>
-            <a:r>
-              <a:rPr lang="en-US" sz="1700" i="1" dirty="0">
-                <a:solidFill>
-                  <a:srgbClr val="595959"/>
-                </a:solidFill>
-                <a:latin typeface="Arial"/>
-                <a:cs typeface="Arial"/>
-              </a:rPr>
-              <a:t>Bài báo 1 (Boulet 2024, RCT thí điểm, Course/Papers), kết cục chính: cân bằng dịch tích lũy ngày 5.</a:t>
-            </a:r>
-          </a:p>
-        </p:txBody>
-      </p:sp>
-      <p:sp>
-        <p:nvSpPr>
-          <p:cNvPr id="70" name="CardHead"/>
+        </p:spPr>
+      </p:pic>
+      <p:sp>
+        <p:nvSpPr>
+          <p:cNvPr id="60" name="Takeaway"/>
           <p:cNvSpPr/>
           <p:nvPr/>
         </p:nvSpPr>
         <p:spPr>
           <a:xfrm>
-            <a:off x="457200" y="2006879"/>
-            <a:ext cx="3625866" cy="640000"/>
-          </a:xfrm>
-          <a:prstGeom prst="rect">
-            <a:avLst/>
+            <a:off x="457200" y="5390000"/>
+            <a:ext cx="11277600" cy="560000"/>
+          </a:xfrm>
+          <a:prstGeom prst="roundRect">
+            <a:avLst>
+              <a:gd name="adj" fmla="val 12000"/>
+            </a:avLst>
           </a:prstGeom>
           <a:solidFill>
             <a:srgbClr val="0D7377"/>
@@ -33303,410 +32553,6 @@
           </a:ln>
         </p:spPr>
         <p:txBody>
-          <a:bodyPr wrap="square" lIns="91440" tIns="45720" rIns="91440" bIns="45720" rtlCol="0" anchor="ctr">
-            <a:normAutofit/>
-          </a:bodyPr>
-          <a:lstStyle/>
-          <a:p>
-            <a:pPr marL="0" indent="0" algn="ctr">
-              <a:buNone/>
-            </a:pPr>
-            <a:r>
-              <a:rPr lang="en-US" sz="1900" b="1" dirty="0">
-                <a:solidFill>
-                  <a:srgbClr val="FFFFFF"/>
-                </a:solidFill>
-                <a:latin typeface="Arial"/>
-                <a:cs typeface="Arial"/>
-              </a:rPr>
-              <a:t>Kết quả</a:t>
-            </a:r>
-          </a:p>
-        </p:txBody>
-      </p:sp>
-      <p:sp>
-        <p:nvSpPr>
-          <p:cNvPr id="71" name="CardBody"/>
-          <p:cNvSpPr/>
-          <p:nvPr/>
-        </p:nvSpPr>
-        <p:spPr>
-          <a:xfrm>
-            <a:off x="457200" y="2646879"/>
-            <a:ext cx="3625866" cy="2202954"/>
-          </a:xfrm>
-          <a:prstGeom prst="rect">
-            <a:avLst/>
-          </a:prstGeom>
-          <a:solidFill>
-            <a:srgbClr val="EAF2F5"/>
-          </a:solidFill>
-          <a:ln>
-            <a:noFill/>
-          </a:ln>
-        </p:spPr>
-        <p:txBody>
-          <a:bodyPr wrap="square" lIns="137160" tIns="91440" rIns="137160" bIns="91440" rtlCol="0" anchor="ctr">
-            <a:normAutofit/>
-          </a:bodyPr>
-          <a:lstStyle/>
-          <a:p>
-            <a:pPr marL="0" indent="0" algn="ctr">
-              <a:lnSpc>
-                <a:spcPct val="104000"/>
-              </a:lnSpc>
-              <a:spcBef>
-                <a:spcPts val="400"/>
-              </a:spcBef>
-              <a:buNone/>
-            </a:pPr>
-            <a:r>
-              <a:rPr lang="en-US" sz="1750" dirty="0">
-                <a:solidFill>
-                  <a:srgbClr val="000000"/>
-                </a:solidFill>
-                <a:latin typeface="Arial"/>
-                <a:cs typeface="Arial"/>
-              </a:rPr>
-              <a:t>Trung vị 6.9 so với 35.0 ml/kg</a:t>
-            </a:r>
-          </a:p>
-          <a:p>
-            <a:pPr marL="0" indent="0" algn="ctr">
-              <a:lnSpc>
-                <a:spcPct val="104000"/>
-              </a:lnSpc>
-              <a:spcBef>
-                <a:spcPts val="400"/>
-              </a:spcBef>
-              <a:buNone/>
-            </a:pPr>
-            <a:r>
-              <a:rPr lang="en-US" sz="1750" dirty="0">
-                <a:solidFill>
-                  <a:srgbClr val="000000"/>
-                </a:solidFill>
-                <a:latin typeface="Arial"/>
-                <a:cs typeface="Arial"/>
-              </a:rPr>
-              <a:t>Chênh lệch trung bình 13.2 ml/kg</a:t>
-            </a:r>
-          </a:p>
-          <a:p>
-            <a:pPr marL="0" indent="0" algn="ctr">
-              <a:lnSpc>
-                <a:spcPct val="104000"/>
-              </a:lnSpc>
-              <a:spcBef>
-                <a:spcPts val="400"/>
-              </a:spcBef>
-              <a:buNone/>
-            </a:pPr>
-            <a:r>
-              <a:rPr lang="en-US" sz="1750" dirty="0">
-                <a:solidFill>
-                  <a:srgbClr val="000000"/>
-                </a:solidFill>
-                <a:latin typeface="Arial"/>
-                <a:cs typeface="Arial"/>
-              </a:rPr>
-              <a:t>KTC 95% -15.2 đến 41.6</a:t>
-            </a:r>
-          </a:p>
-          <a:p>
-            <a:pPr marL="0" indent="0" algn="ctr">
-              <a:lnSpc>
-                <a:spcPct val="104000"/>
-              </a:lnSpc>
-              <a:spcBef>
-                <a:spcPts val="400"/>
-              </a:spcBef>
-              <a:buNone/>
-            </a:pPr>
-            <a:r>
-              <a:rPr lang="en-US" sz="1750" dirty="0">
-                <a:solidFill>
-                  <a:srgbClr val="000000"/>
-                </a:solidFill>
-                <a:latin typeface="Arial"/>
-                <a:cs typeface="Arial"/>
-              </a:rPr>
-              <a:t>p = 0.42</a:t>
-            </a:r>
-          </a:p>
-        </p:txBody>
-      </p:sp>
-      <p:sp>
-        <p:nvSpPr>
-          <p:cNvPr id="72" name="CardHead"/>
-          <p:cNvSpPr/>
-          <p:nvPr/>
-        </p:nvSpPr>
-        <p:spPr>
-          <a:xfrm>
-            <a:off x="4283066" y="2006879"/>
-            <a:ext cx="3625866" cy="640000"/>
-          </a:xfrm>
-          <a:prstGeom prst="rect">
-            <a:avLst/>
-          </a:prstGeom>
-          <a:solidFill>
-            <a:srgbClr val="0B376C"/>
-          </a:solidFill>
-          <a:ln>
-            <a:noFill/>
-          </a:ln>
-        </p:spPr>
-        <p:txBody>
-          <a:bodyPr wrap="square" lIns="91440" tIns="45720" rIns="91440" bIns="45720" rtlCol="0" anchor="ctr">
-            <a:normAutofit/>
-          </a:bodyPr>
-          <a:lstStyle/>
-          <a:p>
-            <a:pPr marL="0" indent="0" algn="ctr">
-              <a:buNone/>
-            </a:pPr>
-            <a:r>
-              <a:rPr lang="en-US" sz="1900" b="1" dirty="0">
-                <a:solidFill>
-                  <a:srgbClr val="FFFFFF"/>
-                </a:solidFill>
-                <a:latin typeface="Arial"/>
-                <a:cs typeface="Arial"/>
-              </a:rPr>
-              <a:t>Số 0 ở đâu?</a:t>
-            </a:r>
-          </a:p>
-        </p:txBody>
-      </p:sp>
-      <p:sp>
-        <p:nvSpPr>
-          <p:cNvPr id="73" name="CardBody"/>
-          <p:cNvSpPr/>
-          <p:nvPr/>
-        </p:nvSpPr>
-        <p:spPr>
-          <a:xfrm>
-            <a:off x="4283066" y="2646879"/>
-            <a:ext cx="3625866" cy="2202954"/>
-          </a:xfrm>
-          <a:prstGeom prst="rect">
-            <a:avLst/>
-          </a:prstGeom>
-          <a:solidFill>
-            <a:srgbClr val="EAF2F5"/>
-          </a:solidFill>
-          <a:ln>
-            <a:noFill/>
-          </a:ln>
-        </p:spPr>
-        <p:txBody>
-          <a:bodyPr wrap="square" lIns="137160" tIns="91440" rIns="137160" bIns="91440" rtlCol="0" anchor="ctr">
-            <a:normAutofit/>
-          </a:bodyPr>
-          <a:lstStyle/>
-          <a:p>
-            <a:pPr marL="0" indent="0" algn="ctr">
-              <a:lnSpc>
-                <a:spcPct val="104000"/>
-              </a:lnSpc>
-              <a:spcBef>
-                <a:spcPts val="400"/>
-              </a:spcBef>
-              <a:buNone/>
-            </a:pPr>
-            <a:r>
-              <a:rPr lang="en-US" sz="1750" dirty="0">
-                <a:solidFill>
-                  <a:srgbClr val="000000"/>
-                </a:solidFill>
-                <a:latin typeface="Arial"/>
-                <a:cs typeface="Arial"/>
-              </a:rPr>
-              <a:t>0 = không khác biệt</a:t>
-            </a:r>
-          </a:p>
-          <a:p>
-            <a:pPr marL="0" indent="0" algn="ctr">
-              <a:lnSpc>
-                <a:spcPct val="104000"/>
-              </a:lnSpc>
-              <a:spcBef>
-                <a:spcPts val="400"/>
-              </a:spcBef>
-              <a:buNone/>
-            </a:pPr>
-            <a:r>
-              <a:rPr lang="en-US" sz="1750" dirty="0">
-                <a:solidFill>
-                  <a:srgbClr val="000000"/>
-                </a:solidFill>
-                <a:latin typeface="Arial"/>
-                <a:cs typeface="Arial"/>
-              </a:rPr>
-              <a:t>KTC chứa số 0</a:t>
-            </a:r>
-          </a:p>
-          <a:p>
-            <a:pPr marL="0" indent="0" algn="ctr">
-              <a:lnSpc>
-                <a:spcPct val="104000"/>
-              </a:lnSpc>
-              <a:spcBef>
-                <a:spcPts val="400"/>
-              </a:spcBef>
-              <a:buNone/>
-            </a:pPr>
-            <a:r>
-              <a:rPr lang="en-US" sz="1750" dirty="0">
-                <a:solidFill>
-                  <a:srgbClr val="000000"/>
-                </a:solidFill>
-                <a:latin typeface="Arial"/>
-                <a:cs typeface="Arial"/>
-              </a:rPr>
-              <a:t>Nên 'không khác biệt' phù hợp với dữ liệu</a:t>
-            </a:r>
-          </a:p>
-        </p:txBody>
-      </p:sp>
-      <p:sp>
-        <p:nvSpPr>
-          <p:cNvPr id="74" name="CardHead"/>
-          <p:cNvSpPr/>
-          <p:nvPr/>
-        </p:nvSpPr>
-        <p:spPr>
-          <a:xfrm>
-            <a:off x="8108932" y="2006879"/>
-            <a:ext cx="3625866" cy="640000"/>
-          </a:xfrm>
-          <a:prstGeom prst="rect">
-            <a:avLst/>
-          </a:prstGeom>
-          <a:solidFill>
-            <a:srgbClr val="5FA39B"/>
-          </a:solidFill>
-          <a:ln>
-            <a:noFill/>
-          </a:ln>
-        </p:spPr>
-        <p:txBody>
-          <a:bodyPr wrap="square" lIns="91440" tIns="45720" rIns="91440" bIns="45720" rtlCol="0" anchor="ctr">
-            <a:normAutofit/>
-          </a:bodyPr>
-          <a:lstStyle/>
-          <a:p>
-            <a:pPr marL="0" indent="0" algn="ctr">
-              <a:buNone/>
-            </a:pPr>
-            <a:r>
-              <a:rPr lang="en-US" sz="1900" b="1" dirty="0">
-                <a:solidFill>
-                  <a:srgbClr val="FFFFFF"/>
-                </a:solidFill>
-                <a:latin typeface="Arial"/>
-                <a:cs typeface="Arial"/>
-              </a:rPr>
-              <a:t>Rộng đến đâu?</a:t>
-            </a:r>
-          </a:p>
-        </p:txBody>
-      </p:sp>
-      <p:sp>
-        <p:nvSpPr>
-          <p:cNvPr id="75" name="CardBody"/>
-          <p:cNvSpPr/>
-          <p:nvPr/>
-        </p:nvSpPr>
-        <p:spPr>
-          <a:xfrm>
-            <a:off x="8108932" y="2646879"/>
-            <a:ext cx="3625866" cy="2202954"/>
-          </a:xfrm>
-          <a:prstGeom prst="rect">
-            <a:avLst/>
-          </a:prstGeom>
-          <a:solidFill>
-            <a:srgbClr val="EAF2F5"/>
-          </a:solidFill>
-          <a:ln>
-            <a:noFill/>
-          </a:ln>
-        </p:spPr>
-        <p:txBody>
-          <a:bodyPr wrap="square" lIns="137160" tIns="91440" rIns="137160" bIns="91440" rtlCol="0" anchor="ctr">
-            <a:normAutofit/>
-          </a:bodyPr>
-          <a:lstStyle/>
-          <a:p>
-            <a:pPr marL="0" indent="0" algn="ctr">
-              <a:lnSpc>
-                <a:spcPct val="104000"/>
-              </a:lnSpc>
-              <a:spcBef>
-                <a:spcPts val="400"/>
-              </a:spcBef>
-              <a:buNone/>
-            </a:pPr>
-            <a:r>
-              <a:rPr lang="en-US" sz="1750" dirty="0">
-                <a:solidFill>
-                  <a:srgbClr val="000000"/>
-                </a:solidFill>
-                <a:latin typeface="Arial"/>
-                <a:cs typeface="Arial"/>
-              </a:rPr>
-              <a:t>Từ 15 ml/kg theo một hướng đến 42 ml/kg theo hướng kia</a:t>
-            </a:r>
-          </a:p>
-          <a:p>
-            <a:pPr marL="0" indent="0" algn="ctr">
-              <a:lnSpc>
-                <a:spcPct val="104000"/>
-              </a:lnSpc>
-              <a:spcBef>
-                <a:spcPts val="400"/>
-              </a:spcBef>
-              <a:buNone/>
-            </a:pPr>
-            <a:r>
-              <a:rPr lang="en-US" sz="1750" dirty="0">
-                <a:solidFill>
-                  <a:srgbClr val="000000"/>
-                </a:solidFill>
-                <a:latin typeface="Arial"/>
-                <a:cs typeface="Arial"/>
-              </a:rPr>
-              <a:t>Rất kém chính xác: chỉ 48 người bệnh</a:t>
-            </a:r>
-          </a:p>
-        </p:txBody>
-      </p:sp>
-      <p:sp>
-        <p:nvSpPr>
-          <p:cNvPr id="60" name="Takeaway"/>
-          <p:cNvSpPr/>
-          <p:nvPr/>
-        </p:nvSpPr>
-        <p:spPr>
-          <a:xfrm>
-            <a:off x="457200" y="5390000"/>
-            <a:ext cx="11277600" cy="560000"/>
-          </a:xfrm>
-          <a:prstGeom prst="roundRect">
-            <a:avLst>
-              <a:gd name="adj" fmla="val 12000"/>
-            </a:avLst>
-          </a:prstGeom>
-          <a:solidFill>
-            <a:srgbClr val="0D7377"/>
-          </a:solidFill>
-          <a:ln>
-            <a:noFill/>
-          </a:ln>
-        </p:spPr>
-        <p:txBody>
           <a:bodyPr wrap="square" lIns="182880" tIns="45720" rIns="182880" bIns="45720" rtlCol="0" anchor="ctr">
             <a:normAutofit/>
           </a:bodyPr>
@@ -33733,7 +32579,7 @@
                 <a:latin typeface="Arial"/>
                 <a:cs typeface="Arial"/>
               </a:rPr>
-              <a:t>'Không có ý nghĩa' với KTC rộng nghĩa là 'chưa biết', không phải 'không tác động'.</a:t>
+              <a:t>Mẫu cho một ước lượng. KTC cho biết ước lượng đó chính xác đến đâu.</a:t>
             </a:r>
           </a:p>
         </p:txBody>
@@ -33901,7 +32747,7 @@
                 <a:latin typeface="Arial"/>
                 <a:cs typeface="Arial"/>
               </a:rPr>
-              <a:t>Bổ sung: ví dụ xuyên suốt trong một biểu đồ rừng</a:t>
+              <a:t>Bổ sung: Đọc KTC 95% trong một bài báo thật</a:t>
             </a:r>
           </a:p>
         </p:txBody>
@@ -33934,40 +32780,16 @@
           </a:p>
         </p:txBody>
       </p:sp>
-      <p:pic>
-        <p:nvPicPr>
-          <p:cNvPr id="25" name="Figure"/>
-          <p:cNvPicPr>
-            <a:picLocks noChangeAspect="1"/>
-          </p:cNvPicPr>
-          <p:nvPr/>
-        </p:nvPicPr>
-        <p:blipFill>
-          <a:blip r:embed="rId4"/>
-          <a:stretch>
-            <a:fillRect/>
-          </a:stretch>
-        </p:blipFill>
-        <p:spPr>
-          <a:xfrm>
-            <a:off x="1383500" y="1150000"/>
-            <a:ext cx="9425000" cy="3770000"/>
-          </a:xfrm>
-          <a:prstGeom prst="rect">
-            <a:avLst/>
-          </a:prstGeom>
-        </p:spPr>
-      </p:pic>
-      <p:sp>
-        <p:nvSpPr>
-          <p:cNvPr id="26" name="Caption"/>
+      <p:sp>
+        <p:nvSpPr>
+          <p:cNvPr id="19" name="Intro"/>
           <p:cNvSpPr txBox="1"/>
           <p:nvPr/>
         </p:nvSpPr>
         <p:spPr>
           <a:xfrm>
-            <a:off x="457200" y="4980000"/>
-            <a:ext cx="11277600" cy="400000"/>
+            <a:off x="457200" y="1100000"/>
+            <a:ext cx="11277600" cy="480000"/>
           </a:xfrm>
           <a:prstGeom prst="rect">
             <a:avLst/>
@@ -33981,37 +32803,35 @@
           <a:bodyPr wrap="square" lIns="91440" tIns="45720" rIns="91440" bIns="45720" rtlCol="0" anchor="t"/>
           <a:lstStyle/>
           <a:p>
-            <a:pPr marL="0" indent="0" algn="ctr">
-              <a:buNone/>
-            </a:pPr>
-            <a:r>
-              <a:rPr lang="en-US" sz="1300" i="1" dirty="0">
+            <a:pPr marL="0" indent="0" algn="l">
+              <a:buNone/>
+            </a:pPr>
+            <a:r>
+              <a:rPr lang="en-US" sz="1700" i="1" dirty="0">
                 <a:solidFill>
                   <a:srgbClr val="595959"/>
                 </a:solidFill>
                 <a:latin typeface="Arial"/>
                 <a:cs typeface="Arial"/>
               </a:rPr>
-              <a:t>Bài báo 2 (Hyun 2023): cân bằng dịch tích lũy dương so với âm, các thuần tập ghép cặp theo điểm xu hướng</a:t>
-            </a:r>
-          </a:p>
-        </p:txBody>
-      </p:sp>
-      <p:sp>
-        <p:nvSpPr>
-          <p:cNvPr id="60" name="Takeaway"/>
+              <a:t>Bài báo 1 (Boulet 2024, RCT thí điểm), kết cục chính: cân bằng dịch tích lũy ngày 5.</a:t>
+            </a:r>
+          </a:p>
+        </p:txBody>
+      </p:sp>
+      <p:sp>
+        <p:nvSpPr>
+          <p:cNvPr id="70" name="CardHead"/>
           <p:cNvSpPr/>
           <p:nvPr/>
         </p:nvSpPr>
         <p:spPr>
           <a:xfrm>
-            <a:off x="457200" y="5390000"/>
-            <a:ext cx="11277600" cy="560000"/>
-          </a:xfrm>
-          <a:prstGeom prst="roundRect">
-            <a:avLst>
-              <a:gd name="adj" fmla="val 12000"/>
-            </a:avLst>
+            <a:off x="457200" y="1909015"/>
+            <a:ext cx="3625866" cy="640000"/>
+          </a:xfrm>
+          <a:prstGeom prst="rect">
+            <a:avLst/>
           </a:prstGeom>
           <a:solidFill>
             <a:srgbClr val="0D7377"/>
@@ -34021,6 +32841,410 @@
           </a:ln>
         </p:spPr>
         <p:txBody>
+          <a:bodyPr wrap="square" lIns="91440" tIns="45720" rIns="91440" bIns="45720" rtlCol="0" anchor="ctr">
+            <a:normAutofit/>
+          </a:bodyPr>
+          <a:lstStyle/>
+          <a:p>
+            <a:pPr marL="0" indent="0" algn="ctr">
+              <a:buNone/>
+            </a:pPr>
+            <a:r>
+              <a:rPr lang="en-US" sz="1900" b="1" dirty="0">
+                <a:solidFill>
+                  <a:srgbClr val="FFFFFF"/>
+                </a:solidFill>
+                <a:latin typeface="Arial"/>
+                <a:cs typeface="Arial"/>
+              </a:rPr>
+              <a:t>Kết quả</a:t>
+            </a:r>
+          </a:p>
+        </p:txBody>
+      </p:sp>
+      <p:sp>
+        <p:nvSpPr>
+          <p:cNvPr id="71" name="CardBody"/>
+          <p:cNvSpPr/>
+          <p:nvPr/>
+        </p:nvSpPr>
+        <p:spPr>
+          <a:xfrm>
+            <a:off x="457200" y="2549015"/>
+            <a:ext cx="3625866" cy="2202954"/>
+          </a:xfrm>
+          <a:prstGeom prst="rect">
+            <a:avLst/>
+          </a:prstGeom>
+          <a:solidFill>
+            <a:srgbClr val="EAF2F5"/>
+          </a:solidFill>
+          <a:ln>
+            <a:noFill/>
+          </a:ln>
+        </p:spPr>
+        <p:txBody>
+          <a:bodyPr wrap="square" lIns="137160" tIns="91440" rIns="137160" bIns="91440" rtlCol="0" anchor="ctr">
+            <a:normAutofit/>
+          </a:bodyPr>
+          <a:lstStyle/>
+          <a:p>
+            <a:pPr marL="0" indent="0" algn="ctr">
+              <a:lnSpc>
+                <a:spcPct val="104000"/>
+              </a:lnSpc>
+              <a:spcBef>
+                <a:spcPts val="400"/>
+              </a:spcBef>
+              <a:buNone/>
+            </a:pPr>
+            <a:r>
+              <a:rPr lang="en-US" sz="1750" dirty="0">
+                <a:solidFill>
+                  <a:srgbClr val="000000"/>
+                </a:solidFill>
+                <a:latin typeface="Arial"/>
+                <a:cs typeface="Arial"/>
+              </a:rPr>
+              <a:t>Trung vị 6.9 so với 35.0 ml/kg</a:t>
+            </a:r>
+          </a:p>
+          <a:p>
+            <a:pPr marL="0" indent="0" algn="ctr">
+              <a:lnSpc>
+                <a:spcPct val="104000"/>
+              </a:lnSpc>
+              <a:spcBef>
+                <a:spcPts val="400"/>
+              </a:spcBef>
+              <a:buNone/>
+            </a:pPr>
+            <a:r>
+              <a:rPr lang="en-US" sz="1750" dirty="0">
+                <a:solidFill>
+                  <a:srgbClr val="000000"/>
+                </a:solidFill>
+                <a:latin typeface="Arial"/>
+                <a:cs typeface="Arial"/>
+              </a:rPr>
+              <a:t>Chênh lệch trung bình 13.2 ml/kg</a:t>
+            </a:r>
+          </a:p>
+          <a:p>
+            <a:pPr marL="0" indent="0" algn="ctr">
+              <a:lnSpc>
+                <a:spcPct val="104000"/>
+              </a:lnSpc>
+              <a:spcBef>
+                <a:spcPts val="400"/>
+              </a:spcBef>
+              <a:buNone/>
+            </a:pPr>
+            <a:r>
+              <a:rPr lang="en-US" sz="1750" dirty="0">
+                <a:solidFill>
+                  <a:srgbClr val="000000"/>
+                </a:solidFill>
+                <a:latin typeface="Arial"/>
+                <a:cs typeface="Arial"/>
+              </a:rPr>
+              <a:t>KTC 95% -15.2 đến 41.6</a:t>
+            </a:r>
+          </a:p>
+          <a:p>
+            <a:pPr marL="0" indent="0" algn="ctr">
+              <a:lnSpc>
+                <a:spcPct val="104000"/>
+              </a:lnSpc>
+              <a:spcBef>
+                <a:spcPts val="400"/>
+              </a:spcBef>
+              <a:buNone/>
+            </a:pPr>
+            <a:r>
+              <a:rPr lang="en-US" sz="1750" dirty="0">
+                <a:solidFill>
+                  <a:srgbClr val="000000"/>
+                </a:solidFill>
+                <a:latin typeface="Arial"/>
+                <a:cs typeface="Arial"/>
+              </a:rPr>
+              <a:t>p = 0.42</a:t>
+            </a:r>
+          </a:p>
+        </p:txBody>
+      </p:sp>
+      <p:sp>
+        <p:nvSpPr>
+          <p:cNvPr id="72" name="CardHead"/>
+          <p:cNvSpPr/>
+          <p:nvPr/>
+        </p:nvSpPr>
+        <p:spPr>
+          <a:xfrm>
+            <a:off x="4283066" y="1909015"/>
+            <a:ext cx="3625866" cy="640000"/>
+          </a:xfrm>
+          <a:prstGeom prst="rect">
+            <a:avLst/>
+          </a:prstGeom>
+          <a:solidFill>
+            <a:srgbClr val="0B376C"/>
+          </a:solidFill>
+          <a:ln>
+            <a:noFill/>
+          </a:ln>
+        </p:spPr>
+        <p:txBody>
+          <a:bodyPr wrap="square" lIns="91440" tIns="45720" rIns="91440" bIns="45720" rtlCol="0" anchor="ctr">
+            <a:normAutofit/>
+          </a:bodyPr>
+          <a:lstStyle/>
+          <a:p>
+            <a:pPr marL="0" indent="0" algn="ctr">
+              <a:buNone/>
+            </a:pPr>
+            <a:r>
+              <a:rPr lang="en-US" sz="1900" b="1" dirty="0">
+                <a:solidFill>
+                  <a:srgbClr val="FFFFFF"/>
+                </a:solidFill>
+                <a:latin typeface="Arial"/>
+                <a:cs typeface="Arial"/>
+              </a:rPr>
+              <a:t>Số 0 ở đâu?</a:t>
+            </a:r>
+          </a:p>
+        </p:txBody>
+      </p:sp>
+      <p:sp>
+        <p:nvSpPr>
+          <p:cNvPr id="73" name="CardBody"/>
+          <p:cNvSpPr/>
+          <p:nvPr/>
+        </p:nvSpPr>
+        <p:spPr>
+          <a:xfrm>
+            <a:off x="4283066" y="2549015"/>
+            <a:ext cx="3625866" cy="2202954"/>
+          </a:xfrm>
+          <a:prstGeom prst="rect">
+            <a:avLst/>
+          </a:prstGeom>
+          <a:solidFill>
+            <a:srgbClr val="EAF2F5"/>
+          </a:solidFill>
+          <a:ln>
+            <a:noFill/>
+          </a:ln>
+        </p:spPr>
+        <p:txBody>
+          <a:bodyPr wrap="square" lIns="137160" tIns="91440" rIns="137160" bIns="91440" rtlCol="0" anchor="ctr">
+            <a:normAutofit/>
+          </a:bodyPr>
+          <a:lstStyle/>
+          <a:p>
+            <a:pPr marL="0" indent="0" algn="ctr">
+              <a:lnSpc>
+                <a:spcPct val="104000"/>
+              </a:lnSpc>
+              <a:spcBef>
+                <a:spcPts val="400"/>
+              </a:spcBef>
+              <a:buNone/>
+            </a:pPr>
+            <a:r>
+              <a:rPr lang="en-US" sz="1750" dirty="0">
+                <a:solidFill>
+                  <a:srgbClr val="000000"/>
+                </a:solidFill>
+                <a:latin typeface="Arial"/>
+                <a:cs typeface="Arial"/>
+              </a:rPr>
+              <a:t>0 = không khác biệt</a:t>
+            </a:r>
+          </a:p>
+          <a:p>
+            <a:pPr marL="0" indent="0" algn="ctr">
+              <a:lnSpc>
+                <a:spcPct val="104000"/>
+              </a:lnSpc>
+              <a:spcBef>
+                <a:spcPts val="400"/>
+              </a:spcBef>
+              <a:buNone/>
+            </a:pPr>
+            <a:r>
+              <a:rPr lang="en-US" sz="1750" dirty="0">
+                <a:solidFill>
+                  <a:srgbClr val="000000"/>
+                </a:solidFill>
+                <a:latin typeface="Arial"/>
+                <a:cs typeface="Arial"/>
+              </a:rPr>
+              <a:t>KTC chứa số 0</a:t>
+            </a:r>
+          </a:p>
+          <a:p>
+            <a:pPr marL="0" indent="0" algn="ctr">
+              <a:lnSpc>
+                <a:spcPct val="104000"/>
+              </a:lnSpc>
+              <a:spcBef>
+                <a:spcPts val="400"/>
+              </a:spcBef>
+              <a:buNone/>
+            </a:pPr>
+            <a:r>
+              <a:rPr lang="en-US" sz="1750" dirty="0">
+                <a:solidFill>
+                  <a:srgbClr val="000000"/>
+                </a:solidFill>
+                <a:latin typeface="Arial"/>
+                <a:cs typeface="Arial"/>
+              </a:rPr>
+              <a:t>Nên 'không khác biệt' phù hợp với dữ liệu</a:t>
+            </a:r>
+          </a:p>
+        </p:txBody>
+      </p:sp>
+      <p:sp>
+        <p:nvSpPr>
+          <p:cNvPr id="74" name="CardHead"/>
+          <p:cNvSpPr/>
+          <p:nvPr/>
+        </p:nvSpPr>
+        <p:spPr>
+          <a:xfrm>
+            <a:off x="8108932" y="1909015"/>
+            <a:ext cx="3625866" cy="640000"/>
+          </a:xfrm>
+          <a:prstGeom prst="rect">
+            <a:avLst/>
+          </a:prstGeom>
+          <a:solidFill>
+            <a:srgbClr val="5FA39B"/>
+          </a:solidFill>
+          <a:ln>
+            <a:noFill/>
+          </a:ln>
+        </p:spPr>
+        <p:txBody>
+          <a:bodyPr wrap="square" lIns="91440" tIns="45720" rIns="91440" bIns="45720" rtlCol="0" anchor="ctr">
+            <a:normAutofit/>
+          </a:bodyPr>
+          <a:lstStyle/>
+          <a:p>
+            <a:pPr marL="0" indent="0" algn="ctr">
+              <a:buNone/>
+            </a:pPr>
+            <a:r>
+              <a:rPr lang="en-US" sz="1900" b="1" dirty="0">
+                <a:solidFill>
+                  <a:srgbClr val="FFFFFF"/>
+                </a:solidFill>
+                <a:latin typeface="Arial"/>
+                <a:cs typeface="Arial"/>
+              </a:rPr>
+              <a:t>Rộng đến đâu?</a:t>
+            </a:r>
+          </a:p>
+        </p:txBody>
+      </p:sp>
+      <p:sp>
+        <p:nvSpPr>
+          <p:cNvPr id="75" name="CardBody"/>
+          <p:cNvSpPr/>
+          <p:nvPr/>
+        </p:nvSpPr>
+        <p:spPr>
+          <a:xfrm>
+            <a:off x="8108932" y="2549015"/>
+            <a:ext cx="3625866" cy="2202954"/>
+          </a:xfrm>
+          <a:prstGeom prst="rect">
+            <a:avLst/>
+          </a:prstGeom>
+          <a:solidFill>
+            <a:srgbClr val="EAF2F5"/>
+          </a:solidFill>
+          <a:ln>
+            <a:noFill/>
+          </a:ln>
+        </p:spPr>
+        <p:txBody>
+          <a:bodyPr wrap="square" lIns="137160" tIns="91440" rIns="137160" bIns="91440" rtlCol="0" anchor="ctr">
+            <a:normAutofit/>
+          </a:bodyPr>
+          <a:lstStyle/>
+          <a:p>
+            <a:pPr marL="0" indent="0" algn="ctr">
+              <a:lnSpc>
+                <a:spcPct val="104000"/>
+              </a:lnSpc>
+              <a:spcBef>
+                <a:spcPts val="400"/>
+              </a:spcBef>
+              <a:buNone/>
+            </a:pPr>
+            <a:r>
+              <a:rPr lang="en-US" sz="1750" dirty="0">
+                <a:solidFill>
+                  <a:srgbClr val="000000"/>
+                </a:solidFill>
+                <a:latin typeface="Arial"/>
+                <a:cs typeface="Arial"/>
+              </a:rPr>
+              <a:t>Từ 15 ml/kg theo một hướng đến 42 ml/kg theo hướng kia</a:t>
+            </a:r>
+          </a:p>
+          <a:p>
+            <a:pPr marL="0" indent="0" algn="ctr">
+              <a:lnSpc>
+                <a:spcPct val="104000"/>
+              </a:lnSpc>
+              <a:spcBef>
+                <a:spcPts val="400"/>
+              </a:spcBef>
+              <a:buNone/>
+            </a:pPr>
+            <a:r>
+              <a:rPr lang="en-US" sz="1750" dirty="0">
+                <a:solidFill>
+                  <a:srgbClr val="000000"/>
+                </a:solidFill>
+                <a:latin typeface="Arial"/>
+                <a:cs typeface="Arial"/>
+              </a:rPr>
+              <a:t>Rất kém chính xác: chỉ 48 người bệnh</a:t>
+            </a:r>
+          </a:p>
+        </p:txBody>
+      </p:sp>
+      <p:sp>
+        <p:nvSpPr>
+          <p:cNvPr id="60" name="Takeaway"/>
+          <p:cNvSpPr/>
+          <p:nvPr/>
+        </p:nvSpPr>
+        <p:spPr>
+          <a:xfrm>
+            <a:off x="457200" y="5390000"/>
+            <a:ext cx="11277600" cy="560000"/>
+          </a:xfrm>
+          <a:prstGeom prst="roundRect">
+            <a:avLst>
+              <a:gd name="adj" fmla="val 12000"/>
+            </a:avLst>
+          </a:prstGeom>
+          <a:solidFill>
+            <a:srgbClr val="0D7377"/>
+          </a:solidFill>
+          <a:ln>
+            <a:noFill/>
+          </a:ln>
+        </p:spPr>
+        <p:txBody>
           <a:bodyPr wrap="square" lIns="182880" tIns="45720" rIns="182880" bIns="45720" rtlCol="0" anchor="ctr">
             <a:normAutofit/>
           </a:bodyPr>
@@ -34047,7 +33271,7 @@
                 <a:latin typeface="Arial"/>
                 <a:cs typeface="Arial"/>
               </a:rPr>
-              <a:t>Ngày 1: KTC cắt qua 1. Ngày 2 và 3: KTC nằm trên 1, nguy cơ cao hơn.</a:t>
+              <a:t>'Không có ý nghĩa' với KTC rộng nghĩa là 'chưa biết', không phải 'không tác động'.</a:t>
             </a:r>
           </a:p>
         </p:txBody>
@@ -34215,7 +33439,7 @@
                 <a:latin typeface="Arial"/>
                 <a:cs typeface="Arial"/>
               </a:rPr>
-              <a:t>Bổ sung: Log-rank, Cox và nguy cơ tỷ lệ</a:t>
+              <a:t>Bổ sung: ví dụ xuyên suốt trong một biểu đồ rừng</a:t>
             </a:r>
           </a:p>
         </p:txBody>
@@ -34248,16 +33472,40 @@
           </a:p>
         </p:txBody>
       </p:sp>
-      <p:sp>
-        <p:nvSpPr>
-          <p:cNvPr id="19" name="Intro"/>
+      <p:pic>
+        <p:nvPicPr>
+          <p:cNvPr id="25" name="Figure"/>
+          <p:cNvPicPr>
+            <a:picLocks noChangeAspect="1"/>
+          </p:cNvPicPr>
+          <p:nvPr/>
+        </p:nvPicPr>
+        <p:blipFill>
+          <a:blip r:embed="rId4"/>
+          <a:stretch>
+            <a:fillRect/>
+          </a:stretch>
+        </p:blipFill>
+        <p:spPr>
+          <a:xfrm>
+            <a:off x="1383500" y="1150000"/>
+            <a:ext cx="9425000" cy="3770000"/>
+          </a:xfrm>
+          <a:prstGeom prst="rect">
+            <a:avLst/>
+          </a:prstGeom>
+        </p:spPr>
+      </p:pic>
+      <p:sp>
+        <p:nvSpPr>
+          <p:cNvPr id="26" name="Caption"/>
           <p:cNvSpPr txBox="1"/>
           <p:nvPr/>
         </p:nvSpPr>
         <p:spPr>
           <a:xfrm>
-            <a:off x="457200" y="1100000"/>
-            <a:ext cx="11277600" cy="626796"/>
+            <a:off x="457200" y="4980000"/>
+            <a:ext cx="11277600" cy="400000"/>
           </a:xfrm>
           <a:prstGeom prst="rect">
             <a:avLst/>
@@ -34271,35 +33519,37 @@
           <a:bodyPr wrap="square" lIns="91440" tIns="45720" rIns="91440" bIns="45720" rtlCol="0" anchor="t"/>
           <a:lstStyle/>
           <a:p>
-            <a:pPr marL="0" indent="0" algn="l">
-              <a:buNone/>
-            </a:pPr>
-            <a:r>
-              <a:rPr lang="en-US" sz="1700" i="1" dirty="0">
+            <a:pPr marL="0" indent="0" algn="ctr">
+              <a:buNone/>
+            </a:pPr>
+            <a:r>
+              <a:rPr lang="en-US" sz="1300" i="1" dirty="0">
                 <a:solidFill>
                   <a:srgbClr val="595959"/>
                 </a:solidFill>
                 <a:latin typeface="Arial"/>
                 <a:cs typeface="Arial"/>
               </a:rPr>
-              <a:t>Ba thuật ngữ anh chị sẽ gặp trong mọi bài báo về sống còn. KM = Kaplan-Meier. HR = tỷ số nguy cơ tức thời.</a:t>
-            </a:r>
-          </a:p>
-        </p:txBody>
-      </p:sp>
-      <p:sp>
-        <p:nvSpPr>
-          <p:cNvPr id="70" name="CardHead"/>
+              <a:t>Bài báo 2 (Hyun 2023): cân bằng dịch tích lũy dương so với âm, các thuần tập ghép cặp theo điểm xu hướng</a:t>
+            </a:r>
+          </a:p>
+        </p:txBody>
+      </p:sp>
+      <p:sp>
+        <p:nvSpPr>
+          <p:cNvPr id="60" name="Takeaway"/>
           <p:cNvSpPr/>
           <p:nvPr/>
         </p:nvSpPr>
         <p:spPr>
           <a:xfrm>
-            <a:off x="457200" y="2209021"/>
-            <a:ext cx="3625866" cy="640000"/>
-          </a:xfrm>
-          <a:prstGeom prst="rect">
-            <a:avLst/>
+            <a:off x="457200" y="5390000"/>
+            <a:ext cx="11277600" cy="560000"/>
+          </a:xfrm>
+          <a:prstGeom prst="roundRect">
+            <a:avLst>
+              <a:gd name="adj" fmla="val 12000"/>
+            </a:avLst>
           </a:prstGeom>
           <a:solidFill>
             <a:srgbClr val="0D7377"/>
@@ -34309,389 +33559,6 @@
           </a:ln>
         </p:spPr>
         <p:txBody>
-          <a:bodyPr wrap="square" lIns="91440" tIns="45720" rIns="91440" bIns="45720" rtlCol="0" anchor="ctr">
-            <a:normAutofit/>
-          </a:bodyPr>
-          <a:lstStyle/>
-          <a:p>
-            <a:pPr marL="0" indent="0" algn="ctr">
-              <a:buNone/>
-            </a:pPr>
-            <a:r>
-              <a:rPr lang="en-US" sz="1900" b="1" dirty="0">
-                <a:solidFill>
-                  <a:srgbClr val="FFFFFF"/>
-                </a:solidFill>
-                <a:latin typeface="Arial"/>
-                <a:cs typeface="Arial"/>
-              </a:rPr>
-              <a:t>Kiểm định log-rank</a:t>
-            </a:r>
-          </a:p>
-        </p:txBody>
-      </p:sp>
-      <p:sp>
-        <p:nvSpPr>
-          <p:cNvPr id="71" name="CardBody"/>
-          <p:cNvSpPr/>
-          <p:nvPr/>
-        </p:nvSpPr>
-        <p:spPr>
-          <a:xfrm>
-            <a:off x="457200" y="2849021"/>
-            <a:ext cx="3625866" cy="1596529"/>
-          </a:xfrm>
-          <a:prstGeom prst="rect">
-            <a:avLst/>
-          </a:prstGeom>
-          <a:solidFill>
-            <a:srgbClr val="EAF2F5"/>
-          </a:solidFill>
-          <a:ln>
-            <a:noFill/>
-          </a:ln>
-        </p:spPr>
-        <p:txBody>
-          <a:bodyPr wrap="square" lIns="137160" tIns="91440" rIns="137160" bIns="91440" rtlCol="0" anchor="ctr">
-            <a:normAutofit/>
-          </a:bodyPr>
-          <a:lstStyle/>
-          <a:p>
-            <a:pPr marL="0" indent="0" algn="ctr">
-              <a:lnSpc>
-                <a:spcPct val="104000"/>
-              </a:lnSpc>
-              <a:spcBef>
-                <a:spcPts val="400"/>
-              </a:spcBef>
-              <a:buNone/>
-            </a:pPr>
-            <a:r>
-              <a:rPr lang="en-US" sz="1750" dirty="0">
-                <a:solidFill>
-                  <a:srgbClr val="000000"/>
-                </a:solidFill>
-                <a:latin typeface="Arial"/>
-                <a:cs typeface="Arial"/>
-              </a:rPr>
-              <a:t>So sánh toàn bộ đường KM</a:t>
-            </a:r>
-          </a:p>
-          <a:p>
-            <a:pPr marL="0" indent="0" algn="ctr">
-              <a:lnSpc>
-                <a:spcPct val="104000"/>
-              </a:lnSpc>
-              <a:spcBef>
-                <a:spcPts val="400"/>
-              </a:spcBef>
-              <a:buNone/>
-            </a:pPr>
-            <a:r>
-              <a:rPr lang="en-US" sz="1750" dirty="0">
-                <a:solidFill>
-                  <a:srgbClr val="000000"/>
-                </a:solidFill>
-                <a:latin typeface="Arial"/>
-                <a:cs typeface="Arial"/>
-              </a:rPr>
-              <a:t>Cho giá trị p</a:t>
-            </a:r>
-          </a:p>
-          <a:p>
-            <a:pPr marL="0" indent="0" algn="ctr">
-              <a:lnSpc>
-                <a:spcPct val="104000"/>
-              </a:lnSpc>
-              <a:spcBef>
-                <a:spcPts val="400"/>
-              </a:spcBef>
-              <a:buNone/>
-            </a:pPr>
-            <a:r>
-              <a:rPr lang="en-US" sz="1750" dirty="0">
-                <a:solidFill>
-                  <a:srgbClr val="000000"/>
-                </a:solidFill>
-                <a:latin typeface="Arial"/>
-                <a:cs typeface="Arial"/>
-              </a:rPr>
-              <a:t>Không cho độ lớn, không hiệu chỉnh</a:t>
-            </a:r>
-          </a:p>
-        </p:txBody>
-      </p:sp>
-      <p:sp>
-        <p:nvSpPr>
-          <p:cNvPr id="72" name="CardHead"/>
-          <p:cNvSpPr/>
-          <p:nvPr/>
-        </p:nvSpPr>
-        <p:spPr>
-          <a:xfrm>
-            <a:off x="4283066" y="2209021"/>
-            <a:ext cx="3625866" cy="640000"/>
-          </a:xfrm>
-          <a:prstGeom prst="rect">
-            <a:avLst/>
-          </a:prstGeom>
-          <a:solidFill>
-            <a:srgbClr val="0B376C"/>
-          </a:solidFill>
-          <a:ln>
-            <a:noFill/>
-          </a:ln>
-        </p:spPr>
-        <p:txBody>
-          <a:bodyPr wrap="square" lIns="91440" tIns="45720" rIns="91440" bIns="45720" rtlCol="0" anchor="ctr">
-            <a:normAutofit/>
-          </a:bodyPr>
-          <a:lstStyle/>
-          <a:p>
-            <a:pPr marL="0" indent="0" algn="ctr">
-              <a:buNone/>
-            </a:pPr>
-            <a:r>
-              <a:rPr lang="en-US" sz="1900" b="1" dirty="0">
-                <a:solidFill>
-                  <a:srgbClr val="FFFFFF"/>
-                </a:solidFill>
-                <a:latin typeface="Arial"/>
-                <a:cs typeface="Arial"/>
-              </a:rPr>
-              <a:t>Hồi quy Cox</a:t>
-            </a:r>
-          </a:p>
-        </p:txBody>
-      </p:sp>
-      <p:sp>
-        <p:nvSpPr>
-          <p:cNvPr id="73" name="CardBody"/>
-          <p:cNvSpPr/>
-          <p:nvPr/>
-        </p:nvSpPr>
-        <p:spPr>
-          <a:xfrm>
-            <a:off x="4283066" y="2849021"/>
-            <a:ext cx="3625866" cy="1596529"/>
-          </a:xfrm>
-          <a:prstGeom prst="rect">
-            <a:avLst/>
-          </a:prstGeom>
-          <a:solidFill>
-            <a:srgbClr val="EAF2F5"/>
-          </a:solidFill>
-          <a:ln>
-            <a:noFill/>
-          </a:ln>
-        </p:spPr>
-        <p:txBody>
-          <a:bodyPr wrap="square" lIns="137160" tIns="91440" rIns="137160" bIns="91440" rtlCol="0" anchor="ctr">
-            <a:normAutofit/>
-          </a:bodyPr>
-          <a:lstStyle/>
-          <a:p>
-            <a:pPr marL="0" indent="0" algn="ctr">
-              <a:lnSpc>
-                <a:spcPct val="104000"/>
-              </a:lnSpc>
-              <a:spcBef>
-                <a:spcPts val="400"/>
-              </a:spcBef>
-              <a:buNone/>
-            </a:pPr>
-            <a:r>
-              <a:rPr lang="en-US" sz="1750" dirty="0">
-                <a:solidFill>
-                  <a:srgbClr val="000000"/>
-                </a:solidFill>
-                <a:latin typeface="Arial"/>
-                <a:cs typeface="Arial"/>
-              </a:rPr>
-              <a:t>Cho HR kèm KTC 95%</a:t>
-            </a:r>
-          </a:p>
-          <a:p>
-            <a:pPr marL="0" indent="0" algn="ctr">
-              <a:lnSpc>
-                <a:spcPct val="104000"/>
-              </a:lnSpc>
-              <a:spcBef>
-                <a:spcPts val="400"/>
-              </a:spcBef>
-              <a:buNone/>
-            </a:pPr>
-            <a:r>
-              <a:rPr lang="en-US" sz="1750" dirty="0">
-                <a:solidFill>
-                  <a:srgbClr val="000000"/>
-                </a:solidFill>
-                <a:latin typeface="Arial"/>
-                <a:cs typeface="Arial"/>
-              </a:rPr>
-              <a:t>Không tác động = 1</a:t>
-            </a:r>
-          </a:p>
-          <a:p>
-            <a:pPr marL="0" indent="0" algn="ctr">
-              <a:lnSpc>
-                <a:spcPct val="104000"/>
-              </a:lnSpc>
-              <a:spcBef>
-                <a:spcPts val="400"/>
-              </a:spcBef>
-              <a:buNone/>
-            </a:pPr>
-            <a:r>
-              <a:rPr lang="en-US" sz="1750" dirty="0">
-                <a:solidFill>
-                  <a:srgbClr val="000000"/>
-                </a:solidFill>
-                <a:latin typeface="Arial"/>
-                <a:cs typeface="Arial"/>
-              </a:rPr>
-              <a:t>Hiệu chỉnh được yếu tố gây nhiễu</a:t>
-            </a:r>
-          </a:p>
-        </p:txBody>
-      </p:sp>
-      <p:sp>
-        <p:nvSpPr>
-          <p:cNvPr id="74" name="CardHead"/>
-          <p:cNvSpPr/>
-          <p:nvPr/>
-        </p:nvSpPr>
-        <p:spPr>
-          <a:xfrm>
-            <a:off x="8108932" y="2209021"/>
-            <a:ext cx="3625866" cy="640000"/>
-          </a:xfrm>
-          <a:prstGeom prst="rect">
-            <a:avLst/>
-          </a:prstGeom>
-          <a:solidFill>
-            <a:srgbClr val="5FA39B"/>
-          </a:solidFill>
-          <a:ln>
-            <a:noFill/>
-          </a:ln>
-        </p:spPr>
-        <p:txBody>
-          <a:bodyPr wrap="square" lIns="91440" tIns="45720" rIns="91440" bIns="45720" rtlCol="0" anchor="ctr">
-            <a:normAutofit/>
-          </a:bodyPr>
-          <a:lstStyle/>
-          <a:p>
-            <a:pPr marL="0" indent="0" algn="ctr">
-              <a:buNone/>
-            </a:pPr>
-            <a:r>
-              <a:rPr lang="en-US" sz="1900" b="1" dirty="0">
-                <a:solidFill>
-                  <a:srgbClr val="FFFFFF"/>
-                </a:solidFill>
-                <a:latin typeface="Arial"/>
-                <a:cs typeface="Arial"/>
-              </a:rPr>
-              <a:t>Nguy cơ tỷ lệ</a:t>
-            </a:r>
-          </a:p>
-        </p:txBody>
-      </p:sp>
-      <p:sp>
-        <p:nvSpPr>
-          <p:cNvPr id="75" name="CardBody"/>
-          <p:cNvSpPr/>
-          <p:nvPr/>
-        </p:nvSpPr>
-        <p:spPr>
-          <a:xfrm>
-            <a:off x="8108932" y="2849021"/>
-            <a:ext cx="3625866" cy="1596529"/>
-          </a:xfrm>
-          <a:prstGeom prst="rect">
-            <a:avLst/>
-          </a:prstGeom>
-          <a:solidFill>
-            <a:srgbClr val="EAF2F5"/>
-          </a:solidFill>
-          <a:ln>
-            <a:noFill/>
-          </a:ln>
-        </p:spPr>
-        <p:txBody>
-          <a:bodyPr wrap="square" lIns="137160" tIns="91440" rIns="137160" bIns="91440" rtlCol="0" anchor="ctr">
-            <a:normAutofit/>
-          </a:bodyPr>
-          <a:lstStyle/>
-          <a:p>
-            <a:pPr marL="0" indent="0" algn="ctr">
-              <a:lnSpc>
-                <a:spcPct val="104000"/>
-              </a:lnSpc>
-              <a:spcBef>
-                <a:spcPts val="400"/>
-              </a:spcBef>
-              <a:buNone/>
-            </a:pPr>
-            <a:r>
-              <a:rPr lang="en-US" sz="1750" dirty="0">
-                <a:solidFill>
-                  <a:srgbClr val="000000"/>
-                </a:solidFill>
-                <a:latin typeface="Arial"/>
-                <a:cs typeface="Arial"/>
-              </a:rPr>
-              <a:t>Giả định HR không đổi theo thời gian</a:t>
-            </a:r>
-          </a:p>
-          <a:p>
-            <a:pPr marL="0" indent="0" algn="ctr">
-              <a:lnSpc>
-                <a:spcPct val="104000"/>
-              </a:lnSpc>
-              <a:spcBef>
-                <a:spcPts val="400"/>
-              </a:spcBef>
-              <a:buNone/>
-            </a:pPr>
-            <a:r>
-              <a:rPr lang="en-US" sz="1750" dirty="0">
-                <a:solidFill>
-                  <a:srgbClr val="000000"/>
-                </a:solidFill>
-                <a:latin typeface="Arial"/>
-                <a:cs typeface="Arial"/>
-              </a:rPr>
-              <a:t>Đường cong cắt nhau: thận trọng</a:t>
-            </a:r>
-          </a:p>
-        </p:txBody>
-      </p:sp>
-      <p:sp>
-        <p:nvSpPr>
-          <p:cNvPr id="60" name="Takeaway"/>
-          <p:cNvSpPr/>
-          <p:nvPr/>
-        </p:nvSpPr>
-        <p:spPr>
-          <a:xfrm>
-            <a:off x="457200" y="5390000"/>
-            <a:ext cx="11277600" cy="560000"/>
-          </a:xfrm>
-          <a:prstGeom prst="roundRect">
-            <a:avLst>
-              <a:gd name="adj" fmla="val 12000"/>
-            </a:avLst>
-          </a:prstGeom>
-          <a:solidFill>
-            <a:srgbClr val="0D7377"/>
-          </a:solidFill>
-          <a:ln>
-            <a:noFill/>
-          </a:ln>
-        </p:spPr>
-        <p:txBody>
           <a:bodyPr wrap="square" lIns="182880" tIns="45720" rIns="182880" bIns="45720" rtlCol="0" anchor="ctr">
             <a:normAutofit/>
           </a:bodyPr>
@@ -34718,7 +33585,7 @@
                 <a:latin typeface="Arial"/>
                 <a:cs typeface="Arial"/>
               </a:rPr>
-              <a:t>Bài báo 2 (Hyun 2023): HR từ mô hình Cox 2.13 (1.48-3.06), nguy cơ tử vong khoảng gấp đôi.</a:t>
+              <a:t>Ngày 1: KTC cắt qua 1. Ngày 2 và 3: KTC nằm trên 1, nguy cơ cao hơn.</a:t>
             </a:r>
           </a:p>
         </p:txBody>
@@ -34879,14 +33746,14 @@
               <a:buNone/>
             </a:pPr>
             <a:r>
-              <a:rPr lang="en-US" sz="2100" b="1" dirty="0">
+              <a:rPr lang="en-US" sz="2800" b="1" dirty="0">
                 <a:solidFill>
                   <a:srgbClr val="0D7377"/>
                 </a:solidFill>
                 <a:latin typeface="Arial"/>
                 <a:cs typeface="Arial"/>
               </a:rPr>
-              <a:t>Bổ sung: Tương quan không phải đồng thuận, cũng không phải nhân quả</a:t>
+              <a:t>Bổ sung: Log-rank, Cox và nguy cơ tỷ lệ</a:t>
             </a:r>
           </a:p>
         </p:txBody>
@@ -34919,45 +33786,58 @@
           </a:p>
         </p:txBody>
       </p:sp>
-      <p:pic>
-        <p:nvPicPr>
-          <p:cNvPr id="25" name="Figure"/>
-          <p:cNvPicPr>
-            <a:picLocks noChangeAspect="1"/>
-          </p:cNvPicPr>
-          <p:nvPr/>
-        </p:nvPicPr>
-        <p:blipFill>
-          <a:blip r:embed="rId4"/>
-          <a:stretch>
-            <a:fillRect/>
-          </a:stretch>
-        </p:blipFill>
-        <p:spPr>
-          <a:xfrm>
-            <a:off x="908500" y="1150000"/>
-            <a:ext cx="10375000" cy="4150000"/>
+      <p:sp>
+        <p:nvSpPr>
+          <p:cNvPr id="19" name="Intro"/>
+          <p:cNvSpPr txBox="1"/>
+          <p:nvPr/>
+        </p:nvSpPr>
+        <p:spPr>
+          <a:xfrm>
+            <a:off x="457200" y="1100000"/>
+            <a:ext cx="11277600" cy="626796"/>
           </a:xfrm>
           <a:prstGeom prst="rect">
             <a:avLst/>
           </a:prstGeom>
-        </p:spPr>
-      </p:pic>
-      <p:sp>
-        <p:nvSpPr>
-          <p:cNvPr id="60" name="Takeaway"/>
+          <a:noFill/>
+          <a:ln>
+            <a:noFill/>
+          </a:ln>
+        </p:spPr>
+        <p:txBody>
+          <a:bodyPr wrap="square" lIns="91440" tIns="45720" rIns="91440" bIns="45720" rtlCol="0" anchor="t"/>
+          <a:lstStyle/>
+          <a:p>
+            <a:pPr marL="0" indent="0" algn="l">
+              <a:buNone/>
+            </a:pPr>
+            <a:r>
+              <a:rPr lang="en-US" sz="1700" i="1" dirty="0">
+                <a:solidFill>
+                  <a:srgbClr val="595959"/>
+                </a:solidFill>
+                <a:latin typeface="Arial"/>
+                <a:cs typeface="Arial"/>
+              </a:rPr>
+              <a:t>Ba thuật ngữ anh chị sẽ gặp trong mọi bài báo về sống còn. KM = Kaplan-Meier. HR = tỷ số nguy cơ tức thời.</a:t>
+            </a:r>
+          </a:p>
+        </p:txBody>
+      </p:sp>
+      <p:sp>
+        <p:nvSpPr>
+          <p:cNvPr id="70" name="CardHead"/>
           <p:cNvSpPr/>
           <p:nvPr/>
         </p:nvSpPr>
         <p:spPr>
           <a:xfrm>
-            <a:off x="457200" y="5390000"/>
-            <a:ext cx="11277600" cy="560000"/>
-          </a:xfrm>
-          <a:prstGeom prst="roundRect">
-            <a:avLst>
-              <a:gd name="adj" fmla="val 12000"/>
-            </a:avLst>
+            <a:off x="457200" y="2209021"/>
+            <a:ext cx="3625866" cy="640000"/>
+          </a:xfrm>
+          <a:prstGeom prst="rect">
+            <a:avLst/>
           </a:prstGeom>
           <a:solidFill>
             <a:srgbClr val="0D7377"/>
@@ -34967,6 +33847,389 @@
           </a:ln>
         </p:spPr>
         <p:txBody>
+          <a:bodyPr wrap="square" lIns="91440" tIns="45720" rIns="91440" bIns="45720" rtlCol="0" anchor="ctr">
+            <a:normAutofit/>
+          </a:bodyPr>
+          <a:lstStyle/>
+          <a:p>
+            <a:pPr marL="0" indent="0" algn="ctr">
+              <a:buNone/>
+            </a:pPr>
+            <a:r>
+              <a:rPr lang="en-US" sz="1900" b="1" dirty="0">
+                <a:solidFill>
+                  <a:srgbClr val="FFFFFF"/>
+                </a:solidFill>
+                <a:latin typeface="Arial"/>
+                <a:cs typeface="Arial"/>
+              </a:rPr>
+              <a:t>Kiểm định log-rank</a:t>
+            </a:r>
+          </a:p>
+        </p:txBody>
+      </p:sp>
+      <p:sp>
+        <p:nvSpPr>
+          <p:cNvPr id="71" name="CardBody"/>
+          <p:cNvSpPr/>
+          <p:nvPr/>
+        </p:nvSpPr>
+        <p:spPr>
+          <a:xfrm>
+            <a:off x="457200" y="2849021"/>
+            <a:ext cx="3625866" cy="1596529"/>
+          </a:xfrm>
+          <a:prstGeom prst="rect">
+            <a:avLst/>
+          </a:prstGeom>
+          <a:solidFill>
+            <a:srgbClr val="EAF2F5"/>
+          </a:solidFill>
+          <a:ln>
+            <a:noFill/>
+          </a:ln>
+        </p:spPr>
+        <p:txBody>
+          <a:bodyPr wrap="square" lIns="137160" tIns="91440" rIns="137160" bIns="91440" rtlCol="0" anchor="ctr">
+            <a:normAutofit/>
+          </a:bodyPr>
+          <a:lstStyle/>
+          <a:p>
+            <a:pPr marL="0" indent="0" algn="ctr">
+              <a:lnSpc>
+                <a:spcPct val="104000"/>
+              </a:lnSpc>
+              <a:spcBef>
+                <a:spcPts val="400"/>
+              </a:spcBef>
+              <a:buNone/>
+            </a:pPr>
+            <a:r>
+              <a:rPr lang="en-US" sz="1750" dirty="0">
+                <a:solidFill>
+                  <a:srgbClr val="000000"/>
+                </a:solidFill>
+                <a:latin typeface="Arial"/>
+                <a:cs typeface="Arial"/>
+              </a:rPr>
+              <a:t>So sánh toàn bộ đường KM</a:t>
+            </a:r>
+          </a:p>
+          <a:p>
+            <a:pPr marL="0" indent="0" algn="ctr">
+              <a:lnSpc>
+                <a:spcPct val="104000"/>
+              </a:lnSpc>
+              <a:spcBef>
+                <a:spcPts val="400"/>
+              </a:spcBef>
+              <a:buNone/>
+            </a:pPr>
+            <a:r>
+              <a:rPr lang="en-US" sz="1750" dirty="0">
+                <a:solidFill>
+                  <a:srgbClr val="000000"/>
+                </a:solidFill>
+                <a:latin typeface="Arial"/>
+                <a:cs typeface="Arial"/>
+              </a:rPr>
+              <a:t>Cho giá trị p</a:t>
+            </a:r>
+          </a:p>
+          <a:p>
+            <a:pPr marL="0" indent="0" algn="ctr">
+              <a:lnSpc>
+                <a:spcPct val="104000"/>
+              </a:lnSpc>
+              <a:spcBef>
+                <a:spcPts val="400"/>
+              </a:spcBef>
+              <a:buNone/>
+            </a:pPr>
+            <a:r>
+              <a:rPr lang="en-US" sz="1750" dirty="0">
+                <a:solidFill>
+                  <a:srgbClr val="000000"/>
+                </a:solidFill>
+                <a:latin typeface="Arial"/>
+                <a:cs typeface="Arial"/>
+              </a:rPr>
+              <a:t>Không cho độ lớn, không hiệu chỉnh</a:t>
+            </a:r>
+          </a:p>
+        </p:txBody>
+      </p:sp>
+      <p:sp>
+        <p:nvSpPr>
+          <p:cNvPr id="72" name="CardHead"/>
+          <p:cNvSpPr/>
+          <p:nvPr/>
+        </p:nvSpPr>
+        <p:spPr>
+          <a:xfrm>
+            <a:off x="4283066" y="2209021"/>
+            <a:ext cx="3625866" cy="640000"/>
+          </a:xfrm>
+          <a:prstGeom prst="rect">
+            <a:avLst/>
+          </a:prstGeom>
+          <a:solidFill>
+            <a:srgbClr val="0B376C"/>
+          </a:solidFill>
+          <a:ln>
+            <a:noFill/>
+          </a:ln>
+        </p:spPr>
+        <p:txBody>
+          <a:bodyPr wrap="square" lIns="91440" tIns="45720" rIns="91440" bIns="45720" rtlCol="0" anchor="ctr">
+            <a:normAutofit/>
+          </a:bodyPr>
+          <a:lstStyle/>
+          <a:p>
+            <a:pPr marL="0" indent="0" algn="ctr">
+              <a:buNone/>
+            </a:pPr>
+            <a:r>
+              <a:rPr lang="en-US" sz="1900" b="1" dirty="0">
+                <a:solidFill>
+                  <a:srgbClr val="FFFFFF"/>
+                </a:solidFill>
+                <a:latin typeface="Arial"/>
+                <a:cs typeface="Arial"/>
+              </a:rPr>
+              <a:t>Hồi quy Cox</a:t>
+            </a:r>
+          </a:p>
+        </p:txBody>
+      </p:sp>
+      <p:sp>
+        <p:nvSpPr>
+          <p:cNvPr id="73" name="CardBody"/>
+          <p:cNvSpPr/>
+          <p:nvPr/>
+        </p:nvSpPr>
+        <p:spPr>
+          <a:xfrm>
+            <a:off x="4283066" y="2849021"/>
+            <a:ext cx="3625866" cy="1596529"/>
+          </a:xfrm>
+          <a:prstGeom prst="rect">
+            <a:avLst/>
+          </a:prstGeom>
+          <a:solidFill>
+            <a:srgbClr val="EAF2F5"/>
+          </a:solidFill>
+          <a:ln>
+            <a:noFill/>
+          </a:ln>
+        </p:spPr>
+        <p:txBody>
+          <a:bodyPr wrap="square" lIns="137160" tIns="91440" rIns="137160" bIns="91440" rtlCol="0" anchor="ctr">
+            <a:normAutofit/>
+          </a:bodyPr>
+          <a:lstStyle/>
+          <a:p>
+            <a:pPr marL="0" indent="0" algn="ctr">
+              <a:lnSpc>
+                <a:spcPct val="104000"/>
+              </a:lnSpc>
+              <a:spcBef>
+                <a:spcPts val="400"/>
+              </a:spcBef>
+              <a:buNone/>
+            </a:pPr>
+            <a:r>
+              <a:rPr lang="en-US" sz="1750" dirty="0">
+                <a:solidFill>
+                  <a:srgbClr val="000000"/>
+                </a:solidFill>
+                <a:latin typeface="Arial"/>
+                <a:cs typeface="Arial"/>
+              </a:rPr>
+              <a:t>Cho HR kèm KTC 95%</a:t>
+            </a:r>
+          </a:p>
+          <a:p>
+            <a:pPr marL="0" indent="0" algn="ctr">
+              <a:lnSpc>
+                <a:spcPct val="104000"/>
+              </a:lnSpc>
+              <a:spcBef>
+                <a:spcPts val="400"/>
+              </a:spcBef>
+              <a:buNone/>
+            </a:pPr>
+            <a:r>
+              <a:rPr lang="en-US" sz="1750" dirty="0">
+                <a:solidFill>
+                  <a:srgbClr val="000000"/>
+                </a:solidFill>
+                <a:latin typeface="Arial"/>
+                <a:cs typeface="Arial"/>
+              </a:rPr>
+              <a:t>Không tác động = 1</a:t>
+            </a:r>
+          </a:p>
+          <a:p>
+            <a:pPr marL="0" indent="0" algn="ctr">
+              <a:lnSpc>
+                <a:spcPct val="104000"/>
+              </a:lnSpc>
+              <a:spcBef>
+                <a:spcPts val="400"/>
+              </a:spcBef>
+              <a:buNone/>
+            </a:pPr>
+            <a:r>
+              <a:rPr lang="en-US" sz="1750" dirty="0">
+                <a:solidFill>
+                  <a:srgbClr val="000000"/>
+                </a:solidFill>
+                <a:latin typeface="Arial"/>
+                <a:cs typeface="Arial"/>
+              </a:rPr>
+              <a:t>Hiệu chỉnh được yếu tố gây nhiễu</a:t>
+            </a:r>
+          </a:p>
+        </p:txBody>
+      </p:sp>
+      <p:sp>
+        <p:nvSpPr>
+          <p:cNvPr id="74" name="CardHead"/>
+          <p:cNvSpPr/>
+          <p:nvPr/>
+        </p:nvSpPr>
+        <p:spPr>
+          <a:xfrm>
+            <a:off x="8108932" y="2209021"/>
+            <a:ext cx="3625866" cy="640000"/>
+          </a:xfrm>
+          <a:prstGeom prst="rect">
+            <a:avLst/>
+          </a:prstGeom>
+          <a:solidFill>
+            <a:srgbClr val="5FA39B"/>
+          </a:solidFill>
+          <a:ln>
+            <a:noFill/>
+          </a:ln>
+        </p:spPr>
+        <p:txBody>
+          <a:bodyPr wrap="square" lIns="91440" tIns="45720" rIns="91440" bIns="45720" rtlCol="0" anchor="ctr">
+            <a:normAutofit/>
+          </a:bodyPr>
+          <a:lstStyle/>
+          <a:p>
+            <a:pPr marL="0" indent="0" algn="ctr">
+              <a:buNone/>
+            </a:pPr>
+            <a:r>
+              <a:rPr lang="en-US" sz="1900" b="1" dirty="0">
+                <a:solidFill>
+                  <a:srgbClr val="FFFFFF"/>
+                </a:solidFill>
+                <a:latin typeface="Arial"/>
+                <a:cs typeface="Arial"/>
+              </a:rPr>
+              <a:t>Nguy cơ tỷ lệ</a:t>
+            </a:r>
+          </a:p>
+        </p:txBody>
+      </p:sp>
+      <p:sp>
+        <p:nvSpPr>
+          <p:cNvPr id="75" name="CardBody"/>
+          <p:cNvSpPr/>
+          <p:nvPr/>
+        </p:nvSpPr>
+        <p:spPr>
+          <a:xfrm>
+            <a:off x="8108932" y="2849021"/>
+            <a:ext cx="3625866" cy="1596529"/>
+          </a:xfrm>
+          <a:prstGeom prst="rect">
+            <a:avLst/>
+          </a:prstGeom>
+          <a:solidFill>
+            <a:srgbClr val="EAF2F5"/>
+          </a:solidFill>
+          <a:ln>
+            <a:noFill/>
+          </a:ln>
+        </p:spPr>
+        <p:txBody>
+          <a:bodyPr wrap="square" lIns="137160" tIns="91440" rIns="137160" bIns="91440" rtlCol="0" anchor="ctr">
+            <a:normAutofit/>
+          </a:bodyPr>
+          <a:lstStyle/>
+          <a:p>
+            <a:pPr marL="0" indent="0" algn="ctr">
+              <a:lnSpc>
+                <a:spcPct val="104000"/>
+              </a:lnSpc>
+              <a:spcBef>
+                <a:spcPts val="400"/>
+              </a:spcBef>
+              <a:buNone/>
+            </a:pPr>
+            <a:r>
+              <a:rPr lang="en-US" sz="1750" dirty="0">
+                <a:solidFill>
+                  <a:srgbClr val="000000"/>
+                </a:solidFill>
+                <a:latin typeface="Arial"/>
+                <a:cs typeface="Arial"/>
+              </a:rPr>
+              <a:t>Giả định HR không đổi theo thời gian</a:t>
+            </a:r>
+          </a:p>
+          <a:p>
+            <a:pPr marL="0" indent="0" algn="ctr">
+              <a:lnSpc>
+                <a:spcPct val="104000"/>
+              </a:lnSpc>
+              <a:spcBef>
+                <a:spcPts val="400"/>
+              </a:spcBef>
+              <a:buNone/>
+            </a:pPr>
+            <a:r>
+              <a:rPr lang="en-US" sz="1750" dirty="0">
+                <a:solidFill>
+                  <a:srgbClr val="000000"/>
+                </a:solidFill>
+                <a:latin typeface="Arial"/>
+                <a:cs typeface="Arial"/>
+              </a:rPr>
+              <a:t>Đường cong cắt nhau: thận trọng</a:t>
+            </a:r>
+          </a:p>
+        </p:txBody>
+      </p:sp>
+      <p:sp>
+        <p:nvSpPr>
+          <p:cNvPr id="60" name="Takeaway"/>
+          <p:cNvSpPr/>
+          <p:nvPr/>
+        </p:nvSpPr>
+        <p:spPr>
+          <a:xfrm>
+            <a:off x="457200" y="5390000"/>
+            <a:ext cx="11277600" cy="560000"/>
+          </a:xfrm>
+          <a:prstGeom prst="roundRect">
+            <a:avLst>
+              <a:gd name="adj" fmla="val 12000"/>
+            </a:avLst>
+          </a:prstGeom>
+          <a:solidFill>
+            <a:srgbClr val="0D7377"/>
+          </a:solidFill>
+          <a:ln>
+            <a:noFill/>
+          </a:ln>
+        </p:spPr>
+        <p:txBody>
           <a:bodyPr wrap="square" lIns="182880" tIns="45720" rIns="182880" bIns="45720" rtlCol="0" anchor="ctr">
             <a:normAutofit/>
           </a:bodyPr>
@@ -34993,7 +34256,7 @@
                 <a:latin typeface="Arial"/>
                 <a:cs typeface="Arial"/>
               </a:rPr>
-              <a:t>r cao không có nghĩa hai phương pháp đồng thuận, hay cái này gây ra cái kia.</a:t>
+              <a:t>Bài báo 2 (Hyun 2023): HR từ mô hình Cox 2.13 (1.48-3.06), nguy cơ tử vong khoảng gấp đôi.</a:t>
             </a:r>
           </a:p>
         </p:txBody>
@@ -35161,7 +34424,7 @@
                 <a:latin typeface="Arial"/>
                 <a:cs typeface="Arial"/>
               </a:rPr>
-              <a:t>Bổ sung: Tương tác trong mô hình: tác động có khác nhau giữa các nhóm?</a:t>
+              <a:t>Bổ sung: Tương quan không phải đồng thuận, cũng không phải nhân quả</a:t>
             </a:r>
           </a:p>
         </p:txBody>
@@ -35210,8 +34473,8 @@
         </p:blipFill>
         <p:spPr>
           <a:xfrm>
-            <a:off x="677066" y="1150000"/>
-            <a:ext cx="10837867" cy="4150000"/>
+            <a:off x="908500" y="1150000"/>
+            <a:ext cx="10375000" cy="4150000"/>
           </a:xfrm>
           <a:prstGeom prst="rect">
             <a:avLst/>
@@ -35268,7 +34531,7 @@
                 <a:latin typeface="Arial"/>
                 <a:cs typeface="Arial"/>
               </a:rPr>
-              <a:t>Đường song song: hiệu chỉnh. Độ dốc khác nhau: báo cáo tác động theo từng nhóm.</a:t>
+              <a:t>r cao không có nghĩa hai phương pháp đồng thuận, hay cái này gây ra cái kia.</a:t>
             </a:r>
           </a:p>
         </p:txBody>
@@ -35429,14 +34692,14 @@
               <a:buNone/>
             </a:pPr>
             <a:r>
-              <a:rPr lang="en-US" sz="2400" b="1" dirty="0">
+              <a:rPr lang="en-US" sz="2100" b="1" dirty="0">
                 <a:solidFill>
                   <a:srgbClr val="0D7377"/>
                 </a:solidFill>
                 <a:latin typeface="Arial"/>
                 <a:cs typeface="Arial"/>
               </a:rPr>
-              <a:t>Bổ sung: Đường 'không tác động': 0 cho hiệu số, 1 cho tỷ số</a:t>
+              <a:t>Bổ sung: Tương tác trong mô hình: tác động có khác nhau giữa các nhóm?</a:t>
             </a:r>
           </a:p>
         </p:txBody>
@@ -35543,7 +34806,7 @@
                 <a:latin typeface="Arial"/>
                 <a:cs typeface="Arial"/>
               </a:rPr>
-              <a:t>Tìm giá trị không tác động trước, rồi xem KTC có cắt qua nó không.</a:t>
+              <a:t>Đường song song: hiệu chỉnh. Độ dốc khác nhau: báo cáo tác động theo từng nhóm.</a:t>
             </a:r>
           </a:p>
         </p:txBody>
@@ -36403,7 +35666,7 @@
                 <a:latin typeface="Arial"/>
                 <a:cs typeface="Arial"/>
               </a:rPr>
-              <a:t>Bổ sung: Mô hình dự báo: khả năng phân biệt và hiệu chuẩn</a:t>
+              <a:t>Bổ sung: Đường 'không tác động': 0 cho hiệu số, 1 cho tỷ số</a:t>
             </a:r>
           </a:p>
         </p:txBody>
@@ -36510,7 +35773,7 @@
                 <a:latin typeface="Arial"/>
                 <a:cs typeface="Arial"/>
               </a:rPr>
-              <a:t>Mô hình dự báo tốt phân biệt được người bệnh và ước đúng nguy cơ, cả ở bệnh viện mới.</a:t>
+              <a:t>Tìm giá trị không tác động trước, rồi xem KTC có cắt qua nó không.</a:t>
             </a:r>
           </a:p>
         </p:txBody>
@@ -36671,14 +35934,14 @@
               <a:buNone/>
             </a:pPr>
             <a:r>
-              <a:rPr lang="en-US" sz="2800" b="1" dirty="0">
+              <a:rPr lang="en-US" sz="2400" b="1" dirty="0">
                 <a:solidFill>
                   <a:srgbClr val="0D7377"/>
                 </a:solidFill>
                 <a:latin typeface="Arial"/>
                 <a:cs typeface="Arial"/>
               </a:rPr>
-              <a:t>Bổ sung: Dự báo và học máy: cách đánh giá một mô hình</a:t>
+              <a:t>Bổ sung: Mô hình dự báo: khả năng phân biệt và hiệu chuẩn</a:t>
             </a:r>
           </a:p>
         </p:txBody>
@@ -36711,58 +35974,45 @@
           </a:p>
         </p:txBody>
       </p:sp>
-      <p:sp>
-        <p:nvSpPr>
-          <p:cNvPr id="19" name="Intro"/>
-          <p:cNvSpPr txBox="1"/>
-          <p:nvPr/>
-        </p:nvSpPr>
-        <p:spPr>
-          <a:xfrm>
-            <a:off x="457200" y="1100000"/>
-            <a:ext cx="11277600" cy="480000"/>
+      <p:pic>
+        <p:nvPicPr>
+          <p:cNvPr id="25" name="Figure"/>
+          <p:cNvPicPr>
+            <a:picLocks noChangeAspect="1"/>
+          </p:cNvPicPr>
+          <p:nvPr/>
+        </p:nvPicPr>
+        <p:blipFill>
+          <a:blip r:embed="rId4"/>
+          <a:stretch>
+            <a:fillRect/>
+          </a:stretch>
+        </p:blipFill>
+        <p:spPr>
+          <a:xfrm>
+            <a:off x="677066" y="1150000"/>
+            <a:ext cx="10837867" cy="4150000"/>
           </a:xfrm>
           <a:prstGeom prst="rect">
             <a:avLst/>
           </a:prstGeom>
-          <a:noFill/>
-          <a:ln>
-            <a:noFill/>
-          </a:ln>
-        </p:spPr>
-        <p:txBody>
-          <a:bodyPr wrap="square" lIns="91440" tIns="45720" rIns="91440" bIns="45720" rtlCol="0" anchor="t"/>
-          <a:lstStyle/>
-          <a:p>
-            <a:pPr marL="0" indent="0" algn="l">
-              <a:buNone/>
-            </a:pPr>
-            <a:r>
-              <a:rPr lang="en-US" sz="1700" i="1" dirty="0">
-                <a:solidFill>
-                  <a:srgbClr val="595959"/>
-                </a:solidFill>
-                <a:latin typeface="Arial"/>
-                <a:cs typeface="Arial"/>
-              </a:rPr>
-              <a:t>Học máy (ML) là cách linh hoạt để xây dựng mô hình dự báo. Các câu hỏi vẫn như cũ.</a:t>
-            </a:r>
-          </a:p>
-        </p:txBody>
-      </p:sp>
-      <p:sp>
-        <p:nvSpPr>
-          <p:cNvPr id="70" name="CardHead"/>
+        </p:spPr>
+      </p:pic>
+      <p:sp>
+        <p:nvSpPr>
+          <p:cNvPr id="60" name="Takeaway"/>
           <p:cNvSpPr/>
           <p:nvPr/>
         </p:nvSpPr>
         <p:spPr>
           <a:xfrm>
-            <a:off x="457200" y="1973573"/>
-            <a:ext cx="2669400" cy="640000"/>
-          </a:xfrm>
-          <a:prstGeom prst="rect">
-            <a:avLst/>
+            <a:off x="457200" y="5390000"/>
+            <a:ext cx="11277600" cy="560000"/>
+          </a:xfrm>
+          <a:prstGeom prst="roundRect">
+            <a:avLst>
+              <a:gd name="adj" fmla="val 12000"/>
+            </a:avLst>
           </a:prstGeom>
           <a:solidFill>
             <a:srgbClr val="0D7377"/>
@@ -36772,544 +36022,6 @@
           </a:ln>
         </p:spPr>
         <p:txBody>
-          <a:bodyPr wrap="square" lIns="91440" tIns="45720" rIns="91440" bIns="45720" rtlCol="0" anchor="ctr">
-            <a:normAutofit/>
-          </a:bodyPr>
-          <a:lstStyle/>
-          <a:p>
-            <a:pPr marL="0" indent="0" algn="ctr">
-              <a:buNone/>
-            </a:pPr>
-            <a:r>
-              <a:rPr lang="en-US" sz="1700" b="1" dirty="0">
-                <a:solidFill>
-                  <a:srgbClr val="FFFFFF"/>
-                </a:solidFill>
-                <a:latin typeface="Arial"/>
-                <a:cs typeface="Arial"/>
-              </a:rPr>
-              <a:t>Dùng để làm gì?</a:t>
-            </a:r>
-          </a:p>
-        </p:txBody>
-      </p:sp>
-      <p:sp>
-        <p:nvSpPr>
-          <p:cNvPr id="71" name="CardBody"/>
-          <p:cNvSpPr/>
-          <p:nvPr/>
-        </p:nvSpPr>
-        <p:spPr>
-          <a:xfrm>
-            <a:off x="457200" y="2613573"/>
-            <a:ext cx="2669400" cy="2009280"/>
-          </a:xfrm>
-          <a:prstGeom prst="rect">
-            <a:avLst/>
-          </a:prstGeom>
-          <a:solidFill>
-            <a:srgbClr val="EAF2F5"/>
-          </a:solidFill>
-          <a:ln>
-            <a:noFill/>
-          </a:ln>
-        </p:spPr>
-        <p:txBody>
-          <a:bodyPr wrap="square" lIns="137160" tIns="91440" rIns="137160" bIns="91440" rtlCol="0" anchor="ctr">
-            <a:normAutofit/>
-          </a:bodyPr>
-          <a:lstStyle/>
-          <a:p>
-            <a:pPr marL="0" indent="0" algn="ctr">
-              <a:lnSpc>
-                <a:spcPct val="104000"/>
-              </a:lnSpc>
-              <a:spcBef>
-                <a:spcPts val="400"/>
-              </a:spcBef>
-              <a:buNone/>
-            </a:pPr>
-            <a:r>
-              <a:rPr lang="en-US" sz="1600" dirty="0">
-                <a:solidFill>
-                  <a:srgbClr val="000000"/>
-                </a:solidFill>
-                <a:latin typeface="Arial"/>
-                <a:cs typeface="Arial"/>
-              </a:rPr>
-              <a:t>Dự đoán nguy cơ từng người</a:t>
-            </a:r>
-          </a:p>
-          <a:p>
-            <a:pPr marL="0" indent="0" algn="ctr">
-              <a:lnSpc>
-                <a:spcPct val="104000"/>
-              </a:lnSpc>
-              <a:spcBef>
-                <a:spcPts val="400"/>
-              </a:spcBef>
-              <a:buNone/>
-            </a:pPr>
-            <a:r>
-              <a:rPr lang="en-US" sz="1600" dirty="0">
-                <a:solidFill>
-                  <a:srgbClr val="000000"/>
-                </a:solidFill>
-                <a:latin typeface="Arial"/>
-                <a:cs typeface="Arial"/>
-              </a:rPr>
-              <a:t>Không để giải thích nguyên nhân</a:t>
-            </a:r>
-          </a:p>
-          <a:p>
-            <a:pPr marL="0" indent="0" algn="ctr">
-              <a:lnSpc>
-                <a:spcPct val="104000"/>
-              </a:lnSpc>
-              <a:spcBef>
-                <a:spcPts val="400"/>
-              </a:spcBef>
-              <a:buNone/>
-            </a:pPr>
-            <a:r>
-              <a:rPr lang="en-US" sz="1600" dirty="0">
-                <a:solidFill>
-                  <a:srgbClr val="000000"/>
-                </a:solidFill>
-                <a:latin typeface="Arial"/>
-                <a:cs typeface="Arial"/>
-              </a:rPr>
-              <a:t>Cho ai, khi nào, quyết định gì?</a:t>
-            </a:r>
-          </a:p>
-        </p:txBody>
-      </p:sp>
-      <p:sp>
-        <p:nvSpPr>
-          <p:cNvPr id="72" name="CardHead"/>
-          <p:cNvSpPr/>
-          <p:nvPr/>
-        </p:nvSpPr>
-        <p:spPr>
-          <a:xfrm>
-            <a:off x="3326600" y="1973573"/>
-            <a:ext cx="2669400" cy="640000"/>
-          </a:xfrm>
-          <a:prstGeom prst="rect">
-            <a:avLst/>
-          </a:prstGeom>
-          <a:solidFill>
-            <a:srgbClr val="0B376C"/>
-          </a:solidFill>
-          <a:ln>
-            <a:noFill/>
-          </a:ln>
-        </p:spPr>
-        <p:txBody>
-          <a:bodyPr wrap="square" lIns="91440" tIns="45720" rIns="91440" bIns="45720" rtlCol="0" anchor="ctr">
-            <a:normAutofit/>
-          </a:bodyPr>
-          <a:lstStyle/>
-          <a:p>
-            <a:pPr marL="0" indent="0" algn="ctr">
-              <a:buNone/>
-            </a:pPr>
-            <a:r>
-              <a:rPr lang="en-US" sz="1700" b="1" dirty="0">
-                <a:solidFill>
-                  <a:srgbClr val="FFFFFF"/>
-                </a:solidFill>
-                <a:latin typeface="Arial"/>
-                <a:cs typeface="Arial"/>
-              </a:rPr>
-              <a:t>Đủ dữ liệu?</a:t>
-            </a:r>
-          </a:p>
-        </p:txBody>
-      </p:sp>
-      <p:sp>
-        <p:nvSpPr>
-          <p:cNvPr id="73" name="CardBody"/>
-          <p:cNvSpPr/>
-          <p:nvPr/>
-        </p:nvSpPr>
-        <p:spPr>
-          <a:xfrm>
-            <a:off x="3326600" y="2613573"/>
-            <a:ext cx="2669400" cy="2009280"/>
-          </a:xfrm>
-          <a:prstGeom prst="rect">
-            <a:avLst/>
-          </a:prstGeom>
-          <a:solidFill>
-            <a:srgbClr val="EAF2F5"/>
-          </a:solidFill>
-          <a:ln>
-            <a:noFill/>
-          </a:ln>
-        </p:spPr>
-        <p:txBody>
-          <a:bodyPr wrap="square" lIns="137160" tIns="91440" rIns="137160" bIns="91440" rtlCol="0" anchor="ctr">
-            <a:normAutofit/>
-          </a:bodyPr>
-          <a:lstStyle/>
-          <a:p>
-            <a:pPr marL="0" indent="0" algn="ctr">
-              <a:lnSpc>
-                <a:spcPct val="104000"/>
-              </a:lnSpc>
-              <a:spcBef>
-                <a:spcPts val="400"/>
-              </a:spcBef>
-              <a:buNone/>
-            </a:pPr>
-            <a:r>
-              <a:rPr lang="en-US" sz="1600" dirty="0">
-                <a:solidFill>
-                  <a:srgbClr val="000000"/>
-                </a:solidFill>
-                <a:latin typeface="Arial"/>
-                <a:cs typeface="Arial"/>
-              </a:rPr>
-              <a:t>Học máy cần rất nhiều biến cố</a:t>
-            </a:r>
-          </a:p>
-          <a:p>
-            <a:pPr marL="0" indent="0" algn="ctr">
-              <a:lnSpc>
-                <a:spcPct val="104000"/>
-              </a:lnSpc>
-              <a:spcBef>
-                <a:spcPts val="400"/>
-              </a:spcBef>
-              <a:buNone/>
-            </a:pPr>
-            <a:r>
-              <a:rPr lang="en-US" sz="1600" dirty="0">
-                <a:solidFill>
-                  <a:srgbClr val="000000"/>
-                </a:solidFill>
-                <a:latin typeface="Arial"/>
-                <a:cs typeface="Arial"/>
-              </a:rPr>
-              <a:t>Nguy cơ quá khớp cao</a:t>
-            </a:r>
-          </a:p>
-          <a:p>
-            <a:pPr marL="0" indent="0" algn="ctr">
-              <a:lnSpc>
-                <a:spcPct val="104000"/>
-              </a:lnSpc>
-              <a:spcBef>
-                <a:spcPts val="400"/>
-              </a:spcBef>
-              <a:buNone/>
-            </a:pPr>
-            <a:r>
-              <a:rPr lang="en-US" sz="1600" dirty="0">
-                <a:solidFill>
-                  <a:srgbClr val="000000"/>
-                </a:solidFill>
-                <a:latin typeface="Arial"/>
-                <a:cs typeface="Arial"/>
-              </a:rPr>
-              <a:t>Đã thẩm định nội bộ?</a:t>
-            </a:r>
-          </a:p>
-        </p:txBody>
-      </p:sp>
-      <p:sp>
-        <p:nvSpPr>
-          <p:cNvPr id="74" name="CardHead"/>
-          <p:cNvSpPr/>
-          <p:nvPr/>
-        </p:nvSpPr>
-        <p:spPr>
-          <a:xfrm>
-            <a:off x="6196000" y="1973573"/>
-            <a:ext cx="2669400" cy="640000"/>
-          </a:xfrm>
-          <a:prstGeom prst="rect">
-            <a:avLst/>
-          </a:prstGeom>
-          <a:solidFill>
-            <a:srgbClr val="5FA39B"/>
-          </a:solidFill>
-          <a:ln>
-            <a:noFill/>
-          </a:ln>
-        </p:spPr>
-        <p:txBody>
-          <a:bodyPr wrap="square" lIns="91440" tIns="45720" rIns="91440" bIns="45720" rtlCol="0" anchor="ctr">
-            <a:normAutofit/>
-          </a:bodyPr>
-          <a:lstStyle/>
-          <a:p>
-            <a:pPr marL="0" indent="0" algn="ctr">
-              <a:buNone/>
-            </a:pPr>
-            <a:r>
-              <a:rPr lang="en-US" sz="1700" b="1" dirty="0">
-                <a:solidFill>
-                  <a:srgbClr val="FFFFFF"/>
-                </a:solidFill>
-                <a:latin typeface="Arial"/>
-                <a:cs typeface="Arial"/>
-              </a:rPr>
-              <a:t>Có hiệu quả?</a:t>
-            </a:r>
-          </a:p>
-        </p:txBody>
-      </p:sp>
-      <p:sp>
-        <p:nvSpPr>
-          <p:cNvPr id="75" name="CardBody"/>
-          <p:cNvSpPr/>
-          <p:nvPr/>
-        </p:nvSpPr>
-        <p:spPr>
-          <a:xfrm>
-            <a:off x="6196000" y="2613573"/>
-            <a:ext cx="2669400" cy="2009280"/>
-          </a:xfrm>
-          <a:prstGeom prst="rect">
-            <a:avLst/>
-          </a:prstGeom>
-          <a:solidFill>
-            <a:srgbClr val="EAF2F5"/>
-          </a:solidFill>
-          <a:ln>
-            <a:noFill/>
-          </a:ln>
-        </p:spPr>
-        <p:txBody>
-          <a:bodyPr wrap="square" lIns="137160" tIns="91440" rIns="137160" bIns="91440" rtlCol="0" anchor="ctr">
-            <a:normAutofit/>
-          </a:bodyPr>
-          <a:lstStyle/>
-          <a:p>
-            <a:pPr marL="0" indent="0" algn="ctr">
-              <a:lnSpc>
-                <a:spcPct val="104000"/>
-              </a:lnSpc>
-              <a:spcBef>
-                <a:spcPts val="400"/>
-              </a:spcBef>
-              <a:buNone/>
-            </a:pPr>
-            <a:r>
-              <a:rPr lang="en-US" sz="1600" dirty="0">
-                <a:solidFill>
-                  <a:srgbClr val="000000"/>
-                </a:solidFill>
-                <a:latin typeface="Arial"/>
-                <a:cs typeface="Arial"/>
-              </a:rPr>
-              <a:t>Phân biệt (AUC)</a:t>
-            </a:r>
-          </a:p>
-          <a:p>
-            <a:pPr marL="0" indent="0" algn="ctr">
-              <a:lnSpc>
-                <a:spcPct val="104000"/>
-              </a:lnSpc>
-              <a:spcBef>
-                <a:spcPts val="400"/>
-              </a:spcBef>
-              <a:buNone/>
-            </a:pPr>
-            <a:r>
-              <a:rPr lang="en-US" sz="1600" dirty="0">
-                <a:solidFill>
-                  <a:srgbClr val="000000"/>
-                </a:solidFill>
-                <a:latin typeface="Arial"/>
-                <a:cs typeface="Arial"/>
-              </a:rPr>
-              <a:t>Biểu đồ hiệu chuẩn</a:t>
-            </a:r>
-          </a:p>
-          <a:p>
-            <a:pPr marL="0" indent="0" algn="ctr">
-              <a:lnSpc>
-                <a:spcPct val="104000"/>
-              </a:lnSpc>
-              <a:spcBef>
-                <a:spcPts val="400"/>
-              </a:spcBef>
-              <a:buNone/>
-            </a:pPr>
-            <a:r>
-              <a:rPr lang="en-US" sz="1600" dirty="0">
-                <a:solidFill>
-                  <a:srgbClr val="000000"/>
-                </a:solidFill>
-                <a:latin typeface="Arial"/>
-                <a:cs typeface="Arial"/>
-              </a:rPr>
-              <a:t>Thẩm định ngoài</a:t>
-            </a:r>
-          </a:p>
-        </p:txBody>
-      </p:sp>
-      <p:sp>
-        <p:nvSpPr>
-          <p:cNvPr id="76" name="CardHead"/>
-          <p:cNvSpPr/>
-          <p:nvPr/>
-        </p:nvSpPr>
-        <p:spPr>
-          <a:xfrm>
-            <a:off x="9065400" y="1973573"/>
-            <a:ext cx="2669400" cy="640000"/>
-          </a:xfrm>
-          <a:prstGeom prst="rect">
-            <a:avLst/>
-          </a:prstGeom>
-          <a:solidFill>
-            <a:srgbClr val="0070C0"/>
-          </a:solidFill>
-          <a:ln>
-            <a:noFill/>
-          </a:ln>
-        </p:spPr>
-        <p:txBody>
-          <a:bodyPr wrap="square" lIns="91440" tIns="45720" rIns="91440" bIns="45720" rtlCol="0" anchor="ctr">
-            <a:normAutofit/>
-          </a:bodyPr>
-          <a:lstStyle/>
-          <a:p>
-            <a:pPr marL="0" indent="0" algn="ctr">
-              <a:buNone/>
-            </a:pPr>
-            <a:r>
-              <a:rPr lang="en-US" sz="1700" b="1" dirty="0">
-                <a:solidFill>
-                  <a:srgbClr val="FFFFFF"/>
-                </a:solidFill>
-                <a:latin typeface="Arial"/>
-                <a:cs typeface="Arial"/>
-              </a:rPr>
-              <a:t>Báo cáo đủ?</a:t>
-            </a:r>
-          </a:p>
-        </p:txBody>
-      </p:sp>
-      <p:sp>
-        <p:nvSpPr>
-          <p:cNvPr id="77" name="CardBody"/>
-          <p:cNvSpPr/>
-          <p:nvPr/>
-        </p:nvSpPr>
-        <p:spPr>
-          <a:xfrm>
-            <a:off x="9065400" y="2613573"/>
-            <a:ext cx="2669400" cy="2009280"/>
-          </a:xfrm>
-          <a:prstGeom prst="rect">
-            <a:avLst/>
-          </a:prstGeom>
-          <a:solidFill>
-            <a:srgbClr val="EAF2F5"/>
-          </a:solidFill>
-          <a:ln>
-            <a:noFill/>
-          </a:ln>
-        </p:spPr>
-        <p:txBody>
-          <a:bodyPr wrap="square" lIns="137160" tIns="91440" rIns="137160" bIns="91440" rtlCol="0" anchor="ctr">
-            <a:normAutofit/>
-          </a:bodyPr>
-          <a:lstStyle/>
-          <a:p>
-            <a:pPr marL="0" indent="0" algn="ctr">
-              <a:lnSpc>
-                <a:spcPct val="104000"/>
-              </a:lnSpc>
-              <a:spcBef>
-                <a:spcPts val="400"/>
-              </a:spcBef>
-              <a:buNone/>
-            </a:pPr>
-            <a:r>
-              <a:rPr lang="en-US" sz="1600" dirty="0">
-                <a:solidFill>
-                  <a:srgbClr val="000000"/>
-                </a:solidFill>
-                <a:latin typeface="Arial"/>
-                <a:cs typeface="Arial"/>
-              </a:rPr>
-              <a:t>Bảng kiểm TRIPOD+AI</a:t>
-            </a:r>
-          </a:p>
-          <a:p>
-            <a:pPr marL="0" indent="0" algn="ctr">
-              <a:lnSpc>
-                <a:spcPct val="104000"/>
-              </a:lnSpc>
-              <a:spcBef>
-                <a:spcPts val="400"/>
-              </a:spcBef>
-              <a:buNone/>
-            </a:pPr>
-            <a:r>
-              <a:rPr lang="en-US" sz="1600" dirty="0">
-                <a:solidFill>
-                  <a:srgbClr val="000000"/>
-                </a:solidFill>
-                <a:latin typeface="Arial"/>
-                <a:cs typeface="Arial"/>
-              </a:rPr>
-              <a:t>Mã, dữ liệu, công bằng</a:t>
-            </a:r>
-          </a:p>
-          <a:p>
-            <a:pPr marL="0" indent="0" algn="ctr">
-              <a:lnSpc>
-                <a:spcPct val="104000"/>
-              </a:lnSpc>
-              <a:spcBef>
-                <a:spcPts val="400"/>
-              </a:spcBef>
-              <a:buNone/>
-            </a:pPr>
-            <a:r>
-              <a:rPr lang="en-US" sz="1600" dirty="0">
-                <a:solidFill>
-                  <a:srgbClr val="000000"/>
-                </a:solidFill>
-                <a:latin typeface="Arial"/>
-                <a:cs typeface="Arial"/>
-              </a:rPr>
-              <a:t>Tác động lên người bệnh?</a:t>
-            </a:r>
-          </a:p>
-        </p:txBody>
-      </p:sp>
-      <p:sp>
-        <p:nvSpPr>
-          <p:cNvPr id="60" name="Takeaway"/>
-          <p:cNvSpPr/>
-          <p:nvPr/>
-        </p:nvSpPr>
-        <p:spPr>
-          <a:xfrm>
-            <a:off x="457200" y="5390000"/>
-            <a:ext cx="11277600" cy="560000"/>
-          </a:xfrm>
-          <a:prstGeom prst="roundRect">
-            <a:avLst>
-              <a:gd name="adj" fmla="val 12000"/>
-            </a:avLst>
-          </a:prstGeom>
-          <a:solidFill>
-            <a:srgbClr val="0D7377"/>
-          </a:solidFill>
-          <a:ln>
-            <a:noFill/>
-          </a:ln>
-        </p:spPr>
-        <p:txBody>
           <a:bodyPr wrap="square" lIns="182880" tIns="45720" rIns="182880" bIns="45720" rtlCol="0" anchor="ctr">
             <a:normAutofit/>
           </a:bodyPr>
@@ -37336,7 +36048,7 @@
                 <a:latin typeface="Arial"/>
                 <a:cs typeface="Arial"/>
               </a:rPr>
-              <a:t>Điểm AI là một mô hình dự báo: hãy hỏi về hiệu chuẩn và thẩm định ngoài.</a:t>
+              <a:t>Mô hình dự báo tốt phân biệt được người bệnh và ước đúng nguy cơ, cả ở bệnh viện mới.</a:t>
             </a:r>
           </a:p>
         </p:txBody>
@@ -37497,14 +36209,14 @@
               <a:buNone/>
             </a:pPr>
             <a:r>
-              <a:rPr lang="en-US" sz="2400" b="1" dirty="0">
+              <a:rPr lang="en-US" sz="2800" b="1" dirty="0">
                 <a:solidFill>
                   <a:srgbClr val="0D7377"/>
                 </a:solidFill>
                 <a:latin typeface="Arial"/>
                 <a:cs typeface="Arial"/>
               </a:rPr>
-              <a:t>Bổ sung: Phân tích các trường hợp đầy đủ và quy gán đa bội</a:t>
+              <a:t>Bổ sung: Dự báo và học máy: cách đánh giá một mô hình</a:t>
             </a:r>
           </a:p>
         </p:txBody>
@@ -37537,45 +36249,58 @@
           </a:p>
         </p:txBody>
       </p:sp>
-      <p:pic>
-        <p:nvPicPr>
-          <p:cNvPr id="25" name="Figure"/>
-          <p:cNvPicPr>
-            <a:picLocks noChangeAspect="1"/>
-          </p:cNvPicPr>
-          <p:nvPr/>
-        </p:nvPicPr>
-        <p:blipFill>
-          <a:blip r:embed="rId4"/>
-          <a:stretch>
-            <a:fillRect/>
-          </a:stretch>
-        </p:blipFill>
-        <p:spPr>
-          <a:xfrm>
-            <a:off x="677066" y="1150000"/>
-            <a:ext cx="10837867" cy="4150000"/>
+      <p:sp>
+        <p:nvSpPr>
+          <p:cNvPr id="19" name="Intro"/>
+          <p:cNvSpPr txBox="1"/>
+          <p:nvPr/>
+        </p:nvSpPr>
+        <p:spPr>
+          <a:xfrm>
+            <a:off x="457200" y="1100000"/>
+            <a:ext cx="11277600" cy="480000"/>
           </a:xfrm>
           <a:prstGeom prst="rect">
             <a:avLst/>
           </a:prstGeom>
-        </p:spPr>
-      </p:pic>
-      <p:sp>
-        <p:nvSpPr>
-          <p:cNvPr id="60" name="Takeaway"/>
+          <a:noFill/>
+          <a:ln>
+            <a:noFill/>
+          </a:ln>
+        </p:spPr>
+        <p:txBody>
+          <a:bodyPr wrap="square" lIns="91440" tIns="45720" rIns="91440" bIns="45720" rtlCol="0" anchor="t"/>
+          <a:lstStyle/>
+          <a:p>
+            <a:pPr marL="0" indent="0" algn="l">
+              <a:buNone/>
+            </a:pPr>
+            <a:r>
+              <a:rPr lang="en-US" sz="1700" i="1" dirty="0">
+                <a:solidFill>
+                  <a:srgbClr val="595959"/>
+                </a:solidFill>
+                <a:latin typeface="Arial"/>
+                <a:cs typeface="Arial"/>
+              </a:rPr>
+              <a:t>Học máy (ML) là cách linh hoạt để xây dựng mô hình dự báo. Các câu hỏi vẫn như cũ.</a:t>
+            </a:r>
+          </a:p>
+        </p:txBody>
+      </p:sp>
+      <p:sp>
+        <p:nvSpPr>
+          <p:cNvPr id="70" name="CardHead"/>
           <p:cNvSpPr/>
           <p:nvPr/>
         </p:nvSpPr>
         <p:spPr>
           <a:xfrm>
-            <a:off x="457200" y="5390000"/>
-            <a:ext cx="11277600" cy="560000"/>
-          </a:xfrm>
-          <a:prstGeom prst="roundRect">
-            <a:avLst>
-              <a:gd name="adj" fmla="val 12000"/>
-            </a:avLst>
+            <a:off x="457200" y="1973573"/>
+            <a:ext cx="2669400" cy="640000"/>
+          </a:xfrm>
+          <a:prstGeom prst="rect">
+            <a:avLst/>
           </a:prstGeom>
           <a:solidFill>
             <a:srgbClr val="0D7377"/>
@@ -37585,6 +36310,544 @@
           </a:ln>
         </p:spPr>
         <p:txBody>
+          <a:bodyPr wrap="square" lIns="91440" tIns="45720" rIns="91440" bIns="45720" rtlCol="0" anchor="ctr">
+            <a:normAutofit/>
+          </a:bodyPr>
+          <a:lstStyle/>
+          <a:p>
+            <a:pPr marL="0" indent="0" algn="ctr">
+              <a:buNone/>
+            </a:pPr>
+            <a:r>
+              <a:rPr lang="en-US" sz="1700" b="1" dirty="0">
+                <a:solidFill>
+                  <a:srgbClr val="FFFFFF"/>
+                </a:solidFill>
+                <a:latin typeface="Arial"/>
+                <a:cs typeface="Arial"/>
+              </a:rPr>
+              <a:t>Dùng để làm gì?</a:t>
+            </a:r>
+          </a:p>
+        </p:txBody>
+      </p:sp>
+      <p:sp>
+        <p:nvSpPr>
+          <p:cNvPr id="71" name="CardBody"/>
+          <p:cNvSpPr/>
+          <p:nvPr/>
+        </p:nvSpPr>
+        <p:spPr>
+          <a:xfrm>
+            <a:off x="457200" y="2613573"/>
+            <a:ext cx="2669400" cy="2009280"/>
+          </a:xfrm>
+          <a:prstGeom prst="rect">
+            <a:avLst/>
+          </a:prstGeom>
+          <a:solidFill>
+            <a:srgbClr val="EAF2F5"/>
+          </a:solidFill>
+          <a:ln>
+            <a:noFill/>
+          </a:ln>
+        </p:spPr>
+        <p:txBody>
+          <a:bodyPr wrap="square" lIns="137160" tIns="91440" rIns="137160" bIns="91440" rtlCol="0" anchor="ctr">
+            <a:normAutofit/>
+          </a:bodyPr>
+          <a:lstStyle/>
+          <a:p>
+            <a:pPr marL="0" indent="0" algn="ctr">
+              <a:lnSpc>
+                <a:spcPct val="104000"/>
+              </a:lnSpc>
+              <a:spcBef>
+                <a:spcPts val="400"/>
+              </a:spcBef>
+              <a:buNone/>
+            </a:pPr>
+            <a:r>
+              <a:rPr lang="en-US" sz="1600" dirty="0">
+                <a:solidFill>
+                  <a:srgbClr val="000000"/>
+                </a:solidFill>
+                <a:latin typeface="Arial"/>
+                <a:cs typeface="Arial"/>
+              </a:rPr>
+              <a:t>Dự đoán nguy cơ từng người</a:t>
+            </a:r>
+          </a:p>
+          <a:p>
+            <a:pPr marL="0" indent="0" algn="ctr">
+              <a:lnSpc>
+                <a:spcPct val="104000"/>
+              </a:lnSpc>
+              <a:spcBef>
+                <a:spcPts val="400"/>
+              </a:spcBef>
+              <a:buNone/>
+            </a:pPr>
+            <a:r>
+              <a:rPr lang="en-US" sz="1600" dirty="0">
+                <a:solidFill>
+                  <a:srgbClr val="000000"/>
+                </a:solidFill>
+                <a:latin typeface="Arial"/>
+                <a:cs typeface="Arial"/>
+              </a:rPr>
+              <a:t>Không để giải thích nguyên nhân</a:t>
+            </a:r>
+          </a:p>
+          <a:p>
+            <a:pPr marL="0" indent="0" algn="ctr">
+              <a:lnSpc>
+                <a:spcPct val="104000"/>
+              </a:lnSpc>
+              <a:spcBef>
+                <a:spcPts val="400"/>
+              </a:spcBef>
+              <a:buNone/>
+            </a:pPr>
+            <a:r>
+              <a:rPr lang="en-US" sz="1600" dirty="0">
+                <a:solidFill>
+                  <a:srgbClr val="000000"/>
+                </a:solidFill>
+                <a:latin typeface="Arial"/>
+                <a:cs typeface="Arial"/>
+              </a:rPr>
+              <a:t>Cho ai, khi nào, quyết định gì?</a:t>
+            </a:r>
+          </a:p>
+        </p:txBody>
+      </p:sp>
+      <p:sp>
+        <p:nvSpPr>
+          <p:cNvPr id="72" name="CardHead"/>
+          <p:cNvSpPr/>
+          <p:nvPr/>
+        </p:nvSpPr>
+        <p:spPr>
+          <a:xfrm>
+            <a:off x="3326600" y="1973573"/>
+            <a:ext cx="2669400" cy="640000"/>
+          </a:xfrm>
+          <a:prstGeom prst="rect">
+            <a:avLst/>
+          </a:prstGeom>
+          <a:solidFill>
+            <a:srgbClr val="0B376C"/>
+          </a:solidFill>
+          <a:ln>
+            <a:noFill/>
+          </a:ln>
+        </p:spPr>
+        <p:txBody>
+          <a:bodyPr wrap="square" lIns="91440" tIns="45720" rIns="91440" bIns="45720" rtlCol="0" anchor="ctr">
+            <a:normAutofit/>
+          </a:bodyPr>
+          <a:lstStyle/>
+          <a:p>
+            <a:pPr marL="0" indent="0" algn="ctr">
+              <a:buNone/>
+            </a:pPr>
+            <a:r>
+              <a:rPr lang="en-US" sz="1700" b="1" dirty="0">
+                <a:solidFill>
+                  <a:srgbClr val="FFFFFF"/>
+                </a:solidFill>
+                <a:latin typeface="Arial"/>
+                <a:cs typeface="Arial"/>
+              </a:rPr>
+              <a:t>Đủ dữ liệu?</a:t>
+            </a:r>
+          </a:p>
+        </p:txBody>
+      </p:sp>
+      <p:sp>
+        <p:nvSpPr>
+          <p:cNvPr id="73" name="CardBody"/>
+          <p:cNvSpPr/>
+          <p:nvPr/>
+        </p:nvSpPr>
+        <p:spPr>
+          <a:xfrm>
+            <a:off x="3326600" y="2613573"/>
+            <a:ext cx="2669400" cy="2009280"/>
+          </a:xfrm>
+          <a:prstGeom prst="rect">
+            <a:avLst/>
+          </a:prstGeom>
+          <a:solidFill>
+            <a:srgbClr val="EAF2F5"/>
+          </a:solidFill>
+          <a:ln>
+            <a:noFill/>
+          </a:ln>
+        </p:spPr>
+        <p:txBody>
+          <a:bodyPr wrap="square" lIns="137160" tIns="91440" rIns="137160" bIns="91440" rtlCol="0" anchor="ctr">
+            <a:normAutofit/>
+          </a:bodyPr>
+          <a:lstStyle/>
+          <a:p>
+            <a:pPr marL="0" indent="0" algn="ctr">
+              <a:lnSpc>
+                <a:spcPct val="104000"/>
+              </a:lnSpc>
+              <a:spcBef>
+                <a:spcPts val="400"/>
+              </a:spcBef>
+              <a:buNone/>
+            </a:pPr>
+            <a:r>
+              <a:rPr lang="en-US" sz="1600" dirty="0">
+                <a:solidFill>
+                  <a:srgbClr val="000000"/>
+                </a:solidFill>
+                <a:latin typeface="Arial"/>
+                <a:cs typeface="Arial"/>
+              </a:rPr>
+              <a:t>Học máy cần rất nhiều biến cố</a:t>
+            </a:r>
+          </a:p>
+          <a:p>
+            <a:pPr marL="0" indent="0" algn="ctr">
+              <a:lnSpc>
+                <a:spcPct val="104000"/>
+              </a:lnSpc>
+              <a:spcBef>
+                <a:spcPts val="400"/>
+              </a:spcBef>
+              <a:buNone/>
+            </a:pPr>
+            <a:r>
+              <a:rPr lang="en-US" sz="1600" dirty="0">
+                <a:solidFill>
+                  <a:srgbClr val="000000"/>
+                </a:solidFill>
+                <a:latin typeface="Arial"/>
+                <a:cs typeface="Arial"/>
+              </a:rPr>
+              <a:t>Nguy cơ quá khớp cao</a:t>
+            </a:r>
+          </a:p>
+          <a:p>
+            <a:pPr marL="0" indent="0" algn="ctr">
+              <a:lnSpc>
+                <a:spcPct val="104000"/>
+              </a:lnSpc>
+              <a:spcBef>
+                <a:spcPts val="400"/>
+              </a:spcBef>
+              <a:buNone/>
+            </a:pPr>
+            <a:r>
+              <a:rPr lang="en-US" sz="1600" dirty="0">
+                <a:solidFill>
+                  <a:srgbClr val="000000"/>
+                </a:solidFill>
+                <a:latin typeface="Arial"/>
+                <a:cs typeface="Arial"/>
+              </a:rPr>
+              <a:t>Đã thẩm định nội bộ?</a:t>
+            </a:r>
+          </a:p>
+        </p:txBody>
+      </p:sp>
+      <p:sp>
+        <p:nvSpPr>
+          <p:cNvPr id="74" name="CardHead"/>
+          <p:cNvSpPr/>
+          <p:nvPr/>
+        </p:nvSpPr>
+        <p:spPr>
+          <a:xfrm>
+            <a:off x="6196000" y="1973573"/>
+            <a:ext cx="2669400" cy="640000"/>
+          </a:xfrm>
+          <a:prstGeom prst="rect">
+            <a:avLst/>
+          </a:prstGeom>
+          <a:solidFill>
+            <a:srgbClr val="5FA39B"/>
+          </a:solidFill>
+          <a:ln>
+            <a:noFill/>
+          </a:ln>
+        </p:spPr>
+        <p:txBody>
+          <a:bodyPr wrap="square" lIns="91440" tIns="45720" rIns="91440" bIns="45720" rtlCol="0" anchor="ctr">
+            <a:normAutofit/>
+          </a:bodyPr>
+          <a:lstStyle/>
+          <a:p>
+            <a:pPr marL="0" indent="0" algn="ctr">
+              <a:buNone/>
+            </a:pPr>
+            <a:r>
+              <a:rPr lang="en-US" sz="1700" b="1" dirty="0">
+                <a:solidFill>
+                  <a:srgbClr val="FFFFFF"/>
+                </a:solidFill>
+                <a:latin typeface="Arial"/>
+                <a:cs typeface="Arial"/>
+              </a:rPr>
+              <a:t>Có hiệu quả?</a:t>
+            </a:r>
+          </a:p>
+        </p:txBody>
+      </p:sp>
+      <p:sp>
+        <p:nvSpPr>
+          <p:cNvPr id="75" name="CardBody"/>
+          <p:cNvSpPr/>
+          <p:nvPr/>
+        </p:nvSpPr>
+        <p:spPr>
+          <a:xfrm>
+            <a:off x="6196000" y="2613573"/>
+            <a:ext cx="2669400" cy="2009280"/>
+          </a:xfrm>
+          <a:prstGeom prst="rect">
+            <a:avLst/>
+          </a:prstGeom>
+          <a:solidFill>
+            <a:srgbClr val="EAF2F5"/>
+          </a:solidFill>
+          <a:ln>
+            <a:noFill/>
+          </a:ln>
+        </p:spPr>
+        <p:txBody>
+          <a:bodyPr wrap="square" lIns="137160" tIns="91440" rIns="137160" bIns="91440" rtlCol="0" anchor="ctr">
+            <a:normAutofit/>
+          </a:bodyPr>
+          <a:lstStyle/>
+          <a:p>
+            <a:pPr marL="0" indent="0" algn="ctr">
+              <a:lnSpc>
+                <a:spcPct val="104000"/>
+              </a:lnSpc>
+              <a:spcBef>
+                <a:spcPts val="400"/>
+              </a:spcBef>
+              <a:buNone/>
+            </a:pPr>
+            <a:r>
+              <a:rPr lang="en-US" sz="1600" dirty="0">
+                <a:solidFill>
+                  <a:srgbClr val="000000"/>
+                </a:solidFill>
+                <a:latin typeface="Arial"/>
+                <a:cs typeface="Arial"/>
+              </a:rPr>
+              <a:t>Phân biệt (AUC)</a:t>
+            </a:r>
+          </a:p>
+          <a:p>
+            <a:pPr marL="0" indent="0" algn="ctr">
+              <a:lnSpc>
+                <a:spcPct val="104000"/>
+              </a:lnSpc>
+              <a:spcBef>
+                <a:spcPts val="400"/>
+              </a:spcBef>
+              <a:buNone/>
+            </a:pPr>
+            <a:r>
+              <a:rPr lang="en-US" sz="1600" dirty="0">
+                <a:solidFill>
+                  <a:srgbClr val="000000"/>
+                </a:solidFill>
+                <a:latin typeface="Arial"/>
+                <a:cs typeface="Arial"/>
+              </a:rPr>
+              <a:t>Biểu đồ hiệu chuẩn</a:t>
+            </a:r>
+          </a:p>
+          <a:p>
+            <a:pPr marL="0" indent="0" algn="ctr">
+              <a:lnSpc>
+                <a:spcPct val="104000"/>
+              </a:lnSpc>
+              <a:spcBef>
+                <a:spcPts val="400"/>
+              </a:spcBef>
+              <a:buNone/>
+            </a:pPr>
+            <a:r>
+              <a:rPr lang="en-US" sz="1600" dirty="0">
+                <a:solidFill>
+                  <a:srgbClr val="000000"/>
+                </a:solidFill>
+                <a:latin typeface="Arial"/>
+                <a:cs typeface="Arial"/>
+              </a:rPr>
+              <a:t>Thẩm định ngoài</a:t>
+            </a:r>
+          </a:p>
+        </p:txBody>
+      </p:sp>
+      <p:sp>
+        <p:nvSpPr>
+          <p:cNvPr id="76" name="CardHead"/>
+          <p:cNvSpPr/>
+          <p:nvPr/>
+        </p:nvSpPr>
+        <p:spPr>
+          <a:xfrm>
+            <a:off x="9065400" y="1973573"/>
+            <a:ext cx="2669400" cy="640000"/>
+          </a:xfrm>
+          <a:prstGeom prst="rect">
+            <a:avLst/>
+          </a:prstGeom>
+          <a:solidFill>
+            <a:srgbClr val="0070C0"/>
+          </a:solidFill>
+          <a:ln>
+            <a:noFill/>
+          </a:ln>
+        </p:spPr>
+        <p:txBody>
+          <a:bodyPr wrap="square" lIns="91440" tIns="45720" rIns="91440" bIns="45720" rtlCol="0" anchor="ctr">
+            <a:normAutofit/>
+          </a:bodyPr>
+          <a:lstStyle/>
+          <a:p>
+            <a:pPr marL="0" indent="0" algn="ctr">
+              <a:buNone/>
+            </a:pPr>
+            <a:r>
+              <a:rPr lang="en-US" sz="1700" b="1" dirty="0">
+                <a:solidFill>
+                  <a:srgbClr val="FFFFFF"/>
+                </a:solidFill>
+                <a:latin typeface="Arial"/>
+                <a:cs typeface="Arial"/>
+              </a:rPr>
+              <a:t>Báo cáo đủ?</a:t>
+            </a:r>
+          </a:p>
+        </p:txBody>
+      </p:sp>
+      <p:sp>
+        <p:nvSpPr>
+          <p:cNvPr id="77" name="CardBody"/>
+          <p:cNvSpPr/>
+          <p:nvPr/>
+        </p:nvSpPr>
+        <p:spPr>
+          <a:xfrm>
+            <a:off x="9065400" y="2613573"/>
+            <a:ext cx="2669400" cy="2009280"/>
+          </a:xfrm>
+          <a:prstGeom prst="rect">
+            <a:avLst/>
+          </a:prstGeom>
+          <a:solidFill>
+            <a:srgbClr val="EAF2F5"/>
+          </a:solidFill>
+          <a:ln>
+            <a:noFill/>
+          </a:ln>
+        </p:spPr>
+        <p:txBody>
+          <a:bodyPr wrap="square" lIns="137160" tIns="91440" rIns="137160" bIns="91440" rtlCol="0" anchor="ctr">
+            <a:normAutofit/>
+          </a:bodyPr>
+          <a:lstStyle/>
+          <a:p>
+            <a:pPr marL="0" indent="0" algn="ctr">
+              <a:lnSpc>
+                <a:spcPct val="104000"/>
+              </a:lnSpc>
+              <a:spcBef>
+                <a:spcPts val="400"/>
+              </a:spcBef>
+              <a:buNone/>
+            </a:pPr>
+            <a:r>
+              <a:rPr lang="en-US" sz="1600" dirty="0">
+                <a:solidFill>
+                  <a:srgbClr val="000000"/>
+                </a:solidFill>
+                <a:latin typeface="Arial"/>
+                <a:cs typeface="Arial"/>
+              </a:rPr>
+              <a:t>Bảng kiểm TRIPOD+AI</a:t>
+            </a:r>
+          </a:p>
+          <a:p>
+            <a:pPr marL="0" indent="0" algn="ctr">
+              <a:lnSpc>
+                <a:spcPct val="104000"/>
+              </a:lnSpc>
+              <a:spcBef>
+                <a:spcPts val="400"/>
+              </a:spcBef>
+              <a:buNone/>
+            </a:pPr>
+            <a:r>
+              <a:rPr lang="en-US" sz="1600" dirty="0">
+                <a:solidFill>
+                  <a:srgbClr val="000000"/>
+                </a:solidFill>
+                <a:latin typeface="Arial"/>
+                <a:cs typeface="Arial"/>
+              </a:rPr>
+              <a:t>Mã, dữ liệu, công bằng</a:t>
+            </a:r>
+          </a:p>
+          <a:p>
+            <a:pPr marL="0" indent="0" algn="ctr">
+              <a:lnSpc>
+                <a:spcPct val="104000"/>
+              </a:lnSpc>
+              <a:spcBef>
+                <a:spcPts val="400"/>
+              </a:spcBef>
+              <a:buNone/>
+            </a:pPr>
+            <a:r>
+              <a:rPr lang="en-US" sz="1600" dirty="0">
+                <a:solidFill>
+                  <a:srgbClr val="000000"/>
+                </a:solidFill>
+                <a:latin typeface="Arial"/>
+                <a:cs typeface="Arial"/>
+              </a:rPr>
+              <a:t>Tác động lên người bệnh?</a:t>
+            </a:r>
+          </a:p>
+        </p:txBody>
+      </p:sp>
+      <p:sp>
+        <p:nvSpPr>
+          <p:cNvPr id="60" name="Takeaway"/>
+          <p:cNvSpPr/>
+          <p:nvPr/>
+        </p:nvSpPr>
+        <p:spPr>
+          <a:xfrm>
+            <a:off x="457200" y="5390000"/>
+            <a:ext cx="11277600" cy="560000"/>
+          </a:xfrm>
+          <a:prstGeom prst="roundRect">
+            <a:avLst>
+              <a:gd name="adj" fmla="val 12000"/>
+            </a:avLst>
+          </a:prstGeom>
+          <a:solidFill>
+            <a:srgbClr val="0D7377"/>
+          </a:solidFill>
+          <a:ln>
+            <a:noFill/>
+          </a:ln>
+        </p:spPr>
+        <p:txBody>
           <a:bodyPr wrap="square" lIns="182880" tIns="45720" rIns="182880" bIns="45720" rtlCol="0" anchor="ctr">
             <a:normAutofit/>
           </a:bodyPr>
@@ -37611,7 +36874,7 @@
                 <a:latin typeface="Arial"/>
                 <a:cs typeface="Arial"/>
               </a:rPr>
-              <a:t>Quy gán đa bội giữ mọi người bệnh và thừa nhận độ không chắc chắn của ô trống.</a:t>
+              <a:t>Điểm AI là một mô hình dự báo: hãy hỏi về hiệu chuẩn và thẩm định ngoài.</a:t>
             </a:r>
           </a:p>
         </p:txBody>
@@ -37772,14 +37035,14 @@
               <a:buNone/>
             </a:pPr>
             <a:r>
-              <a:rPr lang="en-US" sz="2800" b="1" dirty="0">
+              <a:rPr lang="en-US" sz="2400" b="1" dirty="0">
                 <a:solidFill>
                   <a:srgbClr val="0D7377"/>
                 </a:solidFill>
                 <a:latin typeface="Arial"/>
                 <a:cs typeface="Arial"/>
               </a:rPr>
-              <a:t>Bổ sung: Báo cáo và kiểm tra dữ liệu bị thiếu</a:t>
+              <a:t>Bổ sung: Phân tích các trường hợp đầy đủ và quy gán đa bội</a:t>
             </a:r>
           </a:p>
         </p:txBody>
@@ -37812,58 +37075,45 @@
           </a:p>
         </p:txBody>
       </p:sp>
-      <p:sp>
-        <p:nvSpPr>
-          <p:cNvPr id="19" name="Intro"/>
-          <p:cNvSpPr txBox="1"/>
-          <p:nvPr/>
-        </p:nvSpPr>
-        <p:spPr>
-          <a:xfrm>
-            <a:off x="457200" y="1100000"/>
-            <a:ext cx="11277600" cy="480000"/>
+      <p:pic>
+        <p:nvPicPr>
+          <p:cNvPr id="25" name="Figure"/>
+          <p:cNvPicPr>
+            <a:picLocks noChangeAspect="1"/>
+          </p:cNvPicPr>
+          <p:nvPr/>
+        </p:nvPicPr>
+        <p:blipFill>
+          <a:blip r:embed="rId4"/>
+          <a:stretch>
+            <a:fillRect/>
+          </a:stretch>
+        </p:blipFill>
+        <p:spPr>
+          <a:xfrm>
+            <a:off x="677066" y="1150000"/>
+            <a:ext cx="10837867" cy="4150000"/>
           </a:xfrm>
           <a:prstGeom prst="rect">
             <a:avLst/>
           </a:prstGeom>
-          <a:noFill/>
-          <a:ln>
-            <a:noFill/>
-          </a:ln>
-        </p:spPr>
-        <p:txBody>
-          <a:bodyPr wrap="square" lIns="91440" tIns="45720" rIns="91440" bIns="45720" rtlCol="0" anchor="t"/>
-          <a:lstStyle/>
-          <a:p>
-            <a:pPr marL="0" indent="0" algn="l">
-              <a:buNone/>
-            </a:pPr>
-            <a:r>
-              <a:rPr lang="en-US" sz="1700" i="1" dirty="0">
-                <a:solidFill>
-                  <a:srgbClr val="595959"/>
-                </a:solidFill>
-                <a:latin typeface="Arial"/>
-                <a:cs typeface="Arial"/>
-              </a:rPr>
-              <a:t>Bốn điều người phản biện sẽ tìm.</a:t>
-            </a:r>
-          </a:p>
-        </p:txBody>
-      </p:sp>
-      <p:sp>
-        <p:nvSpPr>
-          <p:cNvPr id="70" name="CardHead"/>
+        </p:spPr>
+      </p:pic>
+      <p:sp>
+        <p:nvSpPr>
+          <p:cNvPr id="60" name="Takeaway"/>
           <p:cNvSpPr/>
           <p:nvPr/>
         </p:nvSpPr>
         <p:spPr>
           <a:xfrm>
-            <a:off x="457200" y="1973573"/>
-            <a:ext cx="2669400" cy="640000"/>
-          </a:xfrm>
-          <a:prstGeom prst="rect">
-            <a:avLst/>
+            <a:off x="457200" y="5390000"/>
+            <a:ext cx="11277600" cy="560000"/>
+          </a:xfrm>
+          <a:prstGeom prst="roundRect">
+            <a:avLst>
+              <a:gd name="adj" fmla="val 12000"/>
+            </a:avLst>
           </a:prstGeom>
           <a:solidFill>
             <a:srgbClr val="0D7377"/>
@@ -37873,502 +37123,6 @@
           </a:ln>
         </p:spPr>
         <p:txBody>
-          <a:bodyPr wrap="square" lIns="91440" tIns="45720" rIns="91440" bIns="45720" rtlCol="0" anchor="ctr">
-            <a:normAutofit/>
-          </a:bodyPr>
-          <a:lstStyle/>
-          <a:p>
-            <a:pPr marL="0" indent="0" algn="ctr">
-              <a:buNone/>
-            </a:pPr>
-            <a:r>
-              <a:rPr lang="en-US" sz="1700" b="1" dirty="0">
-                <a:solidFill>
-                  <a:srgbClr val="FFFFFF"/>
-                </a:solidFill>
-                <a:latin typeface="Arial"/>
-                <a:cs typeface="Arial"/>
-              </a:rPr>
-              <a:t>Báo cáo</a:t>
-            </a:r>
-          </a:p>
-        </p:txBody>
-      </p:sp>
-      <p:sp>
-        <p:nvSpPr>
-          <p:cNvPr id="71" name="CardBody"/>
-          <p:cNvSpPr/>
-          <p:nvPr/>
-        </p:nvSpPr>
-        <p:spPr>
-          <a:xfrm>
-            <a:off x="457200" y="2613573"/>
-            <a:ext cx="2669400" cy="2009280"/>
-          </a:xfrm>
-          <a:prstGeom prst="rect">
-            <a:avLst/>
-          </a:prstGeom>
-          <a:solidFill>
-            <a:srgbClr val="EAF2F5"/>
-          </a:solidFill>
-          <a:ln>
-            <a:noFill/>
-          </a:ln>
-        </p:spPr>
-        <p:txBody>
-          <a:bodyPr wrap="square" lIns="137160" tIns="91440" rIns="137160" bIns="91440" rtlCol="0" anchor="ctr">
-            <a:normAutofit/>
-          </a:bodyPr>
-          <a:lstStyle/>
-          <a:p>
-            <a:pPr marL="0" indent="0" algn="ctr">
-              <a:lnSpc>
-                <a:spcPct val="104000"/>
-              </a:lnSpc>
-              <a:spcBef>
-                <a:spcPts val="400"/>
-              </a:spcBef>
-              <a:buNone/>
-            </a:pPr>
-            <a:r>
-              <a:rPr lang="en-US" sz="1600" dirty="0">
-                <a:solidFill>
-                  <a:srgbClr val="000000"/>
-                </a:solidFill>
-                <a:latin typeface="Arial"/>
-                <a:cs typeface="Arial"/>
-              </a:rPr>
-              <a:t>Số thiếu theo từng biến</a:t>
-            </a:r>
-          </a:p>
-          <a:p>
-            <a:pPr marL="0" indent="0" algn="ctr">
-              <a:lnSpc>
-                <a:spcPct val="104000"/>
-              </a:lnSpc>
-              <a:spcBef>
-                <a:spcPts val="400"/>
-              </a:spcBef>
-              <a:buNone/>
-            </a:pPr>
-            <a:r>
-              <a:rPr lang="en-US" sz="1600" dirty="0">
-                <a:solidFill>
-                  <a:srgbClr val="000000"/>
-                </a:solidFill>
-                <a:latin typeface="Arial"/>
-                <a:cs typeface="Arial"/>
-              </a:rPr>
-              <a:t>Sơ đồ: ai và vì sao</a:t>
-            </a:r>
-          </a:p>
-          <a:p>
-            <a:pPr marL="0" indent="0" algn="ctr">
-              <a:lnSpc>
-                <a:spcPct val="104000"/>
-              </a:lnSpc>
-              <a:spcBef>
-                <a:spcPts val="400"/>
-              </a:spcBef>
-              <a:buNone/>
-            </a:pPr>
-            <a:r>
-              <a:rPr lang="en-US" sz="1600" dirty="0">
-                <a:solidFill>
-                  <a:srgbClr val="000000"/>
-                </a:solidFill>
-                <a:latin typeface="Arial"/>
-                <a:cs typeface="Arial"/>
-              </a:rPr>
-              <a:t>Trong Bảng 1 hoặc chú thích</a:t>
-            </a:r>
-          </a:p>
-        </p:txBody>
-      </p:sp>
-      <p:sp>
-        <p:nvSpPr>
-          <p:cNvPr id="72" name="CardHead"/>
-          <p:cNvSpPr/>
-          <p:nvPr/>
-        </p:nvSpPr>
-        <p:spPr>
-          <a:xfrm>
-            <a:off x="3326600" y="1973573"/>
-            <a:ext cx="2669400" cy="640000"/>
-          </a:xfrm>
-          <a:prstGeom prst="rect">
-            <a:avLst/>
-          </a:prstGeom>
-          <a:solidFill>
-            <a:srgbClr val="0B376C"/>
-          </a:solidFill>
-          <a:ln>
-            <a:noFill/>
-          </a:ln>
-        </p:spPr>
-        <p:txBody>
-          <a:bodyPr wrap="square" lIns="91440" tIns="45720" rIns="91440" bIns="45720" rtlCol="0" anchor="ctr">
-            <a:normAutofit/>
-          </a:bodyPr>
-          <a:lstStyle/>
-          <a:p>
-            <a:pPr marL="0" indent="0" algn="ctr">
-              <a:buNone/>
-            </a:pPr>
-            <a:r>
-              <a:rPr lang="en-US" sz="1700" b="1" dirty="0">
-                <a:solidFill>
-                  <a:srgbClr val="FFFFFF"/>
-                </a:solidFill>
-                <a:latin typeface="Arial"/>
-                <a:cs typeface="Arial"/>
-              </a:rPr>
-              <a:t>So sánh</a:t>
-            </a:r>
-          </a:p>
-        </p:txBody>
-      </p:sp>
-      <p:sp>
-        <p:nvSpPr>
-          <p:cNvPr id="73" name="CardBody"/>
-          <p:cNvSpPr/>
-          <p:nvPr/>
-        </p:nvSpPr>
-        <p:spPr>
-          <a:xfrm>
-            <a:off x="3326600" y="2613573"/>
-            <a:ext cx="2669400" cy="2009280"/>
-          </a:xfrm>
-          <a:prstGeom prst="rect">
-            <a:avLst/>
-          </a:prstGeom>
-          <a:solidFill>
-            <a:srgbClr val="EAF2F5"/>
-          </a:solidFill>
-          <a:ln>
-            <a:noFill/>
-          </a:ln>
-        </p:spPr>
-        <p:txBody>
-          <a:bodyPr wrap="square" lIns="137160" tIns="91440" rIns="137160" bIns="91440" rtlCol="0" anchor="ctr">
-            <a:normAutofit/>
-          </a:bodyPr>
-          <a:lstStyle/>
-          <a:p>
-            <a:pPr marL="0" indent="0" algn="ctr">
-              <a:lnSpc>
-                <a:spcPct val="104000"/>
-              </a:lnSpc>
-              <a:spcBef>
-                <a:spcPts val="400"/>
-              </a:spcBef>
-              <a:buNone/>
-            </a:pPr>
-            <a:r>
-              <a:rPr lang="en-US" sz="1600" dirty="0">
-                <a:solidFill>
-                  <a:srgbClr val="000000"/>
-                </a:solidFill>
-                <a:latin typeface="Arial"/>
-                <a:cs typeface="Arial"/>
-              </a:rPr>
-              <a:t>Người bệnh có và không có dữ liệu đầy đủ</a:t>
-            </a:r>
-          </a:p>
-          <a:p>
-            <a:pPr marL="0" indent="0" algn="ctr">
-              <a:lnSpc>
-                <a:spcPct val="104000"/>
-              </a:lnSpc>
-              <a:spcBef>
-                <a:spcPts val="400"/>
-              </a:spcBef>
-              <a:buNone/>
-            </a:pPr>
-            <a:r>
-              <a:rPr lang="en-US" sz="1600" dirty="0">
-                <a:solidFill>
-                  <a:srgbClr val="000000"/>
-                </a:solidFill>
-                <a:latin typeface="Arial"/>
-                <a:cs typeface="Arial"/>
-              </a:rPr>
-              <a:t>Họ có khác nhau không?</a:t>
-            </a:r>
-          </a:p>
-        </p:txBody>
-      </p:sp>
-      <p:sp>
-        <p:nvSpPr>
-          <p:cNvPr id="74" name="CardHead"/>
-          <p:cNvSpPr/>
-          <p:nvPr/>
-        </p:nvSpPr>
-        <p:spPr>
-          <a:xfrm>
-            <a:off x="6196000" y="1973573"/>
-            <a:ext cx="2669400" cy="640000"/>
-          </a:xfrm>
-          <a:prstGeom prst="rect">
-            <a:avLst/>
-          </a:prstGeom>
-          <a:solidFill>
-            <a:srgbClr val="5FA39B"/>
-          </a:solidFill>
-          <a:ln>
-            <a:noFill/>
-          </a:ln>
-        </p:spPr>
-        <p:txBody>
-          <a:bodyPr wrap="square" lIns="91440" tIns="45720" rIns="91440" bIns="45720" rtlCol="0" anchor="ctr">
-            <a:normAutofit/>
-          </a:bodyPr>
-          <a:lstStyle/>
-          <a:p>
-            <a:pPr marL="0" indent="0" algn="ctr">
-              <a:buNone/>
-            </a:pPr>
-            <a:r>
-              <a:rPr lang="en-US" sz="1700" b="1" dirty="0">
-                <a:solidFill>
-                  <a:srgbClr val="FFFFFF"/>
-                </a:solidFill>
-                <a:latin typeface="Arial"/>
-                <a:cs typeface="Arial"/>
-              </a:rPr>
-              <a:t>Độ nhạy (Cấp độ 3)</a:t>
-            </a:r>
-          </a:p>
-        </p:txBody>
-      </p:sp>
-      <p:sp>
-        <p:nvSpPr>
-          <p:cNvPr id="75" name="CardBody"/>
-          <p:cNvSpPr/>
-          <p:nvPr/>
-        </p:nvSpPr>
-        <p:spPr>
-          <a:xfrm>
-            <a:off x="6196000" y="2613573"/>
-            <a:ext cx="2669400" cy="2009280"/>
-          </a:xfrm>
-          <a:prstGeom prst="rect">
-            <a:avLst/>
-          </a:prstGeom>
-          <a:solidFill>
-            <a:srgbClr val="EAF2F5"/>
-          </a:solidFill>
-          <a:ln>
-            <a:noFill/>
-          </a:ln>
-        </p:spPr>
-        <p:txBody>
-          <a:bodyPr wrap="square" lIns="137160" tIns="91440" rIns="137160" bIns="91440" rtlCol="0" anchor="ctr">
-            <a:normAutofit/>
-          </a:bodyPr>
-          <a:lstStyle/>
-          <a:p>
-            <a:pPr marL="0" indent="0" algn="ctr">
-              <a:lnSpc>
-                <a:spcPct val="104000"/>
-              </a:lnSpc>
-              <a:spcBef>
-                <a:spcPts val="400"/>
-              </a:spcBef>
-              <a:buNone/>
-            </a:pPr>
-            <a:r>
-              <a:rPr lang="en-US" sz="1600" dirty="0">
-                <a:solidFill>
-                  <a:srgbClr val="000000"/>
-                </a:solidFill>
-                <a:latin typeface="Arial"/>
-                <a:cs typeface="Arial"/>
-              </a:rPr>
-              <a:t>Trường hợp đầy đủ so với quy gán đa bội</a:t>
-            </a:r>
-          </a:p>
-          <a:p>
-            <a:pPr marL="0" indent="0" algn="ctr">
-              <a:lnSpc>
-                <a:spcPct val="104000"/>
-              </a:lnSpc>
-              <a:spcBef>
-                <a:spcPts val="400"/>
-              </a:spcBef>
-              <a:buNone/>
-            </a:pPr>
-            <a:r>
-              <a:rPr lang="en-US" sz="1600" dirty="0">
-                <a:solidFill>
-                  <a:srgbClr val="000000"/>
-                </a:solidFill>
-                <a:latin typeface="Arial"/>
-                <a:cs typeface="Arial"/>
-              </a:rPr>
-              <a:t>Script mẫu: 05_missing.R</a:t>
-            </a:r>
-          </a:p>
-          <a:p>
-            <a:pPr marL="0" indent="0" algn="ctr">
-              <a:lnSpc>
-                <a:spcPct val="104000"/>
-              </a:lnSpc>
-              <a:spcBef>
-                <a:spcPts val="400"/>
-              </a:spcBef>
-              <a:buNone/>
-            </a:pPr>
-            <a:r>
-              <a:rPr lang="en-US" sz="1600" dirty="0">
-                <a:solidFill>
-                  <a:srgbClr val="000000"/>
-                </a:solidFill>
-                <a:latin typeface="Arial"/>
-                <a:cs typeface="Arial"/>
-              </a:rPr>
-              <a:t>Thực hành ở Cấp độ 3, Học phần H</a:t>
-            </a:r>
-          </a:p>
-        </p:txBody>
-      </p:sp>
-      <p:sp>
-        <p:nvSpPr>
-          <p:cNvPr id="76" name="CardHead"/>
-          <p:cNvSpPr/>
-          <p:nvPr/>
-        </p:nvSpPr>
-        <p:spPr>
-          <a:xfrm>
-            <a:off x="9065400" y="1973573"/>
-            <a:ext cx="2669400" cy="640000"/>
-          </a:xfrm>
-          <a:prstGeom prst="rect">
-            <a:avLst/>
-          </a:prstGeom>
-          <a:solidFill>
-            <a:srgbClr val="0070C0"/>
-          </a:solidFill>
-          <a:ln>
-            <a:noFill/>
-          </a:ln>
-        </p:spPr>
-        <p:txBody>
-          <a:bodyPr wrap="square" lIns="91440" tIns="45720" rIns="91440" bIns="45720" rtlCol="0" anchor="ctr">
-            <a:normAutofit/>
-          </a:bodyPr>
-          <a:lstStyle/>
-          <a:p>
-            <a:pPr marL="0" indent="0" algn="ctr">
-              <a:buNone/>
-            </a:pPr>
-            <a:r>
-              <a:rPr lang="en-US" sz="1700" b="1" dirty="0">
-                <a:solidFill>
-                  <a:srgbClr val="FFFFFF"/>
-                </a:solidFill>
-                <a:latin typeface="Arial"/>
-                <a:cs typeface="Arial"/>
-              </a:rPr>
-              <a:t>Kế hoạch</a:t>
-            </a:r>
-          </a:p>
-        </p:txBody>
-      </p:sp>
-      <p:sp>
-        <p:nvSpPr>
-          <p:cNvPr id="77" name="CardBody"/>
-          <p:cNvSpPr/>
-          <p:nvPr/>
-        </p:nvSpPr>
-        <p:spPr>
-          <a:xfrm>
-            <a:off x="9065400" y="2613573"/>
-            <a:ext cx="2669400" cy="2009280"/>
-          </a:xfrm>
-          <a:prstGeom prst="rect">
-            <a:avLst/>
-          </a:prstGeom>
-          <a:solidFill>
-            <a:srgbClr val="EAF2F5"/>
-          </a:solidFill>
-          <a:ln>
-            <a:noFill/>
-          </a:ln>
-        </p:spPr>
-        <p:txBody>
-          <a:bodyPr wrap="square" lIns="137160" tIns="91440" rIns="137160" bIns="91440" rtlCol="0" anchor="ctr">
-            <a:normAutofit/>
-          </a:bodyPr>
-          <a:lstStyle/>
-          <a:p>
-            <a:pPr marL="0" indent="0" algn="ctr">
-              <a:lnSpc>
-                <a:spcPct val="104000"/>
-              </a:lnSpc>
-              <a:spcBef>
-                <a:spcPts val="400"/>
-              </a:spcBef>
-              <a:buNone/>
-            </a:pPr>
-            <a:r>
-              <a:rPr lang="en-US" sz="1600" dirty="0">
-                <a:solidFill>
-                  <a:srgbClr val="000000"/>
-                </a:solidFill>
-                <a:latin typeface="Arial"/>
-                <a:cs typeface="Arial"/>
-              </a:rPr>
-              <a:t>Viết trong SAP trước khi thấy dữ liệu</a:t>
-            </a:r>
-          </a:p>
-          <a:p>
-            <a:pPr marL="0" indent="0" algn="ctr">
-              <a:lnSpc>
-                <a:spcPct val="104000"/>
-              </a:lnSpc>
-              <a:spcBef>
-                <a:spcPts val="400"/>
-              </a:spcBef>
-              <a:buNone/>
-            </a:pPr>
-            <a:r>
-              <a:rPr lang="en-US" sz="1600" dirty="0">
-                <a:solidFill>
-                  <a:srgbClr val="000000"/>
-                </a:solidFill>
-                <a:latin typeface="Arial"/>
-                <a:cs typeface="Arial"/>
-              </a:rPr>
-              <a:t>Phần 3 của đề cương</a:t>
-            </a:r>
-          </a:p>
-        </p:txBody>
-      </p:sp>
-      <p:sp>
-        <p:nvSpPr>
-          <p:cNvPr id="60" name="Takeaway"/>
-          <p:cNvSpPr/>
-          <p:nvPr/>
-        </p:nvSpPr>
-        <p:spPr>
-          <a:xfrm>
-            <a:off x="457200" y="5390000"/>
-            <a:ext cx="11277600" cy="560000"/>
-          </a:xfrm>
-          <a:prstGeom prst="roundRect">
-            <a:avLst>
-              <a:gd name="adj" fmla="val 12000"/>
-            </a:avLst>
-          </a:prstGeom>
-          <a:solidFill>
-            <a:srgbClr val="0D7377"/>
-          </a:solidFill>
-          <a:ln>
-            <a:noFill/>
-          </a:ln>
-        </p:spPr>
-        <p:txBody>
           <a:bodyPr wrap="square" lIns="182880" tIns="45720" rIns="182880" bIns="45720" rtlCol="0" anchor="ctr">
             <a:normAutofit/>
           </a:bodyPr>
@@ -38395,7 +37149,7 @@
                 <a:latin typeface="Arial"/>
                 <a:cs typeface="Arial"/>
               </a:rPr>
-              <a:t>Dữ liệu thiếu cũng là một kết quả: báo cáo, xử lý, và kiểm tra lại kết luận.</a:t>
+              <a:t>Quy gán đa bội giữ mọi người bệnh và thừa nhận độ không chắc chắn của ô trống.</a:t>
             </a:r>
           </a:p>
         </p:txBody>
@@ -38505,6 +37259,790 @@
 </file>
 
 <file path=ppt/slides/slide64.xml><?xml version="1.0" encoding="utf-8"?>
+<p:sld xmlns:a="http://schemas.openxmlformats.org/drawingml/2006/main" xmlns:r="http://schemas.openxmlformats.org/officeDocument/2006/relationships" xmlns:p="http://schemas.openxmlformats.org/presentationml/2006/main">
+  <p:cSld>
+    <p:bg>
+      <p:bgPr>
+        <a:solidFill>
+          <a:schemeClr val="bg1"/>
+        </a:solidFill>
+        <a:effectLst/>
+      </p:bgPr>
+    </p:bg>
+    <p:spTree>
+      <p:nvGrpSpPr>
+        <p:cNvPr id="1" name=""/>
+        <p:cNvGrpSpPr/>
+        <p:nvPr/>
+      </p:nvGrpSpPr>
+      <p:grpSpPr>
+        <a:xfrm>
+          <a:off x="0" y="0"/>
+          <a:ext cx="0" cy="0"/>
+          <a:chOff x="0" y="0"/>
+          <a:chExt cx="0" cy="0"/>
+        </a:xfrm>
+      </p:grpSpPr>
+      <p:sp>
+        <p:nvSpPr>
+          <p:cNvPr id="10" name="Title"/>
+          <p:cNvSpPr txBox="1"/>
+          <p:nvPr/>
+        </p:nvSpPr>
+        <p:spPr>
+          <a:xfrm>
+            <a:off x="457200" y="160000"/>
+            <a:ext cx="11277600" cy="750000"/>
+          </a:xfrm>
+          <a:prstGeom prst="rect">
+            <a:avLst/>
+          </a:prstGeom>
+          <a:noFill/>
+          <a:ln>
+            <a:noFill/>
+          </a:ln>
+        </p:spPr>
+        <p:txBody>
+          <a:bodyPr wrap="square" lIns="91440" tIns="45720" rIns="91440" bIns="45720" rtlCol="0" anchor="ctr"/>
+          <a:lstStyle/>
+          <a:p>
+            <a:pPr marL="0" indent="0" algn="l">
+              <a:buNone/>
+            </a:pPr>
+            <a:r>
+              <a:rPr lang="en-US" sz="2800" b="1" dirty="0">
+                <a:solidFill>
+                  <a:srgbClr val="0D7377"/>
+                </a:solidFill>
+                <a:latin typeface="Arial"/>
+                <a:cs typeface="Arial"/>
+              </a:rPr>
+              <a:t>Bổ sung: Báo cáo và kiểm tra dữ liệu bị thiếu</a:t>
+            </a:r>
+          </a:p>
+        </p:txBody>
+      </p:sp>
+      <p:sp>
+        <p:nvSpPr>
+          <p:cNvPr id="11" name="Rule"/>
+          <p:cNvSpPr/>
+          <p:nvPr/>
+        </p:nvSpPr>
+        <p:spPr>
+          <a:xfrm>
+            <a:off x="457200" y="940000"/>
+            <a:ext cx="11277600" cy="0"/>
+          </a:xfrm>
+          <a:prstGeom prst="line">
+            <a:avLst/>
+          </a:prstGeom>
+          <a:ln w="19050">
+            <a:solidFill>
+              <a:srgbClr val="0D7377"/>
+            </a:solidFill>
+          </a:ln>
+        </p:spPr>
+        <p:txBody>
+          <a:bodyPr/>
+          <a:lstStyle/>
+          <a:p>
+            <a:endParaRPr/>
+          </a:p>
+        </p:txBody>
+      </p:sp>
+      <p:sp>
+        <p:nvSpPr>
+          <p:cNvPr id="19" name="Intro"/>
+          <p:cNvSpPr txBox="1"/>
+          <p:nvPr/>
+        </p:nvSpPr>
+        <p:spPr>
+          <a:xfrm>
+            <a:off x="457200" y="1100000"/>
+            <a:ext cx="11277600" cy="480000"/>
+          </a:xfrm>
+          <a:prstGeom prst="rect">
+            <a:avLst/>
+          </a:prstGeom>
+          <a:noFill/>
+          <a:ln>
+            <a:noFill/>
+          </a:ln>
+        </p:spPr>
+        <p:txBody>
+          <a:bodyPr wrap="square" lIns="91440" tIns="45720" rIns="91440" bIns="45720" rtlCol="0" anchor="t"/>
+          <a:lstStyle/>
+          <a:p>
+            <a:pPr marL="0" indent="0" algn="l">
+              <a:buNone/>
+            </a:pPr>
+            <a:r>
+              <a:rPr lang="en-US" sz="1700" i="1" dirty="0">
+                <a:solidFill>
+                  <a:srgbClr val="595959"/>
+                </a:solidFill>
+                <a:latin typeface="Arial"/>
+                <a:cs typeface="Arial"/>
+              </a:rPr>
+              <a:t>Bốn điều người phản biện sẽ tìm.</a:t>
+            </a:r>
+          </a:p>
+        </p:txBody>
+      </p:sp>
+      <p:sp>
+        <p:nvSpPr>
+          <p:cNvPr id="70" name="CardHead"/>
+          <p:cNvSpPr/>
+          <p:nvPr/>
+        </p:nvSpPr>
+        <p:spPr>
+          <a:xfrm>
+            <a:off x="457200" y="1973573"/>
+            <a:ext cx="2669400" cy="640000"/>
+          </a:xfrm>
+          <a:prstGeom prst="rect">
+            <a:avLst/>
+          </a:prstGeom>
+          <a:solidFill>
+            <a:srgbClr val="0D7377"/>
+          </a:solidFill>
+          <a:ln>
+            <a:noFill/>
+          </a:ln>
+        </p:spPr>
+        <p:txBody>
+          <a:bodyPr wrap="square" lIns="91440" tIns="45720" rIns="91440" bIns="45720" rtlCol="0" anchor="ctr">
+            <a:normAutofit/>
+          </a:bodyPr>
+          <a:lstStyle/>
+          <a:p>
+            <a:pPr marL="0" indent="0" algn="ctr">
+              <a:buNone/>
+            </a:pPr>
+            <a:r>
+              <a:rPr lang="en-US" sz="1700" b="1" dirty="0">
+                <a:solidFill>
+                  <a:srgbClr val="FFFFFF"/>
+                </a:solidFill>
+                <a:latin typeface="Arial"/>
+                <a:cs typeface="Arial"/>
+              </a:rPr>
+              <a:t>Báo cáo</a:t>
+            </a:r>
+          </a:p>
+        </p:txBody>
+      </p:sp>
+      <p:sp>
+        <p:nvSpPr>
+          <p:cNvPr id="71" name="CardBody"/>
+          <p:cNvSpPr/>
+          <p:nvPr/>
+        </p:nvSpPr>
+        <p:spPr>
+          <a:xfrm>
+            <a:off x="457200" y="2613573"/>
+            <a:ext cx="2669400" cy="2009280"/>
+          </a:xfrm>
+          <a:prstGeom prst="rect">
+            <a:avLst/>
+          </a:prstGeom>
+          <a:solidFill>
+            <a:srgbClr val="EAF2F5"/>
+          </a:solidFill>
+          <a:ln>
+            <a:noFill/>
+          </a:ln>
+        </p:spPr>
+        <p:txBody>
+          <a:bodyPr wrap="square" lIns="137160" tIns="91440" rIns="137160" bIns="91440" rtlCol="0" anchor="ctr">
+            <a:normAutofit/>
+          </a:bodyPr>
+          <a:lstStyle/>
+          <a:p>
+            <a:pPr marL="0" indent="0" algn="ctr">
+              <a:lnSpc>
+                <a:spcPct val="104000"/>
+              </a:lnSpc>
+              <a:spcBef>
+                <a:spcPts val="400"/>
+              </a:spcBef>
+              <a:buNone/>
+            </a:pPr>
+            <a:r>
+              <a:rPr lang="en-US" sz="1600" dirty="0">
+                <a:solidFill>
+                  <a:srgbClr val="000000"/>
+                </a:solidFill>
+                <a:latin typeface="Arial"/>
+                <a:cs typeface="Arial"/>
+              </a:rPr>
+              <a:t>Số thiếu theo từng biến</a:t>
+            </a:r>
+          </a:p>
+          <a:p>
+            <a:pPr marL="0" indent="0" algn="ctr">
+              <a:lnSpc>
+                <a:spcPct val="104000"/>
+              </a:lnSpc>
+              <a:spcBef>
+                <a:spcPts val="400"/>
+              </a:spcBef>
+              <a:buNone/>
+            </a:pPr>
+            <a:r>
+              <a:rPr lang="en-US" sz="1600" dirty="0">
+                <a:solidFill>
+                  <a:srgbClr val="000000"/>
+                </a:solidFill>
+                <a:latin typeface="Arial"/>
+                <a:cs typeface="Arial"/>
+              </a:rPr>
+              <a:t>Sơ đồ: ai và vì sao</a:t>
+            </a:r>
+          </a:p>
+          <a:p>
+            <a:pPr marL="0" indent="0" algn="ctr">
+              <a:lnSpc>
+                <a:spcPct val="104000"/>
+              </a:lnSpc>
+              <a:spcBef>
+                <a:spcPts val="400"/>
+              </a:spcBef>
+              <a:buNone/>
+            </a:pPr>
+            <a:r>
+              <a:rPr lang="en-US" sz="1600" dirty="0">
+                <a:solidFill>
+                  <a:srgbClr val="000000"/>
+                </a:solidFill>
+                <a:latin typeface="Arial"/>
+                <a:cs typeface="Arial"/>
+              </a:rPr>
+              <a:t>Trong Bảng 1 hoặc chú thích</a:t>
+            </a:r>
+          </a:p>
+        </p:txBody>
+      </p:sp>
+      <p:sp>
+        <p:nvSpPr>
+          <p:cNvPr id="72" name="CardHead"/>
+          <p:cNvSpPr/>
+          <p:nvPr/>
+        </p:nvSpPr>
+        <p:spPr>
+          <a:xfrm>
+            <a:off x="3326600" y="1973573"/>
+            <a:ext cx="2669400" cy="640000"/>
+          </a:xfrm>
+          <a:prstGeom prst="rect">
+            <a:avLst/>
+          </a:prstGeom>
+          <a:solidFill>
+            <a:srgbClr val="0B376C"/>
+          </a:solidFill>
+          <a:ln>
+            <a:noFill/>
+          </a:ln>
+        </p:spPr>
+        <p:txBody>
+          <a:bodyPr wrap="square" lIns="91440" tIns="45720" rIns="91440" bIns="45720" rtlCol="0" anchor="ctr">
+            <a:normAutofit/>
+          </a:bodyPr>
+          <a:lstStyle/>
+          <a:p>
+            <a:pPr marL="0" indent="0" algn="ctr">
+              <a:buNone/>
+            </a:pPr>
+            <a:r>
+              <a:rPr lang="en-US" sz="1700" b="1" dirty="0">
+                <a:solidFill>
+                  <a:srgbClr val="FFFFFF"/>
+                </a:solidFill>
+                <a:latin typeface="Arial"/>
+                <a:cs typeface="Arial"/>
+              </a:rPr>
+              <a:t>So sánh</a:t>
+            </a:r>
+          </a:p>
+        </p:txBody>
+      </p:sp>
+      <p:sp>
+        <p:nvSpPr>
+          <p:cNvPr id="73" name="CardBody"/>
+          <p:cNvSpPr/>
+          <p:nvPr/>
+        </p:nvSpPr>
+        <p:spPr>
+          <a:xfrm>
+            <a:off x="3326600" y="2613573"/>
+            <a:ext cx="2669400" cy="2009280"/>
+          </a:xfrm>
+          <a:prstGeom prst="rect">
+            <a:avLst/>
+          </a:prstGeom>
+          <a:solidFill>
+            <a:srgbClr val="EAF2F5"/>
+          </a:solidFill>
+          <a:ln>
+            <a:noFill/>
+          </a:ln>
+        </p:spPr>
+        <p:txBody>
+          <a:bodyPr wrap="square" lIns="137160" tIns="91440" rIns="137160" bIns="91440" rtlCol="0" anchor="ctr">
+            <a:normAutofit/>
+          </a:bodyPr>
+          <a:lstStyle/>
+          <a:p>
+            <a:pPr marL="0" indent="0" algn="ctr">
+              <a:lnSpc>
+                <a:spcPct val="104000"/>
+              </a:lnSpc>
+              <a:spcBef>
+                <a:spcPts val="400"/>
+              </a:spcBef>
+              <a:buNone/>
+            </a:pPr>
+            <a:r>
+              <a:rPr lang="en-US" sz="1600" dirty="0">
+                <a:solidFill>
+                  <a:srgbClr val="000000"/>
+                </a:solidFill>
+                <a:latin typeface="Arial"/>
+                <a:cs typeface="Arial"/>
+              </a:rPr>
+              <a:t>Người bệnh có và không có dữ liệu đầy đủ</a:t>
+            </a:r>
+          </a:p>
+          <a:p>
+            <a:pPr marL="0" indent="0" algn="ctr">
+              <a:lnSpc>
+                <a:spcPct val="104000"/>
+              </a:lnSpc>
+              <a:spcBef>
+                <a:spcPts val="400"/>
+              </a:spcBef>
+              <a:buNone/>
+            </a:pPr>
+            <a:r>
+              <a:rPr lang="en-US" sz="1600" dirty="0">
+                <a:solidFill>
+                  <a:srgbClr val="000000"/>
+                </a:solidFill>
+                <a:latin typeface="Arial"/>
+                <a:cs typeface="Arial"/>
+              </a:rPr>
+              <a:t>Họ có khác nhau không?</a:t>
+            </a:r>
+          </a:p>
+        </p:txBody>
+      </p:sp>
+      <p:sp>
+        <p:nvSpPr>
+          <p:cNvPr id="74" name="CardHead"/>
+          <p:cNvSpPr/>
+          <p:nvPr/>
+        </p:nvSpPr>
+        <p:spPr>
+          <a:xfrm>
+            <a:off x="6196000" y="1973573"/>
+            <a:ext cx="2669400" cy="640000"/>
+          </a:xfrm>
+          <a:prstGeom prst="rect">
+            <a:avLst/>
+          </a:prstGeom>
+          <a:solidFill>
+            <a:srgbClr val="5FA39B"/>
+          </a:solidFill>
+          <a:ln>
+            <a:noFill/>
+          </a:ln>
+        </p:spPr>
+        <p:txBody>
+          <a:bodyPr wrap="square" lIns="91440" tIns="45720" rIns="91440" bIns="45720" rtlCol="0" anchor="ctr">
+            <a:normAutofit/>
+          </a:bodyPr>
+          <a:lstStyle/>
+          <a:p>
+            <a:pPr marL="0" indent="0" algn="ctr">
+              <a:buNone/>
+            </a:pPr>
+            <a:r>
+              <a:rPr lang="en-US" sz="1700" b="1" dirty="0">
+                <a:solidFill>
+                  <a:srgbClr val="FFFFFF"/>
+                </a:solidFill>
+                <a:latin typeface="Arial"/>
+                <a:cs typeface="Arial"/>
+              </a:rPr>
+              <a:t>Độ nhạy (Cấp độ 3)</a:t>
+            </a:r>
+          </a:p>
+        </p:txBody>
+      </p:sp>
+      <p:sp>
+        <p:nvSpPr>
+          <p:cNvPr id="75" name="CardBody"/>
+          <p:cNvSpPr/>
+          <p:nvPr/>
+        </p:nvSpPr>
+        <p:spPr>
+          <a:xfrm>
+            <a:off x="6196000" y="2613573"/>
+            <a:ext cx="2669400" cy="2009280"/>
+          </a:xfrm>
+          <a:prstGeom prst="rect">
+            <a:avLst/>
+          </a:prstGeom>
+          <a:solidFill>
+            <a:srgbClr val="EAF2F5"/>
+          </a:solidFill>
+          <a:ln>
+            <a:noFill/>
+          </a:ln>
+        </p:spPr>
+        <p:txBody>
+          <a:bodyPr wrap="square" lIns="137160" tIns="91440" rIns="137160" bIns="91440" rtlCol="0" anchor="ctr">
+            <a:normAutofit/>
+          </a:bodyPr>
+          <a:lstStyle/>
+          <a:p>
+            <a:pPr marL="0" indent="0" algn="ctr">
+              <a:lnSpc>
+                <a:spcPct val="104000"/>
+              </a:lnSpc>
+              <a:spcBef>
+                <a:spcPts val="400"/>
+              </a:spcBef>
+              <a:buNone/>
+            </a:pPr>
+            <a:r>
+              <a:rPr lang="en-US" sz="1600" dirty="0">
+                <a:solidFill>
+                  <a:srgbClr val="000000"/>
+                </a:solidFill>
+                <a:latin typeface="Arial"/>
+                <a:cs typeface="Arial"/>
+              </a:rPr>
+              <a:t>Trường hợp đầy đủ so với quy gán đa bội</a:t>
+            </a:r>
+          </a:p>
+          <a:p>
+            <a:pPr marL="0" indent="0" algn="ctr">
+              <a:lnSpc>
+                <a:spcPct val="104000"/>
+              </a:lnSpc>
+              <a:spcBef>
+                <a:spcPts val="400"/>
+              </a:spcBef>
+              <a:buNone/>
+            </a:pPr>
+            <a:r>
+              <a:rPr lang="en-US" sz="1600" dirty="0">
+                <a:solidFill>
+                  <a:srgbClr val="000000"/>
+                </a:solidFill>
+                <a:latin typeface="Arial"/>
+                <a:cs typeface="Arial"/>
+              </a:rPr>
+              <a:t>Script mẫu: 05_missing.R</a:t>
+            </a:r>
+          </a:p>
+          <a:p>
+            <a:pPr marL="0" indent="0" algn="ctr">
+              <a:lnSpc>
+                <a:spcPct val="104000"/>
+              </a:lnSpc>
+              <a:spcBef>
+                <a:spcPts val="400"/>
+              </a:spcBef>
+              <a:buNone/>
+            </a:pPr>
+            <a:r>
+              <a:rPr lang="en-US" sz="1600" dirty="0">
+                <a:solidFill>
+                  <a:srgbClr val="000000"/>
+                </a:solidFill>
+                <a:latin typeface="Arial"/>
+                <a:cs typeface="Arial"/>
+              </a:rPr>
+              <a:t>Thực hành ở Cấp độ 3, Học phần H</a:t>
+            </a:r>
+          </a:p>
+        </p:txBody>
+      </p:sp>
+      <p:sp>
+        <p:nvSpPr>
+          <p:cNvPr id="76" name="CardHead"/>
+          <p:cNvSpPr/>
+          <p:nvPr/>
+        </p:nvSpPr>
+        <p:spPr>
+          <a:xfrm>
+            <a:off x="9065400" y="1973573"/>
+            <a:ext cx="2669400" cy="640000"/>
+          </a:xfrm>
+          <a:prstGeom prst="rect">
+            <a:avLst/>
+          </a:prstGeom>
+          <a:solidFill>
+            <a:srgbClr val="0070C0"/>
+          </a:solidFill>
+          <a:ln>
+            <a:noFill/>
+          </a:ln>
+        </p:spPr>
+        <p:txBody>
+          <a:bodyPr wrap="square" lIns="91440" tIns="45720" rIns="91440" bIns="45720" rtlCol="0" anchor="ctr">
+            <a:normAutofit/>
+          </a:bodyPr>
+          <a:lstStyle/>
+          <a:p>
+            <a:pPr marL="0" indent="0" algn="ctr">
+              <a:buNone/>
+            </a:pPr>
+            <a:r>
+              <a:rPr lang="en-US" sz="1700" b="1" dirty="0">
+                <a:solidFill>
+                  <a:srgbClr val="FFFFFF"/>
+                </a:solidFill>
+                <a:latin typeface="Arial"/>
+                <a:cs typeface="Arial"/>
+              </a:rPr>
+              <a:t>Kế hoạch</a:t>
+            </a:r>
+          </a:p>
+        </p:txBody>
+      </p:sp>
+      <p:sp>
+        <p:nvSpPr>
+          <p:cNvPr id="77" name="CardBody"/>
+          <p:cNvSpPr/>
+          <p:nvPr/>
+        </p:nvSpPr>
+        <p:spPr>
+          <a:xfrm>
+            <a:off x="9065400" y="2613573"/>
+            <a:ext cx="2669400" cy="2009280"/>
+          </a:xfrm>
+          <a:prstGeom prst="rect">
+            <a:avLst/>
+          </a:prstGeom>
+          <a:solidFill>
+            <a:srgbClr val="EAF2F5"/>
+          </a:solidFill>
+          <a:ln>
+            <a:noFill/>
+          </a:ln>
+        </p:spPr>
+        <p:txBody>
+          <a:bodyPr wrap="square" lIns="137160" tIns="91440" rIns="137160" bIns="91440" rtlCol="0" anchor="ctr">
+            <a:normAutofit/>
+          </a:bodyPr>
+          <a:lstStyle/>
+          <a:p>
+            <a:pPr marL="0" indent="0" algn="ctr">
+              <a:lnSpc>
+                <a:spcPct val="104000"/>
+              </a:lnSpc>
+              <a:spcBef>
+                <a:spcPts val="400"/>
+              </a:spcBef>
+              <a:buNone/>
+            </a:pPr>
+            <a:r>
+              <a:rPr lang="en-US" sz="1600" dirty="0">
+                <a:solidFill>
+                  <a:srgbClr val="000000"/>
+                </a:solidFill>
+                <a:latin typeface="Arial"/>
+                <a:cs typeface="Arial"/>
+              </a:rPr>
+              <a:t>Viết trong SAP trước khi thấy dữ liệu</a:t>
+            </a:r>
+          </a:p>
+          <a:p>
+            <a:pPr marL="0" indent="0" algn="ctr">
+              <a:lnSpc>
+                <a:spcPct val="104000"/>
+              </a:lnSpc>
+              <a:spcBef>
+                <a:spcPts val="400"/>
+              </a:spcBef>
+              <a:buNone/>
+            </a:pPr>
+            <a:r>
+              <a:rPr lang="en-US" sz="1600" dirty="0">
+                <a:solidFill>
+                  <a:srgbClr val="000000"/>
+                </a:solidFill>
+                <a:latin typeface="Arial"/>
+                <a:cs typeface="Arial"/>
+              </a:rPr>
+              <a:t>Phần 3 của đề cương</a:t>
+            </a:r>
+          </a:p>
+        </p:txBody>
+      </p:sp>
+      <p:sp>
+        <p:nvSpPr>
+          <p:cNvPr id="60" name="Takeaway"/>
+          <p:cNvSpPr/>
+          <p:nvPr/>
+        </p:nvSpPr>
+        <p:spPr>
+          <a:xfrm>
+            <a:off x="457200" y="5390000"/>
+            <a:ext cx="11277600" cy="560000"/>
+          </a:xfrm>
+          <a:prstGeom prst="roundRect">
+            <a:avLst>
+              <a:gd name="adj" fmla="val 12000"/>
+            </a:avLst>
+          </a:prstGeom>
+          <a:solidFill>
+            <a:srgbClr val="0D7377"/>
+          </a:solidFill>
+          <a:ln>
+            <a:noFill/>
+          </a:ln>
+        </p:spPr>
+        <p:txBody>
+          <a:bodyPr wrap="square" lIns="182880" tIns="45720" rIns="182880" bIns="45720" rtlCol="0" anchor="ctr">
+            <a:normAutofit/>
+          </a:bodyPr>
+          <a:lstStyle/>
+          <a:p>
+            <a:pPr marL="0" indent="0" algn="ctr">
+              <a:buNone/>
+            </a:pPr>
+            <a:r>
+              <a:rPr lang="en-US" sz="1300" b="1" dirty="0">
+                <a:solidFill>
+                  <a:srgbClr val="FFFFFF"/>
+                </a:solidFill>
+                <a:latin typeface="Arial"/>
+                <a:cs typeface="Arial"/>
+              </a:rPr>
+              <a:t>THÔNG ĐIỆP CHÍNH   </a:t>
+            </a:r>
+            <a:r>
+              <a:rPr lang="en-US" sz="1550" dirty="0">
+                <a:solidFill>
+                  <a:srgbClr val="FFFFFF"/>
+                </a:solidFill>
+                <a:latin typeface="Arial"/>
+                <a:cs typeface="Arial"/>
+              </a:rPr>
+              <a:t>Dữ liệu thiếu cũng là một kết quả: báo cáo, xử lý, và kiểm tra lại kết luận.</a:t>
+            </a:r>
+          </a:p>
+        </p:txBody>
+      </p:sp>
+      <p:sp>
+        <p:nvSpPr>
+          <p:cNvPr id="901" name="Footer"/>
+          <p:cNvSpPr txBox="1"/>
+          <p:nvPr/>
+        </p:nvSpPr>
+        <p:spPr>
+          <a:xfrm>
+            <a:off x="4599946" y="6458701"/>
+            <a:ext cx="2845651" cy="276999"/>
+          </a:xfrm>
+          <a:prstGeom prst="rect">
+            <a:avLst/>
+          </a:prstGeom>
+          <a:noFill/>
+          <a:ln>
+            <a:noFill/>
+          </a:ln>
+        </p:spPr>
+        <p:txBody>
+          <a:bodyPr wrap="none" lIns="91440" tIns="45720" rIns="91440" bIns="45720" rtlCol="0" anchor="t"/>
+          <a:lstStyle/>
+          <a:p>
+            <a:r>
+              <a:rPr lang="en-US" sz="1200" dirty="0">
+                <a:solidFill>
+                  <a:schemeClr val="accent5">
+                    <a:lumMod val="50000"/>
+                  </a:schemeClr>
+                </a:solidFill>
+                <a:latin typeface="Arial"/>
+              </a:rPr>
+              <a:t>Neudata | #ClearDataClearImpact</a:t>
+            </a:r>
+          </a:p>
+        </p:txBody>
+      </p:sp>
+      <p:pic>
+        <p:nvPicPr>
+          <p:cNvPr id="902" name="Logo"/>
+          <p:cNvPicPr>
+            <a:picLocks noChangeAspect="1"/>
+          </p:cNvPicPr>
+          <p:nvPr/>
+        </p:nvPicPr>
+        <p:blipFill>
+          <a:blip r:embed="rId3"/>
+          <a:stretch>
+            <a:fillRect/>
+          </a:stretch>
+        </p:blipFill>
+        <p:spPr>
+          <a:xfrm>
+            <a:off x="138853" y="6122125"/>
+            <a:ext cx="716763" cy="683623"/>
+          </a:xfrm>
+          <a:prstGeom prst="rect">
+            <a:avLst/>
+          </a:prstGeom>
+        </p:spPr>
+      </p:pic>
+      <p:sp>
+        <p:nvSpPr>
+          <p:cNvPr id="903" name="Slide Number"/>
+          <p:cNvSpPr>
+            <a:spLocks noGrp="1"/>
+          </p:cNvSpPr>
+          <p:nvPr>
+            <p:ph type="sldNum" sz="quarter" idx="12"/>
+          </p:nvPr>
+        </p:nvSpPr>
+        <p:spPr>
+          <a:xfrm>
+            <a:off x="11330000" y="6470000"/>
+            <a:ext cx="620000" cy="320000"/>
+          </a:xfrm>
+        </p:spPr>
+        <p:txBody>
+          <a:bodyPr/>
+          <a:lstStyle/>
+          <a:p>
+            <a:pPr algn="r"/>
+            <a:fld id="{C1FF6DA9-008F-8B48-92A6-B652298478BF}" type="slidenum">
+              <a:rPr lang="en-US" sz="1050" smtClean="0">
+                <a:solidFill>
+                  <a:schemeClr val="accent5">
+                    <a:lumMod val="50000"/>
+                  </a:schemeClr>
+                </a:solidFill>
+              </a:rPr>
+              <a:t>2</a:t>
+            </a:fld>
+            <a:endParaRPr lang="en-US"/>
+          </a:p>
+        </p:txBody>
+      </p:sp>
+    </p:spTree>
+  </p:cSld>
+  <p:clrMapOvr>
+    <a:masterClrMapping/>
+  </p:clrMapOvr>
+</p:sld>
+</file>
+
+<file path=ppt/slides/slide65.xml><?xml version="1.0" encoding="utf-8"?>
 <p:sld xmlns:a="http://schemas.openxmlformats.org/drawingml/2006/main" xmlns:r="http://schemas.openxmlformats.org/officeDocument/2006/relationships" xmlns:p="http://schemas.openxmlformats.org/presentationml/2006/main">
   <p:cSld>
     <p:bg>

--- a/vi/files/slides/Session_6_VN.pptx
+++ b/vi/files/slides/Session_6_VN.pptx
@@ -4674,7 +4674,7 @@
           <a:p>
             <a:r>
               <a:rPr lang="en-US" sz="1400" b="0" dirty="0"/>
-              <a:t>Thứ Bảy tuần sau: đạo đức, liêm chính và phần Kết quả, viết trực tiếp trên Q1.</a:t>
+              <a:t>Thứ Bảy tuần sau: đạo đức, liêm chính, Phương pháp và Kết quả (viết trực tiếp phần Kết quả của Q1).</a:t>
             </a:r>
           </a:p>
         </p:txBody>
@@ -4755,7 +4755,7 @@
           <a:p>
             <a:r>
               <a:rPr lang="en-US" sz="1400" b="0" dirty="0"/>
-              <a:t>Sản phẩm 2 (2 phút). Nói rõ: chúng tôi đưa kết quả, anh chị viết một phần Kết quả sẵn sàng để nộp. Các phần khác không bắt buộc, và giảng viên vẫn nhận xét.</a:t>
+              <a:t>Sản phẩm 2 (2 phút). Nói rõ: chúng tôi đưa kết quả, anh chị viết một phần Kết quả sẵn sàng để nộp. Các phần khác đều được dạy ở Buổi 7 và 8. Không bắt buộc nộp các phần này, nhưng nếu nộp, giảng viên vẫn nhận xét.</a:t>
             </a:r>
           </a:p>
           <a:p>
@@ -30098,7 +30098,7 @@
                 <a:latin typeface="Arial"/>
                 <a:cs typeface="Arial"/>
               </a:rPr>
-              <a:t>Không bắt buộc</a:t>
+              <a:t>Không bắt buộc nộp</a:t>
             </a:r>
           </a:p>
         </p:txBody>
@@ -30189,7 +30189,7 @@
                 <a:latin typeface="Arial"/>
                 <a:cs typeface="Arial"/>
               </a:rPr>
-              <a:t>Giảng viên cũng nhận xét các phần này</a:t>
+              <a:t>Đều được dạy ở Buổi 7 và 8</a:t>
             </a:r>
           </a:p>
         </p:txBody>
@@ -30323,7 +30323,7 @@
                 <a:latin typeface="Arial"/>
                 <a:cs typeface="Arial"/>
               </a:rPr>
-              <a:t>Hạn nộp 23:59 ngày học Buổi 8</a:t>
+              <a:t>Hạn nộp 23:59 Chủ nhật 20/12</a:t>
             </a:r>
           </a:p>
         </p:txBody>
@@ -30378,7 +30378,7 @@
                 <a:latin typeface="Arial"/>
                 <a:cs typeface="Arial"/>
               </a:rPr>
-              <a:t>Báo câu hỏi của anh chị cho trưởng khóa học ngay tối nay, trong khung chat hoặc qua email.</a:t>
+              <a:t>Báo cho giảng viên câu hỏi anh chị chọn ngay tối nay, trong khung chat hoặc qua email.</a:t>
             </a:r>
           </a:p>
         </p:txBody>
@@ -30849,7 +30849,7 @@
                 <a:latin typeface="Arial"/>
                 <a:cs typeface="Arial"/>
               </a:rPr>
-              <a:t>Viết phần Kết quả</a:t>
+              <a:t>Viết từng phần của bài báo</a:t>
             </a:r>
           </a:p>
           <a:p>
